--- a/downloads/presentations/modules/anl-220.pptx
+++ b/downloads/presentations/modules/anl-220.pptx
@@ -615,7 +615,8 @@
               <a:t>Technical Deep Dive
 A predictive workflow begins with the outcome. The outcome must be specific, measurable, and aligned with a public health action. Predicting “risk” is not enough. Staff must define risk of what, during what time period, for which population, and for what purpose. A model predicting hospitalization within 30 days is different from one predicting delayed case investigation or low service uptake.
 Feature selection should be reviewed for both technical and ethical implications. Some features may improve prediction but create fairness, privacy, or interpretability concerns. Geography, insurance status, prior utilization, language, disability, housing instability, or justice involvement may reflect structural inequities. These features require careful review because they may be useful for supportive outreach but inappropriate for restrictive decisions.
-Calibration and discrimination answer different questions. Discrimination describes whether a model can separate higher-risk from lower-risk cases. Calibration describes whether predicted probabilities correspond to observed outcomes. A model can rank cases reasonably well while still overstating or understating absolute risk, which matters when decisions depend on risk categories or thresholds.</a:t>
+Calibration and discrimination answer different questions. Discrimination describes whether a model can separate higher-risk from lower-risk cases. Calibration describes whether predicted probabilities correspond to observed outcomes. A model can rank cases reasonably well while still overstating or understating absolute risk, which matters when decisions depend on risk categories or thresholds.
+Application guidance: Identify what could go wrong, who could be affected, what safeguards are needed, and what evidence should be reviewed before use expands.</a:t>
             </a:r>
             <a:endParaRPr lang="en-US" dirty="0"/>
           </a:p>
@@ -705,7 +706,8 @@
               <a:rPr lang="en-US" dirty="0"/>
               <a:t>Technical Deep Dive
 Thresholds are policy and workflow decisions as much as technical decisions. A lower threshold may catch more true high-risk cases but create more false positives and burden staff. A higher threshold may conserve resources but miss people or places needing support. Threshold selection should consider staffing capacity, consequence severity, equity, and the availability of human review.
-Post-deployment monitoring is essential. A model that worked during development may degrade as disease patterns, reporting systems, access to care, community behavior, or program operations change. Monitoring should include performance, calibration, subgroup effects, workflow impact, user overrides, and community feedback.</a:t>
+Post-deployment monitoring is essential. A model that worked during development may degrade as disease patterns, reporting systems, access to care, community behavior, or program operations change. Monitoring should include performance, calibration, subgroup effects, workflow impact, user overrides, and community feedback.
+Application guidance: Identify what could go wrong, who could be affected, what safeguards are needed, and what evidence should be reviewed before use expands.</a:t>
             </a:r>
             <a:endParaRPr lang="en-US" dirty="0"/>
           </a:p>
@@ -796,7 +798,8 @@
               <a:t>Risks, Failure Modes, and Guardrails
 Prediction used as decision. A risk score may be treated as a final decision rather than decision support. Guardrails include role-based guidance, human review, and documentation of final decisions.
 Equity distortion. Risk models may reflect unequal data availability or historical inequities. Guardrails include subgroup analysis, community review, and restrictions on punitive uses.
-Threshold harm. Poorly selected thresholds can create alert fatigue or missed risk. Guardrails include threshold review, scenario testing, and monitoring of false positives and false negatives.</a:t>
+Threshold harm. Poorly selected thresholds can create alert fatigue or missed risk. Guardrails include threshold review, scenario testing, and monitoring of false positives and false negatives.
+Application guidance: Identify what could go wrong, who could be affected, what safeguards are needed, and what evidence should be reviewed before use expands.</a:t>
             </a:r>
             <a:endParaRPr lang="en-US" dirty="0"/>
           </a:p>
@@ -885,7 +888,8 @@
             <a:r>
               <a:rPr lang="en-US" dirty="0"/>
               <a:t>Risks, Failure Modes, and Guardrails
-Model drift. Performance may change over time. Guardrails include periodic recalibration, drift monitoring, and authority to pause or modify use.</a:t>
+Model drift. Performance may change over time. Guardrails include periodic recalibration, drift monitoring, and authority to pause or modify use.
+Application guidance: Identify what could go wrong, who could be affected, what safeguards are needed, and what evidence should be reviewed before use expands.</a:t>
             </a:r>
             <a:endParaRPr lang="en-US" dirty="0"/>
           </a:p>
@@ -975,7 +979,8 @@
               <a:rPr lang="en-US" dirty="0"/>
               <a:t>Application to AI-Supported Workflows
 Predictive analytics may be embedded in dashboards, case management systems, early warning tools, outreach lists, or agentic workflows. Generative AI may explain or summarize predictive outputs, but those explanations must not imply certainty that the model does not provide. RAG systems may combine risk results with policy guidance, while agentic workflows may trigger tasks or notifications based on thresholds.
-When prediction supports public health action, the workflow should make the score, its limitations, and the source data visible to users. Staff should know when a score is advisory, when it requires review, and when it cannot be used as the sole basis for action.</a:t>
+When prediction supports public health action, the workflow should make the score, its limitations, and the source data visible to users. Staff should know when a score is advisory, when it requires review, and when it cannot be used as the sole basis for action.
+Application guidance: Identify what could go wrong, who could be affected, what safeguards are needed, and what evidence should be reviewed before use expands.</a:t>
             </a:r>
             <a:endParaRPr lang="en-US" dirty="0"/>
           </a:p>
@@ -1066,7 +1071,8 @@
               <a:t>Reflection Questions
 What outcome is being predicted, and over what time period?
 What public health action will follow a high-risk score?
-Which data sources may underrepresent some populations?</a:t>
+Which data sources may underrepresent some populations?
+Application guidance: Identify what could go wrong, who could be affected, what safeguards are needed, and what evidence should be reviewed before use expands.</a:t>
             </a:r>
             <a:endParaRPr lang="en-US" dirty="0"/>
           </a:p>
@@ -1156,7 +1162,8 @@
               <a:rPr lang="en-US" dirty="0"/>
               <a:t>Reflection Questions
 What are the consequences of false positives and false negatives?
-How will thresholds, calibration, and subgroup performance be monitored?</a:t>
+How will thresholds, calibration, and subgroup performance be monitored?
+Application guidance: Identify what could go wrong, who could be affected, what safeguards are needed, and what evidence should be reviewed before use expands.</a:t>
             </a:r>
             <a:endParaRPr lang="en-US" dirty="0"/>
           </a:p>
@@ -1246,7 +1253,8 @@
               <a:rPr lang="en-US" dirty="0"/>
               <a:t>Practical Exercise
 Create a predictive model review plan for one public health use case. Include the outcome, population, time horizon, data sources, candidate features, risk categories, thresholds, performance measures, subgroup evaluation plan, human review process, and monitoring indicators.
-The plan should also identify whether the use is supportive, restrictive, or consequential. Predictive tools used to allocate supportive resources have different risk profiles than tools used to deny, delay, or reduce services.</a:t>
+The plan should also identify whether the use is supportive, restrictive, or consequential. Predictive tools used to allocate supportive resources have different risk profiles than tools used to deny, delay, or reduce services.
+Application guidance: Use the assignment to test whether you can explain the concept, apply it to a realistic public health situation, and identify what would need review before the work moves forward.</a:t>
             </a:r>
             <a:endParaRPr lang="en-US" dirty="0"/>
           </a:p>
@@ -1337,7 +1345,8 @@
               <a:t>Expected Artifact or Evidence
 Predictive model review plan
 Risk score interpretation guide
-Threshold and error tradeoff memo</a:t>
+Threshold and error tradeoff memo
+Application guidance: Identify what could go wrong, who could be affected, what safeguards are needed, and what evidence should be reviewed before use expands.</a:t>
             </a:r>
             <a:endParaRPr lang="en-US" dirty="0"/>
           </a:p>
@@ -1426,7 +1435,8 @@
             <a:r>
               <a:rPr lang="en-US" dirty="0"/>
               <a:t>Expected Artifact or Evidence
-Subgroup monitoring plan</a:t>
+Subgroup monitoring plan
+Application guidance: Identify what could go wrong, who could be affected, what safeguards are needed, and what evidence should be reviewed before use expands.</a:t>
             </a:r>
             <a:endParaRPr lang="en-US" dirty="0"/>
           </a:p>
@@ -1610,7 +1620,8 @@
 Predictive model review plan
 Risk score interpretation guide
 Threshold and error tradeoff memo
-Subgroup monitoring plan</a:t>
+Subgroup monitoring plan
+Application guidance: Use the assignment to test whether you can explain the concept, apply it to a realistic public health situation, and identify what would need review before the work moves forward.</a:t>
             </a:r>
             <a:endParaRPr lang="en-US" dirty="0"/>
           </a:p>
@@ -1703,7 +1714,8 @@
 2. Why should thresholds be reviewed by public health staff?
 3. Which use of a risk score is most concerning without additional safeguards?
 4. What is a false negative in a predictive workflow?
-5. What should a predictive model review plan include?</a:t>
+5. What should a predictive model review plan include?
+Application guidance: Use the assignment to test whether you can explain the concept, apply it to a realistic public health situation, and identify what would need review before the work moves forward.</a:t>
             </a:r>
             <a:endParaRPr lang="en-US" dirty="0"/>
           </a:p>
@@ -1795,7 +1807,8 @@
 NIST Artificial Intelligence Risk Management Framework: https://www.nist.gov/itl/ai-risk-management-framework
 NIST AI RMF Generative AI Profile: https://www.nist.gov/publications/artificial-intelligence-risk-management-framework-generative-artificial-intelligence
 CDC Evaluation Framework: https://www.cdc.gov/evaluation/
-CDC Public Health Data Strategy: https://www.cdc.gov/public-health-data-strategy/php/about/index.html</a:t>
+CDC Public Health Data Strategy: https://www.cdc.gov/public-health-data-strategy/php/about/index.html
+Application guidance: Identify what could go wrong, who could be affected, what safeguards are needed, and what evidence should be reviewed before use expands.</a:t>
             </a:r>
             <a:endParaRPr lang="en-US" dirty="0"/>
           </a:p>
@@ -2074,7 +2087,8 @@
 Distinguish prediction from causation, diagnosis, and eligibility determination.
 Interpret basic risk categories, thresholds, calibration, and error tradeoffs.
 Identify equity and operational risks associated with risk scores.
-Design safeguards for use of predictive outputs in resource allocation, outreach, surveillance, or triage.</a:t>
+Design safeguards for use of predictive outputs in resource allocation, outreach, surveillance, or triage.
+Application guidance: Use the assignment to test whether you can explain the concept, apply it to a realistic public health situation, and identify what would need review before the work moves forward.</a:t>
             </a:r>
             <a:endParaRPr lang="en-US" dirty="0"/>
           </a:p>
@@ -2163,7 +2177,8 @@
             <a:r>
               <a:rPr lang="en-US" dirty="0"/>
               <a:t>Learning Objectives
-Produce a predictive model review plan for a public health workflow.</a:t>
+Produce a predictive model review plan for a public health workflow.
+Application guidance: Use the assignment to test whether you can explain the concept, apply it to a realistic public health situation, and identify what would need review before the work moves forward.</a:t>
             </a:r>
             <a:endParaRPr lang="en-US" dirty="0"/>
           </a:p>
@@ -2254,7 +2269,8 @@
               <a:t>Module Overview
 Predictive analytics uses data to estimate the likelihood of future events or outcomes. In public health, predictive models may be used to anticipate disease burden, identify populations at higher risk, prioritize outreach, allocate limited resources, or support early intervention. Risk stratification is the practice of grouping individuals, facilities, areas, events, or populations into categories based on estimated risk.
 This module helps learners distinguish prediction from diagnosis, causation, eligibility determination, and public health judgment. A risk score can support planning or triage, but it should not automatically become a decision without validation, review, and governance. Public health staff need to know how predictive models are created, what performance measures mean, and how errors affect equity, trust, and operations.
-By the end of this module, learners should be able to review a predictive AI proposal, identify the data and outcome being predicted, assess the consequences of false positives and false negatives, and design appropriate human review and monitoring processes.</a:t>
+By the end of this module, learners should be able to review a predictive AI proposal, identify the data and outcome being predicted, assess the consequences of false positives and false negatives, and design appropriate human review and monitoring processes.
+Application guidance: Identify what could go wrong, who could be affected, what safeguards are needed, and what evidence should be reviewed before use expands.</a:t>
             </a:r>
             <a:endParaRPr lang="en-US" dirty="0"/>
           </a:p>
@@ -2345,7 +2361,8 @@
               <a:t>Why This Topic Matters for Public Health AI
 Predictive analytics matters because public health agencies often must act before all information is available. During outbreaks, emergencies, or resource-constrained programs, agencies may need to decide where to send staff, which facilities need follow-up, which communities may need outreach, or which reports require expedited review. Prediction can help organize uncertainty, but it cannot remove uncertainty.
 Risk stratification can also create harm if used carelessly. A model may assign lower risk to groups with incomplete data, limited healthcare access, or fewer documented encounters. It may assign higher risk based on factors that reflect social vulnerability without ensuring supportive intervention. If a score is used to deny services, delay review, or reduce attention, the tool may worsen inequities.
-The responsible use of prediction requires a clear purpose, well-defined outcome, appropriate data, subgroup evaluation, calibrated scores, human review, and transparency about limitations. Public health staff should ask who benefits from the prediction, who could be harmed, and whether the intended action is supportive, punitive, or resource-constraining.</a:t>
+The responsible use of prediction requires a clear purpose, well-defined outcome, appropriate data, subgroup evaluation, calibrated scores, human review, and transparency about limitations. Public health staff should ask who benefits from the prediction, who could be harmed, and whether the intended action is supportive, punitive, or resource-constraining.
+Application guidance: Identify what could go wrong, who could be affected, what safeguards are needed, and what evidence should be reviewed before use expands.</a:t>
             </a:r>
             <a:endParaRPr lang="en-US" dirty="0"/>
           </a:p>
@@ -2435,7 +2452,8 @@
               <a:rPr lang="en-US" dirty="0"/>
               <a:t>Public Health Example
 A local health department may want to predict which neighborhoods are at increased risk of low vaccination coverage before school entry. The model could use prior immunization data, school enrollment patterns, appointment availability, language access indicators, transportation barriers, and historical outreach response. The output might help prioritize community outreach and mobile clinics.
-This use can support equity if it directs resources toward communities facing access barriers. It can create harm if the score stigmatizes neighborhoods, ignores missing data, or shifts responsibility away from system-level barriers. The model should be evaluated for calibration, data completeness, community context, and whether the intervention is supportive and accessible.</a:t>
+This use can support equity if it directs resources toward communities facing access barriers. It can create harm if the score stigmatizes neighborhoods, ignores missing data, or shifts responsibility away from system-level barriers. The model should be evaluated for calibration, data completeness, community context, and whether the intervention is supportive and accessible.
+Application guidance: Identify what could go wrong, who could be affected, what safeguards are needed, and what evidence should be reviewed before use expands.</a:t>
             </a:r>
             <a:endParaRPr lang="en-US" dirty="0"/>
           </a:p>
@@ -3206,8 +3224,8 @@
         </p:nvSpPr>
         <p:spPr>
           <a:xfrm>
-            <a:off x="9966960" y="6537960"/>
-            <a:ext cx="1645920" cy="201168"/>
+            <a:off x="9646920" y="6537960"/>
+            <a:ext cx="1965960" cy="201168"/>
           </a:xfrm>
           <a:prstGeom prst="rect">
             <a:avLst/>
@@ -3231,7 +3249,7 @@
                 <a:ea typeface="Aptos" pitchFamily="34" charset="-122"/>
                 <a:cs typeface="Aptos" pitchFamily="34" charset="-120"/>
               </a:rPr>
-              <a:t>Â© Paula Soper</a:t>
+              <a:t>Copyright Paula Soper</a:t>
             </a:r>
             <a:endParaRPr lang="en-US" sz="800" dirty="0"/>
           </a:p>
@@ -3278,77 +3296,13 @@
       </p:sp>
       <p:sp>
         <p:nvSpPr>
-          <p:cNvPr id="8" name="Shape 6"/>
+          <p:cNvPr id="8" name="Text 6"/>
           <p:cNvSpPr/>
           <p:nvPr/>
         </p:nvSpPr>
         <p:spPr>
           <a:xfrm>
             <a:off x="640080" y="658368"/>
-            <a:ext cx="420624" cy="420624"/>
-          </a:xfrm>
-          <a:prstGeom prst="ellipse">
-            <a:avLst/>
-          </a:prstGeom>
-          <a:solidFill>
-            <a:srgbClr val="0068B7"/>
-          </a:solidFill>
-          <a:ln w="12700">
-            <a:solidFill>
-              <a:srgbClr val="0068B7"/>
-            </a:solidFill>
-            <a:prstDash val="solid"/>
-          </a:ln>
-        </p:spPr>
-      </p:sp>
-      <p:sp>
-        <p:nvSpPr>
-          <p:cNvPr id="9" name="Text 7"/>
-          <p:cNvSpPr/>
-          <p:nvPr/>
-        </p:nvSpPr>
-        <p:spPr>
-          <a:xfrm>
-            <a:off x="640080" y="731520"/>
-            <a:ext cx="420624" cy="164592"/>
-          </a:xfrm>
-          <a:prstGeom prst="rect">
-            <a:avLst/>
-          </a:prstGeom>
-          <a:noFill/>
-          <a:ln/>
-        </p:spPr>
-        <p:txBody>
-          <a:bodyPr wrap="square" lIns="0" tIns="0" rIns="0" bIns="0" rtlCol="0" anchor="ctr"/>
-          <a:lstStyle/>
-          <a:p>
-            <a:pPr algn="ctr" indent="0" marL="0">
-              <a:buNone/>
-            </a:pPr>
-            <a:r>
-              <a:rPr lang="en-US" sz="1100" b="1" dirty="0">
-                <a:solidFill>
-                  <a:srgbClr val="FFFFFF"/>
-                </a:solidFill>
-                <a:latin typeface="Aptos" pitchFamily="34" charset="0"/>
-                <a:ea typeface="Aptos" pitchFamily="34" charset="-122"/>
-                <a:cs typeface="Aptos" pitchFamily="34" charset="-120"/>
-              </a:rPr>
-              <a:t>5</a:t>
-            </a:r>
-            <a:endParaRPr lang="en-US" sz="1100" dirty="0"/>
-          </a:p>
-        </p:txBody>
-      </p:sp>
-      <p:sp>
-        <p:nvSpPr>
-          <p:cNvPr id="10" name="Text 8"/>
-          <p:cNvSpPr/>
-          <p:nvPr/>
-        </p:nvSpPr>
-        <p:spPr>
-          <a:xfrm>
-            <a:off x="640080" y="621792"/>
             <a:ext cx="10881360" cy="713232"/>
           </a:xfrm>
           <a:prstGeom prst="rect">
@@ -3383,14 +3337,14 @@
       </p:sp>
       <p:sp>
         <p:nvSpPr>
-          <p:cNvPr id="11" name="Text 9"/>
+          <p:cNvPr id="9" name="Text 7"/>
           <p:cNvSpPr/>
           <p:nvPr/>
         </p:nvSpPr>
         <p:spPr>
           <a:xfrm>
             <a:off x="868680" y="1508760"/>
-            <a:ext cx="6537960" cy="4160520"/>
+            <a:ext cx="6309360" cy="4160520"/>
           </a:xfrm>
           <a:prstGeom prst="rect">
             <a:avLst/>
@@ -3449,18 +3403,18 @@
       </p:sp>
       <p:sp>
         <p:nvSpPr>
-          <p:cNvPr id="12" name="Shape 10"/>
-          <p:cNvSpPr/>
-          <p:nvPr/>
-        </p:nvSpPr>
-        <p:spPr>
-          <a:xfrm>
-            <a:off x="7909560" y="1417320"/>
-            <a:ext cx="3154680" cy="1828800"/>
+          <p:cNvPr id="10" name="Shape 8"/>
+          <p:cNvSpPr/>
+          <p:nvPr/>
+        </p:nvSpPr>
+        <p:spPr>
+          <a:xfrm>
+            <a:off x="7635240" y="1325880"/>
+            <a:ext cx="3474720" cy="1325880"/>
           </a:xfrm>
           <a:prstGeom prst="roundRect">
             <a:avLst>
-              <a:gd name="adj" fmla="val 6000"/>
+              <a:gd name="adj" fmla="val 8276"/>
             </a:avLst>
           </a:prstGeom>
           <a:solidFill>
@@ -3476,14 +3430,14 @@
       </p:sp>
       <p:sp>
         <p:nvSpPr>
-          <p:cNvPr id="13" name="Text 11"/>
-          <p:cNvSpPr/>
-          <p:nvPr/>
-        </p:nvSpPr>
-        <p:spPr>
-          <a:xfrm>
-            <a:off x="8074152" y="1563624"/>
-            <a:ext cx="2825496" cy="256032"/>
+          <p:cNvPr id="11" name="Text 9"/>
+          <p:cNvSpPr/>
+          <p:nvPr/>
+        </p:nvSpPr>
+        <p:spPr>
+          <a:xfrm>
+            <a:off x="7799832" y="1472184"/>
+            <a:ext cx="3145536" cy="256032"/>
           </a:xfrm>
           <a:prstGeom prst="rect">
             <a:avLst/>
@@ -3507,7 +3461,7 @@
                 <a:ea typeface="Aptos" pitchFamily="34" charset="-122"/>
                 <a:cs typeface="Aptos" pitchFamily="34" charset="-120"/>
               </a:rPr>
-              <a:t>Key idea</a:t>
+              <a:t>Risk check</a:t>
             </a:r>
             <a:endParaRPr lang="en-US" sz="1300" dirty="0"/>
           </a:p>
@@ -3515,14 +3469,14 @@
       </p:sp>
       <p:sp>
         <p:nvSpPr>
-          <p:cNvPr id="14" name="Text 12"/>
-          <p:cNvSpPr/>
-          <p:nvPr/>
-        </p:nvSpPr>
-        <p:spPr>
-          <a:xfrm>
-            <a:off x="8074152" y="1920240"/>
-            <a:ext cx="2825496" cy="1188720"/>
+          <p:cNvPr id="12" name="Text 10"/>
+          <p:cNvSpPr/>
+          <p:nvPr/>
+        </p:nvSpPr>
+        <p:spPr>
+          <a:xfrm>
+            <a:off x="7799832" y="1828800"/>
+            <a:ext cx="3145536" cy="685800"/>
           </a:xfrm>
           <a:prstGeom prst="rect">
             <a:avLst/>
@@ -3556,18 +3510,171 @@
       </p:sp>
       <p:sp>
         <p:nvSpPr>
-          <p:cNvPr id="15" name="Shape 13"/>
-          <p:cNvSpPr/>
-          <p:nvPr/>
-        </p:nvSpPr>
-        <p:spPr>
-          <a:xfrm>
-            <a:off x="7909560" y="3520440"/>
-            <a:ext cx="3154680" cy="1737360"/>
+          <p:cNvPr id="13" name="Shape 11"/>
+          <p:cNvSpPr/>
+          <p:nvPr/>
+        </p:nvSpPr>
+        <p:spPr>
+          <a:xfrm>
+            <a:off x="7635240" y="2788920"/>
+            <a:ext cx="3474720" cy="1536192"/>
           </a:xfrm>
           <a:prstGeom prst="roundRect">
             <a:avLst>
-              <a:gd name="adj" fmla="val 6316"/>
+              <a:gd name="adj" fmla="val 7143"/>
+            </a:avLst>
+          </a:prstGeom>
+          <a:solidFill>
+            <a:srgbClr val="FFFFFF">
+              <a:alpha val="88000"/>
+            </a:srgbClr>
+          </a:solidFill>
+          <a:ln w="12700">
+            <a:solidFill>
+              <a:srgbClr val="D6E8F2"/>
+            </a:solidFill>
+            <a:prstDash val="solid"/>
+          </a:ln>
+        </p:spPr>
+      </p:sp>
+      <p:sp>
+        <p:nvSpPr>
+          <p:cNvPr id="14" name="Shape 12"/>
+          <p:cNvSpPr/>
+          <p:nvPr/>
+        </p:nvSpPr>
+        <p:spPr>
+          <a:xfrm>
+            <a:off x="8046720" y="3108960"/>
+            <a:ext cx="2651760" cy="896112"/>
+          </a:xfrm>
+          <a:prstGeom prst="arc">
+            <a:avLst/>
+          </a:prstGeom>
+          <a:noFill/>
+          <a:ln w="25400">
+            <a:solidFill>
+              <a:srgbClr val="0068B7"/>
+            </a:solidFill>
+            <a:prstDash val="solid"/>
+          </a:ln>
+        </p:spPr>
+      </p:sp>
+      <p:sp>
+        <p:nvSpPr>
+          <p:cNvPr id="15" name="Text 13"/>
+          <p:cNvSpPr/>
+          <p:nvPr/>
+        </p:nvSpPr>
+        <p:spPr>
+          <a:xfrm>
+            <a:off x="7909560" y="3099816"/>
+            <a:ext cx="2926080" cy="256032"/>
+          </a:xfrm>
+          <a:prstGeom prst="rect">
+            <a:avLst/>
+          </a:prstGeom>
+          <a:noFill/>
+          <a:ln/>
+        </p:spPr>
+        <p:txBody>
+          <a:bodyPr wrap="square" lIns="0" tIns="0" rIns="0" bIns="0" rtlCol="0" anchor="ctr"/>
+          <a:lstStyle/>
+          <a:p>
+            <a:pPr algn="ctr" indent="0" marL="0">
+              <a:buNone/>
+            </a:pPr>
+            <a:r>
+              <a:rPr lang="en-US" sz="1500" b="1" dirty="0">
+                <a:solidFill>
+                  <a:srgbClr val="003A63"/>
+                </a:solidFill>
+                <a:latin typeface="Aptos" pitchFamily="34" charset="0"/>
+                <a:ea typeface="Aptos" pitchFamily="34" charset="-122"/>
+                <a:cs typeface="Aptos" pitchFamily="34" charset="-120"/>
+              </a:rPr>
+              <a:t>Risk</a:t>
+            </a:r>
+            <a:endParaRPr lang="en-US" sz="1500" dirty="0"/>
+          </a:p>
+        </p:txBody>
+      </p:sp>
+      <p:sp>
+        <p:nvSpPr>
+          <p:cNvPr id="16" name="Shape 14"/>
+          <p:cNvSpPr/>
+          <p:nvPr/>
+        </p:nvSpPr>
+        <p:spPr>
+          <a:xfrm>
+            <a:off x="8366760" y="3639312"/>
+            <a:ext cx="2011680" cy="0"/>
+          </a:xfrm>
+          <a:prstGeom prst="line">
+            <a:avLst/>
+          </a:prstGeom>
+          <a:noFill/>
+          <a:ln w="63500">
+            <a:solidFill>
+              <a:srgbClr val="2F8A28"/>
+            </a:solidFill>
+            <a:prstDash val="solid"/>
+          </a:ln>
+        </p:spPr>
+      </p:sp>
+      <p:sp>
+        <p:nvSpPr>
+          <p:cNvPr id="17" name="Text 15"/>
+          <p:cNvSpPr/>
+          <p:nvPr/>
+        </p:nvSpPr>
+        <p:spPr>
+          <a:xfrm>
+            <a:off x="7909560" y="3849624"/>
+            <a:ext cx="2926080" cy="164592"/>
+          </a:xfrm>
+          <a:prstGeom prst="rect">
+            <a:avLst/>
+          </a:prstGeom>
+          <a:noFill/>
+          <a:ln/>
+        </p:spPr>
+        <p:txBody>
+          <a:bodyPr wrap="square" lIns="0" tIns="0" rIns="0" bIns="0" rtlCol="0" anchor="ctr"/>
+          <a:lstStyle/>
+          <a:p>
+            <a:pPr algn="ctr" indent="0" marL="0">
+              <a:buNone/>
+            </a:pPr>
+            <a:r>
+              <a:rPr lang="en-US" sz="900" dirty="0">
+                <a:solidFill>
+                  <a:srgbClr val="003A63"/>
+                </a:solidFill>
+                <a:latin typeface="Aptos" pitchFamily="34" charset="0"/>
+                <a:ea typeface="Aptos" pitchFamily="34" charset="-122"/>
+                <a:cs typeface="Aptos" pitchFamily="34" charset="-120"/>
+              </a:rPr>
+              <a:t>Human review</a:t>
+            </a:r>
+            <a:endParaRPr lang="en-US" sz="900" dirty="0"/>
+          </a:p>
+        </p:txBody>
+      </p:sp>
+      <p:sp>
+        <p:nvSpPr>
+          <p:cNvPr id="18" name="Shape 16"/>
+          <p:cNvSpPr/>
+          <p:nvPr/>
+        </p:nvSpPr>
+        <p:spPr>
+          <a:xfrm>
+            <a:off x="7635240" y="4498848"/>
+            <a:ext cx="3474720" cy="1143000"/>
+          </a:xfrm>
+          <a:prstGeom prst="roundRect">
+            <a:avLst>
+              <a:gd name="adj" fmla="val 9600"/>
             </a:avLst>
           </a:prstGeom>
           <a:solidFill>
@@ -3583,14 +3690,14 @@
       </p:sp>
       <p:sp>
         <p:nvSpPr>
-          <p:cNvPr id="16" name="Text 14"/>
-          <p:cNvSpPr/>
-          <p:nvPr/>
-        </p:nvSpPr>
-        <p:spPr>
-          <a:xfrm>
-            <a:off x="8074152" y="3666744"/>
-            <a:ext cx="2825496" cy="256032"/>
+          <p:cNvPr id="19" name="Text 17"/>
+          <p:cNvSpPr/>
+          <p:nvPr/>
+        </p:nvSpPr>
+        <p:spPr>
+          <a:xfrm>
+            <a:off x="7799832" y="4645152"/>
+            <a:ext cx="3145536" cy="256032"/>
           </a:xfrm>
           <a:prstGeom prst="rect">
             <a:avLst/>
@@ -3614,7 +3721,7 @@
                 <a:ea typeface="Aptos" pitchFamily="34" charset="-122"/>
                 <a:cs typeface="Aptos" pitchFamily="34" charset="-120"/>
               </a:rPr>
-              <a:t>Use this for</a:t>
+              <a:t>Safeguard to plan</a:t>
             </a:r>
             <a:endParaRPr lang="en-US" sz="1300" dirty="0"/>
           </a:p>
@@ -3622,14 +3729,14 @@
       </p:sp>
       <p:sp>
         <p:nvSpPr>
-          <p:cNvPr id="17" name="Text 15"/>
-          <p:cNvSpPr/>
-          <p:nvPr/>
-        </p:nvSpPr>
-        <p:spPr>
-          <a:xfrm>
-            <a:off x="8074152" y="4023360"/>
-            <a:ext cx="2825496" cy="1097280"/>
+          <p:cNvPr id="20" name="Text 18"/>
+          <p:cNvSpPr/>
+          <p:nvPr/>
+        </p:nvSpPr>
+        <p:spPr>
+          <a:xfrm>
+            <a:off x="7799832" y="5001768"/>
+            <a:ext cx="3145536" cy="502920"/>
           </a:xfrm>
           <a:prstGeom prst="rect">
             <a:avLst/>
@@ -3655,7 +3762,7 @@
                 <a:ea typeface="Aptos" pitchFamily="34" charset="-122"/>
                 <a:cs typeface="Aptos" pitchFamily="34" charset="-120"/>
               </a:rPr>
-              <a:t>Connect the concept to public health decisions, safeguards, documentation, or implementation work.</a:t>
+              <a:t>Identify what could go wrong, who could be affected, what safeguards are needed, and what evidence should be reviewed before use expands.</a:t>
             </a:r>
             <a:endParaRPr lang="en-US" sz="1550" dirty="0"/>
           </a:p>
@@ -3829,8 +3936,8 @@
         </p:nvSpPr>
         <p:spPr>
           <a:xfrm>
-            <a:off x="9966960" y="6537960"/>
-            <a:ext cx="1645920" cy="201168"/>
+            <a:off x="9646920" y="6537960"/>
+            <a:ext cx="1965960" cy="201168"/>
           </a:xfrm>
           <a:prstGeom prst="rect">
             <a:avLst/>
@@ -3854,7 +3961,7 @@
                 <a:ea typeface="Aptos" pitchFamily="34" charset="-122"/>
                 <a:cs typeface="Aptos" pitchFamily="34" charset="-120"/>
               </a:rPr>
-              <a:t>Â© Paula Soper</a:t>
+              <a:t>Copyright Paula Soper</a:t>
             </a:r>
             <a:endParaRPr lang="en-US" sz="800" dirty="0"/>
           </a:p>
@@ -3949,7 +4056,7 @@
         <p:spPr>
           <a:xfrm>
             <a:off x="868680" y="1508760"/>
-            <a:ext cx="6537960" cy="4160520"/>
+            <a:ext cx="6309360" cy="4160520"/>
           </a:xfrm>
           <a:prstGeom prst="rect">
             <a:avLst/>
@@ -4014,12 +4121,12 @@
         </p:nvSpPr>
         <p:spPr>
           <a:xfrm>
-            <a:off x="7909560" y="1417320"/>
-            <a:ext cx="3154680" cy="1828800"/>
+            <a:off x="7635240" y="1325880"/>
+            <a:ext cx="3474720" cy="1325880"/>
           </a:xfrm>
           <a:prstGeom prst="roundRect">
             <a:avLst>
-              <a:gd name="adj" fmla="val 6000"/>
+              <a:gd name="adj" fmla="val 8276"/>
             </a:avLst>
           </a:prstGeom>
           <a:solidFill>
@@ -4041,8 +4148,8 @@
         </p:nvSpPr>
         <p:spPr>
           <a:xfrm>
-            <a:off x="8074152" y="1563624"/>
-            <a:ext cx="2825496" cy="256032"/>
+            <a:off x="7799832" y="1472184"/>
+            <a:ext cx="3145536" cy="256032"/>
           </a:xfrm>
           <a:prstGeom prst="rect">
             <a:avLst/>
@@ -4066,7 +4173,7 @@
                 <a:ea typeface="Aptos" pitchFamily="34" charset="-122"/>
                 <a:cs typeface="Aptos" pitchFamily="34" charset="-120"/>
               </a:rPr>
-              <a:t>Key idea</a:t>
+              <a:t>Risk check</a:t>
             </a:r>
             <a:endParaRPr lang="en-US" sz="1300" dirty="0"/>
           </a:p>
@@ -4080,8 +4187,8 @@
         </p:nvSpPr>
         <p:spPr>
           <a:xfrm>
-            <a:off x="8074152" y="1920240"/>
-            <a:ext cx="2825496" cy="1188720"/>
+            <a:off x="7799832" y="1828800"/>
+            <a:ext cx="3145536" cy="685800"/>
           </a:xfrm>
           <a:prstGeom prst="rect">
             <a:avLst/>
@@ -4121,12 +4228,165 @@
         </p:nvSpPr>
         <p:spPr>
           <a:xfrm>
-            <a:off x="7909560" y="3520440"/>
-            <a:ext cx="3154680" cy="1737360"/>
+            <a:off x="7635240" y="2788920"/>
+            <a:ext cx="3474720" cy="1536192"/>
           </a:xfrm>
           <a:prstGeom prst="roundRect">
             <a:avLst>
-              <a:gd name="adj" fmla="val 6316"/>
+              <a:gd name="adj" fmla="val 7143"/>
+            </a:avLst>
+          </a:prstGeom>
+          <a:solidFill>
+            <a:srgbClr val="FFFFFF">
+              <a:alpha val="88000"/>
+            </a:srgbClr>
+          </a:solidFill>
+          <a:ln w="12700">
+            <a:solidFill>
+              <a:srgbClr val="D6E8F2"/>
+            </a:solidFill>
+            <a:prstDash val="solid"/>
+          </a:ln>
+        </p:spPr>
+      </p:sp>
+      <p:sp>
+        <p:nvSpPr>
+          <p:cNvPr id="14" name="Shape 12"/>
+          <p:cNvSpPr/>
+          <p:nvPr/>
+        </p:nvSpPr>
+        <p:spPr>
+          <a:xfrm>
+            <a:off x="8046720" y="3108960"/>
+            <a:ext cx="2651760" cy="896112"/>
+          </a:xfrm>
+          <a:prstGeom prst="arc">
+            <a:avLst/>
+          </a:prstGeom>
+          <a:noFill/>
+          <a:ln w="25400">
+            <a:solidFill>
+              <a:srgbClr val="0068B7"/>
+            </a:solidFill>
+            <a:prstDash val="solid"/>
+          </a:ln>
+        </p:spPr>
+      </p:sp>
+      <p:sp>
+        <p:nvSpPr>
+          <p:cNvPr id="15" name="Text 13"/>
+          <p:cNvSpPr/>
+          <p:nvPr/>
+        </p:nvSpPr>
+        <p:spPr>
+          <a:xfrm>
+            <a:off x="7909560" y="3099816"/>
+            <a:ext cx="2926080" cy="256032"/>
+          </a:xfrm>
+          <a:prstGeom prst="rect">
+            <a:avLst/>
+          </a:prstGeom>
+          <a:noFill/>
+          <a:ln/>
+        </p:spPr>
+        <p:txBody>
+          <a:bodyPr wrap="square" lIns="0" tIns="0" rIns="0" bIns="0" rtlCol="0" anchor="ctr"/>
+          <a:lstStyle/>
+          <a:p>
+            <a:pPr algn="ctr" indent="0" marL="0">
+              <a:buNone/>
+            </a:pPr>
+            <a:r>
+              <a:rPr lang="en-US" sz="1500" b="1" dirty="0">
+                <a:solidFill>
+                  <a:srgbClr val="003A63"/>
+                </a:solidFill>
+                <a:latin typeface="Aptos" pitchFamily="34" charset="0"/>
+                <a:ea typeface="Aptos" pitchFamily="34" charset="-122"/>
+                <a:cs typeface="Aptos" pitchFamily="34" charset="-120"/>
+              </a:rPr>
+              <a:t>Risk</a:t>
+            </a:r>
+            <a:endParaRPr lang="en-US" sz="1500" dirty="0"/>
+          </a:p>
+        </p:txBody>
+      </p:sp>
+      <p:sp>
+        <p:nvSpPr>
+          <p:cNvPr id="16" name="Shape 14"/>
+          <p:cNvSpPr/>
+          <p:nvPr/>
+        </p:nvSpPr>
+        <p:spPr>
+          <a:xfrm>
+            <a:off x="8366760" y="3639312"/>
+            <a:ext cx="2011680" cy="0"/>
+          </a:xfrm>
+          <a:prstGeom prst="line">
+            <a:avLst/>
+          </a:prstGeom>
+          <a:noFill/>
+          <a:ln w="63500">
+            <a:solidFill>
+              <a:srgbClr val="2F8A28"/>
+            </a:solidFill>
+            <a:prstDash val="solid"/>
+          </a:ln>
+        </p:spPr>
+      </p:sp>
+      <p:sp>
+        <p:nvSpPr>
+          <p:cNvPr id="17" name="Text 15"/>
+          <p:cNvSpPr/>
+          <p:nvPr/>
+        </p:nvSpPr>
+        <p:spPr>
+          <a:xfrm>
+            <a:off x="7909560" y="3849624"/>
+            <a:ext cx="2926080" cy="164592"/>
+          </a:xfrm>
+          <a:prstGeom prst="rect">
+            <a:avLst/>
+          </a:prstGeom>
+          <a:noFill/>
+          <a:ln/>
+        </p:spPr>
+        <p:txBody>
+          <a:bodyPr wrap="square" lIns="0" tIns="0" rIns="0" bIns="0" rtlCol="0" anchor="ctr"/>
+          <a:lstStyle/>
+          <a:p>
+            <a:pPr algn="ctr" indent="0" marL="0">
+              <a:buNone/>
+            </a:pPr>
+            <a:r>
+              <a:rPr lang="en-US" sz="900" dirty="0">
+                <a:solidFill>
+                  <a:srgbClr val="003A63"/>
+                </a:solidFill>
+                <a:latin typeface="Aptos" pitchFamily="34" charset="0"/>
+                <a:ea typeface="Aptos" pitchFamily="34" charset="-122"/>
+                <a:cs typeface="Aptos" pitchFamily="34" charset="-120"/>
+              </a:rPr>
+              <a:t>Human review</a:t>
+            </a:r>
+            <a:endParaRPr lang="en-US" sz="900" dirty="0"/>
+          </a:p>
+        </p:txBody>
+      </p:sp>
+      <p:sp>
+        <p:nvSpPr>
+          <p:cNvPr id="18" name="Shape 16"/>
+          <p:cNvSpPr/>
+          <p:nvPr/>
+        </p:nvSpPr>
+        <p:spPr>
+          <a:xfrm>
+            <a:off x="7635240" y="4498848"/>
+            <a:ext cx="3474720" cy="1143000"/>
+          </a:xfrm>
+          <a:prstGeom prst="roundRect">
+            <a:avLst>
+              <a:gd name="adj" fmla="val 9600"/>
             </a:avLst>
           </a:prstGeom>
           <a:solidFill>
@@ -4142,14 +4402,14 @@
       </p:sp>
       <p:sp>
         <p:nvSpPr>
-          <p:cNvPr id="14" name="Text 12"/>
-          <p:cNvSpPr/>
-          <p:nvPr/>
-        </p:nvSpPr>
-        <p:spPr>
-          <a:xfrm>
-            <a:off x="8074152" y="3666744"/>
-            <a:ext cx="2825496" cy="256032"/>
+          <p:cNvPr id="19" name="Text 17"/>
+          <p:cNvSpPr/>
+          <p:nvPr/>
+        </p:nvSpPr>
+        <p:spPr>
+          <a:xfrm>
+            <a:off x="7799832" y="4645152"/>
+            <a:ext cx="3145536" cy="256032"/>
           </a:xfrm>
           <a:prstGeom prst="rect">
             <a:avLst/>
@@ -4173,7 +4433,7 @@
                 <a:ea typeface="Aptos" pitchFamily="34" charset="-122"/>
                 <a:cs typeface="Aptos" pitchFamily="34" charset="-120"/>
               </a:rPr>
-              <a:t>Use this for</a:t>
+              <a:t>Safeguard to plan</a:t>
             </a:r>
             <a:endParaRPr lang="en-US" sz="1300" dirty="0"/>
           </a:p>
@@ -4181,14 +4441,14 @@
       </p:sp>
       <p:sp>
         <p:nvSpPr>
-          <p:cNvPr id="15" name="Text 13"/>
-          <p:cNvSpPr/>
-          <p:nvPr/>
-        </p:nvSpPr>
-        <p:spPr>
-          <a:xfrm>
-            <a:off x="8074152" y="4023360"/>
-            <a:ext cx="2825496" cy="1097280"/>
+          <p:cNvPr id="20" name="Text 18"/>
+          <p:cNvSpPr/>
+          <p:nvPr/>
+        </p:nvSpPr>
+        <p:spPr>
+          <a:xfrm>
+            <a:off x="7799832" y="5001768"/>
+            <a:ext cx="3145536" cy="502920"/>
           </a:xfrm>
           <a:prstGeom prst="rect">
             <a:avLst/>
@@ -4214,7 +4474,7 @@
                 <a:ea typeface="Aptos" pitchFamily="34" charset="-122"/>
                 <a:cs typeface="Aptos" pitchFamily="34" charset="-120"/>
               </a:rPr>
-              <a:t>Connect the concept to public health decisions, safeguards, documentation, or implementation work.</a:t>
+              <a:t>Identify what could go wrong, who could be affected, what safeguards are needed, and what evidence should be reviewed before use expands.</a:t>
             </a:r>
             <a:endParaRPr lang="en-US" sz="1550" dirty="0"/>
           </a:p>
@@ -4388,8 +4648,8 @@
         </p:nvSpPr>
         <p:spPr>
           <a:xfrm>
-            <a:off x="9966960" y="6537960"/>
-            <a:ext cx="1645920" cy="201168"/>
+            <a:off x="9646920" y="6537960"/>
+            <a:ext cx="1965960" cy="201168"/>
           </a:xfrm>
           <a:prstGeom prst="rect">
             <a:avLst/>
@@ -4413,7 +4673,7 @@
                 <a:ea typeface="Aptos" pitchFamily="34" charset="-122"/>
                 <a:cs typeface="Aptos" pitchFamily="34" charset="-120"/>
               </a:rPr>
-              <a:t>Â© Paula Soper</a:t>
+              <a:t>Copyright Paula Soper</a:t>
             </a:r>
             <a:endParaRPr lang="en-US" sz="800" dirty="0"/>
           </a:p>
@@ -4460,77 +4720,13 @@
       </p:sp>
       <p:sp>
         <p:nvSpPr>
-          <p:cNvPr id="8" name="Shape 6"/>
+          <p:cNvPr id="8" name="Text 6"/>
           <p:cNvSpPr/>
           <p:nvPr/>
         </p:nvSpPr>
         <p:spPr>
           <a:xfrm>
             <a:off x="640080" y="658368"/>
-            <a:ext cx="420624" cy="420624"/>
-          </a:xfrm>
-          <a:prstGeom prst="ellipse">
-            <a:avLst/>
-          </a:prstGeom>
-          <a:solidFill>
-            <a:srgbClr val="0068B7"/>
-          </a:solidFill>
-          <a:ln w="12700">
-            <a:solidFill>
-              <a:srgbClr val="0068B7"/>
-            </a:solidFill>
-            <a:prstDash val="solid"/>
-          </a:ln>
-        </p:spPr>
-      </p:sp>
-      <p:sp>
-        <p:nvSpPr>
-          <p:cNvPr id="9" name="Text 7"/>
-          <p:cNvSpPr/>
-          <p:nvPr/>
-        </p:nvSpPr>
-        <p:spPr>
-          <a:xfrm>
-            <a:off x="640080" y="731520"/>
-            <a:ext cx="420624" cy="164592"/>
-          </a:xfrm>
-          <a:prstGeom prst="rect">
-            <a:avLst/>
-          </a:prstGeom>
-          <a:noFill/>
-          <a:ln/>
-        </p:spPr>
-        <p:txBody>
-          <a:bodyPr wrap="square" lIns="0" tIns="0" rIns="0" bIns="0" rtlCol="0" anchor="ctr"/>
-          <a:lstStyle/>
-          <a:p>
-            <a:pPr algn="ctr" indent="0" marL="0">
-              <a:buNone/>
-            </a:pPr>
-            <a:r>
-              <a:rPr lang="en-US" sz="1100" b="1" dirty="0">
-                <a:solidFill>
-                  <a:srgbClr val="FFFFFF"/>
-                </a:solidFill>
-                <a:latin typeface="Aptos" pitchFamily="34" charset="0"/>
-                <a:ea typeface="Aptos" pitchFamily="34" charset="-122"/>
-                <a:cs typeface="Aptos" pitchFamily="34" charset="-120"/>
-              </a:rPr>
-              <a:t>6</a:t>
-            </a:r>
-            <a:endParaRPr lang="en-US" sz="1100" dirty="0"/>
-          </a:p>
-        </p:txBody>
-      </p:sp>
-      <p:sp>
-        <p:nvSpPr>
-          <p:cNvPr id="10" name="Text 8"/>
-          <p:cNvSpPr/>
-          <p:nvPr/>
-        </p:nvSpPr>
-        <p:spPr>
-          <a:xfrm>
-            <a:off x="640080" y="621792"/>
             <a:ext cx="10881360" cy="713232"/>
           </a:xfrm>
           <a:prstGeom prst="rect">
@@ -4565,14 +4761,14 @@
       </p:sp>
       <p:sp>
         <p:nvSpPr>
-          <p:cNvPr id="11" name="Text 9"/>
+          <p:cNvPr id="9" name="Text 7"/>
           <p:cNvSpPr/>
           <p:nvPr/>
         </p:nvSpPr>
         <p:spPr>
           <a:xfrm>
             <a:off x="868680" y="1508760"/>
-            <a:ext cx="6537960" cy="4160520"/>
+            <a:ext cx="6309360" cy="4160520"/>
           </a:xfrm>
           <a:prstGeom prst="rect">
             <a:avLst/>
@@ -4631,18 +4827,18 @@
       </p:sp>
       <p:sp>
         <p:nvSpPr>
-          <p:cNvPr id="12" name="Shape 10"/>
-          <p:cNvSpPr/>
-          <p:nvPr/>
-        </p:nvSpPr>
-        <p:spPr>
-          <a:xfrm>
-            <a:off x="7909560" y="1417320"/>
-            <a:ext cx="3154680" cy="1828800"/>
+          <p:cNvPr id="10" name="Shape 8"/>
+          <p:cNvSpPr/>
+          <p:nvPr/>
+        </p:nvSpPr>
+        <p:spPr>
+          <a:xfrm>
+            <a:off x="7635240" y="1325880"/>
+            <a:ext cx="3474720" cy="1325880"/>
           </a:xfrm>
           <a:prstGeom prst="roundRect">
             <a:avLst>
-              <a:gd name="adj" fmla="val 6000"/>
+              <a:gd name="adj" fmla="val 8276"/>
             </a:avLst>
           </a:prstGeom>
           <a:solidFill>
@@ -4658,14 +4854,14 @@
       </p:sp>
       <p:sp>
         <p:nvSpPr>
-          <p:cNvPr id="13" name="Text 11"/>
-          <p:cNvSpPr/>
-          <p:nvPr/>
-        </p:nvSpPr>
-        <p:spPr>
-          <a:xfrm>
-            <a:off x="8074152" y="1563624"/>
-            <a:ext cx="2825496" cy="256032"/>
+          <p:cNvPr id="11" name="Text 9"/>
+          <p:cNvSpPr/>
+          <p:nvPr/>
+        </p:nvSpPr>
+        <p:spPr>
+          <a:xfrm>
+            <a:off x="7799832" y="1472184"/>
+            <a:ext cx="3145536" cy="256032"/>
           </a:xfrm>
           <a:prstGeom prst="rect">
             <a:avLst/>
@@ -4689,7 +4885,7 @@
                 <a:ea typeface="Aptos" pitchFamily="34" charset="-122"/>
                 <a:cs typeface="Aptos" pitchFamily="34" charset="-120"/>
               </a:rPr>
-              <a:t>Key idea</a:t>
+              <a:t>Risk check</a:t>
             </a:r>
             <a:endParaRPr lang="en-US" sz="1300" dirty="0"/>
           </a:p>
@@ -4697,14 +4893,14 @@
       </p:sp>
       <p:sp>
         <p:nvSpPr>
-          <p:cNvPr id="14" name="Text 12"/>
-          <p:cNvSpPr/>
-          <p:nvPr/>
-        </p:nvSpPr>
-        <p:spPr>
-          <a:xfrm>
-            <a:off x="8074152" y="1920240"/>
-            <a:ext cx="2825496" cy="1188720"/>
+          <p:cNvPr id="12" name="Text 10"/>
+          <p:cNvSpPr/>
+          <p:nvPr/>
+        </p:nvSpPr>
+        <p:spPr>
+          <a:xfrm>
+            <a:off x="7799832" y="1828800"/>
+            <a:ext cx="3145536" cy="685800"/>
           </a:xfrm>
           <a:prstGeom prst="rect">
             <a:avLst/>
@@ -4738,18 +4934,171 @@
       </p:sp>
       <p:sp>
         <p:nvSpPr>
-          <p:cNvPr id="15" name="Shape 13"/>
-          <p:cNvSpPr/>
-          <p:nvPr/>
-        </p:nvSpPr>
-        <p:spPr>
-          <a:xfrm>
-            <a:off x="7909560" y="3520440"/>
-            <a:ext cx="3154680" cy="1737360"/>
+          <p:cNvPr id="13" name="Shape 11"/>
+          <p:cNvSpPr/>
+          <p:nvPr/>
+        </p:nvSpPr>
+        <p:spPr>
+          <a:xfrm>
+            <a:off x="7635240" y="2788920"/>
+            <a:ext cx="3474720" cy="1536192"/>
           </a:xfrm>
           <a:prstGeom prst="roundRect">
             <a:avLst>
-              <a:gd name="adj" fmla="val 6316"/>
+              <a:gd name="adj" fmla="val 7143"/>
+            </a:avLst>
+          </a:prstGeom>
+          <a:solidFill>
+            <a:srgbClr val="FFFFFF">
+              <a:alpha val="88000"/>
+            </a:srgbClr>
+          </a:solidFill>
+          <a:ln w="12700">
+            <a:solidFill>
+              <a:srgbClr val="D6E8F2"/>
+            </a:solidFill>
+            <a:prstDash val="solid"/>
+          </a:ln>
+        </p:spPr>
+      </p:sp>
+      <p:sp>
+        <p:nvSpPr>
+          <p:cNvPr id="14" name="Shape 12"/>
+          <p:cNvSpPr/>
+          <p:nvPr/>
+        </p:nvSpPr>
+        <p:spPr>
+          <a:xfrm>
+            <a:off x="8046720" y="3108960"/>
+            <a:ext cx="2651760" cy="896112"/>
+          </a:xfrm>
+          <a:prstGeom prst="arc">
+            <a:avLst/>
+          </a:prstGeom>
+          <a:noFill/>
+          <a:ln w="25400">
+            <a:solidFill>
+              <a:srgbClr val="0068B7"/>
+            </a:solidFill>
+            <a:prstDash val="solid"/>
+          </a:ln>
+        </p:spPr>
+      </p:sp>
+      <p:sp>
+        <p:nvSpPr>
+          <p:cNvPr id="15" name="Text 13"/>
+          <p:cNvSpPr/>
+          <p:nvPr/>
+        </p:nvSpPr>
+        <p:spPr>
+          <a:xfrm>
+            <a:off x="7909560" y="3099816"/>
+            <a:ext cx="2926080" cy="256032"/>
+          </a:xfrm>
+          <a:prstGeom prst="rect">
+            <a:avLst/>
+          </a:prstGeom>
+          <a:noFill/>
+          <a:ln/>
+        </p:spPr>
+        <p:txBody>
+          <a:bodyPr wrap="square" lIns="0" tIns="0" rIns="0" bIns="0" rtlCol="0" anchor="ctr"/>
+          <a:lstStyle/>
+          <a:p>
+            <a:pPr algn="ctr" indent="0" marL="0">
+              <a:buNone/>
+            </a:pPr>
+            <a:r>
+              <a:rPr lang="en-US" sz="1500" b="1" dirty="0">
+                <a:solidFill>
+                  <a:srgbClr val="003A63"/>
+                </a:solidFill>
+                <a:latin typeface="Aptos" pitchFamily="34" charset="0"/>
+                <a:ea typeface="Aptos" pitchFamily="34" charset="-122"/>
+                <a:cs typeface="Aptos" pitchFamily="34" charset="-120"/>
+              </a:rPr>
+              <a:t>Risk</a:t>
+            </a:r>
+            <a:endParaRPr lang="en-US" sz="1500" dirty="0"/>
+          </a:p>
+        </p:txBody>
+      </p:sp>
+      <p:sp>
+        <p:nvSpPr>
+          <p:cNvPr id="16" name="Shape 14"/>
+          <p:cNvSpPr/>
+          <p:nvPr/>
+        </p:nvSpPr>
+        <p:spPr>
+          <a:xfrm>
+            <a:off x="8366760" y="3639312"/>
+            <a:ext cx="2011680" cy="0"/>
+          </a:xfrm>
+          <a:prstGeom prst="line">
+            <a:avLst/>
+          </a:prstGeom>
+          <a:noFill/>
+          <a:ln w="63500">
+            <a:solidFill>
+              <a:srgbClr val="2F8A28"/>
+            </a:solidFill>
+            <a:prstDash val="solid"/>
+          </a:ln>
+        </p:spPr>
+      </p:sp>
+      <p:sp>
+        <p:nvSpPr>
+          <p:cNvPr id="17" name="Text 15"/>
+          <p:cNvSpPr/>
+          <p:nvPr/>
+        </p:nvSpPr>
+        <p:spPr>
+          <a:xfrm>
+            <a:off x="7909560" y="3849624"/>
+            <a:ext cx="2926080" cy="164592"/>
+          </a:xfrm>
+          <a:prstGeom prst="rect">
+            <a:avLst/>
+          </a:prstGeom>
+          <a:noFill/>
+          <a:ln/>
+        </p:spPr>
+        <p:txBody>
+          <a:bodyPr wrap="square" lIns="0" tIns="0" rIns="0" bIns="0" rtlCol="0" anchor="ctr"/>
+          <a:lstStyle/>
+          <a:p>
+            <a:pPr algn="ctr" indent="0" marL="0">
+              <a:buNone/>
+            </a:pPr>
+            <a:r>
+              <a:rPr lang="en-US" sz="900" dirty="0">
+                <a:solidFill>
+                  <a:srgbClr val="003A63"/>
+                </a:solidFill>
+                <a:latin typeface="Aptos" pitchFamily="34" charset="0"/>
+                <a:ea typeface="Aptos" pitchFamily="34" charset="-122"/>
+                <a:cs typeface="Aptos" pitchFamily="34" charset="-120"/>
+              </a:rPr>
+              <a:t>Human review</a:t>
+            </a:r>
+            <a:endParaRPr lang="en-US" sz="900" dirty="0"/>
+          </a:p>
+        </p:txBody>
+      </p:sp>
+      <p:sp>
+        <p:nvSpPr>
+          <p:cNvPr id="18" name="Shape 16"/>
+          <p:cNvSpPr/>
+          <p:nvPr/>
+        </p:nvSpPr>
+        <p:spPr>
+          <a:xfrm>
+            <a:off x="7635240" y="4498848"/>
+            <a:ext cx="3474720" cy="1143000"/>
+          </a:xfrm>
+          <a:prstGeom prst="roundRect">
+            <a:avLst>
+              <a:gd name="adj" fmla="val 9600"/>
             </a:avLst>
           </a:prstGeom>
           <a:solidFill>
@@ -4765,14 +5114,14 @@
       </p:sp>
       <p:sp>
         <p:nvSpPr>
-          <p:cNvPr id="16" name="Text 14"/>
-          <p:cNvSpPr/>
-          <p:nvPr/>
-        </p:nvSpPr>
-        <p:spPr>
-          <a:xfrm>
-            <a:off x="8074152" y="3666744"/>
-            <a:ext cx="2825496" cy="256032"/>
+          <p:cNvPr id="19" name="Text 17"/>
+          <p:cNvSpPr/>
+          <p:nvPr/>
+        </p:nvSpPr>
+        <p:spPr>
+          <a:xfrm>
+            <a:off x="7799832" y="4645152"/>
+            <a:ext cx="3145536" cy="256032"/>
           </a:xfrm>
           <a:prstGeom prst="rect">
             <a:avLst/>
@@ -4796,7 +5145,7 @@
                 <a:ea typeface="Aptos" pitchFamily="34" charset="-122"/>
                 <a:cs typeface="Aptos" pitchFamily="34" charset="-120"/>
               </a:rPr>
-              <a:t>Use this for</a:t>
+              <a:t>Safeguard to plan</a:t>
             </a:r>
             <a:endParaRPr lang="en-US" sz="1300" dirty="0"/>
           </a:p>
@@ -4804,14 +5153,14 @@
       </p:sp>
       <p:sp>
         <p:nvSpPr>
-          <p:cNvPr id="17" name="Text 15"/>
-          <p:cNvSpPr/>
-          <p:nvPr/>
-        </p:nvSpPr>
-        <p:spPr>
-          <a:xfrm>
-            <a:off x="8074152" y="4023360"/>
-            <a:ext cx="2825496" cy="1097280"/>
+          <p:cNvPr id="20" name="Text 18"/>
+          <p:cNvSpPr/>
+          <p:nvPr/>
+        </p:nvSpPr>
+        <p:spPr>
+          <a:xfrm>
+            <a:off x="7799832" y="5001768"/>
+            <a:ext cx="3145536" cy="502920"/>
           </a:xfrm>
           <a:prstGeom prst="rect">
             <a:avLst/>
@@ -4837,7 +5186,7 @@
                 <a:ea typeface="Aptos" pitchFamily="34" charset="-122"/>
                 <a:cs typeface="Aptos" pitchFamily="34" charset="-120"/>
               </a:rPr>
-              <a:t>Connect the concept to public health decisions, safeguards, documentation, or implementation work.</a:t>
+              <a:t>Identify what could go wrong, who could be affected, what safeguards are needed, and what evidence should be reviewed before use expands.</a:t>
             </a:r>
             <a:endParaRPr lang="en-US" sz="1550" dirty="0"/>
           </a:p>
@@ -5011,8 +5360,8 @@
         </p:nvSpPr>
         <p:spPr>
           <a:xfrm>
-            <a:off x="9966960" y="6537960"/>
-            <a:ext cx="1645920" cy="201168"/>
+            <a:off x="9646920" y="6537960"/>
+            <a:ext cx="1965960" cy="201168"/>
           </a:xfrm>
           <a:prstGeom prst="rect">
             <a:avLst/>
@@ -5036,7 +5385,7 @@
                 <a:ea typeface="Aptos" pitchFamily="34" charset="-122"/>
                 <a:cs typeface="Aptos" pitchFamily="34" charset="-120"/>
               </a:rPr>
-              <a:t>Â© Paula Soper</a:t>
+              <a:t>Copyright Paula Soper</a:t>
             </a:r>
             <a:endParaRPr lang="en-US" sz="800" dirty="0"/>
           </a:p>
@@ -5131,7 +5480,7 @@
         <p:spPr>
           <a:xfrm>
             <a:off x="868680" y="1508760"/>
-            <a:ext cx="6537960" cy="4160520"/>
+            <a:ext cx="6309360" cy="4160520"/>
           </a:xfrm>
           <a:prstGeom prst="rect">
             <a:avLst/>
@@ -5196,12 +5545,12 @@
         </p:nvSpPr>
         <p:spPr>
           <a:xfrm>
-            <a:off x="7909560" y="1417320"/>
-            <a:ext cx="3154680" cy="1828800"/>
+            <a:off x="7635240" y="1325880"/>
+            <a:ext cx="3474720" cy="1325880"/>
           </a:xfrm>
           <a:prstGeom prst="roundRect">
             <a:avLst>
-              <a:gd name="adj" fmla="val 6000"/>
+              <a:gd name="adj" fmla="val 8276"/>
             </a:avLst>
           </a:prstGeom>
           <a:solidFill>
@@ -5223,8 +5572,8 @@
         </p:nvSpPr>
         <p:spPr>
           <a:xfrm>
-            <a:off x="8074152" y="1563624"/>
-            <a:ext cx="2825496" cy="256032"/>
+            <a:off x="7799832" y="1472184"/>
+            <a:ext cx="3145536" cy="256032"/>
           </a:xfrm>
           <a:prstGeom prst="rect">
             <a:avLst/>
@@ -5248,7 +5597,7 @@
                 <a:ea typeface="Aptos" pitchFamily="34" charset="-122"/>
                 <a:cs typeface="Aptos" pitchFamily="34" charset="-120"/>
               </a:rPr>
-              <a:t>Key idea</a:t>
+              <a:t>Risk check</a:t>
             </a:r>
             <a:endParaRPr lang="en-US" sz="1300" dirty="0"/>
           </a:p>
@@ -5262,8 +5611,8 @@
         </p:nvSpPr>
         <p:spPr>
           <a:xfrm>
-            <a:off x="8074152" y="1920240"/>
-            <a:ext cx="2825496" cy="1188720"/>
+            <a:off x="7799832" y="1828800"/>
+            <a:ext cx="3145536" cy="685800"/>
           </a:xfrm>
           <a:prstGeom prst="rect">
             <a:avLst/>
@@ -5303,12 +5652,165 @@
         </p:nvSpPr>
         <p:spPr>
           <a:xfrm>
-            <a:off x="7909560" y="3520440"/>
-            <a:ext cx="3154680" cy="1737360"/>
+            <a:off x="7635240" y="2788920"/>
+            <a:ext cx="3474720" cy="1536192"/>
           </a:xfrm>
           <a:prstGeom prst="roundRect">
             <a:avLst>
-              <a:gd name="adj" fmla="val 6316"/>
+              <a:gd name="adj" fmla="val 7143"/>
+            </a:avLst>
+          </a:prstGeom>
+          <a:solidFill>
+            <a:srgbClr val="FFFFFF">
+              <a:alpha val="88000"/>
+            </a:srgbClr>
+          </a:solidFill>
+          <a:ln w="12700">
+            <a:solidFill>
+              <a:srgbClr val="D6E8F2"/>
+            </a:solidFill>
+            <a:prstDash val="solid"/>
+          </a:ln>
+        </p:spPr>
+      </p:sp>
+      <p:sp>
+        <p:nvSpPr>
+          <p:cNvPr id="14" name="Shape 12"/>
+          <p:cNvSpPr/>
+          <p:nvPr/>
+        </p:nvSpPr>
+        <p:spPr>
+          <a:xfrm>
+            <a:off x="8046720" y="3108960"/>
+            <a:ext cx="2651760" cy="896112"/>
+          </a:xfrm>
+          <a:prstGeom prst="arc">
+            <a:avLst/>
+          </a:prstGeom>
+          <a:noFill/>
+          <a:ln w="25400">
+            <a:solidFill>
+              <a:srgbClr val="0068B7"/>
+            </a:solidFill>
+            <a:prstDash val="solid"/>
+          </a:ln>
+        </p:spPr>
+      </p:sp>
+      <p:sp>
+        <p:nvSpPr>
+          <p:cNvPr id="15" name="Text 13"/>
+          <p:cNvSpPr/>
+          <p:nvPr/>
+        </p:nvSpPr>
+        <p:spPr>
+          <a:xfrm>
+            <a:off x="7909560" y="3099816"/>
+            <a:ext cx="2926080" cy="256032"/>
+          </a:xfrm>
+          <a:prstGeom prst="rect">
+            <a:avLst/>
+          </a:prstGeom>
+          <a:noFill/>
+          <a:ln/>
+        </p:spPr>
+        <p:txBody>
+          <a:bodyPr wrap="square" lIns="0" tIns="0" rIns="0" bIns="0" rtlCol="0" anchor="ctr"/>
+          <a:lstStyle/>
+          <a:p>
+            <a:pPr algn="ctr" indent="0" marL="0">
+              <a:buNone/>
+            </a:pPr>
+            <a:r>
+              <a:rPr lang="en-US" sz="1500" b="1" dirty="0">
+                <a:solidFill>
+                  <a:srgbClr val="003A63"/>
+                </a:solidFill>
+                <a:latin typeface="Aptos" pitchFamily="34" charset="0"/>
+                <a:ea typeface="Aptos" pitchFamily="34" charset="-122"/>
+                <a:cs typeface="Aptos" pitchFamily="34" charset="-120"/>
+              </a:rPr>
+              <a:t>Risk</a:t>
+            </a:r>
+            <a:endParaRPr lang="en-US" sz="1500" dirty="0"/>
+          </a:p>
+        </p:txBody>
+      </p:sp>
+      <p:sp>
+        <p:nvSpPr>
+          <p:cNvPr id="16" name="Shape 14"/>
+          <p:cNvSpPr/>
+          <p:nvPr/>
+        </p:nvSpPr>
+        <p:spPr>
+          <a:xfrm>
+            <a:off x="8366760" y="3639312"/>
+            <a:ext cx="2011680" cy="0"/>
+          </a:xfrm>
+          <a:prstGeom prst="line">
+            <a:avLst/>
+          </a:prstGeom>
+          <a:noFill/>
+          <a:ln w="63500">
+            <a:solidFill>
+              <a:srgbClr val="2F8A28"/>
+            </a:solidFill>
+            <a:prstDash val="solid"/>
+          </a:ln>
+        </p:spPr>
+      </p:sp>
+      <p:sp>
+        <p:nvSpPr>
+          <p:cNvPr id="17" name="Text 15"/>
+          <p:cNvSpPr/>
+          <p:nvPr/>
+        </p:nvSpPr>
+        <p:spPr>
+          <a:xfrm>
+            <a:off x="7909560" y="3849624"/>
+            <a:ext cx="2926080" cy="164592"/>
+          </a:xfrm>
+          <a:prstGeom prst="rect">
+            <a:avLst/>
+          </a:prstGeom>
+          <a:noFill/>
+          <a:ln/>
+        </p:spPr>
+        <p:txBody>
+          <a:bodyPr wrap="square" lIns="0" tIns="0" rIns="0" bIns="0" rtlCol="0" anchor="ctr"/>
+          <a:lstStyle/>
+          <a:p>
+            <a:pPr algn="ctr" indent="0" marL="0">
+              <a:buNone/>
+            </a:pPr>
+            <a:r>
+              <a:rPr lang="en-US" sz="900" dirty="0">
+                <a:solidFill>
+                  <a:srgbClr val="003A63"/>
+                </a:solidFill>
+                <a:latin typeface="Aptos" pitchFamily="34" charset="0"/>
+                <a:ea typeface="Aptos" pitchFamily="34" charset="-122"/>
+                <a:cs typeface="Aptos" pitchFamily="34" charset="-120"/>
+              </a:rPr>
+              <a:t>Human review</a:t>
+            </a:r>
+            <a:endParaRPr lang="en-US" sz="900" dirty="0"/>
+          </a:p>
+        </p:txBody>
+      </p:sp>
+      <p:sp>
+        <p:nvSpPr>
+          <p:cNvPr id="18" name="Shape 16"/>
+          <p:cNvSpPr/>
+          <p:nvPr/>
+        </p:nvSpPr>
+        <p:spPr>
+          <a:xfrm>
+            <a:off x="7635240" y="4498848"/>
+            <a:ext cx="3474720" cy="1143000"/>
+          </a:xfrm>
+          <a:prstGeom prst="roundRect">
+            <a:avLst>
+              <a:gd name="adj" fmla="val 9600"/>
             </a:avLst>
           </a:prstGeom>
           <a:solidFill>
@@ -5324,14 +5826,14 @@
       </p:sp>
       <p:sp>
         <p:nvSpPr>
-          <p:cNvPr id="14" name="Text 12"/>
-          <p:cNvSpPr/>
-          <p:nvPr/>
-        </p:nvSpPr>
-        <p:spPr>
-          <a:xfrm>
-            <a:off x="8074152" y="3666744"/>
-            <a:ext cx="2825496" cy="256032"/>
+          <p:cNvPr id="19" name="Text 17"/>
+          <p:cNvSpPr/>
+          <p:nvPr/>
+        </p:nvSpPr>
+        <p:spPr>
+          <a:xfrm>
+            <a:off x="7799832" y="4645152"/>
+            <a:ext cx="3145536" cy="256032"/>
           </a:xfrm>
           <a:prstGeom prst="rect">
             <a:avLst/>
@@ -5355,7 +5857,7 @@
                 <a:ea typeface="Aptos" pitchFamily="34" charset="-122"/>
                 <a:cs typeface="Aptos" pitchFamily="34" charset="-120"/>
               </a:rPr>
-              <a:t>Use this for</a:t>
+              <a:t>Safeguard to plan</a:t>
             </a:r>
             <a:endParaRPr lang="en-US" sz="1300" dirty="0"/>
           </a:p>
@@ -5363,14 +5865,14 @@
       </p:sp>
       <p:sp>
         <p:nvSpPr>
-          <p:cNvPr id="15" name="Text 13"/>
-          <p:cNvSpPr/>
-          <p:nvPr/>
-        </p:nvSpPr>
-        <p:spPr>
-          <a:xfrm>
-            <a:off x="8074152" y="4023360"/>
-            <a:ext cx="2825496" cy="1097280"/>
+          <p:cNvPr id="20" name="Text 18"/>
+          <p:cNvSpPr/>
+          <p:nvPr/>
+        </p:nvSpPr>
+        <p:spPr>
+          <a:xfrm>
+            <a:off x="7799832" y="5001768"/>
+            <a:ext cx="3145536" cy="502920"/>
           </a:xfrm>
           <a:prstGeom prst="rect">
             <a:avLst/>
@@ -5396,7 +5898,7 @@
                 <a:ea typeface="Aptos" pitchFamily="34" charset="-122"/>
                 <a:cs typeface="Aptos" pitchFamily="34" charset="-120"/>
               </a:rPr>
-              <a:t>Connect the concept to public health decisions, safeguards, documentation, or implementation work.</a:t>
+              <a:t>Identify what could go wrong, who could be affected, what safeguards are needed, and what evidence should be reviewed before use expands.</a:t>
             </a:r>
             <a:endParaRPr lang="en-US" sz="1550" dirty="0"/>
           </a:p>
@@ -5570,8 +6072,8 @@
         </p:nvSpPr>
         <p:spPr>
           <a:xfrm>
-            <a:off x="9966960" y="6537960"/>
-            <a:ext cx="1645920" cy="201168"/>
+            <a:off x="9646920" y="6537960"/>
+            <a:ext cx="1965960" cy="201168"/>
           </a:xfrm>
           <a:prstGeom prst="rect">
             <a:avLst/>
@@ -5595,7 +6097,7 @@
                 <a:ea typeface="Aptos" pitchFamily="34" charset="-122"/>
                 <a:cs typeface="Aptos" pitchFamily="34" charset="-120"/>
               </a:rPr>
-              <a:t>Â© Paula Soper</a:t>
+              <a:t>Copyright Paula Soper</a:t>
             </a:r>
             <a:endParaRPr lang="en-US" sz="800" dirty="0"/>
           </a:p>
@@ -5642,77 +6144,13 @@
       </p:sp>
       <p:sp>
         <p:nvSpPr>
-          <p:cNvPr id="8" name="Shape 6"/>
+          <p:cNvPr id="8" name="Text 6"/>
           <p:cNvSpPr/>
           <p:nvPr/>
         </p:nvSpPr>
         <p:spPr>
           <a:xfrm>
             <a:off x="640080" y="658368"/>
-            <a:ext cx="420624" cy="420624"/>
-          </a:xfrm>
-          <a:prstGeom prst="ellipse">
-            <a:avLst/>
-          </a:prstGeom>
-          <a:solidFill>
-            <a:srgbClr val="0068B7"/>
-          </a:solidFill>
-          <a:ln w="12700">
-            <a:solidFill>
-              <a:srgbClr val="0068B7"/>
-            </a:solidFill>
-            <a:prstDash val="solid"/>
-          </a:ln>
-        </p:spPr>
-      </p:sp>
-      <p:sp>
-        <p:nvSpPr>
-          <p:cNvPr id="9" name="Text 7"/>
-          <p:cNvSpPr/>
-          <p:nvPr/>
-        </p:nvSpPr>
-        <p:spPr>
-          <a:xfrm>
-            <a:off x="640080" y="731520"/>
-            <a:ext cx="420624" cy="164592"/>
-          </a:xfrm>
-          <a:prstGeom prst="rect">
-            <a:avLst/>
-          </a:prstGeom>
-          <a:noFill/>
-          <a:ln/>
-        </p:spPr>
-        <p:txBody>
-          <a:bodyPr wrap="square" lIns="0" tIns="0" rIns="0" bIns="0" rtlCol="0" anchor="ctr"/>
-          <a:lstStyle/>
-          <a:p>
-            <a:pPr algn="ctr" indent="0" marL="0">
-              <a:buNone/>
-            </a:pPr>
-            <a:r>
-              <a:rPr lang="en-US" sz="1100" b="1" dirty="0">
-                <a:solidFill>
-                  <a:srgbClr val="FFFFFF"/>
-                </a:solidFill>
-                <a:latin typeface="Aptos" pitchFamily="34" charset="0"/>
-                <a:ea typeface="Aptos" pitchFamily="34" charset="-122"/>
-                <a:cs typeface="Aptos" pitchFamily="34" charset="-120"/>
-              </a:rPr>
-              <a:t>7</a:t>
-            </a:r>
-            <a:endParaRPr lang="en-US" sz="1100" dirty="0"/>
-          </a:p>
-        </p:txBody>
-      </p:sp>
-      <p:sp>
-        <p:nvSpPr>
-          <p:cNvPr id="10" name="Text 8"/>
-          <p:cNvSpPr/>
-          <p:nvPr/>
-        </p:nvSpPr>
-        <p:spPr>
-          <a:xfrm>
-            <a:off x="640080" y="621792"/>
             <a:ext cx="10881360" cy="713232"/>
           </a:xfrm>
           <a:prstGeom prst="rect">
@@ -5747,14 +6185,14 @@
       </p:sp>
       <p:sp>
         <p:nvSpPr>
-          <p:cNvPr id="11" name="Text 9"/>
+          <p:cNvPr id="9" name="Text 7"/>
           <p:cNvSpPr/>
           <p:nvPr/>
         </p:nvSpPr>
         <p:spPr>
           <a:xfrm>
             <a:off x="868680" y="1508760"/>
-            <a:ext cx="6537960" cy="4160520"/>
+            <a:ext cx="6309360" cy="4160520"/>
           </a:xfrm>
           <a:prstGeom prst="rect">
             <a:avLst/>
@@ -5813,18 +6251,18 @@
       </p:sp>
       <p:sp>
         <p:nvSpPr>
-          <p:cNvPr id="12" name="Shape 10"/>
-          <p:cNvSpPr/>
-          <p:nvPr/>
-        </p:nvSpPr>
-        <p:spPr>
-          <a:xfrm>
-            <a:off x="7909560" y="1417320"/>
-            <a:ext cx="3154680" cy="1828800"/>
+          <p:cNvPr id="10" name="Shape 8"/>
+          <p:cNvSpPr/>
+          <p:nvPr/>
+        </p:nvSpPr>
+        <p:spPr>
+          <a:xfrm>
+            <a:off x="7635240" y="1325880"/>
+            <a:ext cx="3474720" cy="1325880"/>
           </a:xfrm>
           <a:prstGeom prst="roundRect">
             <a:avLst>
-              <a:gd name="adj" fmla="val 6000"/>
+              <a:gd name="adj" fmla="val 8276"/>
             </a:avLst>
           </a:prstGeom>
           <a:solidFill>
@@ -5840,14 +6278,14 @@
       </p:sp>
       <p:sp>
         <p:nvSpPr>
-          <p:cNvPr id="13" name="Text 11"/>
-          <p:cNvSpPr/>
-          <p:nvPr/>
-        </p:nvSpPr>
-        <p:spPr>
-          <a:xfrm>
-            <a:off x="8074152" y="1563624"/>
-            <a:ext cx="2825496" cy="256032"/>
+          <p:cNvPr id="11" name="Text 9"/>
+          <p:cNvSpPr/>
+          <p:nvPr/>
+        </p:nvSpPr>
+        <p:spPr>
+          <a:xfrm>
+            <a:off x="7799832" y="1472184"/>
+            <a:ext cx="3145536" cy="256032"/>
           </a:xfrm>
           <a:prstGeom prst="rect">
             <a:avLst/>
@@ -5871,7 +6309,7 @@
                 <a:ea typeface="Aptos" pitchFamily="34" charset="-122"/>
                 <a:cs typeface="Aptos" pitchFamily="34" charset="-120"/>
               </a:rPr>
-              <a:t>Key idea</a:t>
+              <a:t>Risk check</a:t>
             </a:r>
             <a:endParaRPr lang="en-US" sz="1300" dirty="0"/>
           </a:p>
@@ -5879,14 +6317,14 @@
       </p:sp>
       <p:sp>
         <p:nvSpPr>
-          <p:cNvPr id="14" name="Text 12"/>
-          <p:cNvSpPr/>
-          <p:nvPr/>
-        </p:nvSpPr>
-        <p:spPr>
-          <a:xfrm>
-            <a:off x="8074152" y="1920240"/>
-            <a:ext cx="2825496" cy="1188720"/>
+          <p:cNvPr id="12" name="Text 10"/>
+          <p:cNvSpPr/>
+          <p:nvPr/>
+        </p:nvSpPr>
+        <p:spPr>
+          <a:xfrm>
+            <a:off x="7799832" y="1828800"/>
+            <a:ext cx="3145536" cy="685800"/>
           </a:xfrm>
           <a:prstGeom prst="rect">
             <a:avLst/>
@@ -5920,18 +6358,171 @@
       </p:sp>
       <p:sp>
         <p:nvSpPr>
-          <p:cNvPr id="15" name="Shape 13"/>
-          <p:cNvSpPr/>
-          <p:nvPr/>
-        </p:nvSpPr>
-        <p:spPr>
-          <a:xfrm>
-            <a:off x="7909560" y="3520440"/>
-            <a:ext cx="3154680" cy="1737360"/>
+          <p:cNvPr id="13" name="Shape 11"/>
+          <p:cNvSpPr/>
+          <p:nvPr/>
+        </p:nvSpPr>
+        <p:spPr>
+          <a:xfrm>
+            <a:off x="7635240" y="2788920"/>
+            <a:ext cx="3474720" cy="1536192"/>
           </a:xfrm>
           <a:prstGeom prst="roundRect">
             <a:avLst>
-              <a:gd name="adj" fmla="val 6316"/>
+              <a:gd name="adj" fmla="val 7143"/>
+            </a:avLst>
+          </a:prstGeom>
+          <a:solidFill>
+            <a:srgbClr val="FFFFFF">
+              <a:alpha val="88000"/>
+            </a:srgbClr>
+          </a:solidFill>
+          <a:ln w="12700">
+            <a:solidFill>
+              <a:srgbClr val="D6E8F2"/>
+            </a:solidFill>
+            <a:prstDash val="solid"/>
+          </a:ln>
+        </p:spPr>
+      </p:sp>
+      <p:sp>
+        <p:nvSpPr>
+          <p:cNvPr id="14" name="Shape 12"/>
+          <p:cNvSpPr/>
+          <p:nvPr/>
+        </p:nvSpPr>
+        <p:spPr>
+          <a:xfrm>
+            <a:off x="8046720" y="3108960"/>
+            <a:ext cx="2651760" cy="896112"/>
+          </a:xfrm>
+          <a:prstGeom prst="arc">
+            <a:avLst/>
+          </a:prstGeom>
+          <a:noFill/>
+          <a:ln w="25400">
+            <a:solidFill>
+              <a:srgbClr val="0068B7"/>
+            </a:solidFill>
+            <a:prstDash val="solid"/>
+          </a:ln>
+        </p:spPr>
+      </p:sp>
+      <p:sp>
+        <p:nvSpPr>
+          <p:cNvPr id="15" name="Text 13"/>
+          <p:cNvSpPr/>
+          <p:nvPr/>
+        </p:nvSpPr>
+        <p:spPr>
+          <a:xfrm>
+            <a:off x="7909560" y="3099816"/>
+            <a:ext cx="2926080" cy="256032"/>
+          </a:xfrm>
+          <a:prstGeom prst="rect">
+            <a:avLst/>
+          </a:prstGeom>
+          <a:noFill/>
+          <a:ln/>
+        </p:spPr>
+        <p:txBody>
+          <a:bodyPr wrap="square" lIns="0" tIns="0" rIns="0" bIns="0" rtlCol="0" anchor="ctr"/>
+          <a:lstStyle/>
+          <a:p>
+            <a:pPr algn="ctr" indent="0" marL="0">
+              <a:buNone/>
+            </a:pPr>
+            <a:r>
+              <a:rPr lang="en-US" sz="1500" b="1" dirty="0">
+                <a:solidFill>
+                  <a:srgbClr val="003A63"/>
+                </a:solidFill>
+                <a:latin typeface="Aptos" pitchFamily="34" charset="0"/>
+                <a:ea typeface="Aptos" pitchFamily="34" charset="-122"/>
+                <a:cs typeface="Aptos" pitchFamily="34" charset="-120"/>
+              </a:rPr>
+              <a:t>Risk</a:t>
+            </a:r>
+            <a:endParaRPr lang="en-US" sz="1500" dirty="0"/>
+          </a:p>
+        </p:txBody>
+      </p:sp>
+      <p:sp>
+        <p:nvSpPr>
+          <p:cNvPr id="16" name="Shape 14"/>
+          <p:cNvSpPr/>
+          <p:nvPr/>
+        </p:nvSpPr>
+        <p:spPr>
+          <a:xfrm>
+            <a:off x="8366760" y="3639312"/>
+            <a:ext cx="2011680" cy="0"/>
+          </a:xfrm>
+          <a:prstGeom prst="line">
+            <a:avLst/>
+          </a:prstGeom>
+          <a:noFill/>
+          <a:ln w="63500">
+            <a:solidFill>
+              <a:srgbClr val="2F8A28"/>
+            </a:solidFill>
+            <a:prstDash val="solid"/>
+          </a:ln>
+        </p:spPr>
+      </p:sp>
+      <p:sp>
+        <p:nvSpPr>
+          <p:cNvPr id="17" name="Text 15"/>
+          <p:cNvSpPr/>
+          <p:nvPr/>
+        </p:nvSpPr>
+        <p:spPr>
+          <a:xfrm>
+            <a:off x="7909560" y="3849624"/>
+            <a:ext cx="2926080" cy="164592"/>
+          </a:xfrm>
+          <a:prstGeom prst="rect">
+            <a:avLst/>
+          </a:prstGeom>
+          <a:noFill/>
+          <a:ln/>
+        </p:spPr>
+        <p:txBody>
+          <a:bodyPr wrap="square" lIns="0" tIns="0" rIns="0" bIns="0" rtlCol="0" anchor="ctr"/>
+          <a:lstStyle/>
+          <a:p>
+            <a:pPr algn="ctr" indent="0" marL="0">
+              <a:buNone/>
+            </a:pPr>
+            <a:r>
+              <a:rPr lang="en-US" sz="900" dirty="0">
+                <a:solidFill>
+                  <a:srgbClr val="003A63"/>
+                </a:solidFill>
+                <a:latin typeface="Aptos" pitchFamily="34" charset="0"/>
+                <a:ea typeface="Aptos" pitchFamily="34" charset="-122"/>
+                <a:cs typeface="Aptos" pitchFamily="34" charset="-120"/>
+              </a:rPr>
+              <a:t>Human review</a:t>
+            </a:r>
+            <a:endParaRPr lang="en-US" sz="900" dirty="0"/>
+          </a:p>
+        </p:txBody>
+      </p:sp>
+      <p:sp>
+        <p:nvSpPr>
+          <p:cNvPr id="18" name="Shape 16"/>
+          <p:cNvSpPr/>
+          <p:nvPr/>
+        </p:nvSpPr>
+        <p:spPr>
+          <a:xfrm>
+            <a:off x="7635240" y="4498848"/>
+            <a:ext cx="3474720" cy="1143000"/>
+          </a:xfrm>
+          <a:prstGeom prst="roundRect">
+            <a:avLst>
+              <a:gd name="adj" fmla="val 9600"/>
             </a:avLst>
           </a:prstGeom>
           <a:solidFill>
@@ -5947,14 +6538,14 @@
       </p:sp>
       <p:sp>
         <p:nvSpPr>
-          <p:cNvPr id="16" name="Text 14"/>
-          <p:cNvSpPr/>
-          <p:nvPr/>
-        </p:nvSpPr>
-        <p:spPr>
-          <a:xfrm>
-            <a:off x="8074152" y="3666744"/>
-            <a:ext cx="2825496" cy="256032"/>
+          <p:cNvPr id="19" name="Text 17"/>
+          <p:cNvSpPr/>
+          <p:nvPr/>
+        </p:nvSpPr>
+        <p:spPr>
+          <a:xfrm>
+            <a:off x="7799832" y="4645152"/>
+            <a:ext cx="3145536" cy="256032"/>
           </a:xfrm>
           <a:prstGeom prst="rect">
             <a:avLst/>
@@ -5978,7 +6569,7 @@
                 <a:ea typeface="Aptos" pitchFamily="34" charset="-122"/>
                 <a:cs typeface="Aptos" pitchFamily="34" charset="-120"/>
               </a:rPr>
-              <a:t>Use this for</a:t>
+              <a:t>Safeguard to plan</a:t>
             </a:r>
             <a:endParaRPr lang="en-US" sz="1300" dirty="0"/>
           </a:p>
@@ -5986,14 +6577,14 @@
       </p:sp>
       <p:sp>
         <p:nvSpPr>
-          <p:cNvPr id="17" name="Text 15"/>
-          <p:cNvSpPr/>
-          <p:nvPr/>
-        </p:nvSpPr>
-        <p:spPr>
-          <a:xfrm>
-            <a:off x="8074152" y="4023360"/>
-            <a:ext cx="2825496" cy="1097280"/>
+          <p:cNvPr id="20" name="Text 18"/>
+          <p:cNvSpPr/>
+          <p:nvPr/>
+        </p:nvSpPr>
+        <p:spPr>
+          <a:xfrm>
+            <a:off x="7799832" y="5001768"/>
+            <a:ext cx="3145536" cy="502920"/>
           </a:xfrm>
           <a:prstGeom prst="rect">
             <a:avLst/>
@@ -6019,7 +6610,7 @@
                 <a:ea typeface="Aptos" pitchFamily="34" charset="-122"/>
                 <a:cs typeface="Aptos" pitchFamily="34" charset="-120"/>
               </a:rPr>
-              <a:t>Connect the concept to public health decisions, safeguards, documentation, or implementation work.</a:t>
+              <a:t>Identify what could go wrong, who could be affected, what safeguards are needed, and what evidence should be reviewed before use expands.</a:t>
             </a:r>
             <a:endParaRPr lang="en-US" sz="1550" dirty="0"/>
           </a:p>
@@ -6193,8 +6784,8 @@
         </p:nvSpPr>
         <p:spPr>
           <a:xfrm>
-            <a:off x="9966960" y="6537960"/>
-            <a:ext cx="1645920" cy="201168"/>
+            <a:off x="9646920" y="6537960"/>
+            <a:ext cx="1965960" cy="201168"/>
           </a:xfrm>
           <a:prstGeom prst="rect">
             <a:avLst/>
@@ -6218,7 +6809,7 @@
                 <a:ea typeface="Aptos" pitchFamily="34" charset="-122"/>
                 <a:cs typeface="Aptos" pitchFamily="34" charset="-120"/>
               </a:rPr>
-              <a:t>Â© Paula Soper</a:t>
+              <a:t>Copyright Paula Soper</a:t>
             </a:r>
             <a:endParaRPr lang="en-US" sz="800" dirty="0"/>
           </a:p>
@@ -6265,77 +6856,13 @@
       </p:sp>
       <p:sp>
         <p:nvSpPr>
-          <p:cNvPr id="8" name="Shape 6"/>
+          <p:cNvPr id="8" name="Text 6"/>
           <p:cNvSpPr/>
           <p:nvPr/>
         </p:nvSpPr>
         <p:spPr>
           <a:xfrm>
             <a:off x="640080" y="658368"/>
-            <a:ext cx="420624" cy="420624"/>
-          </a:xfrm>
-          <a:prstGeom prst="ellipse">
-            <a:avLst/>
-          </a:prstGeom>
-          <a:solidFill>
-            <a:srgbClr val="0068B7"/>
-          </a:solidFill>
-          <a:ln w="12700">
-            <a:solidFill>
-              <a:srgbClr val="0068B7"/>
-            </a:solidFill>
-            <a:prstDash val="solid"/>
-          </a:ln>
-        </p:spPr>
-      </p:sp>
-      <p:sp>
-        <p:nvSpPr>
-          <p:cNvPr id="9" name="Text 7"/>
-          <p:cNvSpPr/>
-          <p:nvPr/>
-        </p:nvSpPr>
-        <p:spPr>
-          <a:xfrm>
-            <a:off x="640080" y="731520"/>
-            <a:ext cx="420624" cy="164592"/>
-          </a:xfrm>
-          <a:prstGeom prst="rect">
-            <a:avLst/>
-          </a:prstGeom>
-          <a:noFill/>
-          <a:ln/>
-        </p:spPr>
-        <p:txBody>
-          <a:bodyPr wrap="square" lIns="0" tIns="0" rIns="0" bIns="0" rtlCol="0" anchor="ctr"/>
-          <a:lstStyle/>
-          <a:p>
-            <a:pPr algn="ctr" indent="0" marL="0">
-              <a:buNone/>
-            </a:pPr>
-            <a:r>
-              <a:rPr lang="en-US" sz="1100" b="1" dirty="0">
-                <a:solidFill>
-                  <a:srgbClr val="FFFFFF"/>
-                </a:solidFill>
-                <a:latin typeface="Aptos" pitchFamily="34" charset="0"/>
-                <a:ea typeface="Aptos" pitchFamily="34" charset="-122"/>
-                <a:cs typeface="Aptos" pitchFamily="34" charset="-120"/>
-              </a:rPr>
-              <a:t>8</a:t>
-            </a:r>
-            <a:endParaRPr lang="en-US" sz="1100" dirty="0"/>
-          </a:p>
-        </p:txBody>
-      </p:sp>
-      <p:sp>
-        <p:nvSpPr>
-          <p:cNvPr id="10" name="Text 8"/>
-          <p:cNvSpPr/>
-          <p:nvPr/>
-        </p:nvSpPr>
-        <p:spPr>
-          <a:xfrm>
-            <a:off x="640080" y="621792"/>
             <a:ext cx="10881360" cy="713232"/>
           </a:xfrm>
           <a:prstGeom prst="rect">
@@ -6370,14 +6897,14 @@
       </p:sp>
       <p:sp>
         <p:nvSpPr>
-          <p:cNvPr id="11" name="Text 9"/>
+          <p:cNvPr id="9" name="Text 7"/>
           <p:cNvSpPr/>
           <p:nvPr/>
         </p:nvSpPr>
         <p:spPr>
           <a:xfrm>
             <a:off x="868680" y="1508760"/>
-            <a:ext cx="6537960" cy="4160520"/>
+            <a:ext cx="6309360" cy="4160520"/>
           </a:xfrm>
           <a:prstGeom prst="rect">
             <a:avLst/>
@@ -6436,18 +6963,18 @@
       </p:sp>
       <p:sp>
         <p:nvSpPr>
-          <p:cNvPr id="12" name="Shape 10"/>
-          <p:cNvSpPr/>
-          <p:nvPr/>
-        </p:nvSpPr>
-        <p:spPr>
-          <a:xfrm>
-            <a:off x="7909560" y="1417320"/>
-            <a:ext cx="3154680" cy="1828800"/>
+          <p:cNvPr id="10" name="Shape 8"/>
+          <p:cNvSpPr/>
+          <p:nvPr/>
+        </p:nvSpPr>
+        <p:spPr>
+          <a:xfrm>
+            <a:off x="7635240" y="1325880"/>
+            <a:ext cx="3474720" cy="1325880"/>
           </a:xfrm>
           <a:prstGeom prst="roundRect">
             <a:avLst>
-              <a:gd name="adj" fmla="val 6000"/>
+              <a:gd name="adj" fmla="val 8276"/>
             </a:avLst>
           </a:prstGeom>
           <a:solidFill>
@@ -6463,14 +6990,14 @@
       </p:sp>
       <p:sp>
         <p:nvSpPr>
-          <p:cNvPr id="13" name="Text 11"/>
-          <p:cNvSpPr/>
-          <p:nvPr/>
-        </p:nvSpPr>
-        <p:spPr>
-          <a:xfrm>
-            <a:off x="8074152" y="1563624"/>
-            <a:ext cx="2825496" cy="256032"/>
+          <p:cNvPr id="11" name="Text 9"/>
+          <p:cNvSpPr/>
+          <p:nvPr/>
+        </p:nvSpPr>
+        <p:spPr>
+          <a:xfrm>
+            <a:off x="7799832" y="1472184"/>
+            <a:ext cx="3145536" cy="256032"/>
           </a:xfrm>
           <a:prstGeom prst="rect">
             <a:avLst/>
@@ -6494,7 +7021,7 @@
                 <a:ea typeface="Aptos" pitchFamily="34" charset="-122"/>
                 <a:cs typeface="Aptos" pitchFamily="34" charset="-120"/>
               </a:rPr>
-              <a:t>Key idea</a:t>
+              <a:t>Risk check</a:t>
             </a:r>
             <a:endParaRPr lang="en-US" sz="1300" dirty="0"/>
           </a:p>
@@ -6502,14 +7029,14 @@
       </p:sp>
       <p:sp>
         <p:nvSpPr>
-          <p:cNvPr id="14" name="Text 12"/>
-          <p:cNvSpPr/>
-          <p:nvPr/>
-        </p:nvSpPr>
-        <p:spPr>
-          <a:xfrm>
-            <a:off x="8074152" y="1920240"/>
-            <a:ext cx="2825496" cy="1188720"/>
+          <p:cNvPr id="12" name="Text 10"/>
+          <p:cNvSpPr/>
+          <p:nvPr/>
+        </p:nvSpPr>
+        <p:spPr>
+          <a:xfrm>
+            <a:off x="7799832" y="1828800"/>
+            <a:ext cx="3145536" cy="685800"/>
           </a:xfrm>
           <a:prstGeom prst="rect">
             <a:avLst/>
@@ -6543,18 +7070,171 @@
       </p:sp>
       <p:sp>
         <p:nvSpPr>
-          <p:cNvPr id="15" name="Shape 13"/>
-          <p:cNvSpPr/>
-          <p:nvPr/>
-        </p:nvSpPr>
-        <p:spPr>
-          <a:xfrm>
-            <a:off x="7909560" y="3520440"/>
-            <a:ext cx="3154680" cy="1737360"/>
+          <p:cNvPr id="13" name="Shape 11"/>
+          <p:cNvSpPr/>
+          <p:nvPr/>
+        </p:nvSpPr>
+        <p:spPr>
+          <a:xfrm>
+            <a:off x="7635240" y="2788920"/>
+            <a:ext cx="3474720" cy="1536192"/>
           </a:xfrm>
           <a:prstGeom prst="roundRect">
             <a:avLst>
-              <a:gd name="adj" fmla="val 6316"/>
+              <a:gd name="adj" fmla="val 7143"/>
+            </a:avLst>
+          </a:prstGeom>
+          <a:solidFill>
+            <a:srgbClr val="FFFFFF">
+              <a:alpha val="88000"/>
+            </a:srgbClr>
+          </a:solidFill>
+          <a:ln w="12700">
+            <a:solidFill>
+              <a:srgbClr val="D6E8F2"/>
+            </a:solidFill>
+            <a:prstDash val="solid"/>
+          </a:ln>
+        </p:spPr>
+      </p:sp>
+      <p:sp>
+        <p:nvSpPr>
+          <p:cNvPr id="14" name="Shape 12"/>
+          <p:cNvSpPr/>
+          <p:nvPr/>
+        </p:nvSpPr>
+        <p:spPr>
+          <a:xfrm>
+            <a:off x="8046720" y="3108960"/>
+            <a:ext cx="2651760" cy="896112"/>
+          </a:xfrm>
+          <a:prstGeom prst="arc">
+            <a:avLst/>
+          </a:prstGeom>
+          <a:noFill/>
+          <a:ln w="25400">
+            <a:solidFill>
+              <a:srgbClr val="0068B7"/>
+            </a:solidFill>
+            <a:prstDash val="solid"/>
+          </a:ln>
+        </p:spPr>
+      </p:sp>
+      <p:sp>
+        <p:nvSpPr>
+          <p:cNvPr id="15" name="Text 13"/>
+          <p:cNvSpPr/>
+          <p:nvPr/>
+        </p:nvSpPr>
+        <p:spPr>
+          <a:xfrm>
+            <a:off x="7909560" y="3099816"/>
+            <a:ext cx="2926080" cy="256032"/>
+          </a:xfrm>
+          <a:prstGeom prst="rect">
+            <a:avLst/>
+          </a:prstGeom>
+          <a:noFill/>
+          <a:ln/>
+        </p:spPr>
+        <p:txBody>
+          <a:bodyPr wrap="square" lIns="0" tIns="0" rIns="0" bIns="0" rtlCol="0" anchor="ctr"/>
+          <a:lstStyle/>
+          <a:p>
+            <a:pPr algn="ctr" indent="0" marL="0">
+              <a:buNone/>
+            </a:pPr>
+            <a:r>
+              <a:rPr lang="en-US" sz="1500" b="1" dirty="0">
+                <a:solidFill>
+                  <a:srgbClr val="003A63"/>
+                </a:solidFill>
+                <a:latin typeface="Aptos" pitchFamily="34" charset="0"/>
+                <a:ea typeface="Aptos" pitchFamily="34" charset="-122"/>
+                <a:cs typeface="Aptos" pitchFamily="34" charset="-120"/>
+              </a:rPr>
+              <a:t>Risk</a:t>
+            </a:r>
+            <a:endParaRPr lang="en-US" sz="1500" dirty="0"/>
+          </a:p>
+        </p:txBody>
+      </p:sp>
+      <p:sp>
+        <p:nvSpPr>
+          <p:cNvPr id="16" name="Shape 14"/>
+          <p:cNvSpPr/>
+          <p:nvPr/>
+        </p:nvSpPr>
+        <p:spPr>
+          <a:xfrm>
+            <a:off x="8366760" y="3639312"/>
+            <a:ext cx="2011680" cy="0"/>
+          </a:xfrm>
+          <a:prstGeom prst="line">
+            <a:avLst/>
+          </a:prstGeom>
+          <a:noFill/>
+          <a:ln w="63500">
+            <a:solidFill>
+              <a:srgbClr val="2F8A28"/>
+            </a:solidFill>
+            <a:prstDash val="solid"/>
+          </a:ln>
+        </p:spPr>
+      </p:sp>
+      <p:sp>
+        <p:nvSpPr>
+          <p:cNvPr id="17" name="Text 15"/>
+          <p:cNvSpPr/>
+          <p:nvPr/>
+        </p:nvSpPr>
+        <p:spPr>
+          <a:xfrm>
+            <a:off x="7909560" y="3849624"/>
+            <a:ext cx="2926080" cy="164592"/>
+          </a:xfrm>
+          <a:prstGeom prst="rect">
+            <a:avLst/>
+          </a:prstGeom>
+          <a:noFill/>
+          <a:ln/>
+        </p:spPr>
+        <p:txBody>
+          <a:bodyPr wrap="square" lIns="0" tIns="0" rIns="0" bIns="0" rtlCol="0" anchor="ctr"/>
+          <a:lstStyle/>
+          <a:p>
+            <a:pPr algn="ctr" indent="0" marL="0">
+              <a:buNone/>
+            </a:pPr>
+            <a:r>
+              <a:rPr lang="en-US" sz="900" dirty="0">
+                <a:solidFill>
+                  <a:srgbClr val="003A63"/>
+                </a:solidFill>
+                <a:latin typeface="Aptos" pitchFamily="34" charset="0"/>
+                <a:ea typeface="Aptos" pitchFamily="34" charset="-122"/>
+                <a:cs typeface="Aptos" pitchFamily="34" charset="-120"/>
+              </a:rPr>
+              <a:t>Human review</a:t>
+            </a:r>
+            <a:endParaRPr lang="en-US" sz="900" dirty="0"/>
+          </a:p>
+        </p:txBody>
+      </p:sp>
+      <p:sp>
+        <p:nvSpPr>
+          <p:cNvPr id="18" name="Shape 16"/>
+          <p:cNvSpPr/>
+          <p:nvPr/>
+        </p:nvSpPr>
+        <p:spPr>
+          <a:xfrm>
+            <a:off x="7635240" y="4498848"/>
+            <a:ext cx="3474720" cy="1143000"/>
+          </a:xfrm>
+          <a:prstGeom prst="roundRect">
+            <a:avLst>
+              <a:gd name="adj" fmla="val 9600"/>
             </a:avLst>
           </a:prstGeom>
           <a:solidFill>
@@ -6570,14 +7250,14 @@
       </p:sp>
       <p:sp>
         <p:nvSpPr>
-          <p:cNvPr id="16" name="Text 14"/>
-          <p:cNvSpPr/>
-          <p:nvPr/>
-        </p:nvSpPr>
-        <p:spPr>
-          <a:xfrm>
-            <a:off x="8074152" y="3666744"/>
-            <a:ext cx="2825496" cy="256032"/>
+          <p:cNvPr id="19" name="Text 17"/>
+          <p:cNvSpPr/>
+          <p:nvPr/>
+        </p:nvSpPr>
+        <p:spPr>
+          <a:xfrm>
+            <a:off x="7799832" y="4645152"/>
+            <a:ext cx="3145536" cy="256032"/>
           </a:xfrm>
           <a:prstGeom prst="rect">
             <a:avLst/>
@@ -6601,7 +7281,7 @@
                 <a:ea typeface="Aptos" pitchFamily="34" charset="-122"/>
                 <a:cs typeface="Aptos" pitchFamily="34" charset="-120"/>
               </a:rPr>
-              <a:t>Use this for</a:t>
+              <a:t>Safeguard to plan</a:t>
             </a:r>
             <a:endParaRPr lang="en-US" sz="1300" dirty="0"/>
           </a:p>
@@ -6609,14 +7289,14 @@
       </p:sp>
       <p:sp>
         <p:nvSpPr>
-          <p:cNvPr id="17" name="Text 15"/>
-          <p:cNvSpPr/>
-          <p:nvPr/>
-        </p:nvSpPr>
-        <p:spPr>
-          <a:xfrm>
-            <a:off x="8074152" y="4023360"/>
-            <a:ext cx="2825496" cy="1097280"/>
+          <p:cNvPr id="20" name="Text 18"/>
+          <p:cNvSpPr/>
+          <p:nvPr/>
+        </p:nvSpPr>
+        <p:spPr>
+          <a:xfrm>
+            <a:off x="7799832" y="5001768"/>
+            <a:ext cx="3145536" cy="502920"/>
           </a:xfrm>
           <a:prstGeom prst="rect">
             <a:avLst/>
@@ -6642,7 +7322,7 @@
                 <a:ea typeface="Aptos" pitchFamily="34" charset="-122"/>
                 <a:cs typeface="Aptos" pitchFamily="34" charset="-120"/>
               </a:rPr>
-              <a:t>Connect the concept to public health decisions, safeguards, documentation, or implementation work.</a:t>
+              <a:t>Identify what could go wrong, who could be affected, what safeguards are needed, and what evidence should be reviewed before use expands.</a:t>
             </a:r>
             <a:endParaRPr lang="en-US" sz="1550" dirty="0"/>
           </a:p>
@@ -6816,8 +7496,8 @@
         </p:nvSpPr>
         <p:spPr>
           <a:xfrm>
-            <a:off x="9966960" y="6537960"/>
-            <a:ext cx="1645920" cy="201168"/>
+            <a:off x="9646920" y="6537960"/>
+            <a:ext cx="1965960" cy="201168"/>
           </a:xfrm>
           <a:prstGeom prst="rect">
             <a:avLst/>
@@ -6841,7 +7521,7 @@
                 <a:ea typeface="Aptos" pitchFamily="34" charset="-122"/>
                 <a:cs typeface="Aptos" pitchFamily="34" charset="-120"/>
               </a:rPr>
-              <a:t>Â© Paula Soper</a:t>
+              <a:t>Copyright Paula Soper</a:t>
             </a:r>
             <a:endParaRPr lang="en-US" sz="800" dirty="0"/>
           </a:p>
@@ -6936,7 +7616,7 @@
         <p:spPr>
           <a:xfrm>
             <a:off x="868680" y="1508760"/>
-            <a:ext cx="6537960" cy="4160520"/>
+            <a:ext cx="6309360" cy="4160520"/>
           </a:xfrm>
           <a:prstGeom prst="rect">
             <a:avLst/>
@@ -6987,12 +7667,12 @@
         </p:nvSpPr>
         <p:spPr>
           <a:xfrm>
-            <a:off x="7909560" y="1417320"/>
-            <a:ext cx="3154680" cy="1828800"/>
+            <a:off x="7635240" y="1325880"/>
+            <a:ext cx="3474720" cy="1325880"/>
           </a:xfrm>
           <a:prstGeom prst="roundRect">
             <a:avLst>
-              <a:gd name="adj" fmla="val 6000"/>
+              <a:gd name="adj" fmla="val 8276"/>
             </a:avLst>
           </a:prstGeom>
           <a:solidFill>
@@ -7014,8 +7694,8 @@
         </p:nvSpPr>
         <p:spPr>
           <a:xfrm>
-            <a:off x="8074152" y="1563624"/>
-            <a:ext cx="2825496" cy="256032"/>
+            <a:off x="7799832" y="1472184"/>
+            <a:ext cx="3145536" cy="256032"/>
           </a:xfrm>
           <a:prstGeom prst="rect">
             <a:avLst/>
@@ -7039,7 +7719,7 @@
                 <a:ea typeface="Aptos" pitchFamily="34" charset="-122"/>
                 <a:cs typeface="Aptos" pitchFamily="34" charset="-120"/>
               </a:rPr>
-              <a:t>Key idea</a:t>
+              <a:t>Risk check</a:t>
             </a:r>
             <a:endParaRPr lang="en-US" sz="1300" dirty="0"/>
           </a:p>
@@ -7053,8 +7733,8 @@
         </p:nvSpPr>
         <p:spPr>
           <a:xfrm>
-            <a:off x="8074152" y="1920240"/>
-            <a:ext cx="2825496" cy="1188720"/>
+            <a:off x="7799832" y="1828800"/>
+            <a:ext cx="3145536" cy="685800"/>
           </a:xfrm>
           <a:prstGeom prst="rect">
             <a:avLst/>
@@ -7094,12 +7774,165 @@
         </p:nvSpPr>
         <p:spPr>
           <a:xfrm>
-            <a:off x="7909560" y="3520440"/>
-            <a:ext cx="3154680" cy="1737360"/>
+            <a:off x="7635240" y="2788920"/>
+            <a:ext cx="3474720" cy="1536192"/>
           </a:xfrm>
           <a:prstGeom prst="roundRect">
             <a:avLst>
-              <a:gd name="adj" fmla="val 6316"/>
+              <a:gd name="adj" fmla="val 7143"/>
+            </a:avLst>
+          </a:prstGeom>
+          <a:solidFill>
+            <a:srgbClr val="FFFFFF">
+              <a:alpha val="88000"/>
+            </a:srgbClr>
+          </a:solidFill>
+          <a:ln w="12700">
+            <a:solidFill>
+              <a:srgbClr val="D6E8F2"/>
+            </a:solidFill>
+            <a:prstDash val="solid"/>
+          </a:ln>
+        </p:spPr>
+      </p:sp>
+      <p:sp>
+        <p:nvSpPr>
+          <p:cNvPr id="14" name="Shape 12"/>
+          <p:cNvSpPr/>
+          <p:nvPr/>
+        </p:nvSpPr>
+        <p:spPr>
+          <a:xfrm>
+            <a:off x="8046720" y="3108960"/>
+            <a:ext cx="2651760" cy="896112"/>
+          </a:xfrm>
+          <a:prstGeom prst="arc">
+            <a:avLst/>
+          </a:prstGeom>
+          <a:noFill/>
+          <a:ln w="25400">
+            <a:solidFill>
+              <a:srgbClr val="0068B7"/>
+            </a:solidFill>
+            <a:prstDash val="solid"/>
+          </a:ln>
+        </p:spPr>
+      </p:sp>
+      <p:sp>
+        <p:nvSpPr>
+          <p:cNvPr id="15" name="Text 13"/>
+          <p:cNvSpPr/>
+          <p:nvPr/>
+        </p:nvSpPr>
+        <p:spPr>
+          <a:xfrm>
+            <a:off x="7909560" y="3099816"/>
+            <a:ext cx="2926080" cy="256032"/>
+          </a:xfrm>
+          <a:prstGeom prst="rect">
+            <a:avLst/>
+          </a:prstGeom>
+          <a:noFill/>
+          <a:ln/>
+        </p:spPr>
+        <p:txBody>
+          <a:bodyPr wrap="square" lIns="0" tIns="0" rIns="0" bIns="0" rtlCol="0" anchor="ctr"/>
+          <a:lstStyle/>
+          <a:p>
+            <a:pPr algn="ctr" indent="0" marL="0">
+              <a:buNone/>
+            </a:pPr>
+            <a:r>
+              <a:rPr lang="en-US" sz="1500" b="1" dirty="0">
+                <a:solidFill>
+                  <a:srgbClr val="003A63"/>
+                </a:solidFill>
+                <a:latin typeface="Aptos" pitchFamily="34" charset="0"/>
+                <a:ea typeface="Aptos" pitchFamily="34" charset="-122"/>
+                <a:cs typeface="Aptos" pitchFamily="34" charset="-120"/>
+              </a:rPr>
+              <a:t>Risk</a:t>
+            </a:r>
+            <a:endParaRPr lang="en-US" sz="1500" dirty="0"/>
+          </a:p>
+        </p:txBody>
+      </p:sp>
+      <p:sp>
+        <p:nvSpPr>
+          <p:cNvPr id="16" name="Shape 14"/>
+          <p:cNvSpPr/>
+          <p:nvPr/>
+        </p:nvSpPr>
+        <p:spPr>
+          <a:xfrm>
+            <a:off x="8366760" y="3639312"/>
+            <a:ext cx="2011680" cy="0"/>
+          </a:xfrm>
+          <a:prstGeom prst="line">
+            <a:avLst/>
+          </a:prstGeom>
+          <a:noFill/>
+          <a:ln w="63500">
+            <a:solidFill>
+              <a:srgbClr val="2F8A28"/>
+            </a:solidFill>
+            <a:prstDash val="solid"/>
+          </a:ln>
+        </p:spPr>
+      </p:sp>
+      <p:sp>
+        <p:nvSpPr>
+          <p:cNvPr id="17" name="Text 15"/>
+          <p:cNvSpPr/>
+          <p:nvPr/>
+        </p:nvSpPr>
+        <p:spPr>
+          <a:xfrm>
+            <a:off x="7909560" y="3849624"/>
+            <a:ext cx="2926080" cy="164592"/>
+          </a:xfrm>
+          <a:prstGeom prst="rect">
+            <a:avLst/>
+          </a:prstGeom>
+          <a:noFill/>
+          <a:ln/>
+        </p:spPr>
+        <p:txBody>
+          <a:bodyPr wrap="square" lIns="0" tIns="0" rIns="0" bIns="0" rtlCol="0" anchor="ctr"/>
+          <a:lstStyle/>
+          <a:p>
+            <a:pPr algn="ctr" indent="0" marL="0">
+              <a:buNone/>
+            </a:pPr>
+            <a:r>
+              <a:rPr lang="en-US" sz="900" dirty="0">
+                <a:solidFill>
+                  <a:srgbClr val="003A63"/>
+                </a:solidFill>
+                <a:latin typeface="Aptos" pitchFamily="34" charset="0"/>
+                <a:ea typeface="Aptos" pitchFamily="34" charset="-122"/>
+                <a:cs typeface="Aptos" pitchFamily="34" charset="-120"/>
+              </a:rPr>
+              <a:t>Human review</a:t>
+            </a:r>
+            <a:endParaRPr lang="en-US" sz="900" dirty="0"/>
+          </a:p>
+        </p:txBody>
+      </p:sp>
+      <p:sp>
+        <p:nvSpPr>
+          <p:cNvPr id="18" name="Shape 16"/>
+          <p:cNvSpPr/>
+          <p:nvPr/>
+        </p:nvSpPr>
+        <p:spPr>
+          <a:xfrm>
+            <a:off x="7635240" y="4498848"/>
+            <a:ext cx="3474720" cy="1143000"/>
+          </a:xfrm>
+          <a:prstGeom prst="roundRect">
+            <a:avLst>
+              <a:gd name="adj" fmla="val 9600"/>
             </a:avLst>
           </a:prstGeom>
           <a:solidFill>
@@ -7115,14 +7948,14 @@
       </p:sp>
       <p:sp>
         <p:nvSpPr>
-          <p:cNvPr id="14" name="Text 12"/>
-          <p:cNvSpPr/>
-          <p:nvPr/>
-        </p:nvSpPr>
-        <p:spPr>
-          <a:xfrm>
-            <a:off x="8074152" y="3666744"/>
-            <a:ext cx="2825496" cy="256032"/>
+          <p:cNvPr id="19" name="Text 17"/>
+          <p:cNvSpPr/>
+          <p:nvPr/>
+        </p:nvSpPr>
+        <p:spPr>
+          <a:xfrm>
+            <a:off x="7799832" y="4645152"/>
+            <a:ext cx="3145536" cy="256032"/>
           </a:xfrm>
           <a:prstGeom prst="rect">
             <a:avLst/>
@@ -7146,7 +7979,7 @@
                 <a:ea typeface="Aptos" pitchFamily="34" charset="-122"/>
                 <a:cs typeface="Aptos" pitchFamily="34" charset="-120"/>
               </a:rPr>
-              <a:t>Use this for</a:t>
+              <a:t>Safeguard to plan</a:t>
             </a:r>
             <a:endParaRPr lang="en-US" sz="1300" dirty="0"/>
           </a:p>
@@ -7154,14 +7987,14 @@
       </p:sp>
       <p:sp>
         <p:nvSpPr>
-          <p:cNvPr id="15" name="Text 13"/>
-          <p:cNvSpPr/>
-          <p:nvPr/>
-        </p:nvSpPr>
-        <p:spPr>
-          <a:xfrm>
-            <a:off x="8074152" y="4023360"/>
-            <a:ext cx="2825496" cy="1097280"/>
+          <p:cNvPr id="20" name="Text 18"/>
+          <p:cNvSpPr/>
+          <p:nvPr/>
+        </p:nvSpPr>
+        <p:spPr>
+          <a:xfrm>
+            <a:off x="7799832" y="5001768"/>
+            <a:ext cx="3145536" cy="502920"/>
           </a:xfrm>
           <a:prstGeom prst="rect">
             <a:avLst/>
@@ -7187,7 +8020,7 @@
                 <a:ea typeface="Aptos" pitchFamily="34" charset="-122"/>
                 <a:cs typeface="Aptos" pitchFamily="34" charset="-120"/>
               </a:rPr>
-              <a:t>Connect the concept to public health decisions, safeguards, documentation, or implementation work.</a:t>
+              <a:t>Identify what could go wrong, who could be affected, what safeguards are needed, and what evidence should be reviewed before use expands.</a:t>
             </a:r>
             <a:endParaRPr lang="en-US" sz="1550" dirty="0"/>
           </a:p>
@@ -7361,8 +8194,8 @@
         </p:nvSpPr>
         <p:spPr>
           <a:xfrm>
-            <a:off x="9966960" y="6537960"/>
-            <a:ext cx="1645920" cy="201168"/>
+            <a:off x="9646920" y="6537960"/>
+            <a:ext cx="1965960" cy="201168"/>
           </a:xfrm>
           <a:prstGeom prst="rect">
             <a:avLst/>
@@ -7386,7 +8219,7 @@
                 <a:ea typeface="Aptos" pitchFamily="34" charset="-122"/>
                 <a:cs typeface="Aptos" pitchFamily="34" charset="-120"/>
               </a:rPr>
-              <a:t>Â© Paula Soper</a:t>
+              <a:t>Copyright Paula Soper</a:t>
             </a:r>
             <a:endParaRPr lang="en-US" sz="800" dirty="0"/>
           </a:p>
@@ -7433,77 +8266,13 @@
       </p:sp>
       <p:sp>
         <p:nvSpPr>
-          <p:cNvPr id="8" name="Shape 6"/>
+          <p:cNvPr id="8" name="Text 6"/>
           <p:cNvSpPr/>
           <p:nvPr/>
         </p:nvSpPr>
         <p:spPr>
           <a:xfrm>
             <a:off x="640080" y="658368"/>
-            <a:ext cx="420624" cy="420624"/>
-          </a:xfrm>
-          <a:prstGeom prst="ellipse">
-            <a:avLst/>
-          </a:prstGeom>
-          <a:solidFill>
-            <a:srgbClr val="0068B7"/>
-          </a:solidFill>
-          <a:ln w="12700">
-            <a:solidFill>
-              <a:srgbClr val="0068B7"/>
-            </a:solidFill>
-            <a:prstDash val="solid"/>
-          </a:ln>
-        </p:spPr>
-      </p:sp>
-      <p:sp>
-        <p:nvSpPr>
-          <p:cNvPr id="9" name="Text 7"/>
-          <p:cNvSpPr/>
-          <p:nvPr/>
-        </p:nvSpPr>
-        <p:spPr>
-          <a:xfrm>
-            <a:off x="640080" y="731520"/>
-            <a:ext cx="420624" cy="164592"/>
-          </a:xfrm>
-          <a:prstGeom prst="rect">
-            <a:avLst/>
-          </a:prstGeom>
-          <a:noFill/>
-          <a:ln/>
-        </p:spPr>
-        <p:txBody>
-          <a:bodyPr wrap="square" lIns="0" tIns="0" rIns="0" bIns="0" rtlCol="0" anchor="ctr"/>
-          <a:lstStyle/>
-          <a:p>
-            <a:pPr algn="ctr" indent="0" marL="0">
-              <a:buNone/>
-            </a:pPr>
-            <a:r>
-              <a:rPr lang="en-US" sz="1100" b="1" dirty="0">
-                <a:solidFill>
-                  <a:srgbClr val="FFFFFF"/>
-                </a:solidFill>
-                <a:latin typeface="Aptos" pitchFamily="34" charset="0"/>
-                <a:ea typeface="Aptos" pitchFamily="34" charset="-122"/>
-                <a:cs typeface="Aptos" pitchFamily="34" charset="-120"/>
-              </a:rPr>
-              <a:t>9</a:t>
-            </a:r>
-            <a:endParaRPr lang="en-US" sz="1100" dirty="0"/>
-          </a:p>
-        </p:txBody>
-      </p:sp>
-      <p:sp>
-        <p:nvSpPr>
-          <p:cNvPr id="10" name="Text 8"/>
-          <p:cNvSpPr/>
-          <p:nvPr/>
-        </p:nvSpPr>
-        <p:spPr>
-          <a:xfrm>
-            <a:off x="640080" y="621792"/>
             <a:ext cx="10881360" cy="713232"/>
           </a:xfrm>
           <a:prstGeom prst="rect">
@@ -7538,14 +8307,14 @@
       </p:sp>
       <p:sp>
         <p:nvSpPr>
-          <p:cNvPr id="11" name="Text 9"/>
+          <p:cNvPr id="9" name="Text 7"/>
           <p:cNvSpPr/>
           <p:nvPr/>
         </p:nvSpPr>
         <p:spPr>
           <a:xfrm>
             <a:off x="868680" y="1508760"/>
-            <a:ext cx="6537960" cy="4160520"/>
+            <a:ext cx="6309360" cy="4160520"/>
           </a:xfrm>
           <a:prstGeom prst="rect">
             <a:avLst/>
@@ -7604,18 +8373,18 @@
       </p:sp>
       <p:sp>
         <p:nvSpPr>
-          <p:cNvPr id="12" name="Shape 10"/>
-          <p:cNvSpPr/>
-          <p:nvPr/>
-        </p:nvSpPr>
-        <p:spPr>
-          <a:xfrm>
-            <a:off x="7909560" y="1417320"/>
-            <a:ext cx="3154680" cy="1828800"/>
+          <p:cNvPr id="10" name="Shape 8"/>
+          <p:cNvSpPr/>
+          <p:nvPr/>
+        </p:nvSpPr>
+        <p:spPr>
+          <a:xfrm>
+            <a:off x="7635240" y="1325880"/>
+            <a:ext cx="3474720" cy="1325880"/>
           </a:xfrm>
           <a:prstGeom prst="roundRect">
             <a:avLst>
-              <a:gd name="adj" fmla="val 6000"/>
+              <a:gd name="adj" fmla="val 8276"/>
             </a:avLst>
           </a:prstGeom>
           <a:solidFill>
@@ -7631,14 +8400,14 @@
       </p:sp>
       <p:sp>
         <p:nvSpPr>
-          <p:cNvPr id="13" name="Text 11"/>
-          <p:cNvSpPr/>
-          <p:nvPr/>
-        </p:nvSpPr>
-        <p:spPr>
-          <a:xfrm>
-            <a:off x="8074152" y="1563624"/>
-            <a:ext cx="2825496" cy="256032"/>
+          <p:cNvPr id="11" name="Text 9"/>
+          <p:cNvSpPr/>
+          <p:nvPr/>
+        </p:nvSpPr>
+        <p:spPr>
+          <a:xfrm>
+            <a:off x="7799832" y="1472184"/>
+            <a:ext cx="3145536" cy="256032"/>
           </a:xfrm>
           <a:prstGeom prst="rect">
             <a:avLst/>
@@ -7662,7 +8431,7 @@
                 <a:ea typeface="Aptos" pitchFamily="34" charset="-122"/>
                 <a:cs typeface="Aptos" pitchFamily="34" charset="-120"/>
               </a:rPr>
-              <a:t>Key idea</a:t>
+              <a:t>Risk check</a:t>
             </a:r>
             <a:endParaRPr lang="en-US" sz="1300" dirty="0"/>
           </a:p>
@@ -7670,14 +8439,14 @@
       </p:sp>
       <p:sp>
         <p:nvSpPr>
-          <p:cNvPr id="14" name="Text 12"/>
-          <p:cNvSpPr/>
-          <p:nvPr/>
-        </p:nvSpPr>
-        <p:spPr>
-          <a:xfrm>
-            <a:off x="8074152" y="1920240"/>
-            <a:ext cx="2825496" cy="1188720"/>
+          <p:cNvPr id="12" name="Text 10"/>
+          <p:cNvSpPr/>
+          <p:nvPr/>
+        </p:nvSpPr>
+        <p:spPr>
+          <a:xfrm>
+            <a:off x="7799832" y="1828800"/>
+            <a:ext cx="3145536" cy="685800"/>
           </a:xfrm>
           <a:prstGeom prst="rect">
             <a:avLst/>
@@ -7711,18 +8480,171 @@
       </p:sp>
       <p:sp>
         <p:nvSpPr>
-          <p:cNvPr id="15" name="Shape 13"/>
-          <p:cNvSpPr/>
-          <p:nvPr/>
-        </p:nvSpPr>
-        <p:spPr>
-          <a:xfrm>
-            <a:off x="7909560" y="3520440"/>
-            <a:ext cx="3154680" cy="1737360"/>
+          <p:cNvPr id="13" name="Shape 11"/>
+          <p:cNvSpPr/>
+          <p:nvPr/>
+        </p:nvSpPr>
+        <p:spPr>
+          <a:xfrm>
+            <a:off x="7635240" y="2788920"/>
+            <a:ext cx="3474720" cy="1536192"/>
           </a:xfrm>
           <a:prstGeom prst="roundRect">
             <a:avLst>
-              <a:gd name="adj" fmla="val 6316"/>
+              <a:gd name="adj" fmla="val 7143"/>
+            </a:avLst>
+          </a:prstGeom>
+          <a:solidFill>
+            <a:srgbClr val="FFFFFF">
+              <a:alpha val="88000"/>
+            </a:srgbClr>
+          </a:solidFill>
+          <a:ln w="12700">
+            <a:solidFill>
+              <a:srgbClr val="D6E8F2"/>
+            </a:solidFill>
+            <a:prstDash val="solid"/>
+          </a:ln>
+        </p:spPr>
+      </p:sp>
+      <p:sp>
+        <p:nvSpPr>
+          <p:cNvPr id="14" name="Shape 12"/>
+          <p:cNvSpPr/>
+          <p:nvPr/>
+        </p:nvSpPr>
+        <p:spPr>
+          <a:xfrm>
+            <a:off x="8046720" y="3108960"/>
+            <a:ext cx="2651760" cy="896112"/>
+          </a:xfrm>
+          <a:prstGeom prst="arc">
+            <a:avLst/>
+          </a:prstGeom>
+          <a:noFill/>
+          <a:ln w="25400">
+            <a:solidFill>
+              <a:srgbClr val="0068B7"/>
+            </a:solidFill>
+            <a:prstDash val="solid"/>
+          </a:ln>
+        </p:spPr>
+      </p:sp>
+      <p:sp>
+        <p:nvSpPr>
+          <p:cNvPr id="15" name="Text 13"/>
+          <p:cNvSpPr/>
+          <p:nvPr/>
+        </p:nvSpPr>
+        <p:spPr>
+          <a:xfrm>
+            <a:off x="7909560" y="3099816"/>
+            <a:ext cx="2926080" cy="256032"/>
+          </a:xfrm>
+          <a:prstGeom prst="rect">
+            <a:avLst/>
+          </a:prstGeom>
+          <a:noFill/>
+          <a:ln/>
+        </p:spPr>
+        <p:txBody>
+          <a:bodyPr wrap="square" lIns="0" tIns="0" rIns="0" bIns="0" rtlCol="0" anchor="ctr"/>
+          <a:lstStyle/>
+          <a:p>
+            <a:pPr algn="ctr" indent="0" marL="0">
+              <a:buNone/>
+            </a:pPr>
+            <a:r>
+              <a:rPr lang="en-US" sz="1500" b="1" dirty="0">
+                <a:solidFill>
+                  <a:srgbClr val="003A63"/>
+                </a:solidFill>
+                <a:latin typeface="Aptos" pitchFamily="34" charset="0"/>
+                <a:ea typeface="Aptos" pitchFamily="34" charset="-122"/>
+                <a:cs typeface="Aptos" pitchFamily="34" charset="-120"/>
+              </a:rPr>
+              <a:t>Risk</a:t>
+            </a:r>
+            <a:endParaRPr lang="en-US" sz="1500" dirty="0"/>
+          </a:p>
+        </p:txBody>
+      </p:sp>
+      <p:sp>
+        <p:nvSpPr>
+          <p:cNvPr id="16" name="Shape 14"/>
+          <p:cNvSpPr/>
+          <p:nvPr/>
+        </p:nvSpPr>
+        <p:spPr>
+          <a:xfrm>
+            <a:off x="8366760" y="3639312"/>
+            <a:ext cx="2011680" cy="0"/>
+          </a:xfrm>
+          <a:prstGeom prst="line">
+            <a:avLst/>
+          </a:prstGeom>
+          <a:noFill/>
+          <a:ln w="63500">
+            <a:solidFill>
+              <a:srgbClr val="2F8A28"/>
+            </a:solidFill>
+            <a:prstDash val="solid"/>
+          </a:ln>
+        </p:spPr>
+      </p:sp>
+      <p:sp>
+        <p:nvSpPr>
+          <p:cNvPr id="17" name="Text 15"/>
+          <p:cNvSpPr/>
+          <p:nvPr/>
+        </p:nvSpPr>
+        <p:spPr>
+          <a:xfrm>
+            <a:off x="7909560" y="3849624"/>
+            <a:ext cx="2926080" cy="164592"/>
+          </a:xfrm>
+          <a:prstGeom prst="rect">
+            <a:avLst/>
+          </a:prstGeom>
+          <a:noFill/>
+          <a:ln/>
+        </p:spPr>
+        <p:txBody>
+          <a:bodyPr wrap="square" lIns="0" tIns="0" rIns="0" bIns="0" rtlCol="0" anchor="ctr"/>
+          <a:lstStyle/>
+          <a:p>
+            <a:pPr algn="ctr" indent="0" marL="0">
+              <a:buNone/>
+            </a:pPr>
+            <a:r>
+              <a:rPr lang="en-US" sz="900" dirty="0">
+                <a:solidFill>
+                  <a:srgbClr val="003A63"/>
+                </a:solidFill>
+                <a:latin typeface="Aptos" pitchFamily="34" charset="0"/>
+                <a:ea typeface="Aptos" pitchFamily="34" charset="-122"/>
+                <a:cs typeface="Aptos" pitchFamily="34" charset="-120"/>
+              </a:rPr>
+              <a:t>Human review</a:t>
+            </a:r>
+            <a:endParaRPr lang="en-US" sz="900" dirty="0"/>
+          </a:p>
+        </p:txBody>
+      </p:sp>
+      <p:sp>
+        <p:nvSpPr>
+          <p:cNvPr id="18" name="Shape 16"/>
+          <p:cNvSpPr/>
+          <p:nvPr/>
+        </p:nvSpPr>
+        <p:spPr>
+          <a:xfrm>
+            <a:off x="7635240" y="4498848"/>
+            <a:ext cx="3474720" cy="1143000"/>
+          </a:xfrm>
+          <a:prstGeom prst="roundRect">
+            <a:avLst>
+              <a:gd name="adj" fmla="val 9600"/>
             </a:avLst>
           </a:prstGeom>
           <a:solidFill>
@@ -7738,14 +8660,14 @@
       </p:sp>
       <p:sp>
         <p:nvSpPr>
-          <p:cNvPr id="16" name="Text 14"/>
-          <p:cNvSpPr/>
-          <p:nvPr/>
-        </p:nvSpPr>
-        <p:spPr>
-          <a:xfrm>
-            <a:off x="8074152" y="3666744"/>
-            <a:ext cx="2825496" cy="256032"/>
+          <p:cNvPr id="19" name="Text 17"/>
+          <p:cNvSpPr/>
+          <p:nvPr/>
+        </p:nvSpPr>
+        <p:spPr>
+          <a:xfrm>
+            <a:off x="7799832" y="4645152"/>
+            <a:ext cx="3145536" cy="256032"/>
           </a:xfrm>
           <a:prstGeom prst="rect">
             <a:avLst/>
@@ -7769,7 +8691,7 @@
                 <a:ea typeface="Aptos" pitchFamily="34" charset="-122"/>
                 <a:cs typeface="Aptos" pitchFamily="34" charset="-120"/>
               </a:rPr>
-              <a:t>Use this for</a:t>
+              <a:t>Safeguard to plan</a:t>
             </a:r>
             <a:endParaRPr lang="en-US" sz="1300" dirty="0"/>
           </a:p>
@@ -7777,14 +8699,14 @@
       </p:sp>
       <p:sp>
         <p:nvSpPr>
-          <p:cNvPr id="17" name="Text 15"/>
-          <p:cNvSpPr/>
-          <p:nvPr/>
-        </p:nvSpPr>
-        <p:spPr>
-          <a:xfrm>
-            <a:off x="8074152" y="4023360"/>
-            <a:ext cx="2825496" cy="1097280"/>
+          <p:cNvPr id="20" name="Text 18"/>
+          <p:cNvSpPr/>
+          <p:nvPr/>
+        </p:nvSpPr>
+        <p:spPr>
+          <a:xfrm>
+            <a:off x="7799832" y="5001768"/>
+            <a:ext cx="3145536" cy="502920"/>
           </a:xfrm>
           <a:prstGeom prst="rect">
             <a:avLst/>
@@ -7810,7 +8732,7 @@
                 <a:ea typeface="Aptos" pitchFamily="34" charset="-122"/>
                 <a:cs typeface="Aptos" pitchFamily="34" charset="-120"/>
               </a:rPr>
-              <a:t>Connect the concept to public health decisions, safeguards, documentation, or implementation work.</a:t>
+              <a:t>Use the assignment to test whether you can explain the concept, apply it to a realistic public health situation, and identify what would need review before the work moves forward.</a:t>
             </a:r>
             <a:endParaRPr lang="en-US" sz="1550" dirty="0"/>
           </a:p>
@@ -7984,8 +8906,8 @@
         </p:nvSpPr>
         <p:spPr>
           <a:xfrm>
-            <a:off x="9966960" y="6537960"/>
-            <a:ext cx="1645920" cy="201168"/>
+            <a:off x="9646920" y="6537960"/>
+            <a:ext cx="1965960" cy="201168"/>
           </a:xfrm>
           <a:prstGeom prst="rect">
             <a:avLst/>
@@ -8009,7 +8931,7 @@
                 <a:ea typeface="Aptos" pitchFamily="34" charset="-122"/>
                 <a:cs typeface="Aptos" pitchFamily="34" charset="-120"/>
               </a:rPr>
-              <a:t>Â© Paula Soper</a:t>
+              <a:t>Copyright Paula Soper</a:t>
             </a:r>
             <a:endParaRPr lang="en-US" sz="800" dirty="0"/>
           </a:p>
@@ -8056,77 +8978,13 @@
       </p:sp>
       <p:sp>
         <p:nvSpPr>
-          <p:cNvPr id="8" name="Shape 6"/>
+          <p:cNvPr id="8" name="Text 6"/>
           <p:cNvSpPr/>
           <p:nvPr/>
         </p:nvSpPr>
         <p:spPr>
           <a:xfrm>
             <a:off x="640080" y="658368"/>
-            <a:ext cx="420624" cy="420624"/>
-          </a:xfrm>
-          <a:prstGeom prst="ellipse">
-            <a:avLst/>
-          </a:prstGeom>
-          <a:solidFill>
-            <a:srgbClr val="0068B7"/>
-          </a:solidFill>
-          <a:ln w="12700">
-            <a:solidFill>
-              <a:srgbClr val="0068B7"/>
-            </a:solidFill>
-            <a:prstDash val="solid"/>
-          </a:ln>
-        </p:spPr>
-      </p:sp>
-      <p:sp>
-        <p:nvSpPr>
-          <p:cNvPr id="9" name="Text 7"/>
-          <p:cNvSpPr/>
-          <p:nvPr/>
-        </p:nvSpPr>
-        <p:spPr>
-          <a:xfrm>
-            <a:off x="640080" y="731520"/>
-            <a:ext cx="420624" cy="164592"/>
-          </a:xfrm>
-          <a:prstGeom prst="rect">
-            <a:avLst/>
-          </a:prstGeom>
-          <a:noFill/>
-          <a:ln/>
-        </p:spPr>
-        <p:txBody>
-          <a:bodyPr wrap="square" lIns="0" tIns="0" rIns="0" bIns="0" rtlCol="0" anchor="ctr"/>
-          <a:lstStyle/>
-          <a:p>
-            <a:pPr algn="ctr" indent="0" marL="0">
-              <a:buNone/>
-            </a:pPr>
-            <a:r>
-              <a:rPr lang="en-US" sz="1100" b="1" dirty="0">
-                <a:solidFill>
-                  <a:srgbClr val="FFFFFF"/>
-                </a:solidFill>
-                <a:latin typeface="Aptos" pitchFamily="34" charset="0"/>
-                <a:ea typeface="Aptos" pitchFamily="34" charset="-122"/>
-                <a:cs typeface="Aptos" pitchFamily="34" charset="-120"/>
-              </a:rPr>
-              <a:t>10</a:t>
-            </a:r>
-            <a:endParaRPr lang="en-US" sz="1100" dirty="0"/>
-          </a:p>
-        </p:txBody>
-      </p:sp>
-      <p:sp>
-        <p:nvSpPr>
-          <p:cNvPr id="10" name="Text 8"/>
-          <p:cNvSpPr/>
-          <p:nvPr/>
-        </p:nvSpPr>
-        <p:spPr>
-          <a:xfrm>
-            <a:off x="640080" y="621792"/>
             <a:ext cx="10881360" cy="713232"/>
           </a:xfrm>
           <a:prstGeom prst="rect">
@@ -8161,14 +9019,14 @@
       </p:sp>
       <p:sp>
         <p:nvSpPr>
-          <p:cNvPr id="11" name="Text 9"/>
+          <p:cNvPr id="9" name="Text 7"/>
           <p:cNvSpPr/>
           <p:nvPr/>
         </p:nvSpPr>
         <p:spPr>
           <a:xfrm>
             <a:off x="868680" y="1508760"/>
-            <a:ext cx="6537960" cy="4160520"/>
+            <a:ext cx="6309360" cy="4160520"/>
           </a:xfrm>
           <a:prstGeom prst="rect">
             <a:avLst/>
@@ -8227,18 +9085,18 @@
       </p:sp>
       <p:sp>
         <p:nvSpPr>
-          <p:cNvPr id="12" name="Shape 10"/>
-          <p:cNvSpPr/>
-          <p:nvPr/>
-        </p:nvSpPr>
-        <p:spPr>
-          <a:xfrm>
-            <a:off x="7909560" y="1417320"/>
-            <a:ext cx="3154680" cy="1828800"/>
+          <p:cNvPr id="10" name="Shape 8"/>
+          <p:cNvSpPr/>
+          <p:nvPr/>
+        </p:nvSpPr>
+        <p:spPr>
+          <a:xfrm>
+            <a:off x="7635240" y="1325880"/>
+            <a:ext cx="3474720" cy="1325880"/>
           </a:xfrm>
           <a:prstGeom prst="roundRect">
             <a:avLst>
-              <a:gd name="adj" fmla="val 6000"/>
+              <a:gd name="adj" fmla="val 8276"/>
             </a:avLst>
           </a:prstGeom>
           <a:solidFill>
@@ -8254,14 +9112,14 @@
       </p:sp>
       <p:sp>
         <p:nvSpPr>
-          <p:cNvPr id="13" name="Text 11"/>
-          <p:cNvSpPr/>
-          <p:nvPr/>
-        </p:nvSpPr>
-        <p:spPr>
-          <a:xfrm>
-            <a:off x="8074152" y="1563624"/>
-            <a:ext cx="2825496" cy="256032"/>
+          <p:cNvPr id="11" name="Text 9"/>
+          <p:cNvSpPr/>
+          <p:nvPr/>
+        </p:nvSpPr>
+        <p:spPr>
+          <a:xfrm>
+            <a:off x="7799832" y="1472184"/>
+            <a:ext cx="3145536" cy="256032"/>
           </a:xfrm>
           <a:prstGeom prst="rect">
             <a:avLst/>
@@ -8285,7 +9143,7 @@
                 <a:ea typeface="Aptos" pitchFamily="34" charset="-122"/>
                 <a:cs typeface="Aptos" pitchFamily="34" charset="-120"/>
               </a:rPr>
-              <a:t>Key idea</a:t>
+              <a:t>Risk check</a:t>
             </a:r>
             <a:endParaRPr lang="en-US" sz="1300" dirty="0"/>
           </a:p>
@@ -8293,14 +9151,14 @@
       </p:sp>
       <p:sp>
         <p:nvSpPr>
-          <p:cNvPr id="14" name="Text 12"/>
-          <p:cNvSpPr/>
-          <p:nvPr/>
-        </p:nvSpPr>
-        <p:spPr>
-          <a:xfrm>
-            <a:off x="8074152" y="1920240"/>
-            <a:ext cx="2825496" cy="1188720"/>
+          <p:cNvPr id="12" name="Text 10"/>
+          <p:cNvSpPr/>
+          <p:nvPr/>
+        </p:nvSpPr>
+        <p:spPr>
+          <a:xfrm>
+            <a:off x="7799832" y="1828800"/>
+            <a:ext cx="3145536" cy="685800"/>
           </a:xfrm>
           <a:prstGeom prst="rect">
             <a:avLst/>
@@ -8334,18 +9192,171 @@
       </p:sp>
       <p:sp>
         <p:nvSpPr>
-          <p:cNvPr id="15" name="Shape 13"/>
-          <p:cNvSpPr/>
-          <p:nvPr/>
-        </p:nvSpPr>
-        <p:spPr>
-          <a:xfrm>
-            <a:off x="7909560" y="3520440"/>
-            <a:ext cx="3154680" cy="1737360"/>
+          <p:cNvPr id="13" name="Shape 11"/>
+          <p:cNvSpPr/>
+          <p:nvPr/>
+        </p:nvSpPr>
+        <p:spPr>
+          <a:xfrm>
+            <a:off x="7635240" y="2788920"/>
+            <a:ext cx="3474720" cy="1536192"/>
           </a:xfrm>
           <a:prstGeom prst="roundRect">
             <a:avLst>
-              <a:gd name="adj" fmla="val 6316"/>
+              <a:gd name="adj" fmla="val 7143"/>
+            </a:avLst>
+          </a:prstGeom>
+          <a:solidFill>
+            <a:srgbClr val="FFFFFF">
+              <a:alpha val="88000"/>
+            </a:srgbClr>
+          </a:solidFill>
+          <a:ln w="12700">
+            <a:solidFill>
+              <a:srgbClr val="D6E8F2"/>
+            </a:solidFill>
+            <a:prstDash val="solid"/>
+          </a:ln>
+        </p:spPr>
+      </p:sp>
+      <p:sp>
+        <p:nvSpPr>
+          <p:cNvPr id="14" name="Shape 12"/>
+          <p:cNvSpPr/>
+          <p:nvPr/>
+        </p:nvSpPr>
+        <p:spPr>
+          <a:xfrm>
+            <a:off x="8046720" y="3108960"/>
+            <a:ext cx="2651760" cy="896112"/>
+          </a:xfrm>
+          <a:prstGeom prst="arc">
+            <a:avLst/>
+          </a:prstGeom>
+          <a:noFill/>
+          <a:ln w="25400">
+            <a:solidFill>
+              <a:srgbClr val="0068B7"/>
+            </a:solidFill>
+            <a:prstDash val="solid"/>
+          </a:ln>
+        </p:spPr>
+      </p:sp>
+      <p:sp>
+        <p:nvSpPr>
+          <p:cNvPr id="15" name="Text 13"/>
+          <p:cNvSpPr/>
+          <p:nvPr/>
+        </p:nvSpPr>
+        <p:spPr>
+          <a:xfrm>
+            <a:off x="7909560" y="3099816"/>
+            <a:ext cx="2926080" cy="256032"/>
+          </a:xfrm>
+          <a:prstGeom prst="rect">
+            <a:avLst/>
+          </a:prstGeom>
+          <a:noFill/>
+          <a:ln/>
+        </p:spPr>
+        <p:txBody>
+          <a:bodyPr wrap="square" lIns="0" tIns="0" rIns="0" bIns="0" rtlCol="0" anchor="ctr"/>
+          <a:lstStyle/>
+          <a:p>
+            <a:pPr algn="ctr" indent="0" marL="0">
+              <a:buNone/>
+            </a:pPr>
+            <a:r>
+              <a:rPr lang="en-US" sz="1500" b="1" dirty="0">
+                <a:solidFill>
+                  <a:srgbClr val="003A63"/>
+                </a:solidFill>
+                <a:latin typeface="Aptos" pitchFamily="34" charset="0"/>
+                <a:ea typeface="Aptos" pitchFamily="34" charset="-122"/>
+                <a:cs typeface="Aptos" pitchFamily="34" charset="-120"/>
+              </a:rPr>
+              <a:t>Risk</a:t>
+            </a:r>
+            <a:endParaRPr lang="en-US" sz="1500" dirty="0"/>
+          </a:p>
+        </p:txBody>
+      </p:sp>
+      <p:sp>
+        <p:nvSpPr>
+          <p:cNvPr id="16" name="Shape 14"/>
+          <p:cNvSpPr/>
+          <p:nvPr/>
+        </p:nvSpPr>
+        <p:spPr>
+          <a:xfrm>
+            <a:off x="8366760" y="3639312"/>
+            <a:ext cx="2011680" cy="0"/>
+          </a:xfrm>
+          <a:prstGeom prst="line">
+            <a:avLst/>
+          </a:prstGeom>
+          <a:noFill/>
+          <a:ln w="63500">
+            <a:solidFill>
+              <a:srgbClr val="2F8A28"/>
+            </a:solidFill>
+            <a:prstDash val="solid"/>
+          </a:ln>
+        </p:spPr>
+      </p:sp>
+      <p:sp>
+        <p:nvSpPr>
+          <p:cNvPr id="17" name="Text 15"/>
+          <p:cNvSpPr/>
+          <p:nvPr/>
+        </p:nvSpPr>
+        <p:spPr>
+          <a:xfrm>
+            <a:off x="7909560" y="3849624"/>
+            <a:ext cx="2926080" cy="164592"/>
+          </a:xfrm>
+          <a:prstGeom prst="rect">
+            <a:avLst/>
+          </a:prstGeom>
+          <a:noFill/>
+          <a:ln/>
+        </p:spPr>
+        <p:txBody>
+          <a:bodyPr wrap="square" lIns="0" tIns="0" rIns="0" bIns="0" rtlCol="0" anchor="ctr"/>
+          <a:lstStyle/>
+          <a:p>
+            <a:pPr algn="ctr" indent="0" marL="0">
+              <a:buNone/>
+            </a:pPr>
+            <a:r>
+              <a:rPr lang="en-US" sz="900" dirty="0">
+                <a:solidFill>
+                  <a:srgbClr val="003A63"/>
+                </a:solidFill>
+                <a:latin typeface="Aptos" pitchFamily="34" charset="0"/>
+                <a:ea typeface="Aptos" pitchFamily="34" charset="-122"/>
+                <a:cs typeface="Aptos" pitchFamily="34" charset="-120"/>
+              </a:rPr>
+              <a:t>Human review</a:t>
+            </a:r>
+            <a:endParaRPr lang="en-US" sz="900" dirty="0"/>
+          </a:p>
+        </p:txBody>
+      </p:sp>
+      <p:sp>
+        <p:nvSpPr>
+          <p:cNvPr id="18" name="Shape 16"/>
+          <p:cNvSpPr/>
+          <p:nvPr/>
+        </p:nvSpPr>
+        <p:spPr>
+          <a:xfrm>
+            <a:off x="7635240" y="4498848"/>
+            <a:ext cx="3474720" cy="1143000"/>
+          </a:xfrm>
+          <a:prstGeom prst="roundRect">
+            <a:avLst>
+              <a:gd name="adj" fmla="val 9600"/>
             </a:avLst>
           </a:prstGeom>
           <a:solidFill>
@@ -8361,14 +9372,14 @@
       </p:sp>
       <p:sp>
         <p:nvSpPr>
-          <p:cNvPr id="16" name="Text 14"/>
-          <p:cNvSpPr/>
-          <p:nvPr/>
-        </p:nvSpPr>
-        <p:spPr>
-          <a:xfrm>
-            <a:off x="8074152" y="3666744"/>
-            <a:ext cx="2825496" cy="256032"/>
+          <p:cNvPr id="19" name="Text 17"/>
+          <p:cNvSpPr/>
+          <p:nvPr/>
+        </p:nvSpPr>
+        <p:spPr>
+          <a:xfrm>
+            <a:off x="7799832" y="4645152"/>
+            <a:ext cx="3145536" cy="256032"/>
           </a:xfrm>
           <a:prstGeom prst="rect">
             <a:avLst/>
@@ -8392,7 +9403,7 @@
                 <a:ea typeface="Aptos" pitchFamily="34" charset="-122"/>
                 <a:cs typeface="Aptos" pitchFamily="34" charset="-120"/>
               </a:rPr>
-              <a:t>Use this for</a:t>
+              <a:t>Safeguard to plan</a:t>
             </a:r>
             <a:endParaRPr lang="en-US" sz="1300" dirty="0"/>
           </a:p>
@@ -8400,14 +9411,14 @@
       </p:sp>
       <p:sp>
         <p:nvSpPr>
-          <p:cNvPr id="17" name="Text 15"/>
-          <p:cNvSpPr/>
-          <p:nvPr/>
-        </p:nvSpPr>
-        <p:spPr>
-          <a:xfrm>
-            <a:off x="8074152" y="4023360"/>
-            <a:ext cx="2825496" cy="1097280"/>
+          <p:cNvPr id="20" name="Text 18"/>
+          <p:cNvSpPr/>
+          <p:nvPr/>
+        </p:nvSpPr>
+        <p:spPr>
+          <a:xfrm>
+            <a:off x="7799832" y="5001768"/>
+            <a:ext cx="3145536" cy="502920"/>
           </a:xfrm>
           <a:prstGeom prst="rect">
             <a:avLst/>
@@ -8433,7 +9444,7 @@
                 <a:ea typeface="Aptos" pitchFamily="34" charset="-122"/>
                 <a:cs typeface="Aptos" pitchFamily="34" charset="-120"/>
               </a:rPr>
-              <a:t>Connect the concept to public health decisions, safeguards, documentation, or implementation work.</a:t>
+              <a:t>Identify what could go wrong, who could be affected, what safeguards are needed, and what evidence should be reviewed before use expands.</a:t>
             </a:r>
             <a:endParaRPr lang="en-US" sz="1550" dirty="0"/>
           </a:p>
@@ -8607,8 +9618,8 @@
         </p:nvSpPr>
         <p:spPr>
           <a:xfrm>
-            <a:off x="9966960" y="6537960"/>
-            <a:ext cx="1645920" cy="201168"/>
+            <a:off x="9646920" y="6537960"/>
+            <a:ext cx="1965960" cy="201168"/>
           </a:xfrm>
           <a:prstGeom prst="rect">
             <a:avLst/>
@@ -8632,7 +9643,7 @@
                 <a:ea typeface="Aptos" pitchFamily="34" charset="-122"/>
                 <a:cs typeface="Aptos" pitchFamily="34" charset="-120"/>
               </a:rPr>
-              <a:t>Â© Paula Soper</a:t>
+              <a:t>Copyright Paula Soper</a:t>
             </a:r>
             <a:endParaRPr lang="en-US" sz="800" dirty="0"/>
           </a:p>
@@ -8727,7 +9738,7 @@
         <p:spPr>
           <a:xfrm>
             <a:off x="868680" y="1508760"/>
-            <a:ext cx="6537960" cy="4160520"/>
+            <a:ext cx="6309360" cy="4160520"/>
           </a:xfrm>
           <a:prstGeom prst="rect">
             <a:avLst/>
@@ -8764,12 +9775,12 @@
         </p:nvSpPr>
         <p:spPr>
           <a:xfrm>
-            <a:off x="7909560" y="1417320"/>
-            <a:ext cx="3154680" cy="1828800"/>
+            <a:off x="7635240" y="1325880"/>
+            <a:ext cx="3474720" cy="1325880"/>
           </a:xfrm>
           <a:prstGeom prst="roundRect">
             <a:avLst>
-              <a:gd name="adj" fmla="val 6000"/>
+              <a:gd name="adj" fmla="val 8276"/>
             </a:avLst>
           </a:prstGeom>
           <a:solidFill>
@@ -8791,8 +9802,8 @@
         </p:nvSpPr>
         <p:spPr>
           <a:xfrm>
-            <a:off x="8074152" y="1563624"/>
-            <a:ext cx="2825496" cy="256032"/>
+            <a:off x="7799832" y="1472184"/>
+            <a:ext cx="3145536" cy="256032"/>
           </a:xfrm>
           <a:prstGeom prst="rect">
             <a:avLst/>
@@ -8816,7 +9827,7 @@
                 <a:ea typeface="Aptos" pitchFamily="34" charset="-122"/>
                 <a:cs typeface="Aptos" pitchFamily="34" charset="-120"/>
               </a:rPr>
-              <a:t>Key idea</a:t>
+              <a:t>Risk check</a:t>
             </a:r>
             <a:endParaRPr lang="en-US" sz="1300" dirty="0"/>
           </a:p>
@@ -8830,8 +9841,8 @@
         </p:nvSpPr>
         <p:spPr>
           <a:xfrm>
-            <a:off x="8074152" y="1920240"/>
-            <a:ext cx="2825496" cy="1188720"/>
+            <a:off x="7799832" y="1828800"/>
+            <a:ext cx="3145536" cy="685800"/>
           </a:xfrm>
           <a:prstGeom prst="rect">
             <a:avLst/>
@@ -8871,12 +9882,165 @@
         </p:nvSpPr>
         <p:spPr>
           <a:xfrm>
-            <a:off x="7909560" y="3520440"/>
-            <a:ext cx="3154680" cy="1737360"/>
+            <a:off x="7635240" y="2788920"/>
+            <a:ext cx="3474720" cy="1536192"/>
           </a:xfrm>
           <a:prstGeom prst="roundRect">
             <a:avLst>
-              <a:gd name="adj" fmla="val 6316"/>
+              <a:gd name="adj" fmla="val 7143"/>
+            </a:avLst>
+          </a:prstGeom>
+          <a:solidFill>
+            <a:srgbClr val="FFFFFF">
+              <a:alpha val="88000"/>
+            </a:srgbClr>
+          </a:solidFill>
+          <a:ln w="12700">
+            <a:solidFill>
+              <a:srgbClr val="D6E8F2"/>
+            </a:solidFill>
+            <a:prstDash val="solid"/>
+          </a:ln>
+        </p:spPr>
+      </p:sp>
+      <p:sp>
+        <p:nvSpPr>
+          <p:cNvPr id="14" name="Shape 12"/>
+          <p:cNvSpPr/>
+          <p:nvPr/>
+        </p:nvSpPr>
+        <p:spPr>
+          <a:xfrm>
+            <a:off x="8046720" y="3108960"/>
+            <a:ext cx="2651760" cy="896112"/>
+          </a:xfrm>
+          <a:prstGeom prst="arc">
+            <a:avLst/>
+          </a:prstGeom>
+          <a:noFill/>
+          <a:ln w="25400">
+            <a:solidFill>
+              <a:srgbClr val="0068B7"/>
+            </a:solidFill>
+            <a:prstDash val="solid"/>
+          </a:ln>
+        </p:spPr>
+      </p:sp>
+      <p:sp>
+        <p:nvSpPr>
+          <p:cNvPr id="15" name="Text 13"/>
+          <p:cNvSpPr/>
+          <p:nvPr/>
+        </p:nvSpPr>
+        <p:spPr>
+          <a:xfrm>
+            <a:off x="7909560" y="3099816"/>
+            <a:ext cx="2926080" cy="256032"/>
+          </a:xfrm>
+          <a:prstGeom prst="rect">
+            <a:avLst/>
+          </a:prstGeom>
+          <a:noFill/>
+          <a:ln/>
+        </p:spPr>
+        <p:txBody>
+          <a:bodyPr wrap="square" lIns="0" tIns="0" rIns="0" bIns="0" rtlCol="0" anchor="ctr"/>
+          <a:lstStyle/>
+          <a:p>
+            <a:pPr algn="ctr" indent="0" marL="0">
+              <a:buNone/>
+            </a:pPr>
+            <a:r>
+              <a:rPr lang="en-US" sz="1500" b="1" dirty="0">
+                <a:solidFill>
+                  <a:srgbClr val="003A63"/>
+                </a:solidFill>
+                <a:latin typeface="Aptos" pitchFamily="34" charset="0"/>
+                <a:ea typeface="Aptos" pitchFamily="34" charset="-122"/>
+                <a:cs typeface="Aptos" pitchFamily="34" charset="-120"/>
+              </a:rPr>
+              <a:t>Risk</a:t>
+            </a:r>
+            <a:endParaRPr lang="en-US" sz="1500" dirty="0"/>
+          </a:p>
+        </p:txBody>
+      </p:sp>
+      <p:sp>
+        <p:nvSpPr>
+          <p:cNvPr id="16" name="Shape 14"/>
+          <p:cNvSpPr/>
+          <p:nvPr/>
+        </p:nvSpPr>
+        <p:spPr>
+          <a:xfrm>
+            <a:off x="8366760" y="3639312"/>
+            <a:ext cx="2011680" cy="0"/>
+          </a:xfrm>
+          <a:prstGeom prst="line">
+            <a:avLst/>
+          </a:prstGeom>
+          <a:noFill/>
+          <a:ln w="63500">
+            <a:solidFill>
+              <a:srgbClr val="2F8A28"/>
+            </a:solidFill>
+            <a:prstDash val="solid"/>
+          </a:ln>
+        </p:spPr>
+      </p:sp>
+      <p:sp>
+        <p:nvSpPr>
+          <p:cNvPr id="17" name="Text 15"/>
+          <p:cNvSpPr/>
+          <p:nvPr/>
+        </p:nvSpPr>
+        <p:spPr>
+          <a:xfrm>
+            <a:off x="7909560" y="3849624"/>
+            <a:ext cx="2926080" cy="164592"/>
+          </a:xfrm>
+          <a:prstGeom prst="rect">
+            <a:avLst/>
+          </a:prstGeom>
+          <a:noFill/>
+          <a:ln/>
+        </p:spPr>
+        <p:txBody>
+          <a:bodyPr wrap="square" lIns="0" tIns="0" rIns="0" bIns="0" rtlCol="0" anchor="ctr"/>
+          <a:lstStyle/>
+          <a:p>
+            <a:pPr algn="ctr" indent="0" marL="0">
+              <a:buNone/>
+            </a:pPr>
+            <a:r>
+              <a:rPr lang="en-US" sz="900" dirty="0">
+                <a:solidFill>
+                  <a:srgbClr val="003A63"/>
+                </a:solidFill>
+                <a:latin typeface="Aptos" pitchFamily="34" charset="0"/>
+                <a:ea typeface="Aptos" pitchFamily="34" charset="-122"/>
+                <a:cs typeface="Aptos" pitchFamily="34" charset="-120"/>
+              </a:rPr>
+              <a:t>Human review</a:t>
+            </a:r>
+            <a:endParaRPr lang="en-US" sz="900" dirty="0"/>
+          </a:p>
+        </p:txBody>
+      </p:sp>
+      <p:sp>
+        <p:nvSpPr>
+          <p:cNvPr id="18" name="Shape 16"/>
+          <p:cNvSpPr/>
+          <p:nvPr/>
+        </p:nvSpPr>
+        <p:spPr>
+          <a:xfrm>
+            <a:off x="7635240" y="4498848"/>
+            <a:ext cx="3474720" cy="1143000"/>
+          </a:xfrm>
+          <a:prstGeom prst="roundRect">
+            <a:avLst>
+              <a:gd name="adj" fmla="val 9600"/>
             </a:avLst>
           </a:prstGeom>
           <a:solidFill>
@@ -8892,14 +10056,14 @@
       </p:sp>
       <p:sp>
         <p:nvSpPr>
-          <p:cNvPr id="14" name="Text 12"/>
-          <p:cNvSpPr/>
-          <p:nvPr/>
-        </p:nvSpPr>
-        <p:spPr>
-          <a:xfrm>
-            <a:off x="8074152" y="3666744"/>
-            <a:ext cx="2825496" cy="256032"/>
+          <p:cNvPr id="19" name="Text 17"/>
+          <p:cNvSpPr/>
+          <p:nvPr/>
+        </p:nvSpPr>
+        <p:spPr>
+          <a:xfrm>
+            <a:off x="7799832" y="4645152"/>
+            <a:ext cx="3145536" cy="256032"/>
           </a:xfrm>
           <a:prstGeom prst="rect">
             <a:avLst/>
@@ -8923,7 +10087,7 @@
                 <a:ea typeface="Aptos" pitchFamily="34" charset="-122"/>
                 <a:cs typeface="Aptos" pitchFamily="34" charset="-120"/>
               </a:rPr>
-              <a:t>Use this for</a:t>
+              <a:t>Safeguard to plan</a:t>
             </a:r>
             <a:endParaRPr lang="en-US" sz="1300" dirty="0"/>
           </a:p>
@@ -8931,14 +10095,14 @@
       </p:sp>
       <p:sp>
         <p:nvSpPr>
-          <p:cNvPr id="15" name="Text 13"/>
-          <p:cNvSpPr/>
-          <p:nvPr/>
-        </p:nvSpPr>
-        <p:spPr>
-          <a:xfrm>
-            <a:off x="8074152" y="4023360"/>
-            <a:ext cx="2825496" cy="1097280"/>
+          <p:cNvPr id="20" name="Text 18"/>
+          <p:cNvSpPr/>
+          <p:nvPr/>
+        </p:nvSpPr>
+        <p:spPr>
+          <a:xfrm>
+            <a:off x="7799832" y="5001768"/>
+            <a:ext cx="3145536" cy="502920"/>
           </a:xfrm>
           <a:prstGeom prst="rect">
             <a:avLst/>
@@ -8964,7 +10128,7 @@
                 <a:ea typeface="Aptos" pitchFamily="34" charset="-122"/>
                 <a:cs typeface="Aptos" pitchFamily="34" charset="-120"/>
               </a:rPr>
-              <a:t>Connect the concept to public health decisions, safeguards, documentation, or implementation work.</a:t>
+              <a:t>Identify what could go wrong, who could be affected, what safeguards are needed, and what evidence should be reviewed before use expands.</a:t>
             </a:r>
             <a:endParaRPr lang="en-US" sz="1550" dirty="0"/>
           </a:p>
@@ -9138,8 +10302,8 @@
         </p:nvSpPr>
         <p:spPr>
           <a:xfrm>
-            <a:off x="9966960" y="6537960"/>
-            <a:ext cx="1645920" cy="201168"/>
+            <a:off x="9646920" y="6537960"/>
+            <a:ext cx="1965960" cy="201168"/>
           </a:xfrm>
           <a:prstGeom prst="rect">
             <a:avLst/>
@@ -9163,7 +10327,7 @@
                 <a:ea typeface="Aptos" pitchFamily="34" charset="-122"/>
                 <a:cs typeface="Aptos" pitchFamily="34" charset="-120"/>
               </a:rPr>
-              <a:t>Â© Paula Soper</a:t>
+              <a:t>Copyright Paula Soper</a:t>
             </a:r>
             <a:endParaRPr lang="en-US" sz="800" dirty="0"/>
           </a:p>
@@ -9526,46 +10690,7 @@
       </p:sp>
       <p:sp>
         <p:nvSpPr>
-          <p:cNvPr id="15" name="Text 13"/>
-          <p:cNvSpPr/>
-          <p:nvPr/>
-        </p:nvSpPr>
-        <p:spPr>
-          <a:xfrm>
-            <a:off x="8695944" y="3941064"/>
-            <a:ext cx="201168" cy="256032"/>
-          </a:xfrm>
-          <a:prstGeom prst="rect">
-            <a:avLst/>
-          </a:prstGeom>
-          <a:noFill/>
-          <a:ln/>
-        </p:spPr>
-        <p:txBody>
-          <a:bodyPr wrap="square" lIns="0" tIns="0" rIns="0" bIns="0" rtlCol="0" anchor="ctr"/>
-          <a:lstStyle/>
-          <a:p>
-            <a:pPr algn="ctr" indent="0" marL="0">
-              <a:buNone/>
-            </a:pPr>
-            <a:r>
-              <a:rPr lang="en-US" sz="1800" b="1" dirty="0">
-                <a:solidFill>
-                  <a:srgbClr val="0068B7"/>
-                </a:solidFill>
-                <a:latin typeface="Aptos" pitchFamily="34" charset="0"/>
-                <a:ea typeface="Aptos" pitchFamily="34" charset="-122"/>
-                <a:cs typeface="Aptos" pitchFamily="34" charset="-120"/>
-              </a:rPr>
-              <a:t>â†’</a:t>
-            </a:r>
-            <a:endParaRPr lang="en-US" sz="1800" dirty="0"/>
-          </a:p>
-        </p:txBody>
-      </p:sp>
-      <p:sp>
-        <p:nvSpPr>
-          <p:cNvPr id="16" name="Shape 14"/>
+          <p:cNvPr id="15" name="Shape 13"/>
           <p:cNvSpPr/>
           <p:nvPr/>
         </p:nvSpPr>
@@ -9592,7 +10717,7 @@
       </p:sp>
       <p:sp>
         <p:nvSpPr>
-          <p:cNvPr id="17" name="Text 15"/>
+          <p:cNvPr id="16" name="Text 14"/>
           <p:cNvSpPr/>
           <p:nvPr/>
         </p:nvSpPr>
@@ -9633,46 +10758,7 @@
       </p:sp>
       <p:sp>
         <p:nvSpPr>
-          <p:cNvPr id="18" name="Text 16"/>
-          <p:cNvSpPr/>
-          <p:nvPr/>
-        </p:nvSpPr>
-        <p:spPr>
-          <a:xfrm>
-            <a:off x="9985248" y="3941064"/>
-            <a:ext cx="201168" cy="256032"/>
-          </a:xfrm>
-          <a:prstGeom prst="rect">
-            <a:avLst/>
-          </a:prstGeom>
-          <a:noFill/>
-          <a:ln/>
-        </p:spPr>
-        <p:txBody>
-          <a:bodyPr wrap="square" lIns="0" tIns="0" rIns="0" bIns="0" rtlCol="0" anchor="ctr"/>
-          <a:lstStyle/>
-          <a:p>
-            <a:pPr algn="ctr" indent="0" marL="0">
-              <a:buNone/>
-            </a:pPr>
-            <a:r>
-              <a:rPr lang="en-US" sz="1800" b="1" dirty="0">
-                <a:solidFill>
-                  <a:srgbClr val="0068B7"/>
-                </a:solidFill>
-                <a:latin typeface="Aptos" pitchFamily="34" charset="0"/>
-                <a:ea typeface="Aptos" pitchFamily="34" charset="-122"/>
-                <a:cs typeface="Aptos" pitchFamily="34" charset="-120"/>
-              </a:rPr>
-              <a:t>â†’</a:t>
-            </a:r>
-            <a:endParaRPr lang="en-US" sz="1800" dirty="0"/>
-          </a:p>
-        </p:txBody>
-      </p:sp>
-      <p:sp>
-        <p:nvSpPr>
-          <p:cNvPr id="19" name="Shape 17"/>
+          <p:cNvPr id="17" name="Shape 15"/>
           <p:cNvSpPr/>
           <p:nvPr/>
         </p:nvSpPr>
@@ -9699,7 +10785,7 @@
       </p:sp>
       <p:sp>
         <p:nvSpPr>
-          <p:cNvPr id="20" name="Text 18"/>
+          <p:cNvPr id="18" name="Text 16"/>
           <p:cNvSpPr/>
           <p:nvPr/>
         </p:nvSpPr>
@@ -9906,8 +10992,8 @@
         </p:nvSpPr>
         <p:spPr>
           <a:xfrm>
-            <a:off x="9966960" y="6537960"/>
-            <a:ext cx="1645920" cy="201168"/>
+            <a:off x="9646920" y="6537960"/>
+            <a:ext cx="1965960" cy="201168"/>
           </a:xfrm>
           <a:prstGeom prst="rect">
             <a:avLst/>
@@ -9931,7 +11017,7 @@
                 <a:ea typeface="Aptos" pitchFamily="34" charset="-122"/>
                 <a:cs typeface="Aptos" pitchFamily="34" charset="-120"/>
               </a:rPr>
-              <a:t>Â© Paula Soper</a:t>
+              <a:t>Copyright Paula Soper</a:t>
             </a:r>
             <a:endParaRPr lang="en-US" sz="800" dirty="0"/>
           </a:p>
@@ -9978,77 +11064,13 @@
       </p:sp>
       <p:sp>
         <p:nvSpPr>
-          <p:cNvPr id="8" name="Shape 6"/>
+          <p:cNvPr id="8" name="Text 6"/>
           <p:cNvSpPr/>
           <p:nvPr/>
         </p:nvSpPr>
         <p:spPr>
           <a:xfrm>
             <a:off x="640080" y="658368"/>
-            <a:ext cx="420624" cy="420624"/>
-          </a:xfrm>
-          <a:prstGeom prst="ellipse">
-            <a:avLst/>
-          </a:prstGeom>
-          <a:solidFill>
-            <a:srgbClr val="0068B7"/>
-          </a:solidFill>
-          <a:ln w="12700">
-            <a:solidFill>
-              <a:srgbClr val="0068B7"/>
-            </a:solidFill>
-            <a:prstDash val="solid"/>
-          </a:ln>
-        </p:spPr>
-      </p:sp>
-      <p:sp>
-        <p:nvSpPr>
-          <p:cNvPr id="9" name="Text 7"/>
-          <p:cNvSpPr/>
-          <p:nvPr/>
-        </p:nvSpPr>
-        <p:spPr>
-          <a:xfrm>
-            <a:off x="640080" y="731520"/>
-            <a:ext cx="420624" cy="164592"/>
-          </a:xfrm>
-          <a:prstGeom prst="rect">
-            <a:avLst/>
-          </a:prstGeom>
-          <a:noFill/>
-          <a:ln/>
-        </p:spPr>
-        <p:txBody>
-          <a:bodyPr wrap="square" lIns="0" tIns="0" rIns="0" bIns="0" rtlCol="0" anchor="ctr"/>
-          <a:lstStyle/>
-          <a:p>
-            <a:pPr algn="ctr" indent="0" marL="0">
-              <a:buNone/>
-            </a:pPr>
-            <a:r>
-              <a:rPr lang="en-US" sz="1100" b="1" dirty="0">
-                <a:solidFill>
-                  <a:srgbClr val="FFFFFF"/>
-                </a:solidFill>
-                <a:latin typeface="Aptos" pitchFamily="34" charset="0"/>
-                <a:ea typeface="Aptos" pitchFamily="34" charset="-122"/>
-                <a:cs typeface="Aptos" pitchFamily="34" charset="-120"/>
-              </a:rPr>
-              <a:t>11</a:t>
-            </a:r>
-            <a:endParaRPr lang="en-US" sz="1100" dirty="0"/>
-          </a:p>
-        </p:txBody>
-      </p:sp>
-      <p:sp>
-        <p:nvSpPr>
-          <p:cNvPr id="10" name="Text 8"/>
-          <p:cNvSpPr/>
-          <p:nvPr/>
-        </p:nvSpPr>
-        <p:spPr>
-          <a:xfrm>
-            <a:off x="640080" y="621792"/>
             <a:ext cx="10881360" cy="713232"/>
           </a:xfrm>
           <a:prstGeom prst="rect">
@@ -10083,14 +11105,14 @@
       </p:sp>
       <p:sp>
         <p:nvSpPr>
-          <p:cNvPr id="11" name="Text 9"/>
+          <p:cNvPr id="9" name="Text 7"/>
           <p:cNvSpPr/>
           <p:nvPr/>
         </p:nvSpPr>
         <p:spPr>
           <a:xfrm>
             <a:off x="868680" y="1508760"/>
-            <a:ext cx="6537960" cy="4160520"/>
+            <a:ext cx="6309360" cy="4160520"/>
           </a:xfrm>
           <a:prstGeom prst="rect">
             <a:avLst/>
@@ -10149,18 +11171,18 @@
       </p:sp>
       <p:sp>
         <p:nvSpPr>
-          <p:cNvPr id="12" name="Shape 10"/>
-          <p:cNvSpPr/>
-          <p:nvPr/>
-        </p:nvSpPr>
-        <p:spPr>
-          <a:xfrm>
-            <a:off x="7909560" y="1417320"/>
-            <a:ext cx="3154680" cy="1828800"/>
+          <p:cNvPr id="10" name="Shape 8"/>
+          <p:cNvSpPr/>
+          <p:nvPr/>
+        </p:nvSpPr>
+        <p:spPr>
+          <a:xfrm>
+            <a:off x="7635240" y="1325880"/>
+            <a:ext cx="3474720" cy="1325880"/>
           </a:xfrm>
           <a:prstGeom prst="roundRect">
             <a:avLst>
-              <a:gd name="adj" fmla="val 6000"/>
+              <a:gd name="adj" fmla="val 8276"/>
             </a:avLst>
           </a:prstGeom>
           <a:solidFill>
@@ -10176,14 +11198,14 @@
       </p:sp>
       <p:sp>
         <p:nvSpPr>
-          <p:cNvPr id="13" name="Text 11"/>
-          <p:cNvSpPr/>
-          <p:nvPr/>
-        </p:nvSpPr>
-        <p:spPr>
-          <a:xfrm>
-            <a:off x="8074152" y="1563624"/>
-            <a:ext cx="2825496" cy="256032"/>
+          <p:cNvPr id="11" name="Text 9"/>
+          <p:cNvSpPr/>
+          <p:nvPr/>
+        </p:nvSpPr>
+        <p:spPr>
+          <a:xfrm>
+            <a:off x="7799832" y="1472184"/>
+            <a:ext cx="3145536" cy="256032"/>
           </a:xfrm>
           <a:prstGeom prst="rect">
             <a:avLst/>
@@ -10207,7 +11229,7 @@
                 <a:ea typeface="Aptos" pitchFamily="34" charset="-122"/>
                 <a:cs typeface="Aptos" pitchFamily="34" charset="-120"/>
               </a:rPr>
-              <a:t>Key idea</a:t>
+              <a:t>Risk check</a:t>
             </a:r>
             <a:endParaRPr lang="en-US" sz="1300" dirty="0"/>
           </a:p>
@@ -10215,14 +11237,14 @@
       </p:sp>
       <p:sp>
         <p:nvSpPr>
-          <p:cNvPr id="14" name="Text 12"/>
-          <p:cNvSpPr/>
-          <p:nvPr/>
-        </p:nvSpPr>
-        <p:spPr>
-          <a:xfrm>
-            <a:off x="8074152" y="1920240"/>
-            <a:ext cx="2825496" cy="1188720"/>
+          <p:cNvPr id="12" name="Text 10"/>
+          <p:cNvSpPr/>
+          <p:nvPr/>
+        </p:nvSpPr>
+        <p:spPr>
+          <a:xfrm>
+            <a:off x="7799832" y="1828800"/>
+            <a:ext cx="3145536" cy="685800"/>
           </a:xfrm>
           <a:prstGeom prst="rect">
             <a:avLst/>
@@ -10256,18 +11278,171 @@
       </p:sp>
       <p:sp>
         <p:nvSpPr>
-          <p:cNvPr id="15" name="Shape 13"/>
-          <p:cNvSpPr/>
-          <p:nvPr/>
-        </p:nvSpPr>
-        <p:spPr>
-          <a:xfrm>
-            <a:off x="7909560" y="3520440"/>
-            <a:ext cx="3154680" cy="1737360"/>
+          <p:cNvPr id="13" name="Shape 11"/>
+          <p:cNvSpPr/>
+          <p:nvPr/>
+        </p:nvSpPr>
+        <p:spPr>
+          <a:xfrm>
+            <a:off x="7635240" y="2788920"/>
+            <a:ext cx="3474720" cy="1536192"/>
           </a:xfrm>
           <a:prstGeom prst="roundRect">
             <a:avLst>
-              <a:gd name="adj" fmla="val 6316"/>
+              <a:gd name="adj" fmla="val 7143"/>
+            </a:avLst>
+          </a:prstGeom>
+          <a:solidFill>
+            <a:srgbClr val="FFFFFF">
+              <a:alpha val="88000"/>
+            </a:srgbClr>
+          </a:solidFill>
+          <a:ln w="12700">
+            <a:solidFill>
+              <a:srgbClr val="D6E8F2"/>
+            </a:solidFill>
+            <a:prstDash val="solid"/>
+          </a:ln>
+        </p:spPr>
+      </p:sp>
+      <p:sp>
+        <p:nvSpPr>
+          <p:cNvPr id="14" name="Shape 12"/>
+          <p:cNvSpPr/>
+          <p:nvPr/>
+        </p:nvSpPr>
+        <p:spPr>
+          <a:xfrm>
+            <a:off x="8046720" y="3108960"/>
+            <a:ext cx="2651760" cy="896112"/>
+          </a:xfrm>
+          <a:prstGeom prst="arc">
+            <a:avLst/>
+          </a:prstGeom>
+          <a:noFill/>
+          <a:ln w="25400">
+            <a:solidFill>
+              <a:srgbClr val="0068B7"/>
+            </a:solidFill>
+            <a:prstDash val="solid"/>
+          </a:ln>
+        </p:spPr>
+      </p:sp>
+      <p:sp>
+        <p:nvSpPr>
+          <p:cNvPr id="15" name="Text 13"/>
+          <p:cNvSpPr/>
+          <p:nvPr/>
+        </p:nvSpPr>
+        <p:spPr>
+          <a:xfrm>
+            <a:off x="7909560" y="3099816"/>
+            <a:ext cx="2926080" cy="256032"/>
+          </a:xfrm>
+          <a:prstGeom prst="rect">
+            <a:avLst/>
+          </a:prstGeom>
+          <a:noFill/>
+          <a:ln/>
+        </p:spPr>
+        <p:txBody>
+          <a:bodyPr wrap="square" lIns="0" tIns="0" rIns="0" bIns="0" rtlCol="0" anchor="ctr"/>
+          <a:lstStyle/>
+          <a:p>
+            <a:pPr algn="ctr" indent="0" marL="0">
+              <a:buNone/>
+            </a:pPr>
+            <a:r>
+              <a:rPr lang="en-US" sz="1500" b="1" dirty="0">
+                <a:solidFill>
+                  <a:srgbClr val="003A63"/>
+                </a:solidFill>
+                <a:latin typeface="Aptos" pitchFamily="34" charset="0"/>
+                <a:ea typeface="Aptos" pitchFamily="34" charset="-122"/>
+                <a:cs typeface="Aptos" pitchFamily="34" charset="-120"/>
+              </a:rPr>
+              <a:t>Risk</a:t>
+            </a:r>
+            <a:endParaRPr lang="en-US" sz="1500" dirty="0"/>
+          </a:p>
+        </p:txBody>
+      </p:sp>
+      <p:sp>
+        <p:nvSpPr>
+          <p:cNvPr id="16" name="Shape 14"/>
+          <p:cNvSpPr/>
+          <p:nvPr/>
+        </p:nvSpPr>
+        <p:spPr>
+          <a:xfrm>
+            <a:off x="8366760" y="3639312"/>
+            <a:ext cx="2011680" cy="0"/>
+          </a:xfrm>
+          <a:prstGeom prst="line">
+            <a:avLst/>
+          </a:prstGeom>
+          <a:noFill/>
+          <a:ln w="63500">
+            <a:solidFill>
+              <a:srgbClr val="2F8A28"/>
+            </a:solidFill>
+            <a:prstDash val="solid"/>
+          </a:ln>
+        </p:spPr>
+      </p:sp>
+      <p:sp>
+        <p:nvSpPr>
+          <p:cNvPr id="17" name="Text 15"/>
+          <p:cNvSpPr/>
+          <p:nvPr/>
+        </p:nvSpPr>
+        <p:spPr>
+          <a:xfrm>
+            <a:off x="7909560" y="3849624"/>
+            <a:ext cx="2926080" cy="164592"/>
+          </a:xfrm>
+          <a:prstGeom prst="rect">
+            <a:avLst/>
+          </a:prstGeom>
+          <a:noFill/>
+          <a:ln/>
+        </p:spPr>
+        <p:txBody>
+          <a:bodyPr wrap="square" lIns="0" tIns="0" rIns="0" bIns="0" rtlCol="0" anchor="ctr"/>
+          <a:lstStyle/>
+          <a:p>
+            <a:pPr algn="ctr" indent="0" marL="0">
+              <a:buNone/>
+            </a:pPr>
+            <a:r>
+              <a:rPr lang="en-US" sz="900" dirty="0">
+                <a:solidFill>
+                  <a:srgbClr val="003A63"/>
+                </a:solidFill>
+                <a:latin typeface="Aptos" pitchFamily="34" charset="0"/>
+                <a:ea typeface="Aptos" pitchFamily="34" charset="-122"/>
+                <a:cs typeface="Aptos" pitchFamily="34" charset="-120"/>
+              </a:rPr>
+              <a:t>Human review</a:t>
+            </a:r>
+            <a:endParaRPr lang="en-US" sz="900" dirty="0"/>
+          </a:p>
+        </p:txBody>
+      </p:sp>
+      <p:sp>
+        <p:nvSpPr>
+          <p:cNvPr id="18" name="Shape 16"/>
+          <p:cNvSpPr/>
+          <p:nvPr/>
+        </p:nvSpPr>
+        <p:spPr>
+          <a:xfrm>
+            <a:off x="7635240" y="4498848"/>
+            <a:ext cx="3474720" cy="1143000"/>
+          </a:xfrm>
+          <a:prstGeom prst="roundRect">
+            <a:avLst>
+              <a:gd name="adj" fmla="val 9600"/>
             </a:avLst>
           </a:prstGeom>
           <a:solidFill>
@@ -10283,14 +11458,14 @@
       </p:sp>
       <p:sp>
         <p:nvSpPr>
-          <p:cNvPr id="16" name="Text 14"/>
-          <p:cNvSpPr/>
-          <p:nvPr/>
-        </p:nvSpPr>
-        <p:spPr>
-          <a:xfrm>
-            <a:off x="8074152" y="3666744"/>
-            <a:ext cx="2825496" cy="256032"/>
+          <p:cNvPr id="19" name="Text 17"/>
+          <p:cNvSpPr/>
+          <p:nvPr/>
+        </p:nvSpPr>
+        <p:spPr>
+          <a:xfrm>
+            <a:off x="7799832" y="4645152"/>
+            <a:ext cx="3145536" cy="256032"/>
           </a:xfrm>
           <a:prstGeom prst="rect">
             <a:avLst/>
@@ -10314,7 +11489,7 @@
                 <a:ea typeface="Aptos" pitchFamily="34" charset="-122"/>
                 <a:cs typeface="Aptos" pitchFamily="34" charset="-120"/>
               </a:rPr>
-              <a:t>Use this for</a:t>
+              <a:t>Safeguard to plan</a:t>
             </a:r>
             <a:endParaRPr lang="en-US" sz="1300" dirty="0"/>
           </a:p>
@@ -10322,14 +11497,14 @@
       </p:sp>
       <p:sp>
         <p:nvSpPr>
-          <p:cNvPr id="17" name="Text 15"/>
-          <p:cNvSpPr/>
-          <p:nvPr/>
-        </p:nvSpPr>
-        <p:spPr>
-          <a:xfrm>
-            <a:off x="8074152" y="4023360"/>
-            <a:ext cx="2825496" cy="1097280"/>
+          <p:cNvPr id="20" name="Text 18"/>
+          <p:cNvSpPr/>
+          <p:nvPr/>
+        </p:nvSpPr>
+        <p:spPr>
+          <a:xfrm>
+            <a:off x="7799832" y="5001768"/>
+            <a:ext cx="3145536" cy="502920"/>
           </a:xfrm>
           <a:prstGeom prst="rect">
             <a:avLst/>
@@ -10355,7 +11530,7 @@
                 <a:ea typeface="Aptos" pitchFamily="34" charset="-122"/>
                 <a:cs typeface="Aptos" pitchFamily="34" charset="-120"/>
               </a:rPr>
-              <a:t>Connect the concept to public health decisions, safeguards, documentation, or implementation work.</a:t>
+              <a:t>Use the assignment to test whether you can explain the concept, apply it to a realistic public health situation, and identify what would need review before the work moves forward.</a:t>
             </a:r>
             <a:endParaRPr lang="en-US" sz="1550" dirty="0"/>
           </a:p>
@@ -10529,8 +11704,8 @@
         </p:nvSpPr>
         <p:spPr>
           <a:xfrm>
-            <a:off x="9966960" y="6537960"/>
-            <a:ext cx="1645920" cy="201168"/>
+            <a:off x="9646920" y="6537960"/>
+            <a:ext cx="1965960" cy="201168"/>
           </a:xfrm>
           <a:prstGeom prst="rect">
             <a:avLst/>
@@ -10554,7 +11729,7 @@
                 <a:ea typeface="Aptos" pitchFamily="34" charset="-122"/>
                 <a:cs typeface="Aptos" pitchFamily="34" charset="-120"/>
               </a:rPr>
-              <a:t>Â© Paula Soper</a:t>
+              <a:t>Copyright Paula Soper</a:t>
             </a:r>
             <a:endParaRPr lang="en-US" sz="800" dirty="0"/>
           </a:p>
@@ -10601,77 +11776,13 @@
       </p:sp>
       <p:sp>
         <p:nvSpPr>
-          <p:cNvPr id="8" name="Shape 6"/>
+          <p:cNvPr id="8" name="Text 6"/>
           <p:cNvSpPr/>
           <p:nvPr/>
         </p:nvSpPr>
         <p:spPr>
           <a:xfrm>
             <a:off x="640080" y="658368"/>
-            <a:ext cx="420624" cy="420624"/>
-          </a:xfrm>
-          <a:prstGeom prst="ellipse">
-            <a:avLst/>
-          </a:prstGeom>
-          <a:solidFill>
-            <a:srgbClr val="0068B7"/>
-          </a:solidFill>
-          <a:ln w="12700">
-            <a:solidFill>
-              <a:srgbClr val="0068B7"/>
-            </a:solidFill>
-            <a:prstDash val="solid"/>
-          </a:ln>
-        </p:spPr>
-      </p:sp>
-      <p:sp>
-        <p:nvSpPr>
-          <p:cNvPr id="9" name="Text 7"/>
-          <p:cNvSpPr/>
-          <p:nvPr/>
-        </p:nvSpPr>
-        <p:spPr>
-          <a:xfrm>
-            <a:off x="640080" y="731520"/>
-            <a:ext cx="420624" cy="164592"/>
-          </a:xfrm>
-          <a:prstGeom prst="rect">
-            <a:avLst/>
-          </a:prstGeom>
-          <a:noFill/>
-          <a:ln/>
-        </p:spPr>
-        <p:txBody>
-          <a:bodyPr wrap="square" lIns="0" tIns="0" rIns="0" bIns="0" rtlCol="0" anchor="ctr"/>
-          <a:lstStyle/>
-          <a:p>
-            <a:pPr algn="ctr" indent="0" marL="0">
-              <a:buNone/>
-            </a:pPr>
-            <a:r>
-              <a:rPr lang="en-US" sz="1100" b="1" dirty="0">
-                <a:solidFill>
-                  <a:srgbClr val="FFFFFF"/>
-                </a:solidFill>
-                <a:latin typeface="Aptos" pitchFamily="34" charset="0"/>
-                <a:ea typeface="Aptos" pitchFamily="34" charset="-122"/>
-                <a:cs typeface="Aptos" pitchFamily="34" charset="-120"/>
-              </a:rPr>
-              <a:t>12</a:t>
-            </a:r>
-            <a:endParaRPr lang="en-US" sz="1100" dirty="0"/>
-          </a:p>
-        </p:txBody>
-      </p:sp>
-      <p:sp>
-        <p:nvSpPr>
-          <p:cNvPr id="10" name="Text 8"/>
-          <p:cNvSpPr/>
-          <p:nvPr/>
-        </p:nvSpPr>
-        <p:spPr>
-          <a:xfrm>
-            <a:off x="640080" y="621792"/>
             <a:ext cx="10881360" cy="713232"/>
           </a:xfrm>
           <a:prstGeom prst="rect">
@@ -10706,14 +11817,14 @@
       </p:sp>
       <p:sp>
         <p:nvSpPr>
-          <p:cNvPr id="11" name="Text 9"/>
+          <p:cNvPr id="9" name="Text 7"/>
           <p:cNvSpPr/>
           <p:nvPr/>
         </p:nvSpPr>
         <p:spPr>
           <a:xfrm>
             <a:off x="868680" y="1508760"/>
-            <a:ext cx="6537960" cy="4160520"/>
+            <a:ext cx="6309360" cy="4160520"/>
           </a:xfrm>
           <a:prstGeom prst="rect">
             <a:avLst/>
@@ -10772,18 +11883,18 @@
       </p:sp>
       <p:sp>
         <p:nvSpPr>
-          <p:cNvPr id="12" name="Shape 10"/>
-          <p:cNvSpPr/>
-          <p:nvPr/>
-        </p:nvSpPr>
-        <p:spPr>
-          <a:xfrm>
-            <a:off x="7909560" y="1417320"/>
-            <a:ext cx="3154680" cy="1828800"/>
+          <p:cNvPr id="10" name="Shape 8"/>
+          <p:cNvSpPr/>
+          <p:nvPr/>
+        </p:nvSpPr>
+        <p:spPr>
+          <a:xfrm>
+            <a:off x="7635240" y="1325880"/>
+            <a:ext cx="3474720" cy="1325880"/>
           </a:xfrm>
           <a:prstGeom prst="roundRect">
             <a:avLst>
-              <a:gd name="adj" fmla="val 6000"/>
+              <a:gd name="adj" fmla="val 8276"/>
             </a:avLst>
           </a:prstGeom>
           <a:solidFill>
@@ -10799,14 +11910,14 @@
       </p:sp>
       <p:sp>
         <p:nvSpPr>
-          <p:cNvPr id="13" name="Text 11"/>
-          <p:cNvSpPr/>
-          <p:nvPr/>
-        </p:nvSpPr>
-        <p:spPr>
-          <a:xfrm>
-            <a:off x="8074152" y="1563624"/>
-            <a:ext cx="2825496" cy="256032"/>
+          <p:cNvPr id="11" name="Text 9"/>
+          <p:cNvSpPr/>
+          <p:nvPr/>
+        </p:nvSpPr>
+        <p:spPr>
+          <a:xfrm>
+            <a:off x="7799832" y="1472184"/>
+            <a:ext cx="3145536" cy="256032"/>
           </a:xfrm>
           <a:prstGeom prst="rect">
             <a:avLst/>
@@ -10830,7 +11941,7 @@
                 <a:ea typeface="Aptos" pitchFamily="34" charset="-122"/>
                 <a:cs typeface="Aptos" pitchFamily="34" charset="-120"/>
               </a:rPr>
-              <a:t>Key idea</a:t>
+              <a:t>Risk check</a:t>
             </a:r>
             <a:endParaRPr lang="en-US" sz="1300" dirty="0"/>
           </a:p>
@@ -10838,14 +11949,14 @@
       </p:sp>
       <p:sp>
         <p:nvSpPr>
-          <p:cNvPr id="14" name="Text 12"/>
-          <p:cNvSpPr/>
-          <p:nvPr/>
-        </p:nvSpPr>
-        <p:spPr>
-          <a:xfrm>
-            <a:off x="8074152" y="1920240"/>
-            <a:ext cx="2825496" cy="1188720"/>
+          <p:cNvPr id="12" name="Text 10"/>
+          <p:cNvSpPr/>
+          <p:nvPr/>
+        </p:nvSpPr>
+        <p:spPr>
+          <a:xfrm>
+            <a:off x="7799832" y="1828800"/>
+            <a:ext cx="3145536" cy="685800"/>
           </a:xfrm>
           <a:prstGeom prst="rect">
             <a:avLst/>
@@ -10879,18 +11990,171 @@
       </p:sp>
       <p:sp>
         <p:nvSpPr>
-          <p:cNvPr id="15" name="Shape 13"/>
-          <p:cNvSpPr/>
-          <p:nvPr/>
-        </p:nvSpPr>
-        <p:spPr>
-          <a:xfrm>
-            <a:off x="7909560" y="3520440"/>
-            <a:ext cx="3154680" cy="1737360"/>
+          <p:cNvPr id="13" name="Shape 11"/>
+          <p:cNvSpPr/>
+          <p:nvPr/>
+        </p:nvSpPr>
+        <p:spPr>
+          <a:xfrm>
+            <a:off x="7635240" y="2788920"/>
+            <a:ext cx="3474720" cy="1536192"/>
           </a:xfrm>
           <a:prstGeom prst="roundRect">
             <a:avLst>
-              <a:gd name="adj" fmla="val 6316"/>
+              <a:gd name="adj" fmla="val 7143"/>
+            </a:avLst>
+          </a:prstGeom>
+          <a:solidFill>
+            <a:srgbClr val="FFFFFF">
+              <a:alpha val="88000"/>
+            </a:srgbClr>
+          </a:solidFill>
+          <a:ln w="12700">
+            <a:solidFill>
+              <a:srgbClr val="D6E8F2"/>
+            </a:solidFill>
+            <a:prstDash val="solid"/>
+          </a:ln>
+        </p:spPr>
+      </p:sp>
+      <p:sp>
+        <p:nvSpPr>
+          <p:cNvPr id="14" name="Shape 12"/>
+          <p:cNvSpPr/>
+          <p:nvPr/>
+        </p:nvSpPr>
+        <p:spPr>
+          <a:xfrm>
+            <a:off x="8046720" y="3108960"/>
+            <a:ext cx="2651760" cy="896112"/>
+          </a:xfrm>
+          <a:prstGeom prst="arc">
+            <a:avLst/>
+          </a:prstGeom>
+          <a:noFill/>
+          <a:ln w="25400">
+            <a:solidFill>
+              <a:srgbClr val="0068B7"/>
+            </a:solidFill>
+            <a:prstDash val="solid"/>
+          </a:ln>
+        </p:spPr>
+      </p:sp>
+      <p:sp>
+        <p:nvSpPr>
+          <p:cNvPr id="15" name="Text 13"/>
+          <p:cNvSpPr/>
+          <p:nvPr/>
+        </p:nvSpPr>
+        <p:spPr>
+          <a:xfrm>
+            <a:off x="7909560" y="3099816"/>
+            <a:ext cx="2926080" cy="256032"/>
+          </a:xfrm>
+          <a:prstGeom prst="rect">
+            <a:avLst/>
+          </a:prstGeom>
+          <a:noFill/>
+          <a:ln/>
+        </p:spPr>
+        <p:txBody>
+          <a:bodyPr wrap="square" lIns="0" tIns="0" rIns="0" bIns="0" rtlCol="0" anchor="ctr"/>
+          <a:lstStyle/>
+          <a:p>
+            <a:pPr algn="ctr" indent="0" marL="0">
+              <a:buNone/>
+            </a:pPr>
+            <a:r>
+              <a:rPr lang="en-US" sz="1500" b="1" dirty="0">
+                <a:solidFill>
+                  <a:srgbClr val="003A63"/>
+                </a:solidFill>
+                <a:latin typeface="Aptos" pitchFamily="34" charset="0"/>
+                <a:ea typeface="Aptos" pitchFamily="34" charset="-122"/>
+                <a:cs typeface="Aptos" pitchFamily="34" charset="-120"/>
+              </a:rPr>
+              <a:t>Risk</a:t>
+            </a:r>
+            <a:endParaRPr lang="en-US" sz="1500" dirty="0"/>
+          </a:p>
+        </p:txBody>
+      </p:sp>
+      <p:sp>
+        <p:nvSpPr>
+          <p:cNvPr id="16" name="Shape 14"/>
+          <p:cNvSpPr/>
+          <p:nvPr/>
+        </p:nvSpPr>
+        <p:spPr>
+          <a:xfrm>
+            <a:off x="8366760" y="3639312"/>
+            <a:ext cx="2011680" cy="0"/>
+          </a:xfrm>
+          <a:prstGeom prst="line">
+            <a:avLst/>
+          </a:prstGeom>
+          <a:noFill/>
+          <a:ln w="63500">
+            <a:solidFill>
+              <a:srgbClr val="2F8A28"/>
+            </a:solidFill>
+            <a:prstDash val="solid"/>
+          </a:ln>
+        </p:spPr>
+      </p:sp>
+      <p:sp>
+        <p:nvSpPr>
+          <p:cNvPr id="17" name="Text 15"/>
+          <p:cNvSpPr/>
+          <p:nvPr/>
+        </p:nvSpPr>
+        <p:spPr>
+          <a:xfrm>
+            <a:off x="7909560" y="3849624"/>
+            <a:ext cx="2926080" cy="164592"/>
+          </a:xfrm>
+          <a:prstGeom prst="rect">
+            <a:avLst/>
+          </a:prstGeom>
+          <a:noFill/>
+          <a:ln/>
+        </p:spPr>
+        <p:txBody>
+          <a:bodyPr wrap="square" lIns="0" tIns="0" rIns="0" bIns="0" rtlCol="0" anchor="ctr"/>
+          <a:lstStyle/>
+          <a:p>
+            <a:pPr algn="ctr" indent="0" marL="0">
+              <a:buNone/>
+            </a:pPr>
+            <a:r>
+              <a:rPr lang="en-US" sz="900" dirty="0">
+                <a:solidFill>
+                  <a:srgbClr val="003A63"/>
+                </a:solidFill>
+                <a:latin typeface="Aptos" pitchFamily="34" charset="0"/>
+                <a:ea typeface="Aptos" pitchFamily="34" charset="-122"/>
+                <a:cs typeface="Aptos" pitchFamily="34" charset="-120"/>
+              </a:rPr>
+              <a:t>Human review</a:t>
+            </a:r>
+            <a:endParaRPr lang="en-US" sz="900" dirty="0"/>
+          </a:p>
+        </p:txBody>
+      </p:sp>
+      <p:sp>
+        <p:nvSpPr>
+          <p:cNvPr id="18" name="Shape 16"/>
+          <p:cNvSpPr/>
+          <p:nvPr/>
+        </p:nvSpPr>
+        <p:spPr>
+          <a:xfrm>
+            <a:off x="7635240" y="4498848"/>
+            <a:ext cx="3474720" cy="1143000"/>
+          </a:xfrm>
+          <a:prstGeom prst="roundRect">
+            <a:avLst>
+              <a:gd name="adj" fmla="val 9600"/>
             </a:avLst>
           </a:prstGeom>
           <a:solidFill>
@@ -10906,14 +12170,14 @@
       </p:sp>
       <p:sp>
         <p:nvSpPr>
-          <p:cNvPr id="16" name="Text 14"/>
-          <p:cNvSpPr/>
-          <p:nvPr/>
-        </p:nvSpPr>
-        <p:spPr>
-          <a:xfrm>
-            <a:off x="8074152" y="3666744"/>
-            <a:ext cx="2825496" cy="256032"/>
+          <p:cNvPr id="19" name="Text 17"/>
+          <p:cNvSpPr/>
+          <p:nvPr/>
+        </p:nvSpPr>
+        <p:spPr>
+          <a:xfrm>
+            <a:off x="7799832" y="4645152"/>
+            <a:ext cx="3145536" cy="256032"/>
           </a:xfrm>
           <a:prstGeom prst="rect">
             <a:avLst/>
@@ -10937,7 +12201,7 @@
                 <a:ea typeface="Aptos" pitchFamily="34" charset="-122"/>
                 <a:cs typeface="Aptos" pitchFamily="34" charset="-120"/>
               </a:rPr>
-              <a:t>Use this for</a:t>
+              <a:t>Safeguard to plan</a:t>
             </a:r>
             <a:endParaRPr lang="en-US" sz="1300" dirty="0"/>
           </a:p>
@@ -10945,14 +12209,14 @@
       </p:sp>
       <p:sp>
         <p:nvSpPr>
-          <p:cNvPr id="17" name="Text 15"/>
-          <p:cNvSpPr/>
-          <p:nvPr/>
-        </p:nvSpPr>
-        <p:spPr>
-          <a:xfrm>
-            <a:off x="8074152" y="4023360"/>
-            <a:ext cx="2825496" cy="1097280"/>
+          <p:cNvPr id="20" name="Text 18"/>
+          <p:cNvSpPr/>
+          <p:nvPr/>
+        </p:nvSpPr>
+        <p:spPr>
+          <a:xfrm>
+            <a:off x="7799832" y="5001768"/>
+            <a:ext cx="3145536" cy="502920"/>
           </a:xfrm>
           <a:prstGeom prst="rect">
             <a:avLst/>
@@ -10978,7 +12242,7 @@
                 <a:ea typeface="Aptos" pitchFamily="34" charset="-122"/>
                 <a:cs typeface="Aptos" pitchFamily="34" charset="-120"/>
               </a:rPr>
-              <a:t>Connect the concept to public health decisions, safeguards, documentation, or implementation work.</a:t>
+              <a:t>Use the assignment to test whether you can explain the concept, apply it to a realistic public health situation, and identify what would need review before the work moves forward.</a:t>
             </a:r>
             <a:endParaRPr lang="en-US" sz="1550" dirty="0"/>
           </a:p>
@@ -11152,8 +12416,8 @@
         </p:nvSpPr>
         <p:spPr>
           <a:xfrm>
-            <a:off x="9966960" y="6537960"/>
-            <a:ext cx="1645920" cy="201168"/>
+            <a:off x="9646920" y="6537960"/>
+            <a:ext cx="1965960" cy="201168"/>
           </a:xfrm>
           <a:prstGeom prst="rect">
             <a:avLst/>
@@ -11177,7 +12441,7 @@
                 <a:ea typeface="Aptos" pitchFamily="34" charset="-122"/>
                 <a:cs typeface="Aptos" pitchFamily="34" charset="-120"/>
               </a:rPr>
-              <a:t>Â© Paula Soper</a:t>
+              <a:t>Copyright Paula Soper</a:t>
             </a:r>
             <a:endParaRPr lang="en-US" sz="800" dirty="0"/>
           </a:p>
@@ -11224,77 +12488,13 @@
       </p:sp>
       <p:sp>
         <p:nvSpPr>
-          <p:cNvPr id="8" name="Shape 6"/>
+          <p:cNvPr id="8" name="Text 6"/>
           <p:cNvSpPr/>
           <p:nvPr/>
         </p:nvSpPr>
         <p:spPr>
           <a:xfrm>
             <a:off x="640080" y="658368"/>
-            <a:ext cx="420624" cy="420624"/>
-          </a:xfrm>
-          <a:prstGeom prst="ellipse">
-            <a:avLst/>
-          </a:prstGeom>
-          <a:solidFill>
-            <a:srgbClr val="0068B7"/>
-          </a:solidFill>
-          <a:ln w="12700">
-            <a:solidFill>
-              <a:srgbClr val="0068B7"/>
-            </a:solidFill>
-            <a:prstDash val="solid"/>
-          </a:ln>
-        </p:spPr>
-      </p:sp>
-      <p:sp>
-        <p:nvSpPr>
-          <p:cNvPr id="9" name="Text 7"/>
-          <p:cNvSpPr/>
-          <p:nvPr/>
-        </p:nvSpPr>
-        <p:spPr>
-          <a:xfrm>
-            <a:off x="640080" y="731520"/>
-            <a:ext cx="420624" cy="164592"/>
-          </a:xfrm>
-          <a:prstGeom prst="rect">
-            <a:avLst/>
-          </a:prstGeom>
-          <a:noFill/>
-          <a:ln/>
-        </p:spPr>
-        <p:txBody>
-          <a:bodyPr wrap="square" lIns="0" tIns="0" rIns="0" bIns="0" rtlCol="0" anchor="ctr"/>
-          <a:lstStyle/>
-          <a:p>
-            <a:pPr algn="ctr" indent="0" marL="0">
-              <a:buNone/>
-            </a:pPr>
-            <a:r>
-              <a:rPr lang="en-US" sz="1100" b="1" dirty="0">
-                <a:solidFill>
-                  <a:srgbClr val="FFFFFF"/>
-                </a:solidFill>
-                <a:latin typeface="Aptos" pitchFamily="34" charset="0"/>
-                <a:ea typeface="Aptos" pitchFamily="34" charset="-122"/>
-                <a:cs typeface="Aptos" pitchFamily="34" charset="-120"/>
-              </a:rPr>
-              <a:t>13</a:t>
-            </a:r>
-            <a:endParaRPr lang="en-US" sz="1100" dirty="0"/>
-          </a:p>
-        </p:txBody>
-      </p:sp>
-      <p:sp>
-        <p:nvSpPr>
-          <p:cNvPr id="10" name="Text 8"/>
-          <p:cNvSpPr/>
-          <p:nvPr/>
-        </p:nvSpPr>
-        <p:spPr>
-          <a:xfrm>
-            <a:off x="640080" y="621792"/>
             <a:ext cx="10881360" cy="713232"/>
           </a:xfrm>
           <a:prstGeom prst="rect">
@@ -11329,14 +12529,14 @@
       </p:sp>
       <p:sp>
         <p:nvSpPr>
-          <p:cNvPr id="11" name="Text 9"/>
+          <p:cNvPr id="9" name="Text 7"/>
           <p:cNvSpPr/>
           <p:nvPr/>
         </p:nvSpPr>
         <p:spPr>
           <a:xfrm>
             <a:off x="868680" y="1508760"/>
-            <a:ext cx="6537960" cy="4160520"/>
+            <a:ext cx="6309360" cy="4160520"/>
           </a:xfrm>
           <a:prstGeom prst="rect">
             <a:avLst/>
@@ -11395,18 +12595,18 @@
       </p:sp>
       <p:sp>
         <p:nvSpPr>
-          <p:cNvPr id="12" name="Shape 10"/>
-          <p:cNvSpPr/>
-          <p:nvPr/>
-        </p:nvSpPr>
-        <p:spPr>
-          <a:xfrm>
-            <a:off x="7909560" y="1417320"/>
-            <a:ext cx="3154680" cy="1828800"/>
+          <p:cNvPr id="10" name="Shape 8"/>
+          <p:cNvSpPr/>
+          <p:nvPr/>
+        </p:nvSpPr>
+        <p:spPr>
+          <a:xfrm>
+            <a:off x="7635240" y="1325880"/>
+            <a:ext cx="3474720" cy="1325880"/>
           </a:xfrm>
           <a:prstGeom prst="roundRect">
             <a:avLst>
-              <a:gd name="adj" fmla="val 6000"/>
+              <a:gd name="adj" fmla="val 8276"/>
             </a:avLst>
           </a:prstGeom>
           <a:solidFill>
@@ -11422,14 +12622,14 @@
       </p:sp>
       <p:sp>
         <p:nvSpPr>
-          <p:cNvPr id="13" name="Text 11"/>
-          <p:cNvSpPr/>
-          <p:nvPr/>
-        </p:nvSpPr>
-        <p:spPr>
-          <a:xfrm>
-            <a:off x="8074152" y="1563624"/>
-            <a:ext cx="2825496" cy="256032"/>
+          <p:cNvPr id="11" name="Text 9"/>
+          <p:cNvSpPr/>
+          <p:nvPr/>
+        </p:nvSpPr>
+        <p:spPr>
+          <a:xfrm>
+            <a:off x="7799832" y="1472184"/>
+            <a:ext cx="3145536" cy="256032"/>
           </a:xfrm>
           <a:prstGeom prst="rect">
             <a:avLst/>
@@ -11453,7 +12653,7 @@
                 <a:ea typeface="Aptos" pitchFamily="34" charset="-122"/>
                 <a:cs typeface="Aptos" pitchFamily="34" charset="-120"/>
               </a:rPr>
-              <a:t>Key idea</a:t>
+              <a:t>Risk check</a:t>
             </a:r>
             <a:endParaRPr lang="en-US" sz="1300" dirty="0"/>
           </a:p>
@@ -11461,14 +12661,14 @@
       </p:sp>
       <p:sp>
         <p:nvSpPr>
-          <p:cNvPr id="14" name="Text 12"/>
-          <p:cNvSpPr/>
-          <p:nvPr/>
-        </p:nvSpPr>
-        <p:spPr>
-          <a:xfrm>
-            <a:off x="8074152" y="1920240"/>
-            <a:ext cx="2825496" cy="1188720"/>
+          <p:cNvPr id="12" name="Text 10"/>
+          <p:cNvSpPr/>
+          <p:nvPr/>
+        </p:nvSpPr>
+        <p:spPr>
+          <a:xfrm>
+            <a:off x="7799832" y="1828800"/>
+            <a:ext cx="3145536" cy="685800"/>
           </a:xfrm>
           <a:prstGeom prst="rect">
             <a:avLst/>
@@ -11502,18 +12702,171 @@
       </p:sp>
       <p:sp>
         <p:nvSpPr>
-          <p:cNvPr id="15" name="Shape 13"/>
-          <p:cNvSpPr/>
-          <p:nvPr/>
-        </p:nvSpPr>
-        <p:spPr>
-          <a:xfrm>
-            <a:off x="7909560" y="3520440"/>
-            <a:ext cx="3154680" cy="1737360"/>
+          <p:cNvPr id="13" name="Shape 11"/>
+          <p:cNvSpPr/>
+          <p:nvPr/>
+        </p:nvSpPr>
+        <p:spPr>
+          <a:xfrm>
+            <a:off x="7635240" y="2788920"/>
+            <a:ext cx="3474720" cy="1536192"/>
           </a:xfrm>
           <a:prstGeom prst="roundRect">
             <a:avLst>
-              <a:gd name="adj" fmla="val 6316"/>
+              <a:gd name="adj" fmla="val 7143"/>
+            </a:avLst>
+          </a:prstGeom>
+          <a:solidFill>
+            <a:srgbClr val="FFFFFF">
+              <a:alpha val="88000"/>
+            </a:srgbClr>
+          </a:solidFill>
+          <a:ln w="12700">
+            <a:solidFill>
+              <a:srgbClr val="D6E8F2"/>
+            </a:solidFill>
+            <a:prstDash val="solid"/>
+          </a:ln>
+        </p:spPr>
+      </p:sp>
+      <p:sp>
+        <p:nvSpPr>
+          <p:cNvPr id="14" name="Shape 12"/>
+          <p:cNvSpPr/>
+          <p:nvPr/>
+        </p:nvSpPr>
+        <p:spPr>
+          <a:xfrm>
+            <a:off x="8046720" y="3108960"/>
+            <a:ext cx="2651760" cy="896112"/>
+          </a:xfrm>
+          <a:prstGeom prst="arc">
+            <a:avLst/>
+          </a:prstGeom>
+          <a:noFill/>
+          <a:ln w="25400">
+            <a:solidFill>
+              <a:srgbClr val="0068B7"/>
+            </a:solidFill>
+            <a:prstDash val="solid"/>
+          </a:ln>
+        </p:spPr>
+      </p:sp>
+      <p:sp>
+        <p:nvSpPr>
+          <p:cNvPr id="15" name="Text 13"/>
+          <p:cNvSpPr/>
+          <p:nvPr/>
+        </p:nvSpPr>
+        <p:spPr>
+          <a:xfrm>
+            <a:off x="7909560" y="3099816"/>
+            <a:ext cx="2926080" cy="256032"/>
+          </a:xfrm>
+          <a:prstGeom prst="rect">
+            <a:avLst/>
+          </a:prstGeom>
+          <a:noFill/>
+          <a:ln/>
+        </p:spPr>
+        <p:txBody>
+          <a:bodyPr wrap="square" lIns="0" tIns="0" rIns="0" bIns="0" rtlCol="0" anchor="ctr"/>
+          <a:lstStyle/>
+          <a:p>
+            <a:pPr algn="ctr" indent="0" marL="0">
+              <a:buNone/>
+            </a:pPr>
+            <a:r>
+              <a:rPr lang="en-US" sz="1500" b="1" dirty="0">
+                <a:solidFill>
+                  <a:srgbClr val="003A63"/>
+                </a:solidFill>
+                <a:latin typeface="Aptos" pitchFamily="34" charset="0"/>
+                <a:ea typeface="Aptos" pitchFamily="34" charset="-122"/>
+                <a:cs typeface="Aptos" pitchFamily="34" charset="-120"/>
+              </a:rPr>
+              <a:t>Risk</a:t>
+            </a:r>
+            <a:endParaRPr lang="en-US" sz="1500" dirty="0"/>
+          </a:p>
+        </p:txBody>
+      </p:sp>
+      <p:sp>
+        <p:nvSpPr>
+          <p:cNvPr id="16" name="Shape 14"/>
+          <p:cNvSpPr/>
+          <p:nvPr/>
+        </p:nvSpPr>
+        <p:spPr>
+          <a:xfrm>
+            <a:off x="8366760" y="3639312"/>
+            <a:ext cx="2011680" cy="0"/>
+          </a:xfrm>
+          <a:prstGeom prst="line">
+            <a:avLst/>
+          </a:prstGeom>
+          <a:noFill/>
+          <a:ln w="63500">
+            <a:solidFill>
+              <a:srgbClr val="2F8A28"/>
+            </a:solidFill>
+            <a:prstDash val="solid"/>
+          </a:ln>
+        </p:spPr>
+      </p:sp>
+      <p:sp>
+        <p:nvSpPr>
+          <p:cNvPr id="17" name="Text 15"/>
+          <p:cNvSpPr/>
+          <p:nvPr/>
+        </p:nvSpPr>
+        <p:spPr>
+          <a:xfrm>
+            <a:off x="7909560" y="3849624"/>
+            <a:ext cx="2926080" cy="164592"/>
+          </a:xfrm>
+          <a:prstGeom prst="rect">
+            <a:avLst/>
+          </a:prstGeom>
+          <a:noFill/>
+          <a:ln/>
+        </p:spPr>
+        <p:txBody>
+          <a:bodyPr wrap="square" lIns="0" tIns="0" rIns="0" bIns="0" rtlCol="0" anchor="ctr"/>
+          <a:lstStyle/>
+          <a:p>
+            <a:pPr algn="ctr" indent="0" marL="0">
+              <a:buNone/>
+            </a:pPr>
+            <a:r>
+              <a:rPr lang="en-US" sz="900" dirty="0">
+                <a:solidFill>
+                  <a:srgbClr val="003A63"/>
+                </a:solidFill>
+                <a:latin typeface="Aptos" pitchFamily="34" charset="0"/>
+                <a:ea typeface="Aptos" pitchFamily="34" charset="-122"/>
+                <a:cs typeface="Aptos" pitchFamily="34" charset="-120"/>
+              </a:rPr>
+              <a:t>Human review</a:t>
+            </a:r>
+            <a:endParaRPr lang="en-US" sz="900" dirty="0"/>
+          </a:p>
+        </p:txBody>
+      </p:sp>
+      <p:sp>
+        <p:nvSpPr>
+          <p:cNvPr id="18" name="Shape 16"/>
+          <p:cNvSpPr/>
+          <p:nvPr/>
+        </p:nvSpPr>
+        <p:spPr>
+          <a:xfrm>
+            <a:off x="7635240" y="4498848"/>
+            <a:ext cx="3474720" cy="1143000"/>
+          </a:xfrm>
+          <a:prstGeom prst="roundRect">
+            <a:avLst>
+              <a:gd name="adj" fmla="val 9600"/>
             </a:avLst>
           </a:prstGeom>
           <a:solidFill>
@@ -11529,14 +12882,14 @@
       </p:sp>
       <p:sp>
         <p:nvSpPr>
-          <p:cNvPr id="16" name="Text 14"/>
-          <p:cNvSpPr/>
-          <p:nvPr/>
-        </p:nvSpPr>
-        <p:spPr>
-          <a:xfrm>
-            <a:off x="8074152" y="3666744"/>
-            <a:ext cx="2825496" cy="256032"/>
+          <p:cNvPr id="19" name="Text 17"/>
+          <p:cNvSpPr/>
+          <p:nvPr/>
+        </p:nvSpPr>
+        <p:spPr>
+          <a:xfrm>
+            <a:off x="7799832" y="4645152"/>
+            <a:ext cx="3145536" cy="256032"/>
           </a:xfrm>
           <a:prstGeom prst="rect">
             <a:avLst/>
@@ -11560,7 +12913,7 @@
                 <a:ea typeface="Aptos" pitchFamily="34" charset="-122"/>
                 <a:cs typeface="Aptos" pitchFamily="34" charset="-120"/>
               </a:rPr>
-              <a:t>Use this for</a:t>
+              <a:t>Safeguard to plan</a:t>
             </a:r>
             <a:endParaRPr lang="en-US" sz="1300" dirty="0"/>
           </a:p>
@@ -11568,14 +12921,14 @@
       </p:sp>
       <p:sp>
         <p:nvSpPr>
-          <p:cNvPr id="17" name="Text 15"/>
-          <p:cNvSpPr/>
-          <p:nvPr/>
-        </p:nvSpPr>
-        <p:spPr>
-          <a:xfrm>
-            <a:off x="8074152" y="4023360"/>
-            <a:ext cx="2825496" cy="1097280"/>
+          <p:cNvPr id="20" name="Text 18"/>
+          <p:cNvSpPr/>
+          <p:nvPr/>
+        </p:nvSpPr>
+        <p:spPr>
+          <a:xfrm>
+            <a:off x="7799832" y="5001768"/>
+            <a:ext cx="3145536" cy="502920"/>
           </a:xfrm>
           <a:prstGeom prst="rect">
             <a:avLst/>
@@ -11601,7 +12954,7 @@
                 <a:ea typeface="Aptos" pitchFamily="34" charset="-122"/>
                 <a:cs typeface="Aptos" pitchFamily="34" charset="-120"/>
               </a:rPr>
-              <a:t>Connect the concept to public health decisions, safeguards, documentation, or implementation work.</a:t>
+              <a:t>Identify what could go wrong, who could be affected, what safeguards are needed, and what evidence should be reviewed before use expands.</a:t>
             </a:r>
             <a:endParaRPr lang="en-US" sz="1550" dirty="0"/>
           </a:p>
@@ -11775,8 +13128,8 @@
         </p:nvSpPr>
         <p:spPr>
           <a:xfrm>
-            <a:off x="9966960" y="6537960"/>
-            <a:ext cx="1645920" cy="201168"/>
+            <a:off x="9646920" y="6537960"/>
+            <a:ext cx="1965960" cy="201168"/>
           </a:xfrm>
           <a:prstGeom prst="rect">
             <a:avLst/>
@@ -11800,7 +13153,7 @@
                 <a:ea typeface="Aptos" pitchFamily="34" charset="-122"/>
                 <a:cs typeface="Aptos" pitchFamily="34" charset="-120"/>
               </a:rPr>
-              <a:t>Â© Paula Soper</a:t>
+              <a:t>Copyright Paula Soper</a:t>
             </a:r>
             <a:endParaRPr lang="en-US" sz="800" dirty="0"/>
           </a:p>
@@ -12143,46 +13496,7 @@
       </p:sp>
       <p:sp>
         <p:nvSpPr>
-          <p:cNvPr id="15" name="Text 13"/>
-          <p:cNvSpPr/>
-          <p:nvPr/>
-        </p:nvSpPr>
-        <p:spPr>
-          <a:xfrm>
-            <a:off x="8817864" y="4187952"/>
-            <a:ext cx="201168" cy="256032"/>
-          </a:xfrm>
-          <a:prstGeom prst="rect">
-            <a:avLst/>
-          </a:prstGeom>
-          <a:noFill/>
-          <a:ln/>
-        </p:spPr>
-        <p:txBody>
-          <a:bodyPr wrap="square" lIns="0" tIns="0" rIns="0" bIns="0" rtlCol="0" anchor="ctr"/>
-          <a:lstStyle/>
-          <a:p>
-            <a:pPr algn="ctr" indent="0" marL="0">
-              <a:buNone/>
-            </a:pPr>
-            <a:r>
-              <a:rPr lang="en-US" sz="1800" b="1" dirty="0">
-                <a:solidFill>
-                  <a:srgbClr val="0068B7"/>
-                </a:solidFill>
-                <a:latin typeface="Aptos" pitchFamily="34" charset="0"/>
-                <a:ea typeface="Aptos" pitchFamily="34" charset="-122"/>
-                <a:cs typeface="Aptos" pitchFamily="34" charset="-120"/>
-              </a:rPr>
-              <a:t>â†’</a:t>
-            </a:r>
-            <a:endParaRPr lang="en-US" sz="1800" dirty="0"/>
-          </a:p>
-        </p:txBody>
-      </p:sp>
-      <p:sp>
-        <p:nvSpPr>
-          <p:cNvPr id="16" name="Shape 14"/>
+          <p:cNvPr id="15" name="Shape 13"/>
           <p:cNvSpPr/>
           <p:nvPr/>
         </p:nvSpPr>
@@ -12209,7 +13523,7 @@
       </p:sp>
       <p:sp>
         <p:nvSpPr>
-          <p:cNvPr id="17" name="Text 15"/>
+          <p:cNvPr id="16" name="Text 14"/>
           <p:cNvSpPr/>
           <p:nvPr/>
         </p:nvSpPr>
@@ -12250,46 +13564,7 @@
       </p:sp>
       <p:sp>
         <p:nvSpPr>
-          <p:cNvPr id="18" name="Text 16"/>
-          <p:cNvSpPr/>
-          <p:nvPr/>
-        </p:nvSpPr>
-        <p:spPr>
-          <a:xfrm>
-            <a:off x="10046208" y="4187952"/>
-            <a:ext cx="201168" cy="256032"/>
-          </a:xfrm>
-          <a:prstGeom prst="rect">
-            <a:avLst/>
-          </a:prstGeom>
-          <a:noFill/>
-          <a:ln/>
-        </p:spPr>
-        <p:txBody>
-          <a:bodyPr wrap="square" lIns="0" tIns="0" rIns="0" bIns="0" rtlCol="0" anchor="ctr"/>
-          <a:lstStyle/>
-          <a:p>
-            <a:pPr algn="ctr" indent="0" marL="0">
-              <a:buNone/>
-            </a:pPr>
-            <a:r>
-              <a:rPr lang="en-US" sz="1800" b="1" dirty="0">
-                <a:solidFill>
-                  <a:srgbClr val="0068B7"/>
-                </a:solidFill>
-                <a:latin typeface="Aptos" pitchFamily="34" charset="0"/>
-                <a:ea typeface="Aptos" pitchFamily="34" charset="-122"/>
-                <a:cs typeface="Aptos" pitchFamily="34" charset="-120"/>
-              </a:rPr>
-              <a:t>â†’</a:t>
-            </a:r>
-            <a:endParaRPr lang="en-US" sz="1800" dirty="0"/>
-          </a:p>
-        </p:txBody>
-      </p:sp>
-      <p:sp>
-        <p:nvSpPr>
-          <p:cNvPr id="19" name="Shape 17"/>
+          <p:cNvPr id="17" name="Shape 15"/>
           <p:cNvSpPr/>
           <p:nvPr/>
         </p:nvSpPr>
@@ -12316,7 +13591,7 @@
       </p:sp>
       <p:sp>
         <p:nvSpPr>
-          <p:cNvPr id="20" name="Text 18"/>
+          <p:cNvPr id="18" name="Text 16"/>
           <p:cNvSpPr/>
           <p:nvPr/>
         </p:nvSpPr>
@@ -12523,8 +13798,8 @@
         </p:nvSpPr>
         <p:spPr>
           <a:xfrm>
-            <a:off x="9966960" y="6537960"/>
-            <a:ext cx="1645920" cy="201168"/>
+            <a:off x="9646920" y="6537960"/>
+            <a:ext cx="1965960" cy="201168"/>
           </a:xfrm>
           <a:prstGeom prst="rect">
             <a:avLst/>
@@ -12548,7 +13823,7 @@
                 <a:ea typeface="Aptos" pitchFamily="34" charset="-122"/>
                 <a:cs typeface="Aptos" pitchFamily="34" charset="-120"/>
               </a:rPr>
-              <a:t>Â© Paula Soper</a:t>
+              <a:t>Copyright Paula Soper</a:t>
             </a:r>
             <a:endParaRPr lang="en-US" sz="800" dirty="0"/>
           </a:p>
@@ -12891,46 +14166,7 @@
       </p:sp>
       <p:sp>
         <p:nvSpPr>
-          <p:cNvPr id="15" name="Text 13"/>
-          <p:cNvSpPr/>
-          <p:nvPr/>
-        </p:nvSpPr>
-        <p:spPr>
-          <a:xfrm>
-            <a:off x="8817864" y="4187952"/>
-            <a:ext cx="201168" cy="256032"/>
-          </a:xfrm>
-          <a:prstGeom prst="rect">
-            <a:avLst/>
-          </a:prstGeom>
-          <a:noFill/>
-          <a:ln/>
-        </p:spPr>
-        <p:txBody>
-          <a:bodyPr wrap="square" lIns="0" tIns="0" rIns="0" bIns="0" rtlCol="0" anchor="ctr"/>
-          <a:lstStyle/>
-          <a:p>
-            <a:pPr algn="ctr" indent="0" marL="0">
-              <a:buNone/>
-            </a:pPr>
-            <a:r>
-              <a:rPr lang="en-US" sz="1800" b="1" dirty="0">
-                <a:solidFill>
-                  <a:srgbClr val="0068B7"/>
-                </a:solidFill>
-                <a:latin typeface="Aptos" pitchFamily="34" charset="0"/>
-                <a:ea typeface="Aptos" pitchFamily="34" charset="-122"/>
-                <a:cs typeface="Aptos" pitchFamily="34" charset="-120"/>
-              </a:rPr>
-              <a:t>â†’</a:t>
-            </a:r>
-            <a:endParaRPr lang="en-US" sz="1800" dirty="0"/>
-          </a:p>
-        </p:txBody>
-      </p:sp>
-      <p:sp>
-        <p:nvSpPr>
-          <p:cNvPr id="16" name="Shape 14"/>
+          <p:cNvPr id="15" name="Shape 13"/>
           <p:cNvSpPr/>
           <p:nvPr/>
         </p:nvSpPr>
@@ -12957,7 +14193,7 @@
       </p:sp>
       <p:sp>
         <p:nvSpPr>
-          <p:cNvPr id="17" name="Text 15"/>
+          <p:cNvPr id="16" name="Text 14"/>
           <p:cNvSpPr/>
           <p:nvPr/>
         </p:nvSpPr>
@@ -12998,46 +14234,7 @@
       </p:sp>
       <p:sp>
         <p:nvSpPr>
-          <p:cNvPr id="18" name="Text 16"/>
-          <p:cNvSpPr/>
-          <p:nvPr/>
-        </p:nvSpPr>
-        <p:spPr>
-          <a:xfrm>
-            <a:off x="10046208" y="4187952"/>
-            <a:ext cx="201168" cy="256032"/>
-          </a:xfrm>
-          <a:prstGeom prst="rect">
-            <a:avLst/>
-          </a:prstGeom>
-          <a:noFill/>
-          <a:ln/>
-        </p:spPr>
-        <p:txBody>
-          <a:bodyPr wrap="square" lIns="0" tIns="0" rIns="0" bIns="0" rtlCol="0" anchor="ctr"/>
-          <a:lstStyle/>
-          <a:p>
-            <a:pPr algn="ctr" indent="0" marL="0">
-              <a:buNone/>
-            </a:pPr>
-            <a:r>
-              <a:rPr lang="en-US" sz="1800" b="1" dirty="0">
-                <a:solidFill>
-                  <a:srgbClr val="0068B7"/>
-                </a:solidFill>
-                <a:latin typeface="Aptos" pitchFamily="34" charset="0"/>
-                <a:ea typeface="Aptos" pitchFamily="34" charset="-122"/>
-                <a:cs typeface="Aptos" pitchFamily="34" charset="-120"/>
-              </a:rPr>
-              <a:t>â†’</a:t>
-            </a:r>
-            <a:endParaRPr lang="en-US" sz="1800" dirty="0"/>
-          </a:p>
-        </p:txBody>
-      </p:sp>
-      <p:sp>
-        <p:nvSpPr>
-          <p:cNvPr id="19" name="Shape 17"/>
+          <p:cNvPr id="17" name="Shape 15"/>
           <p:cNvSpPr/>
           <p:nvPr/>
         </p:nvSpPr>
@@ -13064,7 +14261,7 @@
       </p:sp>
       <p:sp>
         <p:nvSpPr>
-          <p:cNvPr id="20" name="Text 18"/>
+          <p:cNvPr id="18" name="Text 16"/>
           <p:cNvSpPr/>
           <p:nvPr/>
         </p:nvSpPr>
@@ -13271,8 +14468,8 @@
         </p:nvSpPr>
         <p:spPr>
           <a:xfrm>
-            <a:off x="9966960" y="6537960"/>
-            <a:ext cx="1645920" cy="201168"/>
+            <a:off x="9646920" y="6537960"/>
+            <a:ext cx="1965960" cy="201168"/>
           </a:xfrm>
           <a:prstGeom prst="rect">
             <a:avLst/>
@@ -13296,7 +14493,7 @@
                 <a:ea typeface="Aptos" pitchFamily="34" charset="-122"/>
                 <a:cs typeface="Aptos" pitchFamily="34" charset="-120"/>
               </a:rPr>
-              <a:t>Â© Paula Soper</a:t>
+              <a:t>Copyright Paula Soper</a:t>
             </a:r>
             <a:endParaRPr lang="en-US" sz="800" dirty="0"/>
           </a:p>
@@ -13343,77 +14540,13 @@
       </p:sp>
       <p:sp>
         <p:nvSpPr>
-          <p:cNvPr id="8" name="Shape 6"/>
+          <p:cNvPr id="8" name="Text 6"/>
           <p:cNvSpPr/>
           <p:nvPr/>
         </p:nvSpPr>
         <p:spPr>
           <a:xfrm>
             <a:off x="640080" y="658368"/>
-            <a:ext cx="420624" cy="420624"/>
-          </a:xfrm>
-          <a:prstGeom prst="ellipse">
-            <a:avLst/>
-          </a:prstGeom>
-          <a:solidFill>
-            <a:srgbClr val="0068B7"/>
-          </a:solidFill>
-          <a:ln w="12700">
-            <a:solidFill>
-              <a:srgbClr val="0068B7"/>
-            </a:solidFill>
-            <a:prstDash val="solid"/>
-          </a:ln>
-        </p:spPr>
-      </p:sp>
-      <p:sp>
-        <p:nvSpPr>
-          <p:cNvPr id="9" name="Text 7"/>
-          <p:cNvSpPr/>
-          <p:nvPr/>
-        </p:nvSpPr>
-        <p:spPr>
-          <a:xfrm>
-            <a:off x="640080" y="731520"/>
-            <a:ext cx="420624" cy="164592"/>
-          </a:xfrm>
-          <a:prstGeom prst="rect">
-            <a:avLst/>
-          </a:prstGeom>
-          <a:noFill/>
-          <a:ln/>
-        </p:spPr>
-        <p:txBody>
-          <a:bodyPr wrap="square" lIns="0" tIns="0" rIns="0" bIns="0" rtlCol="0" anchor="ctr"/>
-          <a:lstStyle/>
-          <a:p>
-            <a:pPr algn="ctr" indent="0" marL="0">
-              <a:buNone/>
-            </a:pPr>
-            <a:r>
-              <a:rPr lang="en-US" sz="1100" b="1" dirty="0">
-                <a:solidFill>
-                  <a:srgbClr val="FFFFFF"/>
-                </a:solidFill>
-                <a:latin typeface="Aptos" pitchFamily="34" charset="0"/>
-                <a:ea typeface="Aptos" pitchFamily="34" charset="-122"/>
-                <a:cs typeface="Aptos" pitchFamily="34" charset="-120"/>
-              </a:rPr>
-              <a:t>1</a:t>
-            </a:r>
-            <a:endParaRPr lang="en-US" sz="1100" dirty="0"/>
-          </a:p>
-        </p:txBody>
-      </p:sp>
-      <p:sp>
-        <p:nvSpPr>
-          <p:cNvPr id="10" name="Text 8"/>
-          <p:cNvSpPr/>
-          <p:nvPr/>
-        </p:nvSpPr>
-        <p:spPr>
-          <a:xfrm>
-            <a:off x="640080" y="621792"/>
             <a:ext cx="10881360" cy="713232"/>
           </a:xfrm>
           <a:prstGeom prst="rect">
@@ -13448,14 +14581,14 @@
       </p:sp>
       <p:sp>
         <p:nvSpPr>
-          <p:cNvPr id="11" name="Text 9"/>
+          <p:cNvPr id="9" name="Text 7"/>
           <p:cNvSpPr/>
           <p:nvPr/>
         </p:nvSpPr>
         <p:spPr>
           <a:xfrm>
             <a:off x="868680" y="1508760"/>
-            <a:ext cx="6537960" cy="4160520"/>
+            <a:ext cx="6309360" cy="4160520"/>
           </a:xfrm>
           <a:prstGeom prst="rect">
             <a:avLst/>
@@ -13514,18 +14647,18 @@
       </p:sp>
       <p:sp>
         <p:nvSpPr>
-          <p:cNvPr id="12" name="Shape 10"/>
-          <p:cNvSpPr/>
-          <p:nvPr/>
-        </p:nvSpPr>
-        <p:spPr>
-          <a:xfrm>
-            <a:off x="7909560" y="1417320"/>
-            <a:ext cx="3154680" cy="1828800"/>
+          <p:cNvPr id="10" name="Shape 8"/>
+          <p:cNvSpPr/>
+          <p:nvPr/>
+        </p:nvSpPr>
+        <p:spPr>
+          <a:xfrm>
+            <a:off x="7635240" y="1325880"/>
+            <a:ext cx="3474720" cy="1325880"/>
           </a:xfrm>
           <a:prstGeom prst="roundRect">
             <a:avLst>
-              <a:gd name="adj" fmla="val 6000"/>
+              <a:gd name="adj" fmla="val 8276"/>
             </a:avLst>
           </a:prstGeom>
           <a:solidFill>
@@ -13541,14 +14674,14 @@
       </p:sp>
       <p:sp>
         <p:nvSpPr>
-          <p:cNvPr id="13" name="Text 11"/>
-          <p:cNvSpPr/>
-          <p:nvPr/>
-        </p:nvSpPr>
-        <p:spPr>
-          <a:xfrm>
-            <a:off x="8074152" y="1563624"/>
-            <a:ext cx="2825496" cy="256032"/>
+          <p:cNvPr id="11" name="Text 9"/>
+          <p:cNvSpPr/>
+          <p:nvPr/>
+        </p:nvSpPr>
+        <p:spPr>
+          <a:xfrm>
+            <a:off x="7799832" y="1472184"/>
+            <a:ext cx="3145536" cy="256032"/>
           </a:xfrm>
           <a:prstGeom prst="rect">
             <a:avLst/>
@@ -13572,7 +14705,7 @@
                 <a:ea typeface="Aptos" pitchFamily="34" charset="-122"/>
                 <a:cs typeface="Aptos" pitchFamily="34" charset="-120"/>
               </a:rPr>
-              <a:t>Key idea</a:t>
+              <a:t>Risk check</a:t>
             </a:r>
             <a:endParaRPr lang="en-US" sz="1300" dirty="0"/>
           </a:p>
@@ -13580,14 +14713,14 @@
       </p:sp>
       <p:sp>
         <p:nvSpPr>
-          <p:cNvPr id="14" name="Text 12"/>
-          <p:cNvSpPr/>
-          <p:nvPr/>
-        </p:nvSpPr>
-        <p:spPr>
-          <a:xfrm>
-            <a:off x="8074152" y="1920240"/>
-            <a:ext cx="2825496" cy="1188720"/>
+          <p:cNvPr id="12" name="Text 10"/>
+          <p:cNvSpPr/>
+          <p:nvPr/>
+        </p:nvSpPr>
+        <p:spPr>
+          <a:xfrm>
+            <a:off x="7799832" y="1828800"/>
+            <a:ext cx="3145536" cy="685800"/>
           </a:xfrm>
           <a:prstGeom prst="rect">
             <a:avLst/>
@@ -13621,18 +14754,171 @@
       </p:sp>
       <p:sp>
         <p:nvSpPr>
-          <p:cNvPr id="15" name="Shape 13"/>
-          <p:cNvSpPr/>
-          <p:nvPr/>
-        </p:nvSpPr>
-        <p:spPr>
-          <a:xfrm>
-            <a:off x="7909560" y="3520440"/>
-            <a:ext cx="3154680" cy="1737360"/>
+          <p:cNvPr id="13" name="Shape 11"/>
+          <p:cNvSpPr/>
+          <p:nvPr/>
+        </p:nvSpPr>
+        <p:spPr>
+          <a:xfrm>
+            <a:off x="7635240" y="2788920"/>
+            <a:ext cx="3474720" cy="1536192"/>
           </a:xfrm>
           <a:prstGeom prst="roundRect">
             <a:avLst>
-              <a:gd name="adj" fmla="val 6316"/>
+              <a:gd name="adj" fmla="val 7143"/>
+            </a:avLst>
+          </a:prstGeom>
+          <a:solidFill>
+            <a:srgbClr val="FFFFFF">
+              <a:alpha val="88000"/>
+            </a:srgbClr>
+          </a:solidFill>
+          <a:ln w="12700">
+            <a:solidFill>
+              <a:srgbClr val="D6E8F2"/>
+            </a:solidFill>
+            <a:prstDash val="solid"/>
+          </a:ln>
+        </p:spPr>
+      </p:sp>
+      <p:sp>
+        <p:nvSpPr>
+          <p:cNvPr id="14" name="Shape 12"/>
+          <p:cNvSpPr/>
+          <p:nvPr/>
+        </p:nvSpPr>
+        <p:spPr>
+          <a:xfrm>
+            <a:off x="8046720" y="3108960"/>
+            <a:ext cx="2651760" cy="896112"/>
+          </a:xfrm>
+          <a:prstGeom prst="arc">
+            <a:avLst/>
+          </a:prstGeom>
+          <a:noFill/>
+          <a:ln w="25400">
+            <a:solidFill>
+              <a:srgbClr val="0068B7"/>
+            </a:solidFill>
+            <a:prstDash val="solid"/>
+          </a:ln>
+        </p:spPr>
+      </p:sp>
+      <p:sp>
+        <p:nvSpPr>
+          <p:cNvPr id="15" name="Text 13"/>
+          <p:cNvSpPr/>
+          <p:nvPr/>
+        </p:nvSpPr>
+        <p:spPr>
+          <a:xfrm>
+            <a:off x="7909560" y="3099816"/>
+            <a:ext cx="2926080" cy="256032"/>
+          </a:xfrm>
+          <a:prstGeom prst="rect">
+            <a:avLst/>
+          </a:prstGeom>
+          <a:noFill/>
+          <a:ln/>
+        </p:spPr>
+        <p:txBody>
+          <a:bodyPr wrap="square" lIns="0" tIns="0" rIns="0" bIns="0" rtlCol="0" anchor="ctr"/>
+          <a:lstStyle/>
+          <a:p>
+            <a:pPr algn="ctr" indent="0" marL="0">
+              <a:buNone/>
+            </a:pPr>
+            <a:r>
+              <a:rPr lang="en-US" sz="1500" b="1" dirty="0">
+                <a:solidFill>
+                  <a:srgbClr val="003A63"/>
+                </a:solidFill>
+                <a:latin typeface="Aptos" pitchFamily="34" charset="0"/>
+                <a:ea typeface="Aptos" pitchFamily="34" charset="-122"/>
+                <a:cs typeface="Aptos" pitchFamily="34" charset="-120"/>
+              </a:rPr>
+              <a:t>Risk</a:t>
+            </a:r>
+            <a:endParaRPr lang="en-US" sz="1500" dirty="0"/>
+          </a:p>
+        </p:txBody>
+      </p:sp>
+      <p:sp>
+        <p:nvSpPr>
+          <p:cNvPr id="16" name="Shape 14"/>
+          <p:cNvSpPr/>
+          <p:nvPr/>
+        </p:nvSpPr>
+        <p:spPr>
+          <a:xfrm>
+            <a:off x="8366760" y="3639312"/>
+            <a:ext cx="2011680" cy="0"/>
+          </a:xfrm>
+          <a:prstGeom prst="line">
+            <a:avLst/>
+          </a:prstGeom>
+          <a:noFill/>
+          <a:ln w="63500">
+            <a:solidFill>
+              <a:srgbClr val="2F8A28"/>
+            </a:solidFill>
+            <a:prstDash val="solid"/>
+          </a:ln>
+        </p:spPr>
+      </p:sp>
+      <p:sp>
+        <p:nvSpPr>
+          <p:cNvPr id="17" name="Text 15"/>
+          <p:cNvSpPr/>
+          <p:nvPr/>
+        </p:nvSpPr>
+        <p:spPr>
+          <a:xfrm>
+            <a:off x="7909560" y="3849624"/>
+            <a:ext cx="2926080" cy="164592"/>
+          </a:xfrm>
+          <a:prstGeom prst="rect">
+            <a:avLst/>
+          </a:prstGeom>
+          <a:noFill/>
+          <a:ln/>
+        </p:spPr>
+        <p:txBody>
+          <a:bodyPr wrap="square" lIns="0" tIns="0" rIns="0" bIns="0" rtlCol="0" anchor="ctr"/>
+          <a:lstStyle/>
+          <a:p>
+            <a:pPr algn="ctr" indent="0" marL="0">
+              <a:buNone/>
+            </a:pPr>
+            <a:r>
+              <a:rPr lang="en-US" sz="900" dirty="0">
+                <a:solidFill>
+                  <a:srgbClr val="003A63"/>
+                </a:solidFill>
+                <a:latin typeface="Aptos" pitchFamily="34" charset="0"/>
+                <a:ea typeface="Aptos" pitchFamily="34" charset="-122"/>
+                <a:cs typeface="Aptos" pitchFamily="34" charset="-120"/>
+              </a:rPr>
+              <a:t>Human review</a:t>
+            </a:r>
+            <a:endParaRPr lang="en-US" sz="900" dirty="0"/>
+          </a:p>
+        </p:txBody>
+      </p:sp>
+      <p:sp>
+        <p:nvSpPr>
+          <p:cNvPr id="18" name="Shape 16"/>
+          <p:cNvSpPr/>
+          <p:nvPr/>
+        </p:nvSpPr>
+        <p:spPr>
+          <a:xfrm>
+            <a:off x="7635240" y="4498848"/>
+            <a:ext cx="3474720" cy="1143000"/>
+          </a:xfrm>
+          <a:prstGeom prst="roundRect">
+            <a:avLst>
+              <a:gd name="adj" fmla="val 9600"/>
             </a:avLst>
           </a:prstGeom>
           <a:solidFill>
@@ -13648,14 +14934,14 @@
       </p:sp>
       <p:sp>
         <p:nvSpPr>
-          <p:cNvPr id="16" name="Text 14"/>
-          <p:cNvSpPr/>
-          <p:nvPr/>
-        </p:nvSpPr>
-        <p:spPr>
-          <a:xfrm>
-            <a:off x="8074152" y="3666744"/>
-            <a:ext cx="2825496" cy="256032"/>
+          <p:cNvPr id="19" name="Text 17"/>
+          <p:cNvSpPr/>
+          <p:nvPr/>
+        </p:nvSpPr>
+        <p:spPr>
+          <a:xfrm>
+            <a:off x="7799832" y="4645152"/>
+            <a:ext cx="3145536" cy="256032"/>
           </a:xfrm>
           <a:prstGeom prst="rect">
             <a:avLst/>
@@ -13679,7 +14965,7 @@
                 <a:ea typeface="Aptos" pitchFamily="34" charset="-122"/>
                 <a:cs typeface="Aptos" pitchFamily="34" charset="-120"/>
               </a:rPr>
-              <a:t>Use this for</a:t>
+              <a:t>Safeguard to plan</a:t>
             </a:r>
             <a:endParaRPr lang="en-US" sz="1300" dirty="0"/>
           </a:p>
@@ -13687,14 +14973,14 @@
       </p:sp>
       <p:sp>
         <p:nvSpPr>
-          <p:cNvPr id="17" name="Text 15"/>
-          <p:cNvSpPr/>
-          <p:nvPr/>
-        </p:nvSpPr>
-        <p:spPr>
-          <a:xfrm>
-            <a:off x="8074152" y="4023360"/>
-            <a:ext cx="2825496" cy="1097280"/>
+          <p:cNvPr id="20" name="Text 18"/>
+          <p:cNvSpPr/>
+          <p:nvPr/>
+        </p:nvSpPr>
+        <p:spPr>
+          <a:xfrm>
+            <a:off x="7799832" y="5001768"/>
+            <a:ext cx="3145536" cy="502920"/>
           </a:xfrm>
           <a:prstGeom prst="rect">
             <a:avLst/>
@@ -13720,7 +15006,7 @@
                 <a:ea typeface="Aptos" pitchFamily="34" charset="-122"/>
                 <a:cs typeface="Aptos" pitchFamily="34" charset="-120"/>
               </a:rPr>
-              <a:t>Connect the concept to public health decisions, safeguards, documentation, or implementation work.</a:t>
+              <a:t>Use the assignment to test whether you can explain the concept, apply it to a realistic public health situation, and identify what would need review before the work moves forward.</a:t>
             </a:r>
             <a:endParaRPr lang="en-US" sz="1550" dirty="0"/>
           </a:p>
@@ -13894,8 +15180,8 @@
         </p:nvSpPr>
         <p:spPr>
           <a:xfrm>
-            <a:off x="9966960" y="6537960"/>
-            <a:ext cx="1645920" cy="201168"/>
+            <a:off x="9646920" y="6537960"/>
+            <a:ext cx="1965960" cy="201168"/>
           </a:xfrm>
           <a:prstGeom prst="rect">
             <a:avLst/>
@@ -13919,7 +15205,7 @@
                 <a:ea typeface="Aptos" pitchFamily="34" charset="-122"/>
                 <a:cs typeface="Aptos" pitchFamily="34" charset="-120"/>
               </a:rPr>
-              <a:t>Â© Paula Soper</a:t>
+              <a:t>Copyright Paula Soper</a:t>
             </a:r>
             <a:endParaRPr lang="en-US" sz="800" dirty="0"/>
           </a:p>
@@ -14014,7 +15300,7 @@
         <p:spPr>
           <a:xfrm>
             <a:off x="868680" y="1508760"/>
-            <a:ext cx="6537960" cy="4160520"/>
+            <a:ext cx="6309360" cy="4160520"/>
           </a:xfrm>
           <a:prstGeom prst="rect">
             <a:avLst/>
@@ -14051,12 +15337,12 @@
         </p:nvSpPr>
         <p:spPr>
           <a:xfrm>
-            <a:off x="7909560" y="1417320"/>
-            <a:ext cx="3154680" cy="1828800"/>
+            <a:off x="7635240" y="1325880"/>
+            <a:ext cx="3474720" cy="1325880"/>
           </a:xfrm>
           <a:prstGeom prst="roundRect">
             <a:avLst>
-              <a:gd name="adj" fmla="val 6000"/>
+              <a:gd name="adj" fmla="val 8276"/>
             </a:avLst>
           </a:prstGeom>
           <a:solidFill>
@@ -14078,8 +15364,8 @@
         </p:nvSpPr>
         <p:spPr>
           <a:xfrm>
-            <a:off x="8074152" y="1563624"/>
-            <a:ext cx="2825496" cy="256032"/>
+            <a:off x="7799832" y="1472184"/>
+            <a:ext cx="3145536" cy="256032"/>
           </a:xfrm>
           <a:prstGeom prst="rect">
             <a:avLst/>
@@ -14103,7 +15389,7 @@
                 <a:ea typeface="Aptos" pitchFamily="34" charset="-122"/>
                 <a:cs typeface="Aptos" pitchFamily="34" charset="-120"/>
               </a:rPr>
-              <a:t>Key idea</a:t>
+              <a:t>Risk check</a:t>
             </a:r>
             <a:endParaRPr lang="en-US" sz="1300" dirty="0"/>
           </a:p>
@@ -14117,8 +15403,8 @@
         </p:nvSpPr>
         <p:spPr>
           <a:xfrm>
-            <a:off x="8074152" y="1920240"/>
-            <a:ext cx="2825496" cy="1188720"/>
+            <a:off x="7799832" y="1828800"/>
+            <a:ext cx="3145536" cy="685800"/>
           </a:xfrm>
           <a:prstGeom prst="rect">
             <a:avLst/>
@@ -14158,12 +15444,165 @@
         </p:nvSpPr>
         <p:spPr>
           <a:xfrm>
-            <a:off x="7909560" y="3520440"/>
-            <a:ext cx="3154680" cy="1737360"/>
+            <a:off x="7635240" y="2788920"/>
+            <a:ext cx="3474720" cy="1536192"/>
           </a:xfrm>
           <a:prstGeom prst="roundRect">
             <a:avLst>
-              <a:gd name="adj" fmla="val 6316"/>
+              <a:gd name="adj" fmla="val 7143"/>
+            </a:avLst>
+          </a:prstGeom>
+          <a:solidFill>
+            <a:srgbClr val="FFFFFF">
+              <a:alpha val="88000"/>
+            </a:srgbClr>
+          </a:solidFill>
+          <a:ln w="12700">
+            <a:solidFill>
+              <a:srgbClr val="D6E8F2"/>
+            </a:solidFill>
+            <a:prstDash val="solid"/>
+          </a:ln>
+        </p:spPr>
+      </p:sp>
+      <p:sp>
+        <p:nvSpPr>
+          <p:cNvPr id="14" name="Shape 12"/>
+          <p:cNvSpPr/>
+          <p:nvPr/>
+        </p:nvSpPr>
+        <p:spPr>
+          <a:xfrm>
+            <a:off x="8046720" y="3108960"/>
+            <a:ext cx="2651760" cy="896112"/>
+          </a:xfrm>
+          <a:prstGeom prst="arc">
+            <a:avLst/>
+          </a:prstGeom>
+          <a:noFill/>
+          <a:ln w="25400">
+            <a:solidFill>
+              <a:srgbClr val="0068B7"/>
+            </a:solidFill>
+            <a:prstDash val="solid"/>
+          </a:ln>
+        </p:spPr>
+      </p:sp>
+      <p:sp>
+        <p:nvSpPr>
+          <p:cNvPr id="15" name="Text 13"/>
+          <p:cNvSpPr/>
+          <p:nvPr/>
+        </p:nvSpPr>
+        <p:spPr>
+          <a:xfrm>
+            <a:off x="7909560" y="3099816"/>
+            <a:ext cx="2926080" cy="256032"/>
+          </a:xfrm>
+          <a:prstGeom prst="rect">
+            <a:avLst/>
+          </a:prstGeom>
+          <a:noFill/>
+          <a:ln/>
+        </p:spPr>
+        <p:txBody>
+          <a:bodyPr wrap="square" lIns="0" tIns="0" rIns="0" bIns="0" rtlCol="0" anchor="ctr"/>
+          <a:lstStyle/>
+          <a:p>
+            <a:pPr algn="ctr" indent="0" marL="0">
+              <a:buNone/>
+            </a:pPr>
+            <a:r>
+              <a:rPr lang="en-US" sz="1500" b="1" dirty="0">
+                <a:solidFill>
+                  <a:srgbClr val="003A63"/>
+                </a:solidFill>
+                <a:latin typeface="Aptos" pitchFamily="34" charset="0"/>
+                <a:ea typeface="Aptos" pitchFamily="34" charset="-122"/>
+                <a:cs typeface="Aptos" pitchFamily="34" charset="-120"/>
+              </a:rPr>
+              <a:t>Risk</a:t>
+            </a:r>
+            <a:endParaRPr lang="en-US" sz="1500" dirty="0"/>
+          </a:p>
+        </p:txBody>
+      </p:sp>
+      <p:sp>
+        <p:nvSpPr>
+          <p:cNvPr id="16" name="Shape 14"/>
+          <p:cNvSpPr/>
+          <p:nvPr/>
+        </p:nvSpPr>
+        <p:spPr>
+          <a:xfrm>
+            <a:off x="8366760" y="3639312"/>
+            <a:ext cx="2011680" cy="0"/>
+          </a:xfrm>
+          <a:prstGeom prst="line">
+            <a:avLst/>
+          </a:prstGeom>
+          <a:noFill/>
+          <a:ln w="63500">
+            <a:solidFill>
+              <a:srgbClr val="2F8A28"/>
+            </a:solidFill>
+            <a:prstDash val="solid"/>
+          </a:ln>
+        </p:spPr>
+      </p:sp>
+      <p:sp>
+        <p:nvSpPr>
+          <p:cNvPr id="17" name="Text 15"/>
+          <p:cNvSpPr/>
+          <p:nvPr/>
+        </p:nvSpPr>
+        <p:spPr>
+          <a:xfrm>
+            <a:off x="7909560" y="3849624"/>
+            <a:ext cx="2926080" cy="164592"/>
+          </a:xfrm>
+          <a:prstGeom prst="rect">
+            <a:avLst/>
+          </a:prstGeom>
+          <a:noFill/>
+          <a:ln/>
+        </p:spPr>
+        <p:txBody>
+          <a:bodyPr wrap="square" lIns="0" tIns="0" rIns="0" bIns="0" rtlCol="0" anchor="ctr"/>
+          <a:lstStyle/>
+          <a:p>
+            <a:pPr algn="ctr" indent="0" marL="0">
+              <a:buNone/>
+            </a:pPr>
+            <a:r>
+              <a:rPr lang="en-US" sz="900" dirty="0">
+                <a:solidFill>
+                  <a:srgbClr val="003A63"/>
+                </a:solidFill>
+                <a:latin typeface="Aptos" pitchFamily="34" charset="0"/>
+                <a:ea typeface="Aptos" pitchFamily="34" charset="-122"/>
+                <a:cs typeface="Aptos" pitchFamily="34" charset="-120"/>
+              </a:rPr>
+              <a:t>Human review</a:t>
+            </a:r>
+            <a:endParaRPr lang="en-US" sz="900" dirty="0"/>
+          </a:p>
+        </p:txBody>
+      </p:sp>
+      <p:sp>
+        <p:nvSpPr>
+          <p:cNvPr id="18" name="Shape 16"/>
+          <p:cNvSpPr/>
+          <p:nvPr/>
+        </p:nvSpPr>
+        <p:spPr>
+          <a:xfrm>
+            <a:off x="7635240" y="4498848"/>
+            <a:ext cx="3474720" cy="1143000"/>
+          </a:xfrm>
+          <a:prstGeom prst="roundRect">
+            <a:avLst>
+              <a:gd name="adj" fmla="val 9600"/>
             </a:avLst>
           </a:prstGeom>
           <a:solidFill>
@@ -14179,14 +15618,14 @@
       </p:sp>
       <p:sp>
         <p:nvSpPr>
-          <p:cNvPr id="14" name="Text 12"/>
-          <p:cNvSpPr/>
-          <p:nvPr/>
-        </p:nvSpPr>
-        <p:spPr>
-          <a:xfrm>
-            <a:off x="8074152" y="3666744"/>
-            <a:ext cx="2825496" cy="256032"/>
+          <p:cNvPr id="19" name="Text 17"/>
+          <p:cNvSpPr/>
+          <p:nvPr/>
+        </p:nvSpPr>
+        <p:spPr>
+          <a:xfrm>
+            <a:off x="7799832" y="4645152"/>
+            <a:ext cx="3145536" cy="256032"/>
           </a:xfrm>
           <a:prstGeom prst="rect">
             <a:avLst/>
@@ -14210,7 +15649,7 @@
                 <a:ea typeface="Aptos" pitchFamily="34" charset="-122"/>
                 <a:cs typeface="Aptos" pitchFamily="34" charset="-120"/>
               </a:rPr>
-              <a:t>Use this for</a:t>
+              <a:t>Safeguard to plan</a:t>
             </a:r>
             <a:endParaRPr lang="en-US" sz="1300" dirty="0"/>
           </a:p>
@@ -14218,14 +15657,14 @@
       </p:sp>
       <p:sp>
         <p:nvSpPr>
-          <p:cNvPr id="15" name="Text 13"/>
-          <p:cNvSpPr/>
-          <p:nvPr/>
-        </p:nvSpPr>
-        <p:spPr>
-          <a:xfrm>
-            <a:off x="8074152" y="4023360"/>
-            <a:ext cx="2825496" cy="1097280"/>
+          <p:cNvPr id="20" name="Text 18"/>
+          <p:cNvSpPr/>
+          <p:nvPr/>
+        </p:nvSpPr>
+        <p:spPr>
+          <a:xfrm>
+            <a:off x="7799832" y="5001768"/>
+            <a:ext cx="3145536" cy="502920"/>
           </a:xfrm>
           <a:prstGeom prst="rect">
             <a:avLst/>
@@ -14251,7 +15690,7 @@
                 <a:ea typeface="Aptos" pitchFamily="34" charset="-122"/>
                 <a:cs typeface="Aptos" pitchFamily="34" charset="-120"/>
               </a:rPr>
-              <a:t>Connect the concept to public health decisions, safeguards, documentation, or implementation work.</a:t>
+              <a:t>Use the assignment to test whether you can explain the concept, apply it to a realistic public health situation, and identify what would need review before the work moves forward.</a:t>
             </a:r>
             <a:endParaRPr lang="en-US" sz="1550" dirty="0"/>
           </a:p>
@@ -14425,8 +15864,8 @@
         </p:nvSpPr>
         <p:spPr>
           <a:xfrm>
-            <a:off x="9966960" y="6537960"/>
-            <a:ext cx="1645920" cy="201168"/>
+            <a:off x="9646920" y="6537960"/>
+            <a:ext cx="1965960" cy="201168"/>
           </a:xfrm>
           <a:prstGeom prst="rect">
             <a:avLst/>
@@ -14450,7 +15889,7 @@
                 <a:ea typeface="Aptos" pitchFamily="34" charset="-122"/>
                 <a:cs typeface="Aptos" pitchFamily="34" charset="-120"/>
               </a:rPr>
-              <a:t>Â© Paula Soper</a:t>
+              <a:t>Copyright Paula Soper</a:t>
             </a:r>
             <a:endParaRPr lang="en-US" sz="800" dirty="0"/>
           </a:p>
@@ -14497,77 +15936,13 @@
       </p:sp>
       <p:sp>
         <p:nvSpPr>
-          <p:cNvPr id="8" name="Shape 6"/>
+          <p:cNvPr id="8" name="Text 6"/>
           <p:cNvSpPr/>
           <p:nvPr/>
         </p:nvSpPr>
         <p:spPr>
           <a:xfrm>
             <a:off x="640080" y="658368"/>
-            <a:ext cx="420624" cy="420624"/>
-          </a:xfrm>
-          <a:prstGeom prst="ellipse">
-            <a:avLst/>
-          </a:prstGeom>
-          <a:solidFill>
-            <a:srgbClr val="0068B7"/>
-          </a:solidFill>
-          <a:ln w="12700">
-            <a:solidFill>
-              <a:srgbClr val="0068B7"/>
-            </a:solidFill>
-            <a:prstDash val="solid"/>
-          </a:ln>
-        </p:spPr>
-      </p:sp>
-      <p:sp>
-        <p:nvSpPr>
-          <p:cNvPr id="9" name="Text 7"/>
-          <p:cNvSpPr/>
-          <p:nvPr/>
-        </p:nvSpPr>
-        <p:spPr>
-          <a:xfrm>
-            <a:off x="640080" y="731520"/>
-            <a:ext cx="420624" cy="164592"/>
-          </a:xfrm>
-          <a:prstGeom prst="rect">
-            <a:avLst/>
-          </a:prstGeom>
-          <a:noFill/>
-          <a:ln/>
-        </p:spPr>
-        <p:txBody>
-          <a:bodyPr wrap="square" lIns="0" tIns="0" rIns="0" bIns="0" rtlCol="0" anchor="ctr"/>
-          <a:lstStyle/>
-          <a:p>
-            <a:pPr algn="ctr" indent="0" marL="0">
-              <a:buNone/>
-            </a:pPr>
-            <a:r>
-              <a:rPr lang="en-US" sz="1100" b="1" dirty="0">
-                <a:solidFill>
-                  <a:srgbClr val="FFFFFF"/>
-                </a:solidFill>
-                <a:latin typeface="Aptos" pitchFamily="34" charset="0"/>
-                <a:ea typeface="Aptos" pitchFamily="34" charset="-122"/>
-                <a:cs typeface="Aptos" pitchFamily="34" charset="-120"/>
-              </a:rPr>
-              <a:t>2</a:t>
-            </a:r>
-            <a:endParaRPr lang="en-US" sz="1100" dirty="0"/>
-          </a:p>
-        </p:txBody>
-      </p:sp>
-      <p:sp>
-        <p:nvSpPr>
-          <p:cNvPr id="10" name="Text 8"/>
-          <p:cNvSpPr/>
-          <p:nvPr/>
-        </p:nvSpPr>
-        <p:spPr>
-          <a:xfrm>
-            <a:off x="640080" y="621792"/>
             <a:ext cx="10881360" cy="713232"/>
           </a:xfrm>
           <a:prstGeom prst="rect">
@@ -14602,14 +15977,14 @@
       </p:sp>
       <p:sp>
         <p:nvSpPr>
-          <p:cNvPr id="11" name="Text 9"/>
+          <p:cNvPr id="9" name="Text 7"/>
           <p:cNvSpPr/>
           <p:nvPr/>
         </p:nvSpPr>
         <p:spPr>
           <a:xfrm>
             <a:off x="868680" y="1508760"/>
-            <a:ext cx="6537960" cy="4160520"/>
+            <a:ext cx="6309360" cy="4160520"/>
           </a:xfrm>
           <a:prstGeom prst="rect">
             <a:avLst/>
@@ -14668,18 +16043,18 @@
       </p:sp>
       <p:sp>
         <p:nvSpPr>
-          <p:cNvPr id="12" name="Shape 10"/>
-          <p:cNvSpPr/>
-          <p:nvPr/>
-        </p:nvSpPr>
-        <p:spPr>
-          <a:xfrm>
-            <a:off x="7909560" y="1417320"/>
-            <a:ext cx="3154680" cy="1828800"/>
+          <p:cNvPr id="10" name="Shape 8"/>
+          <p:cNvSpPr/>
+          <p:nvPr/>
+        </p:nvSpPr>
+        <p:spPr>
+          <a:xfrm>
+            <a:off x="7635240" y="1325880"/>
+            <a:ext cx="3474720" cy="1325880"/>
           </a:xfrm>
           <a:prstGeom prst="roundRect">
             <a:avLst>
-              <a:gd name="adj" fmla="val 6000"/>
+              <a:gd name="adj" fmla="val 8276"/>
             </a:avLst>
           </a:prstGeom>
           <a:solidFill>
@@ -14695,14 +16070,14 @@
       </p:sp>
       <p:sp>
         <p:nvSpPr>
-          <p:cNvPr id="13" name="Text 11"/>
-          <p:cNvSpPr/>
-          <p:nvPr/>
-        </p:nvSpPr>
-        <p:spPr>
-          <a:xfrm>
-            <a:off x="8074152" y="1563624"/>
-            <a:ext cx="2825496" cy="256032"/>
+          <p:cNvPr id="11" name="Text 9"/>
+          <p:cNvSpPr/>
+          <p:nvPr/>
+        </p:nvSpPr>
+        <p:spPr>
+          <a:xfrm>
+            <a:off x="7799832" y="1472184"/>
+            <a:ext cx="3145536" cy="256032"/>
           </a:xfrm>
           <a:prstGeom prst="rect">
             <a:avLst/>
@@ -14726,7 +16101,7 @@
                 <a:ea typeface="Aptos" pitchFamily="34" charset="-122"/>
                 <a:cs typeface="Aptos" pitchFamily="34" charset="-120"/>
               </a:rPr>
-              <a:t>Key idea</a:t>
+              <a:t>Risk check</a:t>
             </a:r>
             <a:endParaRPr lang="en-US" sz="1300" dirty="0"/>
           </a:p>
@@ -14734,14 +16109,14 @@
       </p:sp>
       <p:sp>
         <p:nvSpPr>
-          <p:cNvPr id="14" name="Text 12"/>
-          <p:cNvSpPr/>
-          <p:nvPr/>
-        </p:nvSpPr>
-        <p:spPr>
-          <a:xfrm>
-            <a:off x="8074152" y="1920240"/>
-            <a:ext cx="2825496" cy="1188720"/>
+          <p:cNvPr id="12" name="Text 10"/>
+          <p:cNvSpPr/>
+          <p:nvPr/>
+        </p:nvSpPr>
+        <p:spPr>
+          <a:xfrm>
+            <a:off x="7799832" y="1828800"/>
+            <a:ext cx="3145536" cy="685800"/>
           </a:xfrm>
           <a:prstGeom prst="rect">
             <a:avLst/>
@@ -14775,18 +16150,171 @@
       </p:sp>
       <p:sp>
         <p:nvSpPr>
-          <p:cNvPr id="15" name="Shape 13"/>
-          <p:cNvSpPr/>
-          <p:nvPr/>
-        </p:nvSpPr>
-        <p:spPr>
-          <a:xfrm>
-            <a:off x="7909560" y="3520440"/>
-            <a:ext cx="3154680" cy="1737360"/>
+          <p:cNvPr id="13" name="Shape 11"/>
+          <p:cNvSpPr/>
+          <p:nvPr/>
+        </p:nvSpPr>
+        <p:spPr>
+          <a:xfrm>
+            <a:off x="7635240" y="2788920"/>
+            <a:ext cx="3474720" cy="1536192"/>
           </a:xfrm>
           <a:prstGeom prst="roundRect">
             <a:avLst>
-              <a:gd name="adj" fmla="val 6316"/>
+              <a:gd name="adj" fmla="val 7143"/>
+            </a:avLst>
+          </a:prstGeom>
+          <a:solidFill>
+            <a:srgbClr val="FFFFFF">
+              <a:alpha val="88000"/>
+            </a:srgbClr>
+          </a:solidFill>
+          <a:ln w="12700">
+            <a:solidFill>
+              <a:srgbClr val="D6E8F2"/>
+            </a:solidFill>
+            <a:prstDash val="solid"/>
+          </a:ln>
+        </p:spPr>
+      </p:sp>
+      <p:sp>
+        <p:nvSpPr>
+          <p:cNvPr id="14" name="Shape 12"/>
+          <p:cNvSpPr/>
+          <p:nvPr/>
+        </p:nvSpPr>
+        <p:spPr>
+          <a:xfrm>
+            <a:off x="8046720" y="3108960"/>
+            <a:ext cx="2651760" cy="896112"/>
+          </a:xfrm>
+          <a:prstGeom prst="arc">
+            <a:avLst/>
+          </a:prstGeom>
+          <a:noFill/>
+          <a:ln w="25400">
+            <a:solidFill>
+              <a:srgbClr val="0068B7"/>
+            </a:solidFill>
+            <a:prstDash val="solid"/>
+          </a:ln>
+        </p:spPr>
+      </p:sp>
+      <p:sp>
+        <p:nvSpPr>
+          <p:cNvPr id="15" name="Text 13"/>
+          <p:cNvSpPr/>
+          <p:nvPr/>
+        </p:nvSpPr>
+        <p:spPr>
+          <a:xfrm>
+            <a:off x="7909560" y="3099816"/>
+            <a:ext cx="2926080" cy="256032"/>
+          </a:xfrm>
+          <a:prstGeom prst="rect">
+            <a:avLst/>
+          </a:prstGeom>
+          <a:noFill/>
+          <a:ln/>
+        </p:spPr>
+        <p:txBody>
+          <a:bodyPr wrap="square" lIns="0" tIns="0" rIns="0" bIns="0" rtlCol="0" anchor="ctr"/>
+          <a:lstStyle/>
+          <a:p>
+            <a:pPr algn="ctr" indent="0" marL="0">
+              <a:buNone/>
+            </a:pPr>
+            <a:r>
+              <a:rPr lang="en-US" sz="1500" b="1" dirty="0">
+                <a:solidFill>
+                  <a:srgbClr val="003A63"/>
+                </a:solidFill>
+                <a:latin typeface="Aptos" pitchFamily="34" charset="0"/>
+                <a:ea typeface="Aptos" pitchFamily="34" charset="-122"/>
+                <a:cs typeface="Aptos" pitchFamily="34" charset="-120"/>
+              </a:rPr>
+              <a:t>Risk</a:t>
+            </a:r>
+            <a:endParaRPr lang="en-US" sz="1500" dirty="0"/>
+          </a:p>
+        </p:txBody>
+      </p:sp>
+      <p:sp>
+        <p:nvSpPr>
+          <p:cNvPr id="16" name="Shape 14"/>
+          <p:cNvSpPr/>
+          <p:nvPr/>
+        </p:nvSpPr>
+        <p:spPr>
+          <a:xfrm>
+            <a:off x="8366760" y="3639312"/>
+            <a:ext cx="2011680" cy="0"/>
+          </a:xfrm>
+          <a:prstGeom prst="line">
+            <a:avLst/>
+          </a:prstGeom>
+          <a:noFill/>
+          <a:ln w="63500">
+            <a:solidFill>
+              <a:srgbClr val="2F8A28"/>
+            </a:solidFill>
+            <a:prstDash val="solid"/>
+          </a:ln>
+        </p:spPr>
+      </p:sp>
+      <p:sp>
+        <p:nvSpPr>
+          <p:cNvPr id="17" name="Text 15"/>
+          <p:cNvSpPr/>
+          <p:nvPr/>
+        </p:nvSpPr>
+        <p:spPr>
+          <a:xfrm>
+            <a:off x="7909560" y="3849624"/>
+            <a:ext cx="2926080" cy="164592"/>
+          </a:xfrm>
+          <a:prstGeom prst="rect">
+            <a:avLst/>
+          </a:prstGeom>
+          <a:noFill/>
+          <a:ln/>
+        </p:spPr>
+        <p:txBody>
+          <a:bodyPr wrap="square" lIns="0" tIns="0" rIns="0" bIns="0" rtlCol="0" anchor="ctr"/>
+          <a:lstStyle/>
+          <a:p>
+            <a:pPr algn="ctr" indent="0" marL="0">
+              <a:buNone/>
+            </a:pPr>
+            <a:r>
+              <a:rPr lang="en-US" sz="900" dirty="0">
+                <a:solidFill>
+                  <a:srgbClr val="003A63"/>
+                </a:solidFill>
+                <a:latin typeface="Aptos" pitchFamily="34" charset="0"/>
+                <a:ea typeface="Aptos" pitchFamily="34" charset="-122"/>
+                <a:cs typeface="Aptos" pitchFamily="34" charset="-120"/>
+              </a:rPr>
+              <a:t>Human review</a:t>
+            </a:r>
+            <a:endParaRPr lang="en-US" sz="900" dirty="0"/>
+          </a:p>
+        </p:txBody>
+      </p:sp>
+      <p:sp>
+        <p:nvSpPr>
+          <p:cNvPr id="18" name="Shape 16"/>
+          <p:cNvSpPr/>
+          <p:nvPr/>
+        </p:nvSpPr>
+        <p:spPr>
+          <a:xfrm>
+            <a:off x="7635240" y="4498848"/>
+            <a:ext cx="3474720" cy="1143000"/>
+          </a:xfrm>
+          <a:prstGeom prst="roundRect">
+            <a:avLst>
+              <a:gd name="adj" fmla="val 9600"/>
             </a:avLst>
           </a:prstGeom>
           <a:solidFill>
@@ -14802,14 +16330,14 @@
       </p:sp>
       <p:sp>
         <p:nvSpPr>
-          <p:cNvPr id="16" name="Text 14"/>
-          <p:cNvSpPr/>
-          <p:nvPr/>
-        </p:nvSpPr>
-        <p:spPr>
-          <a:xfrm>
-            <a:off x="8074152" y="3666744"/>
-            <a:ext cx="2825496" cy="256032"/>
+          <p:cNvPr id="19" name="Text 17"/>
+          <p:cNvSpPr/>
+          <p:nvPr/>
+        </p:nvSpPr>
+        <p:spPr>
+          <a:xfrm>
+            <a:off x="7799832" y="4645152"/>
+            <a:ext cx="3145536" cy="256032"/>
           </a:xfrm>
           <a:prstGeom prst="rect">
             <a:avLst/>
@@ -14833,7 +16361,7 @@
                 <a:ea typeface="Aptos" pitchFamily="34" charset="-122"/>
                 <a:cs typeface="Aptos" pitchFamily="34" charset="-120"/>
               </a:rPr>
-              <a:t>Use this for</a:t>
+              <a:t>Safeguard to plan</a:t>
             </a:r>
             <a:endParaRPr lang="en-US" sz="1300" dirty="0"/>
           </a:p>
@@ -14841,14 +16369,14 @@
       </p:sp>
       <p:sp>
         <p:nvSpPr>
-          <p:cNvPr id="17" name="Text 15"/>
-          <p:cNvSpPr/>
-          <p:nvPr/>
-        </p:nvSpPr>
-        <p:spPr>
-          <a:xfrm>
-            <a:off x="8074152" y="4023360"/>
-            <a:ext cx="2825496" cy="1097280"/>
+          <p:cNvPr id="20" name="Text 18"/>
+          <p:cNvSpPr/>
+          <p:nvPr/>
+        </p:nvSpPr>
+        <p:spPr>
+          <a:xfrm>
+            <a:off x="7799832" y="5001768"/>
+            <a:ext cx="3145536" cy="502920"/>
           </a:xfrm>
           <a:prstGeom prst="rect">
             <a:avLst/>
@@ -14874,7 +16402,7 @@
                 <a:ea typeface="Aptos" pitchFamily="34" charset="-122"/>
                 <a:cs typeface="Aptos" pitchFamily="34" charset="-120"/>
               </a:rPr>
-              <a:t>Connect the concept to public health decisions, safeguards, documentation, or implementation work.</a:t>
+              <a:t>Identify what could go wrong, who could be affected, what safeguards are needed, and what evidence should be reviewed before use expands.</a:t>
             </a:r>
             <a:endParaRPr lang="en-US" sz="1550" dirty="0"/>
           </a:p>
@@ -15048,8 +16576,8 @@
         </p:nvSpPr>
         <p:spPr>
           <a:xfrm>
-            <a:off x="9966960" y="6537960"/>
-            <a:ext cx="1645920" cy="201168"/>
+            <a:off x="9646920" y="6537960"/>
+            <a:ext cx="1965960" cy="201168"/>
           </a:xfrm>
           <a:prstGeom prst="rect">
             <a:avLst/>
@@ -15073,7 +16601,7 @@
                 <a:ea typeface="Aptos" pitchFamily="34" charset="-122"/>
                 <a:cs typeface="Aptos" pitchFamily="34" charset="-120"/>
               </a:rPr>
-              <a:t>Â© Paula Soper</a:t>
+              <a:t>Copyright Paula Soper</a:t>
             </a:r>
             <a:endParaRPr lang="en-US" sz="800" dirty="0"/>
           </a:p>
@@ -15120,77 +16648,13 @@
       </p:sp>
       <p:sp>
         <p:nvSpPr>
-          <p:cNvPr id="8" name="Shape 6"/>
+          <p:cNvPr id="8" name="Text 6"/>
           <p:cNvSpPr/>
           <p:nvPr/>
         </p:nvSpPr>
         <p:spPr>
           <a:xfrm>
             <a:off x="640080" y="658368"/>
-            <a:ext cx="420624" cy="420624"/>
-          </a:xfrm>
-          <a:prstGeom prst="ellipse">
-            <a:avLst/>
-          </a:prstGeom>
-          <a:solidFill>
-            <a:srgbClr val="0068B7"/>
-          </a:solidFill>
-          <a:ln w="12700">
-            <a:solidFill>
-              <a:srgbClr val="0068B7"/>
-            </a:solidFill>
-            <a:prstDash val="solid"/>
-          </a:ln>
-        </p:spPr>
-      </p:sp>
-      <p:sp>
-        <p:nvSpPr>
-          <p:cNvPr id="9" name="Text 7"/>
-          <p:cNvSpPr/>
-          <p:nvPr/>
-        </p:nvSpPr>
-        <p:spPr>
-          <a:xfrm>
-            <a:off x="640080" y="731520"/>
-            <a:ext cx="420624" cy="164592"/>
-          </a:xfrm>
-          <a:prstGeom prst="rect">
-            <a:avLst/>
-          </a:prstGeom>
-          <a:noFill/>
-          <a:ln/>
-        </p:spPr>
-        <p:txBody>
-          <a:bodyPr wrap="square" lIns="0" tIns="0" rIns="0" bIns="0" rtlCol="0" anchor="ctr"/>
-          <a:lstStyle/>
-          <a:p>
-            <a:pPr algn="ctr" indent="0" marL="0">
-              <a:buNone/>
-            </a:pPr>
-            <a:r>
-              <a:rPr lang="en-US" sz="1100" b="1" dirty="0">
-                <a:solidFill>
-                  <a:srgbClr val="FFFFFF"/>
-                </a:solidFill>
-                <a:latin typeface="Aptos" pitchFamily="34" charset="0"/>
-                <a:ea typeface="Aptos" pitchFamily="34" charset="-122"/>
-                <a:cs typeface="Aptos" pitchFamily="34" charset="-120"/>
-              </a:rPr>
-              <a:t>3</a:t>
-            </a:r>
-            <a:endParaRPr lang="en-US" sz="1100" dirty="0"/>
-          </a:p>
-        </p:txBody>
-      </p:sp>
-      <p:sp>
-        <p:nvSpPr>
-          <p:cNvPr id="10" name="Text 8"/>
-          <p:cNvSpPr/>
-          <p:nvPr/>
-        </p:nvSpPr>
-        <p:spPr>
-          <a:xfrm>
-            <a:off x="640080" y="621792"/>
             <a:ext cx="10881360" cy="713232"/>
           </a:xfrm>
           <a:prstGeom prst="rect">
@@ -15225,14 +16689,14 @@
       </p:sp>
       <p:sp>
         <p:nvSpPr>
-          <p:cNvPr id="11" name="Text 9"/>
+          <p:cNvPr id="9" name="Text 7"/>
           <p:cNvSpPr/>
           <p:nvPr/>
         </p:nvSpPr>
         <p:spPr>
           <a:xfrm>
             <a:off x="868680" y="1508760"/>
-            <a:ext cx="6537960" cy="4160520"/>
+            <a:ext cx="6309360" cy="4160520"/>
           </a:xfrm>
           <a:prstGeom prst="rect">
             <a:avLst/>
@@ -15291,18 +16755,18 @@
       </p:sp>
       <p:sp>
         <p:nvSpPr>
-          <p:cNvPr id="12" name="Shape 10"/>
-          <p:cNvSpPr/>
-          <p:nvPr/>
-        </p:nvSpPr>
-        <p:spPr>
-          <a:xfrm>
-            <a:off x="7909560" y="1417320"/>
-            <a:ext cx="3154680" cy="1828800"/>
+          <p:cNvPr id="10" name="Shape 8"/>
+          <p:cNvSpPr/>
+          <p:nvPr/>
+        </p:nvSpPr>
+        <p:spPr>
+          <a:xfrm>
+            <a:off x="7635240" y="1325880"/>
+            <a:ext cx="3474720" cy="1325880"/>
           </a:xfrm>
           <a:prstGeom prst="roundRect">
             <a:avLst>
-              <a:gd name="adj" fmla="val 6000"/>
+              <a:gd name="adj" fmla="val 8276"/>
             </a:avLst>
           </a:prstGeom>
           <a:solidFill>
@@ -15318,14 +16782,14 @@
       </p:sp>
       <p:sp>
         <p:nvSpPr>
-          <p:cNvPr id="13" name="Text 11"/>
-          <p:cNvSpPr/>
-          <p:nvPr/>
-        </p:nvSpPr>
-        <p:spPr>
-          <a:xfrm>
-            <a:off x="8074152" y="1563624"/>
-            <a:ext cx="2825496" cy="256032"/>
+          <p:cNvPr id="11" name="Text 9"/>
+          <p:cNvSpPr/>
+          <p:nvPr/>
+        </p:nvSpPr>
+        <p:spPr>
+          <a:xfrm>
+            <a:off x="7799832" y="1472184"/>
+            <a:ext cx="3145536" cy="256032"/>
           </a:xfrm>
           <a:prstGeom prst="rect">
             <a:avLst/>
@@ -15349,7 +16813,7 @@
                 <a:ea typeface="Aptos" pitchFamily="34" charset="-122"/>
                 <a:cs typeface="Aptos" pitchFamily="34" charset="-120"/>
               </a:rPr>
-              <a:t>Key idea</a:t>
+              <a:t>Risk check</a:t>
             </a:r>
             <a:endParaRPr lang="en-US" sz="1300" dirty="0"/>
           </a:p>
@@ -15357,14 +16821,14 @@
       </p:sp>
       <p:sp>
         <p:nvSpPr>
-          <p:cNvPr id="14" name="Text 12"/>
-          <p:cNvSpPr/>
-          <p:nvPr/>
-        </p:nvSpPr>
-        <p:spPr>
-          <a:xfrm>
-            <a:off x="8074152" y="1920240"/>
-            <a:ext cx="2825496" cy="1188720"/>
+          <p:cNvPr id="12" name="Text 10"/>
+          <p:cNvSpPr/>
+          <p:nvPr/>
+        </p:nvSpPr>
+        <p:spPr>
+          <a:xfrm>
+            <a:off x="7799832" y="1828800"/>
+            <a:ext cx="3145536" cy="685800"/>
           </a:xfrm>
           <a:prstGeom prst="rect">
             <a:avLst/>
@@ -15398,18 +16862,171 @@
       </p:sp>
       <p:sp>
         <p:nvSpPr>
-          <p:cNvPr id="15" name="Shape 13"/>
-          <p:cNvSpPr/>
-          <p:nvPr/>
-        </p:nvSpPr>
-        <p:spPr>
-          <a:xfrm>
-            <a:off x="7909560" y="3520440"/>
-            <a:ext cx="3154680" cy="1737360"/>
+          <p:cNvPr id="13" name="Shape 11"/>
+          <p:cNvSpPr/>
+          <p:nvPr/>
+        </p:nvSpPr>
+        <p:spPr>
+          <a:xfrm>
+            <a:off x="7635240" y="2788920"/>
+            <a:ext cx="3474720" cy="1536192"/>
           </a:xfrm>
           <a:prstGeom prst="roundRect">
             <a:avLst>
-              <a:gd name="adj" fmla="val 6316"/>
+              <a:gd name="adj" fmla="val 7143"/>
+            </a:avLst>
+          </a:prstGeom>
+          <a:solidFill>
+            <a:srgbClr val="FFFFFF">
+              <a:alpha val="88000"/>
+            </a:srgbClr>
+          </a:solidFill>
+          <a:ln w="12700">
+            <a:solidFill>
+              <a:srgbClr val="D6E8F2"/>
+            </a:solidFill>
+            <a:prstDash val="solid"/>
+          </a:ln>
+        </p:spPr>
+      </p:sp>
+      <p:sp>
+        <p:nvSpPr>
+          <p:cNvPr id="14" name="Shape 12"/>
+          <p:cNvSpPr/>
+          <p:nvPr/>
+        </p:nvSpPr>
+        <p:spPr>
+          <a:xfrm>
+            <a:off x="8046720" y="3108960"/>
+            <a:ext cx="2651760" cy="896112"/>
+          </a:xfrm>
+          <a:prstGeom prst="arc">
+            <a:avLst/>
+          </a:prstGeom>
+          <a:noFill/>
+          <a:ln w="25400">
+            <a:solidFill>
+              <a:srgbClr val="0068B7"/>
+            </a:solidFill>
+            <a:prstDash val="solid"/>
+          </a:ln>
+        </p:spPr>
+      </p:sp>
+      <p:sp>
+        <p:nvSpPr>
+          <p:cNvPr id="15" name="Text 13"/>
+          <p:cNvSpPr/>
+          <p:nvPr/>
+        </p:nvSpPr>
+        <p:spPr>
+          <a:xfrm>
+            <a:off x="7909560" y="3099816"/>
+            <a:ext cx="2926080" cy="256032"/>
+          </a:xfrm>
+          <a:prstGeom prst="rect">
+            <a:avLst/>
+          </a:prstGeom>
+          <a:noFill/>
+          <a:ln/>
+        </p:spPr>
+        <p:txBody>
+          <a:bodyPr wrap="square" lIns="0" tIns="0" rIns="0" bIns="0" rtlCol="0" anchor="ctr"/>
+          <a:lstStyle/>
+          <a:p>
+            <a:pPr algn="ctr" indent="0" marL="0">
+              <a:buNone/>
+            </a:pPr>
+            <a:r>
+              <a:rPr lang="en-US" sz="1500" b="1" dirty="0">
+                <a:solidFill>
+                  <a:srgbClr val="003A63"/>
+                </a:solidFill>
+                <a:latin typeface="Aptos" pitchFamily="34" charset="0"/>
+                <a:ea typeface="Aptos" pitchFamily="34" charset="-122"/>
+                <a:cs typeface="Aptos" pitchFamily="34" charset="-120"/>
+              </a:rPr>
+              <a:t>Risk</a:t>
+            </a:r>
+            <a:endParaRPr lang="en-US" sz="1500" dirty="0"/>
+          </a:p>
+        </p:txBody>
+      </p:sp>
+      <p:sp>
+        <p:nvSpPr>
+          <p:cNvPr id="16" name="Shape 14"/>
+          <p:cNvSpPr/>
+          <p:nvPr/>
+        </p:nvSpPr>
+        <p:spPr>
+          <a:xfrm>
+            <a:off x="8366760" y="3639312"/>
+            <a:ext cx="2011680" cy="0"/>
+          </a:xfrm>
+          <a:prstGeom prst="line">
+            <a:avLst/>
+          </a:prstGeom>
+          <a:noFill/>
+          <a:ln w="63500">
+            <a:solidFill>
+              <a:srgbClr val="2F8A28"/>
+            </a:solidFill>
+            <a:prstDash val="solid"/>
+          </a:ln>
+        </p:spPr>
+      </p:sp>
+      <p:sp>
+        <p:nvSpPr>
+          <p:cNvPr id="17" name="Text 15"/>
+          <p:cNvSpPr/>
+          <p:nvPr/>
+        </p:nvSpPr>
+        <p:spPr>
+          <a:xfrm>
+            <a:off x="7909560" y="3849624"/>
+            <a:ext cx="2926080" cy="164592"/>
+          </a:xfrm>
+          <a:prstGeom prst="rect">
+            <a:avLst/>
+          </a:prstGeom>
+          <a:noFill/>
+          <a:ln/>
+        </p:spPr>
+        <p:txBody>
+          <a:bodyPr wrap="square" lIns="0" tIns="0" rIns="0" bIns="0" rtlCol="0" anchor="ctr"/>
+          <a:lstStyle/>
+          <a:p>
+            <a:pPr algn="ctr" indent="0" marL="0">
+              <a:buNone/>
+            </a:pPr>
+            <a:r>
+              <a:rPr lang="en-US" sz="900" dirty="0">
+                <a:solidFill>
+                  <a:srgbClr val="003A63"/>
+                </a:solidFill>
+                <a:latin typeface="Aptos" pitchFamily="34" charset="0"/>
+                <a:ea typeface="Aptos" pitchFamily="34" charset="-122"/>
+                <a:cs typeface="Aptos" pitchFamily="34" charset="-120"/>
+              </a:rPr>
+              <a:t>Human review</a:t>
+            </a:r>
+            <a:endParaRPr lang="en-US" sz="900" dirty="0"/>
+          </a:p>
+        </p:txBody>
+      </p:sp>
+      <p:sp>
+        <p:nvSpPr>
+          <p:cNvPr id="18" name="Shape 16"/>
+          <p:cNvSpPr/>
+          <p:nvPr/>
+        </p:nvSpPr>
+        <p:spPr>
+          <a:xfrm>
+            <a:off x="7635240" y="4498848"/>
+            <a:ext cx="3474720" cy="1143000"/>
+          </a:xfrm>
+          <a:prstGeom prst="roundRect">
+            <a:avLst>
+              <a:gd name="adj" fmla="val 9600"/>
             </a:avLst>
           </a:prstGeom>
           <a:solidFill>
@@ -15425,14 +17042,14 @@
       </p:sp>
       <p:sp>
         <p:nvSpPr>
-          <p:cNvPr id="16" name="Text 14"/>
-          <p:cNvSpPr/>
-          <p:nvPr/>
-        </p:nvSpPr>
-        <p:spPr>
-          <a:xfrm>
-            <a:off x="8074152" y="3666744"/>
-            <a:ext cx="2825496" cy="256032"/>
+          <p:cNvPr id="19" name="Text 17"/>
+          <p:cNvSpPr/>
+          <p:nvPr/>
+        </p:nvSpPr>
+        <p:spPr>
+          <a:xfrm>
+            <a:off x="7799832" y="4645152"/>
+            <a:ext cx="3145536" cy="256032"/>
           </a:xfrm>
           <a:prstGeom prst="rect">
             <a:avLst/>
@@ -15456,7 +17073,7 @@
                 <a:ea typeface="Aptos" pitchFamily="34" charset="-122"/>
                 <a:cs typeface="Aptos" pitchFamily="34" charset="-120"/>
               </a:rPr>
-              <a:t>Use this for</a:t>
+              <a:t>Safeguard to plan</a:t>
             </a:r>
             <a:endParaRPr lang="en-US" sz="1300" dirty="0"/>
           </a:p>
@@ -15464,14 +17081,14 @@
       </p:sp>
       <p:sp>
         <p:nvSpPr>
-          <p:cNvPr id="17" name="Text 15"/>
-          <p:cNvSpPr/>
-          <p:nvPr/>
-        </p:nvSpPr>
-        <p:spPr>
-          <a:xfrm>
-            <a:off x="8074152" y="4023360"/>
-            <a:ext cx="2825496" cy="1097280"/>
+          <p:cNvPr id="20" name="Text 18"/>
+          <p:cNvSpPr/>
+          <p:nvPr/>
+        </p:nvSpPr>
+        <p:spPr>
+          <a:xfrm>
+            <a:off x="7799832" y="5001768"/>
+            <a:ext cx="3145536" cy="502920"/>
           </a:xfrm>
           <a:prstGeom prst="rect">
             <a:avLst/>
@@ -15497,7 +17114,7 @@
                 <a:ea typeface="Aptos" pitchFamily="34" charset="-122"/>
                 <a:cs typeface="Aptos" pitchFamily="34" charset="-120"/>
               </a:rPr>
-              <a:t>Connect the concept to public health decisions, safeguards, documentation, or implementation work.</a:t>
+              <a:t>Identify what could go wrong, who could be affected, what safeguards are needed, and what evidence should be reviewed before use expands.</a:t>
             </a:r>
             <a:endParaRPr lang="en-US" sz="1550" dirty="0"/>
           </a:p>
@@ -15671,8 +17288,8 @@
         </p:nvSpPr>
         <p:spPr>
           <a:xfrm>
-            <a:off x="9966960" y="6537960"/>
-            <a:ext cx="1645920" cy="201168"/>
+            <a:off x="9646920" y="6537960"/>
+            <a:ext cx="1965960" cy="201168"/>
           </a:xfrm>
           <a:prstGeom prst="rect">
             <a:avLst/>
@@ -15696,7 +17313,7 @@
                 <a:ea typeface="Aptos" pitchFamily="34" charset="-122"/>
                 <a:cs typeface="Aptos" pitchFamily="34" charset="-120"/>
               </a:rPr>
-              <a:t>Â© Paula Soper</a:t>
+              <a:t>Copyright Paula Soper</a:t>
             </a:r>
             <a:endParaRPr lang="en-US" sz="800" dirty="0"/>
           </a:p>
@@ -15743,77 +17360,13 @@
       </p:sp>
       <p:sp>
         <p:nvSpPr>
-          <p:cNvPr id="8" name="Shape 6"/>
+          <p:cNvPr id="8" name="Text 6"/>
           <p:cNvSpPr/>
           <p:nvPr/>
         </p:nvSpPr>
         <p:spPr>
           <a:xfrm>
             <a:off x="640080" y="658368"/>
-            <a:ext cx="420624" cy="420624"/>
-          </a:xfrm>
-          <a:prstGeom prst="ellipse">
-            <a:avLst/>
-          </a:prstGeom>
-          <a:solidFill>
-            <a:srgbClr val="0068B7"/>
-          </a:solidFill>
-          <a:ln w="12700">
-            <a:solidFill>
-              <a:srgbClr val="0068B7"/>
-            </a:solidFill>
-            <a:prstDash val="solid"/>
-          </a:ln>
-        </p:spPr>
-      </p:sp>
-      <p:sp>
-        <p:nvSpPr>
-          <p:cNvPr id="9" name="Text 7"/>
-          <p:cNvSpPr/>
-          <p:nvPr/>
-        </p:nvSpPr>
-        <p:spPr>
-          <a:xfrm>
-            <a:off x="640080" y="731520"/>
-            <a:ext cx="420624" cy="164592"/>
-          </a:xfrm>
-          <a:prstGeom prst="rect">
-            <a:avLst/>
-          </a:prstGeom>
-          <a:noFill/>
-          <a:ln/>
-        </p:spPr>
-        <p:txBody>
-          <a:bodyPr wrap="square" lIns="0" tIns="0" rIns="0" bIns="0" rtlCol="0" anchor="ctr"/>
-          <a:lstStyle/>
-          <a:p>
-            <a:pPr algn="ctr" indent="0" marL="0">
-              <a:buNone/>
-            </a:pPr>
-            <a:r>
-              <a:rPr lang="en-US" sz="1100" b="1" dirty="0">
-                <a:solidFill>
-                  <a:srgbClr val="FFFFFF"/>
-                </a:solidFill>
-                <a:latin typeface="Aptos" pitchFamily="34" charset="0"/>
-                <a:ea typeface="Aptos" pitchFamily="34" charset="-122"/>
-                <a:cs typeface="Aptos" pitchFamily="34" charset="-120"/>
-              </a:rPr>
-              <a:t>4</a:t>
-            </a:r>
-            <a:endParaRPr lang="en-US" sz="1100" dirty="0"/>
-          </a:p>
-        </p:txBody>
-      </p:sp>
-      <p:sp>
-        <p:nvSpPr>
-          <p:cNvPr id="10" name="Text 8"/>
-          <p:cNvSpPr/>
-          <p:nvPr/>
-        </p:nvSpPr>
-        <p:spPr>
-          <a:xfrm>
-            <a:off x="640080" y="621792"/>
             <a:ext cx="10881360" cy="713232"/>
           </a:xfrm>
           <a:prstGeom prst="rect">
@@ -15848,14 +17401,14 @@
       </p:sp>
       <p:sp>
         <p:nvSpPr>
-          <p:cNvPr id="11" name="Text 9"/>
+          <p:cNvPr id="9" name="Text 7"/>
           <p:cNvSpPr/>
           <p:nvPr/>
         </p:nvSpPr>
         <p:spPr>
           <a:xfrm>
             <a:off x="868680" y="1508760"/>
-            <a:ext cx="6537960" cy="4160520"/>
+            <a:ext cx="6309360" cy="4160520"/>
           </a:xfrm>
           <a:prstGeom prst="rect">
             <a:avLst/>
@@ -15914,18 +17467,18 @@
       </p:sp>
       <p:sp>
         <p:nvSpPr>
-          <p:cNvPr id="12" name="Shape 10"/>
-          <p:cNvSpPr/>
-          <p:nvPr/>
-        </p:nvSpPr>
-        <p:spPr>
-          <a:xfrm>
-            <a:off x="7909560" y="1417320"/>
-            <a:ext cx="3154680" cy="1828800"/>
+          <p:cNvPr id="10" name="Shape 8"/>
+          <p:cNvSpPr/>
+          <p:nvPr/>
+        </p:nvSpPr>
+        <p:spPr>
+          <a:xfrm>
+            <a:off x="7635240" y="1325880"/>
+            <a:ext cx="3474720" cy="1325880"/>
           </a:xfrm>
           <a:prstGeom prst="roundRect">
             <a:avLst>
-              <a:gd name="adj" fmla="val 6000"/>
+              <a:gd name="adj" fmla="val 8276"/>
             </a:avLst>
           </a:prstGeom>
           <a:solidFill>
@@ -15941,14 +17494,14 @@
       </p:sp>
       <p:sp>
         <p:nvSpPr>
-          <p:cNvPr id="13" name="Text 11"/>
-          <p:cNvSpPr/>
-          <p:nvPr/>
-        </p:nvSpPr>
-        <p:spPr>
-          <a:xfrm>
-            <a:off x="8074152" y="1563624"/>
-            <a:ext cx="2825496" cy="256032"/>
+          <p:cNvPr id="11" name="Text 9"/>
+          <p:cNvSpPr/>
+          <p:nvPr/>
+        </p:nvSpPr>
+        <p:spPr>
+          <a:xfrm>
+            <a:off x="7799832" y="1472184"/>
+            <a:ext cx="3145536" cy="256032"/>
           </a:xfrm>
           <a:prstGeom prst="rect">
             <a:avLst/>
@@ -15972,7 +17525,7 @@
                 <a:ea typeface="Aptos" pitchFamily="34" charset="-122"/>
                 <a:cs typeface="Aptos" pitchFamily="34" charset="-120"/>
               </a:rPr>
-              <a:t>Key idea</a:t>
+              <a:t>Risk check</a:t>
             </a:r>
             <a:endParaRPr lang="en-US" sz="1300" dirty="0"/>
           </a:p>
@@ -15980,14 +17533,14 @@
       </p:sp>
       <p:sp>
         <p:nvSpPr>
-          <p:cNvPr id="14" name="Text 12"/>
-          <p:cNvSpPr/>
-          <p:nvPr/>
-        </p:nvSpPr>
-        <p:spPr>
-          <a:xfrm>
-            <a:off x="8074152" y="1920240"/>
-            <a:ext cx="2825496" cy="1188720"/>
+          <p:cNvPr id="12" name="Text 10"/>
+          <p:cNvSpPr/>
+          <p:nvPr/>
+        </p:nvSpPr>
+        <p:spPr>
+          <a:xfrm>
+            <a:off x="7799832" y="1828800"/>
+            <a:ext cx="3145536" cy="685800"/>
           </a:xfrm>
           <a:prstGeom prst="rect">
             <a:avLst/>
@@ -16021,18 +17574,171 @@
       </p:sp>
       <p:sp>
         <p:nvSpPr>
-          <p:cNvPr id="15" name="Shape 13"/>
-          <p:cNvSpPr/>
-          <p:nvPr/>
-        </p:nvSpPr>
-        <p:spPr>
-          <a:xfrm>
-            <a:off x="7909560" y="3520440"/>
-            <a:ext cx="3154680" cy="1737360"/>
+          <p:cNvPr id="13" name="Shape 11"/>
+          <p:cNvSpPr/>
+          <p:nvPr/>
+        </p:nvSpPr>
+        <p:spPr>
+          <a:xfrm>
+            <a:off x="7635240" y="2788920"/>
+            <a:ext cx="3474720" cy="1536192"/>
           </a:xfrm>
           <a:prstGeom prst="roundRect">
             <a:avLst>
-              <a:gd name="adj" fmla="val 6316"/>
+              <a:gd name="adj" fmla="val 7143"/>
+            </a:avLst>
+          </a:prstGeom>
+          <a:solidFill>
+            <a:srgbClr val="FFFFFF">
+              <a:alpha val="88000"/>
+            </a:srgbClr>
+          </a:solidFill>
+          <a:ln w="12700">
+            <a:solidFill>
+              <a:srgbClr val="D6E8F2"/>
+            </a:solidFill>
+            <a:prstDash val="solid"/>
+          </a:ln>
+        </p:spPr>
+      </p:sp>
+      <p:sp>
+        <p:nvSpPr>
+          <p:cNvPr id="14" name="Shape 12"/>
+          <p:cNvSpPr/>
+          <p:nvPr/>
+        </p:nvSpPr>
+        <p:spPr>
+          <a:xfrm>
+            <a:off x="8046720" y="3108960"/>
+            <a:ext cx="2651760" cy="896112"/>
+          </a:xfrm>
+          <a:prstGeom prst="arc">
+            <a:avLst/>
+          </a:prstGeom>
+          <a:noFill/>
+          <a:ln w="25400">
+            <a:solidFill>
+              <a:srgbClr val="0068B7"/>
+            </a:solidFill>
+            <a:prstDash val="solid"/>
+          </a:ln>
+        </p:spPr>
+      </p:sp>
+      <p:sp>
+        <p:nvSpPr>
+          <p:cNvPr id="15" name="Text 13"/>
+          <p:cNvSpPr/>
+          <p:nvPr/>
+        </p:nvSpPr>
+        <p:spPr>
+          <a:xfrm>
+            <a:off x="7909560" y="3099816"/>
+            <a:ext cx="2926080" cy="256032"/>
+          </a:xfrm>
+          <a:prstGeom prst="rect">
+            <a:avLst/>
+          </a:prstGeom>
+          <a:noFill/>
+          <a:ln/>
+        </p:spPr>
+        <p:txBody>
+          <a:bodyPr wrap="square" lIns="0" tIns="0" rIns="0" bIns="0" rtlCol="0" anchor="ctr"/>
+          <a:lstStyle/>
+          <a:p>
+            <a:pPr algn="ctr" indent="0" marL="0">
+              <a:buNone/>
+            </a:pPr>
+            <a:r>
+              <a:rPr lang="en-US" sz="1500" b="1" dirty="0">
+                <a:solidFill>
+                  <a:srgbClr val="003A63"/>
+                </a:solidFill>
+                <a:latin typeface="Aptos" pitchFamily="34" charset="0"/>
+                <a:ea typeface="Aptos" pitchFamily="34" charset="-122"/>
+                <a:cs typeface="Aptos" pitchFamily="34" charset="-120"/>
+              </a:rPr>
+              <a:t>Risk</a:t>
+            </a:r>
+            <a:endParaRPr lang="en-US" sz="1500" dirty="0"/>
+          </a:p>
+        </p:txBody>
+      </p:sp>
+      <p:sp>
+        <p:nvSpPr>
+          <p:cNvPr id="16" name="Shape 14"/>
+          <p:cNvSpPr/>
+          <p:nvPr/>
+        </p:nvSpPr>
+        <p:spPr>
+          <a:xfrm>
+            <a:off x="8366760" y="3639312"/>
+            <a:ext cx="2011680" cy="0"/>
+          </a:xfrm>
+          <a:prstGeom prst="line">
+            <a:avLst/>
+          </a:prstGeom>
+          <a:noFill/>
+          <a:ln w="63500">
+            <a:solidFill>
+              <a:srgbClr val="2F8A28"/>
+            </a:solidFill>
+            <a:prstDash val="solid"/>
+          </a:ln>
+        </p:spPr>
+      </p:sp>
+      <p:sp>
+        <p:nvSpPr>
+          <p:cNvPr id="17" name="Text 15"/>
+          <p:cNvSpPr/>
+          <p:nvPr/>
+        </p:nvSpPr>
+        <p:spPr>
+          <a:xfrm>
+            <a:off x="7909560" y="3849624"/>
+            <a:ext cx="2926080" cy="164592"/>
+          </a:xfrm>
+          <a:prstGeom prst="rect">
+            <a:avLst/>
+          </a:prstGeom>
+          <a:noFill/>
+          <a:ln/>
+        </p:spPr>
+        <p:txBody>
+          <a:bodyPr wrap="square" lIns="0" tIns="0" rIns="0" bIns="0" rtlCol="0" anchor="ctr"/>
+          <a:lstStyle/>
+          <a:p>
+            <a:pPr algn="ctr" indent="0" marL="0">
+              <a:buNone/>
+            </a:pPr>
+            <a:r>
+              <a:rPr lang="en-US" sz="900" dirty="0">
+                <a:solidFill>
+                  <a:srgbClr val="003A63"/>
+                </a:solidFill>
+                <a:latin typeface="Aptos" pitchFamily="34" charset="0"/>
+                <a:ea typeface="Aptos" pitchFamily="34" charset="-122"/>
+                <a:cs typeface="Aptos" pitchFamily="34" charset="-120"/>
+              </a:rPr>
+              <a:t>Human review</a:t>
+            </a:r>
+            <a:endParaRPr lang="en-US" sz="900" dirty="0"/>
+          </a:p>
+        </p:txBody>
+      </p:sp>
+      <p:sp>
+        <p:nvSpPr>
+          <p:cNvPr id="18" name="Shape 16"/>
+          <p:cNvSpPr/>
+          <p:nvPr/>
+        </p:nvSpPr>
+        <p:spPr>
+          <a:xfrm>
+            <a:off x="7635240" y="4498848"/>
+            <a:ext cx="3474720" cy="1143000"/>
+          </a:xfrm>
+          <a:prstGeom prst="roundRect">
+            <a:avLst>
+              <a:gd name="adj" fmla="val 9600"/>
             </a:avLst>
           </a:prstGeom>
           <a:solidFill>
@@ -16048,14 +17754,14 @@
       </p:sp>
       <p:sp>
         <p:nvSpPr>
-          <p:cNvPr id="16" name="Text 14"/>
-          <p:cNvSpPr/>
-          <p:nvPr/>
-        </p:nvSpPr>
-        <p:spPr>
-          <a:xfrm>
-            <a:off x="8074152" y="3666744"/>
-            <a:ext cx="2825496" cy="256032"/>
+          <p:cNvPr id="19" name="Text 17"/>
+          <p:cNvSpPr/>
+          <p:nvPr/>
+        </p:nvSpPr>
+        <p:spPr>
+          <a:xfrm>
+            <a:off x="7799832" y="4645152"/>
+            <a:ext cx="3145536" cy="256032"/>
           </a:xfrm>
           <a:prstGeom prst="rect">
             <a:avLst/>
@@ -16079,7 +17785,7 @@
                 <a:ea typeface="Aptos" pitchFamily="34" charset="-122"/>
                 <a:cs typeface="Aptos" pitchFamily="34" charset="-120"/>
               </a:rPr>
-              <a:t>Use this for</a:t>
+              <a:t>Safeguard to plan</a:t>
             </a:r>
             <a:endParaRPr lang="en-US" sz="1300" dirty="0"/>
           </a:p>
@@ -16087,14 +17793,14 @@
       </p:sp>
       <p:sp>
         <p:nvSpPr>
-          <p:cNvPr id="17" name="Text 15"/>
-          <p:cNvSpPr/>
-          <p:nvPr/>
-        </p:nvSpPr>
-        <p:spPr>
-          <a:xfrm>
-            <a:off x="8074152" y="4023360"/>
-            <a:ext cx="2825496" cy="1097280"/>
+          <p:cNvPr id="20" name="Text 18"/>
+          <p:cNvSpPr/>
+          <p:nvPr/>
+        </p:nvSpPr>
+        <p:spPr>
+          <a:xfrm>
+            <a:off x="7799832" y="5001768"/>
+            <a:ext cx="3145536" cy="502920"/>
           </a:xfrm>
           <a:prstGeom prst="rect">
             <a:avLst/>
@@ -16120,7 +17826,7 @@
                 <a:ea typeface="Aptos" pitchFamily="34" charset="-122"/>
                 <a:cs typeface="Aptos" pitchFamily="34" charset="-120"/>
               </a:rPr>
-              <a:t>Connect the concept to public health decisions, safeguards, documentation, or implementation work.</a:t>
+              <a:t>Identify what could go wrong, who could be affected, what safeguards are needed, and what evidence should be reviewed before use expands.</a:t>
             </a:r>
             <a:endParaRPr lang="en-US" sz="1550" dirty="0"/>
           </a:p>

--- a/downloads/presentations/modules/anl-220.pptx
+++ b/downloads/presentations/modules/anl-220.pptx
@@ -3525,13 +3525,11 @@
             </a:avLst>
           </a:prstGeom>
           <a:solidFill>
-            <a:srgbClr val="FFFFFF">
-              <a:alpha val="88000"/>
-            </a:srgbClr>
+            <a:srgbClr val="FFFFFF"/>
           </a:solidFill>
           <a:ln w="12700">
             <a:solidFill>
-              <a:srgbClr val="D6E8F2"/>
+              <a:srgbClr val="B9D7E6"/>
             </a:solidFill>
             <a:prstDash val="solid"/>
           </a:ln>
@@ -3539,26 +3537,42 @@
       </p:sp>
       <p:sp>
         <p:nvSpPr>
-          <p:cNvPr id="14" name="Shape 12"/>
-          <p:cNvSpPr/>
-          <p:nvPr/>
-        </p:nvSpPr>
-        <p:spPr>
-          <a:xfrm>
-            <a:off x="8046720" y="3108960"/>
-            <a:ext cx="2651760" cy="896112"/>
-          </a:xfrm>
-          <a:prstGeom prst="arc">
-            <a:avLst/>
-          </a:prstGeom>
-          <a:noFill/>
-          <a:ln w="25400">
-            <a:solidFill>
-              <a:srgbClr val="0068B7"/>
-            </a:solidFill>
-            <a:prstDash val="solid"/>
-          </a:ln>
-        </p:spPr>
+          <p:cNvPr id="14" name="Text 12"/>
+          <p:cNvSpPr/>
+          <p:nvPr/>
+        </p:nvSpPr>
+        <p:spPr>
+          <a:xfrm>
+            <a:off x="7799832" y="2935224"/>
+            <a:ext cx="3145536" cy="256032"/>
+          </a:xfrm>
+          <a:prstGeom prst="rect">
+            <a:avLst/>
+          </a:prstGeom>
+          <a:noFill/>
+          <a:ln/>
+        </p:spPr>
+        <p:txBody>
+          <a:bodyPr wrap="square" lIns="0" tIns="0" rIns="0" bIns="0" rtlCol="0" anchor="ctr"/>
+          <a:lstStyle/>
+          <a:p>
+            <a:pPr indent="0" marL="0">
+              <a:buNone/>
+            </a:pPr>
+            <a:r>
+              <a:rPr lang="en-US" sz="1300" b="1" dirty="0">
+                <a:solidFill>
+                  <a:srgbClr val="0068B7"/>
+                </a:solidFill>
+                <a:latin typeface="Aptos" pitchFamily="34" charset="0"/>
+                <a:ea typeface="Aptos" pitchFamily="34" charset="-122"/>
+                <a:cs typeface="Aptos" pitchFamily="34" charset="-120"/>
+              </a:rPr>
+              <a:t>Concept checkpoints</a:t>
+            </a:r>
+            <a:endParaRPr lang="en-US" sz="1300" dirty="0"/>
+          </a:p>
+        </p:txBody>
       </p:sp>
       <p:sp>
         <p:nvSpPr>
@@ -3568,102 +3582,67 @@
         </p:nvSpPr>
         <p:spPr>
           <a:xfrm>
-            <a:off x="7909560" y="3099816"/>
-            <a:ext cx="2926080" cy="256032"/>
-          </a:xfrm>
-          <a:prstGeom prst="rect">
-            <a:avLst/>
-          </a:prstGeom>
-          <a:noFill/>
-          <a:ln/>
-        </p:spPr>
-        <p:txBody>
-          <a:bodyPr wrap="square" lIns="0" tIns="0" rIns="0" bIns="0" rtlCol="0" anchor="ctr"/>
-          <a:lstStyle/>
-          <a:p>
-            <a:pPr algn="ctr" indent="0" marL="0">
-              <a:buNone/>
-            </a:pPr>
-            <a:r>
-              <a:rPr lang="en-US" sz="1500" b="1" dirty="0">
-                <a:solidFill>
-                  <a:srgbClr val="003A63"/>
-                </a:solidFill>
-                <a:latin typeface="Aptos" pitchFamily="34" charset="0"/>
-                <a:ea typeface="Aptos" pitchFamily="34" charset="-122"/>
-                <a:cs typeface="Aptos" pitchFamily="34" charset="-120"/>
-              </a:rPr>
-              <a:t>Risk</a:t>
-            </a:r>
-            <a:endParaRPr lang="en-US" sz="1500" dirty="0"/>
+            <a:off x="7818120" y="3300984"/>
+            <a:ext cx="3090672" cy="877824"/>
+          </a:xfrm>
+          <a:prstGeom prst="rect">
+            <a:avLst/>
+          </a:prstGeom>
+          <a:noFill/>
+          <a:ln/>
+        </p:spPr>
+        <p:txBody>
+          <a:bodyPr wrap="square" lIns="254" tIns="254" rIns="254" bIns="254" rtlCol="0" anchor="t">
+            <a:normAutofit/>
+          </a:bodyPr>
+          <a:lstStyle/>
+          <a:p>
+            <a:r>
+              <a:rPr lang="en-US" sz="1380" dirty="0">
+                <a:solidFill>
+                  <a:srgbClr val="17364A"/>
+                </a:solidFill>
+                <a:latin typeface="Aptos" pitchFamily="34" charset="0"/>
+                <a:ea typeface="Aptos" pitchFamily="34" charset="-122"/>
+                <a:cs typeface="Aptos" pitchFamily="34" charset="-120"/>
+              </a:rPr>
+              <a:t>Staff must define risk of what, during what time period, for which population, and for.</a:t>
+            </a:r>
+            <a:endParaRPr lang="en-US" sz="1380" dirty="0"/>
+          </a:p>
+          <a:p>
+            <a:r>
+              <a:rPr lang="en-US" sz="1380" dirty="0">
+                <a:solidFill>
+                  <a:srgbClr val="17364A"/>
+                </a:solidFill>
+                <a:latin typeface="Aptos" pitchFamily="34" charset="0"/>
+                <a:ea typeface="Aptos" pitchFamily="34" charset="-122"/>
+                <a:cs typeface="Aptos" pitchFamily="34" charset="-120"/>
+              </a:rPr>
+              <a:t>A model predicting hospitalization within 30 days is different from one predicting delayed.</a:t>
+            </a:r>
+            <a:endParaRPr lang="en-US" sz="1380" dirty="0"/>
+          </a:p>
+          <a:p>
+            <a:r>
+              <a:rPr lang="en-US" sz="1380" dirty="0">
+                <a:solidFill>
+                  <a:srgbClr val="17364A"/>
+                </a:solidFill>
+                <a:latin typeface="Aptos" pitchFamily="34" charset="0"/>
+                <a:ea typeface="Aptos" pitchFamily="34" charset="-122"/>
+                <a:cs typeface="Aptos" pitchFamily="34" charset="-120"/>
+              </a:rPr>
+              <a:t>Feature selection should be reviewed for both technical and ethical implications.</a:t>
+            </a:r>
+            <a:endParaRPr lang="en-US" sz="1380" dirty="0"/>
           </a:p>
         </p:txBody>
       </p:sp>
       <p:sp>
         <p:nvSpPr>
           <p:cNvPr id="16" name="Shape 14"/>
-          <p:cNvSpPr/>
-          <p:nvPr/>
-        </p:nvSpPr>
-        <p:spPr>
-          <a:xfrm>
-            <a:off x="8366760" y="3639312"/>
-            <a:ext cx="2011680" cy="0"/>
-          </a:xfrm>
-          <a:prstGeom prst="line">
-            <a:avLst/>
-          </a:prstGeom>
-          <a:noFill/>
-          <a:ln w="63500">
-            <a:solidFill>
-              <a:srgbClr val="2F8A28"/>
-            </a:solidFill>
-            <a:prstDash val="solid"/>
-          </a:ln>
-        </p:spPr>
-      </p:sp>
-      <p:sp>
-        <p:nvSpPr>
-          <p:cNvPr id="17" name="Text 15"/>
-          <p:cNvSpPr/>
-          <p:nvPr/>
-        </p:nvSpPr>
-        <p:spPr>
-          <a:xfrm>
-            <a:off x="7909560" y="3849624"/>
-            <a:ext cx="2926080" cy="164592"/>
-          </a:xfrm>
-          <a:prstGeom prst="rect">
-            <a:avLst/>
-          </a:prstGeom>
-          <a:noFill/>
-          <a:ln/>
-        </p:spPr>
-        <p:txBody>
-          <a:bodyPr wrap="square" lIns="0" tIns="0" rIns="0" bIns="0" rtlCol="0" anchor="ctr"/>
-          <a:lstStyle/>
-          <a:p>
-            <a:pPr algn="ctr" indent="0" marL="0">
-              <a:buNone/>
-            </a:pPr>
-            <a:r>
-              <a:rPr lang="en-US" sz="900" dirty="0">
-                <a:solidFill>
-                  <a:srgbClr val="003A63"/>
-                </a:solidFill>
-                <a:latin typeface="Aptos" pitchFamily="34" charset="0"/>
-                <a:ea typeface="Aptos" pitchFamily="34" charset="-122"/>
-                <a:cs typeface="Aptos" pitchFamily="34" charset="-120"/>
-              </a:rPr>
-              <a:t>Human review</a:t>
-            </a:r>
-            <a:endParaRPr lang="en-US" sz="900" dirty="0"/>
-          </a:p>
-        </p:txBody>
-      </p:sp>
-      <p:sp>
-        <p:nvSpPr>
-          <p:cNvPr id="18" name="Shape 16"/>
           <p:cNvSpPr/>
           <p:nvPr/>
         </p:nvSpPr>
@@ -3690,7 +3669,7 @@
       </p:sp>
       <p:sp>
         <p:nvSpPr>
-          <p:cNvPr id="19" name="Text 17"/>
+          <p:cNvPr id="17" name="Text 15"/>
           <p:cNvSpPr/>
           <p:nvPr/>
         </p:nvSpPr>
@@ -3729,7 +3708,7 @@
       </p:sp>
       <p:sp>
         <p:nvSpPr>
-          <p:cNvPr id="20" name="Text 18"/>
+          <p:cNvPr id="18" name="Text 16"/>
           <p:cNvSpPr/>
           <p:nvPr/>
         </p:nvSpPr>
@@ -4237,13 +4216,11 @@
             </a:avLst>
           </a:prstGeom>
           <a:solidFill>
-            <a:srgbClr val="FFFFFF">
-              <a:alpha val="88000"/>
-            </a:srgbClr>
+            <a:srgbClr val="FFFFFF"/>
           </a:solidFill>
           <a:ln w="12700">
             <a:solidFill>
-              <a:srgbClr val="D6E8F2"/>
+              <a:srgbClr val="B9D7E6"/>
             </a:solidFill>
             <a:prstDash val="solid"/>
           </a:ln>
@@ -4251,26 +4228,42 @@
       </p:sp>
       <p:sp>
         <p:nvSpPr>
-          <p:cNvPr id="14" name="Shape 12"/>
-          <p:cNvSpPr/>
-          <p:nvPr/>
-        </p:nvSpPr>
-        <p:spPr>
-          <a:xfrm>
-            <a:off x="8046720" y="3108960"/>
-            <a:ext cx="2651760" cy="896112"/>
-          </a:xfrm>
-          <a:prstGeom prst="arc">
-            <a:avLst/>
-          </a:prstGeom>
-          <a:noFill/>
-          <a:ln w="25400">
-            <a:solidFill>
-              <a:srgbClr val="0068B7"/>
-            </a:solidFill>
-            <a:prstDash val="solid"/>
-          </a:ln>
-        </p:spPr>
+          <p:cNvPr id="14" name="Text 12"/>
+          <p:cNvSpPr/>
+          <p:nvPr/>
+        </p:nvSpPr>
+        <p:spPr>
+          <a:xfrm>
+            <a:off x="7799832" y="2935224"/>
+            <a:ext cx="3145536" cy="256032"/>
+          </a:xfrm>
+          <a:prstGeom prst="rect">
+            <a:avLst/>
+          </a:prstGeom>
+          <a:noFill/>
+          <a:ln/>
+        </p:spPr>
+        <p:txBody>
+          <a:bodyPr wrap="square" lIns="0" tIns="0" rIns="0" bIns="0" rtlCol="0" anchor="ctr"/>
+          <a:lstStyle/>
+          <a:p>
+            <a:pPr indent="0" marL="0">
+              <a:buNone/>
+            </a:pPr>
+            <a:r>
+              <a:rPr lang="en-US" sz="1300" b="1" dirty="0">
+                <a:solidFill>
+                  <a:srgbClr val="0068B7"/>
+                </a:solidFill>
+                <a:latin typeface="Aptos" pitchFamily="34" charset="0"/>
+                <a:ea typeface="Aptos" pitchFamily="34" charset="-122"/>
+                <a:cs typeface="Aptos" pitchFamily="34" charset="-120"/>
+              </a:rPr>
+              <a:t>Concept checkpoints</a:t>
+            </a:r>
+            <a:endParaRPr lang="en-US" sz="1300" dirty="0"/>
+          </a:p>
+        </p:txBody>
       </p:sp>
       <p:sp>
         <p:nvSpPr>
@@ -4280,102 +4273,67 @@
         </p:nvSpPr>
         <p:spPr>
           <a:xfrm>
-            <a:off x="7909560" y="3099816"/>
-            <a:ext cx="2926080" cy="256032"/>
-          </a:xfrm>
-          <a:prstGeom prst="rect">
-            <a:avLst/>
-          </a:prstGeom>
-          <a:noFill/>
-          <a:ln/>
-        </p:spPr>
-        <p:txBody>
-          <a:bodyPr wrap="square" lIns="0" tIns="0" rIns="0" bIns="0" rtlCol="0" anchor="ctr"/>
-          <a:lstStyle/>
-          <a:p>
-            <a:pPr algn="ctr" indent="0" marL="0">
-              <a:buNone/>
-            </a:pPr>
-            <a:r>
-              <a:rPr lang="en-US" sz="1500" b="1" dirty="0">
-                <a:solidFill>
-                  <a:srgbClr val="003A63"/>
-                </a:solidFill>
-                <a:latin typeface="Aptos" pitchFamily="34" charset="0"/>
-                <a:ea typeface="Aptos" pitchFamily="34" charset="-122"/>
-                <a:cs typeface="Aptos" pitchFamily="34" charset="-120"/>
-              </a:rPr>
-              <a:t>Risk</a:t>
-            </a:r>
-            <a:endParaRPr lang="en-US" sz="1500" dirty="0"/>
+            <a:off x="7818120" y="3300984"/>
+            <a:ext cx="3090672" cy="877824"/>
+          </a:xfrm>
+          <a:prstGeom prst="rect">
+            <a:avLst/>
+          </a:prstGeom>
+          <a:noFill/>
+          <a:ln/>
+        </p:spPr>
+        <p:txBody>
+          <a:bodyPr wrap="square" lIns="254" tIns="254" rIns="254" bIns="254" rtlCol="0" anchor="t">
+            <a:normAutofit/>
+          </a:bodyPr>
+          <a:lstStyle/>
+          <a:p>
+            <a:r>
+              <a:rPr lang="en-US" sz="1380" dirty="0">
+                <a:solidFill>
+                  <a:srgbClr val="17364A"/>
+                </a:solidFill>
+                <a:latin typeface="Aptos" pitchFamily="34" charset="0"/>
+                <a:ea typeface="Aptos" pitchFamily="34" charset="-122"/>
+                <a:cs typeface="Aptos" pitchFamily="34" charset="-120"/>
+              </a:rPr>
+              <a:t>Threshold selection should consider staffing capacity, consequence severity, equity, and.</a:t>
+            </a:r>
+            <a:endParaRPr lang="en-US" sz="1380" dirty="0"/>
+          </a:p>
+          <a:p>
+            <a:r>
+              <a:rPr lang="en-US" sz="1380" dirty="0">
+                <a:solidFill>
+                  <a:srgbClr val="17364A"/>
+                </a:solidFill>
+                <a:latin typeface="Aptos" pitchFamily="34" charset="0"/>
+                <a:ea typeface="Aptos" pitchFamily="34" charset="-122"/>
+                <a:cs typeface="Aptos" pitchFamily="34" charset="-120"/>
+              </a:rPr>
+              <a:t>Post-deployment monitoring is essential.</a:t>
+            </a:r>
+            <a:endParaRPr lang="en-US" sz="1380" dirty="0"/>
+          </a:p>
+          <a:p>
+            <a:r>
+              <a:rPr lang="en-US" sz="1380" dirty="0">
+                <a:solidFill>
+                  <a:srgbClr val="17364A"/>
+                </a:solidFill>
+                <a:latin typeface="Aptos" pitchFamily="34" charset="0"/>
+                <a:ea typeface="Aptos" pitchFamily="34" charset="-122"/>
+                <a:cs typeface="Aptos" pitchFamily="34" charset="-120"/>
+              </a:rPr>
+              <a:t>A model that worked during development may degrade as disease patterns, reporting systems,.</a:t>
+            </a:r>
+            <a:endParaRPr lang="en-US" sz="1380" dirty="0"/>
           </a:p>
         </p:txBody>
       </p:sp>
       <p:sp>
         <p:nvSpPr>
           <p:cNvPr id="16" name="Shape 14"/>
-          <p:cNvSpPr/>
-          <p:nvPr/>
-        </p:nvSpPr>
-        <p:spPr>
-          <a:xfrm>
-            <a:off x="8366760" y="3639312"/>
-            <a:ext cx="2011680" cy="0"/>
-          </a:xfrm>
-          <a:prstGeom prst="line">
-            <a:avLst/>
-          </a:prstGeom>
-          <a:noFill/>
-          <a:ln w="63500">
-            <a:solidFill>
-              <a:srgbClr val="2F8A28"/>
-            </a:solidFill>
-            <a:prstDash val="solid"/>
-          </a:ln>
-        </p:spPr>
-      </p:sp>
-      <p:sp>
-        <p:nvSpPr>
-          <p:cNvPr id="17" name="Text 15"/>
-          <p:cNvSpPr/>
-          <p:nvPr/>
-        </p:nvSpPr>
-        <p:spPr>
-          <a:xfrm>
-            <a:off x="7909560" y="3849624"/>
-            <a:ext cx="2926080" cy="164592"/>
-          </a:xfrm>
-          <a:prstGeom prst="rect">
-            <a:avLst/>
-          </a:prstGeom>
-          <a:noFill/>
-          <a:ln/>
-        </p:spPr>
-        <p:txBody>
-          <a:bodyPr wrap="square" lIns="0" tIns="0" rIns="0" bIns="0" rtlCol="0" anchor="ctr"/>
-          <a:lstStyle/>
-          <a:p>
-            <a:pPr algn="ctr" indent="0" marL="0">
-              <a:buNone/>
-            </a:pPr>
-            <a:r>
-              <a:rPr lang="en-US" sz="900" dirty="0">
-                <a:solidFill>
-                  <a:srgbClr val="003A63"/>
-                </a:solidFill>
-                <a:latin typeface="Aptos" pitchFamily="34" charset="0"/>
-                <a:ea typeface="Aptos" pitchFamily="34" charset="-122"/>
-                <a:cs typeface="Aptos" pitchFamily="34" charset="-120"/>
-              </a:rPr>
-              <a:t>Human review</a:t>
-            </a:r>
-            <a:endParaRPr lang="en-US" sz="900" dirty="0"/>
-          </a:p>
-        </p:txBody>
-      </p:sp>
-      <p:sp>
-        <p:nvSpPr>
-          <p:cNvPr id="18" name="Shape 16"/>
           <p:cNvSpPr/>
           <p:nvPr/>
         </p:nvSpPr>
@@ -4402,7 +4360,7 @@
       </p:sp>
       <p:sp>
         <p:nvSpPr>
-          <p:cNvPr id="19" name="Text 17"/>
+          <p:cNvPr id="17" name="Text 15"/>
           <p:cNvSpPr/>
           <p:nvPr/>
         </p:nvSpPr>
@@ -4441,7 +4399,7 @@
       </p:sp>
       <p:sp>
         <p:nvSpPr>
-          <p:cNvPr id="20" name="Text 18"/>
+          <p:cNvPr id="18" name="Text 16"/>
           <p:cNvSpPr/>
           <p:nvPr/>
         </p:nvSpPr>
@@ -4949,13 +4907,11 @@
             </a:avLst>
           </a:prstGeom>
           <a:solidFill>
-            <a:srgbClr val="FFFFFF">
-              <a:alpha val="88000"/>
-            </a:srgbClr>
+            <a:srgbClr val="FFFFFF"/>
           </a:solidFill>
           <a:ln w="12700">
             <a:solidFill>
-              <a:srgbClr val="D6E8F2"/>
+              <a:srgbClr val="B9D7E6"/>
             </a:solidFill>
             <a:prstDash val="solid"/>
           </a:ln>
@@ -4963,26 +4919,42 @@
       </p:sp>
       <p:sp>
         <p:nvSpPr>
-          <p:cNvPr id="14" name="Shape 12"/>
-          <p:cNvSpPr/>
-          <p:nvPr/>
-        </p:nvSpPr>
-        <p:spPr>
-          <a:xfrm>
-            <a:off x="8046720" y="3108960"/>
-            <a:ext cx="2651760" cy="896112"/>
-          </a:xfrm>
-          <a:prstGeom prst="arc">
-            <a:avLst/>
-          </a:prstGeom>
-          <a:noFill/>
-          <a:ln w="25400">
-            <a:solidFill>
-              <a:srgbClr val="0068B7"/>
-            </a:solidFill>
-            <a:prstDash val="solid"/>
-          </a:ln>
-        </p:spPr>
+          <p:cNvPr id="14" name="Text 12"/>
+          <p:cNvSpPr/>
+          <p:nvPr/>
+        </p:nvSpPr>
+        <p:spPr>
+          <a:xfrm>
+            <a:off x="7799832" y="2935224"/>
+            <a:ext cx="3145536" cy="256032"/>
+          </a:xfrm>
+          <a:prstGeom prst="rect">
+            <a:avLst/>
+          </a:prstGeom>
+          <a:noFill/>
+          <a:ln/>
+        </p:spPr>
+        <p:txBody>
+          <a:bodyPr wrap="square" lIns="0" tIns="0" rIns="0" bIns="0" rtlCol="0" anchor="ctr"/>
+          <a:lstStyle/>
+          <a:p>
+            <a:pPr indent="0" marL="0">
+              <a:buNone/>
+            </a:pPr>
+            <a:r>
+              <a:rPr lang="en-US" sz="1300" b="1" dirty="0">
+                <a:solidFill>
+                  <a:srgbClr val="0068B7"/>
+                </a:solidFill>
+                <a:latin typeface="Aptos" pitchFamily="34" charset="0"/>
+                <a:ea typeface="Aptos" pitchFamily="34" charset="-122"/>
+                <a:cs typeface="Aptos" pitchFamily="34" charset="-120"/>
+              </a:rPr>
+              <a:t>Concept checkpoints</a:t>
+            </a:r>
+            <a:endParaRPr lang="en-US" sz="1300" dirty="0"/>
+          </a:p>
+        </p:txBody>
       </p:sp>
       <p:sp>
         <p:nvSpPr>
@@ -4992,102 +4964,67 @@
         </p:nvSpPr>
         <p:spPr>
           <a:xfrm>
-            <a:off x="7909560" y="3099816"/>
-            <a:ext cx="2926080" cy="256032"/>
-          </a:xfrm>
-          <a:prstGeom prst="rect">
-            <a:avLst/>
-          </a:prstGeom>
-          <a:noFill/>
-          <a:ln/>
-        </p:spPr>
-        <p:txBody>
-          <a:bodyPr wrap="square" lIns="0" tIns="0" rIns="0" bIns="0" rtlCol="0" anchor="ctr"/>
-          <a:lstStyle/>
-          <a:p>
-            <a:pPr algn="ctr" indent="0" marL="0">
-              <a:buNone/>
-            </a:pPr>
-            <a:r>
-              <a:rPr lang="en-US" sz="1500" b="1" dirty="0">
-                <a:solidFill>
-                  <a:srgbClr val="003A63"/>
-                </a:solidFill>
-                <a:latin typeface="Aptos" pitchFamily="34" charset="0"/>
-                <a:ea typeface="Aptos" pitchFamily="34" charset="-122"/>
-                <a:cs typeface="Aptos" pitchFamily="34" charset="-120"/>
-              </a:rPr>
-              <a:t>Risk</a:t>
-            </a:r>
-            <a:endParaRPr lang="en-US" sz="1500" dirty="0"/>
+            <a:off x="7818120" y="3300984"/>
+            <a:ext cx="3090672" cy="877824"/>
+          </a:xfrm>
+          <a:prstGeom prst="rect">
+            <a:avLst/>
+          </a:prstGeom>
+          <a:noFill/>
+          <a:ln/>
+        </p:spPr>
+        <p:txBody>
+          <a:bodyPr wrap="square" lIns="254" tIns="254" rIns="254" bIns="254" rtlCol="0" anchor="t">
+            <a:normAutofit/>
+          </a:bodyPr>
+          <a:lstStyle/>
+          <a:p>
+            <a:r>
+              <a:rPr lang="en-US" sz="1380" dirty="0">
+                <a:solidFill>
+                  <a:srgbClr val="17364A"/>
+                </a:solidFill>
+                <a:latin typeface="Aptos" pitchFamily="34" charset="0"/>
+                <a:ea typeface="Aptos" pitchFamily="34" charset="-122"/>
+                <a:cs typeface="Aptos" pitchFamily="34" charset="-120"/>
+              </a:rPr>
+              <a:t>Equity distortion.</a:t>
+            </a:r>
+            <a:endParaRPr lang="en-US" sz="1380" dirty="0"/>
+          </a:p>
+          <a:p>
+            <a:r>
+              <a:rPr lang="en-US" sz="1380" dirty="0">
+                <a:solidFill>
+                  <a:srgbClr val="17364A"/>
+                </a:solidFill>
+                <a:latin typeface="Aptos" pitchFamily="34" charset="0"/>
+                <a:ea typeface="Aptos" pitchFamily="34" charset="-122"/>
+                <a:cs typeface="Aptos" pitchFamily="34" charset="-120"/>
+              </a:rPr>
+              <a:t>Risk models may reflect unequal data availability or historical inequities.</a:t>
+            </a:r>
+            <a:endParaRPr lang="en-US" sz="1380" dirty="0"/>
+          </a:p>
+          <a:p>
+            <a:r>
+              <a:rPr lang="en-US" sz="1380" dirty="0">
+                <a:solidFill>
+                  <a:srgbClr val="17364A"/>
+                </a:solidFill>
+                <a:latin typeface="Aptos" pitchFamily="34" charset="0"/>
+                <a:ea typeface="Aptos" pitchFamily="34" charset="-122"/>
+                <a:cs typeface="Aptos" pitchFamily="34" charset="-120"/>
+              </a:rPr>
+              <a:t>Guardrails include subgroup analysis, community review, and restrictions on punitive uses.</a:t>
+            </a:r>
+            <a:endParaRPr lang="en-US" sz="1380" dirty="0"/>
           </a:p>
         </p:txBody>
       </p:sp>
       <p:sp>
         <p:nvSpPr>
           <p:cNvPr id="16" name="Shape 14"/>
-          <p:cNvSpPr/>
-          <p:nvPr/>
-        </p:nvSpPr>
-        <p:spPr>
-          <a:xfrm>
-            <a:off x="8366760" y="3639312"/>
-            <a:ext cx="2011680" cy="0"/>
-          </a:xfrm>
-          <a:prstGeom prst="line">
-            <a:avLst/>
-          </a:prstGeom>
-          <a:noFill/>
-          <a:ln w="63500">
-            <a:solidFill>
-              <a:srgbClr val="2F8A28"/>
-            </a:solidFill>
-            <a:prstDash val="solid"/>
-          </a:ln>
-        </p:spPr>
-      </p:sp>
-      <p:sp>
-        <p:nvSpPr>
-          <p:cNvPr id="17" name="Text 15"/>
-          <p:cNvSpPr/>
-          <p:nvPr/>
-        </p:nvSpPr>
-        <p:spPr>
-          <a:xfrm>
-            <a:off x="7909560" y="3849624"/>
-            <a:ext cx="2926080" cy="164592"/>
-          </a:xfrm>
-          <a:prstGeom prst="rect">
-            <a:avLst/>
-          </a:prstGeom>
-          <a:noFill/>
-          <a:ln/>
-        </p:spPr>
-        <p:txBody>
-          <a:bodyPr wrap="square" lIns="0" tIns="0" rIns="0" bIns="0" rtlCol="0" anchor="ctr"/>
-          <a:lstStyle/>
-          <a:p>
-            <a:pPr algn="ctr" indent="0" marL="0">
-              <a:buNone/>
-            </a:pPr>
-            <a:r>
-              <a:rPr lang="en-US" sz="900" dirty="0">
-                <a:solidFill>
-                  <a:srgbClr val="003A63"/>
-                </a:solidFill>
-                <a:latin typeface="Aptos" pitchFamily="34" charset="0"/>
-                <a:ea typeface="Aptos" pitchFamily="34" charset="-122"/>
-                <a:cs typeface="Aptos" pitchFamily="34" charset="-120"/>
-              </a:rPr>
-              <a:t>Human review</a:t>
-            </a:r>
-            <a:endParaRPr lang="en-US" sz="900" dirty="0"/>
-          </a:p>
-        </p:txBody>
-      </p:sp>
-      <p:sp>
-        <p:nvSpPr>
-          <p:cNvPr id="18" name="Shape 16"/>
           <p:cNvSpPr/>
           <p:nvPr/>
         </p:nvSpPr>
@@ -5114,7 +5051,7 @@
       </p:sp>
       <p:sp>
         <p:nvSpPr>
-          <p:cNvPr id="19" name="Text 17"/>
+          <p:cNvPr id="17" name="Text 15"/>
           <p:cNvSpPr/>
           <p:nvPr/>
         </p:nvSpPr>
@@ -5153,7 +5090,7 @@
       </p:sp>
       <p:sp>
         <p:nvSpPr>
-          <p:cNvPr id="20" name="Text 18"/>
+          <p:cNvPr id="18" name="Text 16"/>
           <p:cNvSpPr/>
           <p:nvPr/>
         </p:nvSpPr>
@@ -5661,13 +5598,11 @@
             </a:avLst>
           </a:prstGeom>
           <a:solidFill>
-            <a:srgbClr val="FFFFFF">
-              <a:alpha val="88000"/>
-            </a:srgbClr>
+            <a:srgbClr val="FFFFFF"/>
           </a:solidFill>
           <a:ln w="12700">
             <a:solidFill>
-              <a:srgbClr val="D6E8F2"/>
+              <a:srgbClr val="B9D7E6"/>
             </a:solidFill>
             <a:prstDash val="solid"/>
           </a:ln>
@@ -5675,26 +5610,42 @@
       </p:sp>
       <p:sp>
         <p:nvSpPr>
-          <p:cNvPr id="14" name="Shape 12"/>
-          <p:cNvSpPr/>
-          <p:nvPr/>
-        </p:nvSpPr>
-        <p:spPr>
-          <a:xfrm>
-            <a:off x="8046720" y="3108960"/>
-            <a:ext cx="2651760" cy="896112"/>
-          </a:xfrm>
-          <a:prstGeom prst="arc">
-            <a:avLst/>
-          </a:prstGeom>
-          <a:noFill/>
-          <a:ln w="25400">
-            <a:solidFill>
-              <a:srgbClr val="0068B7"/>
-            </a:solidFill>
-            <a:prstDash val="solid"/>
-          </a:ln>
-        </p:spPr>
+          <p:cNvPr id="14" name="Text 12"/>
+          <p:cNvSpPr/>
+          <p:nvPr/>
+        </p:nvSpPr>
+        <p:spPr>
+          <a:xfrm>
+            <a:off x="7799832" y="2935224"/>
+            <a:ext cx="3145536" cy="256032"/>
+          </a:xfrm>
+          <a:prstGeom prst="rect">
+            <a:avLst/>
+          </a:prstGeom>
+          <a:noFill/>
+          <a:ln/>
+        </p:spPr>
+        <p:txBody>
+          <a:bodyPr wrap="square" lIns="0" tIns="0" rIns="0" bIns="0" rtlCol="0" anchor="ctr"/>
+          <a:lstStyle/>
+          <a:p>
+            <a:pPr indent="0" marL="0">
+              <a:buNone/>
+            </a:pPr>
+            <a:r>
+              <a:rPr lang="en-US" sz="1300" b="1" dirty="0">
+                <a:solidFill>
+                  <a:srgbClr val="0068B7"/>
+                </a:solidFill>
+                <a:latin typeface="Aptos" pitchFamily="34" charset="0"/>
+                <a:ea typeface="Aptos" pitchFamily="34" charset="-122"/>
+                <a:cs typeface="Aptos" pitchFamily="34" charset="-120"/>
+              </a:rPr>
+              <a:t>Concept checkpoints</a:t>
+            </a:r>
+            <a:endParaRPr lang="en-US" sz="1300" dirty="0"/>
+          </a:p>
+        </p:txBody>
       </p:sp>
       <p:sp>
         <p:nvSpPr>
@@ -5704,102 +5655,67 @@
         </p:nvSpPr>
         <p:spPr>
           <a:xfrm>
-            <a:off x="7909560" y="3099816"/>
-            <a:ext cx="2926080" cy="256032"/>
-          </a:xfrm>
-          <a:prstGeom prst="rect">
-            <a:avLst/>
-          </a:prstGeom>
-          <a:noFill/>
-          <a:ln/>
-        </p:spPr>
-        <p:txBody>
-          <a:bodyPr wrap="square" lIns="0" tIns="0" rIns="0" bIns="0" rtlCol="0" anchor="ctr"/>
-          <a:lstStyle/>
-          <a:p>
-            <a:pPr algn="ctr" indent="0" marL="0">
-              <a:buNone/>
-            </a:pPr>
-            <a:r>
-              <a:rPr lang="en-US" sz="1500" b="1" dirty="0">
-                <a:solidFill>
-                  <a:srgbClr val="003A63"/>
-                </a:solidFill>
-                <a:latin typeface="Aptos" pitchFamily="34" charset="0"/>
-                <a:ea typeface="Aptos" pitchFamily="34" charset="-122"/>
-                <a:cs typeface="Aptos" pitchFamily="34" charset="-120"/>
-              </a:rPr>
-              <a:t>Risk</a:t>
-            </a:r>
-            <a:endParaRPr lang="en-US" sz="1500" dirty="0"/>
+            <a:off x="7818120" y="3300984"/>
+            <a:ext cx="3090672" cy="877824"/>
+          </a:xfrm>
+          <a:prstGeom prst="rect">
+            <a:avLst/>
+          </a:prstGeom>
+          <a:noFill/>
+          <a:ln/>
+        </p:spPr>
+        <p:txBody>
+          <a:bodyPr wrap="square" lIns="254" tIns="254" rIns="254" bIns="254" rtlCol="0" anchor="t">
+            <a:normAutofit/>
+          </a:bodyPr>
+          <a:lstStyle/>
+          <a:p>
+            <a:r>
+              <a:rPr lang="en-US" sz="1380" dirty="0">
+                <a:solidFill>
+                  <a:srgbClr val="17364A"/>
+                </a:solidFill>
+                <a:latin typeface="Aptos" pitchFamily="34" charset="0"/>
+                <a:ea typeface="Aptos" pitchFamily="34" charset="-122"/>
+                <a:cs typeface="Aptos" pitchFamily="34" charset="-120"/>
+              </a:rPr>
+              <a:t>Model drift.</a:t>
+            </a:r>
+            <a:endParaRPr lang="en-US" sz="1380" dirty="0"/>
+          </a:p>
+          <a:p>
+            <a:r>
+              <a:rPr lang="en-US" sz="1380" dirty="0">
+                <a:solidFill>
+                  <a:srgbClr val="17364A"/>
+                </a:solidFill>
+                <a:latin typeface="Aptos" pitchFamily="34" charset="0"/>
+                <a:ea typeface="Aptos" pitchFamily="34" charset="-122"/>
+                <a:cs typeface="Aptos" pitchFamily="34" charset="-120"/>
+              </a:rPr>
+              <a:t>Performance may change over time.</a:t>
+            </a:r>
+            <a:endParaRPr lang="en-US" sz="1380" dirty="0"/>
+          </a:p>
+          <a:p>
+            <a:r>
+              <a:rPr lang="en-US" sz="1380" dirty="0">
+                <a:solidFill>
+                  <a:srgbClr val="17364A"/>
+                </a:solidFill>
+                <a:latin typeface="Aptos" pitchFamily="34" charset="0"/>
+                <a:ea typeface="Aptos" pitchFamily="34" charset="-122"/>
+                <a:cs typeface="Aptos" pitchFamily="34" charset="-120"/>
+              </a:rPr>
+              <a:t>Guardrails include periodic recalibration, drift monitoring, and authority to pause or.</a:t>
+            </a:r>
+            <a:endParaRPr lang="en-US" sz="1380" dirty="0"/>
           </a:p>
         </p:txBody>
       </p:sp>
       <p:sp>
         <p:nvSpPr>
           <p:cNvPr id="16" name="Shape 14"/>
-          <p:cNvSpPr/>
-          <p:nvPr/>
-        </p:nvSpPr>
-        <p:spPr>
-          <a:xfrm>
-            <a:off x="8366760" y="3639312"/>
-            <a:ext cx="2011680" cy="0"/>
-          </a:xfrm>
-          <a:prstGeom prst="line">
-            <a:avLst/>
-          </a:prstGeom>
-          <a:noFill/>
-          <a:ln w="63500">
-            <a:solidFill>
-              <a:srgbClr val="2F8A28"/>
-            </a:solidFill>
-            <a:prstDash val="solid"/>
-          </a:ln>
-        </p:spPr>
-      </p:sp>
-      <p:sp>
-        <p:nvSpPr>
-          <p:cNvPr id="17" name="Text 15"/>
-          <p:cNvSpPr/>
-          <p:nvPr/>
-        </p:nvSpPr>
-        <p:spPr>
-          <a:xfrm>
-            <a:off x="7909560" y="3849624"/>
-            <a:ext cx="2926080" cy="164592"/>
-          </a:xfrm>
-          <a:prstGeom prst="rect">
-            <a:avLst/>
-          </a:prstGeom>
-          <a:noFill/>
-          <a:ln/>
-        </p:spPr>
-        <p:txBody>
-          <a:bodyPr wrap="square" lIns="0" tIns="0" rIns="0" bIns="0" rtlCol="0" anchor="ctr"/>
-          <a:lstStyle/>
-          <a:p>
-            <a:pPr algn="ctr" indent="0" marL="0">
-              <a:buNone/>
-            </a:pPr>
-            <a:r>
-              <a:rPr lang="en-US" sz="900" dirty="0">
-                <a:solidFill>
-                  <a:srgbClr val="003A63"/>
-                </a:solidFill>
-                <a:latin typeface="Aptos" pitchFamily="34" charset="0"/>
-                <a:ea typeface="Aptos" pitchFamily="34" charset="-122"/>
-                <a:cs typeface="Aptos" pitchFamily="34" charset="-120"/>
-              </a:rPr>
-              <a:t>Human review</a:t>
-            </a:r>
-            <a:endParaRPr lang="en-US" sz="900" dirty="0"/>
-          </a:p>
-        </p:txBody>
-      </p:sp>
-      <p:sp>
-        <p:nvSpPr>
-          <p:cNvPr id="18" name="Shape 16"/>
           <p:cNvSpPr/>
           <p:nvPr/>
         </p:nvSpPr>
@@ -5826,7 +5742,7 @@
       </p:sp>
       <p:sp>
         <p:nvSpPr>
-          <p:cNvPr id="19" name="Text 17"/>
+          <p:cNvPr id="17" name="Text 15"/>
           <p:cNvSpPr/>
           <p:nvPr/>
         </p:nvSpPr>
@@ -5865,7 +5781,7 @@
       </p:sp>
       <p:sp>
         <p:nvSpPr>
-          <p:cNvPr id="20" name="Text 18"/>
+          <p:cNvPr id="18" name="Text 16"/>
           <p:cNvSpPr/>
           <p:nvPr/>
         </p:nvSpPr>
@@ -6373,13 +6289,11 @@
             </a:avLst>
           </a:prstGeom>
           <a:solidFill>
-            <a:srgbClr val="FFFFFF">
-              <a:alpha val="88000"/>
-            </a:srgbClr>
+            <a:srgbClr val="FFFFFF"/>
           </a:solidFill>
           <a:ln w="12700">
             <a:solidFill>
-              <a:srgbClr val="D6E8F2"/>
+              <a:srgbClr val="B9D7E6"/>
             </a:solidFill>
             <a:prstDash val="solid"/>
           </a:ln>
@@ -6387,26 +6301,42 @@
       </p:sp>
       <p:sp>
         <p:nvSpPr>
-          <p:cNvPr id="14" name="Shape 12"/>
-          <p:cNvSpPr/>
-          <p:nvPr/>
-        </p:nvSpPr>
-        <p:spPr>
-          <a:xfrm>
-            <a:off x="8046720" y="3108960"/>
-            <a:ext cx="2651760" cy="896112"/>
-          </a:xfrm>
-          <a:prstGeom prst="arc">
-            <a:avLst/>
-          </a:prstGeom>
-          <a:noFill/>
-          <a:ln w="25400">
-            <a:solidFill>
-              <a:srgbClr val="0068B7"/>
-            </a:solidFill>
-            <a:prstDash val="solid"/>
-          </a:ln>
-        </p:spPr>
+          <p:cNvPr id="14" name="Text 12"/>
+          <p:cNvSpPr/>
+          <p:nvPr/>
+        </p:nvSpPr>
+        <p:spPr>
+          <a:xfrm>
+            <a:off x="7799832" y="2935224"/>
+            <a:ext cx="3145536" cy="256032"/>
+          </a:xfrm>
+          <a:prstGeom prst="rect">
+            <a:avLst/>
+          </a:prstGeom>
+          <a:noFill/>
+          <a:ln/>
+        </p:spPr>
+        <p:txBody>
+          <a:bodyPr wrap="square" lIns="0" tIns="0" rIns="0" bIns="0" rtlCol="0" anchor="ctr"/>
+          <a:lstStyle/>
+          <a:p>
+            <a:pPr indent="0" marL="0">
+              <a:buNone/>
+            </a:pPr>
+            <a:r>
+              <a:rPr lang="en-US" sz="1300" b="1" dirty="0">
+                <a:solidFill>
+                  <a:srgbClr val="0068B7"/>
+                </a:solidFill>
+                <a:latin typeface="Aptos" pitchFamily="34" charset="0"/>
+                <a:ea typeface="Aptos" pitchFamily="34" charset="-122"/>
+                <a:cs typeface="Aptos" pitchFamily="34" charset="-120"/>
+              </a:rPr>
+              <a:t>Concept checkpoints</a:t>
+            </a:r>
+            <a:endParaRPr lang="en-US" sz="1300" dirty="0"/>
+          </a:p>
+        </p:txBody>
       </p:sp>
       <p:sp>
         <p:nvSpPr>
@@ -6416,102 +6346,67 @@
         </p:nvSpPr>
         <p:spPr>
           <a:xfrm>
-            <a:off x="7909560" y="3099816"/>
-            <a:ext cx="2926080" cy="256032"/>
-          </a:xfrm>
-          <a:prstGeom prst="rect">
-            <a:avLst/>
-          </a:prstGeom>
-          <a:noFill/>
-          <a:ln/>
-        </p:spPr>
-        <p:txBody>
-          <a:bodyPr wrap="square" lIns="0" tIns="0" rIns="0" bIns="0" rtlCol="0" anchor="ctr"/>
-          <a:lstStyle/>
-          <a:p>
-            <a:pPr algn="ctr" indent="0" marL="0">
-              <a:buNone/>
-            </a:pPr>
-            <a:r>
-              <a:rPr lang="en-US" sz="1500" b="1" dirty="0">
-                <a:solidFill>
-                  <a:srgbClr val="003A63"/>
-                </a:solidFill>
-                <a:latin typeface="Aptos" pitchFamily="34" charset="0"/>
-                <a:ea typeface="Aptos" pitchFamily="34" charset="-122"/>
-                <a:cs typeface="Aptos" pitchFamily="34" charset="-120"/>
-              </a:rPr>
-              <a:t>Risk</a:t>
-            </a:r>
-            <a:endParaRPr lang="en-US" sz="1500" dirty="0"/>
+            <a:off x="7818120" y="3300984"/>
+            <a:ext cx="3090672" cy="877824"/>
+          </a:xfrm>
+          <a:prstGeom prst="rect">
+            <a:avLst/>
+          </a:prstGeom>
+          <a:noFill/>
+          <a:ln/>
+        </p:spPr>
+        <p:txBody>
+          <a:bodyPr wrap="square" lIns="254" tIns="254" rIns="254" bIns="254" rtlCol="0" anchor="t">
+            <a:normAutofit/>
+          </a:bodyPr>
+          <a:lstStyle/>
+          <a:p>
+            <a:r>
+              <a:rPr lang="en-US" sz="1380" dirty="0">
+                <a:solidFill>
+                  <a:srgbClr val="17364A"/>
+                </a:solidFill>
+                <a:latin typeface="Aptos" pitchFamily="34" charset="0"/>
+                <a:ea typeface="Aptos" pitchFamily="34" charset="-122"/>
+                <a:cs typeface="Aptos" pitchFamily="34" charset="-120"/>
+              </a:rPr>
+              <a:t>Predictive analytics may be embedded in dashboards, case management systems, early warning.</a:t>
+            </a:r>
+            <a:endParaRPr lang="en-US" sz="1380" dirty="0"/>
+          </a:p>
+          <a:p>
+            <a:r>
+              <a:rPr lang="en-US" sz="1380" dirty="0">
+                <a:solidFill>
+                  <a:srgbClr val="17364A"/>
+                </a:solidFill>
+                <a:latin typeface="Aptos" pitchFamily="34" charset="0"/>
+                <a:ea typeface="Aptos" pitchFamily="34" charset="-122"/>
+                <a:cs typeface="Aptos" pitchFamily="34" charset="-120"/>
+              </a:rPr>
+              <a:t>Generative AI may explain or summarize predictive outputs, but those explanations must not.</a:t>
+            </a:r>
+            <a:endParaRPr lang="en-US" sz="1380" dirty="0"/>
+          </a:p>
+          <a:p>
+            <a:r>
+              <a:rPr lang="en-US" sz="1380" dirty="0">
+                <a:solidFill>
+                  <a:srgbClr val="17364A"/>
+                </a:solidFill>
+                <a:latin typeface="Aptos" pitchFamily="34" charset="0"/>
+                <a:ea typeface="Aptos" pitchFamily="34" charset="-122"/>
+                <a:cs typeface="Aptos" pitchFamily="34" charset="-120"/>
+              </a:rPr>
+              <a:t>RAG systems may combine risk results with policy guidance, while agentic workflows may.</a:t>
+            </a:r>
+            <a:endParaRPr lang="en-US" sz="1380" dirty="0"/>
           </a:p>
         </p:txBody>
       </p:sp>
       <p:sp>
         <p:nvSpPr>
           <p:cNvPr id="16" name="Shape 14"/>
-          <p:cNvSpPr/>
-          <p:nvPr/>
-        </p:nvSpPr>
-        <p:spPr>
-          <a:xfrm>
-            <a:off x="8366760" y="3639312"/>
-            <a:ext cx="2011680" cy="0"/>
-          </a:xfrm>
-          <a:prstGeom prst="line">
-            <a:avLst/>
-          </a:prstGeom>
-          <a:noFill/>
-          <a:ln w="63500">
-            <a:solidFill>
-              <a:srgbClr val="2F8A28"/>
-            </a:solidFill>
-            <a:prstDash val="solid"/>
-          </a:ln>
-        </p:spPr>
-      </p:sp>
-      <p:sp>
-        <p:nvSpPr>
-          <p:cNvPr id="17" name="Text 15"/>
-          <p:cNvSpPr/>
-          <p:nvPr/>
-        </p:nvSpPr>
-        <p:spPr>
-          <a:xfrm>
-            <a:off x="7909560" y="3849624"/>
-            <a:ext cx="2926080" cy="164592"/>
-          </a:xfrm>
-          <a:prstGeom prst="rect">
-            <a:avLst/>
-          </a:prstGeom>
-          <a:noFill/>
-          <a:ln/>
-        </p:spPr>
-        <p:txBody>
-          <a:bodyPr wrap="square" lIns="0" tIns="0" rIns="0" bIns="0" rtlCol="0" anchor="ctr"/>
-          <a:lstStyle/>
-          <a:p>
-            <a:pPr algn="ctr" indent="0" marL="0">
-              <a:buNone/>
-            </a:pPr>
-            <a:r>
-              <a:rPr lang="en-US" sz="900" dirty="0">
-                <a:solidFill>
-                  <a:srgbClr val="003A63"/>
-                </a:solidFill>
-                <a:latin typeface="Aptos" pitchFamily="34" charset="0"/>
-                <a:ea typeface="Aptos" pitchFamily="34" charset="-122"/>
-                <a:cs typeface="Aptos" pitchFamily="34" charset="-120"/>
-              </a:rPr>
-              <a:t>Human review</a:t>
-            </a:r>
-            <a:endParaRPr lang="en-US" sz="900" dirty="0"/>
-          </a:p>
-        </p:txBody>
-      </p:sp>
-      <p:sp>
-        <p:nvSpPr>
-          <p:cNvPr id="18" name="Shape 16"/>
           <p:cNvSpPr/>
           <p:nvPr/>
         </p:nvSpPr>
@@ -6538,7 +6433,7 @@
       </p:sp>
       <p:sp>
         <p:nvSpPr>
-          <p:cNvPr id="19" name="Text 17"/>
+          <p:cNvPr id="17" name="Text 15"/>
           <p:cNvSpPr/>
           <p:nvPr/>
         </p:nvSpPr>
@@ -6577,7 +6472,7 @@
       </p:sp>
       <p:sp>
         <p:nvSpPr>
-          <p:cNvPr id="20" name="Text 18"/>
+          <p:cNvPr id="18" name="Text 16"/>
           <p:cNvSpPr/>
           <p:nvPr/>
         </p:nvSpPr>
@@ -7085,13 +6980,11 @@
             </a:avLst>
           </a:prstGeom>
           <a:solidFill>
-            <a:srgbClr val="FFFFFF">
-              <a:alpha val="88000"/>
-            </a:srgbClr>
+            <a:srgbClr val="FFFFFF"/>
           </a:solidFill>
           <a:ln w="12700">
             <a:solidFill>
-              <a:srgbClr val="D6E8F2"/>
+              <a:srgbClr val="B9D7E6"/>
             </a:solidFill>
             <a:prstDash val="solid"/>
           </a:ln>
@@ -7099,26 +6992,42 @@
       </p:sp>
       <p:sp>
         <p:nvSpPr>
-          <p:cNvPr id="14" name="Shape 12"/>
-          <p:cNvSpPr/>
-          <p:nvPr/>
-        </p:nvSpPr>
-        <p:spPr>
-          <a:xfrm>
-            <a:off x="8046720" y="3108960"/>
-            <a:ext cx="2651760" cy="896112"/>
-          </a:xfrm>
-          <a:prstGeom prst="arc">
-            <a:avLst/>
-          </a:prstGeom>
-          <a:noFill/>
-          <a:ln w="25400">
-            <a:solidFill>
-              <a:srgbClr val="0068B7"/>
-            </a:solidFill>
-            <a:prstDash val="solid"/>
-          </a:ln>
-        </p:spPr>
+          <p:cNvPr id="14" name="Text 12"/>
+          <p:cNvSpPr/>
+          <p:nvPr/>
+        </p:nvSpPr>
+        <p:spPr>
+          <a:xfrm>
+            <a:off x="7799832" y="2935224"/>
+            <a:ext cx="3145536" cy="256032"/>
+          </a:xfrm>
+          <a:prstGeom prst="rect">
+            <a:avLst/>
+          </a:prstGeom>
+          <a:noFill/>
+          <a:ln/>
+        </p:spPr>
+        <p:txBody>
+          <a:bodyPr wrap="square" lIns="0" tIns="0" rIns="0" bIns="0" rtlCol="0" anchor="ctr"/>
+          <a:lstStyle/>
+          <a:p>
+            <a:pPr indent="0" marL="0">
+              <a:buNone/>
+            </a:pPr>
+            <a:r>
+              <a:rPr lang="en-US" sz="1300" b="1" dirty="0">
+                <a:solidFill>
+                  <a:srgbClr val="0068B7"/>
+                </a:solidFill>
+                <a:latin typeface="Aptos" pitchFamily="34" charset="0"/>
+                <a:ea typeface="Aptos" pitchFamily="34" charset="-122"/>
+                <a:cs typeface="Aptos" pitchFamily="34" charset="-120"/>
+              </a:rPr>
+              <a:t>Concept checkpoints</a:t>
+            </a:r>
+            <a:endParaRPr lang="en-US" sz="1300" dirty="0"/>
+          </a:p>
+        </p:txBody>
       </p:sp>
       <p:sp>
         <p:nvSpPr>
@@ -7128,102 +7037,67 @@
         </p:nvSpPr>
         <p:spPr>
           <a:xfrm>
-            <a:off x="7909560" y="3099816"/>
-            <a:ext cx="2926080" cy="256032"/>
-          </a:xfrm>
-          <a:prstGeom prst="rect">
-            <a:avLst/>
-          </a:prstGeom>
-          <a:noFill/>
-          <a:ln/>
-        </p:spPr>
-        <p:txBody>
-          <a:bodyPr wrap="square" lIns="0" tIns="0" rIns="0" bIns="0" rtlCol="0" anchor="ctr"/>
-          <a:lstStyle/>
-          <a:p>
-            <a:pPr algn="ctr" indent="0" marL="0">
-              <a:buNone/>
-            </a:pPr>
-            <a:r>
-              <a:rPr lang="en-US" sz="1500" b="1" dirty="0">
-                <a:solidFill>
-                  <a:srgbClr val="003A63"/>
-                </a:solidFill>
-                <a:latin typeface="Aptos" pitchFamily="34" charset="0"/>
-                <a:ea typeface="Aptos" pitchFamily="34" charset="-122"/>
-                <a:cs typeface="Aptos" pitchFamily="34" charset="-120"/>
-              </a:rPr>
-              <a:t>Risk</a:t>
-            </a:r>
-            <a:endParaRPr lang="en-US" sz="1500" dirty="0"/>
+            <a:off x="7818120" y="3300984"/>
+            <a:ext cx="3090672" cy="877824"/>
+          </a:xfrm>
+          <a:prstGeom prst="rect">
+            <a:avLst/>
+          </a:prstGeom>
+          <a:noFill/>
+          <a:ln/>
+        </p:spPr>
+        <p:txBody>
+          <a:bodyPr wrap="square" lIns="254" tIns="254" rIns="254" bIns="254" rtlCol="0" anchor="t">
+            <a:normAutofit/>
+          </a:bodyPr>
+          <a:lstStyle/>
+          <a:p>
+            <a:r>
+              <a:rPr lang="en-US" sz="1380" dirty="0">
+                <a:solidFill>
+                  <a:srgbClr val="17364A"/>
+                </a:solidFill>
+                <a:latin typeface="Aptos" pitchFamily="34" charset="0"/>
+                <a:ea typeface="Aptos" pitchFamily="34" charset="-122"/>
+                <a:cs typeface="Aptos" pitchFamily="34" charset="-120"/>
+              </a:rPr>
+              <a:t>What outcome is being predicted, and over what time period?</a:t>
+            </a:r>
+            <a:endParaRPr lang="en-US" sz="1380" dirty="0"/>
+          </a:p>
+          <a:p>
+            <a:r>
+              <a:rPr lang="en-US" sz="1380" dirty="0">
+                <a:solidFill>
+                  <a:srgbClr val="17364A"/>
+                </a:solidFill>
+                <a:latin typeface="Aptos" pitchFamily="34" charset="0"/>
+                <a:ea typeface="Aptos" pitchFamily="34" charset="-122"/>
+                <a:cs typeface="Aptos" pitchFamily="34" charset="-120"/>
+              </a:rPr>
+              <a:t>What public health action will follow a high-risk score?</a:t>
+            </a:r>
+            <a:endParaRPr lang="en-US" sz="1380" dirty="0"/>
+          </a:p>
+          <a:p>
+            <a:r>
+              <a:rPr lang="en-US" sz="1380" dirty="0">
+                <a:solidFill>
+                  <a:srgbClr val="17364A"/>
+                </a:solidFill>
+                <a:latin typeface="Aptos" pitchFamily="34" charset="0"/>
+                <a:ea typeface="Aptos" pitchFamily="34" charset="-122"/>
+                <a:cs typeface="Aptos" pitchFamily="34" charset="-120"/>
+              </a:rPr>
+              <a:t>Which data sources may underrepresent some populations?</a:t>
+            </a:r>
+            <a:endParaRPr lang="en-US" sz="1380" dirty="0"/>
           </a:p>
         </p:txBody>
       </p:sp>
       <p:sp>
         <p:nvSpPr>
           <p:cNvPr id="16" name="Shape 14"/>
-          <p:cNvSpPr/>
-          <p:nvPr/>
-        </p:nvSpPr>
-        <p:spPr>
-          <a:xfrm>
-            <a:off x="8366760" y="3639312"/>
-            <a:ext cx="2011680" cy="0"/>
-          </a:xfrm>
-          <a:prstGeom prst="line">
-            <a:avLst/>
-          </a:prstGeom>
-          <a:noFill/>
-          <a:ln w="63500">
-            <a:solidFill>
-              <a:srgbClr val="2F8A28"/>
-            </a:solidFill>
-            <a:prstDash val="solid"/>
-          </a:ln>
-        </p:spPr>
-      </p:sp>
-      <p:sp>
-        <p:nvSpPr>
-          <p:cNvPr id="17" name="Text 15"/>
-          <p:cNvSpPr/>
-          <p:nvPr/>
-        </p:nvSpPr>
-        <p:spPr>
-          <a:xfrm>
-            <a:off x="7909560" y="3849624"/>
-            <a:ext cx="2926080" cy="164592"/>
-          </a:xfrm>
-          <a:prstGeom prst="rect">
-            <a:avLst/>
-          </a:prstGeom>
-          <a:noFill/>
-          <a:ln/>
-        </p:spPr>
-        <p:txBody>
-          <a:bodyPr wrap="square" lIns="0" tIns="0" rIns="0" bIns="0" rtlCol="0" anchor="ctr"/>
-          <a:lstStyle/>
-          <a:p>
-            <a:pPr algn="ctr" indent="0" marL="0">
-              <a:buNone/>
-            </a:pPr>
-            <a:r>
-              <a:rPr lang="en-US" sz="900" dirty="0">
-                <a:solidFill>
-                  <a:srgbClr val="003A63"/>
-                </a:solidFill>
-                <a:latin typeface="Aptos" pitchFamily="34" charset="0"/>
-                <a:ea typeface="Aptos" pitchFamily="34" charset="-122"/>
-                <a:cs typeface="Aptos" pitchFamily="34" charset="-120"/>
-              </a:rPr>
-              <a:t>Human review</a:t>
-            </a:r>
-            <a:endParaRPr lang="en-US" sz="900" dirty="0"/>
-          </a:p>
-        </p:txBody>
-      </p:sp>
-      <p:sp>
-        <p:nvSpPr>
-          <p:cNvPr id="18" name="Shape 16"/>
           <p:cNvSpPr/>
           <p:nvPr/>
         </p:nvSpPr>
@@ -7250,7 +7124,7 @@
       </p:sp>
       <p:sp>
         <p:nvSpPr>
-          <p:cNvPr id="19" name="Text 17"/>
+          <p:cNvPr id="17" name="Text 15"/>
           <p:cNvSpPr/>
           <p:nvPr/>
         </p:nvSpPr>
@@ -7289,7 +7163,7 @@
       </p:sp>
       <p:sp>
         <p:nvSpPr>
-          <p:cNvPr id="20" name="Text 18"/>
+          <p:cNvPr id="18" name="Text 16"/>
           <p:cNvSpPr/>
           <p:nvPr/>
         </p:nvSpPr>
@@ -7783,13 +7657,11 @@
             </a:avLst>
           </a:prstGeom>
           <a:solidFill>
-            <a:srgbClr val="FFFFFF">
-              <a:alpha val="88000"/>
-            </a:srgbClr>
+            <a:srgbClr val="FFFFFF"/>
           </a:solidFill>
           <a:ln w="12700">
             <a:solidFill>
-              <a:srgbClr val="D6E8F2"/>
+              <a:srgbClr val="B9D7E6"/>
             </a:solidFill>
             <a:prstDash val="solid"/>
           </a:ln>
@@ -7797,26 +7669,42 @@
       </p:sp>
       <p:sp>
         <p:nvSpPr>
-          <p:cNvPr id="14" name="Shape 12"/>
-          <p:cNvSpPr/>
-          <p:nvPr/>
-        </p:nvSpPr>
-        <p:spPr>
-          <a:xfrm>
-            <a:off x="8046720" y="3108960"/>
-            <a:ext cx="2651760" cy="896112"/>
-          </a:xfrm>
-          <a:prstGeom prst="arc">
-            <a:avLst/>
-          </a:prstGeom>
-          <a:noFill/>
-          <a:ln w="25400">
-            <a:solidFill>
-              <a:srgbClr val="0068B7"/>
-            </a:solidFill>
-            <a:prstDash val="solid"/>
-          </a:ln>
-        </p:spPr>
+          <p:cNvPr id="14" name="Text 12"/>
+          <p:cNvSpPr/>
+          <p:nvPr/>
+        </p:nvSpPr>
+        <p:spPr>
+          <a:xfrm>
+            <a:off x="7799832" y="2935224"/>
+            <a:ext cx="3145536" cy="256032"/>
+          </a:xfrm>
+          <a:prstGeom prst="rect">
+            <a:avLst/>
+          </a:prstGeom>
+          <a:noFill/>
+          <a:ln/>
+        </p:spPr>
+        <p:txBody>
+          <a:bodyPr wrap="square" lIns="0" tIns="0" rIns="0" bIns="0" rtlCol="0" anchor="ctr"/>
+          <a:lstStyle/>
+          <a:p>
+            <a:pPr indent="0" marL="0">
+              <a:buNone/>
+            </a:pPr>
+            <a:r>
+              <a:rPr lang="en-US" sz="1300" b="1" dirty="0">
+                <a:solidFill>
+                  <a:srgbClr val="0068B7"/>
+                </a:solidFill>
+                <a:latin typeface="Aptos" pitchFamily="34" charset="0"/>
+                <a:ea typeface="Aptos" pitchFamily="34" charset="-122"/>
+                <a:cs typeface="Aptos" pitchFamily="34" charset="-120"/>
+              </a:rPr>
+              <a:t>Concept checkpoints</a:t>
+            </a:r>
+            <a:endParaRPr lang="en-US" sz="1300" dirty="0"/>
+          </a:p>
+        </p:txBody>
       </p:sp>
       <p:sp>
         <p:nvSpPr>
@@ -7826,102 +7714,53 @@
         </p:nvSpPr>
         <p:spPr>
           <a:xfrm>
-            <a:off x="7909560" y="3099816"/>
-            <a:ext cx="2926080" cy="256032"/>
-          </a:xfrm>
-          <a:prstGeom prst="rect">
-            <a:avLst/>
-          </a:prstGeom>
-          <a:noFill/>
-          <a:ln/>
-        </p:spPr>
-        <p:txBody>
-          <a:bodyPr wrap="square" lIns="0" tIns="0" rIns="0" bIns="0" rtlCol="0" anchor="ctr"/>
-          <a:lstStyle/>
-          <a:p>
-            <a:pPr algn="ctr" indent="0" marL="0">
-              <a:buNone/>
-            </a:pPr>
-            <a:r>
-              <a:rPr lang="en-US" sz="1500" b="1" dirty="0">
-                <a:solidFill>
-                  <a:srgbClr val="003A63"/>
-                </a:solidFill>
-                <a:latin typeface="Aptos" pitchFamily="34" charset="0"/>
-                <a:ea typeface="Aptos" pitchFamily="34" charset="-122"/>
-                <a:cs typeface="Aptos" pitchFamily="34" charset="-120"/>
-              </a:rPr>
-              <a:t>Risk</a:t>
-            </a:r>
-            <a:endParaRPr lang="en-US" sz="1500" dirty="0"/>
+            <a:off x="7818120" y="3300984"/>
+            <a:ext cx="3090672" cy="877824"/>
+          </a:xfrm>
+          <a:prstGeom prst="rect">
+            <a:avLst/>
+          </a:prstGeom>
+          <a:noFill/>
+          <a:ln/>
+        </p:spPr>
+        <p:txBody>
+          <a:bodyPr wrap="square" lIns="254" tIns="254" rIns="254" bIns="254" rtlCol="0" anchor="t">
+            <a:normAutofit/>
+          </a:bodyPr>
+          <a:lstStyle/>
+          <a:p>
+            <a:r>
+              <a:rPr lang="en-US" sz="1380" dirty="0">
+                <a:solidFill>
+                  <a:srgbClr val="17364A"/>
+                </a:solidFill>
+                <a:latin typeface="Aptos" pitchFamily="34" charset="0"/>
+                <a:ea typeface="Aptos" pitchFamily="34" charset="-122"/>
+                <a:cs typeface="Aptos" pitchFamily="34" charset="-120"/>
+              </a:rPr>
+              <a:t>What are the consequences of false positives and false negatives?</a:t>
+            </a:r>
+            <a:endParaRPr lang="en-US" sz="1380" dirty="0"/>
+          </a:p>
+          <a:p>
+            <a:r>
+              <a:rPr lang="en-US" sz="1380" dirty="0">
+                <a:solidFill>
+                  <a:srgbClr val="17364A"/>
+                </a:solidFill>
+                <a:latin typeface="Aptos" pitchFamily="34" charset="0"/>
+                <a:ea typeface="Aptos" pitchFamily="34" charset="-122"/>
+                <a:cs typeface="Aptos" pitchFamily="34" charset="-120"/>
+              </a:rPr>
+              <a:t>How will thresholds, calibration, and subgroup performance be monitored?</a:t>
+            </a:r>
+            <a:endParaRPr lang="en-US" sz="1380" dirty="0"/>
           </a:p>
         </p:txBody>
       </p:sp>
       <p:sp>
         <p:nvSpPr>
           <p:cNvPr id="16" name="Shape 14"/>
-          <p:cNvSpPr/>
-          <p:nvPr/>
-        </p:nvSpPr>
-        <p:spPr>
-          <a:xfrm>
-            <a:off x="8366760" y="3639312"/>
-            <a:ext cx="2011680" cy="0"/>
-          </a:xfrm>
-          <a:prstGeom prst="line">
-            <a:avLst/>
-          </a:prstGeom>
-          <a:noFill/>
-          <a:ln w="63500">
-            <a:solidFill>
-              <a:srgbClr val="2F8A28"/>
-            </a:solidFill>
-            <a:prstDash val="solid"/>
-          </a:ln>
-        </p:spPr>
-      </p:sp>
-      <p:sp>
-        <p:nvSpPr>
-          <p:cNvPr id="17" name="Text 15"/>
-          <p:cNvSpPr/>
-          <p:nvPr/>
-        </p:nvSpPr>
-        <p:spPr>
-          <a:xfrm>
-            <a:off x="7909560" y="3849624"/>
-            <a:ext cx="2926080" cy="164592"/>
-          </a:xfrm>
-          <a:prstGeom prst="rect">
-            <a:avLst/>
-          </a:prstGeom>
-          <a:noFill/>
-          <a:ln/>
-        </p:spPr>
-        <p:txBody>
-          <a:bodyPr wrap="square" lIns="0" tIns="0" rIns="0" bIns="0" rtlCol="0" anchor="ctr"/>
-          <a:lstStyle/>
-          <a:p>
-            <a:pPr algn="ctr" indent="0" marL="0">
-              <a:buNone/>
-            </a:pPr>
-            <a:r>
-              <a:rPr lang="en-US" sz="900" dirty="0">
-                <a:solidFill>
-                  <a:srgbClr val="003A63"/>
-                </a:solidFill>
-                <a:latin typeface="Aptos" pitchFamily="34" charset="0"/>
-                <a:ea typeface="Aptos" pitchFamily="34" charset="-122"/>
-                <a:cs typeface="Aptos" pitchFamily="34" charset="-120"/>
-              </a:rPr>
-              <a:t>Human review</a:t>
-            </a:r>
-            <a:endParaRPr lang="en-US" sz="900" dirty="0"/>
-          </a:p>
-        </p:txBody>
-      </p:sp>
-      <p:sp>
-        <p:nvSpPr>
-          <p:cNvPr id="18" name="Shape 16"/>
           <p:cNvSpPr/>
           <p:nvPr/>
         </p:nvSpPr>
@@ -7948,7 +7787,7 @@
       </p:sp>
       <p:sp>
         <p:nvSpPr>
-          <p:cNvPr id="19" name="Text 17"/>
+          <p:cNvPr id="17" name="Text 15"/>
           <p:cNvSpPr/>
           <p:nvPr/>
         </p:nvSpPr>
@@ -7987,7 +7826,7 @@
       </p:sp>
       <p:sp>
         <p:nvSpPr>
-          <p:cNvPr id="20" name="Text 18"/>
+          <p:cNvPr id="18" name="Text 16"/>
           <p:cNvSpPr/>
           <p:nvPr/>
         </p:nvSpPr>
@@ -8495,13 +8334,11 @@
             </a:avLst>
           </a:prstGeom>
           <a:solidFill>
-            <a:srgbClr val="FFFFFF">
-              <a:alpha val="88000"/>
-            </a:srgbClr>
+            <a:srgbClr val="FFFFFF"/>
           </a:solidFill>
           <a:ln w="12700">
             <a:solidFill>
-              <a:srgbClr val="D6E8F2"/>
+              <a:srgbClr val="B9D7E6"/>
             </a:solidFill>
             <a:prstDash val="solid"/>
           </a:ln>
@@ -8509,26 +8346,42 @@
       </p:sp>
       <p:sp>
         <p:nvSpPr>
-          <p:cNvPr id="14" name="Shape 12"/>
-          <p:cNvSpPr/>
-          <p:nvPr/>
-        </p:nvSpPr>
-        <p:spPr>
-          <a:xfrm>
-            <a:off x="8046720" y="3108960"/>
-            <a:ext cx="2651760" cy="896112"/>
-          </a:xfrm>
-          <a:prstGeom prst="arc">
-            <a:avLst/>
-          </a:prstGeom>
-          <a:noFill/>
-          <a:ln w="25400">
-            <a:solidFill>
-              <a:srgbClr val="0068B7"/>
-            </a:solidFill>
-            <a:prstDash val="solid"/>
-          </a:ln>
-        </p:spPr>
+          <p:cNvPr id="14" name="Text 12"/>
+          <p:cNvSpPr/>
+          <p:nvPr/>
+        </p:nvSpPr>
+        <p:spPr>
+          <a:xfrm>
+            <a:off x="7799832" y="2935224"/>
+            <a:ext cx="3145536" cy="256032"/>
+          </a:xfrm>
+          <a:prstGeom prst="rect">
+            <a:avLst/>
+          </a:prstGeom>
+          <a:noFill/>
+          <a:ln/>
+        </p:spPr>
+        <p:txBody>
+          <a:bodyPr wrap="square" lIns="0" tIns="0" rIns="0" bIns="0" rtlCol="0" anchor="ctr"/>
+          <a:lstStyle/>
+          <a:p>
+            <a:pPr indent="0" marL="0">
+              <a:buNone/>
+            </a:pPr>
+            <a:r>
+              <a:rPr lang="en-US" sz="1300" b="1" dirty="0">
+                <a:solidFill>
+                  <a:srgbClr val="0068B7"/>
+                </a:solidFill>
+                <a:latin typeface="Aptos" pitchFamily="34" charset="0"/>
+                <a:ea typeface="Aptos" pitchFamily="34" charset="-122"/>
+                <a:cs typeface="Aptos" pitchFamily="34" charset="-120"/>
+              </a:rPr>
+              <a:t>Concept checkpoints</a:t>
+            </a:r>
+            <a:endParaRPr lang="en-US" sz="1300" dirty="0"/>
+          </a:p>
+        </p:txBody>
       </p:sp>
       <p:sp>
         <p:nvSpPr>
@@ -8538,102 +8391,53 @@
         </p:nvSpPr>
         <p:spPr>
           <a:xfrm>
-            <a:off x="7909560" y="3099816"/>
-            <a:ext cx="2926080" cy="256032"/>
-          </a:xfrm>
-          <a:prstGeom prst="rect">
-            <a:avLst/>
-          </a:prstGeom>
-          <a:noFill/>
-          <a:ln/>
-        </p:spPr>
-        <p:txBody>
-          <a:bodyPr wrap="square" lIns="0" tIns="0" rIns="0" bIns="0" rtlCol="0" anchor="ctr"/>
-          <a:lstStyle/>
-          <a:p>
-            <a:pPr algn="ctr" indent="0" marL="0">
-              <a:buNone/>
-            </a:pPr>
-            <a:r>
-              <a:rPr lang="en-US" sz="1500" b="1" dirty="0">
-                <a:solidFill>
-                  <a:srgbClr val="003A63"/>
-                </a:solidFill>
-                <a:latin typeface="Aptos" pitchFamily="34" charset="0"/>
-                <a:ea typeface="Aptos" pitchFamily="34" charset="-122"/>
-                <a:cs typeface="Aptos" pitchFamily="34" charset="-120"/>
-              </a:rPr>
-              <a:t>Risk</a:t>
-            </a:r>
-            <a:endParaRPr lang="en-US" sz="1500" dirty="0"/>
+            <a:off x="7818120" y="3300984"/>
+            <a:ext cx="3090672" cy="877824"/>
+          </a:xfrm>
+          <a:prstGeom prst="rect">
+            <a:avLst/>
+          </a:prstGeom>
+          <a:noFill/>
+          <a:ln/>
+        </p:spPr>
+        <p:txBody>
+          <a:bodyPr wrap="square" lIns="254" tIns="254" rIns="254" bIns="254" rtlCol="0" anchor="t">
+            <a:normAutofit/>
+          </a:bodyPr>
+          <a:lstStyle/>
+          <a:p>
+            <a:r>
+              <a:rPr lang="en-US" sz="1380" dirty="0">
+                <a:solidFill>
+                  <a:srgbClr val="17364A"/>
+                </a:solidFill>
+                <a:latin typeface="Aptos" pitchFamily="34" charset="0"/>
+                <a:ea typeface="Aptos" pitchFamily="34" charset="-122"/>
+                <a:cs typeface="Aptos" pitchFamily="34" charset="-120"/>
+              </a:rPr>
+              <a:t>Include the outcome, population, time horizon, data sources, candidate features, risk.</a:t>
+            </a:r>
+            <a:endParaRPr lang="en-US" sz="1380" dirty="0"/>
+          </a:p>
+          <a:p>
+            <a:r>
+              <a:rPr lang="en-US" sz="1380" dirty="0">
+                <a:solidFill>
+                  <a:srgbClr val="17364A"/>
+                </a:solidFill>
+                <a:latin typeface="Aptos" pitchFamily="34" charset="0"/>
+                <a:ea typeface="Aptos" pitchFamily="34" charset="-122"/>
+                <a:cs typeface="Aptos" pitchFamily="34" charset="-120"/>
+              </a:rPr>
+              <a:t>Predictive tools used to allocate supportive resources have different risk profiles than.</a:t>
+            </a:r>
+            <a:endParaRPr lang="en-US" sz="1380" dirty="0"/>
           </a:p>
         </p:txBody>
       </p:sp>
       <p:sp>
         <p:nvSpPr>
           <p:cNvPr id="16" name="Shape 14"/>
-          <p:cNvSpPr/>
-          <p:nvPr/>
-        </p:nvSpPr>
-        <p:spPr>
-          <a:xfrm>
-            <a:off x="8366760" y="3639312"/>
-            <a:ext cx="2011680" cy="0"/>
-          </a:xfrm>
-          <a:prstGeom prst="line">
-            <a:avLst/>
-          </a:prstGeom>
-          <a:noFill/>
-          <a:ln w="63500">
-            <a:solidFill>
-              <a:srgbClr val="2F8A28"/>
-            </a:solidFill>
-            <a:prstDash val="solid"/>
-          </a:ln>
-        </p:spPr>
-      </p:sp>
-      <p:sp>
-        <p:nvSpPr>
-          <p:cNvPr id="17" name="Text 15"/>
-          <p:cNvSpPr/>
-          <p:nvPr/>
-        </p:nvSpPr>
-        <p:spPr>
-          <a:xfrm>
-            <a:off x="7909560" y="3849624"/>
-            <a:ext cx="2926080" cy="164592"/>
-          </a:xfrm>
-          <a:prstGeom prst="rect">
-            <a:avLst/>
-          </a:prstGeom>
-          <a:noFill/>
-          <a:ln/>
-        </p:spPr>
-        <p:txBody>
-          <a:bodyPr wrap="square" lIns="0" tIns="0" rIns="0" bIns="0" rtlCol="0" anchor="ctr"/>
-          <a:lstStyle/>
-          <a:p>
-            <a:pPr algn="ctr" indent="0" marL="0">
-              <a:buNone/>
-            </a:pPr>
-            <a:r>
-              <a:rPr lang="en-US" sz="900" dirty="0">
-                <a:solidFill>
-                  <a:srgbClr val="003A63"/>
-                </a:solidFill>
-                <a:latin typeface="Aptos" pitchFamily="34" charset="0"/>
-                <a:ea typeface="Aptos" pitchFamily="34" charset="-122"/>
-                <a:cs typeface="Aptos" pitchFamily="34" charset="-120"/>
-              </a:rPr>
-              <a:t>Human review</a:t>
-            </a:r>
-            <a:endParaRPr lang="en-US" sz="900" dirty="0"/>
-          </a:p>
-        </p:txBody>
-      </p:sp>
-      <p:sp>
-        <p:nvSpPr>
-          <p:cNvPr id="18" name="Shape 16"/>
           <p:cNvSpPr/>
           <p:nvPr/>
         </p:nvSpPr>
@@ -8660,7 +8464,7 @@
       </p:sp>
       <p:sp>
         <p:nvSpPr>
-          <p:cNvPr id="19" name="Text 17"/>
+          <p:cNvPr id="17" name="Text 15"/>
           <p:cNvSpPr/>
           <p:nvPr/>
         </p:nvSpPr>
@@ -8699,7 +8503,7 @@
       </p:sp>
       <p:sp>
         <p:nvSpPr>
-          <p:cNvPr id="20" name="Text 18"/>
+          <p:cNvPr id="18" name="Text 16"/>
           <p:cNvSpPr/>
           <p:nvPr/>
         </p:nvSpPr>
@@ -9207,13 +9011,11 @@
             </a:avLst>
           </a:prstGeom>
           <a:solidFill>
-            <a:srgbClr val="FFFFFF">
-              <a:alpha val="88000"/>
-            </a:srgbClr>
+            <a:srgbClr val="FFFFFF"/>
           </a:solidFill>
           <a:ln w="12700">
             <a:solidFill>
-              <a:srgbClr val="D6E8F2"/>
+              <a:srgbClr val="B9D7E6"/>
             </a:solidFill>
             <a:prstDash val="solid"/>
           </a:ln>
@@ -9221,26 +9023,42 @@
       </p:sp>
       <p:sp>
         <p:nvSpPr>
-          <p:cNvPr id="14" name="Shape 12"/>
-          <p:cNvSpPr/>
-          <p:nvPr/>
-        </p:nvSpPr>
-        <p:spPr>
-          <a:xfrm>
-            <a:off x="8046720" y="3108960"/>
-            <a:ext cx="2651760" cy="896112"/>
-          </a:xfrm>
-          <a:prstGeom prst="arc">
-            <a:avLst/>
-          </a:prstGeom>
-          <a:noFill/>
-          <a:ln w="25400">
-            <a:solidFill>
-              <a:srgbClr val="0068B7"/>
-            </a:solidFill>
-            <a:prstDash val="solid"/>
-          </a:ln>
-        </p:spPr>
+          <p:cNvPr id="14" name="Text 12"/>
+          <p:cNvSpPr/>
+          <p:nvPr/>
+        </p:nvSpPr>
+        <p:spPr>
+          <a:xfrm>
+            <a:off x="7799832" y="2935224"/>
+            <a:ext cx="3145536" cy="256032"/>
+          </a:xfrm>
+          <a:prstGeom prst="rect">
+            <a:avLst/>
+          </a:prstGeom>
+          <a:noFill/>
+          <a:ln/>
+        </p:spPr>
+        <p:txBody>
+          <a:bodyPr wrap="square" lIns="0" tIns="0" rIns="0" bIns="0" rtlCol="0" anchor="ctr"/>
+          <a:lstStyle/>
+          <a:p>
+            <a:pPr indent="0" marL="0">
+              <a:buNone/>
+            </a:pPr>
+            <a:r>
+              <a:rPr lang="en-US" sz="1300" b="1" dirty="0">
+                <a:solidFill>
+                  <a:srgbClr val="0068B7"/>
+                </a:solidFill>
+                <a:latin typeface="Aptos" pitchFamily="34" charset="0"/>
+                <a:ea typeface="Aptos" pitchFamily="34" charset="-122"/>
+                <a:cs typeface="Aptos" pitchFamily="34" charset="-120"/>
+              </a:rPr>
+              <a:t>Concept checkpoints</a:t>
+            </a:r>
+            <a:endParaRPr lang="en-US" sz="1300" dirty="0"/>
+          </a:p>
+        </p:txBody>
       </p:sp>
       <p:sp>
         <p:nvSpPr>
@@ -9250,102 +9068,67 @@
         </p:nvSpPr>
         <p:spPr>
           <a:xfrm>
-            <a:off x="7909560" y="3099816"/>
-            <a:ext cx="2926080" cy="256032"/>
-          </a:xfrm>
-          <a:prstGeom prst="rect">
-            <a:avLst/>
-          </a:prstGeom>
-          <a:noFill/>
-          <a:ln/>
-        </p:spPr>
-        <p:txBody>
-          <a:bodyPr wrap="square" lIns="0" tIns="0" rIns="0" bIns="0" rtlCol="0" anchor="ctr"/>
-          <a:lstStyle/>
-          <a:p>
-            <a:pPr algn="ctr" indent="0" marL="0">
-              <a:buNone/>
-            </a:pPr>
-            <a:r>
-              <a:rPr lang="en-US" sz="1500" b="1" dirty="0">
-                <a:solidFill>
-                  <a:srgbClr val="003A63"/>
-                </a:solidFill>
-                <a:latin typeface="Aptos" pitchFamily="34" charset="0"/>
-                <a:ea typeface="Aptos" pitchFamily="34" charset="-122"/>
-                <a:cs typeface="Aptos" pitchFamily="34" charset="-120"/>
-              </a:rPr>
-              <a:t>Risk</a:t>
-            </a:r>
-            <a:endParaRPr lang="en-US" sz="1500" dirty="0"/>
+            <a:off x="7818120" y="3300984"/>
+            <a:ext cx="3090672" cy="877824"/>
+          </a:xfrm>
+          <a:prstGeom prst="rect">
+            <a:avLst/>
+          </a:prstGeom>
+          <a:noFill/>
+          <a:ln/>
+        </p:spPr>
+        <p:txBody>
+          <a:bodyPr wrap="square" lIns="254" tIns="254" rIns="254" bIns="254" rtlCol="0" anchor="t">
+            <a:normAutofit/>
+          </a:bodyPr>
+          <a:lstStyle/>
+          <a:p>
+            <a:r>
+              <a:rPr lang="en-US" sz="1380" dirty="0">
+                <a:solidFill>
+                  <a:srgbClr val="17364A"/>
+                </a:solidFill>
+                <a:latin typeface="Aptos" pitchFamily="34" charset="0"/>
+                <a:ea typeface="Aptos" pitchFamily="34" charset="-122"/>
+                <a:cs typeface="Aptos" pitchFamily="34" charset="-120"/>
+              </a:rPr>
+              <a:t>Predictive model review plan</a:t>
+            </a:r>
+            <a:endParaRPr lang="en-US" sz="1380" dirty="0"/>
+          </a:p>
+          <a:p>
+            <a:r>
+              <a:rPr lang="en-US" sz="1380" dirty="0">
+                <a:solidFill>
+                  <a:srgbClr val="17364A"/>
+                </a:solidFill>
+                <a:latin typeface="Aptos" pitchFamily="34" charset="0"/>
+                <a:ea typeface="Aptos" pitchFamily="34" charset="-122"/>
+                <a:cs typeface="Aptos" pitchFamily="34" charset="-120"/>
+              </a:rPr>
+              <a:t>Risk score interpretation guide</a:t>
+            </a:r>
+            <a:endParaRPr lang="en-US" sz="1380" dirty="0"/>
+          </a:p>
+          <a:p>
+            <a:r>
+              <a:rPr lang="en-US" sz="1380" dirty="0">
+                <a:solidFill>
+                  <a:srgbClr val="17364A"/>
+                </a:solidFill>
+                <a:latin typeface="Aptos" pitchFamily="34" charset="0"/>
+                <a:ea typeface="Aptos" pitchFamily="34" charset="-122"/>
+                <a:cs typeface="Aptos" pitchFamily="34" charset="-120"/>
+              </a:rPr>
+              <a:t>Threshold and error tradeoff memo</a:t>
+            </a:r>
+            <a:endParaRPr lang="en-US" sz="1380" dirty="0"/>
           </a:p>
         </p:txBody>
       </p:sp>
       <p:sp>
         <p:nvSpPr>
           <p:cNvPr id="16" name="Shape 14"/>
-          <p:cNvSpPr/>
-          <p:nvPr/>
-        </p:nvSpPr>
-        <p:spPr>
-          <a:xfrm>
-            <a:off x="8366760" y="3639312"/>
-            <a:ext cx="2011680" cy="0"/>
-          </a:xfrm>
-          <a:prstGeom prst="line">
-            <a:avLst/>
-          </a:prstGeom>
-          <a:noFill/>
-          <a:ln w="63500">
-            <a:solidFill>
-              <a:srgbClr val="2F8A28"/>
-            </a:solidFill>
-            <a:prstDash val="solid"/>
-          </a:ln>
-        </p:spPr>
-      </p:sp>
-      <p:sp>
-        <p:nvSpPr>
-          <p:cNvPr id="17" name="Text 15"/>
-          <p:cNvSpPr/>
-          <p:nvPr/>
-        </p:nvSpPr>
-        <p:spPr>
-          <a:xfrm>
-            <a:off x="7909560" y="3849624"/>
-            <a:ext cx="2926080" cy="164592"/>
-          </a:xfrm>
-          <a:prstGeom prst="rect">
-            <a:avLst/>
-          </a:prstGeom>
-          <a:noFill/>
-          <a:ln/>
-        </p:spPr>
-        <p:txBody>
-          <a:bodyPr wrap="square" lIns="0" tIns="0" rIns="0" bIns="0" rtlCol="0" anchor="ctr"/>
-          <a:lstStyle/>
-          <a:p>
-            <a:pPr algn="ctr" indent="0" marL="0">
-              <a:buNone/>
-            </a:pPr>
-            <a:r>
-              <a:rPr lang="en-US" sz="900" dirty="0">
-                <a:solidFill>
-                  <a:srgbClr val="003A63"/>
-                </a:solidFill>
-                <a:latin typeface="Aptos" pitchFamily="34" charset="0"/>
-                <a:ea typeface="Aptos" pitchFamily="34" charset="-122"/>
-                <a:cs typeface="Aptos" pitchFamily="34" charset="-120"/>
-              </a:rPr>
-              <a:t>Human review</a:t>
-            </a:r>
-            <a:endParaRPr lang="en-US" sz="900" dirty="0"/>
-          </a:p>
-        </p:txBody>
-      </p:sp>
-      <p:sp>
-        <p:nvSpPr>
-          <p:cNvPr id="18" name="Shape 16"/>
           <p:cNvSpPr/>
           <p:nvPr/>
         </p:nvSpPr>
@@ -9372,7 +9155,7 @@
       </p:sp>
       <p:sp>
         <p:nvSpPr>
-          <p:cNvPr id="19" name="Text 17"/>
+          <p:cNvPr id="17" name="Text 15"/>
           <p:cNvSpPr/>
           <p:nvPr/>
         </p:nvSpPr>
@@ -9411,7 +9194,7 @@
       </p:sp>
       <p:sp>
         <p:nvSpPr>
-          <p:cNvPr id="20" name="Text 18"/>
+          <p:cNvPr id="18" name="Text 16"/>
           <p:cNvSpPr/>
           <p:nvPr/>
         </p:nvSpPr>
@@ -9891,13 +9674,11 @@
             </a:avLst>
           </a:prstGeom>
           <a:solidFill>
-            <a:srgbClr val="FFFFFF">
-              <a:alpha val="88000"/>
-            </a:srgbClr>
+            <a:srgbClr val="FFFFFF"/>
           </a:solidFill>
           <a:ln w="12700">
             <a:solidFill>
-              <a:srgbClr val="D6E8F2"/>
+              <a:srgbClr val="B9D7E6"/>
             </a:solidFill>
             <a:prstDash val="solid"/>
           </a:ln>
@@ -9905,26 +9686,42 @@
       </p:sp>
       <p:sp>
         <p:nvSpPr>
-          <p:cNvPr id="14" name="Shape 12"/>
-          <p:cNvSpPr/>
-          <p:nvPr/>
-        </p:nvSpPr>
-        <p:spPr>
-          <a:xfrm>
-            <a:off x="8046720" y="3108960"/>
-            <a:ext cx="2651760" cy="896112"/>
-          </a:xfrm>
-          <a:prstGeom prst="arc">
-            <a:avLst/>
-          </a:prstGeom>
-          <a:noFill/>
-          <a:ln w="25400">
-            <a:solidFill>
-              <a:srgbClr val="0068B7"/>
-            </a:solidFill>
-            <a:prstDash val="solid"/>
-          </a:ln>
-        </p:spPr>
+          <p:cNvPr id="14" name="Text 12"/>
+          <p:cNvSpPr/>
+          <p:nvPr/>
+        </p:nvSpPr>
+        <p:spPr>
+          <a:xfrm>
+            <a:off x="7799832" y="2935224"/>
+            <a:ext cx="3145536" cy="256032"/>
+          </a:xfrm>
+          <a:prstGeom prst="rect">
+            <a:avLst/>
+          </a:prstGeom>
+          <a:noFill/>
+          <a:ln/>
+        </p:spPr>
+        <p:txBody>
+          <a:bodyPr wrap="square" lIns="0" tIns="0" rIns="0" bIns="0" rtlCol="0" anchor="ctr"/>
+          <a:lstStyle/>
+          <a:p>
+            <a:pPr indent="0" marL="0">
+              <a:buNone/>
+            </a:pPr>
+            <a:r>
+              <a:rPr lang="en-US" sz="1300" b="1" dirty="0">
+                <a:solidFill>
+                  <a:srgbClr val="0068B7"/>
+                </a:solidFill>
+                <a:latin typeface="Aptos" pitchFamily="34" charset="0"/>
+                <a:ea typeface="Aptos" pitchFamily="34" charset="-122"/>
+                <a:cs typeface="Aptos" pitchFamily="34" charset="-120"/>
+              </a:rPr>
+              <a:t>Concept checkpoints</a:t>
+            </a:r>
+            <a:endParaRPr lang="en-US" sz="1300" dirty="0"/>
+          </a:p>
+        </p:txBody>
       </p:sp>
       <p:sp>
         <p:nvSpPr>
@@ -9934,102 +9731,39 @@
         </p:nvSpPr>
         <p:spPr>
           <a:xfrm>
-            <a:off x="7909560" y="3099816"/>
-            <a:ext cx="2926080" cy="256032"/>
-          </a:xfrm>
-          <a:prstGeom prst="rect">
-            <a:avLst/>
-          </a:prstGeom>
-          <a:noFill/>
-          <a:ln/>
-        </p:spPr>
-        <p:txBody>
-          <a:bodyPr wrap="square" lIns="0" tIns="0" rIns="0" bIns="0" rtlCol="0" anchor="ctr"/>
-          <a:lstStyle/>
-          <a:p>
-            <a:pPr algn="ctr" indent="0" marL="0">
-              <a:buNone/>
-            </a:pPr>
-            <a:r>
-              <a:rPr lang="en-US" sz="1500" b="1" dirty="0">
-                <a:solidFill>
-                  <a:srgbClr val="003A63"/>
-                </a:solidFill>
-                <a:latin typeface="Aptos" pitchFamily="34" charset="0"/>
-                <a:ea typeface="Aptos" pitchFamily="34" charset="-122"/>
-                <a:cs typeface="Aptos" pitchFamily="34" charset="-120"/>
-              </a:rPr>
-              <a:t>Risk</a:t>
-            </a:r>
-            <a:endParaRPr lang="en-US" sz="1500" dirty="0"/>
+            <a:off x="7818120" y="3300984"/>
+            <a:ext cx="3090672" cy="877824"/>
+          </a:xfrm>
+          <a:prstGeom prst="rect">
+            <a:avLst/>
+          </a:prstGeom>
+          <a:noFill/>
+          <a:ln/>
+        </p:spPr>
+        <p:txBody>
+          <a:bodyPr wrap="square" lIns="254" tIns="254" rIns="254" bIns="254" rtlCol="0" anchor="t">
+            <a:normAutofit/>
+          </a:bodyPr>
+          <a:lstStyle/>
+          <a:p>
+            <a:r>
+              <a:rPr lang="en-US" sz="1380" dirty="0">
+                <a:solidFill>
+                  <a:srgbClr val="17364A"/>
+                </a:solidFill>
+                <a:latin typeface="Aptos" pitchFamily="34" charset="0"/>
+                <a:ea typeface="Aptos" pitchFamily="34" charset="-122"/>
+                <a:cs typeface="Aptos" pitchFamily="34" charset="-120"/>
+              </a:rPr>
+              <a:t>Subgroup monitoring plan</a:t>
+            </a:r>
+            <a:endParaRPr lang="en-US" sz="1380" dirty="0"/>
           </a:p>
         </p:txBody>
       </p:sp>
       <p:sp>
         <p:nvSpPr>
           <p:cNvPr id="16" name="Shape 14"/>
-          <p:cNvSpPr/>
-          <p:nvPr/>
-        </p:nvSpPr>
-        <p:spPr>
-          <a:xfrm>
-            <a:off x="8366760" y="3639312"/>
-            <a:ext cx="2011680" cy="0"/>
-          </a:xfrm>
-          <a:prstGeom prst="line">
-            <a:avLst/>
-          </a:prstGeom>
-          <a:noFill/>
-          <a:ln w="63500">
-            <a:solidFill>
-              <a:srgbClr val="2F8A28"/>
-            </a:solidFill>
-            <a:prstDash val="solid"/>
-          </a:ln>
-        </p:spPr>
-      </p:sp>
-      <p:sp>
-        <p:nvSpPr>
-          <p:cNvPr id="17" name="Text 15"/>
-          <p:cNvSpPr/>
-          <p:nvPr/>
-        </p:nvSpPr>
-        <p:spPr>
-          <a:xfrm>
-            <a:off x="7909560" y="3849624"/>
-            <a:ext cx="2926080" cy="164592"/>
-          </a:xfrm>
-          <a:prstGeom prst="rect">
-            <a:avLst/>
-          </a:prstGeom>
-          <a:noFill/>
-          <a:ln/>
-        </p:spPr>
-        <p:txBody>
-          <a:bodyPr wrap="square" lIns="0" tIns="0" rIns="0" bIns="0" rtlCol="0" anchor="ctr"/>
-          <a:lstStyle/>
-          <a:p>
-            <a:pPr algn="ctr" indent="0" marL="0">
-              <a:buNone/>
-            </a:pPr>
-            <a:r>
-              <a:rPr lang="en-US" sz="900" dirty="0">
-                <a:solidFill>
-                  <a:srgbClr val="003A63"/>
-                </a:solidFill>
-                <a:latin typeface="Aptos" pitchFamily="34" charset="0"/>
-                <a:ea typeface="Aptos" pitchFamily="34" charset="-122"/>
-                <a:cs typeface="Aptos" pitchFamily="34" charset="-120"/>
-              </a:rPr>
-              <a:t>Human review</a:t>
-            </a:r>
-            <a:endParaRPr lang="en-US" sz="900" dirty="0"/>
-          </a:p>
-        </p:txBody>
-      </p:sp>
-      <p:sp>
-        <p:nvSpPr>
-          <p:cNvPr id="18" name="Shape 16"/>
           <p:cNvSpPr/>
           <p:nvPr/>
         </p:nvSpPr>
@@ -10056,7 +9790,7 @@
       </p:sp>
       <p:sp>
         <p:nvSpPr>
-          <p:cNvPr id="19" name="Text 17"/>
+          <p:cNvPr id="17" name="Text 15"/>
           <p:cNvSpPr/>
           <p:nvPr/>
         </p:nvSpPr>
@@ -10095,7 +9829,7 @@
       </p:sp>
       <p:sp>
         <p:nvSpPr>
-          <p:cNvPr id="20" name="Text 18"/>
+          <p:cNvPr id="18" name="Text 16"/>
           <p:cNvSpPr/>
           <p:nvPr/>
         </p:nvSpPr>
@@ -10628,20 +10362,20 @@
         </p:nvSpPr>
         <p:spPr>
           <a:xfrm>
-            <a:off x="7635240" y="3730752"/>
-            <a:ext cx="1033272" cy="749808"/>
+            <a:off x="7909560" y="3675888"/>
+            <a:ext cx="3154680" cy="1691640"/>
           </a:xfrm>
           <a:prstGeom prst="roundRect">
             <a:avLst>
-              <a:gd name="adj" fmla="val 14634"/>
+              <a:gd name="adj" fmla="val 6486"/>
             </a:avLst>
           </a:prstGeom>
           <a:solidFill>
-            <a:srgbClr val="0068B7"/>
+            <a:srgbClr val="FFFFFF"/>
           </a:solidFill>
           <a:ln w="12700">
             <a:solidFill>
-              <a:srgbClr val="0068B7"/>
+              <a:srgbClr val="B9D7E6"/>
             </a:solidFill>
             <a:prstDash val="solid"/>
           </a:ln>
@@ -10655,172 +10389,100 @@
         </p:nvSpPr>
         <p:spPr>
           <a:xfrm>
-            <a:off x="7708392" y="3922776"/>
-            <a:ext cx="886968" cy="310896"/>
-          </a:xfrm>
-          <a:prstGeom prst="rect">
-            <a:avLst/>
-          </a:prstGeom>
-          <a:noFill/>
-          <a:ln/>
-        </p:spPr>
-        <p:txBody>
-          <a:bodyPr wrap="square" lIns="0" tIns="0" rIns="0" bIns="0" rtlCol="0" anchor="ctr">
+            <a:off x="8074152" y="3822192"/>
+            <a:ext cx="2825496" cy="256032"/>
+          </a:xfrm>
+          <a:prstGeom prst="rect">
+            <a:avLst/>
+          </a:prstGeom>
+          <a:noFill/>
+          <a:ln/>
+        </p:spPr>
+        <p:txBody>
+          <a:bodyPr wrap="square" lIns="0" tIns="0" rIns="0" bIns="0" rtlCol="0" anchor="ctr"/>
+          <a:lstStyle/>
+          <a:p>
+            <a:pPr indent="0" marL="0">
+              <a:buNone/>
+            </a:pPr>
+            <a:r>
+              <a:rPr lang="en-US" sz="1300" b="1" dirty="0">
+                <a:solidFill>
+                  <a:srgbClr val="0068B7"/>
+                </a:solidFill>
+                <a:latin typeface="Aptos" pitchFamily="34" charset="0"/>
+                <a:ea typeface="Aptos" pitchFamily="34" charset="-122"/>
+                <a:cs typeface="Aptos" pitchFamily="34" charset="-120"/>
+              </a:rPr>
+              <a:t>Learning sequence</a:t>
+            </a:r>
+            <a:endParaRPr lang="en-US" sz="1300" dirty="0"/>
+          </a:p>
+        </p:txBody>
+      </p:sp>
+      <p:sp>
+        <p:nvSpPr>
+          <p:cNvPr id="15" name="Text 13"/>
+          <p:cNvSpPr/>
+          <p:nvPr/>
+        </p:nvSpPr>
+        <p:spPr>
+          <a:xfrm>
+            <a:off x="8092440" y="4187952"/>
+            <a:ext cx="2770632" cy="1033272"/>
+          </a:xfrm>
+          <a:prstGeom prst="rect">
+            <a:avLst/>
+          </a:prstGeom>
+          <a:noFill/>
+          <a:ln/>
+        </p:spPr>
+        <p:txBody>
+          <a:bodyPr wrap="square" lIns="254" tIns="254" rIns="254" bIns="254" rtlCol="0" anchor="t">
             <a:normAutofit/>
           </a:bodyPr>
           <a:lstStyle/>
           <a:p>
-            <a:pPr algn="ctr" indent="0" marL="0">
-              <a:buNone/>
-            </a:pPr>
-            <a:r>
-              <a:rPr lang="en-US" sz="1500" b="1" dirty="0">
-                <a:solidFill>
-                  <a:srgbClr val="FFFFFF"/>
-                </a:solidFill>
-                <a:latin typeface="Aptos" pitchFamily="34" charset="0"/>
-                <a:ea typeface="Aptos" pitchFamily="34" charset="-122"/>
-                <a:cs typeface="Aptos" pitchFamily="34" charset="-120"/>
-              </a:rPr>
-              <a:t>Learn</a:t>
-            </a:r>
-            <a:endParaRPr lang="en-US" sz="1500" dirty="0"/>
-          </a:p>
-        </p:txBody>
-      </p:sp>
-      <p:sp>
-        <p:nvSpPr>
-          <p:cNvPr id="15" name="Shape 13"/>
-          <p:cNvSpPr/>
-          <p:nvPr/>
-        </p:nvSpPr>
-        <p:spPr>
-          <a:xfrm>
-            <a:off x="8924544" y="3730752"/>
-            <a:ext cx="1033272" cy="749808"/>
-          </a:xfrm>
-          <a:prstGeom prst="roundRect">
-            <a:avLst>
-              <a:gd name="adj" fmla="val 14634"/>
-            </a:avLst>
-          </a:prstGeom>
-          <a:solidFill>
-            <a:srgbClr val="2F8A28"/>
-          </a:solidFill>
-          <a:ln w="12700">
-            <a:solidFill>
-              <a:srgbClr val="2F8A28"/>
-            </a:solidFill>
-            <a:prstDash val="solid"/>
-          </a:ln>
-        </p:spPr>
-      </p:sp>
-      <p:sp>
-        <p:nvSpPr>
-          <p:cNvPr id="16" name="Text 14"/>
-          <p:cNvSpPr/>
-          <p:nvPr/>
-        </p:nvSpPr>
-        <p:spPr>
-          <a:xfrm>
-            <a:off x="8997696" y="3922776"/>
-            <a:ext cx="886968" cy="310896"/>
-          </a:xfrm>
-          <a:prstGeom prst="rect">
-            <a:avLst/>
-          </a:prstGeom>
-          <a:noFill/>
-          <a:ln/>
-        </p:spPr>
-        <p:txBody>
-          <a:bodyPr wrap="square" lIns="0" tIns="0" rIns="0" bIns="0" rtlCol="0" anchor="ctr">
-            <a:normAutofit/>
-          </a:bodyPr>
-          <a:lstStyle/>
-          <a:p>
-            <a:pPr algn="ctr" indent="0" marL="0">
-              <a:buNone/>
-            </a:pPr>
-            <a:r>
-              <a:rPr lang="en-US" sz="1500" b="1" dirty="0">
-                <a:solidFill>
-                  <a:srgbClr val="FFFFFF"/>
-                </a:solidFill>
-                <a:latin typeface="Aptos" pitchFamily="34" charset="0"/>
-                <a:ea typeface="Aptos" pitchFamily="34" charset="-122"/>
-                <a:cs typeface="Aptos" pitchFamily="34" charset="-120"/>
-              </a:rPr>
-              <a:t>Apply</a:t>
-            </a:r>
-            <a:endParaRPr lang="en-US" sz="1500" dirty="0"/>
-          </a:p>
-        </p:txBody>
-      </p:sp>
-      <p:sp>
-        <p:nvSpPr>
-          <p:cNvPr id="17" name="Shape 15"/>
-          <p:cNvSpPr/>
-          <p:nvPr/>
-        </p:nvSpPr>
-        <p:spPr>
-          <a:xfrm>
-            <a:off x="10213848" y="3730752"/>
-            <a:ext cx="1033272" cy="749808"/>
-          </a:xfrm>
-          <a:prstGeom prst="roundRect">
-            <a:avLst>
-              <a:gd name="adj" fmla="val 14634"/>
-            </a:avLst>
-          </a:prstGeom>
-          <a:solidFill>
-            <a:srgbClr val="6A4CA3"/>
-          </a:solidFill>
-          <a:ln w="12700">
-            <a:solidFill>
-              <a:srgbClr val="6A4CA3"/>
-            </a:solidFill>
-            <a:prstDash val="solid"/>
-          </a:ln>
-        </p:spPr>
-      </p:sp>
-      <p:sp>
-        <p:nvSpPr>
-          <p:cNvPr id="18" name="Text 16"/>
-          <p:cNvSpPr/>
-          <p:nvPr/>
-        </p:nvSpPr>
-        <p:spPr>
-          <a:xfrm>
-            <a:off x="10287000" y="3922776"/>
-            <a:ext cx="886968" cy="310896"/>
-          </a:xfrm>
-          <a:prstGeom prst="rect">
-            <a:avLst/>
-          </a:prstGeom>
-          <a:noFill/>
-          <a:ln/>
-        </p:spPr>
-        <p:txBody>
-          <a:bodyPr wrap="square" lIns="0" tIns="0" rIns="0" bIns="0" rtlCol="0" anchor="ctr">
-            <a:normAutofit/>
-          </a:bodyPr>
-          <a:lstStyle/>
-          <a:p>
-            <a:pPr algn="ctr" indent="0" marL="0">
-              <a:buNone/>
-            </a:pPr>
-            <a:r>
-              <a:rPr lang="en-US" sz="1500" b="1" dirty="0">
-                <a:solidFill>
-                  <a:srgbClr val="FFFFFF"/>
-                </a:solidFill>
-                <a:latin typeface="Aptos" pitchFamily="34" charset="0"/>
-                <a:ea typeface="Aptos" pitchFamily="34" charset="-122"/>
-                <a:cs typeface="Aptos" pitchFamily="34" charset="-120"/>
-              </a:rPr>
-              <a:t>Document</a:t>
-            </a:r>
-            <a:endParaRPr lang="en-US" sz="1500" dirty="0"/>
+            <a:r>
+              <a:rPr lang="en-US" sz="1380" dirty="0">
+                <a:solidFill>
+                  <a:srgbClr val="17364A"/>
+                </a:solidFill>
+                <a:latin typeface="Aptos" pitchFamily="34" charset="0"/>
+                <a:ea typeface="Aptos" pitchFamily="34" charset="-122"/>
+                <a:cs typeface="Aptos" pitchFamily="34" charset="-120"/>
+              </a:rPr>
+              <a:t>Read the module for shared vocabulary and context.</a:t>
+            </a:r>
+            <a:endParaRPr lang="en-US" sz="1380" dirty="0"/>
+          </a:p>
+          <a:p>
+            <a:r>
+              <a:rPr lang="en-US" sz="1380" dirty="0">
+                <a:solidFill>
+                  <a:srgbClr val="17364A"/>
+                </a:solidFill>
+                <a:latin typeface="Aptos" pitchFamily="34" charset="0"/>
+                <a:ea typeface="Aptos" pitchFamily="34" charset="-122"/>
+                <a:cs typeface="Aptos" pitchFamily="34" charset="-120"/>
+              </a:rPr>
+              <a:t>Complete the practical exercise to apply the concept.</a:t>
+            </a:r>
+            <a:endParaRPr lang="en-US" sz="1380" dirty="0"/>
+          </a:p>
+          <a:p>
+            <a:r>
+              <a:rPr lang="en-US" sz="1380" dirty="0">
+                <a:solidFill>
+                  <a:srgbClr val="17364A"/>
+                </a:solidFill>
+                <a:latin typeface="Aptos" pitchFamily="34" charset="0"/>
+                <a:ea typeface="Aptos" pitchFamily="34" charset="-122"/>
+                <a:cs typeface="Aptos" pitchFamily="34" charset="-120"/>
+              </a:rPr>
+              <a:t>Use the notes and references for deeper review.</a:t>
+            </a:r>
+            <a:endParaRPr lang="en-US" sz="1380" dirty="0"/>
           </a:p>
         </p:txBody>
       </p:sp>
@@ -11293,13 +10955,11 @@
             </a:avLst>
           </a:prstGeom>
           <a:solidFill>
-            <a:srgbClr val="FFFFFF">
-              <a:alpha val="88000"/>
-            </a:srgbClr>
+            <a:srgbClr val="FFFFFF"/>
           </a:solidFill>
           <a:ln w="12700">
             <a:solidFill>
-              <a:srgbClr val="D6E8F2"/>
+              <a:srgbClr val="B9D7E6"/>
             </a:solidFill>
             <a:prstDash val="solid"/>
           </a:ln>
@@ -11307,26 +10967,42 @@
       </p:sp>
       <p:sp>
         <p:nvSpPr>
-          <p:cNvPr id="14" name="Shape 12"/>
-          <p:cNvSpPr/>
-          <p:nvPr/>
-        </p:nvSpPr>
-        <p:spPr>
-          <a:xfrm>
-            <a:off x="8046720" y="3108960"/>
-            <a:ext cx="2651760" cy="896112"/>
-          </a:xfrm>
-          <a:prstGeom prst="arc">
-            <a:avLst/>
-          </a:prstGeom>
-          <a:noFill/>
-          <a:ln w="25400">
-            <a:solidFill>
-              <a:srgbClr val="0068B7"/>
-            </a:solidFill>
-            <a:prstDash val="solid"/>
-          </a:ln>
-        </p:spPr>
+          <p:cNvPr id="14" name="Text 12"/>
+          <p:cNvSpPr/>
+          <p:nvPr/>
+        </p:nvSpPr>
+        <p:spPr>
+          <a:xfrm>
+            <a:off x="7799832" y="2935224"/>
+            <a:ext cx="3145536" cy="256032"/>
+          </a:xfrm>
+          <a:prstGeom prst="rect">
+            <a:avLst/>
+          </a:prstGeom>
+          <a:noFill/>
+          <a:ln/>
+        </p:spPr>
+        <p:txBody>
+          <a:bodyPr wrap="square" lIns="0" tIns="0" rIns="0" bIns="0" rtlCol="0" anchor="ctr"/>
+          <a:lstStyle/>
+          <a:p>
+            <a:pPr indent="0" marL="0">
+              <a:buNone/>
+            </a:pPr>
+            <a:r>
+              <a:rPr lang="en-US" sz="1300" b="1" dirty="0">
+                <a:solidFill>
+                  <a:srgbClr val="0068B7"/>
+                </a:solidFill>
+                <a:latin typeface="Aptos" pitchFamily="34" charset="0"/>
+                <a:ea typeface="Aptos" pitchFamily="34" charset="-122"/>
+                <a:cs typeface="Aptos" pitchFamily="34" charset="-120"/>
+              </a:rPr>
+              <a:t>Concept checkpoints</a:t>
+            </a:r>
+            <a:endParaRPr lang="en-US" sz="1300" dirty="0"/>
+          </a:p>
+        </p:txBody>
       </p:sp>
       <p:sp>
         <p:nvSpPr>
@@ -11336,102 +11012,67 @@
         </p:nvSpPr>
         <p:spPr>
           <a:xfrm>
-            <a:off x="7909560" y="3099816"/>
-            <a:ext cx="2926080" cy="256032"/>
-          </a:xfrm>
-          <a:prstGeom prst="rect">
-            <a:avLst/>
-          </a:prstGeom>
-          <a:noFill/>
-          <a:ln/>
-        </p:spPr>
-        <p:txBody>
-          <a:bodyPr wrap="square" lIns="0" tIns="0" rIns="0" bIns="0" rtlCol="0" anchor="ctr"/>
-          <a:lstStyle/>
-          <a:p>
-            <a:pPr algn="ctr" indent="0" marL="0">
-              <a:buNone/>
-            </a:pPr>
-            <a:r>
-              <a:rPr lang="en-US" sz="1500" b="1" dirty="0">
-                <a:solidFill>
-                  <a:srgbClr val="003A63"/>
-                </a:solidFill>
-                <a:latin typeface="Aptos" pitchFamily="34" charset="0"/>
-                <a:ea typeface="Aptos" pitchFamily="34" charset="-122"/>
-                <a:cs typeface="Aptos" pitchFamily="34" charset="-120"/>
-              </a:rPr>
-              <a:t>Risk</a:t>
-            </a:r>
-            <a:endParaRPr lang="en-US" sz="1500" dirty="0"/>
+            <a:off x="7818120" y="3300984"/>
+            <a:ext cx="3090672" cy="877824"/>
+          </a:xfrm>
+          <a:prstGeom prst="rect">
+            <a:avLst/>
+          </a:prstGeom>
+          <a:noFill/>
+          <a:ln/>
+        </p:spPr>
+        <p:txBody>
+          <a:bodyPr wrap="square" lIns="254" tIns="254" rIns="254" bIns="254" rtlCol="0" anchor="t">
+            <a:normAutofit/>
+          </a:bodyPr>
+          <a:lstStyle/>
+          <a:p>
+            <a:r>
+              <a:rPr lang="en-US" sz="1380" dirty="0">
+                <a:solidFill>
+                  <a:srgbClr val="17364A"/>
+                </a:solidFill>
+                <a:latin typeface="Aptos" pitchFamily="34" charset="0"/>
+                <a:ea typeface="Aptos" pitchFamily="34" charset="-122"/>
+                <a:cs typeface="Aptos" pitchFamily="34" charset="-120"/>
+              </a:rPr>
+              <a:t>Predictive model review plan</a:t>
+            </a:r>
+            <a:endParaRPr lang="en-US" sz="1380" dirty="0"/>
+          </a:p>
+          <a:p>
+            <a:r>
+              <a:rPr lang="en-US" sz="1380" dirty="0">
+                <a:solidFill>
+                  <a:srgbClr val="17364A"/>
+                </a:solidFill>
+                <a:latin typeface="Aptos" pitchFamily="34" charset="0"/>
+                <a:ea typeface="Aptos" pitchFamily="34" charset="-122"/>
+                <a:cs typeface="Aptos" pitchFamily="34" charset="-120"/>
+              </a:rPr>
+              <a:t>Risk score interpretation guide</a:t>
+            </a:r>
+            <a:endParaRPr lang="en-US" sz="1380" dirty="0"/>
+          </a:p>
+          <a:p>
+            <a:r>
+              <a:rPr lang="en-US" sz="1380" dirty="0">
+                <a:solidFill>
+                  <a:srgbClr val="17364A"/>
+                </a:solidFill>
+                <a:latin typeface="Aptos" pitchFamily="34" charset="0"/>
+                <a:ea typeface="Aptos" pitchFamily="34" charset="-122"/>
+                <a:cs typeface="Aptos" pitchFamily="34" charset="-120"/>
+              </a:rPr>
+              <a:t>Threshold and error tradeoff memo</a:t>
+            </a:r>
+            <a:endParaRPr lang="en-US" sz="1380" dirty="0"/>
           </a:p>
         </p:txBody>
       </p:sp>
       <p:sp>
         <p:nvSpPr>
           <p:cNvPr id="16" name="Shape 14"/>
-          <p:cNvSpPr/>
-          <p:nvPr/>
-        </p:nvSpPr>
-        <p:spPr>
-          <a:xfrm>
-            <a:off x="8366760" y="3639312"/>
-            <a:ext cx="2011680" cy="0"/>
-          </a:xfrm>
-          <a:prstGeom prst="line">
-            <a:avLst/>
-          </a:prstGeom>
-          <a:noFill/>
-          <a:ln w="63500">
-            <a:solidFill>
-              <a:srgbClr val="2F8A28"/>
-            </a:solidFill>
-            <a:prstDash val="solid"/>
-          </a:ln>
-        </p:spPr>
-      </p:sp>
-      <p:sp>
-        <p:nvSpPr>
-          <p:cNvPr id="17" name="Text 15"/>
-          <p:cNvSpPr/>
-          <p:nvPr/>
-        </p:nvSpPr>
-        <p:spPr>
-          <a:xfrm>
-            <a:off x="7909560" y="3849624"/>
-            <a:ext cx="2926080" cy="164592"/>
-          </a:xfrm>
-          <a:prstGeom prst="rect">
-            <a:avLst/>
-          </a:prstGeom>
-          <a:noFill/>
-          <a:ln/>
-        </p:spPr>
-        <p:txBody>
-          <a:bodyPr wrap="square" lIns="0" tIns="0" rIns="0" bIns="0" rtlCol="0" anchor="ctr"/>
-          <a:lstStyle/>
-          <a:p>
-            <a:pPr algn="ctr" indent="0" marL="0">
-              <a:buNone/>
-            </a:pPr>
-            <a:r>
-              <a:rPr lang="en-US" sz="900" dirty="0">
-                <a:solidFill>
-                  <a:srgbClr val="003A63"/>
-                </a:solidFill>
-                <a:latin typeface="Aptos" pitchFamily="34" charset="0"/>
-                <a:ea typeface="Aptos" pitchFamily="34" charset="-122"/>
-                <a:cs typeface="Aptos" pitchFamily="34" charset="-120"/>
-              </a:rPr>
-              <a:t>Human review</a:t>
-            </a:r>
-            <a:endParaRPr lang="en-US" sz="900" dirty="0"/>
-          </a:p>
-        </p:txBody>
-      </p:sp>
-      <p:sp>
-        <p:nvSpPr>
-          <p:cNvPr id="18" name="Shape 16"/>
           <p:cNvSpPr/>
           <p:nvPr/>
         </p:nvSpPr>
@@ -11458,7 +11099,7 @@
       </p:sp>
       <p:sp>
         <p:nvSpPr>
-          <p:cNvPr id="19" name="Text 17"/>
+          <p:cNvPr id="17" name="Text 15"/>
           <p:cNvSpPr/>
           <p:nvPr/>
         </p:nvSpPr>
@@ -11497,7 +11138,7 @@
       </p:sp>
       <p:sp>
         <p:nvSpPr>
-          <p:cNvPr id="20" name="Text 18"/>
+          <p:cNvPr id="18" name="Text 16"/>
           <p:cNvSpPr/>
           <p:nvPr/>
         </p:nvSpPr>
@@ -12005,13 +11646,11 @@
             </a:avLst>
           </a:prstGeom>
           <a:solidFill>
-            <a:srgbClr val="FFFFFF">
-              <a:alpha val="88000"/>
-            </a:srgbClr>
+            <a:srgbClr val="FFFFFF"/>
           </a:solidFill>
           <a:ln w="12700">
             <a:solidFill>
-              <a:srgbClr val="D6E8F2"/>
+              <a:srgbClr val="B9D7E6"/>
             </a:solidFill>
             <a:prstDash val="solid"/>
           </a:ln>
@@ -12019,26 +11658,42 @@
       </p:sp>
       <p:sp>
         <p:nvSpPr>
-          <p:cNvPr id="14" name="Shape 12"/>
-          <p:cNvSpPr/>
-          <p:nvPr/>
-        </p:nvSpPr>
-        <p:spPr>
-          <a:xfrm>
-            <a:off x="8046720" y="3108960"/>
-            <a:ext cx="2651760" cy="896112"/>
-          </a:xfrm>
-          <a:prstGeom prst="arc">
-            <a:avLst/>
-          </a:prstGeom>
-          <a:noFill/>
-          <a:ln w="25400">
-            <a:solidFill>
-              <a:srgbClr val="0068B7"/>
-            </a:solidFill>
-            <a:prstDash val="solid"/>
-          </a:ln>
-        </p:spPr>
+          <p:cNvPr id="14" name="Text 12"/>
+          <p:cNvSpPr/>
+          <p:nvPr/>
+        </p:nvSpPr>
+        <p:spPr>
+          <a:xfrm>
+            <a:off x="7799832" y="2935224"/>
+            <a:ext cx="3145536" cy="256032"/>
+          </a:xfrm>
+          <a:prstGeom prst="rect">
+            <a:avLst/>
+          </a:prstGeom>
+          <a:noFill/>
+          <a:ln/>
+        </p:spPr>
+        <p:txBody>
+          <a:bodyPr wrap="square" lIns="0" tIns="0" rIns="0" bIns="0" rtlCol="0" anchor="ctr"/>
+          <a:lstStyle/>
+          <a:p>
+            <a:pPr indent="0" marL="0">
+              <a:buNone/>
+            </a:pPr>
+            <a:r>
+              <a:rPr lang="en-US" sz="1300" b="1" dirty="0">
+                <a:solidFill>
+                  <a:srgbClr val="0068B7"/>
+                </a:solidFill>
+                <a:latin typeface="Aptos" pitchFamily="34" charset="0"/>
+                <a:ea typeface="Aptos" pitchFamily="34" charset="-122"/>
+                <a:cs typeface="Aptos" pitchFamily="34" charset="-120"/>
+              </a:rPr>
+              <a:t>Concept checkpoints</a:t>
+            </a:r>
+            <a:endParaRPr lang="en-US" sz="1300" dirty="0"/>
+          </a:p>
+        </p:txBody>
       </p:sp>
       <p:sp>
         <p:nvSpPr>
@@ -12048,102 +11703,67 @@
         </p:nvSpPr>
         <p:spPr>
           <a:xfrm>
-            <a:off x="7909560" y="3099816"/>
-            <a:ext cx="2926080" cy="256032"/>
-          </a:xfrm>
-          <a:prstGeom prst="rect">
-            <a:avLst/>
-          </a:prstGeom>
-          <a:noFill/>
-          <a:ln/>
-        </p:spPr>
-        <p:txBody>
-          <a:bodyPr wrap="square" lIns="0" tIns="0" rIns="0" bIns="0" rtlCol="0" anchor="ctr"/>
-          <a:lstStyle/>
-          <a:p>
-            <a:pPr algn="ctr" indent="0" marL="0">
-              <a:buNone/>
-            </a:pPr>
-            <a:r>
-              <a:rPr lang="en-US" sz="1500" b="1" dirty="0">
-                <a:solidFill>
-                  <a:srgbClr val="003A63"/>
-                </a:solidFill>
-                <a:latin typeface="Aptos" pitchFamily="34" charset="0"/>
-                <a:ea typeface="Aptos" pitchFamily="34" charset="-122"/>
-                <a:cs typeface="Aptos" pitchFamily="34" charset="-120"/>
-              </a:rPr>
-              <a:t>Risk</a:t>
-            </a:r>
-            <a:endParaRPr lang="en-US" sz="1500" dirty="0"/>
+            <a:off x="7818120" y="3300984"/>
+            <a:ext cx="3090672" cy="877824"/>
+          </a:xfrm>
+          <a:prstGeom prst="rect">
+            <a:avLst/>
+          </a:prstGeom>
+          <a:noFill/>
+          <a:ln/>
+        </p:spPr>
+        <p:txBody>
+          <a:bodyPr wrap="square" lIns="254" tIns="254" rIns="254" bIns="254" rtlCol="0" anchor="t">
+            <a:normAutofit/>
+          </a:bodyPr>
+          <a:lstStyle/>
+          <a:p>
+            <a:r>
+              <a:rPr lang="en-US" sz="1380" dirty="0">
+                <a:solidFill>
+                  <a:srgbClr val="17364A"/>
+                </a:solidFill>
+                <a:latin typeface="Aptos" pitchFamily="34" charset="0"/>
+                <a:ea typeface="Aptos" pitchFamily="34" charset="-122"/>
+                <a:cs typeface="Aptos" pitchFamily="34" charset="-120"/>
+              </a:rPr>
+              <a:t>1.</a:t>
+            </a:r>
+            <a:endParaRPr lang="en-US" sz="1380" dirty="0"/>
+          </a:p>
+          <a:p>
+            <a:r>
+              <a:rPr lang="en-US" sz="1380" dirty="0">
+                <a:solidFill>
+                  <a:srgbClr val="17364A"/>
+                </a:solidFill>
+                <a:latin typeface="Aptos" pitchFamily="34" charset="0"/>
+                <a:ea typeface="Aptos" pitchFamily="34" charset="-122"/>
+                <a:cs typeface="Aptos" pitchFamily="34" charset="-120"/>
+              </a:rPr>
+              <a:t>What is calibration?</a:t>
+            </a:r>
+            <a:endParaRPr lang="en-US" sz="1380" dirty="0"/>
+          </a:p>
+          <a:p>
+            <a:r>
+              <a:rPr lang="en-US" sz="1380" dirty="0">
+                <a:solidFill>
+                  <a:srgbClr val="17364A"/>
+                </a:solidFill>
+                <a:latin typeface="Aptos" pitchFamily="34" charset="0"/>
+                <a:ea typeface="Aptos" pitchFamily="34" charset="-122"/>
+                <a:cs typeface="Aptos" pitchFamily="34" charset="-120"/>
+              </a:rPr>
+              <a:t>2.</a:t>
+            </a:r>
+            <a:endParaRPr lang="en-US" sz="1380" dirty="0"/>
           </a:p>
         </p:txBody>
       </p:sp>
       <p:sp>
         <p:nvSpPr>
           <p:cNvPr id="16" name="Shape 14"/>
-          <p:cNvSpPr/>
-          <p:nvPr/>
-        </p:nvSpPr>
-        <p:spPr>
-          <a:xfrm>
-            <a:off x="8366760" y="3639312"/>
-            <a:ext cx="2011680" cy="0"/>
-          </a:xfrm>
-          <a:prstGeom prst="line">
-            <a:avLst/>
-          </a:prstGeom>
-          <a:noFill/>
-          <a:ln w="63500">
-            <a:solidFill>
-              <a:srgbClr val="2F8A28"/>
-            </a:solidFill>
-            <a:prstDash val="solid"/>
-          </a:ln>
-        </p:spPr>
-      </p:sp>
-      <p:sp>
-        <p:nvSpPr>
-          <p:cNvPr id="17" name="Text 15"/>
-          <p:cNvSpPr/>
-          <p:nvPr/>
-        </p:nvSpPr>
-        <p:spPr>
-          <a:xfrm>
-            <a:off x="7909560" y="3849624"/>
-            <a:ext cx="2926080" cy="164592"/>
-          </a:xfrm>
-          <a:prstGeom prst="rect">
-            <a:avLst/>
-          </a:prstGeom>
-          <a:noFill/>
-          <a:ln/>
-        </p:spPr>
-        <p:txBody>
-          <a:bodyPr wrap="square" lIns="0" tIns="0" rIns="0" bIns="0" rtlCol="0" anchor="ctr"/>
-          <a:lstStyle/>
-          <a:p>
-            <a:pPr algn="ctr" indent="0" marL="0">
-              <a:buNone/>
-            </a:pPr>
-            <a:r>
-              <a:rPr lang="en-US" sz="900" dirty="0">
-                <a:solidFill>
-                  <a:srgbClr val="003A63"/>
-                </a:solidFill>
-                <a:latin typeface="Aptos" pitchFamily="34" charset="0"/>
-                <a:ea typeface="Aptos" pitchFamily="34" charset="-122"/>
-                <a:cs typeface="Aptos" pitchFamily="34" charset="-120"/>
-              </a:rPr>
-              <a:t>Human review</a:t>
-            </a:r>
-            <a:endParaRPr lang="en-US" sz="900" dirty="0"/>
-          </a:p>
-        </p:txBody>
-      </p:sp>
-      <p:sp>
-        <p:nvSpPr>
-          <p:cNvPr id="18" name="Shape 16"/>
           <p:cNvSpPr/>
           <p:nvPr/>
         </p:nvSpPr>
@@ -12170,7 +11790,7 @@
       </p:sp>
       <p:sp>
         <p:nvSpPr>
-          <p:cNvPr id="19" name="Text 17"/>
+          <p:cNvPr id="17" name="Text 15"/>
           <p:cNvSpPr/>
           <p:nvPr/>
         </p:nvSpPr>
@@ -12209,7 +11829,7 @@
       </p:sp>
       <p:sp>
         <p:nvSpPr>
-          <p:cNvPr id="20" name="Text 18"/>
+          <p:cNvPr id="18" name="Text 16"/>
           <p:cNvSpPr/>
           <p:nvPr/>
         </p:nvSpPr>
@@ -12717,13 +12337,11 @@
             </a:avLst>
           </a:prstGeom>
           <a:solidFill>
-            <a:srgbClr val="FFFFFF">
-              <a:alpha val="88000"/>
-            </a:srgbClr>
+            <a:srgbClr val="FFFFFF"/>
           </a:solidFill>
           <a:ln w="12700">
             <a:solidFill>
-              <a:srgbClr val="D6E8F2"/>
+              <a:srgbClr val="B9D7E6"/>
             </a:solidFill>
             <a:prstDash val="solid"/>
           </a:ln>
@@ -12731,26 +12349,42 @@
       </p:sp>
       <p:sp>
         <p:nvSpPr>
-          <p:cNvPr id="14" name="Shape 12"/>
-          <p:cNvSpPr/>
-          <p:nvPr/>
-        </p:nvSpPr>
-        <p:spPr>
-          <a:xfrm>
-            <a:off x="8046720" y="3108960"/>
-            <a:ext cx="2651760" cy="896112"/>
-          </a:xfrm>
-          <a:prstGeom prst="arc">
-            <a:avLst/>
-          </a:prstGeom>
-          <a:noFill/>
-          <a:ln w="25400">
-            <a:solidFill>
-              <a:srgbClr val="0068B7"/>
-            </a:solidFill>
-            <a:prstDash val="solid"/>
-          </a:ln>
-        </p:spPr>
+          <p:cNvPr id="14" name="Text 12"/>
+          <p:cNvSpPr/>
+          <p:nvPr/>
+        </p:nvSpPr>
+        <p:spPr>
+          <a:xfrm>
+            <a:off x="7799832" y="2935224"/>
+            <a:ext cx="3145536" cy="256032"/>
+          </a:xfrm>
+          <a:prstGeom prst="rect">
+            <a:avLst/>
+          </a:prstGeom>
+          <a:noFill/>
+          <a:ln/>
+        </p:spPr>
+        <p:txBody>
+          <a:bodyPr wrap="square" lIns="0" tIns="0" rIns="0" bIns="0" rtlCol="0" anchor="ctr"/>
+          <a:lstStyle/>
+          <a:p>
+            <a:pPr indent="0" marL="0">
+              <a:buNone/>
+            </a:pPr>
+            <a:r>
+              <a:rPr lang="en-US" sz="1300" b="1" dirty="0">
+                <a:solidFill>
+                  <a:srgbClr val="0068B7"/>
+                </a:solidFill>
+                <a:latin typeface="Aptos" pitchFamily="34" charset="0"/>
+                <a:ea typeface="Aptos" pitchFamily="34" charset="-122"/>
+                <a:cs typeface="Aptos" pitchFamily="34" charset="-120"/>
+              </a:rPr>
+              <a:t>Concept checkpoints</a:t>
+            </a:r>
+            <a:endParaRPr lang="en-US" sz="1300" dirty="0"/>
+          </a:p>
+        </p:txBody>
       </p:sp>
       <p:sp>
         <p:nvSpPr>
@@ -12760,102 +12394,53 @@
         </p:nvSpPr>
         <p:spPr>
           <a:xfrm>
-            <a:off x="7909560" y="3099816"/>
-            <a:ext cx="2926080" cy="256032"/>
-          </a:xfrm>
-          <a:prstGeom prst="rect">
-            <a:avLst/>
-          </a:prstGeom>
-          <a:noFill/>
-          <a:ln/>
-        </p:spPr>
-        <p:txBody>
-          <a:bodyPr wrap="square" lIns="0" tIns="0" rIns="0" bIns="0" rtlCol="0" anchor="ctr"/>
-          <a:lstStyle/>
-          <a:p>
-            <a:pPr algn="ctr" indent="0" marL="0">
-              <a:buNone/>
-            </a:pPr>
-            <a:r>
-              <a:rPr lang="en-US" sz="1500" b="1" dirty="0">
-                <a:solidFill>
-                  <a:srgbClr val="003A63"/>
-                </a:solidFill>
-                <a:latin typeface="Aptos" pitchFamily="34" charset="0"/>
-                <a:ea typeface="Aptos" pitchFamily="34" charset="-122"/>
-                <a:cs typeface="Aptos" pitchFamily="34" charset="-120"/>
-              </a:rPr>
-              <a:t>Risk</a:t>
-            </a:r>
-            <a:endParaRPr lang="en-US" sz="1500" dirty="0"/>
+            <a:off x="7818120" y="3300984"/>
+            <a:ext cx="3090672" cy="877824"/>
+          </a:xfrm>
+          <a:prstGeom prst="rect">
+            <a:avLst/>
+          </a:prstGeom>
+          <a:noFill/>
+          <a:ln/>
+        </p:spPr>
+        <p:txBody>
+          <a:bodyPr wrap="square" lIns="254" tIns="254" rIns="254" bIns="254" rtlCol="0" anchor="t">
+            <a:normAutofit/>
+          </a:bodyPr>
+          <a:lstStyle/>
+          <a:p>
+            <a:r>
+              <a:rPr lang="en-US" sz="1380" dirty="0">
+                <a:solidFill>
+                  <a:srgbClr val="17364A"/>
+                </a:solidFill>
+                <a:latin typeface="Aptos" pitchFamily="34" charset="0"/>
+                <a:ea typeface="Aptos" pitchFamily="34" charset="-122"/>
+                <a:cs typeface="Aptos" pitchFamily="34" charset="-120"/>
+              </a:rPr>
+              <a:t>NIST Artificial Intelligence Risk Management Framework:.</a:t>
+            </a:r>
+            <a:endParaRPr lang="en-US" sz="1380" dirty="0"/>
+          </a:p>
+          <a:p>
+            <a:r>
+              <a:rPr lang="en-US" sz="1380" dirty="0">
+                <a:solidFill>
+                  <a:srgbClr val="17364A"/>
+                </a:solidFill>
+                <a:latin typeface="Aptos" pitchFamily="34" charset="0"/>
+                <a:ea typeface="Aptos" pitchFamily="34" charset="-122"/>
+                <a:cs typeface="Aptos" pitchFamily="34" charset="-120"/>
+              </a:rPr>
+              <a:t>CDC Public Health Data Strategy:.</a:t>
+            </a:r>
+            <a:endParaRPr lang="en-US" sz="1380" dirty="0"/>
           </a:p>
         </p:txBody>
       </p:sp>
       <p:sp>
         <p:nvSpPr>
           <p:cNvPr id="16" name="Shape 14"/>
-          <p:cNvSpPr/>
-          <p:nvPr/>
-        </p:nvSpPr>
-        <p:spPr>
-          <a:xfrm>
-            <a:off x="8366760" y="3639312"/>
-            <a:ext cx="2011680" cy="0"/>
-          </a:xfrm>
-          <a:prstGeom prst="line">
-            <a:avLst/>
-          </a:prstGeom>
-          <a:noFill/>
-          <a:ln w="63500">
-            <a:solidFill>
-              <a:srgbClr val="2F8A28"/>
-            </a:solidFill>
-            <a:prstDash val="solid"/>
-          </a:ln>
-        </p:spPr>
-      </p:sp>
-      <p:sp>
-        <p:nvSpPr>
-          <p:cNvPr id="17" name="Text 15"/>
-          <p:cNvSpPr/>
-          <p:nvPr/>
-        </p:nvSpPr>
-        <p:spPr>
-          <a:xfrm>
-            <a:off x="7909560" y="3849624"/>
-            <a:ext cx="2926080" cy="164592"/>
-          </a:xfrm>
-          <a:prstGeom prst="rect">
-            <a:avLst/>
-          </a:prstGeom>
-          <a:noFill/>
-          <a:ln/>
-        </p:spPr>
-        <p:txBody>
-          <a:bodyPr wrap="square" lIns="0" tIns="0" rIns="0" bIns="0" rtlCol="0" anchor="ctr"/>
-          <a:lstStyle/>
-          <a:p>
-            <a:pPr algn="ctr" indent="0" marL="0">
-              <a:buNone/>
-            </a:pPr>
-            <a:r>
-              <a:rPr lang="en-US" sz="900" dirty="0">
-                <a:solidFill>
-                  <a:srgbClr val="003A63"/>
-                </a:solidFill>
-                <a:latin typeface="Aptos" pitchFamily="34" charset="0"/>
-                <a:ea typeface="Aptos" pitchFamily="34" charset="-122"/>
-                <a:cs typeface="Aptos" pitchFamily="34" charset="-120"/>
-              </a:rPr>
-              <a:t>Human review</a:t>
-            </a:r>
-            <a:endParaRPr lang="en-US" sz="900" dirty="0"/>
-          </a:p>
-        </p:txBody>
-      </p:sp>
-      <p:sp>
-        <p:nvSpPr>
-          <p:cNvPr id="18" name="Shape 16"/>
           <p:cNvSpPr/>
           <p:nvPr/>
         </p:nvSpPr>
@@ -12882,7 +12467,7 @@
       </p:sp>
       <p:sp>
         <p:nvSpPr>
-          <p:cNvPr id="19" name="Text 17"/>
+          <p:cNvPr id="17" name="Text 15"/>
           <p:cNvSpPr/>
           <p:nvPr/>
         </p:nvSpPr>
@@ -12921,7 +12506,7 @@
       </p:sp>
       <p:sp>
         <p:nvSpPr>
-          <p:cNvPr id="20" name="Text 18"/>
+          <p:cNvPr id="18" name="Text 16"/>
           <p:cNvSpPr/>
           <p:nvPr/>
         </p:nvSpPr>
@@ -13434,20 +13019,20 @@
         </p:nvSpPr>
         <p:spPr>
           <a:xfrm>
-            <a:off x="7818120" y="3977640"/>
-            <a:ext cx="972312" cy="749808"/>
+            <a:off x="8046720" y="3794760"/>
+            <a:ext cx="3063240" cy="1600200"/>
           </a:xfrm>
           <a:prstGeom prst="roundRect">
             <a:avLst>
-              <a:gd name="adj" fmla="val 14634"/>
+              <a:gd name="adj" fmla="val 6857"/>
             </a:avLst>
           </a:prstGeom>
           <a:solidFill>
-            <a:srgbClr val="0068B7"/>
+            <a:srgbClr val="FFFFFF"/>
           </a:solidFill>
           <a:ln w="12700">
             <a:solidFill>
-              <a:srgbClr val="0068B7"/>
+              <a:srgbClr val="B9D7E6"/>
             </a:solidFill>
             <a:prstDash val="solid"/>
           </a:ln>
@@ -13461,172 +13046,100 @@
         </p:nvSpPr>
         <p:spPr>
           <a:xfrm>
-            <a:off x="7891272" y="4169664"/>
-            <a:ext cx="826008" cy="310896"/>
-          </a:xfrm>
-          <a:prstGeom prst="rect">
-            <a:avLst/>
-          </a:prstGeom>
-          <a:noFill/>
-          <a:ln/>
-        </p:spPr>
-        <p:txBody>
-          <a:bodyPr wrap="square" lIns="0" tIns="0" rIns="0" bIns="0" rtlCol="0" anchor="ctr">
+            <a:off x="8211312" y="3941064"/>
+            <a:ext cx="2734056" cy="256032"/>
+          </a:xfrm>
+          <a:prstGeom prst="rect">
+            <a:avLst/>
+          </a:prstGeom>
+          <a:noFill/>
+          <a:ln/>
+        </p:spPr>
+        <p:txBody>
+          <a:bodyPr wrap="square" lIns="0" tIns="0" rIns="0" bIns="0" rtlCol="0" anchor="ctr"/>
+          <a:lstStyle/>
+          <a:p>
+            <a:pPr indent="0" marL="0">
+              <a:buNone/>
+            </a:pPr>
+            <a:r>
+              <a:rPr lang="en-US" sz="1300" b="1" dirty="0">
+                <a:solidFill>
+                  <a:srgbClr val="0068B7"/>
+                </a:solidFill>
+                <a:latin typeface="Aptos" pitchFamily="34" charset="0"/>
+                <a:ea typeface="Aptos" pitchFamily="34" charset="-122"/>
+                <a:cs typeface="Aptos" pitchFamily="34" charset="-120"/>
+              </a:rPr>
+              <a:t>Use the play links to</a:t>
+            </a:r>
+            <a:endParaRPr lang="en-US" sz="1300" dirty="0"/>
+          </a:p>
+        </p:txBody>
+      </p:sp>
+      <p:sp>
+        <p:nvSpPr>
+          <p:cNvPr id="15" name="Text 13"/>
+          <p:cNvSpPr/>
+          <p:nvPr/>
+        </p:nvSpPr>
+        <p:spPr>
+          <a:xfrm>
+            <a:off x="8229600" y="4306824"/>
+            <a:ext cx="2679192" cy="941832"/>
+          </a:xfrm>
+          <a:prstGeom prst="rect">
+            <a:avLst/>
+          </a:prstGeom>
+          <a:noFill/>
+          <a:ln/>
+        </p:spPr>
+        <p:txBody>
+          <a:bodyPr wrap="square" lIns="254" tIns="254" rIns="254" bIns="254" rtlCol="0" anchor="t">
             <a:normAutofit/>
           </a:bodyPr>
           <a:lstStyle/>
           <a:p>
-            <a:pPr algn="ctr" indent="0" marL="0">
-              <a:buNone/>
-            </a:pPr>
-            <a:r>
-              <a:rPr lang="en-US" sz="1500" b="1" dirty="0">
-                <a:solidFill>
-                  <a:srgbClr val="FFFFFF"/>
-                </a:solidFill>
-                <a:latin typeface="Aptos" pitchFamily="34" charset="0"/>
-                <a:ea typeface="Aptos" pitchFamily="34" charset="-122"/>
-                <a:cs typeface="Aptos" pitchFamily="34" charset="-120"/>
-              </a:rPr>
-              <a:t>Lesson</a:t>
-            </a:r>
-            <a:endParaRPr lang="en-US" sz="1500" dirty="0"/>
-          </a:p>
-        </p:txBody>
-      </p:sp>
-      <p:sp>
-        <p:nvSpPr>
-          <p:cNvPr id="15" name="Shape 13"/>
-          <p:cNvSpPr/>
-          <p:nvPr/>
-        </p:nvSpPr>
-        <p:spPr>
-          <a:xfrm>
-            <a:off x="9046464" y="3977640"/>
-            <a:ext cx="972312" cy="749808"/>
-          </a:xfrm>
-          <a:prstGeom prst="roundRect">
-            <a:avLst>
-              <a:gd name="adj" fmla="val 14634"/>
-            </a:avLst>
-          </a:prstGeom>
-          <a:solidFill>
-            <a:srgbClr val="2F8A28"/>
-          </a:solidFill>
-          <a:ln w="12700">
-            <a:solidFill>
-              <a:srgbClr val="2F8A28"/>
-            </a:solidFill>
-            <a:prstDash val="solid"/>
-          </a:ln>
-        </p:spPr>
-      </p:sp>
-      <p:sp>
-        <p:nvSpPr>
-          <p:cNvPr id="16" name="Text 14"/>
-          <p:cNvSpPr/>
-          <p:nvPr/>
-        </p:nvSpPr>
-        <p:spPr>
-          <a:xfrm>
-            <a:off x="9119616" y="4169664"/>
-            <a:ext cx="826008" cy="310896"/>
-          </a:xfrm>
-          <a:prstGeom prst="rect">
-            <a:avLst/>
-          </a:prstGeom>
-          <a:noFill/>
-          <a:ln/>
-        </p:spPr>
-        <p:txBody>
-          <a:bodyPr wrap="square" lIns="0" tIns="0" rIns="0" bIns="0" rtlCol="0" anchor="ctr">
-            <a:normAutofit/>
-          </a:bodyPr>
-          <a:lstStyle/>
-          <a:p>
-            <a:pPr algn="ctr" indent="0" marL="0">
-              <a:buNone/>
-            </a:pPr>
-            <a:r>
-              <a:rPr lang="en-US" sz="1500" b="1" dirty="0">
-                <a:solidFill>
-                  <a:srgbClr val="FFFFFF"/>
-                </a:solidFill>
-                <a:latin typeface="Aptos" pitchFamily="34" charset="0"/>
-                <a:ea typeface="Aptos" pitchFamily="34" charset="-122"/>
-                <a:cs typeface="Aptos" pitchFamily="34" charset="-120"/>
-              </a:rPr>
-              <a:t>Plays</a:t>
-            </a:r>
-            <a:endParaRPr lang="en-US" sz="1500" dirty="0"/>
-          </a:p>
-        </p:txBody>
-      </p:sp>
-      <p:sp>
-        <p:nvSpPr>
-          <p:cNvPr id="17" name="Shape 15"/>
-          <p:cNvSpPr/>
-          <p:nvPr/>
-        </p:nvSpPr>
-        <p:spPr>
-          <a:xfrm>
-            <a:off x="10274808" y="3977640"/>
-            <a:ext cx="972312" cy="749808"/>
-          </a:xfrm>
-          <a:prstGeom prst="roundRect">
-            <a:avLst>
-              <a:gd name="adj" fmla="val 14634"/>
-            </a:avLst>
-          </a:prstGeom>
-          <a:solidFill>
-            <a:srgbClr val="6A4CA3"/>
-          </a:solidFill>
-          <a:ln w="12700">
-            <a:solidFill>
-              <a:srgbClr val="6A4CA3"/>
-            </a:solidFill>
-            <a:prstDash val="solid"/>
-          </a:ln>
-        </p:spPr>
-      </p:sp>
-      <p:sp>
-        <p:nvSpPr>
-          <p:cNvPr id="18" name="Text 16"/>
-          <p:cNvSpPr/>
-          <p:nvPr/>
-        </p:nvSpPr>
-        <p:spPr>
-          <a:xfrm>
-            <a:off x="10347960" y="4169664"/>
-            <a:ext cx="826008" cy="310896"/>
-          </a:xfrm>
-          <a:prstGeom prst="rect">
-            <a:avLst/>
-          </a:prstGeom>
-          <a:noFill/>
-          <a:ln/>
-        </p:spPr>
-        <p:txBody>
-          <a:bodyPr wrap="square" lIns="0" tIns="0" rIns="0" bIns="0" rtlCol="0" anchor="ctr">
-            <a:normAutofit/>
-          </a:bodyPr>
-          <a:lstStyle/>
-          <a:p>
-            <a:pPr algn="ctr" indent="0" marL="0">
-              <a:buNone/>
-            </a:pPr>
-            <a:r>
-              <a:rPr lang="en-US" sz="1500" b="1" dirty="0">
-                <a:solidFill>
-                  <a:srgbClr val="FFFFFF"/>
-                </a:solidFill>
-                <a:latin typeface="Aptos" pitchFamily="34" charset="0"/>
-                <a:ea typeface="Aptos" pitchFamily="34" charset="-122"/>
-                <a:cs typeface="Aptos" pitchFamily="34" charset="-120"/>
-              </a:rPr>
-              <a:t>Action</a:t>
-            </a:r>
-            <a:endParaRPr lang="en-US" sz="1500" dirty="0"/>
+            <a:r>
+              <a:rPr lang="en-US" sz="1380" dirty="0">
+                <a:solidFill>
+                  <a:srgbClr val="17364A"/>
+                </a:solidFill>
+                <a:latin typeface="Aptos" pitchFamily="34" charset="0"/>
+                <a:ea typeface="Aptos" pitchFamily="34" charset="-122"/>
+                <a:cs typeface="Aptos" pitchFamily="34" charset="-120"/>
+              </a:rPr>
+              <a:t>Locate the decision point in the playbook sequence.</a:t>
+            </a:r>
+            <a:endParaRPr lang="en-US" sz="1380" dirty="0"/>
+          </a:p>
+          <a:p>
+            <a:r>
+              <a:rPr lang="en-US" sz="1380" dirty="0">
+                <a:solidFill>
+                  <a:srgbClr val="17364A"/>
+                </a:solidFill>
+                <a:latin typeface="Aptos" pitchFamily="34" charset="0"/>
+                <a:ea typeface="Aptos" pitchFamily="34" charset="-122"/>
+                <a:cs typeface="Aptos" pitchFamily="34" charset="-120"/>
+              </a:rPr>
+              <a:t>Identify who should participate in the work.</a:t>
+            </a:r>
+            <a:endParaRPr lang="en-US" sz="1380" dirty="0"/>
+          </a:p>
+          <a:p>
+            <a:r>
+              <a:rPr lang="en-US" sz="1380" dirty="0">
+                <a:solidFill>
+                  <a:srgbClr val="17364A"/>
+                </a:solidFill>
+                <a:latin typeface="Aptos" pitchFamily="34" charset="0"/>
+                <a:ea typeface="Aptos" pitchFamily="34" charset="-122"/>
+                <a:cs typeface="Aptos" pitchFamily="34" charset="-120"/>
+              </a:rPr>
+              <a:t>Document the review, approval, or implementation step.</a:t>
+            </a:r>
+            <a:endParaRPr lang="en-US" sz="1380" dirty="0"/>
           </a:p>
         </p:txBody>
       </p:sp>
@@ -14104,20 +13617,20 @@
         </p:nvSpPr>
         <p:spPr>
           <a:xfrm>
-            <a:off x="7818120" y="3977640"/>
-            <a:ext cx="972312" cy="749808"/>
+            <a:off x="8046720" y="3794760"/>
+            <a:ext cx="3063240" cy="1600200"/>
           </a:xfrm>
           <a:prstGeom prst="roundRect">
             <a:avLst>
-              <a:gd name="adj" fmla="val 14634"/>
+              <a:gd name="adj" fmla="val 6857"/>
             </a:avLst>
           </a:prstGeom>
           <a:solidFill>
-            <a:srgbClr val="0068B7"/>
+            <a:srgbClr val="FFFFFF"/>
           </a:solidFill>
           <a:ln w="12700">
             <a:solidFill>
-              <a:srgbClr val="0068B7"/>
+              <a:srgbClr val="B9D7E6"/>
             </a:solidFill>
             <a:prstDash val="solid"/>
           </a:ln>
@@ -14131,172 +13644,100 @@
         </p:nvSpPr>
         <p:spPr>
           <a:xfrm>
-            <a:off x="7891272" y="4169664"/>
-            <a:ext cx="826008" cy="310896"/>
-          </a:xfrm>
-          <a:prstGeom prst="rect">
-            <a:avLst/>
-          </a:prstGeom>
-          <a:noFill/>
-          <a:ln/>
-        </p:spPr>
-        <p:txBody>
-          <a:bodyPr wrap="square" lIns="0" tIns="0" rIns="0" bIns="0" rtlCol="0" anchor="ctr">
+            <a:off x="8211312" y="3941064"/>
+            <a:ext cx="2734056" cy="256032"/>
+          </a:xfrm>
+          <a:prstGeom prst="rect">
+            <a:avLst/>
+          </a:prstGeom>
+          <a:noFill/>
+          <a:ln/>
+        </p:spPr>
+        <p:txBody>
+          <a:bodyPr wrap="square" lIns="0" tIns="0" rIns="0" bIns="0" rtlCol="0" anchor="ctr"/>
+          <a:lstStyle/>
+          <a:p>
+            <a:pPr indent="0" marL="0">
+              <a:buNone/>
+            </a:pPr>
+            <a:r>
+              <a:rPr lang="en-US" sz="1300" b="1" dirty="0">
+                <a:solidFill>
+                  <a:srgbClr val="0068B7"/>
+                </a:solidFill>
+                <a:latin typeface="Aptos" pitchFamily="34" charset="0"/>
+                <a:ea typeface="Aptos" pitchFamily="34" charset="-122"/>
+                <a:cs typeface="Aptos" pitchFamily="34" charset="-120"/>
+              </a:rPr>
+              <a:t>Tool selection cues</a:t>
+            </a:r>
+            <a:endParaRPr lang="en-US" sz="1300" dirty="0"/>
+          </a:p>
+        </p:txBody>
+      </p:sp>
+      <p:sp>
+        <p:nvSpPr>
+          <p:cNvPr id="15" name="Text 13"/>
+          <p:cNvSpPr/>
+          <p:nvPr/>
+        </p:nvSpPr>
+        <p:spPr>
+          <a:xfrm>
+            <a:off x="8229600" y="4306824"/>
+            <a:ext cx="2679192" cy="941832"/>
+          </a:xfrm>
+          <a:prstGeom prst="rect">
+            <a:avLst/>
+          </a:prstGeom>
+          <a:noFill/>
+          <a:ln/>
+        </p:spPr>
+        <p:txBody>
+          <a:bodyPr wrap="square" lIns="254" tIns="254" rIns="254" bIns="254" rtlCol="0" anchor="t">
             <a:normAutofit/>
           </a:bodyPr>
           <a:lstStyle/>
           <a:p>
-            <a:pPr algn="ctr" indent="0" marL="0">
-              <a:buNone/>
-            </a:pPr>
-            <a:r>
-              <a:rPr lang="en-US" sz="1500" b="1" dirty="0">
-                <a:solidFill>
-                  <a:srgbClr val="FFFFFF"/>
-                </a:solidFill>
-                <a:latin typeface="Aptos" pitchFamily="34" charset="0"/>
-                <a:ea typeface="Aptos" pitchFamily="34" charset="-122"/>
-                <a:cs typeface="Aptos" pitchFamily="34" charset="-120"/>
-              </a:rPr>
-              <a:t>Concept</a:t>
-            </a:r>
-            <a:endParaRPr lang="en-US" sz="1500" dirty="0"/>
-          </a:p>
-        </p:txBody>
-      </p:sp>
-      <p:sp>
-        <p:nvSpPr>
-          <p:cNvPr id="15" name="Shape 13"/>
-          <p:cNvSpPr/>
-          <p:nvPr/>
-        </p:nvSpPr>
-        <p:spPr>
-          <a:xfrm>
-            <a:off x="9046464" y="3977640"/>
-            <a:ext cx="972312" cy="749808"/>
-          </a:xfrm>
-          <a:prstGeom prst="roundRect">
-            <a:avLst>
-              <a:gd name="adj" fmla="val 14634"/>
-            </a:avLst>
-          </a:prstGeom>
-          <a:solidFill>
-            <a:srgbClr val="2F8A28"/>
-          </a:solidFill>
-          <a:ln w="12700">
-            <a:solidFill>
-              <a:srgbClr val="2F8A28"/>
-            </a:solidFill>
-            <a:prstDash val="solid"/>
-          </a:ln>
-        </p:spPr>
-      </p:sp>
-      <p:sp>
-        <p:nvSpPr>
-          <p:cNvPr id="16" name="Text 14"/>
-          <p:cNvSpPr/>
-          <p:nvPr/>
-        </p:nvSpPr>
-        <p:spPr>
-          <a:xfrm>
-            <a:off x="9119616" y="4169664"/>
-            <a:ext cx="826008" cy="310896"/>
-          </a:xfrm>
-          <a:prstGeom prst="rect">
-            <a:avLst/>
-          </a:prstGeom>
-          <a:noFill/>
-          <a:ln/>
-        </p:spPr>
-        <p:txBody>
-          <a:bodyPr wrap="square" lIns="0" tIns="0" rIns="0" bIns="0" rtlCol="0" anchor="ctr">
-            <a:normAutofit/>
-          </a:bodyPr>
-          <a:lstStyle/>
-          <a:p>
-            <a:pPr algn="ctr" indent="0" marL="0">
-              <a:buNone/>
-            </a:pPr>
-            <a:r>
-              <a:rPr lang="en-US" sz="1500" b="1" dirty="0">
-                <a:solidFill>
-                  <a:srgbClr val="FFFFFF"/>
-                </a:solidFill>
-                <a:latin typeface="Aptos" pitchFamily="34" charset="0"/>
-                <a:ea typeface="Aptos" pitchFamily="34" charset="-122"/>
-                <a:cs typeface="Aptos" pitchFamily="34" charset="-120"/>
-              </a:rPr>
-              <a:t>Tool</a:t>
-            </a:r>
-            <a:endParaRPr lang="en-US" sz="1500" dirty="0"/>
-          </a:p>
-        </p:txBody>
-      </p:sp>
-      <p:sp>
-        <p:nvSpPr>
-          <p:cNvPr id="17" name="Shape 15"/>
-          <p:cNvSpPr/>
-          <p:nvPr/>
-        </p:nvSpPr>
-        <p:spPr>
-          <a:xfrm>
-            <a:off x="10274808" y="3977640"/>
-            <a:ext cx="972312" cy="749808"/>
-          </a:xfrm>
-          <a:prstGeom prst="roundRect">
-            <a:avLst>
-              <a:gd name="adj" fmla="val 14634"/>
-            </a:avLst>
-          </a:prstGeom>
-          <a:solidFill>
-            <a:srgbClr val="D69A2D"/>
-          </a:solidFill>
-          <a:ln w="12700">
-            <a:solidFill>
-              <a:srgbClr val="D69A2D"/>
-            </a:solidFill>
-            <a:prstDash val="solid"/>
-          </a:ln>
-        </p:spPr>
-      </p:sp>
-      <p:sp>
-        <p:nvSpPr>
-          <p:cNvPr id="18" name="Text 16"/>
-          <p:cNvSpPr/>
-          <p:nvPr/>
-        </p:nvSpPr>
-        <p:spPr>
-          <a:xfrm>
-            <a:off x="10347960" y="4169664"/>
-            <a:ext cx="826008" cy="310896"/>
-          </a:xfrm>
-          <a:prstGeom prst="rect">
-            <a:avLst/>
-          </a:prstGeom>
-          <a:noFill/>
-          <a:ln/>
-        </p:spPr>
-        <p:txBody>
-          <a:bodyPr wrap="square" lIns="0" tIns="0" rIns="0" bIns="0" rtlCol="0" anchor="ctr">
-            <a:normAutofit/>
-          </a:bodyPr>
-          <a:lstStyle/>
-          <a:p>
-            <a:pPr algn="ctr" indent="0" marL="0">
-              <a:buNone/>
-            </a:pPr>
-            <a:r>
-              <a:rPr lang="en-US" sz="1500" b="1" dirty="0">
-                <a:solidFill>
-                  <a:srgbClr val="FFFFFF"/>
-                </a:solidFill>
-                <a:latin typeface="Aptos" pitchFamily="34" charset="0"/>
-                <a:ea typeface="Aptos" pitchFamily="34" charset="-122"/>
-                <a:cs typeface="Aptos" pitchFamily="34" charset="-120"/>
-              </a:rPr>
-              <a:t>Artifact</a:t>
-            </a:r>
-            <a:endParaRPr lang="en-US" sz="1500" dirty="0"/>
+            <a:r>
+              <a:rPr lang="en-US" sz="1380" dirty="0">
+                <a:solidFill>
+                  <a:srgbClr val="17364A"/>
+                </a:solidFill>
+                <a:latin typeface="Aptos" pitchFamily="34" charset="0"/>
+                <a:ea typeface="Aptos" pitchFamily="34" charset="-122"/>
+                <a:cs typeface="Aptos" pitchFamily="34" charset="-120"/>
+              </a:rPr>
+              <a:t>Use a tool when no comparable local process exists.</a:t>
+            </a:r>
+            <a:endParaRPr lang="en-US" sz="1380" dirty="0"/>
+          </a:p>
+          <a:p>
+            <a:r>
+              <a:rPr lang="en-US" sz="1380" dirty="0">
+                <a:solidFill>
+                  <a:srgbClr val="17364A"/>
+                </a:solidFill>
+                <a:latin typeface="Aptos" pitchFamily="34" charset="0"/>
+                <a:ea typeface="Aptos" pitchFamily="34" charset="-122"/>
+                <a:cs typeface="Aptos" pitchFamily="34" charset="-120"/>
+              </a:rPr>
+              <a:t>Adapt existing department templates when they already fit the purpose.</a:t>
+            </a:r>
+            <a:endParaRPr lang="en-US" sz="1380" dirty="0"/>
+          </a:p>
+          <a:p>
+            <a:r>
+              <a:rPr lang="en-US" sz="1380" dirty="0">
+                <a:solidFill>
+                  <a:srgbClr val="17364A"/>
+                </a:solidFill>
+                <a:latin typeface="Aptos" pitchFamily="34" charset="0"/>
+                <a:ea typeface="Aptos" pitchFamily="34" charset="-122"/>
+                <a:cs typeface="Aptos" pitchFamily="34" charset="-120"/>
+              </a:rPr>
+              <a:t>Save the completed artifact as evidence of the decision.</a:t>
+            </a:r>
+            <a:endParaRPr lang="en-US" sz="1380" dirty="0"/>
           </a:p>
         </p:txBody>
       </p:sp>
@@ -14769,13 +14210,11 @@
             </a:avLst>
           </a:prstGeom>
           <a:solidFill>
-            <a:srgbClr val="FFFFFF">
-              <a:alpha val="88000"/>
-            </a:srgbClr>
+            <a:srgbClr val="FFFFFF"/>
           </a:solidFill>
           <a:ln w="12700">
             <a:solidFill>
-              <a:srgbClr val="D6E8F2"/>
+              <a:srgbClr val="B9D7E6"/>
             </a:solidFill>
             <a:prstDash val="solid"/>
           </a:ln>
@@ -14783,26 +14222,42 @@
       </p:sp>
       <p:sp>
         <p:nvSpPr>
-          <p:cNvPr id="14" name="Shape 12"/>
-          <p:cNvSpPr/>
-          <p:nvPr/>
-        </p:nvSpPr>
-        <p:spPr>
-          <a:xfrm>
-            <a:off x="8046720" y="3108960"/>
-            <a:ext cx="2651760" cy="896112"/>
-          </a:xfrm>
-          <a:prstGeom prst="arc">
-            <a:avLst/>
-          </a:prstGeom>
-          <a:noFill/>
-          <a:ln w="25400">
-            <a:solidFill>
-              <a:srgbClr val="0068B7"/>
-            </a:solidFill>
-            <a:prstDash val="solid"/>
-          </a:ln>
-        </p:spPr>
+          <p:cNvPr id="14" name="Text 12"/>
+          <p:cNvSpPr/>
+          <p:nvPr/>
+        </p:nvSpPr>
+        <p:spPr>
+          <a:xfrm>
+            <a:off x="7799832" y="2935224"/>
+            <a:ext cx="3145536" cy="256032"/>
+          </a:xfrm>
+          <a:prstGeom prst="rect">
+            <a:avLst/>
+          </a:prstGeom>
+          <a:noFill/>
+          <a:ln/>
+        </p:spPr>
+        <p:txBody>
+          <a:bodyPr wrap="square" lIns="0" tIns="0" rIns="0" bIns="0" rtlCol="0" anchor="ctr"/>
+          <a:lstStyle/>
+          <a:p>
+            <a:pPr indent="0" marL="0">
+              <a:buNone/>
+            </a:pPr>
+            <a:r>
+              <a:rPr lang="en-US" sz="1300" b="1" dirty="0">
+                <a:solidFill>
+                  <a:srgbClr val="0068B7"/>
+                </a:solidFill>
+                <a:latin typeface="Aptos" pitchFamily="34" charset="0"/>
+                <a:ea typeface="Aptos" pitchFamily="34" charset="-122"/>
+                <a:cs typeface="Aptos" pitchFamily="34" charset="-120"/>
+              </a:rPr>
+              <a:t>Concept checkpoints</a:t>
+            </a:r>
+            <a:endParaRPr lang="en-US" sz="1300" dirty="0"/>
+          </a:p>
+        </p:txBody>
       </p:sp>
       <p:sp>
         <p:nvSpPr>
@@ -14812,102 +14267,53 @@
         </p:nvSpPr>
         <p:spPr>
           <a:xfrm>
-            <a:off x="7909560" y="3099816"/>
-            <a:ext cx="2926080" cy="256032"/>
-          </a:xfrm>
-          <a:prstGeom prst="rect">
-            <a:avLst/>
-          </a:prstGeom>
-          <a:noFill/>
-          <a:ln/>
-        </p:spPr>
-        <p:txBody>
-          <a:bodyPr wrap="square" lIns="0" tIns="0" rIns="0" bIns="0" rtlCol="0" anchor="ctr"/>
-          <a:lstStyle/>
-          <a:p>
-            <a:pPr algn="ctr" indent="0" marL="0">
-              <a:buNone/>
-            </a:pPr>
-            <a:r>
-              <a:rPr lang="en-US" sz="1500" b="1" dirty="0">
-                <a:solidFill>
-                  <a:srgbClr val="003A63"/>
-                </a:solidFill>
-                <a:latin typeface="Aptos" pitchFamily="34" charset="0"/>
-                <a:ea typeface="Aptos" pitchFamily="34" charset="-122"/>
-                <a:cs typeface="Aptos" pitchFamily="34" charset="-120"/>
-              </a:rPr>
-              <a:t>Risk</a:t>
-            </a:r>
-            <a:endParaRPr lang="en-US" sz="1500" dirty="0"/>
+            <a:off x="7818120" y="3300984"/>
+            <a:ext cx="3090672" cy="877824"/>
+          </a:xfrm>
+          <a:prstGeom prst="rect">
+            <a:avLst/>
+          </a:prstGeom>
+          <a:noFill/>
+          <a:ln/>
+        </p:spPr>
+        <p:txBody>
+          <a:bodyPr wrap="square" lIns="254" tIns="254" rIns="254" bIns="254" rtlCol="0" anchor="t">
+            <a:normAutofit/>
+          </a:bodyPr>
+          <a:lstStyle/>
+          <a:p>
+            <a:r>
+              <a:rPr lang="en-US" sz="1380" dirty="0">
+                <a:solidFill>
+                  <a:srgbClr val="17364A"/>
+                </a:solidFill>
+                <a:latin typeface="Aptos" pitchFamily="34" charset="0"/>
+                <a:ea typeface="Aptos" pitchFamily="34" charset="-122"/>
+                <a:cs typeface="Aptos" pitchFamily="34" charset="-120"/>
+              </a:rPr>
+              <a:t>Identify equity and operational risks associated with risk scores.</a:t>
+            </a:r>
+            <a:endParaRPr lang="en-US" sz="1380" dirty="0"/>
+          </a:p>
+          <a:p>
+            <a:r>
+              <a:rPr lang="en-US" sz="1380" dirty="0">
+                <a:solidFill>
+                  <a:srgbClr val="17364A"/>
+                </a:solidFill>
+                <a:latin typeface="Aptos" pitchFamily="34" charset="0"/>
+                <a:ea typeface="Aptos" pitchFamily="34" charset="-122"/>
+                <a:cs typeface="Aptos" pitchFamily="34" charset="-120"/>
+              </a:rPr>
+              <a:t>Design safeguards for use of predictive outputs in resource allocation, outreach,.</a:t>
+            </a:r>
+            <a:endParaRPr lang="en-US" sz="1380" dirty="0"/>
           </a:p>
         </p:txBody>
       </p:sp>
       <p:sp>
         <p:nvSpPr>
           <p:cNvPr id="16" name="Shape 14"/>
-          <p:cNvSpPr/>
-          <p:nvPr/>
-        </p:nvSpPr>
-        <p:spPr>
-          <a:xfrm>
-            <a:off x="8366760" y="3639312"/>
-            <a:ext cx="2011680" cy="0"/>
-          </a:xfrm>
-          <a:prstGeom prst="line">
-            <a:avLst/>
-          </a:prstGeom>
-          <a:noFill/>
-          <a:ln w="63500">
-            <a:solidFill>
-              <a:srgbClr val="2F8A28"/>
-            </a:solidFill>
-            <a:prstDash val="solid"/>
-          </a:ln>
-        </p:spPr>
-      </p:sp>
-      <p:sp>
-        <p:nvSpPr>
-          <p:cNvPr id="17" name="Text 15"/>
-          <p:cNvSpPr/>
-          <p:nvPr/>
-        </p:nvSpPr>
-        <p:spPr>
-          <a:xfrm>
-            <a:off x="7909560" y="3849624"/>
-            <a:ext cx="2926080" cy="164592"/>
-          </a:xfrm>
-          <a:prstGeom prst="rect">
-            <a:avLst/>
-          </a:prstGeom>
-          <a:noFill/>
-          <a:ln/>
-        </p:spPr>
-        <p:txBody>
-          <a:bodyPr wrap="square" lIns="0" tIns="0" rIns="0" bIns="0" rtlCol="0" anchor="ctr"/>
-          <a:lstStyle/>
-          <a:p>
-            <a:pPr algn="ctr" indent="0" marL="0">
-              <a:buNone/>
-            </a:pPr>
-            <a:r>
-              <a:rPr lang="en-US" sz="900" dirty="0">
-                <a:solidFill>
-                  <a:srgbClr val="003A63"/>
-                </a:solidFill>
-                <a:latin typeface="Aptos" pitchFamily="34" charset="0"/>
-                <a:ea typeface="Aptos" pitchFamily="34" charset="-122"/>
-                <a:cs typeface="Aptos" pitchFamily="34" charset="-120"/>
-              </a:rPr>
-              <a:t>Human review</a:t>
-            </a:r>
-            <a:endParaRPr lang="en-US" sz="900" dirty="0"/>
-          </a:p>
-        </p:txBody>
-      </p:sp>
-      <p:sp>
-        <p:nvSpPr>
-          <p:cNvPr id="18" name="Shape 16"/>
           <p:cNvSpPr/>
           <p:nvPr/>
         </p:nvSpPr>
@@ -14934,7 +14340,7 @@
       </p:sp>
       <p:sp>
         <p:nvSpPr>
-          <p:cNvPr id="19" name="Text 17"/>
+          <p:cNvPr id="17" name="Text 15"/>
           <p:cNvSpPr/>
           <p:nvPr/>
         </p:nvSpPr>
@@ -14973,7 +14379,7 @@
       </p:sp>
       <p:sp>
         <p:nvSpPr>
-          <p:cNvPr id="20" name="Text 18"/>
+          <p:cNvPr id="18" name="Text 16"/>
           <p:cNvSpPr/>
           <p:nvPr/>
         </p:nvSpPr>
@@ -15453,13 +14859,11 @@
             </a:avLst>
           </a:prstGeom>
           <a:solidFill>
-            <a:srgbClr val="FFFFFF">
-              <a:alpha val="88000"/>
-            </a:srgbClr>
+            <a:srgbClr val="FFFFFF"/>
           </a:solidFill>
           <a:ln w="12700">
             <a:solidFill>
-              <a:srgbClr val="D6E8F2"/>
+              <a:srgbClr val="B9D7E6"/>
             </a:solidFill>
             <a:prstDash val="solid"/>
           </a:ln>
@@ -15467,26 +14871,42 @@
       </p:sp>
       <p:sp>
         <p:nvSpPr>
-          <p:cNvPr id="14" name="Shape 12"/>
-          <p:cNvSpPr/>
-          <p:nvPr/>
-        </p:nvSpPr>
-        <p:spPr>
-          <a:xfrm>
-            <a:off x="8046720" y="3108960"/>
-            <a:ext cx="2651760" cy="896112"/>
-          </a:xfrm>
-          <a:prstGeom prst="arc">
-            <a:avLst/>
-          </a:prstGeom>
-          <a:noFill/>
-          <a:ln w="25400">
-            <a:solidFill>
-              <a:srgbClr val="0068B7"/>
-            </a:solidFill>
-            <a:prstDash val="solid"/>
-          </a:ln>
-        </p:spPr>
+          <p:cNvPr id="14" name="Text 12"/>
+          <p:cNvSpPr/>
+          <p:nvPr/>
+        </p:nvSpPr>
+        <p:spPr>
+          <a:xfrm>
+            <a:off x="7799832" y="2935224"/>
+            <a:ext cx="3145536" cy="256032"/>
+          </a:xfrm>
+          <a:prstGeom prst="rect">
+            <a:avLst/>
+          </a:prstGeom>
+          <a:noFill/>
+          <a:ln/>
+        </p:spPr>
+        <p:txBody>
+          <a:bodyPr wrap="square" lIns="0" tIns="0" rIns="0" bIns="0" rtlCol="0" anchor="ctr"/>
+          <a:lstStyle/>
+          <a:p>
+            <a:pPr indent="0" marL="0">
+              <a:buNone/>
+            </a:pPr>
+            <a:r>
+              <a:rPr lang="en-US" sz="1300" b="1" dirty="0">
+                <a:solidFill>
+                  <a:srgbClr val="0068B7"/>
+                </a:solidFill>
+                <a:latin typeface="Aptos" pitchFamily="34" charset="0"/>
+                <a:ea typeface="Aptos" pitchFamily="34" charset="-122"/>
+                <a:cs typeface="Aptos" pitchFamily="34" charset="-120"/>
+              </a:rPr>
+              <a:t>Concept checkpoints</a:t>
+            </a:r>
+            <a:endParaRPr lang="en-US" sz="1300" dirty="0"/>
+          </a:p>
+        </p:txBody>
       </p:sp>
       <p:sp>
         <p:nvSpPr>
@@ -15496,102 +14916,39 @@
         </p:nvSpPr>
         <p:spPr>
           <a:xfrm>
-            <a:off x="7909560" y="3099816"/>
-            <a:ext cx="2926080" cy="256032"/>
-          </a:xfrm>
-          <a:prstGeom prst="rect">
-            <a:avLst/>
-          </a:prstGeom>
-          <a:noFill/>
-          <a:ln/>
-        </p:spPr>
-        <p:txBody>
-          <a:bodyPr wrap="square" lIns="0" tIns="0" rIns="0" bIns="0" rtlCol="0" anchor="ctr"/>
-          <a:lstStyle/>
-          <a:p>
-            <a:pPr algn="ctr" indent="0" marL="0">
-              <a:buNone/>
-            </a:pPr>
-            <a:r>
-              <a:rPr lang="en-US" sz="1500" b="1" dirty="0">
-                <a:solidFill>
-                  <a:srgbClr val="003A63"/>
-                </a:solidFill>
-                <a:latin typeface="Aptos" pitchFamily="34" charset="0"/>
-                <a:ea typeface="Aptos" pitchFamily="34" charset="-122"/>
-                <a:cs typeface="Aptos" pitchFamily="34" charset="-120"/>
-              </a:rPr>
-              <a:t>Risk</a:t>
-            </a:r>
-            <a:endParaRPr lang="en-US" sz="1500" dirty="0"/>
+            <a:off x="7818120" y="3300984"/>
+            <a:ext cx="3090672" cy="877824"/>
+          </a:xfrm>
+          <a:prstGeom prst="rect">
+            <a:avLst/>
+          </a:prstGeom>
+          <a:noFill/>
+          <a:ln/>
+        </p:spPr>
+        <p:txBody>
+          <a:bodyPr wrap="square" lIns="254" tIns="254" rIns="254" bIns="254" rtlCol="0" anchor="t">
+            <a:normAutofit/>
+          </a:bodyPr>
+          <a:lstStyle/>
+          <a:p>
+            <a:r>
+              <a:rPr lang="en-US" sz="1380" dirty="0">
+                <a:solidFill>
+                  <a:srgbClr val="17364A"/>
+                </a:solidFill>
+                <a:latin typeface="Aptos" pitchFamily="34" charset="0"/>
+                <a:ea typeface="Aptos" pitchFamily="34" charset="-122"/>
+                <a:cs typeface="Aptos" pitchFamily="34" charset="-120"/>
+              </a:rPr>
+              <a:t>Produce a predictive model review plan for a public health workflow.</a:t>
+            </a:r>
+            <a:endParaRPr lang="en-US" sz="1380" dirty="0"/>
           </a:p>
         </p:txBody>
       </p:sp>
       <p:sp>
         <p:nvSpPr>
           <p:cNvPr id="16" name="Shape 14"/>
-          <p:cNvSpPr/>
-          <p:nvPr/>
-        </p:nvSpPr>
-        <p:spPr>
-          <a:xfrm>
-            <a:off x="8366760" y="3639312"/>
-            <a:ext cx="2011680" cy="0"/>
-          </a:xfrm>
-          <a:prstGeom prst="line">
-            <a:avLst/>
-          </a:prstGeom>
-          <a:noFill/>
-          <a:ln w="63500">
-            <a:solidFill>
-              <a:srgbClr val="2F8A28"/>
-            </a:solidFill>
-            <a:prstDash val="solid"/>
-          </a:ln>
-        </p:spPr>
-      </p:sp>
-      <p:sp>
-        <p:nvSpPr>
-          <p:cNvPr id="17" name="Text 15"/>
-          <p:cNvSpPr/>
-          <p:nvPr/>
-        </p:nvSpPr>
-        <p:spPr>
-          <a:xfrm>
-            <a:off x="7909560" y="3849624"/>
-            <a:ext cx="2926080" cy="164592"/>
-          </a:xfrm>
-          <a:prstGeom prst="rect">
-            <a:avLst/>
-          </a:prstGeom>
-          <a:noFill/>
-          <a:ln/>
-        </p:spPr>
-        <p:txBody>
-          <a:bodyPr wrap="square" lIns="0" tIns="0" rIns="0" bIns="0" rtlCol="0" anchor="ctr"/>
-          <a:lstStyle/>
-          <a:p>
-            <a:pPr algn="ctr" indent="0" marL="0">
-              <a:buNone/>
-            </a:pPr>
-            <a:r>
-              <a:rPr lang="en-US" sz="900" dirty="0">
-                <a:solidFill>
-                  <a:srgbClr val="003A63"/>
-                </a:solidFill>
-                <a:latin typeface="Aptos" pitchFamily="34" charset="0"/>
-                <a:ea typeface="Aptos" pitchFamily="34" charset="-122"/>
-                <a:cs typeface="Aptos" pitchFamily="34" charset="-120"/>
-              </a:rPr>
-              <a:t>Human review</a:t>
-            </a:r>
-            <a:endParaRPr lang="en-US" sz="900" dirty="0"/>
-          </a:p>
-        </p:txBody>
-      </p:sp>
-      <p:sp>
-        <p:nvSpPr>
-          <p:cNvPr id="18" name="Shape 16"/>
           <p:cNvSpPr/>
           <p:nvPr/>
         </p:nvSpPr>
@@ -15618,7 +14975,7 @@
       </p:sp>
       <p:sp>
         <p:nvSpPr>
-          <p:cNvPr id="19" name="Text 17"/>
+          <p:cNvPr id="17" name="Text 15"/>
           <p:cNvSpPr/>
           <p:nvPr/>
         </p:nvSpPr>
@@ -15657,7 +15014,7 @@
       </p:sp>
       <p:sp>
         <p:nvSpPr>
-          <p:cNvPr id="20" name="Text 18"/>
+          <p:cNvPr id="18" name="Text 16"/>
           <p:cNvSpPr/>
           <p:nvPr/>
         </p:nvSpPr>
@@ -16165,13 +15522,11 @@
             </a:avLst>
           </a:prstGeom>
           <a:solidFill>
-            <a:srgbClr val="FFFFFF">
-              <a:alpha val="88000"/>
-            </a:srgbClr>
+            <a:srgbClr val="FFFFFF"/>
           </a:solidFill>
           <a:ln w="12700">
             <a:solidFill>
-              <a:srgbClr val="D6E8F2"/>
+              <a:srgbClr val="B9D7E6"/>
             </a:solidFill>
             <a:prstDash val="solid"/>
           </a:ln>
@@ -16179,26 +15534,42 @@
       </p:sp>
       <p:sp>
         <p:nvSpPr>
-          <p:cNvPr id="14" name="Shape 12"/>
-          <p:cNvSpPr/>
-          <p:nvPr/>
-        </p:nvSpPr>
-        <p:spPr>
-          <a:xfrm>
-            <a:off x="8046720" y="3108960"/>
-            <a:ext cx="2651760" cy="896112"/>
-          </a:xfrm>
-          <a:prstGeom prst="arc">
-            <a:avLst/>
-          </a:prstGeom>
-          <a:noFill/>
-          <a:ln w="25400">
-            <a:solidFill>
-              <a:srgbClr val="0068B7"/>
-            </a:solidFill>
-            <a:prstDash val="solid"/>
-          </a:ln>
-        </p:spPr>
+          <p:cNvPr id="14" name="Text 12"/>
+          <p:cNvSpPr/>
+          <p:nvPr/>
+        </p:nvSpPr>
+        <p:spPr>
+          <a:xfrm>
+            <a:off x="7799832" y="2935224"/>
+            <a:ext cx="3145536" cy="256032"/>
+          </a:xfrm>
+          <a:prstGeom prst="rect">
+            <a:avLst/>
+          </a:prstGeom>
+          <a:noFill/>
+          <a:ln/>
+        </p:spPr>
+        <p:txBody>
+          <a:bodyPr wrap="square" lIns="0" tIns="0" rIns="0" bIns="0" rtlCol="0" anchor="ctr"/>
+          <a:lstStyle/>
+          <a:p>
+            <a:pPr indent="0" marL="0">
+              <a:buNone/>
+            </a:pPr>
+            <a:r>
+              <a:rPr lang="en-US" sz="1300" b="1" dirty="0">
+                <a:solidFill>
+                  <a:srgbClr val="0068B7"/>
+                </a:solidFill>
+                <a:latin typeface="Aptos" pitchFamily="34" charset="0"/>
+                <a:ea typeface="Aptos" pitchFamily="34" charset="-122"/>
+                <a:cs typeface="Aptos" pitchFamily="34" charset="-120"/>
+              </a:rPr>
+              <a:t>Concept checkpoints</a:t>
+            </a:r>
+            <a:endParaRPr lang="en-US" sz="1300" dirty="0"/>
+          </a:p>
+        </p:txBody>
       </p:sp>
       <p:sp>
         <p:nvSpPr>
@@ -16208,102 +15579,67 @@
         </p:nvSpPr>
         <p:spPr>
           <a:xfrm>
-            <a:off x="7909560" y="3099816"/>
-            <a:ext cx="2926080" cy="256032"/>
-          </a:xfrm>
-          <a:prstGeom prst="rect">
-            <a:avLst/>
-          </a:prstGeom>
-          <a:noFill/>
-          <a:ln/>
-        </p:spPr>
-        <p:txBody>
-          <a:bodyPr wrap="square" lIns="0" tIns="0" rIns="0" bIns="0" rtlCol="0" anchor="ctr"/>
-          <a:lstStyle/>
-          <a:p>
-            <a:pPr algn="ctr" indent="0" marL="0">
-              <a:buNone/>
-            </a:pPr>
-            <a:r>
-              <a:rPr lang="en-US" sz="1500" b="1" dirty="0">
-                <a:solidFill>
-                  <a:srgbClr val="003A63"/>
-                </a:solidFill>
-                <a:latin typeface="Aptos" pitchFamily="34" charset="0"/>
-                <a:ea typeface="Aptos" pitchFamily="34" charset="-122"/>
-                <a:cs typeface="Aptos" pitchFamily="34" charset="-120"/>
-              </a:rPr>
-              <a:t>Risk</a:t>
-            </a:r>
-            <a:endParaRPr lang="en-US" sz="1500" dirty="0"/>
+            <a:off x="7818120" y="3300984"/>
+            <a:ext cx="3090672" cy="877824"/>
+          </a:xfrm>
+          <a:prstGeom prst="rect">
+            <a:avLst/>
+          </a:prstGeom>
+          <a:noFill/>
+          <a:ln/>
+        </p:spPr>
+        <p:txBody>
+          <a:bodyPr wrap="square" lIns="254" tIns="254" rIns="254" bIns="254" rtlCol="0" anchor="t">
+            <a:normAutofit/>
+          </a:bodyPr>
+          <a:lstStyle/>
+          <a:p>
+            <a:r>
+              <a:rPr lang="en-US" sz="1380" dirty="0">
+                <a:solidFill>
+                  <a:srgbClr val="17364A"/>
+                </a:solidFill>
+                <a:latin typeface="Aptos" pitchFamily="34" charset="0"/>
+                <a:ea typeface="Aptos" pitchFamily="34" charset="-122"/>
+                <a:cs typeface="Aptos" pitchFamily="34" charset="-120"/>
+              </a:rPr>
+              <a:t>In public health, predictive models may be used to anticipate disease burden, identify.</a:t>
+            </a:r>
+            <a:endParaRPr lang="en-US" sz="1380" dirty="0"/>
+          </a:p>
+          <a:p>
+            <a:r>
+              <a:rPr lang="en-US" sz="1380" dirty="0">
+                <a:solidFill>
+                  <a:srgbClr val="17364A"/>
+                </a:solidFill>
+                <a:latin typeface="Aptos" pitchFamily="34" charset="0"/>
+                <a:ea typeface="Aptos" pitchFamily="34" charset="-122"/>
+                <a:cs typeface="Aptos" pitchFamily="34" charset="-120"/>
+              </a:rPr>
+              <a:t>Risk stratification is the practice of grouping individuals, facilities, areas, events, or.</a:t>
+            </a:r>
+            <a:endParaRPr lang="en-US" sz="1380" dirty="0"/>
+          </a:p>
+          <a:p>
+            <a:r>
+              <a:rPr lang="en-US" sz="1380" dirty="0">
+                <a:solidFill>
+                  <a:srgbClr val="17364A"/>
+                </a:solidFill>
+                <a:latin typeface="Aptos" pitchFamily="34" charset="0"/>
+                <a:ea typeface="Aptos" pitchFamily="34" charset="-122"/>
+                <a:cs typeface="Aptos" pitchFamily="34" charset="-120"/>
+              </a:rPr>
+              <a:t>This module helps learners distinguish prediction from diagnosis, causation, eligibility.</a:t>
+            </a:r>
+            <a:endParaRPr lang="en-US" sz="1380" dirty="0"/>
           </a:p>
         </p:txBody>
       </p:sp>
       <p:sp>
         <p:nvSpPr>
           <p:cNvPr id="16" name="Shape 14"/>
-          <p:cNvSpPr/>
-          <p:nvPr/>
-        </p:nvSpPr>
-        <p:spPr>
-          <a:xfrm>
-            <a:off x="8366760" y="3639312"/>
-            <a:ext cx="2011680" cy="0"/>
-          </a:xfrm>
-          <a:prstGeom prst="line">
-            <a:avLst/>
-          </a:prstGeom>
-          <a:noFill/>
-          <a:ln w="63500">
-            <a:solidFill>
-              <a:srgbClr val="2F8A28"/>
-            </a:solidFill>
-            <a:prstDash val="solid"/>
-          </a:ln>
-        </p:spPr>
-      </p:sp>
-      <p:sp>
-        <p:nvSpPr>
-          <p:cNvPr id="17" name="Text 15"/>
-          <p:cNvSpPr/>
-          <p:nvPr/>
-        </p:nvSpPr>
-        <p:spPr>
-          <a:xfrm>
-            <a:off x="7909560" y="3849624"/>
-            <a:ext cx="2926080" cy="164592"/>
-          </a:xfrm>
-          <a:prstGeom prst="rect">
-            <a:avLst/>
-          </a:prstGeom>
-          <a:noFill/>
-          <a:ln/>
-        </p:spPr>
-        <p:txBody>
-          <a:bodyPr wrap="square" lIns="0" tIns="0" rIns="0" bIns="0" rtlCol="0" anchor="ctr"/>
-          <a:lstStyle/>
-          <a:p>
-            <a:pPr algn="ctr" indent="0" marL="0">
-              <a:buNone/>
-            </a:pPr>
-            <a:r>
-              <a:rPr lang="en-US" sz="900" dirty="0">
-                <a:solidFill>
-                  <a:srgbClr val="003A63"/>
-                </a:solidFill>
-                <a:latin typeface="Aptos" pitchFamily="34" charset="0"/>
-                <a:ea typeface="Aptos" pitchFamily="34" charset="-122"/>
-                <a:cs typeface="Aptos" pitchFamily="34" charset="-120"/>
-              </a:rPr>
-              <a:t>Human review</a:t>
-            </a:r>
-            <a:endParaRPr lang="en-US" sz="900" dirty="0"/>
-          </a:p>
-        </p:txBody>
-      </p:sp>
-      <p:sp>
-        <p:nvSpPr>
-          <p:cNvPr id="18" name="Shape 16"/>
           <p:cNvSpPr/>
           <p:nvPr/>
         </p:nvSpPr>
@@ -16330,7 +15666,7 @@
       </p:sp>
       <p:sp>
         <p:nvSpPr>
-          <p:cNvPr id="19" name="Text 17"/>
+          <p:cNvPr id="17" name="Text 15"/>
           <p:cNvSpPr/>
           <p:nvPr/>
         </p:nvSpPr>
@@ -16369,7 +15705,7 @@
       </p:sp>
       <p:sp>
         <p:nvSpPr>
-          <p:cNvPr id="20" name="Text 18"/>
+          <p:cNvPr id="18" name="Text 16"/>
           <p:cNvSpPr/>
           <p:nvPr/>
         </p:nvSpPr>
@@ -16877,13 +16213,11 @@
             </a:avLst>
           </a:prstGeom>
           <a:solidFill>
-            <a:srgbClr val="FFFFFF">
-              <a:alpha val="88000"/>
-            </a:srgbClr>
+            <a:srgbClr val="FFFFFF"/>
           </a:solidFill>
           <a:ln w="12700">
             <a:solidFill>
-              <a:srgbClr val="D6E8F2"/>
+              <a:srgbClr val="B9D7E6"/>
             </a:solidFill>
             <a:prstDash val="solid"/>
           </a:ln>
@@ -16891,26 +16225,42 @@
       </p:sp>
       <p:sp>
         <p:nvSpPr>
-          <p:cNvPr id="14" name="Shape 12"/>
-          <p:cNvSpPr/>
-          <p:nvPr/>
-        </p:nvSpPr>
-        <p:spPr>
-          <a:xfrm>
-            <a:off x="8046720" y="3108960"/>
-            <a:ext cx="2651760" cy="896112"/>
-          </a:xfrm>
-          <a:prstGeom prst="arc">
-            <a:avLst/>
-          </a:prstGeom>
-          <a:noFill/>
-          <a:ln w="25400">
-            <a:solidFill>
-              <a:srgbClr val="0068B7"/>
-            </a:solidFill>
-            <a:prstDash val="solid"/>
-          </a:ln>
-        </p:spPr>
+          <p:cNvPr id="14" name="Text 12"/>
+          <p:cNvSpPr/>
+          <p:nvPr/>
+        </p:nvSpPr>
+        <p:spPr>
+          <a:xfrm>
+            <a:off x="7799832" y="2935224"/>
+            <a:ext cx="3145536" cy="256032"/>
+          </a:xfrm>
+          <a:prstGeom prst="rect">
+            <a:avLst/>
+          </a:prstGeom>
+          <a:noFill/>
+          <a:ln/>
+        </p:spPr>
+        <p:txBody>
+          <a:bodyPr wrap="square" lIns="0" tIns="0" rIns="0" bIns="0" rtlCol="0" anchor="ctr"/>
+          <a:lstStyle/>
+          <a:p>
+            <a:pPr indent="0" marL="0">
+              <a:buNone/>
+            </a:pPr>
+            <a:r>
+              <a:rPr lang="en-US" sz="1300" b="1" dirty="0">
+                <a:solidFill>
+                  <a:srgbClr val="0068B7"/>
+                </a:solidFill>
+                <a:latin typeface="Aptos" pitchFamily="34" charset="0"/>
+                <a:ea typeface="Aptos" pitchFamily="34" charset="-122"/>
+                <a:cs typeface="Aptos" pitchFamily="34" charset="-120"/>
+              </a:rPr>
+              <a:t>Concept checkpoints</a:t>
+            </a:r>
+            <a:endParaRPr lang="en-US" sz="1300" dirty="0"/>
+          </a:p>
+        </p:txBody>
       </p:sp>
       <p:sp>
         <p:nvSpPr>
@@ -16920,102 +16270,67 @@
         </p:nvSpPr>
         <p:spPr>
           <a:xfrm>
-            <a:off x="7909560" y="3099816"/>
-            <a:ext cx="2926080" cy="256032"/>
-          </a:xfrm>
-          <a:prstGeom prst="rect">
-            <a:avLst/>
-          </a:prstGeom>
-          <a:noFill/>
-          <a:ln/>
-        </p:spPr>
-        <p:txBody>
-          <a:bodyPr wrap="square" lIns="0" tIns="0" rIns="0" bIns="0" rtlCol="0" anchor="ctr"/>
-          <a:lstStyle/>
-          <a:p>
-            <a:pPr algn="ctr" indent="0" marL="0">
-              <a:buNone/>
-            </a:pPr>
-            <a:r>
-              <a:rPr lang="en-US" sz="1500" b="1" dirty="0">
-                <a:solidFill>
-                  <a:srgbClr val="003A63"/>
-                </a:solidFill>
-                <a:latin typeface="Aptos" pitchFamily="34" charset="0"/>
-                <a:ea typeface="Aptos" pitchFamily="34" charset="-122"/>
-                <a:cs typeface="Aptos" pitchFamily="34" charset="-120"/>
-              </a:rPr>
-              <a:t>Risk</a:t>
-            </a:r>
-            <a:endParaRPr lang="en-US" sz="1500" dirty="0"/>
+            <a:off x="7818120" y="3300984"/>
+            <a:ext cx="3090672" cy="877824"/>
+          </a:xfrm>
+          <a:prstGeom prst="rect">
+            <a:avLst/>
+          </a:prstGeom>
+          <a:noFill/>
+          <a:ln/>
+        </p:spPr>
+        <p:txBody>
+          <a:bodyPr wrap="square" lIns="254" tIns="254" rIns="254" bIns="254" rtlCol="0" anchor="t">
+            <a:normAutofit/>
+          </a:bodyPr>
+          <a:lstStyle/>
+          <a:p>
+            <a:r>
+              <a:rPr lang="en-US" sz="1380" dirty="0">
+                <a:solidFill>
+                  <a:srgbClr val="17364A"/>
+                </a:solidFill>
+                <a:latin typeface="Aptos" pitchFamily="34" charset="0"/>
+                <a:ea typeface="Aptos" pitchFamily="34" charset="-122"/>
+                <a:cs typeface="Aptos" pitchFamily="34" charset="-120"/>
+              </a:rPr>
+              <a:t>Predictive analytics matters because public health agencies often must act before all.</a:t>
+            </a:r>
+            <a:endParaRPr lang="en-US" sz="1380" dirty="0"/>
+          </a:p>
+          <a:p>
+            <a:r>
+              <a:rPr lang="en-US" sz="1380" dirty="0">
+                <a:solidFill>
+                  <a:srgbClr val="17364A"/>
+                </a:solidFill>
+                <a:latin typeface="Aptos" pitchFamily="34" charset="0"/>
+                <a:ea typeface="Aptos" pitchFamily="34" charset="-122"/>
+                <a:cs typeface="Aptos" pitchFamily="34" charset="-120"/>
+              </a:rPr>
+              <a:t>During outbreaks, emergencies, or resource-constrained programs, agencies may need to.</a:t>
+            </a:r>
+            <a:endParaRPr lang="en-US" sz="1380" dirty="0"/>
+          </a:p>
+          <a:p>
+            <a:r>
+              <a:rPr lang="en-US" sz="1380" dirty="0">
+                <a:solidFill>
+                  <a:srgbClr val="17364A"/>
+                </a:solidFill>
+                <a:latin typeface="Aptos" pitchFamily="34" charset="0"/>
+                <a:ea typeface="Aptos" pitchFamily="34" charset="-122"/>
+                <a:cs typeface="Aptos" pitchFamily="34" charset="-120"/>
+              </a:rPr>
+              <a:t>Risk stratification can also create harm if used carelessly.</a:t>
+            </a:r>
+            <a:endParaRPr lang="en-US" sz="1380" dirty="0"/>
           </a:p>
         </p:txBody>
       </p:sp>
       <p:sp>
         <p:nvSpPr>
           <p:cNvPr id="16" name="Shape 14"/>
-          <p:cNvSpPr/>
-          <p:nvPr/>
-        </p:nvSpPr>
-        <p:spPr>
-          <a:xfrm>
-            <a:off x="8366760" y="3639312"/>
-            <a:ext cx="2011680" cy="0"/>
-          </a:xfrm>
-          <a:prstGeom prst="line">
-            <a:avLst/>
-          </a:prstGeom>
-          <a:noFill/>
-          <a:ln w="63500">
-            <a:solidFill>
-              <a:srgbClr val="2F8A28"/>
-            </a:solidFill>
-            <a:prstDash val="solid"/>
-          </a:ln>
-        </p:spPr>
-      </p:sp>
-      <p:sp>
-        <p:nvSpPr>
-          <p:cNvPr id="17" name="Text 15"/>
-          <p:cNvSpPr/>
-          <p:nvPr/>
-        </p:nvSpPr>
-        <p:spPr>
-          <a:xfrm>
-            <a:off x="7909560" y="3849624"/>
-            <a:ext cx="2926080" cy="164592"/>
-          </a:xfrm>
-          <a:prstGeom prst="rect">
-            <a:avLst/>
-          </a:prstGeom>
-          <a:noFill/>
-          <a:ln/>
-        </p:spPr>
-        <p:txBody>
-          <a:bodyPr wrap="square" lIns="0" tIns="0" rIns="0" bIns="0" rtlCol="0" anchor="ctr"/>
-          <a:lstStyle/>
-          <a:p>
-            <a:pPr algn="ctr" indent="0" marL="0">
-              <a:buNone/>
-            </a:pPr>
-            <a:r>
-              <a:rPr lang="en-US" sz="900" dirty="0">
-                <a:solidFill>
-                  <a:srgbClr val="003A63"/>
-                </a:solidFill>
-                <a:latin typeface="Aptos" pitchFamily="34" charset="0"/>
-                <a:ea typeface="Aptos" pitchFamily="34" charset="-122"/>
-                <a:cs typeface="Aptos" pitchFamily="34" charset="-120"/>
-              </a:rPr>
-              <a:t>Human review</a:t>
-            </a:r>
-            <a:endParaRPr lang="en-US" sz="900" dirty="0"/>
-          </a:p>
-        </p:txBody>
-      </p:sp>
-      <p:sp>
-        <p:nvSpPr>
-          <p:cNvPr id="18" name="Shape 16"/>
           <p:cNvSpPr/>
           <p:nvPr/>
         </p:nvSpPr>
@@ -17042,7 +16357,7 @@
       </p:sp>
       <p:sp>
         <p:nvSpPr>
-          <p:cNvPr id="19" name="Text 17"/>
+          <p:cNvPr id="17" name="Text 15"/>
           <p:cNvSpPr/>
           <p:nvPr/>
         </p:nvSpPr>
@@ -17081,7 +16396,7 @@
       </p:sp>
       <p:sp>
         <p:nvSpPr>
-          <p:cNvPr id="20" name="Text 18"/>
+          <p:cNvPr id="18" name="Text 16"/>
           <p:cNvSpPr/>
           <p:nvPr/>
         </p:nvSpPr>
@@ -17589,13 +16904,11 @@
             </a:avLst>
           </a:prstGeom>
           <a:solidFill>
-            <a:srgbClr val="FFFFFF">
-              <a:alpha val="88000"/>
-            </a:srgbClr>
+            <a:srgbClr val="FFFFFF"/>
           </a:solidFill>
           <a:ln w="12700">
             <a:solidFill>
-              <a:srgbClr val="D6E8F2"/>
+              <a:srgbClr val="B9D7E6"/>
             </a:solidFill>
             <a:prstDash val="solid"/>
           </a:ln>
@@ -17603,26 +16916,42 @@
       </p:sp>
       <p:sp>
         <p:nvSpPr>
-          <p:cNvPr id="14" name="Shape 12"/>
-          <p:cNvSpPr/>
-          <p:nvPr/>
-        </p:nvSpPr>
-        <p:spPr>
-          <a:xfrm>
-            <a:off x="8046720" y="3108960"/>
-            <a:ext cx="2651760" cy="896112"/>
-          </a:xfrm>
-          <a:prstGeom prst="arc">
-            <a:avLst/>
-          </a:prstGeom>
-          <a:noFill/>
-          <a:ln w="25400">
-            <a:solidFill>
-              <a:srgbClr val="0068B7"/>
-            </a:solidFill>
-            <a:prstDash val="solid"/>
-          </a:ln>
-        </p:spPr>
+          <p:cNvPr id="14" name="Text 12"/>
+          <p:cNvSpPr/>
+          <p:nvPr/>
+        </p:nvSpPr>
+        <p:spPr>
+          <a:xfrm>
+            <a:off x="7799832" y="2935224"/>
+            <a:ext cx="3145536" cy="256032"/>
+          </a:xfrm>
+          <a:prstGeom prst="rect">
+            <a:avLst/>
+          </a:prstGeom>
+          <a:noFill/>
+          <a:ln/>
+        </p:spPr>
+        <p:txBody>
+          <a:bodyPr wrap="square" lIns="0" tIns="0" rIns="0" bIns="0" rtlCol="0" anchor="ctr"/>
+          <a:lstStyle/>
+          <a:p>
+            <a:pPr indent="0" marL="0">
+              <a:buNone/>
+            </a:pPr>
+            <a:r>
+              <a:rPr lang="en-US" sz="1300" b="1" dirty="0">
+                <a:solidFill>
+                  <a:srgbClr val="0068B7"/>
+                </a:solidFill>
+                <a:latin typeface="Aptos" pitchFamily="34" charset="0"/>
+                <a:ea typeface="Aptos" pitchFamily="34" charset="-122"/>
+                <a:cs typeface="Aptos" pitchFamily="34" charset="-120"/>
+              </a:rPr>
+              <a:t>Concept checkpoints</a:t>
+            </a:r>
+            <a:endParaRPr lang="en-US" sz="1300" dirty="0"/>
+          </a:p>
+        </p:txBody>
       </p:sp>
       <p:sp>
         <p:nvSpPr>
@@ -17632,102 +16961,67 @@
         </p:nvSpPr>
         <p:spPr>
           <a:xfrm>
-            <a:off x="7909560" y="3099816"/>
-            <a:ext cx="2926080" cy="256032"/>
-          </a:xfrm>
-          <a:prstGeom prst="rect">
-            <a:avLst/>
-          </a:prstGeom>
-          <a:noFill/>
-          <a:ln/>
-        </p:spPr>
-        <p:txBody>
-          <a:bodyPr wrap="square" lIns="0" tIns="0" rIns="0" bIns="0" rtlCol="0" anchor="ctr"/>
-          <a:lstStyle/>
-          <a:p>
-            <a:pPr algn="ctr" indent="0" marL="0">
-              <a:buNone/>
-            </a:pPr>
-            <a:r>
-              <a:rPr lang="en-US" sz="1500" b="1" dirty="0">
-                <a:solidFill>
-                  <a:srgbClr val="003A63"/>
-                </a:solidFill>
-                <a:latin typeface="Aptos" pitchFamily="34" charset="0"/>
-                <a:ea typeface="Aptos" pitchFamily="34" charset="-122"/>
-                <a:cs typeface="Aptos" pitchFamily="34" charset="-120"/>
-              </a:rPr>
-              <a:t>Risk</a:t>
-            </a:r>
-            <a:endParaRPr lang="en-US" sz="1500" dirty="0"/>
+            <a:off x="7818120" y="3300984"/>
+            <a:ext cx="3090672" cy="877824"/>
+          </a:xfrm>
+          <a:prstGeom prst="rect">
+            <a:avLst/>
+          </a:prstGeom>
+          <a:noFill/>
+          <a:ln/>
+        </p:spPr>
+        <p:txBody>
+          <a:bodyPr wrap="square" lIns="254" tIns="254" rIns="254" bIns="254" rtlCol="0" anchor="t">
+            <a:normAutofit/>
+          </a:bodyPr>
+          <a:lstStyle/>
+          <a:p>
+            <a:r>
+              <a:rPr lang="en-US" sz="1380" dirty="0">
+                <a:solidFill>
+                  <a:srgbClr val="17364A"/>
+                </a:solidFill>
+                <a:latin typeface="Aptos" pitchFamily="34" charset="0"/>
+                <a:ea typeface="Aptos" pitchFamily="34" charset="-122"/>
+                <a:cs typeface="Aptos" pitchFamily="34" charset="-120"/>
+              </a:rPr>
+              <a:t>A local health department may want to predict which neighborhoods are at increased risk of.</a:t>
+            </a:r>
+            <a:endParaRPr lang="en-US" sz="1380" dirty="0"/>
+          </a:p>
+          <a:p>
+            <a:r>
+              <a:rPr lang="en-US" sz="1380" dirty="0">
+                <a:solidFill>
+                  <a:srgbClr val="17364A"/>
+                </a:solidFill>
+                <a:latin typeface="Aptos" pitchFamily="34" charset="0"/>
+                <a:ea typeface="Aptos" pitchFamily="34" charset="-122"/>
+                <a:cs typeface="Aptos" pitchFamily="34" charset="-120"/>
+              </a:rPr>
+              <a:t>The model could use prior immunization data, school enrollment patterns, appointment.</a:t>
+            </a:r>
+            <a:endParaRPr lang="en-US" sz="1380" dirty="0"/>
+          </a:p>
+          <a:p>
+            <a:r>
+              <a:rPr lang="en-US" sz="1380" dirty="0">
+                <a:solidFill>
+                  <a:srgbClr val="17364A"/>
+                </a:solidFill>
+                <a:latin typeface="Aptos" pitchFamily="34" charset="0"/>
+                <a:ea typeface="Aptos" pitchFamily="34" charset="-122"/>
+                <a:cs typeface="Aptos" pitchFamily="34" charset="-120"/>
+              </a:rPr>
+              <a:t>This use can support equity if it directs resources toward communities facing access.</a:t>
+            </a:r>
+            <a:endParaRPr lang="en-US" sz="1380" dirty="0"/>
           </a:p>
         </p:txBody>
       </p:sp>
       <p:sp>
         <p:nvSpPr>
           <p:cNvPr id="16" name="Shape 14"/>
-          <p:cNvSpPr/>
-          <p:nvPr/>
-        </p:nvSpPr>
-        <p:spPr>
-          <a:xfrm>
-            <a:off x="8366760" y="3639312"/>
-            <a:ext cx="2011680" cy="0"/>
-          </a:xfrm>
-          <a:prstGeom prst="line">
-            <a:avLst/>
-          </a:prstGeom>
-          <a:noFill/>
-          <a:ln w="63500">
-            <a:solidFill>
-              <a:srgbClr val="2F8A28"/>
-            </a:solidFill>
-            <a:prstDash val="solid"/>
-          </a:ln>
-        </p:spPr>
-      </p:sp>
-      <p:sp>
-        <p:nvSpPr>
-          <p:cNvPr id="17" name="Text 15"/>
-          <p:cNvSpPr/>
-          <p:nvPr/>
-        </p:nvSpPr>
-        <p:spPr>
-          <a:xfrm>
-            <a:off x="7909560" y="3849624"/>
-            <a:ext cx="2926080" cy="164592"/>
-          </a:xfrm>
-          <a:prstGeom prst="rect">
-            <a:avLst/>
-          </a:prstGeom>
-          <a:noFill/>
-          <a:ln/>
-        </p:spPr>
-        <p:txBody>
-          <a:bodyPr wrap="square" lIns="0" tIns="0" rIns="0" bIns="0" rtlCol="0" anchor="ctr"/>
-          <a:lstStyle/>
-          <a:p>
-            <a:pPr algn="ctr" indent="0" marL="0">
-              <a:buNone/>
-            </a:pPr>
-            <a:r>
-              <a:rPr lang="en-US" sz="900" dirty="0">
-                <a:solidFill>
-                  <a:srgbClr val="003A63"/>
-                </a:solidFill>
-                <a:latin typeface="Aptos" pitchFamily="34" charset="0"/>
-                <a:ea typeface="Aptos" pitchFamily="34" charset="-122"/>
-                <a:cs typeface="Aptos" pitchFamily="34" charset="-120"/>
-              </a:rPr>
-              <a:t>Human review</a:t>
-            </a:r>
-            <a:endParaRPr lang="en-US" sz="900" dirty="0"/>
-          </a:p>
-        </p:txBody>
-      </p:sp>
-      <p:sp>
-        <p:nvSpPr>
-          <p:cNvPr id="18" name="Shape 16"/>
           <p:cNvSpPr/>
           <p:nvPr/>
         </p:nvSpPr>
@@ -17754,7 +17048,7 @@
       </p:sp>
       <p:sp>
         <p:nvSpPr>
-          <p:cNvPr id="19" name="Text 17"/>
+          <p:cNvPr id="17" name="Text 15"/>
           <p:cNvSpPr/>
           <p:nvPr/>
         </p:nvSpPr>
@@ -17793,7 +17087,7 @@
       </p:sp>
       <p:sp>
         <p:nvSpPr>
-          <p:cNvPr id="20" name="Text 18"/>
+          <p:cNvPr id="18" name="Text 16"/>
           <p:cNvSpPr/>
           <p:nvPr/>
         </p:nvSpPr>

--- a/downloads/presentations/modules/anl-220.pptx
+++ b/downloads/presentations/modules/anl-220.pptx
@@ -3353,49 +3353,58 @@
           <a:ln/>
         </p:spPr>
         <p:txBody>
-          <a:bodyPr wrap="square" lIns="635" tIns="635" rIns="635" bIns="635" rtlCol="0" anchor="t">
+          <a:bodyPr wrap="square" lIns="1016" tIns="1016" rIns="1016" bIns="1016" rtlCol="0" anchor="t">
             <a:normAutofit/>
           </a:bodyPr>
           <a:lstStyle/>
           <a:p>
+            <a:pPr indent="0" marL="0">
+              <a:buNone/>
+            </a:pPr>
             <a:r>
               <a:rPr lang="en-US" sz="2100" dirty="0">
                 <a:solidFill>
-                  <a:srgbClr val="17364A"/>
-                </a:solidFill>
-                <a:latin typeface="Aptos" pitchFamily="34" charset="0"/>
-                <a:ea typeface="Aptos" pitchFamily="34" charset="-122"/>
-                <a:cs typeface="Aptos" pitchFamily="34" charset="-120"/>
-              </a:rPr>
-              <a:t>A predictive workflow begins with the outcome.</a:t>
+                  <a:srgbClr val="003A63"/>
+                </a:solidFill>
+                <a:latin typeface="Aptos" pitchFamily="34" charset="0"/>
+                <a:ea typeface="Aptos" pitchFamily="34" charset="-122"/>
+                <a:cs typeface="Aptos" pitchFamily="34" charset="-120"/>
+              </a:rPr>
+              <a:t>• A predictive workflow begins with the outcome.</a:t>
             </a:r>
             <a:endParaRPr lang="en-US" sz="2100" dirty="0"/>
           </a:p>
           <a:p>
+            <a:pPr indent="0" marL="0">
+              <a:buNone/>
+            </a:pPr>
             <a:r>
               <a:rPr lang="en-US" sz="2100" dirty="0">
                 <a:solidFill>
-                  <a:srgbClr val="17364A"/>
-                </a:solidFill>
-                <a:latin typeface="Aptos" pitchFamily="34" charset="0"/>
-                <a:ea typeface="Aptos" pitchFamily="34" charset="-122"/>
-                <a:cs typeface="Aptos" pitchFamily="34" charset="-120"/>
-              </a:rPr>
-              <a:t>The outcome must be specific, measurable, and aligned with a public health action.</a:t>
+                  <a:srgbClr val="003A63"/>
+                </a:solidFill>
+                <a:latin typeface="Aptos" pitchFamily="34" charset="0"/>
+                <a:ea typeface="Aptos" pitchFamily="34" charset="-122"/>
+                <a:cs typeface="Aptos" pitchFamily="34" charset="-120"/>
+              </a:rPr>
+              <a:t>• The outcome must be specific, measurable, and aligned with a public health action.</a:t>
             </a:r>
             <a:endParaRPr lang="en-US" sz="2100" dirty="0"/>
           </a:p>
           <a:p>
+            <a:pPr indent="0" marL="0">
+              <a:buNone/>
+            </a:pPr>
             <a:r>
               <a:rPr lang="en-US" sz="2100" dirty="0">
                 <a:solidFill>
-                  <a:srgbClr val="17364A"/>
-                </a:solidFill>
-                <a:latin typeface="Aptos" pitchFamily="34" charset="0"/>
-                <a:ea typeface="Aptos" pitchFamily="34" charset="-122"/>
-                <a:cs typeface="Aptos" pitchFamily="34" charset="-120"/>
-              </a:rPr>
-              <a:t>Predicting “risk” is not enough.</a:t>
+                  <a:srgbClr val="003A63"/>
+                </a:solidFill>
+                <a:latin typeface="Aptos" pitchFamily="34" charset="0"/>
+                <a:ea typeface="Aptos" pitchFamily="34" charset="-122"/>
+                <a:cs typeface="Aptos" pitchFamily="34" charset="-120"/>
+              </a:rPr>
+              <a:t>• Predicting “risk” is not enough.</a:t>
             </a:r>
             <a:endParaRPr lang="en-US" sz="2100" dirty="0"/>
           </a:p>
@@ -3475,17 +3484,17 @@
         </p:nvSpPr>
         <p:spPr>
           <a:xfrm>
-            <a:off x="7799832" y="1828800"/>
-            <a:ext cx="3145536" cy="685800"/>
-          </a:xfrm>
-          <a:prstGeom prst="rect">
-            <a:avLst/>
-          </a:prstGeom>
-          <a:noFill/>
-          <a:ln/>
-        </p:spPr>
-        <p:txBody>
-          <a:bodyPr wrap="square" lIns="0" tIns="0" rIns="0" bIns="0" rtlCol="0" anchor="t">
+            <a:off x="7799832" y="1801368"/>
+            <a:ext cx="3145536" cy="758952"/>
+          </a:xfrm>
+          <a:prstGeom prst="rect">
+            <a:avLst/>
+          </a:prstGeom>
+          <a:noFill/>
+          <a:ln/>
+        </p:spPr>
+        <p:txBody>
+          <a:bodyPr wrap="square" lIns="254" tIns="254" rIns="254" bIns="254" rtlCol="0" anchor="t">
             <a:normAutofit/>
           </a:bodyPr>
           <a:lstStyle/>
@@ -3494,7 +3503,7 @@
               <a:buNone/>
             </a:pPr>
             <a:r>
-              <a:rPr lang="en-US" sz="1550" dirty="0">
+              <a:rPr lang="en-US" sz="1320" dirty="0">
                 <a:solidFill>
                   <a:srgbClr val="17364A"/>
                 </a:solidFill>
@@ -3504,7 +3513,7 @@
               </a:rPr>
               <a:t>A predictive workflow begins with the outcome.</a:t>
             </a:r>
-            <a:endParaRPr lang="en-US" sz="1550" dirty="0"/>
+            <a:endParaRPr lang="en-US" sz="1320" dirty="0"/>
           </a:p>
         </p:txBody>
       </p:sp>
@@ -3592,13 +3601,16 @@
           <a:ln/>
         </p:spPr>
         <p:txBody>
-          <a:bodyPr wrap="square" lIns="254" tIns="254" rIns="254" bIns="254" rtlCol="0" anchor="t">
+          <a:bodyPr wrap="square" lIns="508" tIns="508" rIns="508" bIns="508" rtlCol="0" anchor="t">
             <a:normAutofit/>
           </a:bodyPr>
           <a:lstStyle/>
           <a:p>
-            <a:r>
-              <a:rPr lang="en-US" sz="1380" dirty="0">
+            <a:pPr indent="0" marL="0">
+              <a:buNone/>
+            </a:pPr>
+            <a:r>
+              <a:rPr lang="en-US" sz="1220" dirty="0">
                 <a:solidFill>
                   <a:srgbClr val="17364A"/>
                 </a:solidFill>
@@ -3606,13 +3618,16 @@
                 <a:ea typeface="Aptos" pitchFamily="34" charset="-122"/>
                 <a:cs typeface="Aptos" pitchFamily="34" charset="-120"/>
               </a:rPr>
-              <a:t>Staff must define risk of what, during what time period, for which population, and for.</a:t>
-            </a:r>
-            <a:endParaRPr lang="en-US" sz="1380" dirty="0"/>
-          </a:p>
-          <a:p>
-            <a:r>
-              <a:rPr lang="en-US" sz="1380" dirty="0">
+              <a:t>Staff must define risk of what, during what time period, for which.</a:t>
+            </a:r>
+            <a:endParaRPr lang="en-US" sz="1220" dirty="0"/>
+          </a:p>
+          <a:p>
+            <a:pPr indent="0" marL="0">
+              <a:buNone/>
+            </a:pPr>
+            <a:r>
+              <a:rPr lang="en-US" sz="1220" dirty="0">
                 <a:solidFill>
                   <a:srgbClr val="17364A"/>
                 </a:solidFill>
@@ -3620,13 +3635,16 @@
                 <a:ea typeface="Aptos" pitchFamily="34" charset="-122"/>
                 <a:cs typeface="Aptos" pitchFamily="34" charset="-120"/>
               </a:rPr>
-              <a:t>A model predicting hospitalization within 30 days is different from one predicting delayed.</a:t>
-            </a:r>
-            <a:endParaRPr lang="en-US" sz="1380" dirty="0"/>
-          </a:p>
-          <a:p>
-            <a:r>
-              <a:rPr lang="en-US" sz="1380" dirty="0">
+              <a:t>A model predicting hospitalization within 30 days is different.</a:t>
+            </a:r>
+            <a:endParaRPr lang="en-US" sz="1220" dirty="0"/>
+          </a:p>
+          <a:p>
+            <a:pPr indent="0" marL="0">
+              <a:buNone/>
+            </a:pPr>
+            <a:r>
+              <a:rPr lang="en-US" sz="1220" dirty="0">
                 <a:solidFill>
                   <a:srgbClr val="17364A"/>
                 </a:solidFill>
@@ -3634,9 +3652,9 @@
                 <a:ea typeface="Aptos" pitchFamily="34" charset="-122"/>
                 <a:cs typeface="Aptos" pitchFamily="34" charset="-120"/>
               </a:rPr>
-              <a:t>Feature selection should be reviewed for both technical and ethical implications.</a:t>
-            </a:r>
-            <a:endParaRPr lang="en-US" sz="1380" dirty="0"/>
+              <a:t>Feature selection should be reviewed for both technical and.</a:t>
+            </a:r>
+            <a:endParaRPr lang="en-US" sz="1220" dirty="0"/>
           </a:p>
         </p:txBody>
       </p:sp>
@@ -3714,17 +3732,17 @@
         </p:nvSpPr>
         <p:spPr>
           <a:xfrm>
-            <a:off x="7799832" y="5001768"/>
-            <a:ext cx="3145536" cy="502920"/>
-          </a:xfrm>
-          <a:prstGeom prst="rect">
-            <a:avLst/>
-          </a:prstGeom>
-          <a:noFill/>
-          <a:ln/>
-        </p:spPr>
-        <p:txBody>
-          <a:bodyPr wrap="square" lIns="0" tIns="0" rIns="0" bIns="0" rtlCol="0" anchor="t">
+            <a:off x="7799832" y="4974336"/>
+            <a:ext cx="3145536" cy="576072"/>
+          </a:xfrm>
+          <a:prstGeom prst="rect">
+            <a:avLst/>
+          </a:prstGeom>
+          <a:noFill/>
+          <a:ln/>
+        </p:spPr>
+        <p:txBody>
+          <a:bodyPr wrap="square" lIns="254" tIns="254" rIns="254" bIns="254" rtlCol="0" anchor="t">
             <a:normAutofit/>
           </a:bodyPr>
           <a:lstStyle/>
@@ -3733,7 +3751,7 @@
               <a:buNone/>
             </a:pPr>
             <a:r>
-              <a:rPr lang="en-US" sz="1550" dirty="0">
+              <a:rPr lang="en-US" sz="1320" dirty="0">
                 <a:solidFill>
                   <a:srgbClr val="17364A"/>
                 </a:solidFill>
@@ -3741,9 +3759,9 @@
                 <a:ea typeface="Aptos" pitchFamily="34" charset="-122"/>
                 <a:cs typeface="Aptos" pitchFamily="34" charset="-120"/>
               </a:rPr>
-              <a:t>Identify what could go wrong, who could be affected, what safeguards are needed, and what evidence should be reviewed before use expands.</a:t>
-            </a:r>
-            <a:endParaRPr lang="en-US" sz="1550" dirty="0"/>
+              <a:t>Identify what could go wrong, who could be affected, what safeguards are needed, and what evidence should be reviewed.</a:t>
+            </a:r>
+            <a:endParaRPr lang="en-US" sz="1320" dirty="0"/>
           </a:p>
         </p:txBody>
       </p:sp>
@@ -4044,49 +4062,58 @@
           <a:ln/>
         </p:spPr>
         <p:txBody>
-          <a:bodyPr wrap="square" lIns="635" tIns="635" rIns="635" bIns="635" rtlCol="0" anchor="t">
+          <a:bodyPr wrap="square" lIns="1016" tIns="1016" rIns="1016" bIns="1016" rtlCol="0" anchor="t">
             <a:normAutofit/>
           </a:bodyPr>
           <a:lstStyle/>
           <a:p>
+            <a:pPr indent="0" marL="0">
+              <a:buNone/>
+            </a:pPr>
             <a:r>
               <a:rPr lang="en-US" sz="2100" dirty="0">
                 <a:solidFill>
-                  <a:srgbClr val="17364A"/>
-                </a:solidFill>
-                <a:latin typeface="Aptos" pitchFamily="34" charset="0"/>
-                <a:ea typeface="Aptos" pitchFamily="34" charset="-122"/>
-                <a:cs typeface="Aptos" pitchFamily="34" charset="-120"/>
-              </a:rPr>
-              <a:t>Thresholds are policy and workflow decisions as much as technical decisions.</a:t>
+                  <a:srgbClr val="003A63"/>
+                </a:solidFill>
+                <a:latin typeface="Aptos" pitchFamily="34" charset="0"/>
+                <a:ea typeface="Aptos" pitchFamily="34" charset="-122"/>
+                <a:cs typeface="Aptos" pitchFamily="34" charset="-120"/>
+              </a:rPr>
+              <a:t>• Thresholds are policy and workflow decisions as much as technical decisions.</a:t>
             </a:r>
             <a:endParaRPr lang="en-US" sz="2100" dirty="0"/>
           </a:p>
           <a:p>
+            <a:pPr indent="0" marL="0">
+              <a:buNone/>
+            </a:pPr>
             <a:r>
               <a:rPr lang="en-US" sz="2100" dirty="0">
                 <a:solidFill>
-                  <a:srgbClr val="17364A"/>
-                </a:solidFill>
-                <a:latin typeface="Aptos" pitchFamily="34" charset="0"/>
-                <a:ea typeface="Aptos" pitchFamily="34" charset="-122"/>
-                <a:cs typeface="Aptos" pitchFamily="34" charset="-120"/>
-              </a:rPr>
-              <a:t>A lower threshold may catch more true high-risk cases but create more false positives and burden staff.</a:t>
+                  <a:srgbClr val="003A63"/>
+                </a:solidFill>
+                <a:latin typeface="Aptos" pitchFamily="34" charset="0"/>
+                <a:ea typeface="Aptos" pitchFamily="34" charset="-122"/>
+                <a:cs typeface="Aptos" pitchFamily="34" charset="-120"/>
+              </a:rPr>
+              <a:t>• A lower threshold may catch more true high-risk cases but create more false positives and.</a:t>
             </a:r>
             <a:endParaRPr lang="en-US" sz="2100" dirty="0"/>
           </a:p>
           <a:p>
+            <a:pPr indent="0" marL="0">
+              <a:buNone/>
+            </a:pPr>
             <a:r>
               <a:rPr lang="en-US" sz="2100" dirty="0">
                 <a:solidFill>
-                  <a:srgbClr val="17364A"/>
-                </a:solidFill>
-                <a:latin typeface="Aptos" pitchFamily="34" charset="0"/>
-                <a:ea typeface="Aptos" pitchFamily="34" charset="-122"/>
-                <a:cs typeface="Aptos" pitchFamily="34" charset="-120"/>
-              </a:rPr>
-              <a:t>A higher threshold may conserve resources but miss people or places needing support.</a:t>
+                  <a:srgbClr val="003A63"/>
+                </a:solidFill>
+                <a:latin typeface="Aptos" pitchFamily="34" charset="0"/>
+                <a:ea typeface="Aptos" pitchFamily="34" charset="-122"/>
+                <a:cs typeface="Aptos" pitchFamily="34" charset="-120"/>
+              </a:rPr>
+              <a:t>• A higher threshold may conserve resources but miss people or places needing support.</a:t>
             </a:r>
             <a:endParaRPr lang="en-US" sz="2100" dirty="0"/>
           </a:p>
@@ -4166,17 +4193,17 @@
         </p:nvSpPr>
         <p:spPr>
           <a:xfrm>
-            <a:off x="7799832" y="1828800"/>
-            <a:ext cx="3145536" cy="685800"/>
-          </a:xfrm>
-          <a:prstGeom prst="rect">
-            <a:avLst/>
-          </a:prstGeom>
-          <a:noFill/>
-          <a:ln/>
-        </p:spPr>
-        <p:txBody>
-          <a:bodyPr wrap="square" lIns="0" tIns="0" rIns="0" bIns="0" rtlCol="0" anchor="t">
+            <a:off x="7799832" y="1801368"/>
+            <a:ext cx="3145536" cy="758952"/>
+          </a:xfrm>
+          <a:prstGeom prst="rect">
+            <a:avLst/>
+          </a:prstGeom>
+          <a:noFill/>
+          <a:ln/>
+        </p:spPr>
+        <p:txBody>
+          <a:bodyPr wrap="square" lIns="254" tIns="254" rIns="254" bIns="254" rtlCol="0" anchor="t">
             <a:normAutofit/>
           </a:bodyPr>
           <a:lstStyle/>
@@ -4185,7 +4212,7 @@
               <a:buNone/>
             </a:pPr>
             <a:r>
-              <a:rPr lang="en-US" sz="1550" dirty="0">
+              <a:rPr lang="en-US" sz="1320" dirty="0">
                 <a:solidFill>
                   <a:srgbClr val="17364A"/>
                 </a:solidFill>
@@ -4195,7 +4222,7 @@
               </a:rPr>
               <a:t>Thresholds are policy and workflow decisions as much as technical decisions.</a:t>
             </a:r>
-            <a:endParaRPr lang="en-US" sz="1550" dirty="0"/>
+            <a:endParaRPr lang="en-US" sz="1320" dirty="0"/>
           </a:p>
         </p:txBody>
       </p:sp>
@@ -4283,13 +4310,16 @@
           <a:ln/>
         </p:spPr>
         <p:txBody>
-          <a:bodyPr wrap="square" lIns="254" tIns="254" rIns="254" bIns="254" rtlCol="0" anchor="t">
+          <a:bodyPr wrap="square" lIns="508" tIns="508" rIns="508" bIns="508" rtlCol="0" anchor="t">
             <a:normAutofit/>
           </a:bodyPr>
           <a:lstStyle/>
           <a:p>
-            <a:r>
-              <a:rPr lang="en-US" sz="1380" dirty="0">
+            <a:pPr indent="0" marL="0">
+              <a:buNone/>
+            </a:pPr>
+            <a:r>
+              <a:rPr lang="en-US" sz="1220" dirty="0">
                 <a:solidFill>
                   <a:srgbClr val="17364A"/>
                 </a:solidFill>
@@ -4297,13 +4327,16 @@
                 <a:ea typeface="Aptos" pitchFamily="34" charset="-122"/>
                 <a:cs typeface="Aptos" pitchFamily="34" charset="-120"/>
               </a:rPr>
-              <a:t>Threshold selection should consider staffing capacity, consequence severity, equity, and.</a:t>
-            </a:r>
-            <a:endParaRPr lang="en-US" sz="1380" dirty="0"/>
-          </a:p>
-          <a:p>
-            <a:r>
-              <a:rPr lang="en-US" sz="1380" dirty="0">
+              <a:t>Threshold selection should consider staffing capacity, consequence.</a:t>
+            </a:r>
+            <a:endParaRPr lang="en-US" sz="1220" dirty="0"/>
+          </a:p>
+          <a:p>
+            <a:pPr indent="0" marL="0">
+              <a:buNone/>
+            </a:pPr>
+            <a:r>
+              <a:rPr lang="en-US" sz="1220" dirty="0">
                 <a:solidFill>
                   <a:srgbClr val="17364A"/>
                 </a:solidFill>
@@ -4313,11 +4346,14 @@
               </a:rPr>
               <a:t>Post-deployment monitoring is essential.</a:t>
             </a:r>
-            <a:endParaRPr lang="en-US" sz="1380" dirty="0"/>
-          </a:p>
-          <a:p>
-            <a:r>
-              <a:rPr lang="en-US" sz="1380" dirty="0">
+            <a:endParaRPr lang="en-US" sz="1220" dirty="0"/>
+          </a:p>
+          <a:p>
+            <a:pPr indent="0" marL="0">
+              <a:buNone/>
+            </a:pPr>
+            <a:r>
+              <a:rPr lang="en-US" sz="1220" dirty="0">
                 <a:solidFill>
                   <a:srgbClr val="17364A"/>
                 </a:solidFill>
@@ -4325,9 +4361,9 @@
                 <a:ea typeface="Aptos" pitchFamily="34" charset="-122"/>
                 <a:cs typeface="Aptos" pitchFamily="34" charset="-120"/>
               </a:rPr>
-              <a:t>A model that worked during development may degrade as disease patterns, reporting systems,.</a:t>
-            </a:r>
-            <a:endParaRPr lang="en-US" sz="1380" dirty="0"/>
+              <a:t>A model that worked during development may degrade as disease.</a:t>
+            </a:r>
+            <a:endParaRPr lang="en-US" sz="1220" dirty="0"/>
           </a:p>
         </p:txBody>
       </p:sp>
@@ -4405,17 +4441,17 @@
         </p:nvSpPr>
         <p:spPr>
           <a:xfrm>
-            <a:off x="7799832" y="5001768"/>
-            <a:ext cx="3145536" cy="502920"/>
-          </a:xfrm>
-          <a:prstGeom prst="rect">
-            <a:avLst/>
-          </a:prstGeom>
-          <a:noFill/>
-          <a:ln/>
-        </p:spPr>
-        <p:txBody>
-          <a:bodyPr wrap="square" lIns="0" tIns="0" rIns="0" bIns="0" rtlCol="0" anchor="t">
+            <a:off x="7799832" y="4974336"/>
+            <a:ext cx="3145536" cy="576072"/>
+          </a:xfrm>
+          <a:prstGeom prst="rect">
+            <a:avLst/>
+          </a:prstGeom>
+          <a:noFill/>
+          <a:ln/>
+        </p:spPr>
+        <p:txBody>
+          <a:bodyPr wrap="square" lIns="254" tIns="254" rIns="254" bIns="254" rtlCol="0" anchor="t">
             <a:normAutofit/>
           </a:bodyPr>
           <a:lstStyle/>
@@ -4424,7 +4460,7 @@
               <a:buNone/>
             </a:pPr>
             <a:r>
-              <a:rPr lang="en-US" sz="1550" dirty="0">
+              <a:rPr lang="en-US" sz="1320" dirty="0">
                 <a:solidFill>
                   <a:srgbClr val="17364A"/>
                 </a:solidFill>
@@ -4432,9 +4468,9 @@
                 <a:ea typeface="Aptos" pitchFamily="34" charset="-122"/>
                 <a:cs typeface="Aptos" pitchFamily="34" charset="-120"/>
               </a:rPr>
-              <a:t>Identify what could go wrong, who could be affected, what safeguards are needed, and what evidence should be reviewed before use expands.</a:t>
-            </a:r>
-            <a:endParaRPr lang="en-US" sz="1550" dirty="0"/>
+              <a:t>Identify what could go wrong, who could be affected, what safeguards are needed, and what evidence should be reviewed.</a:t>
+            </a:r>
+            <a:endParaRPr lang="en-US" sz="1320" dirty="0"/>
           </a:p>
         </p:txBody>
       </p:sp>
@@ -4735,49 +4771,58 @@
           <a:ln/>
         </p:spPr>
         <p:txBody>
-          <a:bodyPr wrap="square" lIns="635" tIns="635" rIns="635" bIns="635" rtlCol="0" anchor="t">
+          <a:bodyPr wrap="square" lIns="1016" tIns="1016" rIns="1016" bIns="1016" rtlCol="0" anchor="t">
             <a:normAutofit/>
           </a:bodyPr>
           <a:lstStyle/>
           <a:p>
+            <a:pPr indent="0" marL="0">
+              <a:buNone/>
+            </a:pPr>
             <a:r>
               <a:rPr lang="en-US" sz="2100" dirty="0">
                 <a:solidFill>
-                  <a:srgbClr val="17364A"/>
-                </a:solidFill>
-                <a:latin typeface="Aptos" pitchFamily="34" charset="0"/>
-                <a:ea typeface="Aptos" pitchFamily="34" charset="-122"/>
-                <a:cs typeface="Aptos" pitchFamily="34" charset="-120"/>
-              </a:rPr>
-              <a:t>Prediction used as decision.</a:t>
+                  <a:srgbClr val="003A63"/>
+                </a:solidFill>
+                <a:latin typeface="Aptos" pitchFamily="34" charset="0"/>
+                <a:ea typeface="Aptos" pitchFamily="34" charset="-122"/>
+                <a:cs typeface="Aptos" pitchFamily="34" charset="-120"/>
+              </a:rPr>
+              <a:t>• Prediction used as decision.</a:t>
             </a:r>
             <a:endParaRPr lang="en-US" sz="2100" dirty="0"/>
           </a:p>
           <a:p>
+            <a:pPr indent="0" marL="0">
+              <a:buNone/>
+            </a:pPr>
             <a:r>
               <a:rPr lang="en-US" sz="2100" dirty="0">
                 <a:solidFill>
-                  <a:srgbClr val="17364A"/>
-                </a:solidFill>
-                <a:latin typeface="Aptos" pitchFamily="34" charset="0"/>
-                <a:ea typeface="Aptos" pitchFamily="34" charset="-122"/>
-                <a:cs typeface="Aptos" pitchFamily="34" charset="-120"/>
-              </a:rPr>
-              <a:t>A risk score may be treated as a final decision rather than decision support.</a:t>
+                  <a:srgbClr val="003A63"/>
+                </a:solidFill>
+                <a:latin typeface="Aptos" pitchFamily="34" charset="0"/>
+                <a:ea typeface="Aptos" pitchFamily="34" charset="-122"/>
+                <a:cs typeface="Aptos" pitchFamily="34" charset="-120"/>
+              </a:rPr>
+              <a:t>• A risk score may be treated as a final decision rather than decision support.</a:t>
             </a:r>
             <a:endParaRPr lang="en-US" sz="2100" dirty="0"/>
           </a:p>
           <a:p>
+            <a:pPr indent="0" marL="0">
+              <a:buNone/>
+            </a:pPr>
             <a:r>
               <a:rPr lang="en-US" sz="2100" dirty="0">
                 <a:solidFill>
-                  <a:srgbClr val="17364A"/>
-                </a:solidFill>
-                <a:latin typeface="Aptos" pitchFamily="34" charset="0"/>
-                <a:ea typeface="Aptos" pitchFamily="34" charset="-122"/>
-                <a:cs typeface="Aptos" pitchFamily="34" charset="-120"/>
-              </a:rPr>
-              <a:t>Guardrails include role-based guidance, human review, and documentation of final decisions.</a:t>
+                  <a:srgbClr val="003A63"/>
+                </a:solidFill>
+                <a:latin typeface="Aptos" pitchFamily="34" charset="0"/>
+                <a:ea typeface="Aptos" pitchFamily="34" charset="-122"/>
+                <a:cs typeface="Aptos" pitchFamily="34" charset="-120"/>
+              </a:rPr>
+              <a:t>• Guardrails include role-based guidance, human review, and documentation of final decisions.</a:t>
             </a:r>
             <a:endParaRPr lang="en-US" sz="2100" dirty="0"/>
           </a:p>
@@ -4857,17 +4902,17 @@
         </p:nvSpPr>
         <p:spPr>
           <a:xfrm>
-            <a:off x="7799832" y="1828800"/>
-            <a:ext cx="3145536" cy="685800"/>
-          </a:xfrm>
-          <a:prstGeom prst="rect">
-            <a:avLst/>
-          </a:prstGeom>
-          <a:noFill/>
-          <a:ln/>
-        </p:spPr>
-        <p:txBody>
-          <a:bodyPr wrap="square" lIns="0" tIns="0" rIns="0" bIns="0" rtlCol="0" anchor="t">
+            <a:off x="7799832" y="1801368"/>
+            <a:ext cx="3145536" cy="758952"/>
+          </a:xfrm>
+          <a:prstGeom prst="rect">
+            <a:avLst/>
+          </a:prstGeom>
+          <a:noFill/>
+          <a:ln/>
+        </p:spPr>
+        <p:txBody>
+          <a:bodyPr wrap="square" lIns="254" tIns="254" rIns="254" bIns="254" rtlCol="0" anchor="t">
             <a:normAutofit/>
           </a:bodyPr>
           <a:lstStyle/>
@@ -4876,7 +4921,7 @@
               <a:buNone/>
             </a:pPr>
             <a:r>
-              <a:rPr lang="en-US" sz="1550" dirty="0">
+              <a:rPr lang="en-US" sz="1320" dirty="0">
                 <a:solidFill>
                   <a:srgbClr val="17364A"/>
                 </a:solidFill>
@@ -4886,7 +4931,7 @@
               </a:rPr>
               <a:t>Prediction used as decision.</a:t>
             </a:r>
-            <a:endParaRPr lang="en-US" sz="1550" dirty="0"/>
+            <a:endParaRPr lang="en-US" sz="1320" dirty="0"/>
           </a:p>
         </p:txBody>
       </p:sp>
@@ -4974,13 +5019,16 @@
           <a:ln/>
         </p:spPr>
         <p:txBody>
-          <a:bodyPr wrap="square" lIns="254" tIns="254" rIns="254" bIns="254" rtlCol="0" anchor="t">
+          <a:bodyPr wrap="square" lIns="508" tIns="508" rIns="508" bIns="508" rtlCol="0" anchor="t">
             <a:normAutofit/>
           </a:bodyPr>
           <a:lstStyle/>
           <a:p>
-            <a:r>
-              <a:rPr lang="en-US" sz="1380" dirty="0">
+            <a:pPr indent="0" marL="0">
+              <a:buNone/>
+            </a:pPr>
+            <a:r>
+              <a:rPr lang="en-US" sz="1220" dirty="0">
                 <a:solidFill>
                   <a:srgbClr val="17364A"/>
                 </a:solidFill>
@@ -4990,11 +5038,14 @@
               </a:rPr>
               <a:t>Equity distortion.</a:t>
             </a:r>
-            <a:endParaRPr lang="en-US" sz="1380" dirty="0"/>
-          </a:p>
-          <a:p>
-            <a:r>
-              <a:rPr lang="en-US" sz="1380" dirty="0">
+            <a:endParaRPr lang="en-US" sz="1220" dirty="0"/>
+          </a:p>
+          <a:p>
+            <a:pPr indent="0" marL="0">
+              <a:buNone/>
+            </a:pPr>
+            <a:r>
+              <a:rPr lang="en-US" sz="1220" dirty="0">
                 <a:solidFill>
                   <a:srgbClr val="17364A"/>
                 </a:solidFill>
@@ -5002,13 +5053,16 @@
                 <a:ea typeface="Aptos" pitchFamily="34" charset="-122"/>
                 <a:cs typeface="Aptos" pitchFamily="34" charset="-120"/>
               </a:rPr>
-              <a:t>Risk models may reflect unequal data availability or historical inequities.</a:t>
-            </a:r>
-            <a:endParaRPr lang="en-US" sz="1380" dirty="0"/>
-          </a:p>
-          <a:p>
-            <a:r>
-              <a:rPr lang="en-US" sz="1380" dirty="0">
+              <a:t>Risk models may reflect unequal data availability or historical.</a:t>
+            </a:r>
+            <a:endParaRPr lang="en-US" sz="1220" dirty="0"/>
+          </a:p>
+          <a:p>
+            <a:pPr indent="0" marL="0">
+              <a:buNone/>
+            </a:pPr>
+            <a:r>
+              <a:rPr lang="en-US" sz="1220" dirty="0">
                 <a:solidFill>
                   <a:srgbClr val="17364A"/>
                 </a:solidFill>
@@ -5016,9 +5070,9 @@
                 <a:ea typeface="Aptos" pitchFamily="34" charset="-122"/>
                 <a:cs typeface="Aptos" pitchFamily="34" charset="-120"/>
               </a:rPr>
-              <a:t>Guardrails include subgroup analysis, community review, and restrictions on punitive uses.</a:t>
-            </a:r>
-            <a:endParaRPr lang="en-US" sz="1380" dirty="0"/>
+              <a:t>Guardrails include subgroup analysis, community review, and.</a:t>
+            </a:r>
+            <a:endParaRPr lang="en-US" sz="1220" dirty="0"/>
           </a:p>
         </p:txBody>
       </p:sp>
@@ -5096,17 +5150,17 @@
         </p:nvSpPr>
         <p:spPr>
           <a:xfrm>
-            <a:off x="7799832" y="5001768"/>
-            <a:ext cx="3145536" cy="502920"/>
-          </a:xfrm>
-          <a:prstGeom prst="rect">
-            <a:avLst/>
-          </a:prstGeom>
-          <a:noFill/>
-          <a:ln/>
-        </p:spPr>
-        <p:txBody>
-          <a:bodyPr wrap="square" lIns="0" tIns="0" rIns="0" bIns="0" rtlCol="0" anchor="t">
+            <a:off x="7799832" y="4974336"/>
+            <a:ext cx="3145536" cy="576072"/>
+          </a:xfrm>
+          <a:prstGeom prst="rect">
+            <a:avLst/>
+          </a:prstGeom>
+          <a:noFill/>
+          <a:ln/>
+        </p:spPr>
+        <p:txBody>
+          <a:bodyPr wrap="square" lIns="254" tIns="254" rIns="254" bIns="254" rtlCol="0" anchor="t">
             <a:normAutofit/>
           </a:bodyPr>
           <a:lstStyle/>
@@ -5115,7 +5169,7 @@
               <a:buNone/>
             </a:pPr>
             <a:r>
-              <a:rPr lang="en-US" sz="1550" dirty="0">
+              <a:rPr lang="en-US" sz="1320" dirty="0">
                 <a:solidFill>
                   <a:srgbClr val="17364A"/>
                 </a:solidFill>
@@ -5123,9 +5177,9 @@
                 <a:ea typeface="Aptos" pitchFamily="34" charset="-122"/>
                 <a:cs typeface="Aptos" pitchFamily="34" charset="-120"/>
               </a:rPr>
-              <a:t>Identify what could go wrong, who could be affected, what safeguards are needed, and what evidence should be reviewed before use expands.</a:t>
-            </a:r>
-            <a:endParaRPr lang="en-US" sz="1550" dirty="0"/>
+              <a:t>Identify what could go wrong, who could be affected, what safeguards are needed, and what evidence should be reviewed.</a:t>
+            </a:r>
+            <a:endParaRPr lang="en-US" sz="1320" dirty="0"/>
           </a:p>
         </p:txBody>
       </p:sp>
@@ -5426,49 +5480,58 @@
           <a:ln/>
         </p:spPr>
         <p:txBody>
-          <a:bodyPr wrap="square" lIns="635" tIns="635" rIns="635" bIns="635" rtlCol="0" anchor="t">
+          <a:bodyPr wrap="square" lIns="1016" tIns="1016" rIns="1016" bIns="1016" rtlCol="0" anchor="t">
             <a:normAutofit/>
           </a:bodyPr>
           <a:lstStyle/>
           <a:p>
+            <a:pPr indent="0" marL="0">
+              <a:buNone/>
+            </a:pPr>
             <a:r>
               <a:rPr lang="en-US" sz="2100" dirty="0">
                 <a:solidFill>
-                  <a:srgbClr val="17364A"/>
-                </a:solidFill>
-                <a:latin typeface="Aptos" pitchFamily="34" charset="0"/>
-                <a:ea typeface="Aptos" pitchFamily="34" charset="-122"/>
-                <a:cs typeface="Aptos" pitchFamily="34" charset="-120"/>
-              </a:rPr>
-              <a:t>Model drift.</a:t>
+                  <a:srgbClr val="003A63"/>
+                </a:solidFill>
+                <a:latin typeface="Aptos" pitchFamily="34" charset="0"/>
+                <a:ea typeface="Aptos" pitchFamily="34" charset="-122"/>
+                <a:cs typeface="Aptos" pitchFamily="34" charset="-120"/>
+              </a:rPr>
+              <a:t>• Model drift.</a:t>
             </a:r>
             <a:endParaRPr lang="en-US" sz="2100" dirty="0"/>
           </a:p>
           <a:p>
+            <a:pPr indent="0" marL="0">
+              <a:buNone/>
+            </a:pPr>
             <a:r>
               <a:rPr lang="en-US" sz="2100" dirty="0">
                 <a:solidFill>
-                  <a:srgbClr val="17364A"/>
-                </a:solidFill>
-                <a:latin typeface="Aptos" pitchFamily="34" charset="0"/>
-                <a:ea typeface="Aptos" pitchFamily="34" charset="-122"/>
-                <a:cs typeface="Aptos" pitchFamily="34" charset="-120"/>
-              </a:rPr>
-              <a:t>Performance may change over time.</a:t>
+                  <a:srgbClr val="003A63"/>
+                </a:solidFill>
+                <a:latin typeface="Aptos" pitchFamily="34" charset="0"/>
+                <a:ea typeface="Aptos" pitchFamily="34" charset="-122"/>
+                <a:cs typeface="Aptos" pitchFamily="34" charset="-120"/>
+              </a:rPr>
+              <a:t>• Performance may change over time.</a:t>
             </a:r>
             <a:endParaRPr lang="en-US" sz="2100" dirty="0"/>
           </a:p>
           <a:p>
+            <a:pPr indent="0" marL="0">
+              <a:buNone/>
+            </a:pPr>
             <a:r>
               <a:rPr lang="en-US" sz="2100" dirty="0">
                 <a:solidFill>
-                  <a:srgbClr val="17364A"/>
-                </a:solidFill>
-                <a:latin typeface="Aptos" pitchFamily="34" charset="0"/>
-                <a:ea typeface="Aptos" pitchFamily="34" charset="-122"/>
-                <a:cs typeface="Aptos" pitchFamily="34" charset="-120"/>
-              </a:rPr>
-              <a:t>Guardrails include periodic recalibration, drift monitoring, and authority to pause or modify use.</a:t>
+                  <a:srgbClr val="003A63"/>
+                </a:solidFill>
+                <a:latin typeface="Aptos" pitchFamily="34" charset="0"/>
+                <a:ea typeface="Aptos" pitchFamily="34" charset="-122"/>
+                <a:cs typeface="Aptos" pitchFamily="34" charset="-120"/>
+              </a:rPr>
+              <a:t>• Guardrails include periodic recalibration, drift monitoring, and authority to pause or modify.</a:t>
             </a:r>
             <a:endParaRPr lang="en-US" sz="2100" dirty="0"/>
           </a:p>
@@ -5548,17 +5611,17 @@
         </p:nvSpPr>
         <p:spPr>
           <a:xfrm>
-            <a:off x="7799832" y="1828800"/>
-            <a:ext cx="3145536" cy="685800"/>
-          </a:xfrm>
-          <a:prstGeom prst="rect">
-            <a:avLst/>
-          </a:prstGeom>
-          <a:noFill/>
-          <a:ln/>
-        </p:spPr>
-        <p:txBody>
-          <a:bodyPr wrap="square" lIns="0" tIns="0" rIns="0" bIns="0" rtlCol="0" anchor="t">
+            <a:off x="7799832" y="1801368"/>
+            <a:ext cx="3145536" cy="758952"/>
+          </a:xfrm>
+          <a:prstGeom prst="rect">
+            <a:avLst/>
+          </a:prstGeom>
+          <a:noFill/>
+          <a:ln/>
+        </p:spPr>
+        <p:txBody>
+          <a:bodyPr wrap="square" lIns="254" tIns="254" rIns="254" bIns="254" rtlCol="0" anchor="t">
             <a:normAutofit/>
           </a:bodyPr>
           <a:lstStyle/>
@@ -5567,7 +5630,7 @@
               <a:buNone/>
             </a:pPr>
             <a:r>
-              <a:rPr lang="en-US" sz="1550" dirty="0">
+              <a:rPr lang="en-US" sz="1320" dirty="0">
                 <a:solidFill>
                   <a:srgbClr val="17364A"/>
                 </a:solidFill>
@@ -5577,7 +5640,7 @@
               </a:rPr>
               <a:t>Model drift.</a:t>
             </a:r>
-            <a:endParaRPr lang="en-US" sz="1550" dirty="0"/>
+            <a:endParaRPr lang="en-US" sz="1320" dirty="0"/>
           </a:p>
         </p:txBody>
       </p:sp>
@@ -5665,13 +5728,16 @@
           <a:ln/>
         </p:spPr>
         <p:txBody>
-          <a:bodyPr wrap="square" lIns="254" tIns="254" rIns="254" bIns="254" rtlCol="0" anchor="t">
+          <a:bodyPr wrap="square" lIns="508" tIns="508" rIns="508" bIns="508" rtlCol="0" anchor="t">
             <a:normAutofit/>
           </a:bodyPr>
           <a:lstStyle/>
           <a:p>
-            <a:r>
-              <a:rPr lang="en-US" sz="1380" dirty="0">
+            <a:pPr indent="0" marL="0">
+              <a:buNone/>
+            </a:pPr>
+            <a:r>
+              <a:rPr lang="en-US" sz="1220" dirty="0">
                 <a:solidFill>
                   <a:srgbClr val="17364A"/>
                 </a:solidFill>
@@ -5681,11 +5747,14 @@
               </a:rPr>
               <a:t>Model drift.</a:t>
             </a:r>
-            <a:endParaRPr lang="en-US" sz="1380" dirty="0"/>
-          </a:p>
-          <a:p>
-            <a:r>
-              <a:rPr lang="en-US" sz="1380" dirty="0">
+            <a:endParaRPr lang="en-US" sz="1220" dirty="0"/>
+          </a:p>
+          <a:p>
+            <a:pPr indent="0" marL="0">
+              <a:buNone/>
+            </a:pPr>
+            <a:r>
+              <a:rPr lang="en-US" sz="1220" dirty="0">
                 <a:solidFill>
                   <a:srgbClr val="17364A"/>
                 </a:solidFill>
@@ -5695,11 +5764,14 @@
               </a:rPr>
               <a:t>Performance may change over time.</a:t>
             </a:r>
-            <a:endParaRPr lang="en-US" sz="1380" dirty="0"/>
-          </a:p>
-          <a:p>
-            <a:r>
-              <a:rPr lang="en-US" sz="1380" dirty="0">
+            <a:endParaRPr lang="en-US" sz="1220" dirty="0"/>
+          </a:p>
+          <a:p>
+            <a:pPr indent="0" marL="0">
+              <a:buNone/>
+            </a:pPr>
+            <a:r>
+              <a:rPr lang="en-US" sz="1220" dirty="0">
                 <a:solidFill>
                   <a:srgbClr val="17364A"/>
                 </a:solidFill>
@@ -5707,9 +5779,9 @@
                 <a:ea typeface="Aptos" pitchFamily="34" charset="-122"/>
                 <a:cs typeface="Aptos" pitchFamily="34" charset="-120"/>
               </a:rPr>
-              <a:t>Guardrails include periodic recalibration, drift monitoring, and authority to pause or.</a:t>
-            </a:r>
-            <a:endParaRPr lang="en-US" sz="1380" dirty="0"/>
+              <a:t>Guardrails include periodic recalibration, drift monitoring, and.</a:t>
+            </a:r>
+            <a:endParaRPr lang="en-US" sz="1220" dirty="0"/>
           </a:p>
         </p:txBody>
       </p:sp>
@@ -5787,17 +5859,17 @@
         </p:nvSpPr>
         <p:spPr>
           <a:xfrm>
-            <a:off x="7799832" y="5001768"/>
-            <a:ext cx="3145536" cy="502920"/>
-          </a:xfrm>
-          <a:prstGeom prst="rect">
-            <a:avLst/>
-          </a:prstGeom>
-          <a:noFill/>
-          <a:ln/>
-        </p:spPr>
-        <p:txBody>
-          <a:bodyPr wrap="square" lIns="0" tIns="0" rIns="0" bIns="0" rtlCol="0" anchor="t">
+            <a:off x="7799832" y="4974336"/>
+            <a:ext cx="3145536" cy="576072"/>
+          </a:xfrm>
+          <a:prstGeom prst="rect">
+            <a:avLst/>
+          </a:prstGeom>
+          <a:noFill/>
+          <a:ln/>
+        </p:spPr>
+        <p:txBody>
+          <a:bodyPr wrap="square" lIns="254" tIns="254" rIns="254" bIns="254" rtlCol="0" anchor="t">
             <a:normAutofit/>
           </a:bodyPr>
           <a:lstStyle/>
@@ -5806,7 +5878,7 @@
               <a:buNone/>
             </a:pPr>
             <a:r>
-              <a:rPr lang="en-US" sz="1550" dirty="0">
+              <a:rPr lang="en-US" sz="1320" dirty="0">
                 <a:solidFill>
                   <a:srgbClr val="17364A"/>
                 </a:solidFill>
@@ -5814,9 +5886,9 @@
                 <a:ea typeface="Aptos" pitchFamily="34" charset="-122"/>
                 <a:cs typeface="Aptos" pitchFamily="34" charset="-120"/>
               </a:rPr>
-              <a:t>Identify what could go wrong, who could be affected, what safeguards are needed, and what evidence should be reviewed before use expands.</a:t>
-            </a:r>
-            <a:endParaRPr lang="en-US" sz="1550" dirty="0"/>
+              <a:t>Identify what could go wrong, who could be affected, what safeguards are needed, and what evidence should be reviewed.</a:t>
+            </a:r>
+            <a:endParaRPr lang="en-US" sz="1320" dirty="0"/>
           </a:p>
         </p:txBody>
       </p:sp>
@@ -6117,49 +6189,58 @@
           <a:ln/>
         </p:spPr>
         <p:txBody>
-          <a:bodyPr wrap="square" lIns="635" tIns="635" rIns="635" bIns="635" rtlCol="0" anchor="t">
+          <a:bodyPr wrap="square" lIns="1016" tIns="1016" rIns="1016" bIns="1016" rtlCol="0" anchor="t">
             <a:normAutofit/>
           </a:bodyPr>
           <a:lstStyle/>
           <a:p>
+            <a:pPr indent="0" marL="0">
+              <a:buNone/>
+            </a:pPr>
             <a:r>
               <a:rPr lang="en-US" sz="2100" dirty="0">
                 <a:solidFill>
-                  <a:srgbClr val="17364A"/>
-                </a:solidFill>
-                <a:latin typeface="Aptos" pitchFamily="34" charset="0"/>
-                <a:ea typeface="Aptos" pitchFamily="34" charset="-122"/>
-                <a:cs typeface="Aptos" pitchFamily="34" charset="-120"/>
-              </a:rPr>
-              <a:t>Predictive analytics may be embedded in dashboards, case management systems, early warning tools,.</a:t>
+                  <a:srgbClr val="003A63"/>
+                </a:solidFill>
+                <a:latin typeface="Aptos" pitchFamily="34" charset="0"/>
+                <a:ea typeface="Aptos" pitchFamily="34" charset="-122"/>
+                <a:cs typeface="Aptos" pitchFamily="34" charset="-120"/>
+              </a:rPr>
+              <a:t>• Predictive analytics may be embedded in dashboards, case management systems, early warning.</a:t>
             </a:r>
             <a:endParaRPr lang="en-US" sz="2100" dirty="0"/>
           </a:p>
           <a:p>
+            <a:pPr indent="0" marL="0">
+              <a:buNone/>
+            </a:pPr>
             <a:r>
               <a:rPr lang="en-US" sz="2100" dirty="0">
                 <a:solidFill>
-                  <a:srgbClr val="17364A"/>
-                </a:solidFill>
-                <a:latin typeface="Aptos" pitchFamily="34" charset="0"/>
-                <a:ea typeface="Aptos" pitchFamily="34" charset="-122"/>
-                <a:cs typeface="Aptos" pitchFamily="34" charset="-120"/>
-              </a:rPr>
-              <a:t>Generative AI may explain or summarize predictive outputs, but those explanations must not imply.</a:t>
+                  <a:srgbClr val="003A63"/>
+                </a:solidFill>
+                <a:latin typeface="Aptos" pitchFamily="34" charset="0"/>
+                <a:ea typeface="Aptos" pitchFamily="34" charset="-122"/>
+                <a:cs typeface="Aptos" pitchFamily="34" charset="-120"/>
+              </a:rPr>
+              <a:t>• Generative AI may explain or summarize predictive outputs, but those explanations must not.</a:t>
             </a:r>
             <a:endParaRPr lang="en-US" sz="2100" dirty="0"/>
           </a:p>
           <a:p>
+            <a:pPr indent="0" marL="0">
+              <a:buNone/>
+            </a:pPr>
             <a:r>
               <a:rPr lang="en-US" sz="2100" dirty="0">
                 <a:solidFill>
-                  <a:srgbClr val="17364A"/>
-                </a:solidFill>
-                <a:latin typeface="Aptos" pitchFamily="34" charset="0"/>
-                <a:ea typeface="Aptos" pitchFamily="34" charset="-122"/>
-                <a:cs typeface="Aptos" pitchFamily="34" charset="-120"/>
-              </a:rPr>
-              <a:t>RAG systems may combine risk results with policy guidance, while agentic workflows may trigger tasks or.</a:t>
+                  <a:srgbClr val="003A63"/>
+                </a:solidFill>
+                <a:latin typeface="Aptos" pitchFamily="34" charset="0"/>
+                <a:ea typeface="Aptos" pitchFamily="34" charset="-122"/>
+                <a:cs typeface="Aptos" pitchFamily="34" charset="-120"/>
+              </a:rPr>
+              <a:t>• RAG systems may combine risk results with policy guidance, while agentic workflows may trigger.</a:t>
             </a:r>
             <a:endParaRPr lang="en-US" sz="2100" dirty="0"/>
           </a:p>
@@ -6239,17 +6320,17 @@
         </p:nvSpPr>
         <p:spPr>
           <a:xfrm>
-            <a:off x="7799832" y="1828800"/>
-            <a:ext cx="3145536" cy="685800"/>
-          </a:xfrm>
-          <a:prstGeom prst="rect">
-            <a:avLst/>
-          </a:prstGeom>
-          <a:noFill/>
-          <a:ln/>
-        </p:spPr>
-        <p:txBody>
-          <a:bodyPr wrap="square" lIns="0" tIns="0" rIns="0" bIns="0" rtlCol="0" anchor="t">
+            <a:off x="7799832" y="1801368"/>
+            <a:ext cx="3145536" cy="758952"/>
+          </a:xfrm>
+          <a:prstGeom prst="rect">
+            <a:avLst/>
+          </a:prstGeom>
+          <a:noFill/>
+          <a:ln/>
+        </p:spPr>
+        <p:txBody>
+          <a:bodyPr wrap="square" lIns="254" tIns="254" rIns="254" bIns="254" rtlCol="0" anchor="t">
             <a:normAutofit/>
           </a:bodyPr>
           <a:lstStyle/>
@@ -6258,7 +6339,7 @@
               <a:buNone/>
             </a:pPr>
             <a:r>
-              <a:rPr lang="en-US" sz="1550" dirty="0">
+              <a:rPr lang="en-US" sz="1320" dirty="0">
                 <a:solidFill>
                   <a:srgbClr val="17364A"/>
                 </a:solidFill>
@@ -6268,7 +6349,7 @@
               </a:rPr>
               <a:t>Predictive analytics may be embedded in dashboards, case management systems, early warning tools,.</a:t>
             </a:r>
-            <a:endParaRPr lang="en-US" sz="1550" dirty="0"/>
+            <a:endParaRPr lang="en-US" sz="1320" dirty="0"/>
           </a:p>
         </p:txBody>
       </p:sp>
@@ -6356,13 +6437,16 @@
           <a:ln/>
         </p:spPr>
         <p:txBody>
-          <a:bodyPr wrap="square" lIns="254" tIns="254" rIns="254" bIns="254" rtlCol="0" anchor="t">
+          <a:bodyPr wrap="square" lIns="508" tIns="508" rIns="508" bIns="508" rtlCol="0" anchor="t">
             <a:normAutofit/>
           </a:bodyPr>
           <a:lstStyle/>
           <a:p>
-            <a:r>
-              <a:rPr lang="en-US" sz="1380" dirty="0">
+            <a:pPr indent="0" marL="0">
+              <a:buNone/>
+            </a:pPr>
+            <a:r>
+              <a:rPr lang="en-US" sz="1220" dirty="0">
                 <a:solidFill>
                   <a:srgbClr val="17364A"/>
                 </a:solidFill>
@@ -6370,13 +6454,16 @@
                 <a:ea typeface="Aptos" pitchFamily="34" charset="-122"/>
                 <a:cs typeface="Aptos" pitchFamily="34" charset="-120"/>
               </a:rPr>
-              <a:t>Predictive analytics may be embedded in dashboards, case management systems, early warning.</a:t>
-            </a:r>
-            <a:endParaRPr lang="en-US" sz="1380" dirty="0"/>
-          </a:p>
-          <a:p>
-            <a:r>
-              <a:rPr lang="en-US" sz="1380" dirty="0">
+              <a:t>Predictive analytics may be embedded in dashboards, case.</a:t>
+            </a:r>
+            <a:endParaRPr lang="en-US" sz="1220" dirty="0"/>
+          </a:p>
+          <a:p>
+            <a:pPr indent="0" marL="0">
+              <a:buNone/>
+            </a:pPr>
+            <a:r>
+              <a:rPr lang="en-US" sz="1220" dirty="0">
                 <a:solidFill>
                   <a:srgbClr val="17364A"/>
                 </a:solidFill>
@@ -6384,13 +6471,16 @@
                 <a:ea typeface="Aptos" pitchFamily="34" charset="-122"/>
                 <a:cs typeface="Aptos" pitchFamily="34" charset="-120"/>
               </a:rPr>
-              <a:t>Generative AI may explain or summarize predictive outputs, but those explanations must not.</a:t>
-            </a:r>
-            <a:endParaRPr lang="en-US" sz="1380" dirty="0"/>
-          </a:p>
-          <a:p>
-            <a:r>
-              <a:rPr lang="en-US" sz="1380" dirty="0">
+              <a:t>Generative AI may explain or summarize predictive outputs, but.</a:t>
+            </a:r>
+            <a:endParaRPr lang="en-US" sz="1220" dirty="0"/>
+          </a:p>
+          <a:p>
+            <a:pPr indent="0" marL="0">
+              <a:buNone/>
+            </a:pPr>
+            <a:r>
+              <a:rPr lang="en-US" sz="1220" dirty="0">
                 <a:solidFill>
                   <a:srgbClr val="17364A"/>
                 </a:solidFill>
@@ -6398,9 +6488,9 @@
                 <a:ea typeface="Aptos" pitchFamily="34" charset="-122"/>
                 <a:cs typeface="Aptos" pitchFamily="34" charset="-120"/>
               </a:rPr>
-              <a:t>RAG systems may combine risk results with policy guidance, while agentic workflows may.</a:t>
-            </a:r>
-            <a:endParaRPr lang="en-US" sz="1380" dirty="0"/>
+              <a:t>RAG systems may combine risk results with policy guidance, while.</a:t>
+            </a:r>
+            <a:endParaRPr lang="en-US" sz="1220" dirty="0"/>
           </a:p>
         </p:txBody>
       </p:sp>
@@ -6478,17 +6568,17 @@
         </p:nvSpPr>
         <p:spPr>
           <a:xfrm>
-            <a:off x="7799832" y="5001768"/>
-            <a:ext cx="3145536" cy="502920"/>
-          </a:xfrm>
-          <a:prstGeom prst="rect">
-            <a:avLst/>
-          </a:prstGeom>
-          <a:noFill/>
-          <a:ln/>
-        </p:spPr>
-        <p:txBody>
-          <a:bodyPr wrap="square" lIns="0" tIns="0" rIns="0" bIns="0" rtlCol="0" anchor="t">
+            <a:off x="7799832" y="4974336"/>
+            <a:ext cx="3145536" cy="576072"/>
+          </a:xfrm>
+          <a:prstGeom prst="rect">
+            <a:avLst/>
+          </a:prstGeom>
+          <a:noFill/>
+          <a:ln/>
+        </p:spPr>
+        <p:txBody>
+          <a:bodyPr wrap="square" lIns="254" tIns="254" rIns="254" bIns="254" rtlCol="0" anchor="t">
             <a:normAutofit/>
           </a:bodyPr>
           <a:lstStyle/>
@@ -6497,7 +6587,7 @@
               <a:buNone/>
             </a:pPr>
             <a:r>
-              <a:rPr lang="en-US" sz="1550" dirty="0">
+              <a:rPr lang="en-US" sz="1320" dirty="0">
                 <a:solidFill>
                   <a:srgbClr val="17364A"/>
                 </a:solidFill>
@@ -6505,9 +6595,9 @@
                 <a:ea typeface="Aptos" pitchFamily="34" charset="-122"/>
                 <a:cs typeface="Aptos" pitchFamily="34" charset="-120"/>
               </a:rPr>
-              <a:t>Identify what could go wrong, who could be affected, what safeguards are needed, and what evidence should be reviewed before use expands.</a:t>
-            </a:r>
-            <a:endParaRPr lang="en-US" sz="1550" dirty="0"/>
+              <a:t>Identify what could go wrong, who could be affected, what safeguards are needed, and what evidence should be reviewed.</a:t>
+            </a:r>
+            <a:endParaRPr lang="en-US" sz="1320" dirty="0"/>
           </a:p>
         </p:txBody>
       </p:sp>
@@ -6808,49 +6898,58 @@
           <a:ln/>
         </p:spPr>
         <p:txBody>
-          <a:bodyPr wrap="square" lIns="635" tIns="635" rIns="635" bIns="635" rtlCol="0" anchor="t">
+          <a:bodyPr wrap="square" lIns="1016" tIns="1016" rIns="1016" bIns="1016" rtlCol="0" anchor="t">
             <a:normAutofit/>
           </a:bodyPr>
           <a:lstStyle/>
           <a:p>
+            <a:pPr indent="0" marL="0">
+              <a:buNone/>
+            </a:pPr>
             <a:r>
               <a:rPr lang="en-US" sz="2100" dirty="0">
                 <a:solidFill>
-                  <a:srgbClr val="17364A"/>
-                </a:solidFill>
-                <a:latin typeface="Aptos" pitchFamily="34" charset="0"/>
-                <a:ea typeface="Aptos" pitchFamily="34" charset="-122"/>
-                <a:cs typeface="Aptos" pitchFamily="34" charset="-120"/>
-              </a:rPr>
-              <a:t>What outcome is being predicted, and over what time period?</a:t>
+                  <a:srgbClr val="003A63"/>
+                </a:solidFill>
+                <a:latin typeface="Aptos" pitchFamily="34" charset="0"/>
+                <a:ea typeface="Aptos" pitchFamily="34" charset="-122"/>
+                <a:cs typeface="Aptos" pitchFamily="34" charset="-120"/>
+              </a:rPr>
+              <a:t>• What outcome is being predicted, and over what time period?</a:t>
             </a:r>
             <a:endParaRPr lang="en-US" sz="2100" dirty="0"/>
           </a:p>
           <a:p>
+            <a:pPr indent="0" marL="0">
+              <a:buNone/>
+            </a:pPr>
             <a:r>
               <a:rPr lang="en-US" sz="2100" dirty="0">
                 <a:solidFill>
-                  <a:srgbClr val="17364A"/>
-                </a:solidFill>
-                <a:latin typeface="Aptos" pitchFamily="34" charset="0"/>
-                <a:ea typeface="Aptos" pitchFamily="34" charset="-122"/>
-                <a:cs typeface="Aptos" pitchFamily="34" charset="-120"/>
-              </a:rPr>
-              <a:t>What public health action will follow a high-risk score?</a:t>
+                  <a:srgbClr val="003A63"/>
+                </a:solidFill>
+                <a:latin typeface="Aptos" pitchFamily="34" charset="0"/>
+                <a:ea typeface="Aptos" pitchFamily="34" charset="-122"/>
+                <a:cs typeface="Aptos" pitchFamily="34" charset="-120"/>
+              </a:rPr>
+              <a:t>• What public health action will follow a high-risk score?</a:t>
             </a:r>
             <a:endParaRPr lang="en-US" sz="2100" dirty="0"/>
           </a:p>
           <a:p>
+            <a:pPr indent="0" marL="0">
+              <a:buNone/>
+            </a:pPr>
             <a:r>
               <a:rPr lang="en-US" sz="2100" dirty="0">
                 <a:solidFill>
-                  <a:srgbClr val="17364A"/>
-                </a:solidFill>
-                <a:latin typeface="Aptos" pitchFamily="34" charset="0"/>
-                <a:ea typeface="Aptos" pitchFamily="34" charset="-122"/>
-                <a:cs typeface="Aptos" pitchFamily="34" charset="-120"/>
-              </a:rPr>
-              <a:t>Which data sources may underrepresent some populations?</a:t>
+                  <a:srgbClr val="003A63"/>
+                </a:solidFill>
+                <a:latin typeface="Aptos" pitchFamily="34" charset="0"/>
+                <a:ea typeface="Aptos" pitchFamily="34" charset="-122"/>
+                <a:cs typeface="Aptos" pitchFamily="34" charset="-120"/>
+              </a:rPr>
+              <a:t>• Which data sources may underrepresent some populations?</a:t>
             </a:r>
             <a:endParaRPr lang="en-US" sz="2100" dirty="0"/>
           </a:p>
@@ -6930,17 +7029,17 @@
         </p:nvSpPr>
         <p:spPr>
           <a:xfrm>
-            <a:off x="7799832" y="1828800"/>
-            <a:ext cx="3145536" cy="685800"/>
-          </a:xfrm>
-          <a:prstGeom prst="rect">
-            <a:avLst/>
-          </a:prstGeom>
-          <a:noFill/>
-          <a:ln/>
-        </p:spPr>
-        <p:txBody>
-          <a:bodyPr wrap="square" lIns="0" tIns="0" rIns="0" bIns="0" rtlCol="0" anchor="t">
+            <a:off x="7799832" y="1801368"/>
+            <a:ext cx="3145536" cy="758952"/>
+          </a:xfrm>
+          <a:prstGeom prst="rect">
+            <a:avLst/>
+          </a:prstGeom>
+          <a:noFill/>
+          <a:ln/>
+        </p:spPr>
+        <p:txBody>
+          <a:bodyPr wrap="square" lIns="254" tIns="254" rIns="254" bIns="254" rtlCol="0" anchor="t">
             <a:normAutofit/>
           </a:bodyPr>
           <a:lstStyle/>
@@ -6949,7 +7048,7 @@
               <a:buNone/>
             </a:pPr>
             <a:r>
-              <a:rPr lang="en-US" sz="1550" dirty="0">
+              <a:rPr lang="en-US" sz="1320" dirty="0">
                 <a:solidFill>
                   <a:srgbClr val="17364A"/>
                 </a:solidFill>
@@ -6959,7 +7058,7 @@
               </a:rPr>
               <a:t>What outcome is being predicted, and over what time period?</a:t>
             </a:r>
-            <a:endParaRPr lang="en-US" sz="1550" dirty="0"/>
+            <a:endParaRPr lang="en-US" sz="1320" dirty="0"/>
           </a:p>
         </p:txBody>
       </p:sp>
@@ -7047,13 +7146,16 @@
           <a:ln/>
         </p:spPr>
         <p:txBody>
-          <a:bodyPr wrap="square" lIns="254" tIns="254" rIns="254" bIns="254" rtlCol="0" anchor="t">
+          <a:bodyPr wrap="square" lIns="508" tIns="508" rIns="508" bIns="508" rtlCol="0" anchor="t">
             <a:normAutofit/>
           </a:bodyPr>
           <a:lstStyle/>
           <a:p>
-            <a:r>
-              <a:rPr lang="en-US" sz="1380" dirty="0">
+            <a:pPr indent="0" marL="0">
+              <a:buNone/>
+            </a:pPr>
+            <a:r>
+              <a:rPr lang="en-US" sz="1220" dirty="0">
                 <a:solidFill>
                   <a:srgbClr val="17364A"/>
                 </a:solidFill>
@@ -7063,11 +7165,14 @@
               </a:rPr>
               <a:t>What outcome is being predicted, and over what time period?</a:t>
             </a:r>
-            <a:endParaRPr lang="en-US" sz="1380" dirty="0"/>
-          </a:p>
-          <a:p>
-            <a:r>
-              <a:rPr lang="en-US" sz="1380" dirty="0">
+            <a:endParaRPr lang="en-US" sz="1220" dirty="0"/>
+          </a:p>
+          <a:p>
+            <a:pPr indent="0" marL="0">
+              <a:buNone/>
+            </a:pPr>
+            <a:r>
+              <a:rPr lang="en-US" sz="1220" dirty="0">
                 <a:solidFill>
                   <a:srgbClr val="17364A"/>
                 </a:solidFill>
@@ -7077,11 +7182,14 @@
               </a:rPr>
               <a:t>What public health action will follow a high-risk score?</a:t>
             </a:r>
-            <a:endParaRPr lang="en-US" sz="1380" dirty="0"/>
-          </a:p>
-          <a:p>
-            <a:r>
-              <a:rPr lang="en-US" sz="1380" dirty="0">
+            <a:endParaRPr lang="en-US" sz="1220" dirty="0"/>
+          </a:p>
+          <a:p>
+            <a:pPr indent="0" marL="0">
+              <a:buNone/>
+            </a:pPr>
+            <a:r>
+              <a:rPr lang="en-US" sz="1220" dirty="0">
                 <a:solidFill>
                   <a:srgbClr val="17364A"/>
                 </a:solidFill>
@@ -7091,7 +7199,7 @@
               </a:rPr>
               <a:t>Which data sources may underrepresent some populations?</a:t>
             </a:r>
-            <a:endParaRPr lang="en-US" sz="1380" dirty="0"/>
+            <a:endParaRPr lang="en-US" sz="1220" dirty="0"/>
           </a:p>
         </p:txBody>
       </p:sp>
@@ -7169,17 +7277,17 @@
         </p:nvSpPr>
         <p:spPr>
           <a:xfrm>
-            <a:off x="7799832" y="5001768"/>
-            <a:ext cx="3145536" cy="502920"/>
-          </a:xfrm>
-          <a:prstGeom prst="rect">
-            <a:avLst/>
-          </a:prstGeom>
-          <a:noFill/>
-          <a:ln/>
-        </p:spPr>
-        <p:txBody>
-          <a:bodyPr wrap="square" lIns="0" tIns="0" rIns="0" bIns="0" rtlCol="0" anchor="t">
+            <a:off x="7799832" y="4974336"/>
+            <a:ext cx="3145536" cy="576072"/>
+          </a:xfrm>
+          <a:prstGeom prst="rect">
+            <a:avLst/>
+          </a:prstGeom>
+          <a:noFill/>
+          <a:ln/>
+        </p:spPr>
+        <p:txBody>
+          <a:bodyPr wrap="square" lIns="254" tIns="254" rIns="254" bIns="254" rtlCol="0" anchor="t">
             <a:normAutofit/>
           </a:bodyPr>
           <a:lstStyle/>
@@ -7188,7 +7296,7 @@
               <a:buNone/>
             </a:pPr>
             <a:r>
-              <a:rPr lang="en-US" sz="1550" dirty="0">
+              <a:rPr lang="en-US" sz="1320" dirty="0">
                 <a:solidFill>
                   <a:srgbClr val="17364A"/>
                 </a:solidFill>
@@ -7196,9 +7304,9 @@
                 <a:ea typeface="Aptos" pitchFamily="34" charset="-122"/>
                 <a:cs typeface="Aptos" pitchFamily="34" charset="-120"/>
               </a:rPr>
-              <a:t>Identify what could go wrong, who could be affected, what safeguards are needed, and what evidence should be reviewed before use expands.</a:t>
-            </a:r>
-            <a:endParaRPr lang="en-US" sz="1550" dirty="0"/>
+              <a:t>Identify what could go wrong, who could be affected, what safeguards are needed, and what evidence should be reviewed.</a:t>
+            </a:r>
+            <a:endParaRPr lang="en-US" sz="1320" dirty="0"/>
           </a:p>
         </p:txBody>
       </p:sp>
@@ -7499,35 +7607,41 @@
           <a:ln/>
         </p:spPr>
         <p:txBody>
-          <a:bodyPr wrap="square" lIns="635" tIns="635" rIns="635" bIns="635" rtlCol="0" anchor="t">
+          <a:bodyPr wrap="square" lIns="1016" tIns="1016" rIns="1016" bIns="1016" rtlCol="0" anchor="t">
             <a:normAutofit/>
           </a:bodyPr>
           <a:lstStyle/>
           <a:p>
+            <a:pPr indent="0" marL="0">
+              <a:buNone/>
+            </a:pPr>
             <a:r>
               <a:rPr lang="en-US" sz="2100" dirty="0">
                 <a:solidFill>
-                  <a:srgbClr val="17364A"/>
-                </a:solidFill>
-                <a:latin typeface="Aptos" pitchFamily="34" charset="0"/>
-                <a:ea typeface="Aptos" pitchFamily="34" charset="-122"/>
-                <a:cs typeface="Aptos" pitchFamily="34" charset="-120"/>
-              </a:rPr>
-              <a:t>What are the consequences of false positives and false negatives?</a:t>
+                  <a:srgbClr val="003A63"/>
+                </a:solidFill>
+                <a:latin typeface="Aptos" pitchFamily="34" charset="0"/>
+                <a:ea typeface="Aptos" pitchFamily="34" charset="-122"/>
+                <a:cs typeface="Aptos" pitchFamily="34" charset="-120"/>
+              </a:rPr>
+              <a:t>• What are the consequences of false positives and false negatives?</a:t>
             </a:r>
             <a:endParaRPr lang="en-US" sz="2100" dirty="0"/>
           </a:p>
           <a:p>
+            <a:pPr indent="0" marL="0">
+              <a:buNone/>
+            </a:pPr>
             <a:r>
               <a:rPr lang="en-US" sz="2100" dirty="0">
                 <a:solidFill>
-                  <a:srgbClr val="17364A"/>
-                </a:solidFill>
-                <a:latin typeface="Aptos" pitchFamily="34" charset="0"/>
-                <a:ea typeface="Aptos" pitchFamily="34" charset="-122"/>
-                <a:cs typeface="Aptos" pitchFamily="34" charset="-120"/>
-              </a:rPr>
-              <a:t>How will thresholds, calibration, and subgroup performance be monitored?</a:t>
+                  <a:srgbClr val="003A63"/>
+                </a:solidFill>
+                <a:latin typeface="Aptos" pitchFamily="34" charset="0"/>
+                <a:ea typeface="Aptos" pitchFamily="34" charset="-122"/>
+                <a:cs typeface="Aptos" pitchFamily="34" charset="-120"/>
+              </a:rPr>
+              <a:t>• How will thresholds, calibration, and subgroup performance be monitored?</a:t>
             </a:r>
             <a:endParaRPr lang="en-US" sz="2100" dirty="0"/>
           </a:p>
@@ -7607,17 +7721,17 @@
         </p:nvSpPr>
         <p:spPr>
           <a:xfrm>
-            <a:off x="7799832" y="1828800"/>
-            <a:ext cx="3145536" cy="685800"/>
-          </a:xfrm>
-          <a:prstGeom prst="rect">
-            <a:avLst/>
-          </a:prstGeom>
-          <a:noFill/>
-          <a:ln/>
-        </p:spPr>
-        <p:txBody>
-          <a:bodyPr wrap="square" lIns="0" tIns="0" rIns="0" bIns="0" rtlCol="0" anchor="t">
+            <a:off x="7799832" y="1801368"/>
+            <a:ext cx="3145536" cy="758952"/>
+          </a:xfrm>
+          <a:prstGeom prst="rect">
+            <a:avLst/>
+          </a:prstGeom>
+          <a:noFill/>
+          <a:ln/>
+        </p:spPr>
+        <p:txBody>
+          <a:bodyPr wrap="square" lIns="254" tIns="254" rIns="254" bIns="254" rtlCol="0" anchor="t">
             <a:normAutofit/>
           </a:bodyPr>
           <a:lstStyle/>
@@ -7626,7 +7740,7 @@
               <a:buNone/>
             </a:pPr>
             <a:r>
-              <a:rPr lang="en-US" sz="1550" dirty="0">
+              <a:rPr lang="en-US" sz="1320" dirty="0">
                 <a:solidFill>
                   <a:srgbClr val="17364A"/>
                 </a:solidFill>
@@ -7636,7 +7750,7 @@
               </a:rPr>
               <a:t>What are the consequences of false positives and false negatives?</a:t>
             </a:r>
-            <a:endParaRPr lang="en-US" sz="1550" dirty="0"/>
+            <a:endParaRPr lang="en-US" sz="1320" dirty="0"/>
           </a:p>
         </p:txBody>
       </p:sp>
@@ -7724,13 +7838,16 @@
           <a:ln/>
         </p:spPr>
         <p:txBody>
-          <a:bodyPr wrap="square" lIns="254" tIns="254" rIns="254" bIns="254" rtlCol="0" anchor="t">
+          <a:bodyPr wrap="square" lIns="508" tIns="508" rIns="508" bIns="508" rtlCol="0" anchor="t">
             <a:normAutofit/>
           </a:bodyPr>
           <a:lstStyle/>
           <a:p>
-            <a:r>
-              <a:rPr lang="en-US" sz="1380" dirty="0">
+            <a:pPr indent="0" marL="0">
+              <a:buNone/>
+            </a:pPr>
+            <a:r>
+              <a:rPr lang="en-US" sz="1220" dirty="0">
                 <a:solidFill>
                   <a:srgbClr val="17364A"/>
                 </a:solidFill>
@@ -7740,11 +7857,14 @@
               </a:rPr>
               <a:t>What are the consequences of false positives and false negatives?</a:t>
             </a:r>
-            <a:endParaRPr lang="en-US" sz="1380" dirty="0"/>
-          </a:p>
-          <a:p>
-            <a:r>
-              <a:rPr lang="en-US" sz="1380" dirty="0">
+            <a:endParaRPr lang="en-US" sz="1220" dirty="0"/>
+          </a:p>
+          <a:p>
+            <a:pPr indent="0" marL="0">
+              <a:buNone/>
+            </a:pPr>
+            <a:r>
+              <a:rPr lang="en-US" sz="1220" dirty="0">
                 <a:solidFill>
                   <a:srgbClr val="17364A"/>
                 </a:solidFill>
@@ -7752,9 +7872,9 @@
                 <a:ea typeface="Aptos" pitchFamily="34" charset="-122"/>
                 <a:cs typeface="Aptos" pitchFamily="34" charset="-120"/>
               </a:rPr>
-              <a:t>How will thresholds, calibration, and subgroup performance be monitored?</a:t>
-            </a:r>
-            <a:endParaRPr lang="en-US" sz="1380" dirty="0"/>
+              <a:t>How will thresholds, calibration, and subgroup performance be.</a:t>
+            </a:r>
+            <a:endParaRPr lang="en-US" sz="1220" dirty="0"/>
           </a:p>
         </p:txBody>
       </p:sp>
@@ -7832,17 +7952,17 @@
         </p:nvSpPr>
         <p:spPr>
           <a:xfrm>
-            <a:off x="7799832" y="5001768"/>
-            <a:ext cx="3145536" cy="502920"/>
-          </a:xfrm>
-          <a:prstGeom prst="rect">
-            <a:avLst/>
-          </a:prstGeom>
-          <a:noFill/>
-          <a:ln/>
-        </p:spPr>
-        <p:txBody>
-          <a:bodyPr wrap="square" lIns="0" tIns="0" rIns="0" bIns="0" rtlCol="0" anchor="t">
+            <a:off x="7799832" y="4974336"/>
+            <a:ext cx="3145536" cy="576072"/>
+          </a:xfrm>
+          <a:prstGeom prst="rect">
+            <a:avLst/>
+          </a:prstGeom>
+          <a:noFill/>
+          <a:ln/>
+        </p:spPr>
+        <p:txBody>
+          <a:bodyPr wrap="square" lIns="254" tIns="254" rIns="254" bIns="254" rtlCol="0" anchor="t">
             <a:normAutofit/>
           </a:bodyPr>
           <a:lstStyle/>
@@ -7851,7 +7971,7 @@
               <a:buNone/>
             </a:pPr>
             <a:r>
-              <a:rPr lang="en-US" sz="1550" dirty="0">
+              <a:rPr lang="en-US" sz="1320" dirty="0">
                 <a:solidFill>
                   <a:srgbClr val="17364A"/>
                 </a:solidFill>
@@ -7859,9 +7979,9 @@
                 <a:ea typeface="Aptos" pitchFamily="34" charset="-122"/>
                 <a:cs typeface="Aptos" pitchFamily="34" charset="-120"/>
               </a:rPr>
-              <a:t>Identify what could go wrong, who could be affected, what safeguards are needed, and what evidence should be reviewed before use expands.</a:t>
-            </a:r>
-            <a:endParaRPr lang="en-US" sz="1550" dirty="0"/>
+              <a:t>Identify what could go wrong, who could be affected, what safeguards are needed, and what evidence should be reviewed.</a:t>
+            </a:r>
+            <a:endParaRPr lang="en-US" sz="1320" dirty="0"/>
           </a:p>
         </p:txBody>
       </p:sp>
@@ -8162,49 +8282,58 @@
           <a:ln/>
         </p:spPr>
         <p:txBody>
-          <a:bodyPr wrap="square" lIns="635" tIns="635" rIns="635" bIns="635" rtlCol="0" anchor="t">
+          <a:bodyPr wrap="square" lIns="1016" tIns="1016" rIns="1016" bIns="1016" rtlCol="0" anchor="t">
             <a:normAutofit/>
           </a:bodyPr>
           <a:lstStyle/>
           <a:p>
+            <a:pPr indent="0" marL="0">
+              <a:buNone/>
+            </a:pPr>
             <a:r>
               <a:rPr lang="en-US" sz="2100" dirty="0">
                 <a:solidFill>
-                  <a:srgbClr val="17364A"/>
-                </a:solidFill>
-                <a:latin typeface="Aptos" pitchFamily="34" charset="0"/>
-                <a:ea typeface="Aptos" pitchFamily="34" charset="-122"/>
-                <a:cs typeface="Aptos" pitchFamily="34" charset="-120"/>
-              </a:rPr>
-              <a:t>Create a predictive model review plan for one public health use case.</a:t>
+                  <a:srgbClr val="003A63"/>
+                </a:solidFill>
+                <a:latin typeface="Aptos" pitchFamily="34" charset="0"/>
+                <a:ea typeface="Aptos" pitchFamily="34" charset="-122"/>
+                <a:cs typeface="Aptos" pitchFamily="34" charset="-120"/>
+              </a:rPr>
+              <a:t>• Create a predictive model review plan for one public health use case.</a:t>
             </a:r>
             <a:endParaRPr lang="en-US" sz="2100" dirty="0"/>
           </a:p>
           <a:p>
+            <a:pPr indent="0" marL="0">
+              <a:buNone/>
+            </a:pPr>
             <a:r>
               <a:rPr lang="en-US" sz="2100" dirty="0">
                 <a:solidFill>
-                  <a:srgbClr val="17364A"/>
-                </a:solidFill>
-                <a:latin typeface="Aptos" pitchFamily="34" charset="0"/>
-                <a:ea typeface="Aptos" pitchFamily="34" charset="-122"/>
-                <a:cs typeface="Aptos" pitchFamily="34" charset="-120"/>
-              </a:rPr>
-              <a:t>Include the outcome, population, time horizon, data sources, candidate features, risk categories,.</a:t>
+                  <a:srgbClr val="003A63"/>
+                </a:solidFill>
+                <a:latin typeface="Aptos" pitchFamily="34" charset="0"/>
+                <a:ea typeface="Aptos" pitchFamily="34" charset="-122"/>
+                <a:cs typeface="Aptos" pitchFamily="34" charset="-120"/>
+              </a:rPr>
+              <a:t>• Include the outcome, population, time horizon, data sources, candidate features, risk.</a:t>
             </a:r>
             <a:endParaRPr lang="en-US" sz="2100" dirty="0"/>
           </a:p>
           <a:p>
+            <a:pPr indent="0" marL="0">
+              <a:buNone/>
+            </a:pPr>
             <a:r>
               <a:rPr lang="en-US" sz="2100" dirty="0">
                 <a:solidFill>
-                  <a:srgbClr val="17364A"/>
-                </a:solidFill>
-                <a:latin typeface="Aptos" pitchFamily="34" charset="0"/>
-                <a:ea typeface="Aptos" pitchFamily="34" charset="-122"/>
-                <a:cs typeface="Aptos" pitchFamily="34" charset="-120"/>
-              </a:rPr>
-              <a:t>The plan should also identify whether the use is supportive, restrictive, or consequential.</a:t>
+                  <a:srgbClr val="003A63"/>
+                </a:solidFill>
+                <a:latin typeface="Aptos" pitchFamily="34" charset="0"/>
+                <a:ea typeface="Aptos" pitchFamily="34" charset="-122"/>
+                <a:cs typeface="Aptos" pitchFamily="34" charset="-120"/>
+              </a:rPr>
+              <a:t>• The plan should also identify whether the use is supportive, restrictive, or consequential.</a:t>
             </a:r>
             <a:endParaRPr lang="en-US" sz="2100" dirty="0"/>
           </a:p>
@@ -8284,17 +8413,17 @@
         </p:nvSpPr>
         <p:spPr>
           <a:xfrm>
-            <a:off x="7799832" y="1828800"/>
-            <a:ext cx="3145536" cy="685800"/>
-          </a:xfrm>
-          <a:prstGeom prst="rect">
-            <a:avLst/>
-          </a:prstGeom>
-          <a:noFill/>
-          <a:ln/>
-        </p:spPr>
-        <p:txBody>
-          <a:bodyPr wrap="square" lIns="0" tIns="0" rIns="0" bIns="0" rtlCol="0" anchor="t">
+            <a:off x="7799832" y="1801368"/>
+            <a:ext cx="3145536" cy="758952"/>
+          </a:xfrm>
+          <a:prstGeom prst="rect">
+            <a:avLst/>
+          </a:prstGeom>
+          <a:noFill/>
+          <a:ln/>
+        </p:spPr>
+        <p:txBody>
+          <a:bodyPr wrap="square" lIns="254" tIns="254" rIns="254" bIns="254" rtlCol="0" anchor="t">
             <a:normAutofit/>
           </a:bodyPr>
           <a:lstStyle/>
@@ -8303,7 +8432,7 @@
               <a:buNone/>
             </a:pPr>
             <a:r>
-              <a:rPr lang="en-US" sz="1550" dirty="0">
+              <a:rPr lang="en-US" sz="1320" dirty="0">
                 <a:solidFill>
                   <a:srgbClr val="17364A"/>
                 </a:solidFill>
@@ -8313,7 +8442,7 @@
               </a:rPr>
               <a:t>Create a predictive model review plan for one public health use case.</a:t>
             </a:r>
-            <a:endParaRPr lang="en-US" sz="1550" dirty="0"/>
+            <a:endParaRPr lang="en-US" sz="1320" dirty="0"/>
           </a:p>
         </p:txBody>
       </p:sp>
@@ -8401,13 +8530,16 @@
           <a:ln/>
         </p:spPr>
         <p:txBody>
-          <a:bodyPr wrap="square" lIns="254" tIns="254" rIns="254" bIns="254" rtlCol="0" anchor="t">
+          <a:bodyPr wrap="square" lIns="508" tIns="508" rIns="508" bIns="508" rtlCol="0" anchor="t">
             <a:normAutofit/>
           </a:bodyPr>
           <a:lstStyle/>
           <a:p>
-            <a:r>
-              <a:rPr lang="en-US" sz="1380" dirty="0">
+            <a:pPr indent="0" marL="0">
+              <a:buNone/>
+            </a:pPr>
+            <a:r>
+              <a:rPr lang="en-US" sz="1220" dirty="0">
                 <a:solidFill>
                   <a:srgbClr val="17364A"/>
                 </a:solidFill>
@@ -8415,13 +8547,16 @@
                 <a:ea typeface="Aptos" pitchFamily="34" charset="-122"/>
                 <a:cs typeface="Aptos" pitchFamily="34" charset="-120"/>
               </a:rPr>
-              <a:t>Include the outcome, population, time horizon, data sources, candidate features, risk.</a:t>
-            </a:r>
-            <a:endParaRPr lang="en-US" sz="1380" dirty="0"/>
-          </a:p>
-          <a:p>
-            <a:r>
-              <a:rPr lang="en-US" sz="1380" dirty="0">
+              <a:t>Include the outcome, population, time horizon, data sources,.</a:t>
+            </a:r>
+            <a:endParaRPr lang="en-US" sz="1220" dirty="0"/>
+          </a:p>
+          <a:p>
+            <a:pPr indent="0" marL="0">
+              <a:buNone/>
+            </a:pPr>
+            <a:r>
+              <a:rPr lang="en-US" sz="1220" dirty="0">
                 <a:solidFill>
                   <a:srgbClr val="17364A"/>
                 </a:solidFill>
@@ -8429,9 +8564,9 @@
                 <a:ea typeface="Aptos" pitchFamily="34" charset="-122"/>
                 <a:cs typeface="Aptos" pitchFamily="34" charset="-120"/>
               </a:rPr>
-              <a:t>Predictive tools used to allocate supportive resources have different risk profiles than.</a:t>
-            </a:r>
-            <a:endParaRPr lang="en-US" sz="1380" dirty="0"/>
+              <a:t>Predictive tools used to allocate supportive resources have.</a:t>
+            </a:r>
+            <a:endParaRPr lang="en-US" sz="1220" dirty="0"/>
           </a:p>
         </p:txBody>
       </p:sp>
@@ -8509,17 +8644,17 @@
         </p:nvSpPr>
         <p:spPr>
           <a:xfrm>
-            <a:off x="7799832" y="5001768"/>
-            <a:ext cx="3145536" cy="502920"/>
-          </a:xfrm>
-          <a:prstGeom prst="rect">
-            <a:avLst/>
-          </a:prstGeom>
-          <a:noFill/>
-          <a:ln/>
-        </p:spPr>
-        <p:txBody>
-          <a:bodyPr wrap="square" lIns="0" tIns="0" rIns="0" bIns="0" rtlCol="0" anchor="t">
+            <a:off x="7799832" y="4974336"/>
+            <a:ext cx="3145536" cy="576072"/>
+          </a:xfrm>
+          <a:prstGeom prst="rect">
+            <a:avLst/>
+          </a:prstGeom>
+          <a:noFill/>
+          <a:ln/>
+        </p:spPr>
+        <p:txBody>
+          <a:bodyPr wrap="square" lIns="254" tIns="254" rIns="254" bIns="254" rtlCol="0" anchor="t">
             <a:normAutofit/>
           </a:bodyPr>
           <a:lstStyle/>
@@ -8528,7 +8663,7 @@
               <a:buNone/>
             </a:pPr>
             <a:r>
-              <a:rPr lang="en-US" sz="1550" dirty="0">
+              <a:rPr lang="en-US" sz="1320" dirty="0">
                 <a:solidFill>
                   <a:srgbClr val="17364A"/>
                 </a:solidFill>
@@ -8536,9 +8671,9 @@
                 <a:ea typeface="Aptos" pitchFamily="34" charset="-122"/>
                 <a:cs typeface="Aptos" pitchFamily="34" charset="-120"/>
               </a:rPr>
-              <a:t>Use the assignment to test whether you can explain the concept, apply it to a realistic public health situation, and identify what would need review before the work moves forward.</a:t>
-            </a:r>
-            <a:endParaRPr lang="en-US" sz="1550" dirty="0"/>
+              <a:t>Use the assignment to test whether you can explain the concept, apply it to a realistic public health situation, and.</a:t>
+            </a:r>
+            <a:endParaRPr lang="en-US" sz="1320" dirty="0"/>
           </a:p>
         </p:txBody>
       </p:sp>
@@ -8839,49 +8974,58 @@
           <a:ln/>
         </p:spPr>
         <p:txBody>
-          <a:bodyPr wrap="square" lIns="635" tIns="635" rIns="635" bIns="635" rtlCol="0" anchor="t">
+          <a:bodyPr wrap="square" lIns="1016" tIns="1016" rIns="1016" bIns="1016" rtlCol="0" anchor="t">
             <a:normAutofit/>
           </a:bodyPr>
           <a:lstStyle/>
           <a:p>
+            <a:pPr indent="0" marL="0">
+              <a:buNone/>
+            </a:pPr>
             <a:r>
               <a:rPr lang="en-US" sz="2100" dirty="0">
                 <a:solidFill>
-                  <a:srgbClr val="17364A"/>
-                </a:solidFill>
-                <a:latin typeface="Aptos" pitchFamily="34" charset="0"/>
-                <a:ea typeface="Aptos" pitchFamily="34" charset="-122"/>
-                <a:cs typeface="Aptos" pitchFamily="34" charset="-120"/>
-              </a:rPr>
-              <a:t>Predictive model review plan</a:t>
+                  <a:srgbClr val="003A63"/>
+                </a:solidFill>
+                <a:latin typeface="Aptos" pitchFamily="34" charset="0"/>
+                <a:ea typeface="Aptos" pitchFamily="34" charset="-122"/>
+                <a:cs typeface="Aptos" pitchFamily="34" charset="-120"/>
+              </a:rPr>
+              <a:t>• Predictive model review plan</a:t>
             </a:r>
             <a:endParaRPr lang="en-US" sz="2100" dirty="0"/>
           </a:p>
           <a:p>
+            <a:pPr indent="0" marL="0">
+              <a:buNone/>
+            </a:pPr>
             <a:r>
               <a:rPr lang="en-US" sz="2100" dirty="0">
                 <a:solidFill>
-                  <a:srgbClr val="17364A"/>
-                </a:solidFill>
-                <a:latin typeface="Aptos" pitchFamily="34" charset="0"/>
-                <a:ea typeface="Aptos" pitchFamily="34" charset="-122"/>
-                <a:cs typeface="Aptos" pitchFamily="34" charset="-120"/>
-              </a:rPr>
-              <a:t>Risk score interpretation guide</a:t>
+                  <a:srgbClr val="003A63"/>
+                </a:solidFill>
+                <a:latin typeface="Aptos" pitchFamily="34" charset="0"/>
+                <a:ea typeface="Aptos" pitchFamily="34" charset="-122"/>
+                <a:cs typeface="Aptos" pitchFamily="34" charset="-120"/>
+              </a:rPr>
+              <a:t>• Risk score interpretation guide</a:t>
             </a:r>
             <a:endParaRPr lang="en-US" sz="2100" dirty="0"/>
           </a:p>
           <a:p>
+            <a:pPr indent="0" marL="0">
+              <a:buNone/>
+            </a:pPr>
             <a:r>
               <a:rPr lang="en-US" sz="2100" dirty="0">
                 <a:solidFill>
-                  <a:srgbClr val="17364A"/>
-                </a:solidFill>
-                <a:latin typeface="Aptos" pitchFamily="34" charset="0"/>
-                <a:ea typeface="Aptos" pitchFamily="34" charset="-122"/>
-                <a:cs typeface="Aptos" pitchFamily="34" charset="-120"/>
-              </a:rPr>
-              <a:t>Threshold and error tradeoff memo</a:t>
+                  <a:srgbClr val="003A63"/>
+                </a:solidFill>
+                <a:latin typeface="Aptos" pitchFamily="34" charset="0"/>
+                <a:ea typeface="Aptos" pitchFamily="34" charset="-122"/>
+                <a:cs typeface="Aptos" pitchFamily="34" charset="-120"/>
+              </a:rPr>
+              <a:t>• Threshold and error tradeoff memo</a:t>
             </a:r>
             <a:endParaRPr lang="en-US" sz="2100" dirty="0"/>
           </a:p>
@@ -8961,17 +9105,17 @@
         </p:nvSpPr>
         <p:spPr>
           <a:xfrm>
-            <a:off x="7799832" y="1828800"/>
-            <a:ext cx="3145536" cy="685800"/>
-          </a:xfrm>
-          <a:prstGeom prst="rect">
-            <a:avLst/>
-          </a:prstGeom>
-          <a:noFill/>
-          <a:ln/>
-        </p:spPr>
-        <p:txBody>
-          <a:bodyPr wrap="square" lIns="0" tIns="0" rIns="0" bIns="0" rtlCol="0" anchor="t">
+            <a:off x="7799832" y="1801368"/>
+            <a:ext cx="3145536" cy="758952"/>
+          </a:xfrm>
+          <a:prstGeom prst="rect">
+            <a:avLst/>
+          </a:prstGeom>
+          <a:noFill/>
+          <a:ln/>
+        </p:spPr>
+        <p:txBody>
+          <a:bodyPr wrap="square" lIns="254" tIns="254" rIns="254" bIns="254" rtlCol="0" anchor="t">
             <a:normAutofit/>
           </a:bodyPr>
           <a:lstStyle/>
@@ -8980,7 +9124,7 @@
               <a:buNone/>
             </a:pPr>
             <a:r>
-              <a:rPr lang="en-US" sz="1550" dirty="0">
+              <a:rPr lang="en-US" sz="1320" dirty="0">
                 <a:solidFill>
                   <a:srgbClr val="17364A"/>
                 </a:solidFill>
@@ -8990,7 +9134,7 @@
               </a:rPr>
               <a:t>Predictive model review plan</a:t>
             </a:r>
-            <a:endParaRPr lang="en-US" sz="1550" dirty="0"/>
+            <a:endParaRPr lang="en-US" sz="1320" dirty="0"/>
           </a:p>
         </p:txBody>
       </p:sp>
@@ -9078,13 +9222,16 @@
           <a:ln/>
         </p:spPr>
         <p:txBody>
-          <a:bodyPr wrap="square" lIns="254" tIns="254" rIns="254" bIns="254" rtlCol="0" anchor="t">
+          <a:bodyPr wrap="square" lIns="508" tIns="508" rIns="508" bIns="508" rtlCol="0" anchor="t">
             <a:normAutofit/>
           </a:bodyPr>
           <a:lstStyle/>
           <a:p>
-            <a:r>
-              <a:rPr lang="en-US" sz="1380" dirty="0">
+            <a:pPr indent="0" marL="0">
+              <a:buNone/>
+            </a:pPr>
+            <a:r>
+              <a:rPr lang="en-US" sz="1220" dirty="0">
                 <a:solidFill>
                   <a:srgbClr val="17364A"/>
                 </a:solidFill>
@@ -9094,11 +9241,14 @@
               </a:rPr>
               <a:t>Predictive model review plan</a:t>
             </a:r>
-            <a:endParaRPr lang="en-US" sz="1380" dirty="0"/>
-          </a:p>
-          <a:p>
-            <a:r>
-              <a:rPr lang="en-US" sz="1380" dirty="0">
+            <a:endParaRPr lang="en-US" sz="1220" dirty="0"/>
+          </a:p>
+          <a:p>
+            <a:pPr indent="0" marL="0">
+              <a:buNone/>
+            </a:pPr>
+            <a:r>
+              <a:rPr lang="en-US" sz="1220" dirty="0">
                 <a:solidFill>
                   <a:srgbClr val="17364A"/>
                 </a:solidFill>
@@ -9108,11 +9258,14 @@
               </a:rPr>
               <a:t>Risk score interpretation guide</a:t>
             </a:r>
-            <a:endParaRPr lang="en-US" sz="1380" dirty="0"/>
-          </a:p>
-          <a:p>
-            <a:r>
-              <a:rPr lang="en-US" sz="1380" dirty="0">
+            <a:endParaRPr lang="en-US" sz="1220" dirty="0"/>
+          </a:p>
+          <a:p>
+            <a:pPr indent="0" marL="0">
+              <a:buNone/>
+            </a:pPr>
+            <a:r>
+              <a:rPr lang="en-US" sz="1220" dirty="0">
                 <a:solidFill>
                   <a:srgbClr val="17364A"/>
                 </a:solidFill>
@@ -9122,7 +9275,7 @@
               </a:rPr>
               <a:t>Threshold and error tradeoff memo</a:t>
             </a:r>
-            <a:endParaRPr lang="en-US" sz="1380" dirty="0"/>
+            <a:endParaRPr lang="en-US" sz="1220" dirty="0"/>
           </a:p>
         </p:txBody>
       </p:sp>
@@ -9200,17 +9353,17 @@
         </p:nvSpPr>
         <p:spPr>
           <a:xfrm>
-            <a:off x="7799832" y="5001768"/>
-            <a:ext cx="3145536" cy="502920"/>
-          </a:xfrm>
-          <a:prstGeom prst="rect">
-            <a:avLst/>
-          </a:prstGeom>
-          <a:noFill/>
-          <a:ln/>
-        </p:spPr>
-        <p:txBody>
-          <a:bodyPr wrap="square" lIns="0" tIns="0" rIns="0" bIns="0" rtlCol="0" anchor="t">
+            <a:off x="7799832" y="4974336"/>
+            <a:ext cx="3145536" cy="576072"/>
+          </a:xfrm>
+          <a:prstGeom prst="rect">
+            <a:avLst/>
+          </a:prstGeom>
+          <a:noFill/>
+          <a:ln/>
+        </p:spPr>
+        <p:txBody>
+          <a:bodyPr wrap="square" lIns="254" tIns="254" rIns="254" bIns="254" rtlCol="0" anchor="t">
             <a:normAutofit/>
           </a:bodyPr>
           <a:lstStyle/>
@@ -9219,7 +9372,7 @@
               <a:buNone/>
             </a:pPr>
             <a:r>
-              <a:rPr lang="en-US" sz="1550" dirty="0">
+              <a:rPr lang="en-US" sz="1320" dirty="0">
                 <a:solidFill>
                   <a:srgbClr val="17364A"/>
                 </a:solidFill>
@@ -9227,9 +9380,9 @@
                 <a:ea typeface="Aptos" pitchFamily="34" charset="-122"/>
                 <a:cs typeface="Aptos" pitchFamily="34" charset="-120"/>
               </a:rPr>
-              <a:t>Identify what could go wrong, who could be affected, what safeguards are needed, and what evidence should be reviewed before use expands.</a:t>
-            </a:r>
-            <a:endParaRPr lang="en-US" sz="1550" dirty="0"/>
+              <a:t>Identify what could go wrong, who could be affected, what safeguards are needed, and what evidence should be reviewed.</a:t>
+            </a:r>
+            <a:endParaRPr lang="en-US" sz="1320" dirty="0"/>
           </a:p>
         </p:txBody>
       </p:sp>
@@ -9530,21 +9683,24 @@
           <a:ln/>
         </p:spPr>
         <p:txBody>
-          <a:bodyPr wrap="square" lIns="635" tIns="635" rIns="635" bIns="635" rtlCol="0" anchor="t">
+          <a:bodyPr wrap="square" lIns="1016" tIns="1016" rIns="1016" bIns="1016" rtlCol="0" anchor="t">
             <a:normAutofit/>
           </a:bodyPr>
           <a:lstStyle/>
           <a:p>
+            <a:pPr indent="0" marL="0">
+              <a:buNone/>
+            </a:pPr>
             <a:r>
               <a:rPr lang="en-US" sz="2100" dirty="0">
                 <a:solidFill>
-                  <a:srgbClr val="17364A"/>
-                </a:solidFill>
-                <a:latin typeface="Aptos" pitchFamily="34" charset="0"/>
-                <a:ea typeface="Aptos" pitchFamily="34" charset="-122"/>
-                <a:cs typeface="Aptos" pitchFamily="34" charset="-120"/>
-              </a:rPr>
-              <a:t>Subgroup monitoring plan</a:t>
+                  <a:srgbClr val="003A63"/>
+                </a:solidFill>
+                <a:latin typeface="Aptos" pitchFamily="34" charset="0"/>
+                <a:ea typeface="Aptos" pitchFamily="34" charset="-122"/>
+                <a:cs typeface="Aptos" pitchFamily="34" charset="-120"/>
+              </a:rPr>
+              <a:t>• Subgroup monitoring plan</a:t>
             </a:r>
             <a:endParaRPr lang="en-US" sz="2100" dirty="0"/>
           </a:p>
@@ -9624,17 +9780,17 @@
         </p:nvSpPr>
         <p:spPr>
           <a:xfrm>
-            <a:off x="7799832" y="1828800"/>
-            <a:ext cx="3145536" cy="685800"/>
-          </a:xfrm>
-          <a:prstGeom prst="rect">
-            <a:avLst/>
-          </a:prstGeom>
-          <a:noFill/>
-          <a:ln/>
-        </p:spPr>
-        <p:txBody>
-          <a:bodyPr wrap="square" lIns="0" tIns="0" rIns="0" bIns="0" rtlCol="0" anchor="t">
+            <a:off x="7799832" y="1801368"/>
+            <a:ext cx="3145536" cy="758952"/>
+          </a:xfrm>
+          <a:prstGeom prst="rect">
+            <a:avLst/>
+          </a:prstGeom>
+          <a:noFill/>
+          <a:ln/>
+        </p:spPr>
+        <p:txBody>
+          <a:bodyPr wrap="square" lIns="254" tIns="254" rIns="254" bIns="254" rtlCol="0" anchor="t">
             <a:normAutofit/>
           </a:bodyPr>
           <a:lstStyle/>
@@ -9643,7 +9799,7 @@
               <a:buNone/>
             </a:pPr>
             <a:r>
-              <a:rPr lang="en-US" sz="1550" dirty="0">
+              <a:rPr lang="en-US" sz="1320" dirty="0">
                 <a:solidFill>
                   <a:srgbClr val="17364A"/>
                 </a:solidFill>
@@ -9653,7 +9809,7 @@
               </a:rPr>
               <a:t>Subgroup monitoring plan</a:t>
             </a:r>
-            <a:endParaRPr lang="en-US" sz="1550" dirty="0"/>
+            <a:endParaRPr lang="en-US" sz="1320" dirty="0"/>
           </a:p>
         </p:txBody>
       </p:sp>
@@ -9741,13 +9897,16 @@
           <a:ln/>
         </p:spPr>
         <p:txBody>
-          <a:bodyPr wrap="square" lIns="254" tIns="254" rIns="254" bIns="254" rtlCol="0" anchor="t">
+          <a:bodyPr wrap="square" lIns="508" tIns="508" rIns="508" bIns="508" rtlCol="0" anchor="t">
             <a:normAutofit/>
           </a:bodyPr>
           <a:lstStyle/>
           <a:p>
-            <a:r>
-              <a:rPr lang="en-US" sz="1380" dirty="0">
+            <a:pPr indent="0" marL="0">
+              <a:buNone/>
+            </a:pPr>
+            <a:r>
+              <a:rPr lang="en-US" sz="1220" dirty="0">
                 <a:solidFill>
                   <a:srgbClr val="17364A"/>
                 </a:solidFill>
@@ -9757,7 +9916,7 @@
               </a:rPr>
               <a:t>Subgroup monitoring plan</a:t>
             </a:r>
-            <a:endParaRPr lang="en-US" sz="1380" dirty="0"/>
+            <a:endParaRPr lang="en-US" sz="1220" dirty="0"/>
           </a:p>
         </p:txBody>
       </p:sp>
@@ -9835,17 +9994,17 @@
         </p:nvSpPr>
         <p:spPr>
           <a:xfrm>
-            <a:off x="7799832" y="5001768"/>
-            <a:ext cx="3145536" cy="502920"/>
-          </a:xfrm>
-          <a:prstGeom prst="rect">
-            <a:avLst/>
-          </a:prstGeom>
-          <a:noFill/>
-          <a:ln/>
-        </p:spPr>
-        <p:txBody>
-          <a:bodyPr wrap="square" lIns="0" tIns="0" rIns="0" bIns="0" rtlCol="0" anchor="t">
+            <a:off x="7799832" y="4974336"/>
+            <a:ext cx="3145536" cy="576072"/>
+          </a:xfrm>
+          <a:prstGeom prst="rect">
+            <a:avLst/>
+          </a:prstGeom>
+          <a:noFill/>
+          <a:ln/>
+        </p:spPr>
+        <p:txBody>
+          <a:bodyPr wrap="square" lIns="254" tIns="254" rIns="254" bIns="254" rtlCol="0" anchor="t">
             <a:normAutofit/>
           </a:bodyPr>
           <a:lstStyle/>
@@ -9854,7 +10013,7 @@
               <a:buNone/>
             </a:pPr>
             <a:r>
-              <a:rPr lang="en-US" sz="1550" dirty="0">
+              <a:rPr lang="en-US" sz="1320" dirty="0">
                 <a:solidFill>
                   <a:srgbClr val="17364A"/>
                 </a:solidFill>
@@ -9862,9 +10021,9 @@
                 <a:ea typeface="Aptos" pitchFamily="34" charset="-122"/>
                 <a:cs typeface="Aptos" pitchFamily="34" charset="-120"/>
               </a:rPr>
-              <a:t>Identify what could go wrong, who could be affected, what safeguards are needed, and what evidence should be reviewed before use expands.</a:t>
-            </a:r>
-            <a:endParaRPr lang="en-US" sz="1550" dirty="0"/>
+              <a:t>Identify what could go wrong, who could be affected, what safeguards are needed, and what evidence should be reviewed.</a:t>
+            </a:r>
+            <a:endParaRPr lang="en-US" sz="1320" dirty="0"/>
           </a:p>
         </p:txBody>
       </p:sp>
@@ -10165,49 +10324,58 @@
           <a:ln/>
         </p:spPr>
         <p:txBody>
-          <a:bodyPr wrap="square" lIns="635" tIns="635" rIns="635" bIns="635" rtlCol="0" anchor="t">
+          <a:bodyPr wrap="square" lIns="1016" tIns="1016" rIns="1016" bIns="1016" rtlCol="0" anchor="t">
             <a:normAutofit/>
           </a:bodyPr>
           <a:lstStyle/>
           <a:p>
+            <a:pPr indent="0" marL="0">
+              <a:buNone/>
+            </a:pPr>
             <a:r>
               <a:rPr lang="en-US" sz="2100" dirty="0">
                 <a:solidFill>
-                  <a:srgbClr val="17364A"/>
-                </a:solidFill>
-                <a:latin typeface="Aptos" pitchFamily="34" charset="0"/>
-                <a:ea typeface="Aptos" pitchFamily="34" charset="-122"/>
-                <a:cs typeface="Aptos" pitchFamily="34" charset="-120"/>
-              </a:rPr>
-              <a:t>Predictive analytics uses data to estimate the likelihood of future events or outcomes.</a:t>
+                  <a:srgbClr val="003A63"/>
+                </a:solidFill>
+                <a:latin typeface="Aptos" pitchFamily="34" charset="0"/>
+                <a:ea typeface="Aptos" pitchFamily="34" charset="-122"/>
+                <a:cs typeface="Aptos" pitchFamily="34" charset="-120"/>
+              </a:rPr>
+              <a:t>• Predictive analytics uses data to estimate the likelihood of future events or outcomes.</a:t>
             </a:r>
             <a:endParaRPr lang="en-US" sz="2100" dirty="0"/>
           </a:p>
           <a:p>
+            <a:pPr indent="0" marL="0">
+              <a:buNone/>
+            </a:pPr>
             <a:r>
               <a:rPr lang="en-US" sz="2100" dirty="0">
                 <a:solidFill>
-                  <a:srgbClr val="17364A"/>
-                </a:solidFill>
-                <a:latin typeface="Aptos" pitchFamily="34" charset="0"/>
-                <a:ea typeface="Aptos" pitchFamily="34" charset="-122"/>
-                <a:cs typeface="Aptos" pitchFamily="34" charset="-120"/>
-              </a:rPr>
-              <a:t>In public health, predictive models may be used to anticipate disease burden, identify populations at higher.</a:t>
+                  <a:srgbClr val="003A63"/>
+                </a:solidFill>
+                <a:latin typeface="Aptos" pitchFamily="34" charset="0"/>
+                <a:ea typeface="Aptos" pitchFamily="34" charset="-122"/>
+                <a:cs typeface="Aptos" pitchFamily="34" charset="-120"/>
+              </a:rPr>
+              <a:t>• In public health, predictive models may be used to anticipate disease burden, identify.</a:t>
             </a:r>
             <a:endParaRPr lang="en-US" sz="2100" dirty="0"/>
           </a:p>
           <a:p>
+            <a:pPr indent="0" marL="0">
+              <a:buNone/>
+            </a:pPr>
             <a:r>
               <a:rPr lang="en-US" sz="2100" dirty="0">
                 <a:solidFill>
-                  <a:srgbClr val="17364A"/>
-                </a:solidFill>
-                <a:latin typeface="Aptos" pitchFamily="34" charset="0"/>
-                <a:ea typeface="Aptos" pitchFamily="34" charset="-122"/>
-                <a:cs typeface="Aptos" pitchFamily="34" charset="-120"/>
-              </a:rPr>
-              <a:t>Risk stratification is the practice of grouping individuals, facilities, areas, events, or populations into.</a:t>
+                  <a:srgbClr val="003A63"/>
+                </a:solidFill>
+                <a:latin typeface="Aptos" pitchFamily="34" charset="0"/>
+                <a:ea typeface="Aptos" pitchFamily="34" charset="-122"/>
+                <a:cs typeface="Aptos" pitchFamily="34" charset="-120"/>
+              </a:rPr>
+              <a:t>• Risk stratification is the practice of grouping individuals, facilities, areas, events, or.</a:t>
             </a:r>
             <a:endParaRPr lang="en-US" sz="2100" dirty="0"/>
           </a:p>
@@ -10287,17 +10455,17 @@
         </p:nvSpPr>
         <p:spPr>
           <a:xfrm>
-            <a:off x="8074152" y="1920240"/>
-            <a:ext cx="2825496" cy="1280160"/>
-          </a:xfrm>
-          <a:prstGeom prst="rect">
-            <a:avLst/>
-          </a:prstGeom>
-          <a:noFill/>
-          <a:ln/>
-        </p:spPr>
-        <p:txBody>
-          <a:bodyPr wrap="square" lIns="0" tIns="0" rIns="0" bIns="0" rtlCol="0" anchor="t">
+            <a:off x="8074152" y="1892808"/>
+            <a:ext cx="2825496" cy="1353312"/>
+          </a:xfrm>
+          <a:prstGeom prst="rect">
+            <a:avLst/>
+          </a:prstGeom>
+          <a:noFill/>
+          <a:ln/>
+        </p:spPr>
+        <p:txBody>
+          <a:bodyPr wrap="square" lIns="254" tIns="254" rIns="254" bIns="254" rtlCol="0" anchor="t">
             <a:normAutofit/>
           </a:bodyPr>
           <a:lstStyle/>
@@ -10306,7 +10474,7 @@
               <a:buNone/>
             </a:pPr>
             <a:r>
-              <a:rPr lang="en-US" sz="1550" dirty="0">
+              <a:rPr lang="en-US" sz="1320" dirty="0">
                 <a:solidFill>
                   <a:srgbClr val="17364A"/>
                 </a:solidFill>
@@ -10314,43 +10482,9 @@
                 <a:ea typeface="Aptos" pitchFamily="34" charset="-122"/>
                 <a:cs typeface="Aptos" pitchFamily="34" charset="-120"/>
               </a:rPr>
-              <a:t>Level: applied/foundational</a:t>
-            </a:r>
-            <a:endParaRPr lang="en-US" sz="1550" dirty="0"/>
-          </a:p>
-          <a:p>
-            <a:pPr indent="0" marL="0">
-              <a:buNone/>
-            </a:pPr>
-            <a:r>
-              <a:rPr lang="en-US" sz="1550" dirty="0">
-                <a:solidFill>
-                  <a:srgbClr val="17364A"/>
-                </a:solidFill>
-                <a:latin typeface="Aptos" pitchFamily="34" charset="0"/>
-                <a:ea typeface="Aptos" pitchFamily="34" charset="-122"/>
-                <a:cs typeface="Aptos" pitchFamily="34" charset="-120"/>
-              </a:rPr>
-              <a:t>Primary track: Analytics and Modeling Track</a:t>
-            </a:r>
-            <a:endParaRPr lang="en-US" sz="1550" dirty="0"/>
-          </a:p>
-          <a:p>
-            <a:pPr indent="0" marL="0">
-              <a:buNone/>
-            </a:pPr>
-            <a:r>
-              <a:rPr lang="en-US" sz="1550" dirty="0">
-                <a:solidFill>
-                  <a:srgbClr val="17364A"/>
-                </a:solidFill>
-                <a:latin typeface="Aptos" pitchFamily="34" charset="0"/>
-                <a:ea typeface="Aptos" pitchFamily="34" charset="-122"/>
-                <a:cs typeface="Aptos" pitchFamily="34" charset="-120"/>
-              </a:rPr>
-              <a:t>Appears in tracks: analytics-modeling</a:t>
-            </a:r>
-            <a:endParaRPr lang="en-US" sz="1550" dirty="0"/>
+              <a:t>Level: applied/foundational Primary track: Analytics and Modeling Track Appears in tracks: analytics-modeling</a:t>
+            </a:r>
+            <a:endParaRPr lang="en-US" sz="1320" dirty="0"/>
           </a:p>
         </p:txBody>
       </p:sp>
@@ -10438,13 +10572,16 @@
           <a:ln/>
         </p:spPr>
         <p:txBody>
-          <a:bodyPr wrap="square" lIns="254" tIns="254" rIns="254" bIns="254" rtlCol="0" anchor="t">
+          <a:bodyPr wrap="square" lIns="508" tIns="508" rIns="508" bIns="508" rtlCol="0" anchor="t">
             <a:normAutofit/>
           </a:bodyPr>
           <a:lstStyle/>
           <a:p>
-            <a:r>
-              <a:rPr lang="en-US" sz="1380" dirty="0">
+            <a:pPr indent="0" marL="0">
+              <a:buNone/>
+            </a:pPr>
+            <a:r>
+              <a:rPr lang="en-US" sz="1220" dirty="0">
                 <a:solidFill>
                   <a:srgbClr val="17364A"/>
                 </a:solidFill>
@@ -10454,11 +10591,14 @@
               </a:rPr>
               <a:t>Read the module for shared vocabulary and context.</a:t>
             </a:r>
-            <a:endParaRPr lang="en-US" sz="1380" dirty="0"/>
-          </a:p>
-          <a:p>
-            <a:r>
-              <a:rPr lang="en-US" sz="1380" dirty="0">
+            <a:endParaRPr lang="en-US" sz="1220" dirty="0"/>
+          </a:p>
+          <a:p>
+            <a:pPr indent="0" marL="0">
+              <a:buNone/>
+            </a:pPr>
+            <a:r>
+              <a:rPr lang="en-US" sz="1220" dirty="0">
                 <a:solidFill>
                   <a:srgbClr val="17364A"/>
                 </a:solidFill>
@@ -10468,11 +10608,14 @@
               </a:rPr>
               <a:t>Complete the practical exercise to apply the concept.</a:t>
             </a:r>
-            <a:endParaRPr lang="en-US" sz="1380" dirty="0"/>
-          </a:p>
-          <a:p>
-            <a:r>
-              <a:rPr lang="en-US" sz="1380" dirty="0">
+            <a:endParaRPr lang="en-US" sz="1220" dirty="0"/>
+          </a:p>
+          <a:p>
+            <a:pPr indent="0" marL="0">
+              <a:buNone/>
+            </a:pPr>
+            <a:r>
+              <a:rPr lang="en-US" sz="1220" dirty="0">
                 <a:solidFill>
                   <a:srgbClr val="17364A"/>
                 </a:solidFill>
@@ -10482,7 +10625,7 @@
               </a:rPr>
               <a:t>Use the notes and references for deeper review.</a:t>
             </a:r>
-            <a:endParaRPr lang="en-US" sz="1380" dirty="0"/>
+            <a:endParaRPr lang="en-US" sz="1220" dirty="0"/>
           </a:p>
         </p:txBody>
       </p:sp>
@@ -10783,49 +10926,58 @@
           <a:ln/>
         </p:spPr>
         <p:txBody>
-          <a:bodyPr wrap="square" lIns="635" tIns="635" rIns="635" bIns="635" rtlCol="0" anchor="t">
+          <a:bodyPr wrap="square" lIns="1016" tIns="1016" rIns="1016" bIns="1016" rtlCol="0" anchor="t">
             <a:normAutofit/>
           </a:bodyPr>
           <a:lstStyle/>
           <a:p>
+            <a:pPr indent="0" marL="0">
+              <a:buNone/>
+            </a:pPr>
             <a:r>
               <a:rPr lang="en-US" sz="2100" dirty="0">
                 <a:solidFill>
-                  <a:srgbClr val="17364A"/>
-                </a:solidFill>
-                <a:latin typeface="Aptos" pitchFamily="34" charset="0"/>
-                <a:ea typeface="Aptos" pitchFamily="34" charset="-122"/>
-                <a:cs typeface="Aptos" pitchFamily="34" charset="-120"/>
-              </a:rPr>
-              <a:t>Predictive model review plan</a:t>
+                  <a:srgbClr val="003A63"/>
+                </a:solidFill>
+                <a:latin typeface="Aptos" pitchFamily="34" charset="0"/>
+                <a:ea typeface="Aptos" pitchFamily="34" charset="-122"/>
+                <a:cs typeface="Aptos" pitchFamily="34" charset="-120"/>
+              </a:rPr>
+              <a:t>• Predictive model review plan</a:t>
             </a:r>
             <a:endParaRPr lang="en-US" sz="2100" dirty="0"/>
           </a:p>
           <a:p>
+            <a:pPr indent="0" marL="0">
+              <a:buNone/>
+            </a:pPr>
             <a:r>
               <a:rPr lang="en-US" sz="2100" dirty="0">
                 <a:solidFill>
-                  <a:srgbClr val="17364A"/>
-                </a:solidFill>
-                <a:latin typeface="Aptos" pitchFamily="34" charset="0"/>
-                <a:ea typeface="Aptos" pitchFamily="34" charset="-122"/>
-                <a:cs typeface="Aptos" pitchFamily="34" charset="-120"/>
-              </a:rPr>
-              <a:t>Risk score interpretation guide</a:t>
+                  <a:srgbClr val="003A63"/>
+                </a:solidFill>
+                <a:latin typeface="Aptos" pitchFamily="34" charset="0"/>
+                <a:ea typeface="Aptos" pitchFamily="34" charset="-122"/>
+                <a:cs typeface="Aptos" pitchFamily="34" charset="-120"/>
+              </a:rPr>
+              <a:t>• Risk score interpretation guide</a:t>
             </a:r>
             <a:endParaRPr lang="en-US" sz="2100" dirty="0"/>
           </a:p>
           <a:p>
+            <a:pPr indent="0" marL="0">
+              <a:buNone/>
+            </a:pPr>
             <a:r>
               <a:rPr lang="en-US" sz="2100" dirty="0">
                 <a:solidFill>
-                  <a:srgbClr val="17364A"/>
-                </a:solidFill>
-                <a:latin typeface="Aptos" pitchFamily="34" charset="0"/>
-                <a:ea typeface="Aptos" pitchFamily="34" charset="-122"/>
-                <a:cs typeface="Aptos" pitchFamily="34" charset="-120"/>
-              </a:rPr>
-              <a:t>Threshold and error tradeoff memo</a:t>
+                  <a:srgbClr val="003A63"/>
+                </a:solidFill>
+                <a:latin typeface="Aptos" pitchFamily="34" charset="0"/>
+                <a:ea typeface="Aptos" pitchFamily="34" charset="-122"/>
+                <a:cs typeface="Aptos" pitchFamily="34" charset="-120"/>
+              </a:rPr>
+              <a:t>• Threshold and error tradeoff memo</a:t>
             </a:r>
             <a:endParaRPr lang="en-US" sz="2100" dirty="0"/>
           </a:p>
@@ -10905,17 +11057,17 @@
         </p:nvSpPr>
         <p:spPr>
           <a:xfrm>
-            <a:off x="7799832" y="1828800"/>
-            <a:ext cx="3145536" cy="685800"/>
-          </a:xfrm>
-          <a:prstGeom prst="rect">
-            <a:avLst/>
-          </a:prstGeom>
-          <a:noFill/>
-          <a:ln/>
-        </p:spPr>
-        <p:txBody>
-          <a:bodyPr wrap="square" lIns="0" tIns="0" rIns="0" bIns="0" rtlCol="0" anchor="t">
+            <a:off x="7799832" y="1801368"/>
+            <a:ext cx="3145536" cy="758952"/>
+          </a:xfrm>
+          <a:prstGeom prst="rect">
+            <a:avLst/>
+          </a:prstGeom>
+          <a:noFill/>
+          <a:ln/>
+        </p:spPr>
+        <p:txBody>
+          <a:bodyPr wrap="square" lIns="254" tIns="254" rIns="254" bIns="254" rtlCol="0" anchor="t">
             <a:normAutofit/>
           </a:bodyPr>
           <a:lstStyle/>
@@ -10924,7 +11076,7 @@
               <a:buNone/>
             </a:pPr>
             <a:r>
-              <a:rPr lang="en-US" sz="1550" dirty="0">
+              <a:rPr lang="en-US" sz="1320" dirty="0">
                 <a:solidFill>
                   <a:srgbClr val="17364A"/>
                 </a:solidFill>
@@ -10934,7 +11086,7 @@
               </a:rPr>
               <a:t>Predictive model review plan</a:t>
             </a:r>
-            <a:endParaRPr lang="en-US" sz="1550" dirty="0"/>
+            <a:endParaRPr lang="en-US" sz="1320" dirty="0"/>
           </a:p>
         </p:txBody>
       </p:sp>
@@ -11022,13 +11174,16 @@
           <a:ln/>
         </p:spPr>
         <p:txBody>
-          <a:bodyPr wrap="square" lIns="254" tIns="254" rIns="254" bIns="254" rtlCol="0" anchor="t">
+          <a:bodyPr wrap="square" lIns="508" tIns="508" rIns="508" bIns="508" rtlCol="0" anchor="t">
             <a:normAutofit/>
           </a:bodyPr>
           <a:lstStyle/>
           <a:p>
-            <a:r>
-              <a:rPr lang="en-US" sz="1380" dirty="0">
+            <a:pPr indent="0" marL="0">
+              <a:buNone/>
+            </a:pPr>
+            <a:r>
+              <a:rPr lang="en-US" sz="1220" dirty="0">
                 <a:solidFill>
                   <a:srgbClr val="17364A"/>
                 </a:solidFill>
@@ -11038,11 +11193,14 @@
               </a:rPr>
               <a:t>Predictive model review plan</a:t>
             </a:r>
-            <a:endParaRPr lang="en-US" sz="1380" dirty="0"/>
-          </a:p>
-          <a:p>
-            <a:r>
-              <a:rPr lang="en-US" sz="1380" dirty="0">
+            <a:endParaRPr lang="en-US" sz="1220" dirty="0"/>
+          </a:p>
+          <a:p>
+            <a:pPr indent="0" marL="0">
+              <a:buNone/>
+            </a:pPr>
+            <a:r>
+              <a:rPr lang="en-US" sz="1220" dirty="0">
                 <a:solidFill>
                   <a:srgbClr val="17364A"/>
                 </a:solidFill>
@@ -11052,11 +11210,14 @@
               </a:rPr>
               <a:t>Risk score interpretation guide</a:t>
             </a:r>
-            <a:endParaRPr lang="en-US" sz="1380" dirty="0"/>
-          </a:p>
-          <a:p>
-            <a:r>
-              <a:rPr lang="en-US" sz="1380" dirty="0">
+            <a:endParaRPr lang="en-US" sz="1220" dirty="0"/>
+          </a:p>
+          <a:p>
+            <a:pPr indent="0" marL="0">
+              <a:buNone/>
+            </a:pPr>
+            <a:r>
+              <a:rPr lang="en-US" sz="1220" dirty="0">
                 <a:solidFill>
                   <a:srgbClr val="17364A"/>
                 </a:solidFill>
@@ -11066,7 +11227,7 @@
               </a:rPr>
               <a:t>Threshold and error tradeoff memo</a:t>
             </a:r>
-            <a:endParaRPr lang="en-US" sz="1380" dirty="0"/>
+            <a:endParaRPr lang="en-US" sz="1220" dirty="0"/>
           </a:p>
         </p:txBody>
       </p:sp>
@@ -11144,17 +11305,17 @@
         </p:nvSpPr>
         <p:spPr>
           <a:xfrm>
-            <a:off x="7799832" y="5001768"/>
-            <a:ext cx="3145536" cy="502920"/>
-          </a:xfrm>
-          <a:prstGeom prst="rect">
-            <a:avLst/>
-          </a:prstGeom>
-          <a:noFill/>
-          <a:ln/>
-        </p:spPr>
-        <p:txBody>
-          <a:bodyPr wrap="square" lIns="0" tIns="0" rIns="0" bIns="0" rtlCol="0" anchor="t">
+            <a:off x="7799832" y="4974336"/>
+            <a:ext cx="3145536" cy="576072"/>
+          </a:xfrm>
+          <a:prstGeom prst="rect">
+            <a:avLst/>
+          </a:prstGeom>
+          <a:noFill/>
+          <a:ln/>
+        </p:spPr>
+        <p:txBody>
+          <a:bodyPr wrap="square" lIns="254" tIns="254" rIns="254" bIns="254" rtlCol="0" anchor="t">
             <a:normAutofit/>
           </a:bodyPr>
           <a:lstStyle/>
@@ -11163,7 +11324,7 @@
               <a:buNone/>
             </a:pPr>
             <a:r>
-              <a:rPr lang="en-US" sz="1550" dirty="0">
+              <a:rPr lang="en-US" sz="1320" dirty="0">
                 <a:solidFill>
                   <a:srgbClr val="17364A"/>
                 </a:solidFill>
@@ -11171,9 +11332,9 @@
                 <a:ea typeface="Aptos" pitchFamily="34" charset="-122"/>
                 <a:cs typeface="Aptos" pitchFamily="34" charset="-120"/>
               </a:rPr>
-              <a:t>Use the assignment to test whether you can explain the concept, apply it to a realistic public health situation, and identify what would need review before the work moves forward.</a:t>
-            </a:r>
-            <a:endParaRPr lang="en-US" sz="1550" dirty="0"/>
+              <a:t>Use the assignment to test whether you can explain the concept, apply it to a realistic public health situation, and.</a:t>
+            </a:r>
+            <a:endParaRPr lang="en-US" sz="1320" dirty="0"/>
           </a:p>
         </p:txBody>
       </p:sp>
@@ -11474,49 +11635,58 @@
           <a:ln/>
         </p:spPr>
         <p:txBody>
-          <a:bodyPr wrap="square" lIns="635" tIns="635" rIns="635" bIns="635" rtlCol="0" anchor="t">
+          <a:bodyPr wrap="square" lIns="1016" tIns="1016" rIns="1016" bIns="1016" rtlCol="0" anchor="t">
             <a:normAutofit/>
           </a:bodyPr>
           <a:lstStyle/>
           <a:p>
+            <a:pPr indent="0" marL="0">
+              <a:buNone/>
+            </a:pPr>
             <a:r>
               <a:rPr lang="en-US" sz="2100" dirty="0">
                 <a:solidFill>
-                  <a:srgbClr val="17364A"/>
-                </a:solidFill>
-                <a:latin typeface="Aptos" pitchFamily="34" charset="0"/>
-                <a:ea typeface="Aptos" pitchFamily="34" charset="-122"/>
-                <a:cs typeface="Aptos" pitchFamily="34" charset="-120"/>
-              </a:rPr>
-              <a:t>1. What is calibration?</a:t>
+                  <a:srgbClr val="003A63"/>
+                </a:solidFill>
+                <a:latin typeface="Aptos" pitchFamily="34" charset="0"/>
+                <a:ea typeface="Aptos" pitchFamily="34" charset="-122"/>
+                <a:cs typeface="Aptos" pitchFamily="34" charset="-120"/>
+              </a:rPr>
+              <a:t>• 1. What is calibration?</a:t>
             </a:r>
             <a:endParaRPr lang="en-US" sz="2100" dirty="0"/>
           </a:p>
           <a:p>
+            <a:pPr indent="0" marL="0">
+              <a:buNone/>
+            </a:pPr>
             <a:r>
               <a:rPr lang="en-US" sz="2100" dirty="0">
                 <a:solidFill>
-                  <a:srgbClr val="17364A"/>
-                </a:solidFill>
-                <a:latin typeface="Aptos" pitchFamily="34" charset="0"/>
-                <a:ea typeface="Aptos" pitchFamily="34" charset="-122"/>
-                <a:cs typeface="Aptos" pitchFamily="34" charset="-120"/>
-              </a:rPr>
-              <a:t>2. Why should thresholds be reviewed by public health staff?</a:t>
+                  <a:srgbClr val="003A63"/>
+                </a:solidFill>
+                <a:latin typeface="Aptos" pitchFamily="34" charset="0"/>
+                <a:ea typeface="Aptos" pitchFamily="34" charset="-122"/>
+                <a:cs typeface="Aptos" pitchFamily="34" charset="-120"/>
+              </a:rPr>
+              <a:t>• 2. Why should thresholds be reviewed by public health staff?</a:t>
             </a:r>
             <a:endParaRPr lang="en-US" sz="2100" dirty="0"/>
           </a:p>
           <a:p>
+            <a:pPr indent="0" marL="0">
+              <a:buNone/>
+            </a:pPr>
             <a:r>
               <a:rPr lang="en-US" sz="2100" dirty="0">
                 <a:solidFill>
-                  <a:srgbClr val="17364A"/>
-                </a:solidFill>
-                <a:latin typeface="Aptos" pitchFamily="34" charset="0"/>
-                <a:ea typeface="Aptos" pitchFamily="34" charset="-122"/>
-                <a:cs typeface="Aptos" pitchFamily="34" charset="-120"/>
-              </a:rPr>
-              <a:t>3. Which use of a risk score is most concerning without additional safeguards?</a:t>
+                  <a:srgbClr val="003A63"/>
+                </a:solidFill>
+                <a:latin typeface="Aptos" pitchFamily="34" charset="0"/>
+                <a:ea typeface="Aptos" pitchFamily="34" charset="-122"/>
+                <a:cs typeface="Aptos" pitchFamily="34" charset="-120"/>
+              </a:rPr>
+              <a:t>• 3. Which use of a risk score is most concerning without additional safeguards?</a:t>
             </a:r>
             <a:endParaRPr lang="en-US" sz="2100" dirty="0"/>
           </a:p>
@@ -11596,17 +11766,17 @@
         </p:nvSpPr>
         <p:spPr>
           <a:xfrm>
-            <a:off x="7799832" y="1828800"/>
-            <a:ext cx="3145536" cy="685800"/>
-          </a:xfrm>
-          <a:prstGeom prst="rect">
-            <a:avLst/>
-          </a:prstGeom>
-          <a:noFill/>
-          <a:ln/>
-        </p:spPr>
-        <p:txBody>
-          <a:bodyPr wrap="square" lIns="0" tIns="0" rIns="0" bIns="0" rtlCol="0" anchor="t">
+            <a:off x="7799832" y="1801368"/>
+            <a:ext cx="3145536" cy="758952"/>
+          </a:xfrm>
+          <a:prstGeom prst="rect">
+            <a:avLst/>
+          </a:prstGeom>
+          <a:noFill/>
+          <a:ln/>
+        </p:spPr>
+        <p:txBody>
+          <a:bodyPr wrap="square" lIns="254" tIns="254" rIns="254" bIns="254" rtlCol="0" anchor="t">
             <a:normAutofit/>
           </a:bodyPr>
           <a:lstStyle/>
@@ -11615,7 +11785,7 @@
               <a:buNone/>
             </a:pPr>
             <a:r>
-              <a:rPr lang="en-US" sz="1550" dirty="0">
+              <a:rPr lang="en-US" sz="1320" dirty="0">
                 <a:solidFill>
                   <a:srgbClr val="17364A"/>
                 </a:solidFill>
@@ -11625,7 +11795,7 @@
               </a:rPr>
               <a:t>1. What is calibration?</a:t>
             </a:r>
-            <a:endParaRPr lang="en-US" sz="1550" dirty="0"/>
+            <a:endParaRPr lang="en-US" sz="1320" dirty="0"/>
           </a:p>
         </p:txBody>
       </p:sp>
@@ -11713,13 +11883,16 @@
           <a:ln/>
         </p:spPr>
         <p:txBody>
-          <a:bodyPr wrap="square" lIns="254" tIns="254" rIns="254" bIns="254" rtlCol="0" anchor="t">
+          <a:bodyPr wrap="square" lIns="508" tIns="508" rIns="508" bIns="508" rtlCol="0" anchor="t">
             <a:normAutofit/>
           </a:bodyPr>
           <a:lstStyle/>
           <a:p>
-            <a:r>
-              <a:rPr lang="en-US" sz="1380" dirty="0">
+            <a:pPr indent="0" marL="0">
+              <a:buNone/>
+            </a:pPr>
+            <a:r>
+              <a:rPr lang="en-US" sz="1220" dirty="0">
                 <a:solidFill>
                   <a:srgbClr val="17364A"/>
                 </a:solidFill>
@@ -11729,11 +11902,14 @@
               </a:rPr>
               <a:t>1.</a:t>
             </a:r>
-            <a:endParaRPr lang="en-US" sz="1380" dirty="0"/>
-          </a:p>
-          <a:p>
-            <a:r>
-              <a:rPr lang="en-US" sz="1380" dirty="0">
+            <a:endParaRPr lang="en-US" sz="1220" dirty="0"/>
+          </a:p>
+          <a:p>
+            <a:pPr indent="0" marL="0">
+              <a:buNone/>
+            </a:pPr>
+            <a:r>
+              <a:rPr lang="en-US" sz="1220" dirty="0">
                 <a:solidFill>
                   <a:srgbClr val="17364A"/>
                 </a:solidFill>
@@ -11743,11 +11919,14 @@
               </a:rPr>
               <a:t>What is calibration?</a:t>
             </a:r>
-            <a:endParaRPr lang="en-US" sz="1380" dirty="0"/>
-          </a:p>
-          <a:p>
-            <a:r>
-              <a:rPr lang="en-US" sz="1380" dirty="0">
+            <a:endParaRPr lang="en-US" sz="1220" dirty="0"/>
+          </a:p>
+          <a:p>
+            <a:pPr indent="0" marL="0">
+              <a:buNone/>
+            </a:pPr>
+            <a:r>
+              <a:rPr lang="en-US" sz="1220" dirty="0">
                 <a:solidFill>
                   <a:srgbClr val="17364A"/>
                 </a:solidFill>
@@ -11757,7 +11936,7 @@
               </a:rPr>
               <a:t>2.</a:t>
             </a:r>
-            <a:endParaRPr lang="en-US" sz="1380" dirty="0"/>
+            <a:endParaRPr lang="en-US" sz="1220" dirty="0"/>
           </a:p>
         </p:txBody>
       </p:sp>
@@ -11835,17 +12014,17 @@
         </p:nvSpPr>
         <p:spPr>
           <a:xfrm>
-            <a:off x="7799832" y="5001768"/>
-            <a:ext cx="3145536" cy="502920"/>
-          </a:xfrm>
-          <a:prstGeom prst="rect">
-            <a:avLst/>
-          </a:prstGeom>
-          <a:noFill/>
-          <a:ln/>
-        </p:spPr>
-        <p:txBody>
-          <a:bodyPr wrap="square" lIns="0" tIns="0" rIns="0" bIns="0" rtlCol="0" anchor="t">
+            <a:off x="7799832" y="4974336"/>
+            <a:ext cx="3145536" cy="576072"/>
+          </a:xfrm>
+          <a:prstGeom prst="rect">
+            <a:avLst/>
+          </a:prstGeom>
+          <a:noFill/>
+          <a:ln/>
+        </p:spPr>
+        <p:txBody>
+          <a:bodyPr wrap="square" lIns="254" tIns="254" rIns="254" bIns="254" rtlCol="0" anchor="t">
             <a:normAutofit/>
           </a:bodyPr>
           <a:lstStyle/>
@@ -11854,7 +12033,7 @@
               <a:buNone/>
             </a:pPr>
             <a:r>
-              <a:rPr lang="en-US" sz="1550" dirty="0">
+              <a:rPr lang="en-US" sz="1320" dirty="0">
                 <a:solidFill>
                   <a:srgbClr val="17364A"/>
                 </a:solidFill>
@@ -11862,9 +12041,9 @@
                 <a:ea typeface="Aptos" pitchFamily="34" charset="-122"/>
                 <a:cs typeface="Aptos" pitchFamily="34" charset="-120"/>
               </a:rPr>
-              <a:t>Use the assignment to test whether you can explain the concept, apply it to a realistic public health situation, and identify what would need review before the work moves forward.</a:t>
-            </a:r>
-            <a:endParaRPr lang="en-US" sz="1550" dirty="0"/>
+              <a:t>Use the assignment to test whether you can explain the concept, apply it to a realistic public health situation, and.</a:t>
+            </a:r>
+            <a:endParaRPr lang="en-US" sz="1320" dirty="0"/>
           </a:p>
         </p:txBody>
       </p:sp>
@@ -12165,49 +12344,58 @@
           <a:ln/>
         </p:spPr>
         <p:txBody>
-          <a:bodyPr wrap="square" lIns="635" tIns="635" rIns="635" bIns="635" rtlCol="0" anchor="t">
+          <a:bodyPr wrap="square" lIns="1016" tIns="1016" rIns="1016" bIns="1016" rtlCol="0" anchor="t">
             <a:normAutofit/>
           </a:bodyPr>
           <a:lstStyle/>
           <a:p>
+            <a:pPr indent="0" marL="0">
+              <a:buNone/>
+            </a:pPr>
             <a:r>
               <a:rPr lang="en-US" sz="2100" dirty="0">
                 <a:solidFill>
-                  <a:srgbClr val="17364A"/>
-                </a:solidFill>
-                <a:latin typeface="Aptos" pitchFamily="34" charset="0"/>
-                <a:ea typeface="Aptos" pitchFamily="34" charset="-122"/>
-                <a:cs typeface="Aptos" pitchFamily="34" charset="-120"/>
-              </a:rPr>
-              <a:t>NIST Artificial Intelligence Risk Management Framework:.</a:t>
+                  <a:srgbClr val="003A63"/>
+                </a:solidFill>
+                <a:latin typeface="Aptos" pitchFamily="34" charset="0"/>
+                <a:ea typeface="Aptos" pitchFamily="34" charset="-122"/>
+                <a:cs typeface="Aptos" pitchFamily="34" charset="-120"/>
+              </a:rPr>
+              <a:t>• NIST Artificial Intelligence Risk Management Framework:.</a:t>
             </a:r>
             <a:endParaRPr lang="en-US" sz="2100" dirty="0"/>
           </a:p>
           <a:p>
+            <a:pPr indent="0" marL="0">
+              <a:buNone/>
+            </a:pPr>
             <a:r>
               <a:rPr lang="en-US" sz="2100" dirty="0">
                 <a:solidFill>
-                  <a:srgbClr val="17364A"/>
-                </a:solidFill>
-                <a:latin typeface="Aptos" pitchFamily="34" charset="0"/>
-                <a:ea typeface="Aptos" pitchFamily="34" charset="-122"/>
-                <a:cs typeface="Aptos" pitchFamily="34" charset="-120"/>
-              </a:rPr>
-              <a:t>NIST AI RMF Generative AI Profile:.</a:t>
+                  <a:srgbClr val="003A63"/>
+                </a:solidFill>
+                <a:latin typeface="Aptos" pitchFamily="34" charset="0"/>
+                <a:ea typeface="Aptos" pitchFamily="34" charset="-122"/>
+                <a:cs typeface="Aptos" pitchFamily="34" charset="-120"/>
+              </a:rPr>
+              <a:t>• NIST AI RMF Generative AI Profile:.</a:t>
             </a:r>
             <a:endParaRPr lang="en-US" sz="2100" dirty="0"/>
           </a:p>
           <a:p>
+            <a:pPr indent="0" marL="0">
+              <a:buNone/>
+            </a:pPr>
             <a:r>
               <a:rPr lang="en-US" sz="2100" dirty="0">
                 <a:solidFill>
-                  <a:srgbClr val="17364A"/>
-                </a:solidFill>
-                <a:latin typeface="Aptos" pitchFamily="34" charset="0"/>
-                <a:ea typeface="Aptos" pitchFamily="34" charset="-122"/>
-                <a:cs typeface="Aptos" pitchFamily="34" charset="-120"/>
-              </a:rPr>
-              <a:t>CDC Evaluation Framework: https://www.cdc.gov/evaluation/</a:t>
+                  <a:srgbClr val="003A63"/>
+                </a:solidFill>
+                <a:latin typeface="Aptos" pitchFamily="34" charset="0"/>
+                <a:ea typeface="Aptos" pitchFamily="34" charset="-122"/>
+                <a:cs typeface="Aptos" pitchFamily="34" charset="-120"/>
+              </a:rPr>
+              <a:t>• CDC Evaluation Framework: https://www.cdc.gov/evaluation/</a:t>
             </a:r>
             <a:endParaRPr lang="en-US" sz="2100" dirty="0"/>
           </a:p>
@@ -12287,17 +12475,17 @@
         </p:nvSpPr>
         <p:spPr>
           <a:xfrm>
-            <a:off x="7799832" y="1828800"/>
-            <a:ext cx="3145536" cy="685800"/>
-          </a:xfrm>
-          <a:prstGeom prst="rect">
-            <a:avLst/>
-          </a:prstGeom>
-          <a:noFill/>
-          <a:ln/>
-        </p:spPr>
-        <p:txBody>
-          <a:bodyPr wrap="square" lIns="0" tIns="0" rIns="0" bIns="0" rtlCol="0" anchor="t">
+            <a:off x="7799832" y="1801368"/>
+            <a:ext cx="3145536" cy="758952"/>
+          </a:xfrm>
+          <a:prstGeom prst="rect">
+            <a:avLst/>
+          </a:prstGeom>
+          <a:noFill/>
+          <a:ln/>
+        </p:spPr>
+        <p:txBody>
+          <a:bodyPr wrap="square" lIns="254" tIns="254" rIns="254" bIns="254" rtlCol="0" anchor="t">
             <a:normAutofit/>
           </a:bodyPr>
           <a:lstStyle/>
@@ -12306,7 +12494,7 @@
               <a:buNone/>
             </a:pPr>
             <a:r>
-              <a:rPr lang="en-US" sz="1550" dirty="0">
+              <a:rPr lang="en-US" sz="1320" dirty="0">
                 <a:solidFill>
                   <a:srgbClr val="17364A"/>
                 </a:solidFill>
@@ -12316,7 +12504,7 @@
               </a:rPr>
               <a:t>NIST Artificial Intelligence Risk Management Framework:.</a:t>
             </a:r>
-            <a:endParaRPr lang="en-US" sz="1550" dirty="0"/>
+            <a:endParaRPr lang="en-US" sz="1320" dirty="0"/>
           </a:p>
         </p:txBody>
       </p:sp>
@@ -12404,13 +12592,16 @@
           <a:ln/>
         </p:spPr>
         <p:txBody>
-          <a:bodyPr wrap="square" lIns="254" tIns="254" rIns="254" bIns="254" rtlCol="0" anchor="t">
+          <a:bodyPr wrap="square" lIns="508" tIns="508" rIns="508" bIns="508" rtlCol="0" anchor="t">
             <a:normAutofit/>
           </a:bodyPr>
           <a:lstStyle/>
           <a:p>
-            <a:r>
-              <a:rPr lang="en-US" sz="1380" dirty="0">
+            <a:pPr indent="0" marL="0">
+              <a:buNone/>
+            </a:pPr>
+            <a:r>
+              <a:rPr lang="en-US" sz="1220" dirty="0">
                 <a:solidFill>
                   <a:srgbClr val="17364A"/>
                 </a:solidFill>
@@ -12420,11 +12611,14 @@
               </a:rPr>
               <a:t>NIST Artificial Intelligence Risk Management Framework:.</a:t>
             </a:r>
-            <a:endParaRPr lang="en-US" sz="1380" dirty="0"/>
-          </a:p>
-          <a:p>
-            <a:r>
-              <a:rPr lang="en-US" sz="1380" dirty="0">
+            <a:endParaRPr lang="en-US" sz="1220" dirty="0"/>
+          </a:p>
+          <a:p>
+            <a:pPr indent="0" marL="0">
+              <a:buNone/>
+            </a:pPr>
+            <a:r>
+              <a:rPr lang="en-US" sz="1220" dirty="0">
                 <a:solidFill>
                   <a:srgbClr val="17364A"/>
                 </a:solidFill>
@@ -12434,7 +12628,7 @@
               </a:rPr>
               <a:t>CDC Public Health Data Strategy:.</a:t>
             </a:r>
-            <a:endParaRPr lang="en-US" sz="1380" dirty="0"/>
+            <a:endParaRPr lang="en-US" sz="1220" dirty="0"/>
           </a:p>
         </p:txBody>
       </p:sp>
@@ -12512,17 +12706,17 @@
         </p:nvSpPr>
         <p:spPr>
           <a:xfrm>
-            <a:off x="7799832" y="5001768"/>
-            <a:ext cx="3145536" cy="502920"/>
-          </a:xfrm>
-          <a:prstGeom prst="rect">
-            <a:avLst/>
-          </a:prstGeom>
-          <a:noFill/>
-          <a:ln/>
-        </p:spPr>
-        <p:txBody>
-          <a:bodyPr wrap="square" lIns="0" tIns="0" rIns="0" bIns="0" rtlCol="0" anchor="t">
+            <a:off x="7799832" y="4974336"/>
+            <a:ext cx="3145536" cy="576072"/>
+          </a:xfrm>
+          <a:prstGeom prst="rect">
+            <a:avLst/>
+          </a:prstGeom>
+          <a:noFill/>
+          <a:ln/>
+        </p:spPr>
+        <p:txBody>
+          <a:bodyPr wrap="square" lIns="254" tIns="254" rIns="254" bIns="254" rtlCol="0" anchor="t">
             <a:normAutofit/>
           </a:bodyPr>
           <a:lstStyle/>
@@ -12531,7 +12725,7 @@
               <a:buNone/>
             </a:pPr>
             <a:r>
-              <a:rPr lang="en-US" sz="1550" dirty="0">
+              <a:rPr lang="en-US" sz="1320" dirty="0">
                 <a:solidFill>
                   <a:srgbClr val="17364A"/>
                 </a:solidFill>
@@ -12539,9 +12733,9 @@
                 <a:ea typeface="Aptos" pitchFamily="34" charset="-122"/>
                 <a:cs typeface="Aptos" pitchFamily="34" charset="-120"/>
               </a:rPr>
-              <a:t>Identify what could go wrong, who could be affected, what safeguards are needed, and what evidence should be reviewed before use expands.</a:t>
-            </a:r>
-            <a:endParaRPr lang="en-US" sz="1550" dirty="0"/>
+              <a:t>Identify what could go wrong, who could be affected, what safeguards are needed, and what evidence should be reviewed.</a:t>
+            </a:r>
+            <a:endParaRPr lang="en-US" sz="1320" dirty="0"/>
           </a:p>
         </p:txBody>
       </p:sp>
@@ -12842,63 +13036,75 @@
           <a:ln/>
         </p:spPr>
         <p:txBody>
-          <a:bodyPr wrap="square" lIns="635" tIns="635" rIns="635" bIns="635" rtlCol="0" anchor="t">
+          <a:bodyPr wrap="square" lIns="1016" tIns="1016" rIns="1016" bIns="1016" rtlCol="0" anchor="t">
             <a:normAutofit/>
           </a:bodyPr>
           <a:lstStyle/>
           <a:p>
+            <a:pPr indent="0" marL="0">
+              <a:buNone/>
+            </a:pPr>
             <a:r>
               <a:rPr lang="en-US" sz="1900" dirty="0">
                 <a:solidFill>
-                  <a:srgbClr val="17364A"/>
-                </a:solidFill>
-                <a:latin typeface="Aptos" pitchFamily="34" charset="0"/>
-                <a:ea typeface="Aptos" pitchFamily="34" charset="-122"/>
-                <a:cs typeface="Aptos" pitchFamily="34" charset="-120"/>
-              </a:rPr>
-              <a:t>Play 13: Monitor and Evaluate AI Systems - This lesson informs Play 13 by helping learners connect the.</a:t>
+                  <a:srgbClr val="003A63"/>
+                </a:solidFill>
+                <a:latin typeface="Aptos" pitchFamily="34" charset="0"/>
+                <a:ea typeface="Aptos" pitchFamily="34" charset="-122"/>
+                <a:cs typeface="Aptos" pitchFamily="34" charset="-120"/>
+              </a:rPr>
+              <a:t>• Play 13: Monitor and Evaluate AI Systems - This lesson informs Play 13 by helping learners.</a:t>
             </a:r>
             <a:endParaRPr lang="en-US" sz="1900" dirty="0"/>
           </a:p>
           <a:p>
+            <a:pPr indent="0" marL="0">
+              <a:buNone/>
+            </a:pPr>
             <a:r>
               <a:rPr lang="en-US" sz="1900" dirty="0">
                 <a:solidFill>
-                  <a:srgbClr val="17364A"/>
-                </a:solidFill>
-                <a:latin typeface="Aptos" pitchFamily="34" charset="0"/>
-                <a:ea typeface="Aptos" pitchFamily="34" charset="-122"/>
-                <a:cs typeface="Aptos" pitchFamily="34" charset="-120"/>
-              </a:rPr>
-              <a:t>Play 1: Vision &amp; Guardrails - This lesson informs Play 1 by helping learners connect the lesson topic to.</a:t>
+                  <a:srgbClr val="003A63"/>
+                </a:solidFill>
+                <a:latin typeface="Aptos" pitchFamily="34" charset="0"/>
+                <a:ea typeface="Aptos" pitchFamily="34" charset="-122"/>
+                <a:cs typeface="Aptos" pitchFamily="34" charset="-120"/>
+              </a:rPr>
+              <a:t>• Play 1: Vision &amp; Guardrails - This lesson informs Play 1 by helping learners connect the.</a:t>
             </a:r>
             <a:endParaRPr lang="en-US" sz="1900" dirty="0"/>
           </a:p>
           <a:p>
+            <a:pPr indent="0" marL="0">
+              <a:buNone/>
+            </a:pPr>
             <a:r>
               <a:rPr lang="en-US" sz="1900" dirty="0">
                 <a:solidFill>
-                  <a:srgbClr val="17364A"/>
-                </a:solidFill>
-                <a:latin typeface="Aptos" pitchFamily="34" charset="0"/>
-                <a:ea typeface="Aptos" pitchFamily="34" charset="-122"/>
-                <a:cs typeface="Aptos" pitchFamily="34" charset="-120"/>
-              </a:rPr>
-              <a:t>Play 11: Build and Deploy AI Solutions - This lesson informs Play 11 by helping learners connect the lesson.</a:t>
+                  <a:srgbClr val="003A63"/>
+                </a:solidFill>
+                <a:latin typeface="Aptos" pitchFamily="34" charset="0"/>
+                <a:ea typeface="Aptos" pitchFamily="34" charset="-122"/>
+                <a:cs typeface="Aptos" pitchFamily="34" charset="-120"/>
+              </a:rPr>
+              <a:t>• Play 11: Build and Deploy AI Solutions - This lesson informs Play 11 by helping learners.</a:t>
             </a:r>
             <a:endParaRPr lang="en-US" sz="1900" dirty="0"/>
           </a:p>
           <a:p>
+            <a:pPr indent="0" marL="0">
+              <a:buNone/>
+            </a:pPr>
             <a:r>
               <a:rPr lang="en-US" sz="1900" dirty="0">
                 <a:solidFill>
-                  <a:srgbClr val="17364A"/>
-                </a:solidFill>
-                <a:latin typeface="Aptos" pitchFamily="34" charset="0"/>
-                <a:ea typeface="Aptos" pitchFamily="34" charset="-122"/>
-                <a:cs typeface="Aptos" pitchFamily="34" charset="-120"/>
-              </a:rPr>
-              <a:t>Play 3: Establish AI Governance - This lesson informs Play 3 by helping learners connect the lesson topic to.</a:t>
+                  <a:srgbClr val="003A63"/>
+                </a:solidFill>
+                <a:latin typeface="Aptos" pitchFamily="34" charset="0"/>
+                <a:ea typeface="Aptos" pitchFamily="34" charset="-122"/>
+                <a:cs typeface="Aptos" pitchFamily="34" charset="-120"/>
+              </a:rPr>
+              <a:t>• Play 3: Establish AI Governance - This lesson informs Play 3 by helping learners connect the.</a:t>
             </a:r>
             <a:endParaRPr lang="en-US" sz="1900" dirty="0"/>
           </a:p>
@@ -12978,17 +13184,17 @@
         </p:nvSpPr>
         <p:spPr>
           <a:xfrm>
-            <a:off x="8211312" y="1920240"/>
-            <a:ext cx="2734056" cy="1463040"/>
-          </a:xfrm>
-          <a:prstGeom prst="rect">
-            <a:avLst/>
-          </a:prstGeom>
-          <a:noFill/>
-          <a:ln/>
-        </p:spPr>
-        <p:txBody>
-          <a:bodyPr wrap="square" lIns="0" tIns="0" rIns="0" bIns="0" rtlCol="0" anchor="t">
+            <a:off x="8211312" y="1892808"/>
+            <a:ext cx="2734056" cy="1536192"/>
+          </a:xfrm>
+          <a:prstGeom prst="rect">
+            <a:avLst/>
+          </a:prstGeom>
+          <a:noFill/>
+          <a:ln/>
+        </p:spPr>
+        <p:txBody>
+          <a:bodyPr wrap="square" lIns="254" tIns="254" rIns="254" bIns="254" rtlCol="0" anchor="t">
             <a:normAutofit/>
           </a:bodyPr>
           <a:lstStyle/>
@@ -12997,7 +13203,7 @@
               <a:buNone/>
             </a:pPr>
             <a:r>
-              <a:rPr lang="en-US" sz="1550" dirty="0">
+              <a:rPr lang="en-US" sz="1320" dirty="0">
                 <a:solidFill>
                   <a:srgbClr val="17364A"/>
                 </a:solidFill>
@@ -13005,9 +13211,9 @@
                 <a:ea typeface="Aptos" pitchFamily="34" charset="-122"/>
                 <a:cs typeface="Aptos" pitchFamily="34" charset="-120"/>
               </a:rPr>
-              <a:t>Use the related plays to identify decisions, participants, timing, approvals, and documentation needed for responsible implementation.</a:t>
-            </a:r>
-            <a:endParaRPr lang="en-US" sz="1550" dirty="0"/>
+              <a:t>Use the related plays to identify decisions, participants, timing, approvals, and documentation needed for responsible.</a:t>
+            </a:r>
+            <a:endParaRPr lang="en-US" sz="1320" dirty="0"/>
           </a:p>
         </p:txBody>
       </p:sp>
@@ -13095,13 +13301,16 @@
           <a:ln/>
         </p:spPr>
         <p:txBody>
-          <a:bodyPr wrap="square" lIns="254" tIns="254" rIns="254" bIns="254" rtlCol="0" anchor="t">
+          <a:bodyPr wrap="square" lIns="508" tIns="508" rIns="508" bIns="508" rtlCol="0" anchor="t">
             <a:normAutofit/>
           </a:bodyPr>
           <a:lstStyle/>
           <a:p>
-            <a:r>
-              <a:rPr lang="en-US" sz="1380" dirty="0">
+            <a:pPr indent="0" marL="0">
+              <a:buNone/>
+            </a:pPr>
+            <a:r>
+              <a:rPr lang="en-US" sz="1220" dirty="0">
                 <a:solidFill>
                   <a:srgbClr val="17364A"/>
                 </a:solidFill>
@@ -13111,11 +13320,14 @@
               </a:rPr>
               <a:t>Locate the decision point in the playbook sequence.</a:t>
             </a:r>
-            <a:endParaRPr lang="en-US" sz="1380" dirty="0"/>
-          </a:p>
-          <a:p>
-            <a:r>
-              <a:rPr lang="en-US" sz="1380" dirty="0">
+            <a:endParaRPr lang="en-US" sz="1220" dirty="0"/>
+          </a:p>
+          <a:p>
+            <a:pPr indent="0" marL="0">
+              <a:buNone/>
+            </a:pPr>
+            <a:r>
+              <a:rPr lang="en-US" sz="1220" dirty="0">
                 <a:solidFill>
                   <a:srgbClr val="17364A"/>
                 </a:solidFill>
@@ -13125,11 +13337,14 @@
               </a:rPr>
               <a:t>Identify who should participate in the work.</a:t>
             </a:r>
-            <a:endParaRPr lang="en-US" sz="1380" dirty="0"/>
-          </a:p>
-          <a:p>
-            <a:r>
-              <a:rPr lang="en-US" sz="1380" dirty="0">
+            <a:endParaRPr lang="en-US" sz="1220" dirty="0"/>
+          </a:p>
+          <a:p>
+            <a:pPr indent="0" marL="0">
+              <a:buNone/>
+            </a:pPr>
+            <a:r>
+              <a:rPr lang="en-US" sz="1220" dirty="0">
                 <a:solidFill>
                   <a:srgbClr val="17364A"/>
                 </a:solidFill>
@@ -13139,7 +13354,7 @@
               </a:rPr>
               <a:t>Document the review, approval, or implementation step.</a:t>
             </a:r>
-            <a:endParaRPr lang="en-US" sz="1380" dirty="0"/>
+            <a:endParaRPr lang="en-US" sz="1220" dirty="0"/>
           </a:p>
         </p:txBody>
       </p:sp>
@@ -13440,63 +13655,75 @@
           <a:ln/>
         </p:spPr>
         <p:txBody>
-          <a:bodyPr wrap="square" lIns="635" tIns="635" rIns="635" bIns="635" rtlCol="0" anchor="t">
+          <a:bodyPr wrap="square" lIns="1016" tIns="1016" rIns="1016" bIns="1016" rtlCol="0" anchor="t">
             <a:normAutofit/>
           </a:bodyPr>
           <a:lstStyle/>
           <a:p>
+            <a:pPr indent="0" marL="0">
+              <a:buNone/>
+            </a:pPr>
             <a:r>
               <a:rPr lang="en-US" sz="1850" dirty="0">
                 <a:solidFill>
-                  <a:srgbClr val="17364A"/>
-                </a:solidFill>
-                <a:latin typeface="Aptos" pitchFamily="34" charset="0"/>
-                <a:ea typeface="Aptos" pitchFamily="34" charset="-122"/>
-                <a:cs typeface="Aptos" pitchFamily="34" charset="-120"/>
-              </a:rPr>
-              <a:t>Tool 44: Performance Monitoring Dashboard (Dashboard) - Use this tool to complete or strengthen the.</a:t>
+                  <a:srgbClr val="003A63"/>
+                </a:solidFill>
+                <a:latin typeface="Aptos" pitchFamily="34" charset="0"/>
+                <a:ea typeface="Aptos" pitchFamily="34" charset="-122"/>
+                <a:cs typeface="Aptos" pitchFamily="34" charset="-120"/>
+              </a:rPr>
+              <a:t>• Tool 44: Performance Monitoring Dashboard (Dashboard) - Use this tool to complete or.</a:t>
             </a:r>
             <a:endParaRPr lang="en-US" sz="1850" dirty="0"/>
           </a:p>
           <a:p>
+            <a:pPr indent="0" marL="0">
+              <a:buNone/>
+            </a:pPr>
             <a:r>
               <a:rPr lang="en-US" sz="1850" dirty="0">
                 <a:solidFill>
-                  <a:srgbClr val="17364A"/>
-                </a:solidFill>
-                <a:latin typeface="Aptos" pitchFamily="34" charset="0"/>
-                <a:ea typeface="Aptos" pitchFamily="34" charset="-122"/>
-                <a:cs typeface="Aptos" pitchFamily="34" charset="-120"/>
-              </a:rPr>
-              <a:t>Tool 45: Continuous Improvement Log (Log) - Use Continuous Improvement Log to translate this lesson into a.</a:t>
+                  <a:srgbClr val="003A63"/>
+                </a:solidFill>
+                <a:latin typeface="Aptos" pitchFamily="34" charset="0"/>
+                <a:ea typeface="Aptos" pitchFamily="34" charset="-122"/>
+                <a:cs typeface="Aptos" pitchFamily="34" charset="-120"/>
+              </a:rPr>
+              <a:t>• Tool 45: Continuous Improvement Log (Log) - Use Continuous Improvement Log to translate this.</a:t>
             </a:r>
             <a:endParaRPr lang="en-US" sz="1850" dirty="0"/>
           </a:p>
           <a:p>
+            <a:pPr indent="0" marL="0">
+              <a:buNone/>
+            </a:pPr>
             <a:r>
               <a:rPr lang="en-US" sz="1850" dirty="0">
                 <a:solidFill>
-                  <a:srgbClr val="17364A"/>
-                </a:solidFill>
-                <a:latin typeface="Aptos" pitchFamily="34" charset="0"/>
-                <a:ea typeface="Aptos" pitchFamily="34" charset="-122"/>
-                <a:cs typeface="Aptos" pitchFamily="34" charset="-120"/>
-              </a:rPr>
-              <a:t>Tool 48: AI Evaluation &amp; Outcomes Reporting (Template) - Use this tool to complete or strengthen the.</a:t>
+                  <a:srgbClr val="003A63"/>
+                </a:solidFill>
+                <a:latin typeface="Aptos" pitchFamily="34" charset="0"/>
+                <a:ea typeface="Aptos" pitchFamily="34" charset="-122"/>
+                <a:cs typeface="Aptos" pitchFamily="34" charset="-120"/>
+              </a:rPr>
+              <a:t>• Tool 48: AI Evaluation &amp; Outcomes Reporting (Template) - Use this tool to complete or.</a:t>
             </a:r>
             <a:endParaRPr lang="en-US" sz="1850" dirty="0"/>
           </a:p>
           <a:p>
+            <a:pPr indent="0" marL="0">
+              <a:buNone/>
+            </a:pPr>
             <a:r>
               <a:rPr lang="en-US" sz="1850" dirty="0">
                 <a:solidFill>
-                  <a:srgbClr val="17364A"/>
-                </a:solidFill>
-                <a:latin typeface="Aptos" pitchFamily="34" charset="0"/>
-                <a:ea typeface="Aptos" pitchFamily="34" charset="-122"/>
-                <a:cs typeface="Aptos" pitchFamily="34" charset="-120"/>
-              </a:rPr>
-              <a:t>Tool 1: AI Vision &amp; Principles Workshop (Workshop) - Use AI Vision &amp; Principles Workshop to translate this.</a:t>
+                  <a:srgbClr val="003A63"/>
+                </a:solidFill>
+                <a:latin typeface="Aptos" pitchFamily="34" charset="0"/>
+                <a:ea typeface="Aptos" pitchFamily="34" charset="-122"/>
+                <a:cs typeface="Aptos" pitchFamily="34" charset="-120"/>
+              </a:rPr>
+              <a:t>• Tool 1: AI Vision &amp; Principles Workshop (Workshop) - Use AI Vision &amp; Principles Workshop to.</a:t>
             </a:r>
             <a:endParaRPr lang="en-US" sz="1850" dirty="0"/>
           </a:p>
@@ -13576,17 +13803,17 @@
         </p:nvSpPr>
         <p:spPr>
           <a:xfrm>
-            <a:off x="8211312" y="1920240"/>
-            <a:ext cx="2734056" cy="1463040"/>
-          </a:xfrm>
-          <a:prstGeom prst="rect">
-            <a:avLst/>
-          </a:prstGeom>
-          <a:noFill/>
-          <a:ln/>
-        </p:spPr>
-        <p:txBody>
-          <a:bodyPr wrap="square" lIns="0" tIns="0" rIns="0" bIns="0" rtlCol="0" anchor="t">
+            <a:off x="8211312" y="1892808"/>
+            <a:ext cx="2734056" cy="1536192"/>
+          </a:xfrm>
+          <a:prstGeom prst="rect">
+            <a:avLst/>
+          </a:prstGeom>
+          <a:noFill/>
+          <a:ln/>
+        </p:spPr>
+        <p:txBody>
+          <a:bodyPr wrap="square" lIns="254" tIns="254" rIns="254" bIns="254" rtlCol="0" anchor="t">
             <a:normAutofit/>
           </a:bodyPr>
           <a:lstStyle/>
@@ -13595,7 +13822,7 @@
               <a:buNone/>
             </a:pPr>
             <a:r>
-              <a:rPr lang="en-US" sz="1550" dirty="0">
+              <a:rPr lang="en-US" sz="1320" dirty="0">
                 <a:solidFill>
                   <a:srgbClr val="17364A"/>
                 </a:solidFill>
@@ -13603,9 +13830,9 @@
                 <a:ea typeface="Aptos" pitchFamily="34" charset="-122"/>
                 <a:cs typeface="Aptos" pitchFamily="34" charset="-120"/>
               </a:rPr>
-              <a:t>Use linked tools when your department needs a structured worksheet, template, checklist, review process, or documentation artifact.</a:t>
-            </a:r>
-            <a:endParaRPr lang="en-US" sz="1550" dirty="0"/>
+              <a:t>Use linked tools when your department needs a structured worksheet, template, checklist, review process, or.</a:t>
+            </a:r>
+            <a:endParaRPr lang="en-US" sz="1320" dirty="0"/>
           </a:p>
         </p:txBody>
       </p:sp>
@@ -13693,13 +13920,16 @@
           <a:ln/>
         </p:spPr>
         <p:txBody>
-          <a:bodyPr wrap="square" lIns="254" tIns="254" rIns="254" bIns="254" rtlCol="0" anchor="t">
+          <a:bodyPr wrap="square" lIns="508" tIns="508" rIns="508" bIns="508" rtlCol="0" anchor="t">
             <a:normAutofit/>
           </a:bodyPr>
           <a:lstStyle/>
           <a:p>
-            <a:r>
-              <a:rPr lang="en-US" sz="1380" dirty="0">
+            <a:pPr indent="0" marL="0">
+              <a:buNone/>
+            </a:pPr>
+            <a:r>
+              <a:rPr lang="en-US" sz="1220" dirty="0">
                 <a:solidFill>
                   <a:srgbClr val="17364A"/>
                 </a:solidFill>
@@ -13709,11 +13939,14 @@
               </a:rPr>
               <a:t>Use a tool when no comparable local process exists.</a:t>
             </a:r>
-            <a:endParaRPr lang="en-US" sz="1380" dirty="0"/>
-          </a:p>
-          <a:p>
-            <a:r>
-              <a:rPr lang="en-US" sz="1380" dirty="0">
+            <a:endParaRPr lang="en-US" sz="1220" dirty="0"/>
+          </a:p>
+          <a:p>
+            <a:pPr indent="0" marL="0">
+              <a:buNone/>
+            </a:pPr>
+            <a:r>
+              <a:rPr lang="en-US" sz="1220" dirty="0">
                 <a:solidFill>
                   <a:srgbClr val="17364A"/>
                 </a:solidFill>
@@ -13721,13 +13954,16 @@
                 <a:ea typeface="Aptos" pitchFamily="34" charset="-122"/>
                 <a:cs typeface="Aptos" pitchFamily="34" charset="-120"/>
               </a:rPr>
-              <a:t>Adapt existing department templates when they already fit the purpose.</a:t>
-            </a:r>
-            <a:endParaRPr lang="en-US" sz="1380" dirty="0"/>
-          </a:p>
-          <a:p>
-            <a:r>
-              <a:rPr lang="en-US" sz="1380" dirty="0">
+              <a:t>Adapt existing department templates when they already fit the.</a:t>
+            </a:r>
+            <a:endParaRPr lang="en-US" sz="1220" dirty="0"/>
+          </a:p>
+          <a:p>
+            <a:pPr indent="0" marL="0">
+              <a:buNone/>
+            </a:pPr>
+            <a:r>
+              <a:rPr lang="en-US" sz="1220" dirty="0">
                 <a:solidFill>
                   <a:srgbClr val="17364A"/>
                 </a:solidFill>
@@ -13737,7 +13973,7 @@
               </a:rPr>
               <a:t>Save the completed artifact as evidence of the decision.</a:t>
             </a:r>
-            <a:endParaRPr lang="en-US" sz="1380" dirty="0"/>
+            <a:endParaRPr lang="en-US" sz="1220" dirty="0"/>
           </a:p>
         </p:txBody>
       </p:sp>
@@ -14038,49 +14274,58 @@
           <a:ln/>
         </p:spPr>
         <p:txBody>
-          <a:bodyPr wrap="square" lIns="635" tIns="635" rIns="635" bIns="635" rtlCol="0" anchor="t">
+          <a:bodyPr wrap="square" lIns="1016" tIns="1016" rIns="1016" bIns="1016" rtlCol="0" anchor="t">
             <a:normAutofit/>
           </a:bodyPr>
           <a:lstStyle/>
           <a:p>
+            <a:pPr indent="0" marL="0">
+              <a:buNone/>
+            </a:pPr>
             <a:r>
               <a:rPr lang="en-US" sz="2100" dirty="0">
                 <a:solidFill>
-                  <a:srgbClr val="17364A"/>
-                </a:solidFill>
-                <a:latin typeface="Aptos" pitchFamily="34" charset="0"/>
-                <a:ea typeface="Aptos" pitchFamily="34" charset="-122"/>
-                <a:cs typeface="Aptos" pitchFamily="34" charset="-120"/>
-              </a:rPr>
-              <a:t>Define predictive analytics and risk stratification in public health terms.</a:t>
+                  <a:srgbClr val="003A63"/>
+                </a:solidFill>
+                <a:latin typeface="Aptos" pitchFamily="34" charset="0"/>
+                <a:ea typeface="Aptos" pitchFamily="34" charset="-122"/>
+                <a:cs typeface="Aptos" pitchFamily="34" charset="-120"/>
+              </a:rPr>
+              <a:t>• Define predictive analytics and risk stratification in public health terms.</a:t>
             </a:r>
             <a:endParaRPr lang="en-US" sz="2100" dirty="0"/>
           </a:p>
           <a:p>
+            <a:pPr indent="0" marL="0">
+              <a:buNone/>
+            </a:pPr>
             <a:r>
               <a:rPr lang="en-US" sz="2100" dirty="0">
                 <a:solidFill>
-                  <a:srgbClr val="17364A"/>
-                </a:solidFill>
-                <a:latin typeface="Aptos" pitchFamily="34" charset="0"/>
-                <a:ea typeface="Aptos" pitchFamily="34" charset="-122"/>
-                <a:cs typeface="Aptos" pitchFamily="34" charset="-120"/>
-              </a:rPr>
-              <a:t>Distinguish prediction from causation, diagnosis, and eligibility determination.</a:t>
+                  <a:srgbClr val="003A63"/>
+                </a:solidFill>
+                <a:latin typeface="Aptos" pitchFamily="34" charset="0"/>
+                <a:ea typeface="Aptos" pitchFamily="34" charset="-122"/>
+                <a:cs typeface="Aptos" pitchFamily="34" charset="-120"/>
+              </a:rPr>
+              <a:t>• Distinguish prediction from causation, diagnosis, and eligibility determination.</a:t>
             </a:r>
             <a:endParaRPr lang="en-US" sz="2100" dirty="0"/>
           </a:p>
           <a:p>
+            <a:pPr indent="0" marL="0">
+              <a:buNone/>
+            </a:pPr>
             <a:r>
               <a:rPr lang="en-US" sz="2100" dirty="0">
                 <a:solidFill>
-                  <a:srgbClr val="17364A"/>
-                </a:solidFill>
-                <a:latin typeface="Aptos" pitchFamily="34" charset="0"/>
-                <a:ea typeface="Aptos" pitchFamily="34" charset="-122"/>
-                <a:cs typeface="Aptos" pitchFamily="34" charset="-120"/>
-              </a:rPr>
-              <a:t>Interpret basic risk categories, thresholds, calibration, and error tradeoffs.</a:t>
+                  <a:srgbClr val="003A63"/>
+                </a:solidFill>
+                <a:latin typeface="Aptos" pitchFamily="34" charset="0"/>
+                <a:ea typeface="Aptos" pitchFamily="34" charset="-122"/>
+                <a:cs typeface="Aptos" pitchFamily="34" charset="-120"/>
+              </a:rPr>
+              <a:t>• Interpret basic risk categories, thresholds, calibration, and error tradeoffs.</a:t>
             </a:r>
             <a:endParaRPr lang="en-US" sz="2100" dirty="0"/>
           </a:p>
@@ -14160,17 +14405,17 @@
         </p:nvSpPr>
         <p:spPr>
           <a:xfrm>
-            <a:off x="7799832" y="1828800"/>
-            <a:ext cx="3145536" cy="685800"/>
-          </a:xfrm>
-          <a:prstGeom prst="rect">
-            <a:avLst/>
-          </a:prstGeom>
-          <a:noFill/>
-          <a:ln/>
-        </p:spPr>
-        <p:txBody>
-          <a:bodyPr wrap="square" lIns="0" tIns="0" rIns="0" bIns="0" rtlCol="0" anchor="t">
+            <a:off x="7799832" y="1801368"/>
+            <a:ext cx="3145536" cy="758952"/>
+          </a:xfrm>
+          <a:prstGeom prst="rect">
+            <a:avLst/>
+          </a:prstGeom>
+          <a:noFill/>
+          <a:ln/>
+        </p:spPr>
+        <p:txBody>
+          <a:bodyPr wrap="square" lIns="254" tIns="254" rIns="254" bIns="254" rtlCol="0" anchor="t">
             <a:normAutofit/>
           </a:bodyPr>
           <a:lstStyle/>
@@ -14179,7 +14424,7 @@
               <a:buNone/>
             </a:pPr>
             <a:r>
-              <a:rPr lang="en-US" sz="1550" dirty="0">
+              <a:rPr lang="en-US" sz="1320" dirty="0">
                 <a:solidFill>
                   <a:srgbClr val="17364A"/>
                 </a:solidFill>
@@ -14189,7 +14434,7 @@
               </a:rPr>
               <a:t>Define predictive analytics and risk stratification in public health terms.</a:t>
             </a:r>
-            <a:endParaRPr lang="en-US" sz="1550" dirty="0"/>
+            <a:endParaRPr lang="en-US" sz="1320" dirty="0"/>
           </a:p>
         </p:txBody>
       </p:sp>
@@ -14277,13 +14522,16 @@
           <a:ln/>
         </p:spPr>
         <p:txBody>
-          <a:bodyPr wrap="square" lIns="254" tIns="254" rIns="254" bIns="254" rtlCol="0" anchor="t">
+          <a:bodyPr wrap="square" lIns="508" tIns="508" rIns="508" bIns="508" rtlCol="0" anchor="t">
             <a:normAutofit/>
           </a:bodyPr>
           <a:lstStyle/>
           <a:p>
-            <a:r>
-              <a:rPr lang="en-US" sz="1380" dirty="0">
+            <a:pPr indent="0" marL="0">
+              <a:buNone/>
+            </a:pPr>
+            <a:r>
+              <a:rPr lang="en-US" sz="1220" dirty="0">
                 <a:solidFill>
                   <a:srgbClr val="17364A"/>
                 </a:solidFill>
@@ -14293,11 +14541,14 @@
               </a:rPr>
               <a:t>Identify equity and operational risks associated with risk scores.</a:t>
             </a:r>
-            <a:endParaRPr lang="en-US" sz="1380" dirty="0"/>
-          </a:p>
-          <a:p>
-            <a:r>
-              <a:rPr lang="en-US" sz="1380" dirty="0">
+            <a:endParaRPr lang="en-US" sz="1220" dirty="0"/>
+          </a:p>
+          <a:p>
+            <a:pPr indent="0" marL="0">
+              <a:buNone/>
+            </a:pPr>
+            <a:r>
+              <a:rPr lang="en-US" sz="1220" dirty="0">
                 <a:solidFill>
                   <a:srgbClr val="17364A"/>
                 </a:solidFill>
@@ -14305,9 +14556,9 @@
                 <a:ea typeface="Aptos" pitchFamily="34" charset="-122"/>
                 <a:cs typeface="Aptos" pitchFamily="34" charset="-120"/>
               </a:rPr>
-              <a:t>Design safeguards for use of predictive outputs in resource allocation, outreach,.</a:t>
-            </a:r>
-            <a:endParaRPr lang="en-US" sz="1380" dirty="0"/>
+              <a:t>Design safeguards for use of predictive outputs in resource.</a:t>
+            </a:r>
+            <a:endParaRPr lang="en-US" sz="1220" dirty="0"/>
           </a:p>
         </p:txBody>
       </p:sp>
@@ -14385,17 +14636,17 @@
         </p:nvSpPr>
         <p:spPr>
           <a:xfrm>
-            <a:off x="7799832" y="5001768"/>
-            <a:ext cx="3145536" cy="502920"/>
-          </a:xfrm>
-          <a:prstGeom prst="rect">
-            <a:avLst/>
-          </a:prstGeom>
-          <a:noFill/>
-          <a:ln/>
-        </p:spPr>
-        <p:txBody>
-          <a:bodyPr wrap="square" lIns="0" tIns="0" rIns="0" bIns="0" rtlCol="0" anchor="t">
+            <a:off x="7799832" y="4974336"/>
+            <a:ext cx="3145536" cy="576072"/>
+          </a:xfrm>
+          <a:prstGeom prst="rect">
+            <a:avLst/>
+          </a:prstGeom>
+          <a:noFill/>
+          <a:ln/>
+        </p:spPr>
+        <p:txBody>
+          <a:bodyPr wrap="square" lIns="254" tIns="254" rIns="254" bIns="254" rtlCol="0" anchor="t">
             <a:normAutofit/>
           </a:bodyPr>
           <a:lstStyle/>
@@ -14404,7 +14655,7 @@
               <a:buNone/>
             </a:pPr>
             <a:r>
-              <a:rPr lang="en-US" sz="1550" dirty="0">
+              <a:rPr lang="en-US" sz="1320" dirty="0">
                 <a:solidFill>
                   <a:srgbClr val="17364A"/>
                 </a:solidFill>
@@ -14412,9 +14663,9 @@
                 <a:ea typeface="Aptos" pitchFamily="34" charset="-122"/>
                 <a:cs typeface="Aptos" pitchFamily="34" charset="-120"/>
               </a:rPr>
-              <a:t>Use the assignment to test whether you can explain the concept, apply it to a realistic public health situation, and identify what would need review before the work moves forward.</a:t>
-            </a:r>
-            <a:endParaRPr lang="en-US" sz="1550" dirty="0"/>
+              <a:t>Use the assignment to test whether you can explain the concept, apply it to a realistic public health situation, and.</a:t>
+            </a:r>
+            <a:endParaRPr lang="en-US" sz="1320" dirty="0"/>
           </a:p>
         </p:txBody>
       </p:sp>
@@ -14715,21 +14966,24 @@
           <a:ln/>
         </p:spPr>
         <p:txBody>
-          <a:bodyPr wrap="square" lIns="635" tIns="635" rIns="635" bIns="635" rtlCol="0" anchor="t">
+          <a:bodyPr wrap="square" lIns="1016" tIns="1016" rIns="1016" bIns="1016" rtlCol="0" anchor="t">
             <a:normAutofit/>
           </a:bodyPr>
           <a:lstStyle/>
           <a:p>
+            <a:pPr indent="0" marL="0">
+              <a:buNone/>
+            </a:pPr>
             <a:r>
               <a:rPr lang="en-US" sz="2100" dirty="0">
                 <a:solidFill>
-                  <a:srgbClr val="17364A"/>
-                </a:solidFill>
-                <a:latin typeface="Aptos" pitchFamily="34" charset="0"/>
-                <a:ea typeface="Aptos" pitchFamily="34" charset="-122"/>
-                <a:cs typeface="Aptos" pitchFamily="34" charset="-120"/>
-              </a:rPr>
-              <a:t>Produce a predictive model review plan for a public health workflow.</a:t>
+                  <a:srgbClr val="003A63"/>
+                </a:solidFill>
+                <a:latin typeface="Aptos" pitchFamily="34" charset="0"/>
+                <a:ea typeface="Aptos" pitchFamily="34" charset="-122"/>
+                <a:cs typeface="Aptos" pitchFamily="34" charset="-120"/>
+              </a:rPr>
+              <a:t>• Produce a predictive model review plan for a public health workflow.</a:t>
             </a:r>
             <a:endParaRPr lang="en-US" sz="2100" dirty="0"/>
           </a:p>
@@ -14809,17 +15063,17 @@
         </p:nvSpPr>
         <p:spPr>
           <a:xfrm>
-            <a:off x="7799832" y="1828800"/>
-            <a:ext cx="3145536" cy="685800"/>
-          </a:xfrm>
-          <a:prstGeom prst="rect">
-            <a:avLst/>
-          </a:prstGeom>
-          <a:noFill/>
-          <a:ln/>
-        </p:spPr>
-        <p:txBody>
-          <a:bodyPr wrap="square" lIns="0" tIns="0" rIns="0" bIns="0" rtlCol="0" anchor="t">
+            <a:off x="7799832" y="1801368"/>
+            <a:ext cx="3145536" cy="758952"/>
+          </a:xfrm>
+          <a:prstGeom prst="rect">
+            <a:avLst/>
+          </a:prstGeom>
+          <a:noFill/>
+          <a:ln/>
+        </p:spPr>
+        <p:txBody>
+          <a:bodyPr wrap="square" lIns="254" tIns="254" rIns="254" bIns="254" rtlCol="0" anchor="t">
             <a:normAutofit/>
           </a:bodyPr>
           <a:lstStyle/>
@@ -14828,7 +15082,7 @@
               <a:buNone/>
             </a:pPr>
             <a:r>
-              <a:rPr lang="en-US" sz="1550" dirty="0">
+              <a:rPr lang="en-US" sz="1320" dirty="0">
                 <a:solidFill>
                   <a:srgbClr val="17364A"/>
                 </a:solidFill>
@@ -14838,7 +15092,7 @@
               </a:rPr>
               <a:t>Produce a predictive model review plan for a public health workflow.</a:t>
             </a:r>
-            <a:endParaRPr lang="en-US" sz="1550" dirty="0"/>
+            <a:endParaRPr lang="en-US" sz="1320" dirty="0"/>
           </a:p>
         </p:txBody>
       </p:sp>
@@ -14926,13 +15180,16 @@
           <a:ln/>
         </p:spPr>
         <p:txBody>
-          <a:bodyPr wrap="square" lIns="254" tIns="254" rIns="254" bIns="254" rtlCol="0" anchor="t">
+          <a:bodyPr wrap="square" lIns="508" tIns="508" rIns="508" bIns="508" rtlCol="0" anchor="t">
             <a:normAutofit/>
           </a:bodyPr>
           <a:lstStyle/>
           <a:p>
-            <a:r>
-              <a:rPr lang="en-US" sz="1380" dirty="0">
+            <a:pPr indent="0" marL="0">
+              <a:buNone/>
+            </a:pPr>
+            <a:r>
+              <a:rPr lang="en-US" sz="1220" dirty="0">
                 <a:solidFill>
                   <a:srgbClr val="17364A"/>
                 </a:solidFill>
@@ -14942,7 +15199,7 @@
               </a:rPr>
               <a:t>Produce a predictive model review plan for a public health workflow.</a:t>
             </a:r>
-            <a:endParaRPr lang="en-US" sz="1380" dirty="0"/>
+            <a:endParaRPr lang="en-US" sz="1220" dirty="0"/>
           </a:p>
         </p:txBody>
       </p:sp>
@@ -15020,17 +15277,17 @@
         </p:nvSpPr>
         <p:spPr>
           <a:xfrm>
-            <a:off x="7799832" y="5001768"/>
-            <a:ext cx="3145536" cy="502920"/>
-          </a:xfrm>
-          <a:prstGeom prst="rect">
-            <a:avLst/>
-          </a:prstGeom>
-          <a:noFill/>
-          <a:ln/>
-        </p:spPr>
-        <p:txBody>
-          <a:bodyPr wrap="square" lIns="0" tIns="0" rIns="0" bIns="0" rtlCol="0" anchor="t">
+            <a:off x="7799832" y="4974336"/>
+            <a:ext cx="3145536" cy="576072"/>
+          </a:xfrm>
+          <a:prstGeom prst="rect">
+            <a:avLst/>
+          </a:prstGeom>
+          <a:noFill/>
+          <a:ln/>
+        </p:spPr>
+        <p:txBody>
+          <a:bodyPr wrap="square" lIns="254" tIns="254" rIns="254" bIns="254" rtlCol="0" anchor="t">
             <a:normAutofit/>
           </a:bodyPr>
           <a:lstStyle/>
@@ -15039,7 +15296,7 @@
               <a:buNone/>
             </a:pPr>
             <a:r>
-              <a:rPr lang="en-US" sz="1550" dirty="0">
+              <a:rPr lang="en-US" sz="1320" dirty="0">
                 <a:solidFill>
                   <a:srgbClr val="17364A"/>
                 </a:solidFill>
@@ -15047,9 +15304,9 @@
                 <a:ea typeface="Aptos" pitchFamily="34" charset="-122"/>
                 <a:cs typeface="Aptos" pitchFamily="34" charset="-120"/>
               </a:rPr>
-              <a:t>Use the assignment to test whether you can explain the concept, apply it to a realistic public health situation, and identify what would need review before the work moves forward.</a:t>
-            </a:r>
-            <a:endParaRPr lang="en-US" sz="1550" dirty="0"/>
+              <a:t>Use the assignment to test whether you can explain the concept, apply it to a realistic public health situation, and.</a:t>
+            </a:r>
+            <a:endParaRPr lang="en-US" sz="1320" dirty="0"/>
           </a:p>
         </p:txBody>
       </p:sp>
@@ -15350,49 +15607,58 @@
           <a:ln/>
         </p:spPr>
         <p:txBody>
-          <a:bodyPr wrap="square" lIns="635" tIns="635" rIns="635" bIns="635" rtlCol="0" anchor="t">
+          <a:bodyPr wrap="square" lIns="1016" tIns="1016" rIns="1016" bIns="1016" rtlCol="0" anchor="t">
             <a:normAutofit/>
           </a:bodyPr>
           <a:lstStyle/>
           <a:p>
+            <a:pPr indent="0" marL="0">
+              <a:buNone/>
+            </a:pPr>
             <a:r>
               <a:rPr lang="en-US" sz="2100" dirty="0">
                 <a:solidFill>
-                  <a:srgbClr val="17364A"/>
-                </a:solidFill>
-                <a:latin typeface="Aptos" pitchFamily="34" charset="0"/>
-                <a:ea typeface="Aptos" pitchFamily="34" charset="-122"/>
-                <a:cs typeface="Aptos" pitchFamily="34" charset="-120"/>
-              </a:rPr>
-              <a:t>Predictive analytics uses data to estimate the likelihood of future events or outcomes.</a:t>
+                  <a:srgbClr val="003A63"/>
+                </a:solidFill>
+                <a:latin typeface="Aptos" pitchFamily="34" charset="0"/>
+                <a:ea typeface="Aptos" pitchFamily="34" charset="-122"/>
+                <a:cs typeface="Aptos" pitchFamily="34" charset="-120"/>
+              </a:rPr>
+              <a:t>• Predictive analytics uses data to estimate the likelihood of future events or outcomes.</a:t>
             </a:r>
             <a:endParaRPr lang="en-US" sz="2100" dirty="0"/>
           </a:p>
           <a:p>
+            <a:pPr indent="0" marL="0">
+              <a:buNone/>
+            </a:pPr>
             <a:r>
               <a:rPr lang="en-US" sz="2100" dirty="0">
                 <a:solidFill>
-                  <a:srgbClr val="17364A"/>
-                </a:solidFill>
-                <a:latin typeface="Aptos" pitchFamily="34" charset="0"/>
-                <a:ea typeface="Aptos" pitchFamily="34" charset="-122"/>
-                <a:cs typeface="Aptos" pitchFamily="34" charset="-120"/>
-              </a:rPr>
-              <a:t>In public health, predictive models may be used to anticipate disease burden, identify populations at.</a:t>
+                  <a:srgbClr val="003A63"/>
+                </a:solidFill>
+                <a:latin typeface="Aptos" pitchFamily="34" charset="0"/>
+                <a:ea typeface="Aptos" pitchFamily="34" charset="-122"/>
+                <a:cs typeface="Aptos" pitchFamily="34" charset="-120"/>
+              </a:rPr>
+              <a:t>• In public health, predictive models may be used to anticipate disease burden, identify.</a:t>
             </a:r>
             <a:endParaRPr lang="en-US" sz="2100" dirty="0"/>
           </a:p>
           <a:p>
+            <a:pPr indent="0" marL="0">
+              <a:buNone/>
+            </a:pPr>
             <a:r>
               <a:rPr lang="en-US" sz="2100" dirty="0">
                 <a:solidFill>
-                  <a:srgbClr val="17364A"/>
-                </a:solidFill>
-                <a:latin typeface="Aptos" pitchFamily="34" charset="0"/>
-                <a:ea typeface="Aptos" pitchFamily="34" charset="-122"/>
-                <a:cs typeface="Aptos" pitchFamily="34" charset="-120"/>
-              </a:rPr>
-              <a:t>Risk stratification is the practice of grouping individuals, facilities, areas, events, or populations.</a:t>
+                  <a:srgbClr val="003A63"/>
+                </a:solidFill>
+                <a:latin typeface="Aptos" pitchFamily="34" charset="0"/>
+                <a:ea typeface="Aptos" pitchFamily="34" charset="-122"/>
+                <a:cs typeface="Aptos" pitchFamily="34" charset="-120"/>
+              </a:rPr>
+              <a:t>• Risk stratification is the practice of grouping individuals, facilities, areas, events, or.</a:t>
             </a:r>
             <a:endParaRPr lang="en-US" sz="2100" dirty="0"/>
           </a:p>
@@ -15472,17 +15738,17 @@
         </p:nvSpPr>
         <p:spPr>
           <a:xfrm>
-            <a:off x="7799832" y="1828800"/>
-            <a:ext cx="3145536" cy="685800"/>
-          </a:xfrm>
-          <a:prstGeom prst="rect">
-            <a:avLst/>
-          </a:prstGeom>
-          <a:noFill/>
-          <a:ln/>
-        </p:spPr>
-        <p:txBody>
-          <a:bodyPr wrap="square" lIns="0" tIns="0" rIns="0" bIns="0" rtlCol="0" anchor="t">
+            <a:off x="7799832" y="1801368"/>
+            <a:ext cx="3145536" cy="758952"/>
+          </a:xfrm>
+          <a:prstGeom prst="rect">
+            <a:avLst/>
+          </a:prstGeom>
+          <a:noFill/>
+          <a:ln/>
+        </p:spPr>
+        <p:txBody>
+          <a:bodyPr wrap="square" lIns="254" tIns="254" rIns="254" bIns="254" rtlCol="0" anchor="t">
             <a:normAutofit/>
           </a:bodyPr>
           <a:lstStyle/>
@@ -15491,7 +15757,7 @@
               <a:buNone/>
             </a:pPr>
             <a:r>
-              <a:rPr lang="en-US" sz="1550" dirty="0">
+              <a:rPr lang="en-US" sz="1320" dirty="0">
                 <a:solidFill>
                   <a:srgbClr val="17364A"/>
                 </a:solidFill>
@@ -15501,7 +15767,7 @@
               </a:rPr>
               <a:t>Predictive analytics uses data to estimate the likelihood of future events or outcomes.</a:t>
             </a:r>
-            <a:endParaRPr lang="en-US" sz="1550" dirty="0"/>
+            <a:endParaRPr lang="en-US" sz="1320" dirty="0"/>
           </a:p>
         </p:txBody>
       </p:sp>
@@ -15589,13 +15855,16 @@
           <a:ln/>
         </p:spPr>
         <p:txBody>
-          <a:bodyPr wrap="square" lIns="254" tIns="254" rIns="254" bIns="254" rtlCol="0" anchor="t">
+          <a:bodyPr wrap="square" lIns="508" tIns="508" rIns="508" bIns="508" rtlCol="0" anchor="t">
             <a:normAutofit/>
           </a:bodyPr>
           <a:lstStyle/>
           <a:p>
-            <a:r>
-              <a:rPr lang="en-US" sz="1380" dirty="0">
+            <a:pPr indent="0" marL="0">
+              <a:buNone/>
+            </a:pPr>
+            <a:r>
+              <a:rPr lang="en-US" sz="1220" dirty="0">
                 <a:solidFill>
                   <a:srgbClr val="17364A"/>
                 </a:solidFill>
@@ -15603,13 +15872,16 @@
                 <a:ea typeface="Aptos" pitchFamily="34" charset="-122"/>
                 <a:cs typeface="Aptos" pitchFamily="34" charset="-120"/>
               </a:rPr>
-              <a:t>In public health, predictive models may be used to anticipate disease burden, identify.</a:t>
-            </a:r>
-            <a:endParaRPr lang="en-US" sz="1380" dirty="0"/>
-          </a:p>
-          <a:p>
-            <a:r>
-              <a:rPr lang="en-US" sz="1380" dirty="0">
+              <a:t>In public health, predictive models may be used to anticipate.</a:t>
+            </a:r>
+            <a:endParaRPr lang="en-US" sz="1220" dirty="0"/>
+          </a:p>
+          <a:p>
+            <a:pPr indent="0" marL="0">
+              <a:buNone/>
+            </a:pPr>
+            <a:r>
+              <a:rPr lang="en-US" sz="1220" dirty="0">
                 <a:solidFill>
                   <a:srgbClr val="17364A"/>
                 </a:solidFill>
@@ -15617,13 +15889,16 @@
                 <a:ea typeface="Aptos" pitchFamily="34" charset="-122"/>
                 <a:cs typeface="Aptos" pitchFamily="34" charset="-120"/>
               </a:rPr>
-              <a:t>Risk stratification is the practice of grouping individuals, facilities, areas, events, or.</a:t>
-            </a:r>
-            <a:endParaRPr lang="en-US" sz="1380" dirty="0"/>
-          </a:p>
-          <a:p>
-            <a:r>
-              <a:rPr lang="en-US" sz="1380" dirty="0">
+              <a:t>Risk stratification is the practice of grouping individuals,.</a:t>
+            </a:r>
+            <a:endParaRPr lang="en-US" sz="1220" dirty="0"/>
+          </a:p>
+          <a:p>
+            <a:pPr indent="0" marL="0">
+              <a:buNone/>
+            </a:pPr>
+            <a:r>
+              <a:rPr lang="en-US" sz="1220" dirty="0">
                 <a:solidFill>
                   <a:srgbClr val="17364A"/>
                 </a:solidFill>
@@ -15631,9 +15906,9 @@
                 <a:ea typeface="Aptos" pitchFamily="34" charset="-122"/>
                 <a:cs typeface="Aptos" pitchFamily="34" charset="-120"/>
               </a:rPr>
-              <a:t>This module helps learners distinguish prediction from diagnosis, causation, eligibility.</a:t>
-            </a:r>
-            <a:endParaRPr lang="en-US" sz="1380" dirty="0"/>
+              <a:t>This module helps learners distinguish prediction from diagnosis,.</a:t>
+            </a:r>
+            <a:endParaRPr lang="en-US" sz="1220" dirty="0"/>
           </a:p>
         </p:txBody>
       </p:sp>
@@ -15711,17 +15986,17 @@
         </p:nvSpPr>
         <p:spPr>
           <a:xfrm>
-            <a:off x="7799832" y="5001768"/>
-            <a:ext cx="3145536" cy="502920"/>
-          </a:xfrm>
-          <a:prstGeom prst="rect">
-            <a:avLst/>
-          </a:prstGeom>
-          <a:noFill/>
-          <a:ln/>
-        </p:spPr>
-        <p:txBody>
-          <a:bodyPr wrap="square" lIns="0" tIns="0" rIns="0" bIns="0" rtlCol="0" anchor="t">
+            <a:off x="7799832" y="4974336"/>
+            <a:ext cx="3145536" cy="576072"/>
+          </a:xfrm>
+          <a:prstGeom prst="rect">
+            <a:avLst/>
+          </a:prstGeom>
+          <a:noFill/>
+          <a:ln/>
+        </p:spPr>
+        <p:txBody>
+          <a:bodyPr wrap="square" lIns="254" tIns="254" rIns="254" bIns="254" rtlCol="0" anchor="t">
             <a:normAutofit/>
           </a:bodyPr>
           <a:lstStyle/>
@@ -15730,7 +16005,7 @@
               <a:buNone/>
             </a:pPr>
             <a:r>
-              <a:rPr lang="en-US" sz="1550" dirty="0">
+              <a:rPr lang="en-US" sz="1320" dirty="0">
                 <a:solidFill>
                   <a:srgbClr val="17364A"/>
                 </a:solidFill>
@@ -15738,9 +16013,9 @@
                 <a:ea typeface="Aptos" pitchFamily="34" charset="-122"/>
                 <a:cs typeface="Aptos" pitchFamily="34" charset="-120"/>
               </a:rPr>
-              <a:t>Identify what could go wrong, who could be affected, what safeguards are needed, and what evidence should be reviewed before use expands.</a:t>
-            </a:r>
-            <a:endParaRPr lang="en-US" sz="1550" dirty="0"/>
+              <a:t>Identify what could go wrong, who could be affected, what safeguards are needed, and what evidence should be reviewed.</a:t>
+            </a:r>
+            <a:endParaRPr lang="en-US" sz="1320" dirty="0"/>
           </a:p>
         </p:txBody>
       </p:sp>
@@ -16041,49 +16316,58 @@
           <a:ln/>
         </p:spPr>
         <p:txBody>
-          <a:bodyPr wrap="square" lIns="635" tIns="635" rIns="635" bIns="635" rtlCol="0" anchor="t">
+          <a:bodyPr wrap="square" lIns="1016" tIns="1016" rIns="1016" bIns="1016" rtlCol="0" anchor="t">
             <a:normAutofit/>
           </a:bodyPr>
           <a:lstStyle/>
           <a:p>
+            <a:pPr indent="0" marL="0">
+              <a:buNone/>
+            </a:pPr>
             <a:r>
               <a:rPr lang="en-US" sz="2100" dirty="0">
                 <a:solidFill>
-                  <a:srgbClr val="17364A"/>
-                </a:solidFill>
-                <a:latin typeface="Aptos" pitchFamily="34" charset="0"/>
-                <a:ea typeface="Aptos" pitchFamily="34" charset="-122"/>
-                <a:cs typeface="Aptos" pitchFamily="34" charset="-120"/>
-              </a:rPr>
-              <a:t>Predictive analytics matters because public health agencies often must act before all information is.</a:t>
+                  <a:srgbClr val="003A63"/>
+                </a:solidFill>
+                <a:latin typeface="Aptos" pitchFamily="34" charset="0"/>
+                <a:ea typeface="Aptos" pitchFamily="34" charset="-122"/>
+                <a:cs typeface="Aptos" pitchFamily="34" charset="-120"/>
+              </a:rPr>
+              <a:t>• Predictive analytics matters because public health agencies often must act before all.</a:t>
             </a:r>
             <a:endParaRPr lang="en-US" sz="2100" dirty="0"/>
           </a:p>
           <a:p>
+            <a:pPr indent="0" marL="0">
+              <a:buNone/>
+            </a:pPr>
             <a:r>
               <a:rPr lang="en-US" sz="2100" dirty="0">
                 <a:solidFill>
-                  <a:srgbClr val="17364A"/>
-                </a:solidFill>
-                <a:latin typeface="Aptos" pitchFamily="34" charset="0"/>
-                <a:ea typeface="Aptos" pitchFamily="34" charset="-122"/>
-                <a:cs typeface="Aptos" pitchFamily="34" charset="-120"/>
-              </a:rPr>
-              <a:t>During outbreaks, emergencies, or resource-constrained programs, agencies may need to decide where to.</a:t>
+                  <a:srgbClr val="003A63"/>
+                </a:solidFill>
+                <a:latin typeface="Aptos" pitchFamily="34" charset="0"/>
+                <a:ea typeface="Aptos" pitchFamily="34" charset="-122"/>
+                <a:cs typeface="Aptos" pitchFamily="34" charset="-120"/>
+              </a:rPr>
+              <a:t>• During outbreaks, emergencies, or resource-constrained programs, agencies may need to decide.</a:t>
             </a:r>
             <a:endParaRPr lang="en-US" sz="2100" dirty="0"/>
           </a:p>
           <a:p>
+            <a:pPr indent="0" marL="0">
+              <a:buNone/>
+            </a:pPr>
             <a:r>
               <a:rPr lang="en-US" sz="2100" dirty="0">
                 <a:solidFill>
-                  <a:srgbClr val="17364A"/>
-                </a:solidFill>
-                <a:latin typeface="Aptos" pitchFamily="34" charset="0"/>
-                <a:ea typeface="Aptos" pitchFamily="34" charset="-122"/>
-                <a:cs typeface="Aptos" pitchFamily="34" charset="-120"/>
-              </a:rPr>
-              <a:t>Prediction can help organize uncertainty, but it cannot remove uncertainty.</a:t>
+                  <a:srgbClr val="003A63"/>
+                </a:solidFill>
+                <a:latin typeface="Aptos" pitchFamily="34" charset="0"/>
+                <a:ea typeface="Aptos" pitchFamily="34" charset="-122"/>
+                <a:cs typeface="Aptos" pitchFamily="34" charset="-120"/>
+              </a:rPr>
+              <a:t>• Prediction can help organize uncertainty, but it cannot remove uncertainty.</a:t>
             </a:r>
             <a:endParaRPr lang="en-US" sz="2100" dirty="0"/>
           </a:p>
@@ -16163,17 +16447,17 @@
         </p:nvSpPr>
         <p:spPr>
           <a:xfrm>
-            <a:off x="7799832" y="1828800"/>
-            <a:ext cx="3145536" cy="685800"/>
-          </a:xfrm>
-          <a:prstGeom prst="rect">
-            <a:avLst/>
-          </a:prstGeom>
-          <a:noFill/>
-          <a:ln/>
-        </p:spPr>
-        <p:txBody>
-          <a:bodyPr wrap="square" lIns="0" tIns="0" rIns="0" bIns="0" rtlCol="0" anchor="t">
+            <a:off x="7799832" y="1801368"/>
+            <a:ext cx="3145536" cy="758952"/>
+          </a:xfrm>
+          <a:prstGeom prst="rect">
+            <a:avLst/>
+          </a:prstGeom>
+          <a:noFill/>
+          <a:ln/>
+        </p:spPr>
+        <p:txBody>
+          <a:bodyPr wrap="square" lIns="254" tIns="254" rIns="254" bIns="254" rtlCol="0" anchor="t">
             <a:normAutofit/>
           </a:bodyPr>
           <a:lstStyle/>
@@ -16182,7 +16466,7 @@
               <a:buNone/>
             </a:pPr>
             <a:r>
-              <a:rPr lang="en-US" sz="1550" dirty="0">
+              <a:rPr lang="en-US" sz="1320" dirty="0">
                 <a:solidFill>
                   <a:srgbClr val="17364A"/>
                 </a:solidFill>
@@ -16192,7 +16476,7 @@
               </a:rPr>
               <a:t>Predictive analytics matters because public health agencies often must act before all information is.</a:t>
             </a:r>
-            <a:endParaRPr lang="en-US" sz="1550" dirty="0"/>
+            <a:endParaRPr lang="en-US" sz="1320" dirty="0"/>
           </a:p>
         </p:txBody>
       </p:sp>
@@ -16280,13 +16564,16 @@
           <a:ln/>
         </p:spPr>
         <p:txBody>
-          <a:bodyPr wrap="square" lIns="254" tIns="254" rIns="254" bIns="254" rtlCol="0" anchor="t">
+          <a:bodyPr wrap="square" lIns="508" tIns="508" rIns="508" bIns="508" rtlCol="0" anchor="t">
             <a:normAutofit/>
           </a:bodyPr>
           <a:lstStyle/>
           <a:p>
-            <a:r>
-              <a:rPr lang="en-US" sz="1380" dirty="0">
+            <a:pPr indent="0" marL="0">
+              <a:buNone/>
+            </a:pPr>
+            <a:r>
+              <a:rPr lang="en-US" sz="1220" dirty="0">
                 <a:solidFill>
                   <a:srgbClr val="17364A"/>
                 </a:solidFill>
@@ -16294,13 +16581,16 @@
                 <a:ea typeface="Aptos" pitchFamily="34" charset="-122"/>
                 <a:cs typeface="Aptos" pitchFamily="34" charset="-120"/>
               </a:rPr>
-              <a:t>Predictive analytics matters because public health agencies often must act before all.</a:t>
-            </a:r>
-            <a:endParaRPr lang="en-US" sz="1380" dirty="0"/>
-          </a:p>
-          <a:p>
-            <a:r>
-              <a:rPr lang="en-US" sz="1380" dirty="0">
+              <a:t>Predictive analytics matters because public health agencies often.</a:t>
+            </a:r>
+            <a:endParaRPr lang="en-US" sz="1220" dirty="0"/>
+          </a:p>
+          <a:p>
+            <a:pPr indent="0" marL="0">
+              <a:buNone/>
+            </a:pPr>
+            <a:r>
+              <a:rPr lang="en-US" sz="1220" dirty="0">
                 <a:solidFill>
                   <a:srgbClr val="17364A"/>
                 </a:solidFill>
@@ -16308,13 +16598,16 @@
                 <a:ea typeface="Aptos" pitchFamily="34" charset="-122"/>
                 <a:cs typeface="Aptos" pitchFamily="34" charset="-120"/>
               </a:rPr>
-              <a:t>During outbreaks, emergencies, or resource-constrained programs, agencies may need to.</a:t>
-            </a:r>
-            <a:endParaRPr lang="en-US" sz="1380" dirty="0"/>
-          </a:p>
-          <a:p>
-            <a:r>
-              <a:rPr lang="en-US" sz="1380" dirty="0">
+              <a:t>During outbreaks, emergencies, or resource-constrained programs,.</a:t>
+            </a:r>
+            <a:endParaRPr lang="en-US" sz="1220" dirty="0"/>
+          </a:p>
+          <a:p>
+            <a:pPr indent="0" marL="0">
+              <a:buNone/>
+            </a:pPr>
+            <a:r>
+              <a:rPr lang="en-US" sz="1220" dirty="0">
                 <a:solidFill>
                   <a:srgbClr val="17364A"/>
                 </a:solidFill>
@@ -16324,7 +16617,7 @@
               </a:rPr>
               <a:t>Risk stratification can also create harm if used carelessly.</a:t>
             </a:r>
-            <a:endParaRPr lang="en-US" sz="1380" dirty="0"/>
+            <a:endParaRPr lang="en-US" sz="1220" dirty="0"/>
           </a:p>
         </p:txBody>
       </p:sp>
@@ -16402,17 +16695,17 @@
         </p:nvSpPr>
         <p:spPr>
           <a:xfrm>
-            <a:off x="7799832" y="5001768"/>
-            <a:ext cx="3145536" cy="502920"/>
-          </a:xfrm>
-          <a:prstGeom prst="rect">
-            <a:avLst/>
-          </a:prstGeom>
-          <a:noFill/>
-          <a:ln/>
-        </p:spPr>
-        <p:txBody>
-          <a:bodyPr wrap="square" lIns="0" tIns="0" rIns="0" bIns="0" rtlCol="0" anchor="t">
+            <a:off x="7799832" y="4974336"/>
+            <a:ext cx="3145536" cy="576072"/>
+          </a:xfrm>
+          <a:prstGeom prst="rect">
+            <a:avLst/>
+          </a:prstGeom>
+          <a:noFill/>
+          <a:ln/>
+        </p:spPr>
+        <p:txBody>
+          <a:bodyPr wrap="square" lIns="254" tIns="254" rIns="254" bIns="254" rtlCol="0" anchor="t">
             <a:normAutofit/>
           </a:bodyPr>
           <a:lstStyle/>
@@ -16421,7 +16714,7 @@
               <a:buNone/>
             </a:pPr>
             <a:r>
-              <a:rPr lang="en-US" sz="1550" dirty="0">
+              <a:rPr lang="en-US" sz="1320" dirty="0">
                 <a:solidFill>
                   <a:srgbClr val="17364A"/>
                 </a:solidFill>
@@ -16429,9 +16722,9 @@
                 <a:ea typeface="Aptos" pitchFamily="34" charset="-122"/>
                 <a:cs typeface="Aptos" pitchFamily="34" charset="-120"/>
               </a:rPr>
-              <a:t>Identify what could go wrong, who could be affected, what safeguards are needed, and what evidence should be reviewed before use expands.</a:t>
-            </a:r>
-            <a:endParaRPr lang="en-US" sz="1550" dirty="0"/>
+              <a:t>Identify what could go wrong, who could be affected, what safeguards are needed, and what evidence should be reviewed.</a:t>
+            </a:r>
+            <a:endParaRPr lang="en-US" sz="1320" dirty="0"/>
           </a:p>
         </p:txBody>
       </p:sp>
@@ -16732,49 +17025,58 @@
           <a:ln/>
         </p:spPr>
         <p:txBody>
-          <a:bodyPr wrap="square" lIns="635" tIns="635" rIns="635" bIns="635" rtlCol="0" anchor="t">
+          <a:bodyPr wrap="square" lIns="1016" tIns="1016" rIns="1016" bIns="1016" rtlCol="0" anchor="t">
             <a:normAutofit/>
           </a:bodyPr>
           <a:lstStyle/>
           <a:p>
+            <a:pPr indent="0" marL="0">
+              <a:buNone/>
+            </a:pPr>
             <a:r>
               <a:rPr lang="en-US" sz="2100" dirty="0">
                 <a:solidFill>
-                  <a:srgbClr val="17364A"/>
-                </a:solidFill>
-                <a:latin typeface="Aptos" pitchFamily="34" charset="0"/>
-                <a:ea typeface="Aptos" pitchFamily="34" charset="-122"/>
-                <a:cs typeface="Aptos" pitchFamily="34" charset="-120"/>
-              </a:rPr>
-              <a:t>A local health department may want to predict which neighborhoods are at increased risk of low.</a:t>
+                  <a:srgbClr val="003A63"/>
+                </a:solidFill>
+                <a:latin typeface="Aptos" pitchFamily="34" charset="0"/>
+                <a:ea typeface="Aptos" pitchFamily="34" charset="-122"/>
+                <a:cs typeface="Aptos" pitchFamily="34" charset="-120"/>
+              </a:rPr>
+              <a:t>• A local health department may want to predict which neighborhoods are at increased risk of low.</a:t>
             </a:r>
             <a:endParaRPr lang="en-US" sz="2100" dirty="0"/>
           </a:p>
           <a:p>
+            <a:pPr indent="0" marL="0">
+              <a:buNone/>
+            </a:pPr>
             <a:r>
               <a:rPr lang="en-US" sz="2100" dirty="0">
                 <a:solidFill>
-                  <a:srgbClr val="17364A"/>
-                </a:solidFill>
-                <a:latin typeface="Aptos" pitchFamily="34" charset="0"/>
-                <a:ea typeface="Aptos" pitchFamily="34" charset="-122"/>
-                <a:cs typeface="Aptos" pitchFamily="34" charset="-120"/>
-              </a:rPr>
-              <a:t>The model could use prior immunization data, school enrollment patterns, appointment availability,.</a:t>
+                  <a:srgbClr val="003A63"/>
+                </a:solidFill>
+                <a:latin typeface="Aptos" pitchFamily="34" charset="0"/>
+                <a:ea typeface="Aptos" pitchFamily="34" charset="-122"/>
+                <a:cs typeface="Aptos" pitchFamily="34" charset="-120"/>
+              </a:rPr>
+              <a:t>• The model could use prior immunization data, school enrollment patterns, appointment.</a:t>
             </a:r>
             <a:endParaRPr lang="en-US" sz="2100" dirty="0"/>
           </a:p>
           <a:p>
+            <a:pPr indent="0" marL="0">
+              <a:buNone/>
+            </a:pPr>
             <a:r>
               <a:rPr lang="en-US" sz="2100" dirty="0">
                 <a:solidFill>
-                  <a:srgbClr val="17364A"/>
-                </a:solidFill>
-                <a:latin typeface="Aptos" pitchFamily="34" charset="0"/>
-                <a:ea typeface="Aptos" pitchFamily="34" charset="-122"/>
-                <a:cs typeface="Aptos" pitchFamily="34" charset="-120"/>
-              </a:rPr>
-              <a:t>The output might help prioritize community outreach and mobile clinics.</a:t>
+                  <a:srgbClr val="003A63"/>
+                </a:solidFill>
+                <a:latin typeface="Aptos" pitchFamily="34" charset="0"/>
+                <a:ea typeface="Aptos" pitchFamily="34" charset="-122"/>
+                <a:cs typeface="Aptos" pitchFamily="34" charset="-120"/>
+              </a:rPr>
+              <a:t>• The output might help prioritize community outreach and mobile clinics.</a:t>
             </a:r>
             <a:endParaRPr lang="en-US" sz="2100" dirty="0"/>
           </a:p>
@@ -16854,17 +17156,17 @@
         </p:nvSpPr>
         <p:spPr>
           <a:xfrm>
-            <a:off x="7799832" y="1828800"/>
-            <a:ext cx="3145536" cy="685800"/>
-          </a:xfrm>
-          <a:prstGeom prst="rect">
-            <a:avLst/>
-          </a:prstGeom>
-          <a:noFill/>
-          <a:ln/>
-        </p:spPr>
-        <p:txBody>
-          <a:bodyPr wrap="square" lIns="0" tIns="0" rIns="0" bIns="0" rtlCol="0" anchor="t">
+            <a:off x="7799832" y="1801368"/>
+            <a:ext cx="3145536" cy="758952"/>
+          </a:xfrm>
+          <a:prstGeom prst="rect">
+            <a:avLst/>
+          </a:prstGeom>
+          <a:noFill/>
+          <a:ln/>
+        </p:spPr>
+        <p:txBody>
+          <a:bodyPr wrap="square" lIns="254" tIns="254" rIns="254" bIns="254" rtlCol="0" anchor="t">
             <a:normAutofit/>
           </a:bodyPr>
           <a:lstStyle/>
@@ -16873,7 +17175,7 @@
               <a:buNone/>
             </a:pPr>
             <a:r>
-              <a:rPr lang="en-US" sz="1550" dirty="0">
+              <a:rPr lang="en-US" sz="1320" dirty="0">
                 <a:solidFill>
                   <a:srgbClr val="17364A"/>
                 </a:solidFill>
@@ -16883,7 +17185,7 @@
               </a:rPr>
               <a:t>A local health department may want to predict which neighborhoods are at increased risk of low.</a:t>
             </a:r>
-            <a:endParaRPr lang="en-US" sz="1550" dirty="0"/>
+            <a:endParaRPr lang="en-US" sz="1320" dirty="0"/>
           </a:p>
         </p:txBody>
       </p:sp>
@@ -16971,13 +17273,16 @@
           <a:ln/>
         </p:spPr>
         <p:txBody>
-          <a:bodyPr wrap="square" lIns="254" tIns="254" rIns="254" bIns="254" rtlCol="0" anchor="t">
+          <a:bodyPr wrap="square" lIns="508" tIns="508" rIns="508" bIns="508" rtlCol="0" anchor="t">
             <a:normAutofit/>
           </a:bodyPr>
           <a:lstStyle/>
           <a:p>
-            <a:r>
-              <a:rPr lang="en-US" sz="1380" dirty="0">
+            <a:pPr indent="0" marL="0">
+              <a:buNone/>
+            </a:pPr>
+            <a:r>
+              <a:rPr lang="en-US" sz="1220" dirty="0">
                 <a:solidFill>
                   <a:srgbClr val="17364A"/>
                 </a:solidFill>
@@ -16985,13 +17290,16 @@
                 <a:ea typeface="Aptos" pitchFamily="34" charset="-122"/>
                 <a:cs typeface="Aptos" pitchFamily="34" charset="-120"/>
               </a:rPr>
-              <a:t>A local health department may want to predict which neighborhoods are at increased risk of.</a:t>
-            </a:r>
-            <a:endParaRPr lang="en-US" sz="1380" dirty="0"/>
-          </a:p>
-          <a:p>
-            <a:r>
-              <a:rPr lang="en-US" sz="1380" dirty="0">
+              <a:t>A local health department may want to predict which neighborhoods.</a:t>
+            </a:r>
+            <a:endParaRPr lang="en-US" sz="1220" dirty="0"/>
+          </a:p>
+          <a:p>
+            <a:pPr indent="0" marL="0">
+              <a:buNone/>
+            </a:pPr>
+            <a:r>
+              <a:rPr lang="en-US" sz="1220" dirty="0">
                 <a:solidFill>
                   <a:srgbClr val="17364A"/>
                 </a:solidFill>
@@ -16999,13 +17307,16 @@
                 <a:ea typeface="Aptos" pitchFamily="34" charset="-122"/>
                 <a:cs typeface="Aptos" pitchFamily="34" charset="-120"/>
               </a:rPr>
-              <a:t>The model could use prior immunization data, school enrollment patterns, appointment.</a:t>
-            </a:r>
-            <a:endParaRPr lang="en-US" sz="1380" dirty="0"/>
-          </a:p>
-          <a:p>
-            <a:r>
-              <a:rPr lang="en-US" sz="1380" dirty="0">
+              <a:t>The model could use prior immunization data, school enrollment.</a:t>
+            </a:r>
+            <a:endParaRPr lang="en-US" sz="1220" dirty="0"/>
+          </a:p>
+          <a:p>
+            <a:pPr indent="0" marL="0">
+              <a:buNone/>
+            </a:pPr>
+            <a:r>
+              <a:rPr lang="en-US" sz="1220" dirty="0">
                 <a:solidFill>
                   <a:srgbClr val="17364A"/>
                 </a:solidFill>
@@ -17013,9 +17324,9 @@
                 <a:ea typeface="Aptos" pitchFamily="34" charset="-122"/>
                 <a:cs typeface="Aptos" pitchFamily="34" charset="-120"/>
               </a:rPr>
-              <a:t>This use can support equity if it directs resources toward communities facing access.</a:t>
-            </a:r>
-            <a:endParaRPr lang="en-US" sz="1380" dirty="0"/>
+              <a:t>This use can support equity if it directs resources toward.</a:t>
+            </a:r>
+            <a:endParaRPr lang="en-US" sz="1220" dirty="0"/>
           </a:p>
         </p:txBody>
       </p:sp>
@@ -17093,17 +17404,17 @@
         </p:nvSpPr>
         <p:spPr>
           <a:xfrm>
-            <a:off x="7799832" y="5001768"/>
-            <a:ext cx="3145536" cy="502920"/>
-          </a:xfrm>
-          <a:prstGeom prst="rect">
-            <a:avLst/>
-          </a:prstGeom>
-          <a:noFill/>
-          <a:ln/>
-        </p:spPr>
-        <p:txBody>
-          <a:bodyPr wrap="square" lIns="0" tIns="0" rIns="0" bIns="0" rtlCol="0" anchor="t">
+            <a:off x="7799832" y="4974336"/>
+            <a:ext cx="3145536" cy="576072"/>
+          </a:xfrm>
+          <a:prstGeom prst="rect">
+            <a:avLst/>
+          </a:prstGeom>
+          <a:noFill/>
+          <a:ln/>
+        </p:spPr>
+        <p:txBody>
+          <a:bodyPr wrap="square" lIns="254" tIns="254" rIns="254" bIns="254" rtlCol="0" anchor="t">
             <a:normAutofit/>
           </a:bodyPr>
           <a:lstStyle/>
@@ -17112,7 +17423,7 @@
               <a:buNone/>
             </a:pPr>
             <a:r>
-              <a:rPr lang="en-US" sz="1550" dirty="0">
+              <a:rPr lang="en-US" sz="1320" dirty="0">
                 <a:solidFill>
                   <a:srgbClr val="17364A"/>
                 </a:solidFill>
@@ -17120,9 +17431,9 @@
                 <a:ea typeface="Aptos" pitchFamily="34" charset="-122"/>
                 <a:cs typeface="Aptos" pitchFamily="34" charset="-120"/>
               </a:rPr>
-              <a:t>Identify what could go wrong, who could be affected, what safeguards are needed, and what evidence should be reviewed before use expands.</a:t>
-            </a:r>
-            <a:endParaRPr lang="en-US" sz="1550" dirty="0"/>
+              <a:t>Identify what could go wrong, who could be affected, what safeguards are needed, and what evidence should be reviewed.</a:t>
+            </a:r>
+            <a:endParaRPr lang="en-US" sz="1320" dirty="0"/>
           </a:p>
         </p:txBody>
       </p:sp>

--- a/downloads/presentations/modules/anl-220.pptx
+++ b/downloads/presentations/modules/anl-220.pptx
@@ -3419,11 +3419,11 @@
         <p:spPr>
           <a:xfrm>
             <a:off x="7635240" y="1325880"/>
-            <a:ext cx="3474720" cy="1325880"/>
+            <a:ext cx="3474720" cy="1207008"/>
           </a:xfrm>
           <a:prstGeom prst="roundRect">
             <a:avLst>
-              <a:gd name="adj" fmla="val 8276"/>
+              <a:gd name="adj" fmla="val 9091"/>
             </a:avLst>
           </a:prstGeom>
           <a:solidFill>
@@ -3485,7 +3485,7 @@
         <p:spPr>
           <a:xfrm>
             <a:off x="7799832" y="1801368"/>
-            <a:ext cx="3145536" cy="758952"/>
+            <a:ext cx="3145536" cy="640080"/>
           </a:xfrm>
           <a:prstGeom prst="rect">
             <a:avLst/>
@@ -3525,7 +3525,7 @@
         </p:nvSpPr>
         <p:spPr>
           <a:xfrm>
-            <a:off x="7635240" y="2788920"/>
+            <a:off x="7635240" y="2670048"/>
             <a:ext cx="3474720" cy="1536192"/>
           </a:xfrm>
           <a:prstGeom prst="roundRect">
@@ -3552,8 +3552,8 @@
         </p:nvSpPr>
         <p:spPr>
           <a:xfrm>
-            <a:off x="7799832" y="2935224"/>
-            <a:ext cx="3145536" cy="256032"/>
+            <a:off x="7799832" y="2798064"/>
+            <a:ext cx="3145536" cy="237744"/>
           </a:xfrm>
           <a:prstGeom prst="rect">
             <a:avLst/>
@@ -3569,7 +3569,7 @@
               <a:buNone/>
             </a:pPr>
             <a:r>
-              <a:rPr lang="en-US" sz="1300" b="1" dirty="0">
+              <a:rPr lang="en-US" sz="1250" b="1" dirty="0">
                 <a:solidFill>
                   <a:srgbClr val="0068B7"/>
                 </a:solidFill>
@@ -3577,101 +3577,317 @@
                 <a:ea typeface="Aptos" pitchFamily="34" charset="-122"/>
                 <a:cs typeface="Aptos" pitchFamily="34" charset="-120"/>
               </a:rPr>
-              <a:t>Concept checkpoints</a:t>
-            </a:r>
-            <a:endParaRPr lang="en-US" sz="1300" dirty="0"/>
-          </a:p>
-        </p:txBody>
-      </p:sp>
-      <p:sp>
-        <p:nvSpPr>
-          <p:cNvPr id="15" name="Text 13"/>
-          <p:cNvSpPr/>
-          <p:nvPr/>
-        </p:nvSpPr>
-        <p:spPr>
-          <a:xfrm>
-            <a:off x="7818120" y="3300984"/>
-            <a:ext cx="3090672" cy="877824"/>
-          </a:xfrm>
-          <a:prstGeom prst="rect">
-            <a:avLst/>
-          </a:prstGeom>
-          <a:noFill/>
-          <a:ln/>
-        </p:spPr>
-        <p:txBody>
-          <a:bodyPr wrap="square" lIns="508" tIns="508" rIns="508" bIns="508" rtlCol="0" anchor="t">
+              <a:t>Risk control loop</a:t>
+            </a:r>
+            <a:endParaRPr lang="en-US" sz="1250" dirty="0"/>
+          </a:p>
+        </p:txBody>
+      </p:sp>
+      <p:sp>
+        <p:nvSpPr>
+          <p:cNvPr id="15" name="Shape 13"/>
+          <p:cNvSpPr/>
+          <p:nvPr/>
+        </p:nvSpPr>
+        <p:spPr>
+          <a:xfrm>
+            <a:off x="8763000" y="3351276"/>
+            <a:ext cx="164592" cy="0"/>
+          </a:xfrm>
+          <a:prstGeom prst="line">
+            <a:avLst/>
+          </a:prstGeom>
+          <a:noFill/>
+          <a:ln w="15240">
+            <a:solidFill>
+              <a:srgbClr val="8ABBD8"/>
+            </a:solidFill>
+            <a:prstDash val="solid"/>
+          </a:ln>
+        </p:spPr>
+      </p:sp>
+      <p:sp>
+        <p:nvSpPr>
+          <p:cNvPr id="16" name="Shape 14"/>
+          <p:cNvSpPr/>
+          <p:nvPr/>
+        </p:nvSpPr>
+        <p:spPr>
+          <a:xfrm>
+            <a:off x="7872984" y="3200400"/>
+            <a:ext cx="890016" cy="301752"/>
+          </a:xfrm>
+          <a:prstGeom prst="roundRect">
+            <a:avLst>
+              <a:gd name="adj" fmla="val 24242"/>
+            </a:avLst>
+          </a:prstGeom>
+          <a:solidFill>
+            <a:srgbClr val="0068B7"/>
+          </a:solidFill>
+          <a:ln w="12700">
+            <a:solidFill>
+              <a:srgbClr val="0068B7"/>
+            </a:solidFill>
+            <a:prstDash val="solid"/>
+          </a:ln>
+        </p:spPr>
+      </p:sp>
+      <p:sp>
+        <p:nvSpPr>
+          <p:cNvPr id="17" name="Text 15"/>
+          <p:cNvSpPr/>
+          <p:nvPr/>
+        </p:nvSpPr>
+        <p:spPr>
+          <a:xfrm>
+            <a:off x="7909560" y="3273552"/>
+            <a:ext cx="816864" cy="146304"/>
+          </a:xfrm>
+          <a:prstGeom prst="rect">
+            <a:avLst/>
+          </a:prstGeom>
+          <a:noFill/>
+          <a:ln/>
+        </p:spPr>
+        <p:txBody>
+          <a:bodyPr wrap="square" lIns="0" tIns="0" rIns="0" bIns="0" rtlCol="0" anchor="ctr">
             <a:normAutofit/>
           </a:bodyPr>
           <a:lstStyle/>
           <a:p>
-            <a:pPr indent="0" marL="0">
-              <a:buNone/>
-            </a:pPr>
-            <a:r>
-              <a:rPr lang="en-US" sz="1220" dirty="0">
-                <a:solidFill>
-                  <a:srgbClr val="17364A"/>
-                </a:solidFill>
-                <a:latin typeface="Aptos" pitchFamily="34" charset="0"/>
-                <a:ea typeface="Aptos" pitchFamily="34" charset="-122"/>
-                <a:cs typeface="Aptos" pitchFamily="34" charset="-120"/>
-              </a:rPr>
-              <a:t>Staff must define risk of what, during what time period, for which.</a:t>
-            </a:r>
-            <a:endParaRPr lang="en-US" sz="1220" dirty="0"/>
-          </a:p>
-          <a:p>
-            <a:pPr indent="0" marL="0">
-              <a:buNone/>
-            </a:pPr>
-            <a:r>
-              <a:rPr lang="en-US" sz="1220" dirty="0">
-                <a:solidFill>
-                  <a:srgbClr val="17364A"/>
-                </a:solidFill>
-                <a:latin typeface="Aptos" pitchFamily="34" charset="0"/>
-                <a:ea typeface="Aptos" pitchFamily="34" charset="-122"/>
-                <a:cs typeface="Aptos" pitchFamily="34" charset="-120"/>
-              </a:rPr>
-              <a:t>A model predicting hospitalization within 30 days is different.</a:t>
-            </a:r>
-            <a:endParaRPr lang="en-US" sz="1220" dirty="0"/>
-          </a:p>
-          <a:p>
-            <a:pPr indent="0" marL="0">
-              <a:buNone/>
-            </a:pPr>
-            <a:r>
-              <a:rPr lang="en-US" sz="1220" dirty="0">
-                <a:solidFill>
-                  <a:srgbClr val="17364A"/>
-                </a:solidFill>
-                <a:latin typeface="Aptos" pitchFamily="34" charset="0"/>
-                <a:ea typeface="Aptos" pitchFamily="34" charset="-122"/>
-                <a:cs typeface="Aptos" pitchFamily="34" charset="-120"/>
-              </a:rPr>
-              <a:t>Feature selection should be reviewed for both technical and.</a:t>
-            </a:r>
-            <a:endParaRPr lang="en-US" sz="1220" dirty="0"/>
-          </a:p>
-        </p:txBody>
-      </p:sp>
-      <p:sp>
-        <p:nvSpPr>
-          <p:cNvPr id="16" name="Shape 14"/>
-          <p:cNvSpPr/>
-          <p:nvPr/>
-        </p:nvSpPr>
-        <p:spPr>
-          <a:xfrm>
-            <a:off x="7635240" y="4498848"/>
-            <a:ext cx="3474720" cy="1143000"/>
+            <a:pPr algn="ctr" indent="0" marL="0">
+              <a:buNone/>
+            </a:pPr>
+            <a:r>
+              <a:rPr lang="en-US" sz="880" b="1" dirty="0">
+                <a:solidFill>
+                  <a:srgbClr val="FFFFFF"/>
+                </a:solidFill>
+                <a:latin typeface="Aptos" pitchFamily="34" charset="0"/>
+                <a:ea typeface="Aptos" pitchFamily="34" charset="-122"/>
+                <a:cs typeface="Aptos" pitchFamily="34" charset="-120"/>
+              </a:rPr>
+              <a:t>Identify</a:t>
+            </a:r>
+            <a:endParaRPr lang="en-US" sz="880" dirty="0"/>
+          </a:p>
+        </p:txBody>
+      </p:sp>
+      <p:sp>
+        <p:nvSpPr>
+          <p:cNvPr id="18" name="Shape 16"/>
+          <p:cNvSpPr/>
+          <p:nvPr/>
+        </p:nvSpPr>
+        <p:spPr>
+          <a:xfrm>
+            <a:off x="9817608" y="3351276"/>
+            <a:ext cx="164592" cy="0"/>
+          </a:xfrm>
+          <a:prstGeom prst="line">
+            <a:avLst/>
+          </a:prstGeom>
+          <a:noFill/>
+          <a:ln w="15240">
+            <a:solidFill>
+              <a:srgbClr val="8ABBD8"/>
+            </a:solidFill>
+            <a:prstDash val="solid"/>
+          </a:ln>
+        </p:spPr>
+      </p:sp>
+      <p:sp>
+        <p:nvSpPr>
+          <p:cNvPr id="19" name="Shape 17"/>
+          <p:cNvSpPr/>
+          <p:nvPr/>
+        </p:nvSpPr>
+        <p:spPr>
+          <a:xfrm>
+            <a:off x="8927592" y="3200400"/>
+            <a:ext cx="890016" cy="301752"/>
           </a:xfrm>
           <a:prstGeom prst="roundRect">
             <a:avLst>
-              <a:gd name="adj" fmla="val 9600"/>
+              <a:gd name="adj" fmla="val 24242"/>
+            </a:avLst>
+          </a:prstGeom>
+          <a:solidFill>
+            <a:srgbClr val="2F8A28"/>
+          </a:solidFill>
+          <a:ln w="12700">
+            <a:solidFill>
+              <a:srgbClr val="2F8A28"/>
+            </a:solidFill>
+            <a:prstDash val="solid"/>
+          </a:ln>
+        </p:spPr>
+      </p:sp>
+      <p:sp>
+        <p:nvSpPr>
+          <p:cNvPr id="20" name="Text 18"/>
+          <p:cNvSpPr/>
+          <p:nvPr/>
+        </p:nvSpPr>
+        <p:spPr>
+          <a:xfrm>
+            <a:off x="8964168" y="3273552"/>
+            <a:ext cx="816864" cy="146304"/>
+          </a:xfrm>
+          <a:prstGeom prst="rect">
+            <a:avLst/>
+          </a:prstGeom>
+          <a:noFill/>
+          <a:ln/>
+        </p:spPr>
+        <p:txBody>
+          <a:bodyPr wrap="square" lIns="0" tIns="0" rIns="0" bIns="0" rtlCol="0" anchor="ctr">
+            <a:normAutofit/>
+          </a:bodyPr>
+          <a:lstStyle/>
+          <a:p>
+            <a:pPr algn="ctr" indent="0" marL="0">
+              <a:buNone/>
+            </a:pPr>
+            <a:r>
+              <a:rPr lang="en-US" sz="880" b="1" dirty="0">
+                <a:solidFill>
+                  <a:srgbClr val="FFFFFF"/>
+                </a:solidFill>
+                <a:latin typeface="Aptos" pitchFamily="34" charset="0"/>
+                <a:ea typeface="Aptos" pitchFamily="34" charset="-122"/>
+                <a:cs typeface="Aptos" pitchFamily="34" charset="-120"/>
+              </a:rPr>
+              <a:t>Control</a:t>
+            </a:r>
+            <a:endParaRPr lang="en-US" sz="880" dirty="0"/>
+          </a:p>
+        </p:txBody>
+      </p:sp>
+      <p:sp>
+        <p:nvSpPr>
+          <p:cNvPr id="21" name="Shape 19"/>
+          <p:cNvSpPr/>
+          <p:nvPr/>
+        </p:nvSpPr>
+        <p:spPr>
+          <a:xfrm>
+            <a:off x="9982200" y="3200400"/>
+            <a:ext cx="890016" cy="301752"/>
+          </a:xfrm>
+          <a:prstGeom prst="roundRect">
+            <a:avLst>
+              <a:gd name="adj" fmla="val 24242"/>
+            </a:avLst>
+          </a:prstGeom>
+          <a:solidFill>
+            <a:srgbClr val="6A4CA3"/>
+          </a:solidFill>
+          <a:ln w="12700">
+            <a:solidFill>
+              <a:srgbClr val="6A4CA3"/>
+            </a:solidFill>
+            <a:prstDash val="solid"/>
+          </a:ln>
+        </p:spPr>
+      </p:sp>
+      <p:sp>
+        <p:nvSpPr>
+          <p:cNvPr id="22" name="Text 20"/>
+          <p:cNvSpPr/>
+          <p:nvPr/>
+        </p:nvSpPr>
+        <p:spPr>
+          <a:xfrm>
+            <a:off x="10018776" y="3273552"/>
+            <a:ext cx="816864" cy="146304"/>
+          </a:xfrm>
+          <a:prstGeom prst="rect">
+            <a:avLst/>
+          </a:prstGeom>
+          <a:noFill/>
+          <a:ln/>
+        </p:spPr>
+        <p:txBody>
+          <a:bodyPr wrap="square" lIns="0" tIns="0" rIns="0" bIns="0" rtlCol="0" anchor="ctr">
+            <a:normAutofit/>
+          </a:bodyPr>
+          <a:lstStyle/>
+          <a:p>
+            <a:pPr algn="ctr" indent="0" marL="0">
+              <a:buNone/>
+            </a:pPr>
+            <a:r>
+              <a:rPr lang="en-US" sz="880" b="1" dirty="0">
+                <a:solidFill>
+                  <a:srgbClr val="FFFFFF"/>
+                </a:solidFill>
+                <a:latin typeface="Aptos" pitchFamily="34" charset="0"/>
+                <a:ea typeface="Aptos" pitchFamily="34" charset="-122"/>
+                <a:cs typeface="Aptos" pitchFamily="34" charset="-120"/>
+              </a:rPr>
+              <a:t>Monitor</a:t>
+            </a:r>
+            <a:endParaRPr lang="en-US" sz="880" dirty="0"/>
+          </a:p>
+        </p:txBody>
+      </p:sp>
+      <p:sp>
+        <p:nvSpPr>
+          <p:cNvPr id="23" name="Text 21"/>
+          <p:cNvSpPr/>
+          <p:nvPr/>
+        </p:nvSpPr>
+        <p:spPr>
+          <a:xfrm>
+            <a:off x="7854696" y="3694176"/>
+            <a:ext cx="3035808" cy="365760"/>
+          </a:xfrm>
+          <a:prstGeom prst="rect">
+            <a:avLst/>
+          </a:prstGeom>
+          <a:noFill/>
+          <a:ln/>
+        </p:spPr>
+        <p:txBody>
+          <a:bodyPr wrap="square" lIns="254" tIns="254" rIns="254" bIns="254" rtlCol="0" anchor="t">
+            <a:normAutofit/>
+          </a:bodyPr>
+          <a:lstStyle/>
+          <a:p>
+            <a:pPr indent="0" marL="0">
+              <a:buNone/>
+            </a:pPr>
+            <a:r>
+              <a:rPr lang="en-US" sz="1120" dirty="0">
+                <a:solidFill>
+                  <a:srgbClr val="17364A"/>
+                </a:solidFill>
+                <a:latin typeface="Aptos" pitchFamily="34" charset="0"/>
+                <a:ea typeface="Aptos" pitchFamily="34" charset="-122"/>
+                <a:cs typeface="Aptos" pitchFamily="34" charset="-120"/>
+              </a:rPr>
+              <a:t>Responsible use depends on finding risks early, applying safeguards, and watching for drift or harm over time.</a:t>
+            </a:r>
+            <a:endParaRPr lang="en-US" sz="1120" dirty="0"/>
+          </a:p>
+        </p:txBody>
+      </p:sp>
+      <p:sp>
+        <p:nvSpPr>
+          <p:cNvPr id="24" name="Shape 22"/>
+          <p:cNvSpPr/>
+          <p:nvPr/>
+        </p:nvSpPr>
+        <p:spPr>
+          <a:xfrm>
+            <a:off x="7635240" y="4343400"/>
+            <a:ext cx="3474720" cy="1255471"/>
+          </a:xfrm>
+          <a:prstGeom prst="roundRect">
+            <a:avLst>
+              <a:gd name="adj" fmla="val 8740"/>
             </a:avLst>
           </a:prstGeom>
           <a:solidFill>
@@ -3687,13 +3903,13 @@
       </p:sp>
       <p:sp>
         <p:nvSpPr>
-          <p:cNvPr id="17" name="Text 15"/>
-          <p:cNvSpPr/>
-          <p:nvPr/>
-        </p:nvSpPr>
-        <p:spPr>
-          <a:xfrm>
-            <a:off x="7799832" y="4645152"/>
+          <p:cNvPr id="25" name="Text 23"/>
+          <p:cNvSpPr/>
+          <p:nvPr/>
+        </p:nvSpPr>
+        <p:spPr>
+          <a:xfrm>
+            <a:off x="7799832" y="4489704"/>
             <a:ext cx="3145536" cy="256032"/>
           </a:xfrm>
           <a:prstGeom prst="rect">
@@ -3726,14 +3942,14 @@
       </p:sp>
       <p:sp>
         <p:nvSpPr>
-          <p:cNvPr id="18" name="Text 16"/>
-          <p:cNvSpPr/>
-          <p:nvPr/>
-        </p:nvSpPr>
-        <p:spPr>
-          <a:xfrm>
-            <a:off x="7799832" y="4974336"/>
-            <a:ext cx="3145536" cy="576072"/>
+          <p:cNvPr id="26" name="Text 24"/>
+          <p:cNvSpPr/>
+          <p:nvPr/>
+        </p:nvSpPr>
+        <p:spPr>
+          <a:xfrm>
+            <a:off x="7799832" y="4818888"/>
+            <a:ext cx="3145536" cy="688543"/>
           </a:xfrm>
           <a:prstGeom prst="rect">
             <a:avLst/>
@@ -3759,7 +3975,7 @@
                 <a:ea typeface="Aptos" pitchFamily="34" charset="-122"/>
                 <a:cs typeface="Aptos" pitchFamily="34" charset="-120"/>
               </a:rPr>
-              <a:t>Identify what could go wrong, who could be affected, what safeguards are needed, and what evidence should be reviewed.</a:t>
+              <a:t>Identify what could go wrong, who could be affected, what safeguards are needed, and what evidence should be reviewed before use.</a:t>
             </a:r>
             <a:endParaRPr lang="en-US" sz="1320" dirty="0"/>
           </a:p>
@@ -4128,11 +4344,11 @@
         <p:spPr>
           <a:xfrm>
             <a:off x="7635240" y="1325880"/>
-            <a:ext cx="3474720" cy="1325880"/>
+            <a:ext cx="3474720" cy="1207008"/>
           </a:xfrm>
           <a:prstGeom prst="roundRect">
             <a:avLst>
-              <a:gd name="adj" fmla="val 8276"/>
+              <a:gd name="adj" fmla="val 9091"/>
             </a:avLst>
           </a:prstGeom>
           <a:solidFill>
@@ -4194,7 +4410,7 @@
         <p:spPr>
           <a:xfrm>
             <a:off x="7799832" y="1801368"/>
-            <a:ext cx="3145536" cy="758952"/>
+            <a:ext cx="3145536" cy="640080"/>
           </a:xfrm>
           <a:prstGeom prst="rect">
             <a:avLst/>
@@ -4234,7 +4450,7 @@
         </p:nvSpPr>
         <p:spPr>
           <a:xfrm>
-            <a:off x="7635240" y="2788920"/>
+            <a:off x="7635240" y="2670048"/>
             <a:ext cx="3474720" cy="1536192"/>
           </a:xfrm>
           <a:prstGeom prst="roundRect">
@@ -4261,7 +4477,7 @@
         </p:nvSpPr>
         <p:spPr>
           <a:xfrm>
-            <a:off x="7799832" y="2935224"/>
+            <a:off x="7799832" y="2816352"/>
             <a:ext cx="3145536" cy="256032"/>
           </a:xfrm>
           <a:prstGeom prst="rect">
@@ -4300,7 +4516,7 @@
         </p:nvSpPr>
         <p:spPr>
           <a:xfrm>
-            <a:off x="7818120" y="3300984"/>
+            <a:off x="7818120" y="3182112"/>
             <a:ext cx="3090672" cy="877824"/>
           </a:xfrm>
           <a:prstGeom prst="rect">
@@ -4375,12 +4591,12 @@
         </p:nvSpPr>
         <p:spPr>
           <a:xfrm>
-            <a:off x="7635240" y="4498848"/>
-            <a:ext cx="3474720" cy="1143000"/>
+            <a:off x="7635240" y="4343400"/>
+            <a:ext cx="3474720" cy="1255471"/>
           </a:xfrm>
           <a:prstGeom prst="roundRect">
             <a:avLst>
-              <a:gd name="adj" fmla="val 9600"/>
+              <a:gd name="adj" fmla="val 8740"/>
             </a:avLst>
           </a:prstGeom>
           <a:solidFill>
@@ -4402,7 +4618,7 @@
         </p:nvSpPr>
         <p:spPr>
           <a:xfrm>
-            <a:off x="7799832" y="4645152"/>
+            <a:off x="7799832" y="4489704"/>
             <a:ext cx="3145536" cy="256032"/>
           </a:xfrm>
           <a:prstGeom prst="rect">
@@ -4441,8 +4657,8 @@
         </p:nvSpPr>
         <p:spPr>
           <a:xfrm>
-            <a:off x="7799832" y="4974336"/>
-            <a:ext cx="3145536" cy="576072"/>
+            <a:off x="7799832" y="4818888"/>
+            <a:ext cx="3145536" cy="688543"/>
           </a:xfrm>
           <a:prstGeom prst="rect">
             <a:avLst/>
@@ -4468,7 +4684,7 @@
                 <a:ea typeface="Aptos" pitchFamily="34" charset="-122"/>
                 <a:cs typeface="Aptos" pitchFamily="34" charset="-120"/>
               </a:rPr>
-              <a:t>Identify what could go wrong, who could be affected, what safeguards are needed, and what evidence should be reviewed.</a:t>
+              <a:t>Identify what could go wrong, who could be affected, what safeguards are needed, and what evidence should be reviewed before use.</a:t>
             </a:r>
             <a:endParaRPr lang="en-US" sz="1320" dirty="0"/>
           </a:p>
@@ -4837,11 +5053,11 @@
         <p:spPr>
           <a:xfrm>
             <a:off x="7635240" y="1325880"/>
-            <a:ext cx="3474720" cy="1325880"/>
+            <a:ext cx="3474720" cy="1207008"/>
           </a:xfrm>
           <a:prstGeom prst="roundRect">
             <a:avLst>
-              <a:gd name="adj" fmla="val 8276"/>
+              <a:gd name="adj" fmla="val 9091"/>
             </a:avLst>
           </a:prstGeom>
           <a:solidFill>
@@ -4903,7 +5119,7 @@
         <p:spPr>
           <a:xfrm>
             <a:off x="7799832" y="1801368"/>
-            <a:ext cx="3145536" cy="758952"/>
+            <a:ext cx="3145536" cy="640080"/>
           </a:xfrm>
           <a:prstGeom prst="rect">
             <a:avLst/>
@@ -4943,7 +5159,7 @@
         </p:nvSpPr>
         <p:spPr>
           <a:xfrm>
-            <a:off x="7635240" y="2788920"/>
+            <a:off x="7635240" y="2670048"/>
             <a:ext cx="3474720" cy="1536192"/>
           </a:xfrm>
           <a:prstGeom prst="roundRect">
@@ -4970,7 +5186,7 @@
         </p:nvSpPr>
         <p:spPr>
           <a:xfrm>
-            <a:off x="7799832" y="2935224"/>
+            <a:off x="7799832" y="2816352"/>
             <a:ext cx="3145536" cy="256032"/>
           </a:xfrm>
           <a:prstGeom prst="rect">
@@ -5009,7 +5225,7 @@
         </p:nvSpPr>
         <p:spPr>
           <a:xfrm>
-            <a:off x="7818120" y="3300984"/>
+            <a:off x="7818120" y="3182112"/>
             <a:ext cx="3090672" cy="877824"/>
           </a:xfrm>
           <a:prstGeom prst="rect">
@@ -5084,12 +5300,12 @@
         </p:nvSpPr>
         <p:spPr>
           <a:xfrm>
-            <a:off x="7635240" y="4498848"/>
-            <a:ext cx="3474720" cy="1143000"/>
+            <a:off x="7635240" y="4343400"/>
+            <a:ext cx="3474720" cy="1255471"/>
           </a:xfrm>
           <a:prstGeom prst="roundRect">
             <a:avLst>
-              <a:gd name="adj" fmla="val 9600"/>
+              <a:gd name="adj" fmla="val 8740"/>
             </a:avLst>
           </a:prstGeom>
           <a:solidFill>
@@ -5111,7 +5327,7 @@
         </p:nvSpPr>
         <p:spPr>
           <a:xfrm>
-            <a:off x="7799832" y="4645152"/>
+            <a:off x="7799832" y="4489704"/>
             <a:ext cx="3145536" cy="256032"/>
           </a:xfrm>
           <a:prstGeom prst="rect">
@@ -5150,8 +5366,8 @@
         </p:nvSpPr>
         <p:spPr>
           <a:xfrm>
-            <a:off x="7799832" y="4974336"/>
-            <a:ext cx="3145536" cy="576072"/>
+            <a:off x="7799832" y="4818888"/>
+            <a:ext cx="3145536" cy="688543"/>
           </a:xfrm>
           <a:prstGeom prst="rect">
             <a:avLst/>
@@ -5177,7 +5393,7 @@
                 <a:ea typeface="Aptos" pitchFamily="34" charset="-122"/>
                 <a:cs typeface="Aptos" pitchFamily="34" charset="-120"/>
               </a:rPr>
-              <a:t>Identify what could go wrong, who could be affected, what safeguards are needed, and what evidence should be reviewed.</a:t>
+              <a:t>Identify what could go wrong, who could be affected, what safeguards are needed, and what evidence should be reviewed before use.</a:t>
             </a:r>
             <a:endParaRPr lang="en-US" sz="1320" dirty="0"/>
           </a:p>
@@ -5546,11 +5762,11 @@
         <p:spPr>
           <a:xfrm>
             <a:off x="7635240" y="1325880"/>
-            <a:ext cx="3474720" cy="1325880"/>
+            <a:ext cx="3474720" cy="1207008"/>
           </a:xfrm>
           <a:prstGeom prst="roundRect">
             <a:avLst>
-              <a:gd name="adj" fmla="val 8276"/>
+              <a:gd name="adj" fmla="val 9091"/>
             </a:avLst>
           </a:prstGeom>
           <a:solidFill>
@@ -5612,7 +5828,7 @@
         <p:spPr>
           <a:xfrm>
             <a:off x="7799832" y="1801368"/>
-            <a:ext cx="3145536" cy="758952"/>
+            <a:ext cx="3145536" cy="640080"/>
           </a:xfrm>
           <a:prstGeom prst="rect">
             <a:avLst/>
@@ -5652,7 +5868,7 @@
         </p:nvSpPr>
         <p:spPr>
           <a:xfrm>
-            <a:off x="7635240" y="2788920"/>
+            <a:off x="7635240" y="2670048"/>
             <a:ext cx="3474720" cy="1536192"/>
           </a:xfrm>
           <a:prstGeom prst="roundRect">
@@ -5679,7 +5895,7 @@
         </p:nvSpPr>
         <p:spPr>
           <a:xfrm>
-            <a:off x="7799832" y="2935224"/>
+            <a:off x="7799832" y="2816352"/>
             <a:ext cx="3145536" cy="256032"/>
           </a:xfrm>
           <a:prstGeom prst="rect">
@@ -5718,7 +5934,7 @@
         </p:nvSpPr>
         <p:spPr>
           <a:xfrm>
-            <a:off x="7818120" y="3300984"/>
+            <a:off x="7818120" y="3182112"/>
             <a:ext cx="3090672" cy="877824"/>
           </a:xfrm>
           <a:prstGeom prst="rect">
@@ -5793,12 +6009,12 @@
         </p:nvSpPr>
         <p:spPr>
           <a:xfrm>
-            <a:off x="7635240" y="4498848"/>
-            <a:ext cx="3474720" cy="1143000"/>
+            <a:off x="7635240" y="4343400"/>
+            <a:ext cx="3474720" cy="1255471"/>
           </a:xfrm>
           <a:prstGeom prst="roundRect">
             <a:avLst>
-              <a:gd name="adj" fmla="val 9600"/>
+              <a:gd name="adj" fmla="val 8740"/>
             </a:avLst>
           </a:prstGeom>
           <a:solidFill>
@@ -5820,7 +6036,7 @@
         </p:nvSpPr>
         <p:spPr>
           <a:xfrm>
-            <a:off x="7799832" y="4645152"/>
+            <a:off x="7799832" y="4489704"/>
             <a:ext cx="3145536" cy="256032"/>
           </a:xfrm>
           <a:prstGeom prst="rect">
@@ -5859,8 +6075,8 @@
         </p:nvSpPr>
         <p:spPr>
           <a:xfrm>
-            <a:off x="7799832" y="4974336"/>
-            <a:ext cx="3145536" cy="576072"/>
+            <a:off x="7799832" y="4818888"/>
+            <a:ext cx="3145536" cy="688543"/>
           </a:xfrm>
           <a:prstGeom prst="rect">
             <a:avLst/>
@@ -5886,7 +6102,7 @@
                 <a:ea typeface="Aptos" pitchFamily="34" charset="-122"/>
                 <a:cs typeface="Aptos" pitchFamily="34" charset="-120"/>
               </a:rPr>
-              <a:t>Identify what could go wrong, who could be affected, what safeguards are needed, and what evidence should be reviewed.</a:t>
+              <a:t>Identify what could go wrong, who could be affected, what safeguards are needed, and what evidence should be reviewed before use.</a:t>
             </a:r>
             <a:endParaRPr lang="en-US" sz="1320" dirty="0"/>
           </a:p>
@@ -6255,11 +6471,11 @@
         <p:spPr>
           <a:xfrm>
             <a:off x="7635240" y="1325880"/>
-            <a:ext cx="3474720" cy="1325880"/>
+            <a:ext cx="3474720" cy="1255471"/>
           </a:xfrm>
           <a:prstGeom prst="roundRect">
             <a:avLst>
-              <a:gd name="adj" fmla="val 8276"/>
+              <a:gd name="adj" fmla="val 8740"/>
             </a:avLst>
           </a:prstGeom>
           <a:solidFill>
@@ -6321,7 +6537,7 @@
         <p:spPr>
           <a:xfrm>
             <a:off x="7799832" y="1801368"/>
-            <a:ext cx="3145536" cy="758952"/>
+            <a:ext cx="3145536" cy="688543"/>
           </a:xfrm>
           <a:prstGeom prst="rect">
             <a:avLst/>
@@ -6361,7 +6577,7 @@
         </p:nvSpPr>
         <p:spPr>
           <a:xfrm>
-            <a:off x="7635240" y="2788920"/>
+            <a:off x="7635240" y="2718511"/>
             <a:ext cx="3474720" cy="1536192"/>
           </a:xfrm>
           <a:prstGeom prst="roundRect">
@@ -6388,7 +6604,7 @@
         </p:nvSpPr>
         <p:spPr>
           <a:xfrm>
-            <a:off x="7799832" y="2935224"/>
+            <a:off x="7799832" y="2864815"/>
             <a:ext cx="3145536" cy="256032"/>
           </a:xfrm>
           <a:prstGeom prst="rect">
@@ -6427,7 +6643,7 @@
         </p:nvSpPr>
         <p:spPr>
           <a:xfrm>
-            <a:off x="7818120" y="3300984"/>
+            <a:off x="7818120" y="3230575"/>
             <a:ext cx="3090672" cy="877824"/>
           </a:xfrm>
           <a:prstGeom prst="rect">
@@ -6502,12 +6718,12 @@
         </p:nvSpPr>
         <p:spPr>
           <a:xfrm>
-            <a:off x="7635240" y="4498848"/>
-            <a:ext cx="3474720" cy="1143000"/>
+            <a:off x="7635240" y="4391863"/>
+            <a:ext cx="3474720" cy="1255471"/>
           </a:xfrm>
           <a:prstGeom prst="roundRect">
             <a:avLst>
-              <a:gd name="adj" fmla="val 9600"/>
+              <a:gd name="adj" fmla="val 8740"/>
             </a:avLst>
           </a:prstGeom>
           <a:solidFill>
@@ -6529,7 +6745,7 @@
         </p:nvSpPr>
         <p:spPr>
           <a:xfrm>
-            <a:off x="7799832" y="4645152"/>
+            <a:off x="7799832" y="4538167"/>
             <a:ext cx="3145536" cy="256032"/>
           </a:xfrm>
           <a:prstGeom prst="rect">
@@ -6568,8 +6784,8 @@
         </p:nvSpPr>
         <p:spPr>
           <a:xfrm>
-            <a:off x="7799832" y="4974336"/>
-            <a:ext cx="3145536" cy="576072"/>
+            <a:off x="7799832" y="4867351"/>
+            <a:ext cx="3145536" cy="688543"/>
           </a:xfrm>
           <a:prstGeom prst="rect">
             <a:avLst/>
@@ -6595,7 +6811,7 @@
                 <a:ea typeface="Aptos" pitchFamily="34" charset="-122"/>
                 <a:cs typeface="Aptos" pitchFamily="34" charset="-120"/>
               </a:rPr>
-              <a:t>Identify what could go wrong, who could be affected, what safeguards are needed, and what evidence should be reviewed.</a:t>
+              <a:t>Identify what could go wrong, who could be affected, what safeguards are needed, and what evidence should be reviewed before use.</a:t>
             </a:r>
             <a:endParaRPr lang="en-US" sz="1320" dirty="0"/>
           </a:p>
@@ -6964,11 +7180,11 @@
         <p:spPr>
           <a:xfrm>
             <a:off x="7635240" y="1325880"/>
-            <a:ext cx="3474720" cy="1325880"/>
+            <a:ext cx="3474720" cy="1207008"/>
           </a:xfrm>
           <a:prstGeom prst="roundRect">
             <a:avLst>
-              <a:gd name="adj" fmla="val 8276"/>
+              <a:gd name="adj" fmla="val 9091"/>
             </a:avLst>
           </a:prstGeom>
           <a:solidFill>
@@ -7030,7 +7246,7 @@
         <p:spPr>
           <a:xfrm>
             <a:off x="7799832" y="1801368"/>
-            <a:ext cx="3145536" cy="758952"/>
+            <a:ext cx="3145536" cy="640080"/>
           </a:xfrm>
           <a:prstGeom prst="rect">
             <a:avLst/>
@@ -7070,7 +7286,7 @@
         </p:nvSpPr>
         <p:spPr>
           <a:xfrm>
-            <a:off x="7635240" y="2788920"/>
+            <a:off x="7635240" y="2670048"/>
             <a:ext cx="3474720" cy="1536192"/>
           </a:xfrm>
           <a:prstGeom prst="roundRect">
@@ -7097,7 +7313,7 @@
         </p:nvSpPr>
         <p:spPr>
           <a:xfrm>
-            <a:off x="7799832" y="2935224"/>
+            <a:off x="7799832" y="2816352"/>
             <a:ext cx="3145536" cy="256032"/>
           </a:xfrm>
           <a:prstGeom prst="rect">
@@ -7136,7 +7352,7 @@
         </p:nvSpPr>
         <p:spPr>
           <a:xfrm>
-            <a:off x="7818120" y="3300984"/>
+            <a:off x="7818120" y="3182112"/>
             <a:ext cx="3090672" cy="877824"/>
           </a:xfrm>
           <a:prstGeom prst="rect">
@@ -7211,12 +7427,12 @@
         </p:nvSpPr>
         <p:spPr>
           <a:xfrm>
-            <a:off x="7635240" y="4498848"/>
-            <a:ext cx="3474720" cy="1143000"/>
+            <a:off x="7635240" y="4343400"/>
+            <a:ext cx="3474720" cy="1255471"/>
           </a:xfrm>
           <a:prstGeom prst="roundRect">
             <a:avLst>
-              <a:gd name="adj" fmla="val 9600"/>
+              <a:gd name="adj" fmla="val 8740"/>
             </a:avLst>
           </a:prstGeom>
           <a:solidFill>
@@ -7238,7 +7454,7 @@
         </p:nvSpPr>
         <p:spPr>
           <a:xfrm>
-            <a:off x="7799832" y="4645152"/>
+            <a:off x="7799832" y="4489704"/>
             <a:ext cx="3145536" cy="256032"/>
           </a:xfrm>
           <a:prstGeom prst="rect">
@@ -7277,8 +7493,8 @@
         </p:nvSpPr>
         <p:spPr>
           <a:xfrm>
-            <a:off x="7799832" y="4974336"/>
-            <a:ext cx="3145536" cy="576072"/>
+            <a:off x="7799832" y="4818888"/>
+            <a:ext cx="3145536" cy="688543"/>
           </a:xfrm>
           <a:prstGeom prst="rect">
             <a:avLst/>
@@ -7304,7 +7520,7 @@
                 <a:ea typeface="Aptos" pitchFamily="34" charset="-122"/>
                 <a:cs typeface="Aptos" pitchFamily="34" charset="-120"/>
               </a:rPr>
-              <a:t>Identify what could go wrong, who could be affected, what safeguards are needed, and what evidence should be reviewed.</a:t>
+              <a:t>Identify what could go wrong, who could be affected, what safeguards are needed, and what evidence should be reviewed before use.</a:t>
             </a:r>
             <a:endParaRPr lang="en-US" sz="1320" dirty="0"/>
           </a:p>
@@ -7656,11 +7872,11 @@
         <p:spPr>
           <a:xfrm>
             <a:off x="7635240" y="1325880"/>
-            <a:ext cx="3474720" cy="1325880"/>
+            <a:ext cx="3474720" cy="1207008"/>
           </a:xfrm>
           <a:prstGeom prst="roundRect">
             <a:avLst>
-              <a:gd name="adj" fmla="val 8276"/>
+              <a:gd name="adj" fmla="val 9091"/>
             </a:avLst>
           </a:prstGeom>
           <a:solidFill>
@@ -7722,7 +7938,7 @@
         <p:spPr>
           <a:xfrm>
             <a:off x="7799832" y="1801368"/>
-            <a:ext cx="3145536" cy="758952"/>
+            <a:ext cx="3145536" cy="640080"/>
           </a:xfrm>
           <a:prstGeom prst="rect">
             <a:avLst/>
@@ -7762,7 +7978,7 @@
         </p:nvSpPr>
         <p:spPr>
           <a:xfrm>
-            <a:off x="7635240" y="2788920"/>
+            <a:off x="7635240" y="2670048"/>
             <a:ext cx="3474720" cy="1536192"/>
           </a:xfrm>
           <a:prstGeom prst="roundRect">
@@ -7789,7 +8005,7 @@
         </p:nvSpPr>
         <p:spPr>
           <a:xfrm>
-            <a:off x="7799832" y="2935224"/>
+            <a:off x="7799832" y="2816352"/>
             <a:ext cx="3145536" cy="256032"/>
           </a:xfrm>
           <a:prstGeom prst="rect">
@@ -7828,7 +8044,7 @@
         </p:nvSpPr>
         <p:spPr>
           <a:xfrm>
-            <a:off x="7818120" y="3300984"/>
+            <a:off x="7818120" y="3182112"/>
             <a:ext cx="3090672" cy="877824"/>
           </a:xfrm>
           <a:prstGeom prst="rect">
@@ -7886,12 +8102,12 @@
         </p:nvSpPr>
         <p:spPr>
           <a:xfrm>
-            <a:off x="7635240" y="4498848"/>
-            <a:ext cx="3474720" cy="1143000"/>
+            <a:off x="7635240" y="4343400"/>
+            <a:ext cx="3474720" cy="1255471"/>
           </a:xfrm>
           <a:prstGeom prst="roundRect">
             <a:avLst>
-              <a:gd name="adj" fmla="val 9600"/>
+              <a:gd name="adj" fmla="val 8740"/>
             </a:avLst>
           </a:prstGeom>
           <a:solidFill>
@@ -7913,7 +8129,7 @@
         </p:nvSpPr>
         <p:spPr>
           <a:xfrm>
-            <a:off x="7799832" y="4645152"/>
+            <a:off x="7799832" y="4489704"/>
             <a:ext cx="3145536" cy="256032"/>
           </a:xfrm>
           <a:prstGeom prst="rect">
@@ -7952,8 +8168,8 @@
         </p:nvSpPr>
         <p:spPr>
           <a:xfrm>
-            <a:off x="7799832" y="4974336"/>
-            <a:ext cx="3145536" cy="576072"/>
+            <a:off x="7799832" y="4818888"/>
+            <a:ext cx="3145536" cy="688543"/>
           </a:xfrm>
           <a:prstGeom prst="rect">
             <a:avLst/>
@@ -7979,7 +8195,7 @@
                 <a:ea typeface="Aptos" pitchFamily="34" charset="-122"/>
                 <a:cs typeface="Aptos" pitchFamily="34" charset="-120"/>
               </a:rPr>
-              <a:t>Identify what could go wrong, who could be affected, what safeguards are needed, and what evidence should be reviewed.</a:t>
+              <a:t>Identify what could go wrong, who could be affected, what safeguards are needed, and what evidence should be reviewed before use.</a:t>
             </a:r>
             <a:endParaRPr lang="en-US" sz="1320" dirty="0"/>
           </a:p>
@@ -8348,11 +8564,11 @@
         <p:spPr>
           <a:xfrm>
             <a:off x="7635240" y="1325880"/>
-            <a:ext cx="3474720" cy="1325880"/>
+            <a:ext cx="3474720" cy="1207008"/>
           </a:xfrm>
           <a:prstGeom prst="roundRect">
             <a:avLst>
-              <a:gd name="adj" fmla="val 8276"/>
+              <a:gd name="adj" fmla="val 9091"/>
             </a:avLst>
           </a:prstGeom>
           <a:solidFill>
@@ -8414,7 +8630,7 @@
         <p:spPr>
           <a:xfrm>
             <a:off x="7799832" y="1801368"/>
-            <a:ext cx="3145536" cy="758952"/>
+            <a:ext cx="3145536" cy="640080"/>
           </a:xfrm>
           <a:prstGeom prst="rect">
             <a:avLst/>
@@ -8454,12 +8670,12 @@
         </p:nvSpPr>
         <p:spPr>
           <a:xfrm>
-            <a:off x="7635240" y="2788920"/>
-            <a:ext cx="3474720" cy="1536192"/>
+            <a:off x="7635240" y="2670048"/>
+            <a:ext cx="3474720" cy="1377086"/>
           </a:xfrm>
           <a:prstGeom prst="roundRect">
             <a:avLst>
-              <a:gd name="adj" fmla="val 7143"/>
+              <a:gd name="adj" fmla="val 7968"/>
             </a:avLst>
           </a:prstGeom>
           <a:solidFill>
@@ -8481,7 +8697,7 @@
         </p:nvSpPr>
         <p:spPr>
           <a:xfrm>
-            <a:off x="7799832" y="2935224"/>
+            <a:off x="7799832" y="2816352"/>
             <a:ext cx="3145536" cy="256032"/>
           </a:xfrm>
           <a:prstGeom prst="rect">
@@ -8520,8 +8736,8 @@
         </p:nvSpPr>
         <p:spPr>
           <a:xfrm>
-            <a:off x="7818120" y="3300984"/>
-            <a:ext cx="3090672" cy="877824"/>
+            <a:off x="7818120" y="3182112"/>
+            <a:ext cx="3090672" cy="718718"/>
           </a:xfrm>
           <a:prstGeom prst="rect">
             <a:avLst/>
@@ -8578,12 +8794,12 @@
         </p:nvSpPr>
         <p:spPr>
           <a:xfrm>
-            <a:off x="7635240" y="4498848"/>
-            <a:ext cx="3474720" cy="1143000"/>
+            <a:off x="7635240" y="4184294"/>
+            <a:ext cx="3474720" cy="1466698"/>
           </a:xfrm>
           <a:prstGeom prst="roundRect">
             <a:avLst>
-              <a:gd name="adj" fmla="val 9600"/>
+              <a:gd name="adj" fmla="val 7481"/>
             </a:avLst>
           </a:prstGeom>
           <a:solidFill>
@@ -8605,7 +8821,7 @@
         </p:nvSpPr>
         <p:spPr>
           <a:xfrm>
-            <a:off x="7799832" y="4645152"/>
+            <a:off x="7799832" y="4330598"/>
             <a:ext cx="3145536" cy="256032"/>
           </a:xfrm>
           <a:prstGeom prst="rect">
@@ -8644,8 +8860,8 @@
         </p:nvSpPr>
         <p:spPr>
           <a:xfrm>
-            <a:off x="7799832" y="4974336"/>
-            <a:ext cx="3145536" cy="576072"/>
+            <a:off x="7799832" y="4659782"/>
+            <a:ext cx="3145536" cy="899770"/>
           </a:xfrm>
           <a:prstGeom prst="rect">
             <a:avLst/>
@@ -8671,7 +8887,7 @@
                 <a:ea typeface="Aptos" pitchFamily="34" charset="-122"/>
                 <a:cs typeface="Aptos" pitchFamily="34" charset="-120"/>
               </a:rPr>
-              <a:t>Use the assignment to test whether you can explain the concept, apply it to a realistic public health situation, and.</a:t>
+              <a:t>Use the assignment to test whether you can explain the concept, apply it to a realistic public health situation, and identify what would need review before the work moves forward.</a:t>
             </a:r>
             <a:endParaRPr lang="en-US" sz="1320" dirty="0"/>
           </a:p>
@@ -9040,11 +9256,11 @@
         <p:spPr>
           <a:xfrm>
             <a:off x="7635240" y="1325880"/>
-            <a:ext cx="3474720" cy="1325880"/>
+            <a:ext cx="3474720" cy="1207008"/>
           </a:xfrm>
           <a:prstGeom prst="roundRect">
             <a:avLst>
-              <a:gd name="adj" fmla="val 8276"/>
+              <a:gd name="adj" fmla="val 9091"/>
             </a:avLst>
           </a:prstGeom>
           <a:solidFill>
@@ -9106,7 +9322,7 @@
         <p:spPr>
           <a:xfrm>
             <a:off x="7799832" y="1801368"/>
-            <a:ext cx="3145536" cy="758952"/>
+            <a:ext cx="3145536" cy="640080"/>
           </a:xfrm>
           <a:prstGeom prst="rect">
             <a:avLst/>
@@ -9146,7 +9362,7 @@
         </p:nvSpPr>
         <p:spPr>
           <a:xfrm>
-            <a:off x="7635240" y="2788920"/>
+            <a:off x="7635240" y="2670048"/>
             <a:ext cx="3474720" cy="1536192"/>
           </a:xfrm>
           <a:prstGeom prst="roundRect">
@@ -9173,7 +9389,7 @@
         </p:nvSpPr>
         <p:spPr>
           <a:xfrm>
-            <a:off x="7799832" y="2935224"/>
+            <a:off x="7799832" y="2816352"/>
             <a:ext cx="3145536" cy="256032"/>
           </a:xfrm>
           <a:prstGeom prst="rect">
@@ -9212,7 +9428,7 @@
         </p:nvSpPr>
         <p:spPr>
           <a:xfrm>
-            <a:off x="7818120" y="3300984"/>
+            <a:off x="7818120" y="3182112"/>
             <a:ext cx="3090672" cy="877824"/>
           </a:xfrm>
           <a:prstGeom prst="rect">
@@ -9287,12 +9503,12 @@
         </p:nvSpPr>
         <p:spPr>
           <a:xfrm>
-            <a:off x="7635240" y="4498848"/>
-            <a:ext cx="3474720" cy="1143000"/>
+            <a:off x="7635240" y="4343400"/>
+            <a:ext cx="3474720" cy="1255471"/>
           </a:xfrm>
           <a:prstGeom prst="roundRect">
             <a:avLst>
-              <a:gd name="adj" fmla="val 9600"/>
+              <a:gd name="adj" fmla="val 8740"/>
             </a:avLst>
           </a:prstGeom>
           <a:solidFill>
@@ -9314,7 +9530,7 @@
         </p:nvSpPr>
         <p:spPr>
           <a:xfrm>
-            <a:off x="7799832" y="4645152"/>
+            <a:off x="7799832" y="4489704"/>
             <a:ext cx="3145536" cy="256032"/>
           </a:xfrm>
           <a:prstGeom prst="rect">
@@ -9353,8 +9569,8 @@
         </p:nvSpPr>
         <p:spPr>
           <a:xfrm>
-            <a:off x="7799832" y="4974336"/>
-            <a:ext cx="3145536" cy="576072"/>
+            <a:off x="7799832" y="4818888"/>
+            <a:ext cx="3145536" cy="688543"/>
           </a:xfrm>
           <a:prstGeom prst="rect">
             <a:avLst/>
@@ -9380,7 +9596,7 @@
                 <a:ea typeface="Aptos" pitchFamily="34" charset="-122"/>
                 <a:cs typeface="Aptos" pitchFamily="34" charset="-120"/>
               </a:rPr>
-              <a:t>Identify what could go wrong, who could be affected, what safeguards are needed, and what evidence should be reviewed.</a:t>
+              <a:t>Identify what could go wrong, who could be affected, what safeguards are needed, and what evidence should be reviewed before use.</a:t>
             </a:r>
             <a:endParaRPr lang="en-US" sz="1320" dirty="0"/>
           </a:p>
@@ -9715,11 +9931,11 @@
         <p:spPr>
           <a:xfrm>
             <a:off x="7635240" y="1325880"/>
-            <a:ext cx="3474720" cy="1325880"/>
+            <a:ext cx="3474720" cy="1207008"/>
           </a:xfrm>
           <a:prstGeom prst="roundRect">
             <a:avLst>
-              <a:gd name="adj" fmla="val 8276"/>
+              <a:gd name="adj" fmla="val 9091"/>
             </a:avLst>
           </a:prstGeom>
           <a:solidFill>
@@ -9781,7 +9997,7 @@
         <p:spPr>
           <a:xfrm>
             <a:off x="7799832" y="1801368"/>
-            <a:ext cx="3145536" cy="758952"/>
+            <a:ext cx="3145536" cy="640080"/>
           </a:xfrm>
           <a:prstGeom prst="rect">
             <a:avLst/>
@@ -9821,7 +10037,7 @@
         </p:nvSpPr>
         <p:spPr>
           <a:xfrm>
-            <a:off x="7635240" y="2788920"/>
+            <a:off x="7635240" y="2670048"/>
             <a:ext cx="3474720" cy="1536192"/>
           </a:xfrm>
           <a:prstGeom prst="roundRect">
@@ -9848,7 +10064,7 @@
         </p:nvSpPr>
         <p:spPr>
           <a:xfrm>
-            <a:off x="7799832" y="2935224"/>
+            <a:off x="7799832" y="2816352"/>
             <a:ext cx="3145536" cy="256032"/>
           </a:xfrm>
           <a:prstGeom prst="rect">
@@ -9887,7 +10103,7 @@
         </p:nvSpPr>
         <p:spPr>
           <a:xfrm>
-            <a:off x="7818120" y="3300984"/>
+            <a:off x="7818120" y="3182112"/>
             <a:ext cx="3090672" cy="877824"/>
           </a:xfrm>
           <a:prstGeom prst="rect">
@@ -9928,12 +10144,12 @@
         </p:nvSpPr>
         <p:spPr>
           <a:xfrm>
-            <a:off x="7635240" y="4498848"/>
-            <a:ext cx="3474720" cy="1143000"/>
+            <a:off x="7635240" y="4343400"/>
+            <a:ext cx="3474720" cy="1255471"/>
           </a:xfrm>
           <a:prstGeom prst="roundRect">
             <a:avLst>
-              <a:gd name="adj" fmla="val 9600"/>
+              <a:gd name="adj" fmla="val 8740"/>
             </a:avLst>
           </a:prstGeom>
           <a:solidFill>
@@ -9955,7 +10171,7 @@
         </p:nvSpPr>
         <p:spPr>
           <a:xfrm>
-            <a:off x="7799832" y="4645152"/>
+            <a:off x="7799832" y="4489704"/>
             <a:ext cx="3145536" cy="256032"/>
           </a:xfrm>
           <a:prstGeom prst="rect">
@@ -9994,8 +10210,8 @@
         </p:nvSpPr>
         <p:spPr>
           <a:xfrm>
-            <a:off x="7799832" y="4974336"/>
-            <a:ext cx="3145536" cy="576072"/>
+            <a:off x="7799832" y="4818888"/>
+            <a:ext cx="3145536" cy="688543"/>
           </a:xfrm>
           <a:prstGeom prst="rect">
             <a:avLst/>
@@ -10021,7 +10237,7 @@
                 <a:ea typeface="Aptos" pitchFamily="34" charset="-122"/>
                 <a:cs typeface="Aptos" pitchFamily="34" charset="-120"/>
               </a:rPr>
-              <a:t>Identify what could go wrong, who could be affected, what safeguards are needed, and what evidence should be reviewed.</a:t>
+              <a:t>Identify what could go wrong, who could be affected, what safeguards are needed, and what evidence should be reviewed before use.</a:t>
             </a:r>
             <a:endParaRPr lang="en-US" sz="1320" dirty="0"/>
           </a:p>
@@ -10992,11 +11208,11 @@
         <p:spPr>
           <a:xfrm>
             <a:off x="7635240" y="1325880"/>
-            <a:ext cx="3474720" cy="1325880"/>
+            <a:ext cx="3474720" cy="1207008"/>
           </a:xfrm>
           <a:prstGeom prst="roundRect">
             <a:avLst>
-              <a:gd name="adj" fmla="val 8276"/>
+              <a:gd name="adj" fmla="val 9091"/>
             </a:avLst>
           </a:prstGeom>
           <a:solidFill>
@@ -11058,7 +11274,7 @@
         <p:spPr>
           <a:xfrm>
             <a:off x="7799832" y="1801368"/>
-            <a:ext cx="3145536" cy="758952"/>
+            <a:ext cx="3145536" cy="640080"/>
           </a:xfrm>
           <a:prstGeom prst="rect">
             <a:avLst/>
@@ -11098,12 +11314,12 @@
         </p:nvSpPr>
         <p:spPr>
           <a:xfrm>
-            <a:off x="7635240" y="2788920"/>
-            <a:ext cx="3474720" cy="1536192"/>
+            <a:off x="7635240" y="2670048"/>
+            <a:ext cx="3474720" cy="1377086"/>
           </a:xfrm>
           <a:prstGeom prst="roundRect">
             <a:avLst>
-              <a:gd name="adj" fmla="val 7143"/>
+              <a:gd name="adj" fmla="val 7968"/>
             </a:avLst>
           </a:prstGeom>
           <a:solidFill>
@@ -11125,7 +11341,7 @@
         </p:nvSpPr>
         <p:spPr>
           <a:xfrm>
-            <a:off x="7799832" y="2935224"/>
+            <a:off x="7799832" y="2816352"/>
             <a:ext cx="3145536" cy="256032"/>
           </a:xfrm>
           <a:prstGeom prst="rect">
@@ -11164,8 +11380,8 @@
         </p:nvSpPr>
         <p:spPr>
           <a:xfrm>
-            <a:off x="7818120" y="3300984"/>
-            <a:ext cx="3090672" cy="877824"/>
+            <a:off x="7818120" y="3182112"/>
+            <a:ext cx="3090672" cy="718718"/>
           </a:xfrm>
           <a:prstGeom prst="rect">
             <a:avLst/>
@@ -11239,12 +11455,12 @@
         </p:nvSpPr>
         <p:spPr>
           <a:xfrm>
-            <a:off x="7635240" y="4498848"/>
-            <a:ext cx="3474720" cy="1143000"/>
+            <a:off x="7635240" y="4184294"/>
+            <a:ext cx="3474720" cy="1466698"/>
           </a:xfrm>
           <a:prstGeom prst="roundRect">
             <a:avLst>
-              <a:gd name="adj" fmla="val 9600"/>
+              <a:gd name="adj" fmla="val 7481"/>
             </a:avLst>
           </a:prstGeom>
           <a:solidFill>
@@ -11266,7 +11482,7 @@
         </p:nvSpPr>
         <p:spPr>
           <a:xfrm>
-            <a:off x="7799832" y="4645152"/>
+            <a:off x="7799832" y="4330598"/>
             <a:ext cx="3145536" cy="256032"/>
           </a:xfrm>
           <a:prstGeom prst="rect">
@@ -11305,8 +11521,8 @@
         </p:nvSpPr>
         <p:spPr>
           <a:xfrm>
-            <a:off x="7799832" y="4974336"/>
-            <a:ext cx="3145536" cy="576072"/>
+            <a:off x="7799832" y="4659782"/>
+            <a:ext cx="3145536" cy="899770"/>
           </a:xfrm>
           <a:prstGeom prst="rect">
             <a:avLst/>
@@ -11332,7 +11548,7 @@
                 <a:ea typeface="Aptos" pitchFamily="34" charset="-122"/>
                 <a:cs typeface="Aptos" pitchFamily="34" charset="-120"/>
               </a:rPr>
-              <a:t>Use the assignment to test whether you can explain the concept, apply it to a realistic public health situation, and.</a:t>
+              <a:t>Use the assignment to test whether you can explain the concept, apply it to a realistic public health situation, and identify what would need review before the work moves forward.</a:t>
             </a:r>
             <a:endParaRPr lang="en-US" sz="1320" dirty="0"/>
           </a:p>
@@ -11701,11 +11917,11 @@
         <p:spPr>
           <a:xfrm>
             <a:off x="7635240" y="1325880"/>
-            <a:ext cx="3474720" cy="1325880"/>
+            <a:ext cx="3474720" cy="1207008"/>
           </a:xfrm>
           <a:prstGeom prst="roundRect">
             <a:avLst>
-              <a:gd name="adj" fmla="val 8276"/>
+              <a:gd name="adj" fmla="val 9091"/>
             </a:avLst>
           </a:prstGeom>
           <a:solidFill>
@@ -11767,7 +11983,7 @@
         <p:spPr>
           <a:xfrm>
             <a:off x="7799832" y="1801368"/>
-            <a:ext cx="3145536" cy="758952"/>
+            <a:ext cx="3145536" cy="640080"/>
           </a:xfrm>
           <a:prstGeom prst="rect">
             <a:avLst/>
@@ -11807,12 +12023,12 @@
         </p:nvSpPr>
         <p:spPr>
           <a:xfrm>
-            <a:off x="7635240" y="2788920"/>
-            <a:ext cx="3474720" cy="1536192"/>
+            <a:off x="7635240" y="2670048"/>
+            <a:ext cx="3474720" cy="1377086"/>
           </a:xfrm>
           <a:prstGeom prst="roundRect">
             <a:avLst>
-              <a:gd name="adj" fmla="val 7143"/>
+              <a:gd name="adj" fmla="val 7968"/>
             </a:avLst>
           </a:prstGeom>
           <a:solidFill>
@@ -11834,7 +12050,7 @@
         </p:nvSpPr>
         <p:spPr>
           <a:xfrm>
-            <a:off x="7799832" y="2935224"/>
+            <a:off x="7799832" y="2816352"/>
             <a:ext cx="3145536" cy="256032"/>
           </a:xfrm>
           <a:prstGeom prst="rect">
@@ -11873,8 +12089,8 @@
         </p:nvSpPr>
         <p:spPr>
           <a:xfrm>
-            <a:off x="7818120" y="3300984"/>
-            <a:ext cx="3090672" cy="877824"/>
+            <a:off x="7818120" y="3182112"/>
+            <a:ext cx="3090672" cy="718718"/>
           </a:xfrm>
           <a:prstGeom prst="rect">
             <a:avLst/>
@@ -11948,12 +12164,12 @@
         </p:nvSpPr>
         <p:spPr>
           <a:xfrm>
-            <a:off x="7635240" y="4498848"/>
-            <a:ext cx="3474720" cy="1143000"/>
+            <a:off x="7635240" y="4184294"/>
+            <a:ext cx="3474720" cy="1466698"/>
           </a:xfrm>
           <a:prstGeom prst="roundRect">
             <a:avLst>
-              <a:gd name="adj" fmla="val 9600"/>
+              <a:gd name="adj" fmla="val 7481"/>
             </a:avLst>
           </a:prstGeom>
           <a:solidFill>
@@ -11975,7 +12191,7 @@
         </p:nvSpPr>
         <p:spPr>
           <a:xfrm>
-            <a:off x="7799832" y="4645152"/>
+            <a:off x="7799832" y="4330598"/>
             <a:ext cx="3145536" cy="256032"/>
           </a:xfrm>
           <a:prstGeom prst="rect">
@@ -12014,8 +12230,8 @@
         </p:nvSpPr>
         <p:spPr>
           <a:xfrm>
-            <a:off x="7799832" y="4974336"/>
-            <a:ext cx="3145536" cy="576072"/>
+            <a:off x="7799832" y="4659782"/>
+            <a:ext cx="3145536" cy="899770"/>
           </a:xfrm>
           <a:prstGeom prst="rect">
             <a:avLst/>
@@ -12041,7 +12257,7 @@
                 <a:ea typeface="Aptos" pitchFamily="34" charset="-122"/>
                 <a:cs typeface="Aptos" pitchFamily="34" charset="-120"/>
               </a:rPr>
-              <a:t>Use the assignment to test whether you can explain the concept, apply it to a realistic public health situation, and.</a:t>
+              <a:t>Use the assignment to test whether you can explain the concept, apply it to a realistic public health situation, and identify what would need review before the work moves forward.</a:t>
             </a:r>
             <a:endParaRPr lang="en-US" sz="1320" dirty="0"/>
           </a:p>
@@ -12410,11 +12626,11 @@
         <p:spPr>
           <a:xfrm>
             <a:off x="7635240" y="1325880"/>
-            <a:ext cx="3474720" cy="1325880"/>
+            <a:ext cx="3474720" cy="1207008"/>
           </a:xfrm>
           <a:prstGeom prst="roundRect">
             <a:avLst>
-              <a:gd name="adj" fmla="val 8276"/>
+              <a:gd name="adj" fmla="val 9091"/>
             </a:avLst>
           </a:prstGeom>
           <a:solidFill>
@@ -12476,7 +12692,7 @@
         <p:spPr>
           <a:xfrm>
             <a:off x="7799832" y="1801368"/>
-            <a:ext cx="3145536" cy="758952"/>
+            <a:ext cx="3145536" cy="640080"/>
           </a:xfrm>
           <a:prstGeom prst="rect">
             <a:avLst/>
@@ -12516,7 +12732,7 @@
         </p:nvSpPr>
         <p:spPr>
           <a:xfrm>
-            <a:off x="7635240" y="2788920"/>
+            <a:off x="7635240" y="2670048"/>
             <a:ext cx="3474720" cy="1536192"/>
           </a:xfrm>
           <a:prstGeom prst="roundRect">
@@ -12543,7 +12759,7 @@
         </p:nvSpPr>
         <p:spPr>
           <a:xfrm>
-            <a:off x="7799832" y="2935224"/>
+            <a:off x="7799832" y="2816352"/>
             <a:ext cx="3145536" cy="256032"/>
           </a:xfrm>
           <a:prstGeom prst="rect">
@@ -12582,7 +12798,7 @@
         </p:nvSpPr>
         <p:spPr>
           <a:xfrm>
-            <a:off x="7818120" y="3300984"/>
+            <a:off x="7818120" y="3182112"/>
             <a:ext cx="3090672" cy="877824"/>
           </a:xfrm>
           <a:prstGeom prst="rect">
@@ -12640,12 +12856,12 @@
         </p:nvSpPr>
         <p:spPr>
           <a:xfrm>
-            <a:off x="7635240" y="4498848"/>
-            <a:ext cx="3474720" cy="1143000"/>
+            <a:off x="7635240" y="4343400"/>
+            <a:ext cx="3474720" cy="1255471"/>
           </a:xfrm>
           <a:prstGeom prst="roundRect">
             <a:avLst>
-              <a:gd name="adj" fmla="val 9600"/>
+              <a:gd name="adj" fmla="val 8740"/>
             </a:avLst>
           </a:prstGeom>
           <a:solidFill>
@@ -12667,7 +12883,7 @@
         </p:nvSpPr>
         <p:spPr>
           <a:xfrm>
-            <a:off x="7799832" y="4645152"/>
+            <a:off x="7799832" y="4489704"/>
             <a:ext cx="3145536" cy="256032"/>
           </a:xfrm>
           <a:prstGeom prst="rect">
@@ -12706,8 +12922,8 @@
         </p:nvSpPr>
         <p:spPr>
           <a:xfrm>
-            <a:off x="7799832" y="4974336"/>
-            <a:ext cx="3145536" cy="576072"/>
+            <a:off x="7799832" y="4818888"/>
+            <a:ext cx="3145536" cy="688543"/>
           </a:xfrm>
           <a:prstGeom prst="rect">
             <a:avLst/>
@@ -12733,7 +12949,7 @@
                 <a:ea typeface="Aptos" pitchFamily="34" charset="-122"/>
                 <a:cs typeface="Aptos" pitchFamily="34" charset="-120"/>
               </a:rPr>
-              <a:t>Identify what could go wrong, who could be affected, what safeguards are needed, and what evidence should be reviewed.</a:t>
+              <a:t>Identify what could go wrong, who could be affected, what safeguards are needed, and what evidence should be reviewed before use.</a:t>
             </a:r>
             <a:endParaRPr lang="en-US" sz="1320" dirty="0"/>
           </a:p>
@@ -13211,7 +13427,7 @@
                 <a:ea typeface="Aptos" pitchFamily="34" charset="-122"/>
                 <a:cs typeface="Aptos" pitchFamily="34" charset="-120"/>
               </a:rPr>
-              <a:t>Use the related plays to identify decisions, participants, timing, approvals, and documentation needed for responsible.</a:t>
+              <a:t>Use the related plays to identify decisions, participants, timing, approvals, and documentation needed for responsible implementation.</a:t>
             </a:r>
             <a:endParaRPr lang="en-US" sz="1320" dirty="0"/>
           </a:p>
@@ -13830,7 +14046,7 @@
                 <a:ea typeface="Aptos" pitchFamily="34" charset="-122"/>
                 <a:cs typeface="Aptos" pitchFamily="34" charset="-120"/>
               </a:rPr>
-              <a:t>Use linked tools when your department needs a structured worksheet, template, checklist, review process, or.</a:t>
+              <a:t>Use linked tools when your department needs a structured worksheet, template, checklist, review process, or documentation artifact.</a:t>
             </a:r>
             <a:endParaRPr lang="en-US" sz="1320" dirty="0"/>
           </a:p>
@@ -14340,11 +14556,11 @@
         <p:spPr>
           <a:xfrm>
             <a:off x="7635240" y="1325880"/>
-            <a:ext cx="3474720" cy="1325880"/>
+            <a:ext cx="3474720" cy="1207008"/>
           </a:xfrm>
           <a:prstGeom prst="roundRect">
             <a:avLst>
-              <a:gd name="adj" fmla="val 8276"/>
+              <a:gd name="adj" fmla="val 9091"/>
             </a:avLst>
           </a:prstGeom>
           <a:solidFill>
@@ -14406,7 +14622,7 @@
         <p:spPr>
           <a:xfrm>
             <a:off x="7799832" y="1801368"/>
-            <a:ext cx="3145536" cy="758952"/>
+            <a:ext cx="3145536" cy="640080"/>
           </a:xfrm>
           <a:prstGeom prst="rect">
             <a:avLst/>
@@ -14446,12 +14662,12 @@
         </p:nvSpPr>
         <p:spPr>
           <a:xfrm>
-            <a:off x="7635240" y="2788920"/>
-            <a:ext cx="3474720" cy="1536192"/>
+            <a:off x="7635240" y="2670048"/>
+            <a:ext cx="3474720" cy="1377086"/>
           </a:xfrm>
           <a:prstGeom prst="roundRect">
             <a:avLst>
-              <a:gd name="adj" fmla="val 7143"/>
+              <a:gd name="adj" fmla="val 7968"/>
             </a:avLst>
           </a:prstGeom>
           <a:solidFill>
@@ -14473,7 +14689,7 @@
         </p:nvSpPr>
         <p:spPr>
           <a:xfrm>
-            <a:off x="7799832" y="2935224"/>
+            <a:off x="7799832" y="2816352"/>
             <a:ext cx="3145536" cy="256032"/>
           </a:xfrm>
           <a:prstGeom prst="rect">
@@ -14512,8 +14728,8 @@
         </p:nvSpPr>
         <p:spPr>
           <a:xfrm>
-            <a:off x="7818120" y="3300984"/>
-            <a:ext cx="3090672" cy="877824"/>
+            <a:off x="7818120" y="3182112"/>
+            <a:ext cx="3090672" cy="718718"/>
           </a:xfrm>
           <a:prstGeom prst="rect">
             <a:avLst/>
@@ -14570,12 +14786,12 @@
         </p:nvSpPr>
         <p:spPr>
           <a:xfrm>
-            <a:off x="7635240" y="4498848"/>
-            <a:ext cx="3474720" cy="1143000"/>
+            <a:off x="7635240" y="4184294"/>
+            <a:ext cx="3474720" cy="1466698"/>
           </a:xfrm>
           <a:prstGeom prst="roundRect">
             <a:avLst>
-              <a:gd name="adj" fmla="val 9600"/>
+              <a:gd name="adj" fmla="val 7481"/>
             </a:avLst>
           </a:prstGeom>
           <a:solidFill>
@@ -14597,7 +14813,7 @@
         </p:nvSpPr>
         <p:spPr>
           <a:xfrm>
-            <a:off x="7799832" y="4645152"/>
+            <a:off x="7799832" y="4330598"/>
             <a:ext cx="3145536" cy="256032"/>
           </a:xfrm>
           <a:prstGeom prst="rect">
@@ -14636,8 +14852,8 @@
         </p:nvSpPr>
         <p:spPr>
           <a:xfrm>
-            <a:off x="7799832" y="4974336"/>
-            <a:ext cx="3145536" cy="576072"/>
+            <a:off x="7799832" y="4659782"/>
+            <a:ext cx="3145536" cy="899770"/>
           </a:xfrm>
           <a:prstGeom prst="rect">
             <a:avLst/>
@@ -14663,7 +14879,7 @@
                 <a:ea typeface="Aptos" pitchFamily="34" charset="-122"/>
                 <a:cs typeface="Aptos" pitchFamily="34" charset="-120"/>
               </a:rPr>
-              <a:t>Use the assignment to test whether you can explain the concept, apply it to a realistic public health situation, and.</a:t>
+              <a:t>Use the assignment to test whether you can explain the concept, apply it to a realistic public health situation, and identify what would need review before the work moves forward.</a:t>
             </a:r>
             <a:endParaRPr lang="en-US" sz="1320" dirty="0"/>
           </a:p>
@@ -14998,11 +15214,11 @@
         <p:spPr>
           <a:xfrm>
             <a:off x="7635240" y="1325880"/>
-            <a:ext cx="3474720" cy="1325880"/>
+            <a:ext cx="3474720" cy="1207008"/>
           </a:xfrm>
           <a:prstGeom prst="roundRect">
             <a:avLst>
-              <a:gd name="adj" fmla="val 8276"/>
+              <a:gd name="adj" fmla="val 9091"/>
             </a:avLst>
           </a:prstGeom>
           <a:solidFill>
@@ -15064,7 +15280,7 @@
         <p:spPr>
           <a:xfrm>
             <a:off x="7799832" y="1801368"/>
-            <a:ext cx="3145536" cy="758952"/>
+            <a:ext cx="3145536" cy="640080"/>
           </a:xfrm>
           <a:prstGeom prst="rect">
             <a:avLst/>
@@ -15104,12 +15320,12 @@
         </p:nvSpPr>
         <p:spPr>
           <a:xfrm>
-            <a:off x="7635240" y="2788920"/>
-            <a:ext cx="3474720" cy="1536192"/>
+            <a:off x="7635240" y="2670048"/>
+            <a:ext cx="3474720" cy="1377086"/>
           </a:xfrm>
           <a:prstGeom prst="roundRect">
             <a:avLst>
-              <a:gd name="adj" fmla="val 7143"/>
+              <a:gd name="adj" fmla="val 7968"/>
             </a:avLst>
           </a:prstGeom>
           <a:solidFill>
@@ -15131,7 +15347,7 @@
         </p:nvSpPr>
         <p:spPr>
           <a:xfrm>
-            <a:off x="7799832" y="2935224"/>
+            <a:off x="7799832" y="2816352"/>
             <a:ext cx="3145536" cy="256032"/>
           </a:xfrm>
           <a:prstGeom prst="rect">
@@ -15170,8 +15386,8 @@
         </p:nvSpPr>
         <p:spPr>
           <a:xfrm>
-            <a:off x="7818120" y="3300984"/>
-            <a:ext cx="3090672" cy="877824"/>
+            <a:off x="7818120" y="3182112"/>
+            <a:ext cx="3090672" cy="718718"/>
           </a:xfrm>
           <a:prstGeom prst="rect">
             <a:avLst/>
@@ -15211,12 +15427,12 @@
         </p:nvSpPr>
         <p:spPr>
           <a:xfrm>
-            <a:off x="7635240" y="4498848"/>
-            <a:ext cx="3474720" cy="1143000"/>
+            <a:off x="7635240" y="4184294"/>
+            <a:ext cx="3474720" cy="1466698"/>
           </a:xfrm>
           <a:prstGeom prst="roundRect">
             <a:avLst>
-              <a:gd name="adj" fmla="val 9600"/>
+              <a:gd name="adj" fmla="val 7481"/>
             </a:avLst>
           </a:prstGeom>
           <a:solidFill>
@@ -15238,7 +15454,7 @@
         </p:nvSpPr>
         <p:spPr>
           <a:xfrm>
-            <a:off x="7799832" y="4645152"/>
+            <a:off x="7799832" y="4330598"/>
             <a:ext cx="3145536" cy="256032"/>
           </a:xfrm>
           <a:prstGeom prst="rect">
@@ -15277,8 +15493,8 @@
         </p:nvSpPr>
         <p:spPr>
           <a:xfrm>
-            <a:off x="7799832" y="4974336"/>
-            <a:ext cx="3145536" cy="576072"/>
+            <a:off x="7799832" y="4659782"/>
+            <a:ext cx="3145536" cy="899770"/>
           </a:xfrm>
           <a:prstGeom prst="rect">
             <a:avLst/>
@@ -15304,7 +15520,7 @@
                 <a:ea typeface="Aptos" pitchFamily="34" charset="-122"/>
                 <a:cs typeface="Aptos" pitchFamily="34" charset="-120"/>
               </a:rPr>
-              <a:t>Use the assignment to test whether you can explain the concept, apply it to a realistic public health situation, and.</a:t>
+              <a:t>Use the assignment to test whether you can explain the concept, apply it to a realistic public health situation, and identify what would need review before the work moves forward.</a:t>
             </a:r>
             <a:endParaRPr lang="en-US" sz="1320" dirty="0"/>
           </a:p>
@@ -15673,11 +15889,11 @@
         <p:spPr>
           <a:xfrm>
             <a:off x="7635240" y="1325880"/>
-            <a:ext cx="3474720" cy="1325880"/>
+            <a:ext cx="3474720" cy="1207008"/>
           </a:xfrm>
           <a:prstGeom prst="roundRect">
             <a:avLst>
-              <a:gd name="adj" fmla="val 8276"/>
+              <a:gd name="adj" fmla="val 9091"/>
             </a:avLst>
           </a:prstGeom>
           <a:solidFill>
@@ -15739,7 +15955,7 @@
         <p:spPr>
           <a:xfrm>
             <a:off x="7799832" y="1801368"/>
-            <a:ext cx="3145536" cy="758952"/>
+            <a:ext cx="3145536" cy="640080"/>
           </a:xfrm>
           <a:prstGeom prst="rect">
             <a:avLst/>
@@ -15779,7 +15995,7 @@
         </p:nvSpPr>
         <p:spPr>
           <a:xfrm>
-            <a:off x="7635240" y="2788920"/>
+            <a:off x="7635240" y="2670048"/>
             <a:ext cx="3474720" cy="1536192"/>
           </a:xfrm>
           <a:prstGeom prst="roundRect">
@@ -15806,8 +16022,8 @@
         </p:nvSpPr>
         <p:spPr>
           <a:xfrm>
-            <a:off x="7799832" y="2935224"/>
-            <a:ext cx="3145536" cy="256032"/>
+            <a:off x="7799832" y="2798064"/>
+            <a:ext cx="3145536" cy="237744"/>
           </a:xfrm>
           <a:prstGeom prst="rect">
             <a:avLst/>
@@ -15823,7 +16039,7 @@
               <a:buNone/>
             </a:pPr>
             <a:r>
-              <a:rPr lang="en-US" sz="1300" b="1" dirty="0">
+              <a:rPr lang="en-US" sz="1250" b="1" dirty="0">
                 <a:solidFill>
                   <a:srgbClr val="0068B7"/>
                 </a:solidFill>
@@ -15831,101 +16047,317 @@
                 <a:ea typeface="Aptos" pitchFamily="34" charset="-122"/>
                 <a:cs typeface="Aptos" pitchFamily="34" charset="-120"/>
               </a:rPr>
-              <a:t>Concept checkpoints</a:t>
-            </a:r>
-            <a:endParaRPr lang="en-US" sz="1300" dirty="0"/>
-          </a:p>
-        </p:txBody>
-      </p:sp>
-      <p:sp>
-        <p:nvSpPr>
-          <p:cNvPr id="15" name="Text 13"/>
-          <p:cNvSpPr/>
-          <p:nvPr/>
-        </p:nvSpPr>
-        <p:spPr>
-          <a:xfrm>
-            <a:off x="7818120" y="3300984"/>
-            <a:ext cx="3090672" cy="877824"/>
-          </a:xfrm>
-          <a:prstGeom prst="rect">
-            <a:avLst/>
-          </a:prstGeom>
-          <a:noFill/>
-          <a:ln/>
-        </p:spPr>
-        <p:txBody>
-          <a:bodyPr wrap="square" lIns="508" tIns="508" rIns="508" bIns="508" rtlCol="0" anchor="t">
+              <a:t>Risk control loop</a:t>
+            </a:r>
+            <a:endParaRPr lang="en-US" sz="1250" dirty="0"/>
+          </a:p>
+        </p:txBody>
+      </p:sp>
+      <p:sp>
+        <p:nvSpPr>
+          <p:cNvPr id="15" name="Shape 13"/>
+          <p:cNvSpPr/>
+          <p:nvPr/>
+        </p:nvSpPr>
+        <p:spPr>
+          <a:xfrm>
+            <a:off x="8763000" y="3351276"/>
+            <a:ext cx="164592" cy="0"/>
+          </a:xfrm>
+          <a:prstGeom prst="line">
+            <a:avLst/>
+          </a:prstGeom>
+          <a:noFill/>
+          <a:ln w="15240">
+            <a:solidFill>
+              <a:srgbClr val="8ABBD8"/>
+            </a:solidFill>
+            <a:prstDash val="solid"/>
+          </a:ln>
+        </p:spPr>
+      </p:sp>
+      <p:sp>
+        <p:nvSpPr>
+          <p:cNvPr id="16" name="Shape 14"/>
+          <p:cNvSpPr/>
+          <p:nvPr/>
+        </p:nvSpPr>
+        <p:spPr>
+          <a:xfrm>
+            <a:off x="7872984" y="3200400"/>
+            <a:ext cx="890016" cy="301752"/>
+          </a:xfrm>
+          <a:prstGeom prst="roundRect">
+            <a:avLst>
+              <a:gd name="adj" fmla="val 24242"/>
+            </a:avLst>
+          </a:prstGeom>
+          <a:solidFill>
+            <a:srgbClr val="0068B7"/>
+          </a:solidFill>
+          <a:ln w="12700">
+            <a:solidFill>
+              <a:srgbClr val="0068B7"/>
+            </a:solidFill>
+            <a:prstDash val="solid"/>
+          </a:ln>
+        </p:spPr>
+      </p:sp>
+      <p:sp>
+        <p:nvSpPr>
+          <p:cNvPr id="17" name="Text 15"/>
+          <p:cNvSpPr/>
+          <p:nvPr/>
+        </p:nvSpPr>
+        <p:spPr>
+          <a:xfrm>
+            <a:off x="7909560" y="3273552"/>
+            <a:ext cx="816864" cy="146304"/>
+          </a:xfrm>
+          <a:prstGeom prst="rect">
+            <a:avLst/>
+          </a:prstGeom>
+          <a:noFill/>
+          <a:ln/>
+        </p:spPr>
+        <p:txBody>
+          <a:bodyPr wrap="square" lIns="0" tIns="0" rIns="0" bIns="0" rtlCol="0" anchor="ctr">
             <a:normAutofit/>
           </a:bodyPr>
           <a:lstStyle/>
           <a:p>
-            <a:pPr indent="0" marL="0">
-              <a:buNone/>
-            </a:pPr>
-            <a:r>
-              <a:rPr lang="en-US" sz="1220" dirty="0">
-                <a:solidFill>
-                  <a:srgbClr val="17364A"/>
-                </a:solidFill>
-                <a:latin typeface="Aptos" pitchFamily="34" charset="0"/>
-                <a:ea typeface="Aptos" pitchFamily="34" charset="-122"/>
-                <a:cs typeface="Aptos" pitchFamily="34" charset="-120"/>
-              </a:rPr>
-              <a:t>In public health, predictive models may be used to anticipate.</a:t>
-            </a:r>
-            <a:endParaRPr lang="en-US" sz="1220" dirty="0"/>
-          </a:p>
-          <a:p>
-            <a:pPr indent="0" marL="0">
-              <a:buNone/>
-            </a:pPr>
-            <a:r>
-              <a:rPr lang="en-US" sz="1220" dirty="0">
-                <a:solidFill>
-                  <a:srgbClr val="17364A"/>
-                </a:solidFill>
-                <a:latin typeface="Aptos" pitchFamily="34" charset="0"/>
-                <a:ea typeface="Aptos" pitchFamily="34" charset="-122"/>
-                <a:cs typeface="Aptos" pitchFamily="34" charset="-120"/>
-              </a:rPr>
-              <a:t>Risk stratification is the practice of grouping individuals,.</a:t>
-            </a:r>
-            <a:endParaRPr lang="en-US" sz="1220" dirty="0"/>
-          </a:p>
-          <a:p>
-            <a:pPr indent="0" marL="0">
-              <a:buNone/>
-            </a:pPr>
-            <a:r>
-              <a:rPr lang="en-US" sz="1220" dirty="0">
-                <a:solidFill>
-                  <a:srgbClr val="17364A"/>
-                </a:solidFill>
-                <a:latin typeface="Aptos" pitchFamily="34" charset="0"/>
-                <a:ea typeface="Aptos" pitchFamily="34" charset="-122"/>
-                <a:cs typeface="Aptos" pitchFamily="34" charset="-120"/>
-              </a:rPr>
-              <a:t>This module helps learners distinguish prediction from diagnosis,.</a:t>
-            </a:r>
-            <a:endParaRPr lang="en-US" sz="1220" dirty="0"/>
-          </a:p>
-        </p:txBody>
-      </p:sp>
-      <p:sp>
-        <p:nvSpPr>
-          <p:cNvPr id="16" name="Shape 14"/>
-          <p:cNvSpPr/>
-          <p:nvPr/>
-        </p:nvSpPr>
-        <p:spPr>
-          <a:xfrm>
-            <a:off x="7635240" y="4498848"/>
-            <a:ext cx="3474720" cy="1143000"/>
+            <a:pPr algn="ctr" indent="0" marL="0">
+              <a:buNone/>
+            </a:pPr>
+            <a:r>
+              <a:rPr lang="en-US" sz="880" b="1" dirty="0">
+                <a:solidFill>
+                  <a:srgbClr val="FFFFFF"/>
+                </a:solidFill>
+                <a:latin typeface="Aptos" pitchFamily="34" charset="0"/>
+                <a:ea typeface="Aptos" pitchFamily="34" charset="-122"/>
+                <a:cs typeface="Aptos" pitchFamily="34" charset="-120"/>
+              </a:rPr>
+              <a:t>Identify</a:t>
+            </a:r>
+            <a:endParaRPr lang="en-US" sz="880" dirty="0"/>
+          </a:p>
+        </p:txBody>
+      </p:sp>
+      <p:sp>
+        <p:nvSpPr>
+          <p:cNvPr id="18" name="Shape 16"/>
+          <p:cNvSpPr/>
+          <p:nvPr/>
+        </p:nvSpPr>
+        <p:spPr>
+          <a:xfrm>
+            <a:off x="9817608" y="3351276"/>
+            <a:ext cx="164592" cy="0"/>
+          </a:xfrm>
+          <a:prstGeom prst="line">
+            <a:avLst/>
+          </a:prstGeom>
+          <a:noFill/>
+          <a:ln w="15240">
+            <a:solidFill>
+              <a:srgbClr val="8ABBD8"/>
+            </a:solidFill>
+            <a:prstDash val="solid"/>
+          </a:ln>
+        </p:spPr>
+      </p:sp>
+      <p:sp>
+        <p:nvSpPr>
+          <p:cNvPr id="19" name="Shape 17"/>
+          <p:cNvSpPr/>
+          <p:nvPr/>
+        </p:nvSpPr>
+        <p:spPr>
+          <a:xfrm>
+            <a:off x="8927592" y="3200400"/>
+            <a:ext cx="890016" cy="301752"/>
           </a:xfrm>
           <a:prstGeom prst="roundRect">
             <a:avLst>
-              <a:gd name="adj" fmla="val 9600"/>
+              <a:gd name="adj" fmla="val 24242"/>
+            </a:avLst>
+          </a:prstGeom>
+          <a:solidFill>
+            <a:srgbClr val="2F8A28"/>
+          </a:solidFill>
+          <a:ln w="12700">
+            <a:solidFill>
+              <a:srgbClr val="2F8A28"/>
+            </a:solidFill>
+            <a:prstDash val="solid"/>
+          </a:ln>
+        </p:spPr>
+      </p:sp>
+      <p:sp>
+        <p:nvSpPr>
+          <p:cNvPr id="20" name="Text 18"/>
+          <p:cNvSpPr/>
+          <p:nvPr/>
+        </p:nvSpPr>
+        <p:spPr>
+          <a:xfrm>
+            <a:off x="8964168" y="3273552"/>
+            <a:ext cx="816864" cy="146304"/>
+          </a:xfrm>
+          <a:prstGeom prst="rect">
+            <a:avLst/>
+          </a:prstGeom>
+          <a:noFill/>
+          <a:ln/>
+        </p:spPr>
+        <p:txBody>
+          <a:bodyPr wrap="square" lIns="0" tIns="0" rIns="0" bIns="0" rtlCol="0" anchor="ctr">
+            <a:normAutofit/>
+          </a:bodyPr>
+          <a:lstStyle/>
+          <a:p>
+            <a:pPr algn="ctr" indent="0" marL="0">
+              <a:buNone/>
+            </a:pPr>
+            <a:r>
+              <a:rPr lang="en-US" sz="880" b="1" dirty="0">
+                <a:solidFill>
+                  <a:srgbClr val="FFFFFF"/>
+                </a:solidFill>
+                <a:latin typeface="Aptos" pitchFamily="34" charset="0"/>
+                <a:ea typeface="Aptos" pitchFamily="34" charset="-122"/>
+                <a:cs typeface="Aptos" pitchFamily="34" charset="-120"/>
+              </a:rPr>
+              <a:t>Control</a:t>
+            </a:r>
+            <a:endParaRPr lang="en-US" sz="880" dirty="0"/>
+          </a:p>
+        </p:txBody>
+      </p:sp>
+      <p:sp>
+        <p:nvSpPr>
+          <p:cNvPr id="21" name="Shape 19"/>
+          <p:cNvSpPr/>
+          <p:nvPr/>
+        </p:nvSpPr>
+        <p:spPr>
+          <a:xfrm>
+            <a:off x="9982200" y="3200400"/>
+            <a:ext cx="890016" cy="301752"/>
+          </a:xfrm>
+          <a:prstGeom prst="roundRect">
+            <a:avLst>
+              <a:gd name="adj" fmla="val 24242"/>
+            </a:avLst>
+          </a:prstGeom>
+          <a:solidFill>
+            <a:srgbClr val="6A4CA3"/>
+          </a:solidFill>
+          <a:ln w="12700">
+            <a:solidFill>
+              <a:srgbClr val="6A4CA3"/>
+            </a:solidFill>
+            <a:prstDash val="solid"/>
+          </a:ln>
+        </p:spPr>
+      </p:sp>
+      <p:sp>
+        <p:nvSpPr>
+          <p:cNvPr id="22" name="Text 20"/>
+          <p:cNvSpPr/>
+          <p:nvPr/>
+        </p:nvSpPr>
+        <p:spPr>
+          <a:xfrm>
+            <a:off x="10018776" y="3273552"/>
+            <a:ext cx="816864" cy="146304"/>
+          </a:xfrm>
+          <a:prstGeom prst="rect">
+            <a:avLst/>
+          </a:prstGeom>
+          <a:noFill/>
+          <a:ln/>
+        </p:spPr>
+        <p:txBody>
+          <a:bodyPr wrap="square" lIns="0" tIns="0" rIns="0" bIns="0" rtlCol="0" anchor="ctr">
+            <a:normAutofit/>
+          </a:bodyPr>
+          <a:lstStyle/>
+          <a:p>
+            <a:pPr algn="ctr" indent="0" marL="0">
+              <a:buNone/>
+            </a:pPr>
+            <a:r>
+              <a:rPr lang="en-US" sz="880" b="1" dirty="0">
+                <a:solidFill>
+                  <a:srgbClr val="FFFFFF"/>
+                </a:solidFill>
+                <a:latin typeface="Aptos" pitchFamily="34" charset="0"/>
+                <a:ea typeface="Aptos" pitchFamily="34" charset="-122"/>
+                <a:cs typeface="Aptos" pitchFamily="34" charset="-120"/>
+              </a:rPr>
+              <a:t>Monitor</a:t>
+            </a:r>
+            <a:endParaRPr lang="en-US" sz="880" dirty="0"/>
+          </a:p>
+        </p:txBody>
+      </p:sp>
+      <p:sp>
+        <p:nvSpPr>
+          <p:cNvPr id="23" name="Text 21"/>
+          <p:cNvSpPr/>
+          <p:nvPr/>
+        </p:nvSpPr>
+        <p:spPr>
+          <a:xfrm>
+            <a:off x="7854696" y="3694176"/>
+            <a:ext cx="3035808" cy="365760"/>
+          </a:xfrm>
+          <a:prstGeom prst="rect">
+            <a:avLst/>
+          </a:prstGeom>
+          <a:noFill/>
+          <a:ln/>
+        </p:spPr>
+        <p:txBody>
+          <a:bodyPr wrap="square" lIns="254" tIns="254" rIns="254" bIns="254" rtlCol="0" anchor="t">
+            <a:normAutofit/>
+          </a:bodyPr>
+          <a:lstStyle/>
+          <a:p>
+            <a:pPr indent="0" marL="0">
+              <a:buNone/>
+            </a:pPr>
+            <a:r>
+              <a:rPr lang="en-US" sz="1120" dirty="0">
+                <a:solidFill>
+                  <a:srgbClr val="17364A"/>
+                </a:solidFill>
+                <a:latin typeface="Aptos" pitchFamily="34" charset="0"/>
+                <a:ea typeface="Aptos" pitchFamily="34" charset="-122"/>
+                <a:cs typeface="Aptos" pitchFamily="34" charset="-120"/>
+              </a:rPr>
+              <a:t>Responsible use depends on finding risks early, applying safeguards, and watching for drift or harm over time.</a:t>
+            </a:r>
+            <a:endParaRPr lang="en-US" sz="1120" dirty="0"/>
+          </a:p>
+        </p:txBody>
+      </p:sp>
+      <p:sp>
+        <p:nvSpPr>
+          <p:cNvPr id="24" name="Shape 22"/>
+          <p:cNvSpPr/>
+          <p:nvPr/>
+        </p:nvSpPr>
+        <p:spPr>
+          <a:xfrm>
+            <a:off x="7635240" y="4343400"/>
+            <a:ext cx="3474720" cy="1255471"/>
+          </a:xfrm>
+          <a:prstGeom prst="roundRect">
+            <a:avLst>
+              <a:gd name="adj" fmla="val 8740"/>
             </a:avLst>
           </a:prstGeom>
           <a:solidFill>
@@ -15941,13 +16373,13 @@
       </p:sp>
       <p:sp>
         <p:nvSpPr>
-          <p:cNvPr id="17" name="Text 15"/>
-          <p:cNvSpPr/>
-          <p:nvPr/>
-        </p:nvSpPr>
-        <p:spPr>
-          <a:xfrm>
-            <a:off x="7799832" y="4645152"/>
+          <p:cNvPr id="25" name="Text 23"/>
+          <p:cNvSpPr/>
+          <p:nvPr/>
+        </p:nvSpPr>
+        <p:spPr>
+          <a:xfrm>
+            <a:off x="7799832" y="4489704"/>
             <a:ext cx="3145536" cy="256032"/>
           </a:xfrm>
           <a:prstGeom prst="rect">
@@ -15980,14 +16412,14 @@
       </p:sp>
       <p:sp>
         <p:nvSpPr>
-          <p:cNvPr id="18" name="Text 16"/>
-          <p:cNvSpPr/>
-          <p:nvPr/>
-        </p:nvSpPr>
-        <p:spPr>
-          <a:xfrm>
-            <a:off x="7799832" y="4974336"/>
-            <a:ext cx="3145536" cy="576072"/>
+          <p:cNvPr id="26" name="Text 24"/>
+          <p:cNvSpPr/>
+          <p:nvPr/>
+        </p:nvSpPr>
+        <p:spPr>
+          <a:xfrm>
+            <a:off x="7799832" y="4818888"/>
+            <a:ext cx="3145536" cy="688543"/>
           </a:xfrm>
           <a:prstGeom prst="rect">
             <a:avLst/>
@@ -16013,7 +16445,7 @@
                 <a:ea typeface="Aptos" pitchFamily="34" charset="-122"/>
                 <a:cs typeface="Aptos" pitchFamily="34" charset="-120"/>
               </a:rPr>
-              <a:t>Identify what could go wrong, who could be affected, what safeguards are needed, and what evidence should be reviewed.</a:t>
+              <a:t>Identify what could go wrong, who could be affected, what safeguards are needed, and what evidence should be reviewed before use.</a:t>
             </a:r>
             <a:endParaRPr lang="en-US" sz="1320" dirty="0"/>
           </a:p>
@@ -16382,11 +16814,11 @@
         <p:spPr>
           <a:xfrm>
             <a:off x="7635240" y="1325880"/>
-            <a:ext cx="3474720" cy="1325880"/>
+            <a:ext cx="3474720" cy="1255471"/>
           </a:xfrm>
           <a:prstGeom prst="roundRect">
             <a:avLst>
-              <a:gd name="adj" fmla="val 8276"/>
+              <a:gd name="adj" fmla="val 8740"/>
             </a:avLst>
           </a:prstGeom>
           <a:solidFill>
@@ -16448,7 +16880,7 @@
         <p:spPr>
           <a:xfrm>
             <a:off x="7799832" y="1801368"/>
-            <a:ext cx="3145536" cy="758952"/>
+            <a:ext cx="3145536" cy="688543"/>
           </a:xfrm>
           <a:prstGeom prst="rect">
             <a:avLst/>
@@ -16488,7 +16920,7 @@
         </p:nvSpPr>
         <p:spPr>
           <a:xfrm>
-            <a:off x="7635240" y="2788920"/>
+            <a:off x="7635240" y="2718511"/>
             <a:ext cx="3474720" cy="1536192"/>
           </a:xfrm>
           <a:prstGeom prst="roundRect">
@@ -16515,8 +16947,8 @@
         </p:nvSpPr>
         <p:spPr>
           <a:xfrm>
-            <a:off x="7799832" y="2935224"/>
-            <a:ext cx="3145536" cy="256032"/>
+            <a:off x="7799832" y="2846527"/>
+            <a:ext cx="3145536" cy="237744"/>
           </a:xfrm>
           <a:prstGeom prst="rect">
             <a:avLst/>
@@ -16532,7 +16964,7 @@
               <a:buNone/>
             </a:pPr>
             <a:r>
-              <a:rPr lang="en-US" sz="1300" b="1" dirty="0">
+              <a:rPr lang="en-US" sz="1250" b="1" dirty="0">
                 <a:solidFill>
                   <a:srgbClr val="0068B7"/>
                 </a:solidFill>
@@ -16540,101 +16972,317 @@
                 <a:ea typeface="Aptos" pitchFamily="34" charset="-122"/>
                 <a:cs typeface="Aptos" pitchFamily="34" charset="-120"/>
               </a:rPr>
-              <a:t>Concept checkpoints</a:t>
-            </a:r>
-            <a:endParaRPr lang="en-US" sz="1300" dirty="0"/>
-          </a:p>
-        </p:txBody>
-      </p:sp>
-      <p:sp>
-        <p:nvSpPr>
-          <p:cNvPr id="15" name="Text 13"/>
-          <p:cNvSpPr/>
-          <p:nvPr/>
-        </p:nvSpPr>
-        <p:spPr>
-          <a:xfrm>
-            <a:off x="7818120" y="3300984"/>
-            <a:ext cx="3090672" cy="877824"/>
-          </a:xfrm>
-          <a:prstGeom prst="rect">
-            <a:avLst/>
-          </a:prstGeom>
-          <a:noFill/>
-          <a:ln/>
-        </p:spPr>
-        <p:txBody>
-          <a:bodyPr wrap="square" lIns="508" tIns="508" rIns="508" bIns="508" rtlCol="0" anchor="t">
+              <a:t>Risk control loop</a:t>
+            </a:r>
+            <a:endParaRPr lang="en-US" sz="1250" dirty="0"/>
+          </a:p>
+        </p:txBody>
+      </p:sp>
+      <p:sp>
+        <p:nvSpPr>
+          <p:cNvPr id="15" name="Shape 13"/>
+          <p:cNvSpPr/>
+          <p:nvPr/>
+        </p:nvSpPr>
+        <p:spPr>
+          <a:xfrm>
+            <a:off x="8763000" y="3399739"/>
+            <a:ext cx="164592" cy="0"/>
+          </a:xfrm>
+          <a:prstGeom prst="line">
+            <a:avLst/>
+          </a:prstGeom>
+          <a:noFill/>
+          <a:ln w="15240">
+            <a:solidFill>
+              <a:srgbClr val="8ABBD8"/>
+            </a:solidFill>
+            <a:prstDash val="solid"/>
+          </a:ln>
+        </p:spPr>
+      </p:sp>
+      <p:sp>
+        <p:nvSpPr>
+          <p:cNvPr id="16" name="Shape 14"/>
+          <p:cNvSpPr/>
+          <p:nvPr/>
+        </p:nvSpPr>
+        <p:spPr>
+          <a:xfrm>
+            <a:off x="7872984" y="3248863"/>
+            <a:ext cx="890016" cy="301752"/>
+          </a:xfrm>
+          <a:prstGeom prst="roundRect">
+            <a:avLst>
+              <a:gd name="adj" fmla="val 24242"/>
+            </a:avLst>
+          </a:prstGeom>
+          <a:solidFill>
+            <a:srgbClr val="0068B7"/>
+          </a:solidFill>
+          <a:ln w="12700">
+            <a:solidFill>
+              <a:srgbClr val="0068B7"/>
+            </a:solidFill>
+            <a:prstDash val="solid"/>
+          </a:ln>
+        </p:spPr>
+      </p:sp>
+      <p:sp>
+        <p:nvSpPr>
+          <p:cNvPr id="17" name="Text 15"/>
+          <p:cNvSpPr/>
+          <p:nvPr/>
+        </p:nvSpPr>
+        <p:spPr>
+          <a:xfrm>
+            <a:off x="7909560" y="3322015"/>
+            <a:ext cx="816864" cy="146304"/>
+          </a:xfrm>
+          <a:prstGeom prst="rect">
+            <a:avLst/>
+          </a:prstGeom>
+          <a:noFill/>
+          <a:ln/>
+        </p:spPr>
+        <p:txBody>
+          <a:bodyPr wrap="square" lIns="0" tIns="0" rIns="0" bIns="0" rtlCol="0" anchor="ctr">
             <a:normAutofit/>
           </a:bodyPr>
           <a:lstStyle/>
           <a:p>
-            <a:pPr indent="0" marL="0">
-              <a:buNone/>
-            </a:pPr>
-            <a:r>
-              <a:rPr lang="en-US" sz="1220" dirty="0">
-                <a:solidFill>
-                  <a:srgbClr val="17364A"/>
-                </a:solidFill>
-                <a:latin typeface="Aptos" pitchFamily="34" charset="0"/>
-                <a:ea typeface="Aptos" pitchFamily="34" charset="-122"/>
-                <a:cs typeface="Aptos" pitchFamily="34" charset="-120"/>
-              </a:rPr>
-              <a:t>Predictive analytics matters because public health agencies often.</a:t>
-            </a:r>
-            <a:endParaRPr lang="en-US" sz="1220" dirty="0"/>
-          </a:p>
-          <a:p>
-            <a:pPr indent="0" marL="0">
-              <a:buNone/>
-            </a:pPr>
-            <a:r>
-              <a:rPr lang="en-US" sz="1220" dirty="0">
-                <a:solidFill>
-                  <a:srgbClr val="17364A"/>
-                </a:solidFill>
-                <a:latin typeface="Aptos" pitchFamily="34" charset="0"/>
-                <a:ea typeface="Aptos" pitchFamily="34" charset="-122"/>
-                <a:cs typeface="Aptos" pitchFamily="34" charset="-120"/>
-              </a:rPr>
-              <a:t>During outbreaks, emergencies, or resource-constrained programs,.</a:t>
-            </a:r>
-            <a:endParaRPr lang="en-US" sz="1220" dirty="0"/>
-          </a:p>
-          <a:p>
-            <a:pPr indent="0" marL="0">
-              <a:buNone/>
-            </a:pPr>
-            <a:r>
-              <a:rPr lang="en-US" sz="1220" dirty="0">
-                <a:solidFill>
-                  <a:srgbClr val="17364A"/>
-                </a:solidFill>
-                <a:latin typeface="Aptos" pitchFamily="34" charset="0"/>
-                <a:ea typeface="Aptos" pitchFamily="34" charset="-122"/>
-                <a:cs typeface="Aptos" pitchFamily="34" charset="-120"/>
-              </a:rPr>
-              <a:t>Risk stratification can also create harm if used carelessly.</a:t>
-            </a:r>
-            <a:endParaRPr lang="en-US" sz="1220" dirty="0"/>
-          </a:p>
-        </p:txBody>
-      </p:sp>
-      <p:sp>
-        <p:nvSpPr>
-          <p:cNvPr id="16" name="Shape 14"/>
-          <p:cNvSpPr/>
-          <p:nvPr/>
-        </p:nvSpPr>
-        <p:spPr>
-          <a:xfrm>
-            <a:off x="7635240" y="4498848"/>
-            <a:ext cx="3474720" cy="1143000"/>
+            <a:pPr algn="ctr" indent="0" marL="0">
+              <a:buNone/>
+            </a:pPr>
+            <a:r>
+              <a:rPr lang="en-US" sz="880" b="1" dirty="0">
+                <a:solidFill>
+                  <a:srgbClr val="FFFFFF"/>
+                </a:solidFill>
+                <a:latin typeface="Aptos" pitchFamily="34" charset="0"/>
+                <a:ea typeface="Aptos" pitchFamily="34" charset="-122"/>
+                <a:cs typeface="Aptos" pitchFamily="34" charset="-120"/>
+              </a:rPr>
+              <a:t>Identify</a:t>
+            </a:r>
+            <a:endParaRPr lang="en-US" sz="880" dirty="0"/>
+          </a:p>
+        </p:txBody>
+      </p:sp>
+      <p:sp>
+        <p:nvSpPr>
+          <p:cNvPr id="18" name="Shape 16"/>
+          <p:cNvSpPr/>
+          <p:nvPr/>
+        </p:nvSpPr>
+        <p:spPr>
+          <a:xfrm>
+            <a:off x="9817608" y="3399739"/>
+            <a:ext cx="164592" cy="0"/>
+          </a:xfrm>
+          <a:prstGeom prst="line">
+            <a:avLst/>
+          </a:prstGeom>
+          <a:noFill/>
+          <a:ln w="15240">
+            <a:solidFill>
+              <a:srgbClr val="8ABBD8"/>
+            </a:solidFill>
+            <a:prstDash val="solid"/>
+          </a:ln>
+        </p:spPr>
+      </p:sp>
+      <p:sp>
+        <p:nvSpPr>
+          <p:cNvPr id="19" name="Shape 17"/>
+          <p:cNvSpPr/>
+          <p:nvPr/>
+        </p:nvSpPr>
+        <p:spPr>
+          <a:xfrm>
+            <a:off x="8927592" y="3248863"/>
+            <a:ext cx="890016" cy="301752"/>
           </a:xfrm>
           <a:prstGeom prst="roundRect">
             <a:avLst>
-              <a:gd name="adj" fmla="val 9600"/>
+              <a:gd name="adj" fmla="val 24242"/>
+            </a:avLst>
+          </a:prstGeom>
+          <a:solidFill>
+            <a:srgbClr val="2F8A28"/>
+          </a:solidFill>
+          <a:ln w="12700">
+            <a:solidFill>
+              <a:srgbClr val="2F8A28"/>
+            </a:solidFill>
+            <a:prstDash val="solid"/>
+          </a:ln>
+        </p:spPr>
+      </p:sp>
+      <p:sp>
+        <p:nvSpPr>
+          <p:cNvPr id="20" name="Text 18"/>
+          <p:cNvSpPr/>
+          <p:nvPr/>
+        </p:nvSpPr>
+        <p:spPr>
+          <a:xfrm>
+            <a:off x="8964168" y="3322015"/>
+            <a:ext cx="816864" cy="146304"/>
+          </a:xfrm>
+          <a:prstGeom prst="rect">
+            <a:avLst/>
+          </a:prstGeom>
+          <a:noFill/>
+          <a:ln/>
+        </p:spPr>
+        <p:txBody>
+          <a:bodyPr wrap="square" lIns="0" tIns="0" rIns="0" bIns="0" rtlCol="0" anchor="ctr">
+            <a:normAutofit/>
+          </a:bodyPr>
+          <a:lstStyle/>
+          <a:p>
+            <a:pPr algn="ctr" indent="0" marL="0">
+              <a:buNone/>
+            </a:pPr>
+            <a:r>
+              <a:rPr lang="en-US" sz="880" b="1" dirty="0">
+                <a:solidFill>
+                  <a:srgbClr val="FFFFFF"/>
+                </a:solidFill>
+                <a:latin typeface="Aptos" pitchFamily="34" charset="0"/>
+                <a:ea typeface="Aptos" pitchFamily="34" charset="-122"/>
+                <a:cs typeface="Aptos" pitchFamily="34" charset="-120"/>
+              </a:rPr>
+              <a:t>Control</a:t>
+            </a:r>
+            <a:endParaRPr lang="en-US" sz="880" dirty="0"/>
+          </a:p>
+        </p:txBody>
+      </p:sp>
+      <p:sp>
+        <p:nvSpPr>
+          <p:cNvPr id="21" name="Shape 19"/>
+          <p:cNvSpPr/>
+          <p:nvPr/>
+        </p:nvSpPr>
+        <p:spPr>
+          <a:xfrm>
+            <a:off x="9982200" y="3248863"/>
+            <a:ext cx="890016" cy="301752"/>
+          </a:xfrm>
+          <a:prstGeom prst="roundRect">
+            <a:avLst>
+              <a:gd name="adj" fmla="val 24242"/>
+            </a:avLst>
+          </a:prstGeom>
+          <a:solidFill>
+            <a:srgbClr val="6A4CA3"/>
+          </a:solidFill>
+          <a:ln w="12700">
+            <a:solidFill>
+              <a:srgbClr val="6A4CA3"/>
+            </a:solidFill>
+            <a:prstDash val="solid"/>
+          </a:ln>
+        </p:spPr>
+      </p:sp>
+      <p:sp>
+        <p:nvSpPr>
+          <p:cNvPr id="22" name="Text 20"/>
+          <p:cNvSpPr/>
+          <p:nvPr/>
+        </p:nvSpPr>
+        <p:spPr>
+          <a:xfrm>
+            <a:off x="10018776" y="3322015"/>
+            <a:ext cx="816864" cy="146304"/>
+          </a:xfrm>
+          <a:prstGeom prst="rect">
+            <a:avLst/>
+          </a:prstGeom>
+          <a:noFill/>
+          <a:ln/>
+        </p:spPr>
+        <p:txBody>
+          <a:bodyPr wrap="square" lIns="0" tIns="0" rIns="0" bIns="0" rtlCol="0" anchor="ctr">
+            <a:normAutofit/>
+          </a:bodyPr>
+          <a:lstStyle/>
+          <a:p>
+            <a:pPr algn="ctr" indent="0" marL="0">
+              <a:buNone/>
+            </a:pPr>
+            <a:r>
+              <a:rPr lang="en-US" sz="880" b="1" dirty="0">
+                <a:solidFill>
+                  <a:srgbClr val="FFFFFF"/>
+                </a:solidFill>
+                <a:latin typeface="Aptos" pitchFamily="34" charset="0"/>
+                <a:ea typeface="Aptos" pitchFamily="34" charset="-122"/>
+                <a:cs typeface="Aptos" pitchFamily="34" charset="-120"/>
+              </a:rPr>
+              <a:t>Monitor</a:t>
+            </a:r>
+            <a:endParaRPr lang="en-US" sz="880" dirty="0"/>
+          </a:p>
+        </p:txBody>
+      </p:sp>
+      <p:sp>
+        <p:nvSpPr>
+          <p:cNvPr id="23" name="Text 21"/>
+          <p:cNvSpPr/>
+          <p:nvPr/>
+        </p:nvSpPr>
+        <p:spPr>
+          <a:xfrm>
+            <a:off x="7854696" y="3742639"/>
+            <a:ext cx="3035808" cy="365760"/>
+          </a:xfrm>
+          <a:prstGeom prst="rect">
+            <a:avLst/>
+          </a:prstGeom>
+          <a:noFill/>
+          <a:ln/>
+        </p:spPr>
+        <p:txBody>
+          <a:bodyPr wrap="square" lIns="254" tIns="254" rIns="254" bIns="254" rtlCol="0" anchor="t">
+            <a:normAutofit/>
+          </a:bodyPr>
+          <a:lstStyle/>
+          <a:p>
+            <a:pPr indent="0" marL="0">
+              <a:buNone/>
+            </a:pPr>
+            <a:r>
+              <a:rPr lang="en-US" sz="1120" dirty="0">
+                <a:solidFill>
+                  <a:srgbClr val="17364A"/>
+                </a:solidFill>
+                <a:latin typeface="Aptos" pitchFamily="34" charset="0"/>
+                <a:ea typeface="Aptos" pitchFamily="34" charset="-122"/>
+                <a:cs typeface="Aptos" pitchFamily="34" charset="-120"/>
+              </a:rPr>
+              <a:t>Responsible use depends on finding risks early, applying safeguards, and watching for drift or harm over time.</a:t>
+            </a:r>
+            <a:endParaRPr lang="en-US" sz="1120" dirty="0"/>
+          </a:p>
+        </p:txBody>
+      </p:sp>
+      <p:sp>
+        <p:nvSpPr>
+          <p:cNvPr id="24" name="Shape 22"/>
+          <p:cNvSpPr/>
+          <p:nvPr/>
+        </p:nvSpPr>
+        <p:spPr>
+          <a:xfrm>
+            <a:off x="7635240" y="4391863"/>
+            <a:ext cx="3474720" cy="1255471"/>
+          </a:xfrm>
+          <a:prstGeom prst="roundRect">
+            <a:avLst>
+              <a:gd name="adj" fmla="val 8740"/>
             </a:avLst>
           </a:prstGeom>
           <a:solidFill>
@@ -16650,13 +17298,13 @@
       </p:sp>
       <p:sp>
         <p:nvSpPr>
-          <p:cNvPr id="17" name="Text 15"/>
-          <p:cNvSpPr/>
-          <p:nvPr/>
-        </p:nvSpPr>
-        <p:spPr>
-          <a:xfrm>
-            <a:off x="7799832" y="4645152"/>
+          <p:cNvPr id="25" name="Text 23"/>
+          <p:cNvSpPr/>
+          <p:nvPr/>
+        </p:nvSpPr>
+        <p:spPr>
+          <a:xfrm>
+            <a:off x="7799832" y="4538167"/>
             <a:ext cx="3145536" cy="256032"/>
           </a:xfrm>
           <a:prstGeom prst="rect">
@@ -16689,14 +17337,14 @@
       </p:sp>
       <p:sp>
         <p:nvSpPr>
-          <p:cNvPr id="18" name="Text 16"/>
-          <p:cNvSpPr/>
-          <p:nvPr/>
-        </p:nvSpPr>
-        <p:spPr>
-          <a:xfrm>
-            <a:off x="7799832" y="4974336"/>
-            <a:ext cx="3145536" cy="576072"/>
+          <p:cNvPr id="26" name="Text 24"/>
+          <p:cNvSpPr/>
+          <p:nvPr/>
+        </p:nvSpPr>
+        <p:spPr>
+          <a:xfrm>
+            <a:off x="7799832" y="4867351"/>
+            <a:ext cx="3145536" cy="688543"/>
           </a:xfrm>
           <a:prstGeom prst="rect">
             <a:avLst/>
@@ -16722,7 +17370,7 @@
                 <a:ea typeface="Aptos" pitchFamily="34" charset="-122"/>
                 <a:cs typeface="Aptos" pitchFamily="34" charset="-120"/>
               </a:rPr>
-              <a:t>Identify what could go wrong, who could be affected, what safeguards are needed, and what evidence should be reviewed.</a:t>
+              <a:t>Identify what could go wrong, who could be affected, what safeguards are needed, and what evidence should be reviewed before use.</a:t>
             </a:r>
             <a:endParaRPr lang="en-US" sz="1320" dirty="0"/>
           </a:p>
@@ -17091,11 +17739,11 @@
         <p:spPr>
           <a:xfrm>
             <a:off x="7635240" y="1325880"/>
-            <a:ext cx="3474720" cy="1325880"/>
+            <a:ext cx="3474720" cy="1255471"/>
           </a:xfrm>
           <a:prstGeom prst="roundRect">
             <a:avLst>
-              <a:gd name="adj" fmla="val 8276"/>
+              <a:gd name="adj" fmla="val 8740"/>
             </a:avLst>
           </a:prstGeom>
           <a:solidFill>
@@ -17157,7 +17805,7 @@
         <p:spPr>
           <a:xfrm>
             <a:off x="7799832" y="1801368"/>
-            <a:ext cx="3145536" cy="758952"/>
+            <a:ext cx="3145536" cy="688543"/>
           </a:xfrm>
           <a:prstGeom prst="rect">
             <a:avLst/>
@@ -17197,7 +17845,7 @@
         </p:nvSpPr>
         <p:spPr>
           <a:xfrm>
-            <a:off x="7635240" y="2788920"/>
+            <a:off x="7635240" y="2718511"/>
             <a:ext cx="3474720" cy="1536192"/>
           </a:xfrm>
           <a:prstGeom prst="roundRect">
@@ -17224,7 +17872,7 @@
         </p:nvSpPr>
         <p:spPr>
           <a:xfrm>
-            <a:off x="7799832" y="2935224"/>
+            <a:off x="7799832" y="2864815"/>
             <a:ext cx="3145536" cy="256032"/>
           </a:xfrm>
           <a:prstGeom prst="rect">
@@ -17263,7 +17911,7 @@
         </p:nvSpPr>
         <p:spPr>
           <a:xfrm>
-            <a:off x="7818120" y="3300984"/>
+            <a:off x="7818120" y="3230575"/>
             <a:ext cx="3090672" cy="877824"/>
           </a:xfrm>
           <a:prstGeom prst="rect">
@@ -17338,12 +17986,12 @@
         </p:nvSpPr>
         <p:spPr>
           <a:xfrm>
-            <a:off x="7635240" y="4498848"/>
-            <a:ext cx="3474720" cy="1143000"/>
+            <a:off x="7635240" y="4391863"/>
+            <a:ext cx="3474720" cy="1255471"/>
           </a:xfrm>
           <a:prstGeom prst="roundRect">
             <a:avLst>
-              <a:gd name="adj" fmla="val 9600"/>
+              <a:gd name="adj" fmla="val 8740"/>
             </a:avLst>
           </a:prstGeom>
           <a:solidFill>
@@ -17365,7 +18013,7 @@
         </p:nvSpPr>
         <p:spPr>
           <a:xfrm>
-            <a:off x="7799832" y="4645152"/>
+            <a:off x="7799832" y="4538167"/>
             <a:ext cx="3145536" cy="256032"/>
           </a:xfrm>
           <a:prstGeom prst="rect">
@@ -17404,8 +18052,8 @@
         </p:nvSpPr>
         <p:spPr>
           <a:xfrm>
-            <a:off x="7799832" y="4974336"/>
-            <a:ext cx="3145536" cy="576072"/>
+            <a:off x="7799832" y="4867351"/>
+            <a:ext cx="3145536" cy="688543"/>
           </a:xfrm>
           <a:prstGeom prst="rect">
             <a:avLst/>
@@ -17431,7 +18079,7 @@
                 <a:ea typeface="Aptos" pitchFamily="34" charset="-122"/>
                 <a:cs typeface="Aptos" pitchFamily="34" charset="-120"/>
               </a:rPr>
-              <a:t>Identify what could go wrong, who could be affected, what safeguards are needed, and what evidence should be reviewed.</a:t>
+              <a:t>Identify what could go wrong, who could be affected, what safeguards are needed, and what evidence should be reviewed before use.</a:t>
             </a:r>
             <a:endParaRPr lang="en-US" sz="1320" dirty="0"/>
           </a:p>

--- a/downloads/presentations/modules/anl-220.pptx
+++ b/downloads/presentations/modules/anl-220.pptx
@@ -3343,8 +3343,8 @@
         </p:nvSpPr>
         <p:spPr>
           <a:xfrm>
-            <a:off x="868680" y="1508760"/>
-            <a:ext cx="6309360" cy="4160520"/>
+            <a:off x="822960" y="1463040"/>
+            <a:ext cx="6565392" cy="4343400"/>
           </a:xfrm>
           <a:prstGeom prst="rect">
             <a:avLst/>
@@ -3362,7 +3362,7 @@
               <a:buNone/>
             </a:pPr>
             <a:r>
-              <a:rPr lang="en-US" sz="2100" dirty="0">
+              <a:rPr lang="en-US" sz="1920" dirty="0">
                 <a:solidFill>
                   <a:srgbClr val="003A63"/>
                 </a:solidFill>
@@ -3372,14 +3372,14 @@
               </a:rPr>
               <a:t>• A predictive workflow begins with the outcome.</a:t>
             </a:r>
-            <a:endParaRPr lang="en-US" sz="2100" dirty="0"/>
-          </a:p>
-          <a:p>
-            <a:pPr indent="0" marL="0">
-              <a:buNone/>
-            </a:pPr>
-            <a:r>
-              <a:rPr lang="en-US" sz="2100" dirty="0">
+            <a:endParaRPr lang="en-US" sz="1920" dirty="0"/>
+          </a:p>
+          <a:p>
+            <a:pPr indent="0" marL="0">
+              <a:buNone/>
+            </a:pPr>
+            <a:r>
+              <a:rPr lang="en-US" sz="1920" dirty="0">
                 <a:solidFill>
                   <a:srgbClr val="003A63"/>
                 </a:solidFill>
@@ -3387,16 +3387,16 @@
                 <a:ea typeface="Aptos" pitchFamily="34" charset="-122"/>
                 <a:cs typeface="Aptos" pitchFamily="34" charset="-120"/>
               </a:rPr>
-              <a:t>• The outcome must be specific, measurable, and aligned with a public health action.</a:t>
-            </a:r>
-            <a:endParaRPr lang="en-US" sz="2100" dirty="0"/>
-          </a:p>
-          <a:p>
-            <a:pPr indent="0" marL="0">
-              <a:buNone/>
-            </a:pPr>
-            <a:r>
-              <a:rPr lang="en-US" sz="2100" dirty="0">
+              <a:t>• The outcome must be specific, measurable, and aligned with a public health.</a:t>
+            </a:r>
+            <a:endParaRPr lang="en-US" sz="1920" dirty="0"/>
+          </a:p>
+          <a:p>
+            <a:pPr indent="0" marL="0">
+              <a:buNone/>
+            </a:pPr>
+            <a:r>
+              <a:rPr lang="en-US" sz="1920" dirty="0">
                 <a:solidFill>
                   <a:srgbClr val="003A63"/>
                 </a:solidFill>
@@ -3406,7 +3406,7 @@
               </a:rPr>
               <a:t>• Predicting “risk” is not enough.</a:t>
             </a:r>
-            <a:endParaRPr lang="en-US" sz="2100" dirty="0"/>
+            <a:endParaRPr lang="en-US" sz="1920" dirty="0"/>
           </a:p>
         </p:txBody>
       </p:sp>
@@ -3418,12 +3418,12 @@
         </p:nvSpPr>
         <p:spPr>
           <a:xfrm>
-            <a:off x="7635240" y="1325880"/>
-            <a:ext cx="3474720" cy="1207008"/>
+            <a:off x="7543800" y="1325880"/>
+            <a:ext cx="3611880" cy="1261872"/>
           </a:xfrm>
           <a:prstGeom prst="roundRect">
             <a:avLst>
-              <a:gd name="adj" fmla="val 9091"/>
+              <a:gd name="adj" fmla="val 8696"/>
             </a:avLst>
           </a:prstGeom>
           <a:solidFill>
@@ -3445,8 +3445,8 @@
         </p:nvSpPr>
         <p:spPr>
           <a:xfrm>
-            <a:off x="7799832" y="1472184"/>
-            <a:ext cx="3145536" cy="256032"/>
+            <a:off x="7708392" y="1453896"/>
+            <a:ext cx="3282696" cy="228600"/>
           </a:xfrm>
           <a:prstGeom prst="rect">
             <a:avLst/>
@@ -3462,7 +3462,7 @@
               <a:buNone/>
             </a:pPr>
             <a:r>
-              <a:rPr lang="en-US" sz="1300" b="1" dirty="0">
+              <a:rPr lang="en-US" sz="1220" b="1" dirty="0">
                 <a:solidFill>
                   <a:srgbClr val="0068B7"/>
                 </a:solidFill>
@@ -3472,7 +3472,7 @@
               </a:rPr>
               <a:t>Risk check</a:t>
             </a:r>
-            <a:endParaRPr lang="en-US" sz="1300" dirty="0"/>
+            <a:endParaRPr lang="en-US" sz="1220" dirty="0"/>
           </a:p>
         </p:txBody>
       </p:sp>
@@ -3484,8 +3484,8 @@
         </p:nvSpPr>
         <p:spPr>
           <a:xfrm>
-            <a:off x="7799832" y="1801368"/>
-            <a:ext cx="3145536" cy="640080"/>
+            <a:off x="7708392" y="1764792"/>
+            <a:ext cx="3282696" cy="749808"/>
           </a:xfrm>
           <a:prstGeom prst="rect">
             <a:avLst/>
@@ -3503,7 +3503,7 @@
               <a:buNone/>
             </a:pPr>
             <a:r>
-              <a:rPr lang="en-US" sz="1320" dirty="0">
+              <a:rPr lang="en-US" sz="1220" dirty="0">
                 <a:solidFill>
                   <a:srgbClr val="17364A"/>
                 </a:solidFill>
@@ -3513,7 +3513,7 @@
               </a:rPr>
               <a:t>A predictive workflow begins with the outcome.</a:t>
             </a:r>
-            <a:endParaRPr lang="en-US" sz="1320" dirty="0"/>
+            <a:endParaRPr lang="en-US" sz="1220" dirty="0"/>
           </a:p>
         </p:txBody>
       </p:sp>
@@ -3525,12 +3525,12 @@
         </p:nvSpPr>
         <p:spPr>
           <a:xfrm>
-            <a:off x="7635240" y="2670048"/>
-            <a:ext cx="3474720" cy="1536192"/>
+            <a:off x="7543800" y="2724912"/>
+            <a:ext cx="3611880" cy="1527048"/>
           </a:xfrm>
           <a:prstGeom prst="roundRect">
             <a:avLst>
-              <a:gd name="adj" fmla="val 7143"/>
+              <a:gd name="adj" fmla="val 7186"/>
             </a:avLst>
           </a:prstGeom>
           <a:solidFill>
@@ -3552,24 +3552,26 @@
         </p:nvSpPr>
         <p:spPr>
           <a:xfrm>
-            <a:off x="7799832" y="2798064"/>
-            <a:ext cx="3145536" cy="237744"/>
-          </a:xfrm>
-          <a:prstGeom prst="rect">
-            <a:avLst/>
-          </a:prstGeom>
-          <a:noFill/>
-          <a:ln/>
-        </p:spPr>
-        <p:txBody>
-          <a:bodyPr wrap="square" lIns="0" tIns="0" rIns="0" bIns="0" rtlCol="0" anchor="ctr"/>
-          <a:lstStyle/>
-          <a:p>
-            <a:pPr indent="0" marL="0">
-              <a:buNone/>
-            </a:pPr>
-            <a:r>
-              <a:rPr lang="en-US" sz="1250" b="1" dirty="0">
+            <a:off x="7708392" y="2852928"/>
+            <a:ext cx="3282696" cy="219456"/>
+          </a:xfrm>
+          <a:prstGeom prst="rect">
+            <a:avLst/>
+          </a:prstGeom>
+          <a:noFill/>
+          <a:ln/>
+        </p:spPr>
+        <p:txBody>
+          <a:bodyPr wrap="square" lIns="0" tIns="0" rIns="0" bIns="0" rtlCol="0" anchor="ctr">
+            <a:normAutofit/>
+          </a:bodyPr>
+          <a:lstStyle/>
+          <a:p>
+            <a:pPr indent="0" marL="0">
+              <a:buNone/>
+            </a:pPr>
+            <a:r>
+              <a:rPr lang="en-US" sz="1160" b="1" dirty="0">
                 <a:solidFill>
                   <a:srgbClr val="0068B7"/>
                 </a:solidFill>
@@ -3579,7 +3581,7 @@
               </a:rPr>
               <a:t>Risk control loop</a:t>
             </a:r>
-            <a:endParaRPr lang="en-US" sz="1250" dirty="0"/>
+            <a:endParaRPr lang="en-US" sz="1160" dirty="0"/>
           </a:p>
         </p:txBody>
       </p:sp>
@@ -3591,7 +3593,7 @@
         </p:nvSpPr>
         <p:spPr>
           <a:xfrm>
-            <a:off x="8763000" y="3351276"/>
+            <a:off x="8717280" y="3406140"/>
             <a:ext cx="164592" cy="0"/>
           </a:xfrm>
           <a:prstGeom prst="line">
@@ -3614,8 +3616,8 @@
         </p:nvSpPr>
         <p:spPr>
           <a:xfrm>
-            <a:off x="7872984" y="3200400"/>
-            <a:ext cx="890016" cy="301752"/>
+            <a:off x="7781544" y="3255264"/>
+            <a:ext cx="935736" cy="301752"/>
           </a:xfrm>
           <a:prstGeom prst="roundRect">
             <a:avLst>
@@ -3641,8 +3643,8 @@
         </p:nvSpPr>
         <p:spPr>
           <a:xfrm>
-            <a:off x="7909560" y="3273552"/>
-            <a:ext cx="816864" cy="146304"/>
+            <a:off x="7818120" y="3328416"/>
+            <a:ext cx="862584" cy="146304"/>
           </a:xfrm>
           <a:prstGeom prst="rect">
             <a:avLst/>
@@ -3682,7 +3684,7 @@
         </p:nvSpPr>
         <p:spPr>
           <a:xfrm>
-            <a:off x="9817608" y="3351276"/>
+            <a:off x="9817608" y="3406140"/>
             <a:ext cx="164592" cy="0"/>
           </a:xfrm>
           <a:prstGeom prst="line">
@@ -3705,8 +3707,8 @@
         </p:nvSpPr>
         <p:spPr>
           <a:xfrm>
-            <a:off x="8927592" y="3200400"/>
-            <a:ext cx="890016" cy="301752"/>
+            <a:off x="8881872" y="3255264"/>
+            <a:ext cx="935736" cy="301752"/>
           </a:xfrm>
           <a:prstGeom prst="roundRect">
             <a:avLst>
@@ -3732,8 +3734,8 @@
         </p:nvSpPr>
         <p:spPr>
           <a:xfrm>
-            <a:off x="8964168" y="3273552"/>
-            <a:ext cx="816864" cy="146304"/>
+            <a:off x="8918448" y="3328416"/>
+            <a:ext cx="862584" cy="146304"/>
           </a:xfrm>
           <a:prstGeom prst="rect">
             <a:avLst/>
@@ -3773,8 +3775,8 @@
         </p:nvSpPr>
         <p:spPr>
           <a:xfrm>
-            <a:off x="9982200" y="3200400"/>
-            <a:ext cx="890016" cy="301752"/>
+            <a:off x="9982200" y="3255264"/>
+            <a:ext cx="935736" cy="301752"/>
           </a:xfrm>
           <a:prstGeom prst="roundRect">
             <a:avLst>
@@ -3800,8 +3802,8 @@
         </p:nvSpPr>
         <p:spPr>
           <a:xfrm>
-            <a:off x="10018776" y="3273552"/>
-            <a:ext cx="816864" cy="146304"/>
+            <a:off x="10018776" y="3328416"/>
+            <a:ext cx="862584" cy="146304"/>
           </a:xfrm>
           <a:prstGeom prst="rect">
             <a:avLst/>
@@ -3841,8 +3843,8 @@
         </p:nvSpPr>
         <p:spPr>
           <a:xfrm>
-            <a:off x="7854696" y="3694176"/>
-            <a:ext cx="3035808" cy="365760"/>
+            <a:off x="7763256" y="3749040"/>
+            <a:ext cx="3172968" cy="356616"/>
           </a:xfrm>
           <a:prstGeom prst="rect">
             <a:avLst/>
@@ -3860,7 +3862,7 @@
               <a:buNone/>
             </a:pPr>
             <a:r>
-              <a:rPr lang="en-US" sz="1120" dirty="0">
+              <a:rPr lang="en-US" sz="1040" dirty="0">
                 <a:solidFill>
                   <a:srgbClr val="17364A"/>
                 </a:solidFill>
@@ -3868,9 +3870,9 @@
                 <a:ea typeface="Aptos" pitchFamily="34" charset="-122"/>
                 <a:cs typeface="Aptos" pitchFamily="34" charset="-120"/>
               </a:rPr>
-              <a:t>Responsible use depends on finding risks early, applying safeguards, and watching for drift or harm over time.</a:t>
-            </a:r>
-            <a:endParaRPr lang="en-US" sz="1120" dirty="0"/>
+              <a:t>Responsible use depends on finding risks early, applying safeguards,.</a:t>
+            </a:r>
+            <a:endParaRPr lang="en-US" sz="1040" dirty="0"/>
           </a:p>
         </p:txBody>
       </p:sp>
@@ -3882,12 +3884,12 @@
         </p:nvSpPr>
         <p:spPr>
           <a:xfrm>
-            <a:off x="7635240" y="4343400"/>
-            <a:ext cx="3474720" cy="1255471"/>
+            <a:off x="7543800" y="4389120"/>
+            <a:ext cx="3611880" cy="1261872"/>
           </a:xfrm>
           <a:prstGeom prst="roundRect">
             <a:avLst>
-              <a:gd name="adj" fmla="val 8740"/>
+              <a:gd name="adj" fmla="val 8696"/>
             </a:avLst>
           </a:prstGeom>
           <a:solidFill>
@@ -3909,8 +3911,8 @@
         </p:nvSpPr>
         <p:spPr>
           <a:xfrm>
-            <a:off x="7799832" y="4489704"/>
-            <a:ext cx="3145536" cy="256032"/>
+            <a:off x="7708392" y="4517136"/>
+            <a:ext cx="3282696" cy="228600"/>
           </a:xfrm>
           <a:prstGeom prst="rect">
             <a:avLst/>
@@ -3926,7 +3928,7 @@
               <a:buNone/>
             </a:pPr>
             <a:r>
-              <a:rPr lang="en-US" sz="1300" b="1" dirty="0">
+              <a:rPr lang="en-US" sz="1220" b="1" dirty="0">
                 <a:solidFill>
                   <a:srgbClr val="0068B7"/>
                 </a:solidFill>
@@ -3936,7 +3938,7 @@
               </a:rPr>
               <a:t>Safeguard to plan</a:t>
             </a:r>
-            <a:endParaRPr lang="en-US" sz="1300" dirty="0"/>
+            <a:endParaRPr lang="en-US" sz="1220" dirty="0"/>
           </a:p>
         </p:txBody>
       </p:sp>
@@ -3948,8 +3950,8 @@
         </p:nvSpPr>
         <p:spPr>
           <a:xfrm>
-            <a:off x="7799832" y="4818888"/>
-            <a:ext cx="3145536" cy="688543"/>
+            <a:off x="7708392" y="4828032"/>
+            <a:ext cx="3282696" cy="749808"/>
           </a:xfrm>
           <a:prstGeom prst="rect">
             <a:avLst/>
@@ -3967,7 +3969,7 @@
               <a:buNone/>
             </a:pPr>
             <a:r>
-              <a:rPr lang="en-US" sz="1320" dirty="0">
+              <a:rPr lang="en-US" sz="1220" dirty="0">
                 <a:solidFill>
                   <a:srgbClr val="17364A"/>
                 </a:solidFill>
@@ -3975,9 +3977,9 @@
                 <a:ea typeface="Aptos" pitchFamily="34" charset="-122"/>
                 <a:cs typeface="Aptos" pitchFamily="34" charset="-120"/>
               </a:rPr>
-              <a:t>Identify what could go wrong, who could be affected, what safeguards are needed, and what evidence should be reviewed before use.</a:t>
-            </a:r>
-            <a:endParaRPr lang="en-US" sz="1320" dirty="0"/>
+              <a:t>Identify what could go wrong, who could be affected, what safeguards are needed,.</a:t>
+            </a:r>
+            <a:endParaRPr lang="en-US" sz="1220" dirty="0"/>
           </a:p>
         </p:txBody>
       </p:sp>
@@ -4268,8 +4270,8 @@
         </p:nvSpPr>
         <p:spPr>
           <a:xfrm>
-            <a:off x="868680" y="1508760"/>
-            <a:ext cx="6309360" cy="4160520"/>
+            <a:off x="822960" y="1463040"/>
+            <a:ext cx="6565392" cy="4343400"/>
           </a:xfrm>
           <a:prstGeom prst="rect">
             <a:avLst/>
@@ -4287,7 +4289,7 @@
               <a:buNone/>
             </a:pPr>
             <a:r>
-              <a:rPr lang="en-US" sz="2100" dirty="0">
+              <a:rPr lang="en-US" sz="1920" dirty="0">
                 <a:solidFill>
                   <a:srgbClr val="003A63"/>
                 </a:solidFill>
@@ -4297,14 +4299,14 @@
               </a:rPr>
               <a:t>• Thresholds are policy and workflow decisions as much as technical decisions.</a:t>
             </a:r>
-            <a:endParaRPr lang="en-US" sz="2100" dirty="0"/>
-          </a:p>
-          <a:p>
-            <a:pPr indent="0" marL="0">
-              <a:buNone/>
-            </a:pPr>
-            <a:r>
-              <a:rPr lang="en-US" sz="2100" dirty="0">
+            <a:endParaRPr lang="en-US" sz="1920" dirty="0"/>
+          </a:p>
+          <a:p>
+            <a:pPr indent="0" marL="0">
+              <a:buNone/>
+            </a:pPr>
+            <a:r>
+              <a:rPr lang="en-US" sz="1920" dirty="0">
                 <a:solidFill>
                   <a:srgbClr val="003A63"/>
                 </a:solidFill>
@@ -4312,16 +4314,16 @@
                 <a:ea typeface="Aptos" pitchFamily="34" charset="-122"/>
                 <a:cs typeface="Aptos" pitchFamily="34" charset="-120"/>
               </a:rPr>
-              <a:t>• A lower threshold may catch more true high-risk cases but create more false positives and.</a:t>
-            </a:r>
-            <a:endParaRPr lang="en-US" sz="2100" dirty="0"/>
-          </a:p>
-          <a:p>
-            <a:pPr indent="0" marL="0">
-              <a:buNone/>
-            </a:pPr>
-            <a:r>
-              <a:rPr lang="en-US" sz="2100" dirty="0">
+              <a:t>• A lower threshold may catch more true high-risk cases but create more false.</a:t>
+            </a:r>
+            <a:endParaRPr lang="en-US" sz="1920" dirty="0"/>
+          </a:p>
+          <a:p>
+            <a:pPr indent="0" marL="0">
+              <a:buNone/>
+            </a:pPr>
+            <a:r>
+              <a:rPr lang="en-US" sz="1920" dirty="0">
                 <a:solidFill>
                   <a:srgbClr val="003A63"/>
                 </a:solidFill>
@@ -4329,9 +4331,9 @@
                 <a:ea typeface="Aptos" pitchFamily="34" charset="-122"/>
                 <a:cs typeface="Aptos" pitchFamily="34" charset="-120"/>
               </a:rPr>
-              <a:t>• A higher threshold may conserve resources but miss people or places needing support.</a:t>
-            </a:r>
-            <a:endParaRPr lang="en-US" sz="2100" dirty="0"/>
+              <a:t>• A higher threshold may conserve resources but miss people or places needing.</a:t>
+            </a:r>
+            <a:endParaRPr lang="en-US" sz="1920" dirty="0"/>
           </a:p>
         </p:txBody>
       </p:sp>
@@ -4343,12 +4345,12 @@
         </p:nvSpPr>
         <p:spPr>
           <a:xfrm>
-            <a:off x="7635240" y="1325880"/>
-            <a:ext cx="3474720" cy="1207008"/>
+            <a:off x="7543800" y="1325880"/>
+            <a:ext cx="3611880" cy="1261872"/>
           </a:xfrm>
           <a:prstGeom prst="roundRect">
             <a:avLst>
-              <a:gd name="adj" fmla="val 9091"/>
+              <a:gd name="adj" fmla="val 8696"/>
             </a:avLst>
           </a:prstGeom>
           <a:solidFill>
@@ -4370,8 +4372,8 @@
         </p:nvSpPr>
         <p:spPr>
           <a:xfrm>
-            <a:off x="7799832" y="1472184"/>
-            <a:ext cx="3145536" cy="256032"/>
+            <a:off x="7708392" y="1453896"/>
+            <a:ext cx="3282696" cy="228600"/>
           </a:xfrm>
           <a:prstGeom prst="rect">
             <a:avLst/>
@@ -4387,7 +4389,7 @@
               <a:buNone/>
             </a:pPr>
             <a:r>
-              <a:rPr lang="en-US" sz="1300" b="1" dirty="0">
+              <a:rPr lang="en-US" sz="1220" b="1" dirty="0">
                 <a:solidFill>
                   <a:srgbClr val="0068B7"/>
                 </a:solidFill>
@@ -4397,7 +4399,7 @@
               </a:rPr>
               <a:t>Risk check</a:t>
             </a:r>
-            <a:endParaRPr lang="en-US" sz="1300" dirty="0"/>
+            <a:endParaRPr lang="en-US" sz="1220" dirty="0"/>
           </a:p>
         </p:txBody>
       </p:sp>
@@ -4409,8 +4411,8 @@
         </p:nvSpPr>
         <p:spPr>
           <a:xfrm>
-            <a:off x="7799832" y="1801368"/>
-            <a:ext cx="3145536" cy="640080"/>
+            <a:off x="7708392" y="1764792"/>
+            <a:ext cx="3282696" cy="749808"/>
           </a:xfrm>
           <a:prstGeom prst="rect">
             <a:avLst/>
@@ -4428,7 +4430,7 @@
               <a:buNone/>
             </a:pPr>
             <a:r>
-              <a:rPr lang="en-US" sz="1320" dirty="0">
+              <a:rPr lang="en-US" sz="1220" dirty="0">
                 <a:solidFill>
                   <a:srgbClr val="17364A"/>
                 </a:solidFill>
@@ -4438,7 +4440,7 @@
               </a:rPr>
               <a:t>Thresholds are policy and workflow decisions as much as technical decisions.</a:t>
             </a:r>
-            <a:endParaRPr lang="en-US" sz="1320" dirty="0"/>
+            <a:endParaRPr lang="en-US" sz="1220" dirty="0"/>
           </a:p>
         </p:txBody>
       </p:sp>
@@ -4450,12 +4452,12 @@
         </p:nvSpPr>
         <p:spPr>
           <a:xfrm>
-            <a:off x="7635240" y="2670048"/>
-            <a:ext cx="3474720" cy="1536192"/>
+            <a:off x="7543800" y="2724912"/>
+            <a:ext cx="3611880" cy="1527048"/>
           </a:xfrm>
           <a:prstGeom prst="roundRect">
             <a:avLst>
-              <a:gd name="adj" fmla="val 7143"/>
+              <a:gd name="adj" fmla="val 7186"/>
             </a:avLst>
           </a:prstGeom>
           <a:solidFill>
@@ -4477,8 +4479,8 @@
         </p:nvSpPr>
         <p:spPr>
           <a:xfrm>
-            <a:off x="7799832" y="2816352"/>
-            <a:ext cx="3145536" cy="256032"/>
+            <a:off x="7708392" y="2852928"/>
+            <a:ext cx="3282696" cy="228600"/>
           </a:xfrm>
           <a:prstGeom prst="rect">
             <a:avLst/>
@@ -4494,7 +4496,7 @@
               <a:buNone/>
             </a:pPr>
             <a:r>
-              <a:rPr lang="en-US" sz="1300" b="1" dirty="0">
+              <a:rPr lang="en-US" sz="1220" b="1" dirty="0">
                 <a:solidFill>
                   <a:srgbClr val="0068B7"/>
                 </a:solidFill>
@@ -4504,7 +4506,7 @@
               </a:rPr>
               <a:t>Concept checkpoints</a:t>
             </a:r>
-            <a:endParaRPr lang="en-US" sz="1300" dirty="0"/>
+            <a:endParaRPr lang="en-US" sz="1220" dirty="0"/>
           </a:p>
         </p:txBody>
       </p:sp>
@@ -4516,8 +4518,8 @@
         </p:nvSpPr>
         <p:spPr>
           <a:xfrm>
-            <a:off x="7818120" y="3182112"/>
-            <a:ext cx="3090672" cy="877824"/>
+            <a:off x="7726680" y="3182112"/>
+            <a:ext cx="3227832" cy="960120"/>
           </a:xfrm>
           <a:prstGeom prst="rect">
             <a:avLst/>
@@ -4535,7 +4537,7 @@
               <a:buNone/>
             </a:pPr>
             <a:r>
-              <a:rPr lang="en-US" sz="1220" dirty="0">
+              <a:rPr lang="en-US" sz="1140" dirty="0">
                 <a:solidFill>
                   <a:srgbClr val="17364A"/>
                 </a:solidFill>
@@ -4543,16 +4545,16 @@
                 <a:ea typeface="Aptos" pitchFamily="34" charset="-122"/>
                 <a:cs typeface="Aptos" pitchFamily="34" charset="-120"/>
               </a:rPr>
-              <a:t>Threshold selection should consider staffing capacity, consequence.</a:t>
-            </a:r>
-            <a:endParaRPr lang="en-US" sz="1220" dirty="0"/>
-          </a:p>
-          <a:p>
-            <a:pPr indent="0" marL="0">
-              <a:buNone/>
-            </a:pPr>
-            <a:r>
-              <a:rPr lang="en-US" sz="1220" dirty="0">
+              <a:t>Threshold selection should consider staffing.</a:t>
+            </a:r>
+            <a:endParaRPr lang="en-US" sz="1140" dirty="0"/>
+          </a:p>
+          <a:p>
+            <a:pPr indent="0" marL="0">
+              <a:buNone/>
+            </a:pPr>
+            <a:r>
+              <a:rPr lang="en-US" sz="1140" dirty="0">
                 <a:solidFill>
                   <a:srgbClr val="17364A"/>
                 </a:solidFill>
@@ -4562,14 +4564,14 @@
               </a:rPr>
               <a:t>Post-deployment monitoring is essential.</a:t>
             </a:r>
-            <a:endParaRPr lang="en-US" sz="1220" dirty="0"/>
-          </a:p>
-          <a:p>
-            <a:pPr indent="0" marL="0">
-              <a:buNone/>
-            </a:pPr>
-            <a:r>
-              <a:rPr lang="en-US" sz="1220" dirty="0">
+            <a:endParaRPr lang="en-US" sz="1140" dirty="0"/>
+          </a:p>
+          <a:p>
+            <a:pPr indent="0" marL="0">
+              <a:buNone/>
+            </a:pPr>
+            <a:r>
+              <a:rPr lang="en-US" sz="1140" dirty="0">
                 <a:solidFill>
                   <a:srgbClr val="17364A"/>
                 </a:solidFill>
@@ -4577,9 +4579,9 @@
                 <a:ea typeface="Aptos" pitchFamily="34" charset="-122"/>
                 <a:cs typeface="Aptos" pitchFamily="34" charset="-120"/>
               </a:rPr>
-              <a:t>A model that worked during development may degrade as disease.</a:t>
-            </a:r>
-            <a:endParaRPr lang="en-US" sz="1220" dirty="0"/>
+              <a:t>A model that worked during development may degrade.</a:t>
+            </a:r>
+            <a:endParaRPr lang="en-US" sz="1140" dirty="0"/>
           </a:p>
         </p:txBody>
       </p:sp>
@@ -4591,12 +4593,12 @@
         </p:nvSpPr>
         <p:spPr>
           <a:xfrm>
-            <a:off x="7635240" y="4343400"/>
-            <a:ext cx="3474720" cy="1255471"/>
+            <a:off x="7543800" y="4389120"/>
+            <a:ext cx="3611880" cy="1261872"/>
           </a:xfrm>
           <a:prstGeom prst="roundRect">
             <a:avLst>
-              <a:gd name="adj" fmla="val 8740"/>
+              <a:gd name="adj" fmla="val 8696"/>
             </a:avLst>
           </a:prstGeom>
           <a:solidFill>
@@ -4618,8 +4620,8 @@
         </p:nvSpPr>
         <p:spPr>
           <a:xfrm>
-            <a:off x="7799832" y="4489704"/>
-            <a:ext cx="3145536" cy="256032"/>
+            <a:off x="7708392" y="4517136"/>
+            <a:ext cx="3282696" cy="228600"/>
           </a:xfrm>
           <a:prstGeom prst="rect">
             <a:avLst/>
@@ -4635,7 +4637,7 @@
               <a:buNone/>
             </a:pPr>
             <a:r>
-              <a:rPr lang="en-US" sz="1300" b="1" dirty="0">
+              <a:rPr lang="en-US" sz="1220" b="1" dirty="0">
                 <a:solidFill>
                   <a:srgbClr val="0068B7"/>
                 </a:solidFill>
@@ -4645,7 +4647,7 @@
               </a:rPr>
               <a:t>Safeguard to plan</a:t>
             </a:r>
-            <a:endParaRPr lang="en-US" sz="1300" dirty="0"/>
+            <a:endParaRPr lang="en-US" sz="1220" dirty="0"/>
           </a:p>
         </p:txBody>
       </p:sp>
@@ -4657,8 +4659,8 @@
         </p:nvSpPr>
         <p:spPr>
           <a:xfrm>
-            <a:off x="7799832" y="4818888"/>
-            <a:ext cx="3145536" cy="688543"/>
+            <a:off x="7708392" y="4828032"/>
+            <a:ext cx="3282696" cy="749808"/>
           </a:xfrm>
           <a:prstGeom prst="rect">
             <a:avLst/>
@@ -4676,7 +4678,7 @@
               <a:buNone/>
             </a:pPr>
             <a:r>
-              <a:rPr lang="en-US" sz="1320" dirty="0">
+              <a:rPr lang="en-US" sz="1220" dirty="0">
                 <a:solidFill>
                   <a:srgbClr val="17364A"/>
                 </a:solidFill>
@@ -4684,9 +4686,9 @@
                 <a:ea typeface="Aptos" pitchFamily="34" charset="-122"/>
                 <a:cs typeface="Aptos" pitchFamily="34" charset="-120"/>
               </a:rPr>
-              <a:t>Identify what could go wrong, who could be affected, what safeguards are needed, and what evidence should be reviewed before use.</a:t>
-            </a:r>
-            <a:endParaRPr lang="en-US" sz="1320" dirty="0"/>
+              <a:t>Identify what could go wrong, who could be affected, what safeguards are needed,.</a:t>
+            </a:r>
+            <a:endParaRPr lang="en-US" sz="1220" dirty="0"/>
           </a:p>
         </p:txBody>
       </p:sp>
@@ -4977,8 +4979,8 @@
         </p:nvSpPr>
         <p:spPr>
           <a:xfrm>
-            <a:off x="868680" y="1508760"/>
-            <a:ext cx="6309360" cy="4160520"/>
+            <a:off x="822960" y="1463040"/>
+            <a:ext cx="6565392" cy="4343400"/>
           </a:xfrm>
           <a:prstGeom prst="rect">
             <a:avLst/>
@@ -4996,7 +4998,7 @@
               <a:buNone/>
             </a:pPr>
             <a:r>
-              <a:rPr lang="en-US" sz="2100" dirty="0">
+              <a:rPr lang="en-US" sz="1920" dirty="0">
                 <a:solidFill>
                   <a:srgbClr val="003A63"/>
                 </a:solidFill>
@@ -5006,14 +5008,14 @@
               </a:rPr>
               <a:t>• Prediction used as decision.</a:t>
             </a:r>
-            <a:endParaRPr lang="en-US" sz="2100" dirty="0"/>
-          </a:p>
-          <a:p>
-            <a:pPr indent="0" marL="0">
-              <a:buNone/>
-            </a:pPr>
-            <a:r>
-              <a:rPr lang="en-US" sz="2100" dirty="0">
+            <a:endParaRPr lang="en-US" sz="1920" dirty="0"/>
+          </a:p>
+          <a:p>
+            <a:pPr indent="0" marL="0">
+              <a:buNone/>
+            </a:pPr>
+            <a:r>
+              <a:rPr lang="en-US" sz="1920" dirty="0">
                 <a:solidFill>
                   <a:srgbClr val="003A63"/>
                 </a:solidFill>
@@ -5023,14 +5025,14 @@
               </a:rPr>
               <a:t>• A risk score may be treated as a final decision rather than decision support.</a:t>
             </a:r>
-            <a:endParaRPr lang="en-US" sz="2100" dirty="0"/>
-          </a:p>
-          <a:p>
-            <a:pPr indent="0" marL="0">
-              <a:buNone/>
-            </a:pPr>
-            <a:r>
-              <a:rPr lang="en-US" sz="2100" dirty="0">
+            <a:endParaRPr lang="en-US" sz="1920" dirty="0"/>
+          </a:p>
+          <a:p>
+            <a:pPr indent="0" marL="0">
+              <a:buNone/>
+            </a:pPr>
+            <a:r>
+              <a:rPr lang="en-US" sz="1920" dirty="0">
                 <a:solidFill>
                   <a:srgbClr val="003A63"/>
                 </a:solidFill>
@@ -5038,9 +5040,9 @@
                 <a:ea typeface="Aptos" pitchFamily="34" charset="-122"/>
                 <a:cs typeface="Aptos" pitchFamily="34" charset="-120"/>
               </a:rPr>
-              <a:t>• Guardrails include role-based guidance, human review, and documentation of final decisions.</a:t>
-            </a:r>
-            <a:endParaRPr lang="en-US" sz="2100" dirty="0"/>
+              <a:t>• Guardrails include role-based guidance, human review, and documentation of.</a:t>
+            </a:r>
+            <a:endParaRPr lang="en-US" sz="1920" dirty="0"/>
           </a:p>
         </p:txBody>
       </p:sp>
@@ -5052,12 +5054,12 @@
         </p:nvSpPr>
         <p:spPr>
           <a:xfrm>
-            <a:off x="7635240" y="1325880"/>
-            <a:ext cx="3474720" cy="1207008"/>
+            <a:off x="7543800" y="1325880"/>
+            <a:ext cx="3611880" cy="1261872"/>
           </a:xfrm>
           <a:prstGeom prst="roundRect">
             <a:avLst>
-              <a:gd name="adj" fmla="val 9091"/>
+              <a:gd name="adj" fmla="val 8696"/>
             </a:avLst>
           </a:prstGeom>
           <a:solidFill>
@@ -5079,8 +5081,8 @@
         </p:nvSpPr>
         <p:spPr>
           <a:xfrm>
-            <a:off x="7799832" y="1472184"/>
-            <a:ext cx="3145536" cy="256032"/>
+            <a:off x="7708392" y="1453896"/>
+            <a:ext cx="3282696" cy="228600"/>
           </a:xfrm>
           <a:prstGeom prst="rect">
             <a:avLst/>
@@ -5096,7 +5098,7 @@
               <a:buNone/>
             </a:pPr>
             <a:r>
-              <a:rPr lang="en-US" sz="1300" b="1" dirty="0">
+              <a:rPr lang="en-US" sz="1220" b="1" dirty="0">
                 <a:solidFill>
                   <a:srgbClr val="0068B7"/>
                 </a:solidFill>
@@ -5106,7 +5108,7 @@
               </a:rPr>
               <a:t>Risk check</a:t>
             </a:r>
-            <a:endParaRPr lang="en-US" sz="1300" dirty="0"/>
+            <a:endParaRPr lang="en-US" sz="1220" dirty="0"/>
           </a:p>
         </p:txBody>
       </p:sp>
@@ -5118,8 +5120,8 @@
         </p:nvSpPr>
         <p:spPr>
           <a:xfrm>
-            <a:off x="7799832" y="1801368"/>
-            <a:ext cx="3145536" cy="640080"/>
+            <a:off x="7708392" y="1764792"/>
+            <a:ext cx="3282696" cy="749808"/>
           </a:xfrm>
           <a:prstGeom prst="rect">
             <a:avLst/>
@@ -5137,7 +5139,7 @@
               <a:buNone/>
             </a:pPr>
             <a:r>
-              <a:rPr lang="en-US" sz="1320" dirty="0">
+              <a:rPr lang="en-US" sz="1220" dirty="0">
                 <a:solidFill>
                   <a:srgbClr val="17364A"/>
                 </a:solidFill>
@@ -5147,7 +5149,7 @@
               </a:rPr>
               <a:t>Prediction used as decision.</a:t>
             </a:r>
-            <a:endParaRPr lang="en-US" sz="1320" dirty="0"/>
+            <a:endParaRPr lang="en-US" sz="1220" dirty="0"/>
           </a:p>
         </p:txBody>
       </p:sp>
@@ -5159,12 +5161,12 @@
         </p:nvSpPr>
         <p:spPr>
           <a:xfrm>
-            <a:off x="7635240" y="2670048"/>
-            <a:ext cx="3474720" cy="1536192"/>
+            <a:off x="7543800" y="2724912"/>
+            <a:ext cx="3611880" cy="1527048"/>
           </a:xfrm>
           <a:prstGeom prst="roundRect">
             <a:avLst>
-              <a:gd name="adj" fmla="val 7143"/>
+              <a:gd name="adj" fmla="val 7186"/>
             </a:avLst>
           </a:prstGeom>
           <a:solidFill>
@@ -5186,8 +5188,8 @@
         </p:nvSpPr>
         <p:spPr>
           <a:xfrm>
-            <a:off x="7799832" y="2816352"/>
-            <a:ext cx="3145536" cy="256032"/>
+            <a:off x="7708392" y="2852928"/>
+            <a:ext cx="3282696" cy="228600"/>
           </a:xfrm>
           <a:prstGeom prst="rect">
             <a:avLst/>
@@ -5203,7 +5205,7 @@
               <a:buNone/>
             </a:pPr>
             <a:r>
-              <a:rPr lang="en-US" sz="1300" b="1" dirty="0">
+              <a:rPr lang="en-US" sz="1220" b="1" dirty="0">
                 <a:solidFill>
                   <a:srgbClr val="0068B7"/>
                 </a:solidFill>
@@ -5213,7 +5215,7 @@
               </a:rPr>
               <a:t>Concept checkpoints</a:t>
             </a:r>
-            <a:endParaRPr lang="en-US" sz="1300" dirty="0"/>
+            <a:endParaRPr lang="en-US" sz="1220" dirty="0"/>
           </a:p>
         </p:txBody>
       </p:sp>
@@ -5225,8 +5227,8 @@
         </p:nvSpPr>
         <p:spPr>
           <a:xfrm>
-            <a:off x="7818120" y="3182112"/>
-            <a:ext cx="3090672" cy="877824"/>
+            <a:off x="7726680" y="3182112"/>
+            <a:ext cx="3227832" cy="960120"/>
           </a:xfrm>
           <a:prstGeom prst="rect">
             <a:avLst/>
@@ -5244,7 +5246,7 @@
               <a:buNone/>
             </a:pPr>
             <a:r>
-              <a:rPr lang="en-US" sz="1220" dirty="0">
+              <a:rPr lang="en-US" sz="1140" dirty="0">
                 <a:solidFill>
                   <a:srgbClr val="17364A"/>
                 </a:solidFill>
@@ -5254,14 +5256,14 @@
               </a:rPr>
               <a:t>Equity distortion.</a:t>
             </a:r>
-            <a:endParaRPr lang="en-US" sz="1220" dirty="0"/>
-          </a:p>
-          <a:p>
-            <a:pPr indent="0" marL="0">
-              <a:buNone/>
-            </a:pPr>
-            <a:r>
-              <a:rPr lang="en-US" sz="1220" dirty="0">
+            <a:endParaRPr lang="en-US" sz="1140" dirty="0"/>
+          </a:p>
+          <a:p>
+            <a:pPr indent="0" marL="0">
+              <a:buNone/>
+            </a:pPr>
+            <a:r>
+              <a:rPr lang="en-US" sz="1140" dirty="0">
                 <a:solidFill>
                   <a:srgbClr val="17364A"/>
                 </a:solidFill>
@@ -5269,16 +5271,16 @@
                 <a:ea typeface="Aptos" pitchFamily="34" charset="-122"/>
                 <a:cs typeface="Aptos" pitchFamily="34" charset="-120"/>
               </a:rPr>
-              <a:t>Risk models may reflect unequal data availability or historical.</a:t>
-            </a:r>
-            <a:endParaRPr lang="en-US" sz="1220" dirty="0"/>
-          </a:p>
-          <a:p>
-            <a:pPr indent="0" marL="0">
-              <a:buNone/>
-            </a:pPr>
-            <a:r>
-              <a:rPr lang="en-US" sz="1220" dirty="0">
+              <a:t>Risk models may reflect unequal data availability.</a:t>
+            </a:r>
+            <a:endParaRPr lang="en-US" sz="1140" dirty="0"/>
+          </a:p>
+          <a:p>
+            <a:pPr indent="0" marL="0">
+              <a:buNone/>
+            </a:pPr>
+            <a:r>
+              <a:rPr lang="en-US" sz="1140" dirty="0">
                 <a:solidFill>
                   <a:srgbClr val="17364A"/>
                 </a:solidFill>
@@ -5286,9 +5288,9 @@
                 <a:ea typeface="Aptos" pitchFamily="34" charset="-122"/>
                 <a:cs typeface="Aptos" pitchFamily="34" charset="-120"/>
               </a:rPr>
-              <a:t>Guardrails include subgroup analysis, community review, and.</a:t>
-            </a:r>
-            <a:endParaRPr lang="en-US" sz="1220" dirty="0"/>
+              <a:t>Guardrails include subgroup analysis, community.</a:t>
+            </a:r>
+            <a:endParaRPr lang="en-US" sz="1140" dirty="0"/>
           </a:p>
         </p:txBody>
       </p:sp>
@@ -5300,12 +5302,12 @@
         </p:nvSpPr>
         <p:spPr>
           <a:xfrm>
-            <a:off x="7635240" y="4343400"/>
-            <a:ext cx="3474720" cy="1255471"/>
+            <a:off x="7543800" y="4389120"/>
+            <a:ext cx="3611880" cy="1261872"/>
           </a:xfrm>
           <a:prstGeom prst="roundRect">
             <a:avLst>
-              <a:gd name="adj" fmla="val 8740"/>
+              <a:gd name="adj" fmla="val 8696"/>
             </a:avLst>
           </a:prstGeom>
           <a:solidFill>
@@ -5327,8 +5329,8 @@
         </p:nvSpPr>
         <p:spPr>
           <a:xfrm>
-            <a:off x="7799832" y="4489704"/>
-            <a:ext cx="3145536" cy="256032"/>
+            <a:off x="7708392" y="4517136"/>
+            <a:ext cx="3282696" cy="228600"/>
           </a:xfrm>
           <a:prstGeom prst="rect">
             <a:avLst/>
@@ -5344,7 +5346,7 @@
               <a:buNone/>
             </a:pPr>
             <a:r>
-              <a:rPr lang="en-US" sz="1300" b="1" dirty="0">
+              <a:rPr lang="en-US" sz="1220" b="1" dirty="0">
                 <a:solidFill>
                   <a:srgbClr val="0068B7"/>
                 </a:solidFill>
@@ -5354,7 +5356,7 @@
               </a:rPr>
               <a:t>Safeguard to plan</a:t>
             </a:r>
-            <a:endParaRPr lang="en-US" sz="1300" dirty="0"/>
+            <a:endParaRPr lang="en-US" sz="1220" dirty="0"/>
           </a:p>
         </p:txBody>
       </p:sp>
@@ -5366,8 +5368,8 @@
         </p:nvSpPr>
         <p:spPr>
           <a:xfrm>
-            <a:off x="7799832" y="4818888"/>
-            <a:ext cx="3145536" cy="688543"/>
+            <a:off x="7708392" y="4828032"/>
+            <a:ext cx="3282696" cy="749808"/>
           </a:xfrm>
           <a:prstGeom prst="rect">
             <a:avLst/>
@@ -5385,7 +5387,7 @@
               <a:buNone/>
             </a:pPr>
             <a:r>
-              <a:rPr lang="en-US" sz="1320" dirty="0">
+              <a:rPr lang="en-US" sz="1220" dirty="0">
                 <a:solidFill>
                   <a:srgbClr val="17364A"/>
                 </a:solidFill>
@@ -5393,9 +5395,9 @@
                 <a:ea typeface="Aptos" pitchFamily="34" charset="-122"/>
                 <a:cs typeface="Aptos" pitchFamily="34" charset="-120"/>
               </a:rPr>
-              <a:t>Identify what could go wrong, who could be affected, what safeguards are needed, and what evidence should be reviewed before use.</a:t>
-            </a:r>
-            <a:endParaRPr lang="en-US" sz="1320" dirty="0"/>
+              <a:t>Identify what could go wrong, who could be affected, what safeguards are needed,.</a:t>
+            </a:r>
+            <a:endParaRPr lang="en-US" sz="1220" dirty="0"/>
           </a:p>
         </p:txBody>
       </p:sp>
@@ -5686,8 +5688,8 @@
         </p:nvSpPr>
         <p:spPr>
           <a:xfrm>
-            <a:off x="868680" y="1508760"/>
-            <a:ext cx="6309360" cy="4160520"/>
+            <a:off x="822960" y="1463040"/>
+            <a:ext cx="6565392" cy="4343400"/>
           </a:xfrm>
           <a:prstGeom prst="rect">
             <a:avLst/>
@@ -5705,7 +5707,7 @@
               <a:buNone/>
             </a:pPr>
             <a:r>
-              <a:rPr lang="en-US" sz="2100" dirty="0">
+              <a:rPr lang="en-US" sz="1920" dirty="0">
                 <a:solidFill>
                   <a:srgbClr val="003A63"/>
                 </a:solidFill>
@@ -5715,14 +5717,14 @@
               </a:rPr>
               <a:t>• Model drift.</a:t>
             </a:r>
-            <a:endParaRPr lang="en-US" sz="2100" dirty="0"/>
-          </a:p>
-          <a:p>
-            <a:pPr indent="0" marL="0">
-              <a:buNone/>
-            </a:pPr>
-            <a:r>
-              <a:rPr lang="en-US" sz="2100" dirty="0">
+            <a:endParaRPr lang="en-US" sz="1920" dirty="0"/>
+          </a:p>
+          <a:p>
+            <a:pPr indent="0" marL="0">
+              <a:buNone/>
+            </a:pPr>
+            <a:r>
+              <a:rPr lang="en-US" sz="1920" dirty="0">
                 <a:solidFill>
                   <a:srgbClr val="003A63"/>
                 </a:solidFill>
@@ -5732,14 +5734,14 @@
               </a:rPr>
               <a:t>• Performance may change over time.</a:t>
             </a:r>
-            <a:endParaRPr lang="en-US" sz="2100" dirty="0"/>
-          </a:p>
-          <a:p>
-            <a:pPr indent="0" marL="0">
-              <a:buNone/>
-            </a:pPr>
-            <a:r>
-              <a:rPr lang="en-US" sz="2100" dirty="0">
+            <a:endParaRPr lang="en-US" sz="1920" dirty="0"/>
+          </a:p>
+          <a:p>
+            <a:pPr indent="0" marL="0">
+              <a:buNone/>
+            </a:pPr>
+            <a:r>
+              <a:rPr lang="en-US" sz="1920" dirty="0">
                 <a:solidFill>
                   <a:srgbClr val="003A63"/>
                 </a:solidFill>
@@ -5747,9 +5749,9 @@
                 <a:ea typeface="Aptos" pitchFamily="34" charset="-122"/>
                 <a:cs typeface="Aptos" pitchFamily="34" charset="-120"/>
               </a:rPr>
-              <a:t>• Guardrails include periodic recalibration, drift monitoring, and authority to pause or modify.</a:t>
-            </a:r>
-            <a:endParaRPr lang="en-US" sz="2100" dirty="0"/>
+              <a:t>• Guardrails include periodic recalibration, drift monitoring, and authority.</a:t>
+            </a:r>
+            <a:endParaRPr lang="en-US" sz="1920" dirty="0"/>
           </a:p>
         </p:txBody>
       </p:sp>
@@ -5761,12 +5763,12 @@
         </p:nvSpPr>
         <p:spPr>
           <a:xfrm>
-            <a:off x="7635240" y="1325880"/>
-            <a:ext cx="3474720" cy="1207008"/>
+            <a:off x="7543800" y="1325880"/>
+            <a:ext cx="3611880" cy="1261872"/>
           </a:xfrm>
           <a:prstGeom prst="roundRect">
             <a:avLst>
-              <a:gd name="adj" fmla="val 9091"/>
+              <a:gd name="adj" fmla="val 8696"/>
             </a:avLst>
           </a:prstGeom>
           <a:solidFill>
@@ -5788,8 +5790,8 @@
         </p:nvSpPr>
         <p:spPr>
           <a:xfrm>
-            <a:off x="7799832" y="1472184"/>
-            <a:ext cx="3145536" cy="256032"/>
+            <a:off x="7708392" y="1453896"/>
+            <a:ext cx="3282696" cy="228600"/>
           </a:xfrm>
           <a:prstGeom prst="rect">
             <a:avLst/>
@@ -5805,7 +5807,7 @@
               <a:buNone/>
             </a:pPr>
             <a:r>
-              <a:rPr lang="en-US" sz="1300" b="1" dirty="0">
+              <a:rPr lang="en-US" sz="1220" b="1" dirty="0">
                 <a:solidFill>
                   <a:srgbClr val="0068B7"/>
                 </a:solidFill>
@@ -5815,7 +5817,7 @@
               </a:rPr>
               <a:t>Risk check</a:t>
             </a:r>
-            <a:endParaRPr lang="en-US" sz="1300" dirty="0"/>
+            <a:endParaRPr lang="en-US" sz="1220" dirty="0"/>
           </a:p>
         </p:txBody>
       </p:sp>
@@ -5827,8 +5829,8 @@
         </p:nvSpPr>
         <p:spPr>
           <a:xfrm>
-            <a:off x="7799832" y="1801368"/>
-            <a:ext cx="3145536" cy="640080"/>
+            <a:off x="7708392" y="1764792"/>
+            <a:ext cx="3282696" cy="749808"/>
           </a:xfrm>
           <a:prstGeom prst="rect">
             <a:avLst/>
@@ -5846,7 +5848,7 @@
               <a:buNone/>
             </a:pPr>
             <a:r>
-              <a:rPr lang="en-US" sz="1320" dirty="0">
+              <a:rPr lang="en-US" sz="1220" dirty="0">
                 <a:solidFill>
                   <a:srgbClr val="17364A"/>
                 </a:solidFill>
@@ -5856,7 +5858,7 @@
               </a:rPr>
               <a:t>Model drift.</a:t>
             </a:r>
-            <a:endParaRPr lang="en-US" sz="1320" dirty="0"/>
+            <a:endParaRPr lang="en-US" sz="1220" dirty="0"/>
           </a:p>
         </p:txBody>
       </p:sp>
@@ -5868,12 +5870,12 @@
         </p:nvSpPr>
         <p:spPr>
           <a:xfrm>
-            <a:off x="7635240" y="2670048"/>
-            <a:ext cx="3474720" cy="1536192"/>
+            <a:off x="7543800" y="2724912"/>
+            <a:ext cx="3611880" cy="1527048"/>
           </a:xfrm>
           <a:prstGeom prst="roundRect">
             <a:avLst>
-              <a:gd name="adj" fmla="val 7143"/>
+              <a:gd name="adj" fmla="val 7186"/>
             </a:avLst>
           </a:prstGeom>
           <a:solidFill>
@@ -5895,8 +5897,8 @@
         </p:nvSpPr>
         <p:spPr>
           <a:xfrm>
-            <a:off x="7799832" y="2816352"/>
-            <a:ext cx="3145536" cy="256032"/>
+            <a:off x="7708392" y="2852928"/>
+            <a:ext cx="3282696" cy="228600"/>
           </a:xfrm>
           <a:prstGeom prst="rect">
             <a:avLst/>
@@ -5912,7 +5914,7 @@
               <a:buNone/>
             </a:pPr>
             <a:r>
-              <a:rPr lang="en-US" sz="1300" b="1" dirty="0">
+              <a:rPr lang="en-US" sz="1220" b="1" dirty="0">
                 <a:solidFill>
                   <a:srgbClr val="0068B7"/>
                 </a:solidFill>
@@ -5922,7 +5924,7 @@
               </a:rPr>
               <a:t>Concept checkpoints</a:t>
             </a:r>
-            <a:endParaRPr lang="en-US" sz="1300" dirty="0"/>
+            <a:endParaRPr lang="en-US" sz="1220" dirty="0"/>
           </a:p>
         </p:txBody>
       </p:sp>
@@ -5934,8 +5936,8 @@
         </p:nvSpPr>
         <p:spPr>
           <a:xfrm>
-            <a:off x="7818120" y="3182112"/>
-            <a:ext cx="3090672" cy="877824"/>
+            <a:off x="7726680" y="3182112"/>
+            <a:ext cx="3227832" cy="960120"/>
           </a:xfrm>
           <a:prstGeom prst="rect">
             <a:avLst/>
@@ -5953,7 +5955,7 @@
               <a:buNone/>
             </a:pPr>
             <a:r>
-              <a:rPr lang="en-US" sz="1220" dirty="0">
+              <a:rPr lang="en-US" sz="1140" dirty="0">
                 <a:solidFill>
                   <a:srgbClr val="17364A"/>
                 </a:solidFill>
@@ -5963,14 +5965,14 @@
               </a:rPr>
               <a:t>Model drift.</a:t>
             </a:r>
-            <a:endParaRPr lang="en-US" sz="1220" dirty="0"/>
-          </a:p>
-          <a:p>
-            <a:pPr indent="0" marL="0">
-              <a:buNone/>
-            </a:pPr>
-            <a:r>
-              <a:rPr lang="en-US" sz="1220" dirty="0">
+            <a:endParaRPr lang="en-US" sz="1140" dirty="0"/>
+          </a:p>
+          <a:p>
+            <a:pPr indent="0" marL="0">
+              <a:buNone/>
+            </a:pPr>
+            <a:r>
+              <a:rPr lang="en-US" sz="1140" dirty="0">
                 <a:solidFill>
                   <a:srgbClr val="17364A"/>
                 </a:solidFill>
@@ -5980,14 +5982,14 @@
               </a:rPr>
               <a:t>Performance may change over time.</a:t>
             </a:r>
-            <a:endParaRPr lang="en-US" sz="1220" dirty="0"/>
-          </a:p>
-          <a:p>
-            <a:pPr indent="0" marL="0">
-              <a:buNone/>
-            </a:pPr>
-            <a:r>
-              <a:rPr lang="en-US" sz="1220" dirty="0">
+            <a:endParaRPr lang="en-US" sz="1140" dirty="0"/>
+          </a:p>
+          <a:p>
+            <a:pPr indent="0" marL="0">
+              <a:buNone/>
+            </a:pPr>
+            <a:r>
+              <a:rPr lang="en-US" sz="1140" dirty="0">
                 <a:solidFill>
                   <a:srgbClr val="17364A"/>
                 </a:solidFill>
@@ -5995,9 +5997,9 @@
                 <a:ea typeface="Aptos" pitchFamily="34" charset="-122"/>
                 <a:cs typeface="Aptos" pitchFamily="34" charset="-120"/>
               </a:rPr>
-              <a:t>Guardrails include periodic recalibration, drift monitoring, and.</a:t>
-            </a:r>
-            <a:endParaRPr lang="en-US" sz="1220" dirty="0"/>
+              <a:t>Guardrails include periodic recalibration, drift.</a:t>
+            </a:r>
+            <a:endParaRPr lang="en-US" sz="1140" dirty="0"/>
           </a:p>
         </p:txBody>
       </p:sp>
@@ -6009,12 +6011,12 @@
         </p:nvSpPr>
         <p:spPr>
           <a:xfrm>
-            <a:off x="7635240" y="4343400"/>
-            <a:ext cx="3474720" cy="1255471"/>
+            <a:off x="7543800" y="4389120"/>
+            <a:ext cx="3611880" cy="1261872"/>
           </a:xfrm>
           <a:prstGeom prst="roundRect">
             <a:avLst>
-              <a:gd name="adj" fmla="val 8740"/>
+              <a:gd name="adj" fmla="val 8696"/>
             </a:avLst>
           </a:prstGeom>
           <a:solidFill>
@@ -6036,8 +6038,8 @@
         </p:nvSpPr>
         <p:spPr>
           <a:xfrm>
-            <a:off x="7799832" y="4489704"/>
-            <a:ext cx="3145536" cy="256032"/>
+            <a:off x="7708392" y="4517136"/>
+            <a:ext cx="3282696" cy="228600"/>
           </a:xfrm>
           <a:prstGeom prst="rect">
             <a:avLst/>
@@ -6053,7 +6055,7 @@
               <a:buNone/>
             </a:pPr>
             <a:r>
-              <a:rPr lang="en-US" sz="1300" b="1" dirty="0">
+              <a:rPr lang="en-US" sz="1220" b="1" dirty="0">
                 <a:solidFill>
                   <a:srgbClr val="0068B7"/>
                 </a:solidFill>
@@ -6063,7 +6065,7 @@
               </a:rPr>
               <a:t>Safeguard to plan</a:t>
             </a:r>
-            <a:endParaRPr lang="en-US" sz="1300" dirty="0"/>
+            <a:endParaRPr lang="en-US" sz="1220" dirty="0"/>
           </a:p>
         </p:txBody>
       </p:sp>
@@ -6075,8 +6077,8 @@
         </p:nvSpPr>
         <p:spPr>
           <a:xfrm>
-            <a:off x="7799832" y="4818888"/>
-            <a:ext cx="3145536" cy="688543"/>
+            <a:off x="7708392" y="4828032"/>
+            <a:ext cx="3282696" cy="749808"/>
           </a:xfrm>
           <a:prstGeom prst="rect">
             <a:avLst/>
@@ -6094,7 +6096,7 @@
               <a:buNone/>
             </a:pPr>
             <a:r>
-              <a:rPr lang="en-US" sz="1320" dirty="0">
+              <a:rPr lang="en-US" sz="1220" dirty="0">
                 <a:solidFill>
                   <a:srgbClr val="17364A"/>
                 </a:solidFill>
@@ -6102,9 +6104,9 @@
                 <a:ea typeface="Aptos" pitchFamily="34" charset="-122"/>
                 <a:cs typeface="Aptos" pitchFamily="34" charset="-120"/>
               </a:rPr>
-              <a:t>Identify what could go wrong, who could be affected, what safeguards are needed, and what evidence should be reviewed before use.</a:t>
-            </a:r>
-            <a:endParaRPr lang="en-US" sz="1320" dirty="0"/>
+              <a:t>Identify what could go wrong, who could be affected, what safeguards are needed,.</a:t>
+            </a:r>
+            <a:endParaRPr lang="en-US" sz="1220" dirty="0"/>
           </a:p>
         </p:txBody>
       </p:sp>
@@ -6395,8 +6397,8 @@
         </p:nvSpPr>
         <p:spPr>
           <a:xfrm>
-            <a:off x="868680" y="1508760"/>
-            <a:ext cx="6309360" cy="4160520"/>
+            <a:off x="822960" y="1463040"/>
+            <a:ext cx="6565392" cy="4343400"/>
           </a:xfrm>
           <a:prstGeom prst="rect">
             <a:avLst/>
@@ -6414,7 +6416,7 @@
               <a:buNone/>
             </a:pPr>
             <a:r>
-              <a:rPr lang="en-US" sz="2100" dirty="0">
+              <a:rPr lang="en-US" sz="1920" dirty="0">
                 <a:solidFill>
                   <a:srgbClr val="003A63"/>
                 </a:solidFill>
@@ -6422,16 +6424,16 @@
                 <a:ea typeface="Aptos" pitchFamily="34" charset="-122"/>
                 <a:cs typeface="Aptos" pitchFamily="34" charset="-120"/>
               </a:rPr>
-              <a:t>• Predictive analytics may be embedded in dashboards, case management systems, early warning.</a:t>
-            </a:r>
-            <a:endParaRPr lang="en-US" sz="2100" dirty="0"/>
-          </a:p>
-          <a:p>
-            <a:pPr indent="0" marL="0">
-              <a:buNone/>
-            </a:pPr>
-            <a:r>
-              <a:rPr lang="en-US" sz="2100" dirty="0">
+              <a:t>• Predictive analytics may be embedded in dashboards, case management systems,.</a:t>
+            </a:r>
+            <a:endParaRPr lang="en-US" sz="1920" dirty="0"/>
+          </a:p>
+          <a:p>
+            <a:pPr indent="0" marL="0">
+              <a:buNone/>
+            </a:pPr>
+            <a:r>
+              <a:rPr lang="en-US" sz="1920" dirty="0">
                 <a:solidFill>
                   <a:srgbClr val="003A63"/>
                 </a:solidFill>
@@ -6439,16 +6441,16 @@
                 <a:ea typeface="Aptos" pitchFamily="34" charset="-122"/>
                 <a:cs typeface="Aptos" pitchFamily="34" charset="-120"/>
               </a:rPr>
-              <a:t>• Generative AI may explain or summarize predictive outputs, but those explanations must not.</a:t>
-            </a:r>
-            <a:endParaRPr lang="en-US" sz="2100" dirty="0"/>
-          </a:p>
-          <a:p>
-            <a:pPr indent="0" marL="0">
-              <a:buNone/>
-            </a:pPr>
-            <a:r>
-              <a:rPr lang="en-US" sz="2100" dirty="0">
+              <a:t>• Generative AI may explain or summarize predictive outputs, but those.</a:t>
+            </a:r>
+            <a:endParaRPr lang="en-US" sz="1920" dirty="0"/>
+          </a:p>
+          <a:p>
+            <a:pPr indent="0" marL="0">
+              <a:buNone/>
+            </a:pPr>
+            <a:r>
+              <a:rPr lang="en-US" sz="1920" dirty="0">
                 <a:solidFill>
                   <a:srgbClr val="003A63"/>
                 </a:solidFill>
@@ -6456,9 +6458,9 @@
                 <a:ea typeface="Aptos" pitchFamily="34" charset="-122"/>
                 <a:cs typeface="Aptos" pitchFamily="34" charset="-120"/>
               </a:rPr>
-              <a:t>• RAG systems may combine risk results with policy guidance, while agentic workflows may trigger.</a:t>
-            </a:r>
-            <a:endParaRPr lang="en-US" sz="2100" dirty="0"/>
+              <a:t>• RAG systems may combine risk results with policy guidance, while agentic.</a:t>
+            </a:r>
+            <a:endParaRPr lang="en-US" sz="1920" dirty="0"/>
           </a:p>
         </p:txBody>
       </p:sp>
@@ -6470,12 +6472,12 @@
         </p:nvSpPr>
         <p:spPr>
           <a:xfrm>
-            <a:off x="7635240" y="1325880"/>
-            <a:ext cx="3474720" cy="1255471"/>
+            <a:off x="7543800" y="1325880"/>
+            <a:ext cx="3611880" cy="1261872"/>
           </a:xfrm>
           <a:prstGeom prst="roundRect">
             <a:avLst>
-              <a:gd name="adj" fmla="val 8740"/>
+              <a:gd name="adj" fmla="val 8696"/>
             </a:avLst>
           </a:prstGeom>
           <a:solidFill>
@@ -6497,8 +6499,8 @@
         </p:nvSpPr>
         <p:spPr>
           <a:xfrm>
-            <a:off x="7799832" y="1472184"/>
-            <a:ext cx="3145536" cy="256032"/>
+            <a:off x="7708392" y="1453896"/>
+            <a:ext cx="3282696" cy="228600"/>
           </a:xfrm>
           <a:prstGeom prst="rect">
             <a:avLst/>
@@ -6514,7 +6516,7 @@
               <a:buNone/>
             </a:pPr>
             <a:r>
-              <a:rPr lang="en-US" sz="1300" b="1" dirty="0">
+              <a:rPr lang="en-US" sz="1220" b="1" dirty="0">
                 <a:solidFill>
                   <a:srgbClr val="0068B7"/>
                 </a:solidFill>
@@ -6524,7 +6526,7 @@
               </a:rPr>
               <a:t>Risk check</a:t>
             </a:r>
-            <a:endParaRPr lang="en-US" sz="1300" dirty="0"/>
+            <a:endParaRPr lang="en-US" sz="1220" dirty="0"/>
           </a:p>
         </p:txBody>
       </p:sp>
@@ -6536,8 +6538,8 @@
         </p:nvSpPr>
         <p:spPr>
           <a:xfrm>
-            <a:off x="7799832" y="1801368"/>
-            <a:ext cx="3145536" cy="688543"/>
+            <a:off x="7708392" y="1764792"/>
+            <a:ext cx="3282696" cy="749808"/>
           </a:xfrm>
           <a:prstGeom prst="rect">
             <a:avLst/>
@@ -6555,7 +6557,7 @@
               <a:buNone/>
             </a:pPr>
             <a:r>
-              <a:rPr lang="en-US" sz="1320" dirty="0">
+              <a:rPr lang="en-US" sz="1220" dirty="0">
                 <a:solidFill>
                   <a:srgbClr val="17364A"/>
                 </a:solidFill>
@@ -6563,9 +6565,9 @@
                 <a:ea typeface="Aptos" pitchFamily="34" charset="-122"/>
                 <a:cs typeface="Aptos" pitchFamily="34" charset="-120"/>
               </a:rPr>
-              <a:t>Predictive analytics may be embedded in dashboards, case management systems, early warning tools,.</a:t>
-            </a:r>
-            <a:endParaRPr lang="en-US" sz="1320" dirty="0"/>
+              <a:t>Predictive analytics may be embedded in dashboards, case management systems,.</a:t>
+            </a:r>
+            <a:endParaRPr lang="en-US" sz="1220" dirty="0"/>
           </a:p>
         </p:txBody>
       </p:sp>
@@ -6577,12 +6579,12 @@
         </p:nvSpPr>
         <p:spPr>
           <a:xfrm>
-            <a:off x="7635240" y="2718511"/>
-            <a:ext cx="3474720" cy="1536192"/>
+            <a:off x="7543800" y="2724912"/>
+            <a:ext cx="3611880" cy="1527048"/>
           </a:xfrm>
           <a:prstGeom prst="roundRect">
             <a:avLst>
-              <a:gd name="adj" fmla="val 7143"/>
+              <a:gd name="adj" fmla="val 7186"/>
             </a:avLst>
           </a:prstGeom>
           <a:solidFill>
@@ -6604,8 +6606,8 @@
         </p:nvSpPr>
         <p:spPr>
           <a:xfrm>
-            <a:off x="7799832" y="2864815"/>
-            <a:ext cx="3145536" cy="256032"/>
+            <a:off x="7708392" y="2852928"/>
+            <a:ext cx="3282696" cy="228600"/>
           </a:xfrm>
           <a:prstGeom prst="rect">
             <a:avLst/>
@@ -6621,7 +6623,7 @@
               <a:buNone/>
             </a:pPr>
             <a:r>
-              <a:rPr lang="en-US" sz="1300" b="1" dirty="0">
+              <a:rPr lang="en-US" sz="1220" b="1" dirty="0">
                 <a:solidFill>
                   <a:srgbClr val="0068B7"/>
                 </a:solidFill>
@@ -6631,7 +6633,7 @@
               </a:rPr>
               <a:t>Concept checkpoints</a:t>
             </a:r>
-            <a:endParaRPr lang="en-US" sz="1300" dirty="0"/>
+            <a:endParaRPr lang="en-US" sz="1220" dirty="0"/>
           </a:p>
         </p:txBody>
       </p:sp>
@@ -6643,8 +6645,8 @@
         </p:nvSpPr>
         <p:spPr>
           <a:xfrm>
-            <a:off x="7818120" y="3230575"/>
-            <a:ext cx="3090672" cy="877824"/>
+            <a:off x="7726680" y="3182112"/>
+            <a:ext cx="3227832" cy="960120"/>
           </a:xfrm>
           <a:prstGeom prst="rect">
             <a:avLst/>
@@ -6662,7 +6664,7 @@
               <a:buNone/>
             </a:pPr>
             <a:r>
-              <a:rPr lang="en-US" sz="1220" dirty="0">
+              <a:rPr lang="en-US" sz="1140" dirty="0">
                 <a:solidFill>
                   <a:srgbClr val="17364A"/>
                 </a:solidFill>
@@ -6670,16 +6672,16 @@
                 <a:ea typeface="Aptos" pitchFamily="34" charset="-122"/>
                 <a:cs typeface="Aptos" pitchFamily="34" charset="-120"/>
               </a:rPr>
-              <a:t>Predictive analytics may be embedded in dashboards, case.</a:t>
-            </a:r>
-            <a:endParaRPr lang="en-US" sz="1220" dirty="0"/>
-          </a:p>
-          <a:p>
-            <a:pPr indent="0" marL="0">
-              <a:buNone/>
-            </a:pPr>
-            <a:r>
-              <a:rPr lang="en-US" sz="1220" dirty="0">
+              <a:t>Predictive analytics may be embedded in.</a:t>
+            </a:r>
+            <a:endParaRPr lang="en-US" sz="1140" dirty="0"/>
+          </a:p>
+          <a:p>
+            <a:pPr indent="0" marL="0">
+              <a:buNone/>
+            </a:pPr>
+            <a:r>
+              <a:rPr lang="en-US" sz="1140" dirty="0">
                 <a:solidFill>
                   <a:srgbClr val="17364A"/>
                 </a:solidFill>
@@ -6687,16 +6689,16 @@
                 <a:ea typeface="Aptos" pitchFamily="34" charset="-122"/>
                 <a:cs typeface="Aptos" pitchFamily="34" charset="-120"/>
               </a:rPr>
-              <a:t>Generative AI may explain or summarize predictive outputs, but.</a:t>
-            </a:r>
-            <a:endParaRPr lang="en-US" sz="1220" dirty="0"/>
-          </a:p>
-          <a:p>
-            <a:pPr indent="0" marL="0">
-              <a:buNone/>
-            </a:pPr>
-            <a:r>
-              <a:rPr lang="en-US" sz="1220" dirty="0">
+              <a:t>Generative AI may explain or summarize predictive.</a:t>
+            </a:r>
+            <a:endParaRPr lang="en-US" sz="1140" dirty="0"/>
+          </a:p>
+          <a:p>
+            <a:pPr indent="0" marL="0">
+              <a:buNone/>
+            </a:pPr>
+            <a:r>
+              <a:rPr lang="en-US" sz="1140" dirty="0">
                 <a:solidFill>
                   <a:srgbClr val="17364A"/>
                 </a:solidFill>
@@ -6704,9 +6706,9 @@
                 <a:ea typeface="Aptos" pitchFamily="34" charset="-122"/>
                 <a:cs typeface="Aptos" pitchFamily="34" charset="-120"/>
               </a:rPr>
-              <a:t>RAG systems may combine risk results with policy guidance, while.</a:t>
-            </a:r>
-            <a:endParaRPr lang="en-US" sz="1220" dirty="0"/>
+              <a:t>RAG systems may combine risk results with policy.</a:t>
+            </a:r>
+            <a:endParaRPr lang="en-US" sz="1140" dirty="0"/>
           </a:p>
         </p:txBody>
       </p:sp>
@@ -6718,12 +6720,12 @@
         </p:nvSpPr>
         <p:spPr>
           <a:xfrm>
-            <a:off x="7635240" y="4391863"/>
-            <a:ext cx="3474720" cy="1255471"/>
+            <a:off x="7543800" y="4389120"/>
+            <a:ext cx="3611880" cy="1261872"/>
           </a:xfrm>
           <a:prstGeom prst="roundRect">
             <a:avLst>
-              <a:gd name="adj" fmla="val 8740"/>
+              <a:gd name="adj" fmla="val 8696"/>
             </a:avLst>
           </a:prstGeom>
           <a:solidFill>
@@ -6745,8 +6747,8 @@
         </p:nvSpPr>
         <p:spPr>
           <a:xfrm>
-            <a:off x="7799832" y="4538167"/>
-            <a:ext cx="3145536" cy="256032"/>
+            <a:off x="7708392" y="4517136"/>
+            <a:ext cx="3282696" cy="228600"/>
           </a:xfrm>
           <a:prstGeom prst="rect">
             <a:avLst/>
@@ -6762,7 +6764,7 @@
               <a:buNone/>
             </a:pPr>
             <a:r>
-              <a:rPr lang="en-US" sz="1300" b="1" dirty="0">
+              <a:rPr lang="en-US" sz="1220" b="1" dirty="0">
                 <a:solidFill>
                   <a:srgbClr val="0068B7"/>
                 </a:solidFill>
@@ -6772,7 +6774,7 @@
               </a:rPr>
               <a:t>Safeguard to plan</a:t>
             </a:r>
-            <a:endParaRPr lang="en-US" sz="1300" dirty="0"/>
+            <a:endParaRPr lang="en-US" sz="1220" dirty="0"/>
           </a:p>
         </p:txBody>
       </p:sp>
@@ -6784,8 +6786,8 @@
         </p:nvSpPr>
         <p:spPr>
           <a:xfrm>
-            <a:off x="7799832" y="4867351"/>
-            <a:ext cx="3145536" cy="688543"/>
+            <a:off x="7708392" y="4828032"/>
+            <a:ext cx="3282696" cy="749808"/>
           </a:xfrm>
           <a:prstGeom prst="rect">
             <a:avLst/>
@@ -6803,7 +6805,7 @@
               <a:buNone/>
             </a:pPr>
             <a:r>
-              <a:rPr lang="en-US" sz="1320" dirty="0">
+              <a:rPr lang="en-US" sz="1220" dirty="0">
                 <a:solidFill>
                   <a:srgbClr val="17364A"/>
                 </a:solidFill>
@@ -6811,9 +6813,9 @@
                 <a:ea typeface="Aptos" pitchFamily="34" charset="-122"/>
                 <a:cs typeface="Aptos" pitchFamily="34" charset="-120"/>
               </a:rPr>
-              <a:t>Identify what could go wrong, who could be affected, what safeguards are needed, and what evidence should be reviewed before use.</a:t>
-            </a:r>
-            <a:endParaRPr lang="en-US" sz="1320" dirty="0"/>
+              <a:t>Identify what could go wrong, who could be affected, what safeguards are needed,.</a:t>
+            </a:r>
+            <a:endParaRPr lang="en-US" sz="1220" dirty="0"/>
           </a:p>
         </p:txBody>
       </p:sp>
@@ -7104,8 +7106,8 @@
         </p:nvSpPr>
         <p:spPr>
           <a:xfrm>
-            <a:off x="868680" y="1508760"/>
-            <a:ext cx="6309360" cy="4160520"/>
+            <a:off x="822960" y="1463040"/>
+            <a:ext cx="6565392" cy="4343400"/>
           </a:xfrm>
           <a:prstGeom prst="rect">
             <a:avLst/>
@@ -7123,7 +7125,7 @@
               <a:buNone/>
             </a:pPr>
             <a:r>
-              <a:rPr lang="en-US" sz="2100" dirty="0">
+              <a:rPr lang="en-US" sz="1920" dirty="0">
                 <a:solidFill>
                   <a:srgbClr val="003A63"/>
                 </a:solidFill>
@@ -7133,14 +7135,14 @@
               </a:rPr>
               <a:t>• What outcome is being predicted, and over what time period?</a:t>
             </a:r>
-            <a:endParaRPr lang="en-US" sz="2100" dirty="0"/>
-          </a:p>
-          <a:p>
-            <a:pPr indent="0" marL="0">
-              <a:buNone/>
-            </a:pPr>
-            <a:r>
-              <a:rPr lang="en-US" sz="2100" dirty="0">
+            <a:endParaRPr lang="en-US" sz="1920" dirty="0"/>
+          </a:p>
+          <a:p>
+            <a:pPr indent="0" marL="0">
+              <a:buNone/>
+            </a:pPr>
+            <a:r>
+              <a:rPr lang="en-US" sz="1920" dirty="0">
                 <a:solidFill>
                   <a:srgbClr val="003A63"/>
                 </a:solidFill>
@@ -7150,14 +7152,14 @@
               </a:rPr>
               <a:t>• What public health action will follow a high-risk score?</a:t>
             </a:r>
-            <a:endParaRPr lang="en-US" sz="2100" dirty="0"/>
-          </a:p>
-          <a:p>
-            <a:pPr indent="0" marL="0">
-              <a:buNone/>
-            </a:pPr>
-            <a:r>
-              <a:rPr lang="en-US" sz="2100" dirty="0">
+            <a:endParaRPr lang="en-US" sz="1920" dirty="0"/>
+          </a:p>
+          <a:p>
+            <a:pPr indent="0" marL="0">
+              <a:buNone/>
+            </a:pPr>
+            <a:r>
+              <a:rPr lang="en-US" sz="1920" dirty="0">
                 <a:solidFill>
                   <a:srgbClr val="003A63"/>
                 </a:solidFill>
@@ -7167,7 +7169,7 @@
               </a:rPr>
               <a:t>• Which data sources may underrepresent some populations?</a:t>
             </a:r>
-            <a:endParaRPr lang="en-US" sz="2100" dirty="0"/>
+            <a:endParaRPr lang="en-US" sz="1920" dirty="0"/>
           </a:p>
         </p:txBody>
       </p:sp>
@@ -7179,12 +7181,12 @@
         </p:nvSpPr>
         <p:spPr>
           <a:xfrm>
-            <a:off x="7635240" y="1325880"/>
-            <a:ext cx="3474720" cy="1207008"/>
+            <a:off x="7543800" y="1325880"/>
+            <a:ext cx="3611880" cy="1261872"/>
           </a:xfrm>
           <a:prstGeom prst="roundRect">
             <a:avLst>
-              <a:gd name="adj" fmla="val 9091"/>
+              <a:gd name="adj" fmla="val 8696"/>
             </a:avLst>
           </a:prstGeom>
           <a:solidFill>
@@ -7206,8 +7208,8 @@
         </p:nvSpPr>
         <p:spPr>
           <a:xfrm>
-            <a:off x="7799832" y="1472184"/>
-            <a:ext cx="3145536" cy="256032"/>
+            <a:off x="7708392" y="1453896"/>
+            <a:ext cx="3282696" cy="228600"/>
           </a:xfrm>
           <a:prstGeom prst="rect">
             <a:avLst/>
@@ -7223,7 +7225,7 @@
               <a:buNone/>
             </a:pPr>
             <a:r>
-              <a:rPr lang="en-US" sz="1300" b="1" dirty="0">
+              <a:rPr lang="en-US" sz="1220" b="1" dirty="0">
                 <a:solidFill>
                   <a:srgbClr val="0068B7"/>
                 </a:solidFill>
@@ -7233,7 +7235,7 @@
               </a:rPr>
               <a:t>Risk check</a:t>
             </a:r>
-            <a:endParaRPr lang="en-US" sz="1300" dirty="0"/>
+            <a:endParaRPr lang="en-US" sz="1220" dirty="0"/>
           </a:p>
         </p:txBody>
       </p:sp>
@@ -7245,8 +7247,8 @@
         </p:nvSpPr>
         <p:spPr>
           <a:xfrm>
-            <a:off x="7799832" y="1801368"/>
-            <a:ext cx="3145536" cy="640080"/>
+            <a:off x="7708392" y="1764792"/>
+            <a:ext cx="3282696" cy="749808"/>
           </a:xfrm>
           <a:prstGeom prst="rect">
             <a:avLst/>
@@ -7264,7 +7266,7 @@
               <a:buNone/>
             </a:pPr>
             <a:r>
-              <a:rPr lang="en-US" sz="1320" dirty="0">
+              <a:rPr lang="en-US" sz="1220" dirty="0">
                 <a:solidFill>
                   <a:srgbClr val="17364A"/>
                 </a:solidFill>
@@ -7274,7 +7276,7 @@
               </a:rPr>
               <a:t>What outcome is being predicted, and over what time period?</a:t>
             </a:r>
-            <a:endParaRPr lang="en-US" sz="1320" dirty="0"/>
+            <a:endParaRPr lang="en-US" sz="1220" dirty="0"/>
           </a:p>
         </p:txBody>
       </p:sp>
@@ -7286,12 +7288,12 @@
         </p:nvSpPr>
         <p:spPr>
           <a:xfrm>
-            <a:off x="7635240" y="2670048"/>
-            <a:ext cx="3474720" cy="1536192"/>
+            <a:off x="7543800" y="2724912"/>
+            <a:ext cx="3611880" cy="1527048"/>
           </a:xfrm>
           <a:prstGeom prst="roundRect">
             <a:avLst>
-              <a:gd name="adj" fmla="val 7143"/>
+              <a:gd name="adj" fmla="val 7186"/>
             </a:avLst>
           </a:prstGeom>
           <a:solidFill>
@@ -7313,8 +7315,8 @@
         </p:nvSpPr>
         <p:spPr>
           <a:xfrm>
-            <a:off x="7799832" y="2816352"/>
-            <a:ext cx="3145536" cy="256032"/>
+            <a:off x="7708392" y="2852928"/>
+            <a:ext cx="3282696" cy="228600"/>
           </a:xfrm>
           <a:prstGeom prst="rect">
             <a:avLst/>
@@ -7330,7 +7332,7 @@
               <a:buNone/>
             </a:pPr>
             <a:r>
-              <a:rPr lang="en-US" sz="1300" b="1" dirty="0">
+              <a:rPr lang="en-US" sz="1220" b="1" dirty="0">
                 <a:solidFill>
                   <a:srgbClr val="0068B7"/>
                 </a:solidFill>
@@ -7340,7 +7342,7 @@
               </a:rPr>
               <a:t>Concept checkpoints</a:t>
             </a:r>
-            <a:endParaRPr lang="en-US" sz="1300" dirty="0"/>
+            <a:endParaRPr lang="en-US" sz="1220" dirty="0"/>
           </a:p>
         </p:txBody>
       </p:sp>
@@ -7352,8 +7354,8 @@
         </p:nvSpPr>
         <p:spPr>
           <a:xfrm>
-            <a:off x="7818120" y="3182112"/>
-            <a:ext cx="3090672" cy="877824"/>
+            <a:off x="7726680" y="3182112"/>
+            <a:ext cx="3227832" cy="960120"/>
           </a:xfrm>
           <a:prstGeom prst="rect">
             <a:avLst/>
@@ -7371,7 +7373,7 @@
               <a:buNone/>
             </a:pPr>
             <a:r>
-              <a:rPr lang="en-US" sz="1220" dirty="0">
+              <a:rPr lang="en-US" sz="1140" dirty="0">
                 <a:solidFill>
                   <a:srgbClr val="17364A"/>
                 </a:solidFill>
@@ -7379,16 +7381,16 @@
                 <a:ea typeface="Aptos" pitchFamily="34" charset="-122"/>
                 <a:cs typeface="Aptos" pitchFamily="34" charset="-120"/>
               </a:rPr>
-              <a:t>What outcome is being predicted, and over what time period?</a:t>
-            </a:r>
-            <a:endParaRPr lang="en-US" sz="1220" dirty="0"/>
-          </a:p>
-          <a:p>
-            <a:pPr indent="0" marL="0">
-              <a:buNone/>
-            </a:pPr>
-            <a:r>
-              <a:rPr lang="en-US" sz="1220" dirty="0">
+              <a:t>What outcome is being predicted, and over what.</a:t>
+            </a:r>
+            <a:endParaRPr lang="en-US" sz="1140" dirty="0"/>
+          </a:p>
+          <a:p>
+            <a:pPr indent="0" marL="0">
+              <a:buNone/>
+            </a:pPr>
+            <a:r>
+              <a:rPr lang="en-US" sz="1140" dirty="0">
                 <a:solidFill>
                   <a:srgbClr val="17364A"/>
                 </a:solidFill>
@@ -7396,16 +7398,16 @@
                 <a:ea typeface="Aptos" pitchFamily="34" charset="-122"/>
                 <a:cs typeface="Aptos" pitchFamily="34" charset="-120"/>
               </a:rPr>
-              <a:t>What public health action will follow a high-risk score?</a:t>
-            </a:r>
-            <a:endParaRPr lang="en-US" sz="1220" dirty="0"/>
-          </a:p>
-          <a:p>
-            <a:pPr indent="0" marL="0">
-              <a:buNone/>
-            </a:pPr>
-            <a:r>
-              <a:rPr lang="en-US" sz="1220" dirty="0">
+              <a:t>What public health action will follow a high-risk.</a:t>
+            </a:r>
+            <a:endParaRPr lang="en-US" sz="1140" dirty="0"/>
+          </a:p>
+          <a:p>
+            <a:pPr indent="0" marL="0">
+              <a:buNone/>
+            </a:pPr>
+            <a:r>
+              <a:rPr lang="en-US" sz="1140" dirty="0">
                 <a:solidFill>
                   <a:srgbClr val="17364A"/>
                 </a:solidFill>
@@ -7413,9 +7415,9 @@
                 <a:ea typeface="Aptos" pitchFamily="34" charset="-122"/>
                 <a:cs typeface="Aptos" pitchFamily="34" charset="-120"/>
               </a:rPr>
-              <a:t>Which data sources may underrepresent some populations?</a:t>
-            </a:r>
-            <a:endParaRPr lang="en-US" sz="1220" dirty="0"/>
+              <a:t>Which data sources may underrepresent some.</a:t>
+            </a:r>
+            <a:endParaRPr lang="en-US" sz="1140" dirty="0"/>
           </a:p>
         </p:txBody>
       </p:sp>
@@ -7427,12 +7429,12 @@
         </p:nvSpPr>
         <p:spPr>
           <a:xfrm>
-            <a:off x="7635240" y="4343400"/>
-            <a:ext cx="3474720" cy="1255471"/>
+            <a:off x="7543800" y="4389120"/>
+            <a:ext cx="3611880" cy="1261872"/>
           </a:xfrm>
           <a:prstGeom prst="roundRect">
             <a:avLst>
-              <a:gd name="adj" fmla="val 8740"/>
+              <a:gd name="adj" fmla="val 8696"/>
             </a:avLst>
           </a:prstGeom>
           <a:solidFill>
@@ -7454,8 +7456,8 @@
         </p:nvSpPr>
         <p:spPr>
           <a:xfrm>
-            <a:off x="7799832" y="4489704"/>
-            <a:ext cx="3145536" cy="256032"/>
+            <a:off x="7708392" y="4517136"/>
+            <a:ext cx="3282696" cy="228600"/>
           </a:xfrm>
           <a:prstGeom prst="rect">
             <a:avLst/>
@@ -7471,7 +7473,7 @@
               <a:buNone/>
             </a:pPr>
             <a:r>
-              <a:rPr lang="en-US" sz="1300" b="1" dirty="0">
+              <a:rPr lang="en-US" sz="1220" b="1" dirty="0">
                 <a:solidFill>
                   <a:srgbClr val="0068B7"/>
                 </a:solidFill>
@@ -7481,7 +7483,7 @@
               </a:rPr>
               <a:t>Safeguard to plan</a:t>
             </a:r>
-            <a:endParaRPr lang="en-US" sz="1300" dirty="0"/>
+            <a:endParaRPr lang="en-US" sz="1220" dirty="0"/>
           </a:p>
         </p:txBody>
       </p:sp>
@@ -7493,8 +7495,8 @@
         </p:nvSpPr>
         <p:spPr>
           <a:xfrm>
-            <a:off x="7799832" y="4818888"/>
-            <a:ext cx="3145536" cy="688543"/>
+            <a:off x="7708392" y="4828032"/>
+            <a:ext cx="3282696" cy="749808"/>
           </a:xfrm>
           <a:prstGeom prst="rect">
             <a:avLst/>
@@ -7512,7 +7514,7 @@
               <a:buNone/>
             </a:pPr>
             <a:r>
-              <a:rPr lang="en-US" sz="1320" dirty="0">
+              <a:rPr lang="en-US" sz="1220" dirty="0">
                 <a:solidFill>
                   <a:srgbClr val="17364A"/>
                 </a:solidFill>
@@ -7520,9 +7522,9 @@
                 <a:ea typeface="Aptos" pitchFamily="34" charset="-122"/>
                 <a:cs typeface="Aptos" pitchFamily="34" charset="-120"/>
               </a:rPr>
-              <a:t>Identify what could go wrong, who could be affected, what safeguards are needed, and what evidence should be reviewed before use.</a:t>
-            </a:r>
-            <a:endParaRPr lang="en-US" sz="1320" dirty="0"/>
+              <a:t>Identify what could go wrong, who could be affected, what safeguards are needed,.</a:t>
+            </a:r>
+            <a:endParaRPr lang="en-US" sz="1220" dirty="0"/>
           </a:p>
         </p:txBody>
       </p:sp>
@@ -7813,8 +7815,8 @@
         </p:nvSpPr>
         <p:spPr>
           <a:xfrm>
-            <a:off x="868680" y="1508760"/>
-            <a:ext cx="6309360" cy="4160520"/>
+            <a:off x="822960" y="1463040"/>
+            <a:ext cx="6565392" cy="4343400"/>
           </a:xfrm>
           <a:prstGeom prst="rect">
             <a:avLst/>
@@ -7832,7 +7834,7 @@
               <a:buNone/>
             </a:pPr>
             <a:r>
-              <a:rPr lang="en-US" sz="2100" dirty="0">
+              <a:rPr lang="en-US" sz="1920" dirty="0">
                 <a:solidFill>
                   <a:srgbClr val="003A63"/>
                 </a:solidFill>
@@ -7842,14 +7844,14 @@
               </a:rPr>
               <a:t>• What are the consequences of false positives and false negatives?</a:t>
             </a:r>
-            <a:endParaRPr lang="en-US" sz="2100" dirty="0"/>
-          </a:p>
-          <a:p>
-            <a:pPr indent="0" marL="0">
-              <a:buNone/>
-            </a:pPr>
-            <a:r>
-              <a:rPr lang="en-US" sz="2100" dirty="0">
+            <a:endParaRPr lang="en-US" sz="1920" dirty="0"/>
+          </a:p>
+          <a:p>
+            <a:pPr indent="0" marL="0">
+              <a:buNone/>
+            </a:pPr>
+            <a:r>
+              <a:rPr lang="en-US" sz="1920" dirty="0">
                 <a:solidFill>
                   <a:srgbClr val="003A63"/>
                 </a:solidFill>
@@ -7859,7 +7861,7 @@
               </a:rPr>
               <a:t>• How will thresholds, calibration, and subgroup performance be monitored?</a:t>
             </a:r>
-            <a:endParaRPr lang="en-US" sz="2100" dirty="0"/>
+            <a:endParaRPr lang="en-US" sz="1920" dirty="0"/>
           </a:p>
         </p:txBody>
       </p:sp>
@@ -7871,12 +7873,12 @@
         </p:nvSpPr>
         <p:spPr>
           <a:xfrm>
-            <a:off x="7635240" y="1325880"/>
-            <a:ext cx="3474720" cy="1207008"/>
+            <a:off x="7543800" y="1325880"/>
+            <a:ext cx="3611880" cy="1261872"/>
           </a:xfrm>
           <a:prstGeom prst="roundRect">
             <a:avLst>
-              <a:gd name="adj" fmla="val 9091"/>
+              <a:gd name="adj" fmla="val 8696"/>
             </a:avLst>
           </a:prstGeom>
           <a:solidFill>
@@ -7898,8 +7900,8 @@
         </p:nvSpPr>
         <p:spPr>
           <a:xfrm>
-            <a:off x="7799832" y="1472184"/>
-            <a:ext cx="3145536" cy="256032"/>
+            <a:off x="7708392" y="1453896"/>
+            <a:ext cx="3282696" cy="228600"/>
           </a:xfrm>
           <a:prstGeom prst="rect">
             <a:avLst/>
@@ -7915,7 +7917,7 @@
               <a:buNone/>
             </a:pPr>
             <a:r>
-              <a:rPr lang="en-US" sz="1300" b="1" dirty="0">
+              <a:rPr lang="en-US" sz="1220" b="1" dirty="0">
                 <a:solidFill>
                   <a:srgbClr val="0068B7"/>
                 </a:solidFill>
@@ -7925,7 +7927,7 @@
               </a:rPr>
               <a:t>Risk check</a:t>
             </a:r>
-            <a:endParaRPr lang="en-US" sz="1300" dirty="0"/>
+            <a:endParaRPr lang="en-US" sz="1220" dirty="0"/>
           </a:p>
         </p:txBody>
       </p:sp>
@@ -7937,8 +7939,8 @@
         </p:nvSpPr>
         <p:spPr>
           <a:xfrm>
-            <a:off x="7799832" y="1801368"/>
-            <a:ext cx="3145536" cy="640080"/>
+            <a:off x="7708392" y="1764792"/>
+            <a:ext cx="3282696" cy="749808"/>
           </a:xfrm>
           <a:prstGeom prst="rect">
             <a:avLst/>
@@ -7956,7 +7958,7 @@
               <a:buNone/>
             </a:pPr>
             <a:r>
-              <a:rPr lang="en-US" sz="1320" dirty="0">
+              <a:rPr lang="en-US" sz="1220" dirty="0">
                 <a:solidFill>
                   <a:srgbClr val="17364A"/>
                 </a:solidFill>
@@ -7966,7 +7968,7 @@
               </a:rPr>
               <a:t>What are the consequences of false positives and false negatives?</a:t>
             </a:r>
-            <a:endParaRPr lang="en-US" sz="1320" dirty="0"/>
+            <a:endParaRPr lang="en-US" sz="1220" dirty="0"/>
           </a:p>
         </p:txBody>
       </p:sp>
@@ -7978,12 +7980,12 @@
         </p:nvSpPr>
         <p:spPr>
           <a:xfrm>
-            <a:off x="7635240" y="2670048"/>
-            <a:ext cx="3474720" cy="1536192"/>
+            <a:off x="7543800" y="2724912"/>
+            <a:ext cx="3611880" cy="1527048"/>
           </a:xfrm>
           <a:prstGeom prst="roundRect">
             <a:avLst>
-              <a:gd name="adj" fmla="val 7143"/>
+              <a:gd name="adj" fmla="val 7186"/>
             </a:avLst>
           </a:prstGeom>
           <a:solidFill>
@@ -8005,8 +8007,8 @@
         </p:nvSpPr>
         <p:spPr>
           <a:xfrm>
-            <a:off x="7799832" y="2816352"/>
-            <a:ext cx="3145536" cy="256032"/>
+            <a:off x="7708392" y="2852928"/>
+            <a:ext cx="3282696" cy="228600"/>
           </a:xfrm>
           <a:prstGeom prst="rect">
             <a:avLst/>
@@ -8022,7 +8024,7 @@
               <a:buNone/>
             </a:pPr>
             <a:r>
-              <a:rPr lang="en-US" sz="1300" b="1" dirty="0">
+              <a:rPr lang="en-US" sz="1220" b="1" dirty="0">
                 <a:solidFill>
                   <a:srgbClr val="0068B7"/>
                 </a:solidFill>
@@ -8032,7 +8034,7 @@
               </a:rPr>
               <a:t>Concept checkpoints</a:t>
             </a:r>
-            <a:endParaRPr lang="en-US" sz="1300" dirty="0"/>
+            <a:endParaRPr lang="en-US" sz="1220" dirty="0"/>
           </a:p>
         </p:txBody>
       </p:sp>
@@ -8044,8 +8046,8 @@
         </p:nvSpPr>
         <p:spPr>
           <a:xfrm>
-            <a:off x="7818120" y="3182112"/>
-            <a:ext cx="3090672" cy="877824"/>
+            <a:off x="7726680" y="3182112"/>
+            <a:ext cx="3227832" cy="960120"/>
           </a:xfrm>
           <a:prstGeom prst="rect">
             <a:avLst/>
@@ -8063,7 +8065,7 @@
               <a:buNone/>
             </a:pPr>
             <a:r>
-              <a:rPr lang="en-US" sz="1220" dirty="0">
+              <a:rPr lang="en-US" sz="1140" dirty="0">
                 <a:solidFill>
                   <a:srgbClr val="17364A"/>
                 </a:solidFill>
@@ -8071,16 +8073,16 @@
                 <a:ea typeface="Aptos" pitchFamily="34" charset="-122"/>
                 <a:cs typeface="Aptos" pitchFamily="34" charset="-120"/>
               </a:rPr>
-              <a:t>What are the consequences of false positives and false negatives?</a:t>
-            </a:r>
-            <a:endParaRPr lang="en-US" sz="1220" dirty="0"/>
-          </a:p>
-          <a:p>
-            <a:pPr indent="0" marL="0">
-              <a:buNone/>
-            </a:pPr>
-            <a:r>
-              <a:rPr lang="en-US" sz="1220" dirty="0">
+              <a:t>What are the consequences of false positives and.</a:t>
+            </a:r>
+            <a:endParaRPr lang="en-US" sz="1140" dirty="0"/>
+          </a:p>
+          <a:p>
+            <a:pPr indent="0" marL="0">
+              <a:buNone/>
+            </a:pPr>
+            <a:r>
+              <a:rPr lang="en-US" sz="1140" dirty="0">
                 <a:solidFill>
                   <a:srgbClr val="17364A"/>
                 </a:solidFill>
@@ -8088,9 +8090,9 @@
                 <a:ea typeface="Aptos" pitchFamily="34" charset="-122"/>
                 <a:cs typeface="Aptos" pitchFamily="34" charset="-120"/>
               </a:rPr>
-              <a:t>How will thresholds, calibration, and subgroup performance be.</a:t>
-            </a:r>
-            <a:endParaRPr lang="en-US" sz="1220" dirty="0"/>
+              <a:t>How will thresholds, calibration, and subgroup.</a:t>
+            </a:r>
+            <a:endParaRPr lang="en-US" sz="1140" dirty="0"/>
           </a:p>
         </p:txBody>
       </p:sp>
@@ -8102,12 +8104,12 @@
         </p:nvSpPr>
         <p:spPr>
           <a:xfrm>
-            <a:off x="7635240" y="4343400"/>
-            <a:ext cx="3474720" cy="1255471"/>
+            <a:off x="7543800" y="4389120"/>
+            <a:ext cx="3611880" cy="1261872"/>
           </a:xfrm>
           <a:prstGeom prst="roundRect">
             <a:avLst>
-              <a:gd name="adj" fmla="val 8740"/>
+              <a:gd name="adj" fmla="val 8696"/>
             </a:avLst>
           </a:prstGeom>
           <a:solidFill>
@@ -8129,8 +8131,8 @@
         </p:nvSpPr>
         <p:spPr>
           <a:xfrm>
-            <a:off x="7799832" y="4489704"/>
-            <a:ext cx="3145536" cy="256032"/>
+            <a:off x="7708392" y="4517136"/>
+            <a:ext cx="3282696" cy="228600"/>
           </a:xfrm>
           <a:prstGeom prst="rect">
             <a:avLst/>
@@ -8146,7 +8148,7 @@
               <a:buNone/>
             </a:pPr>
             <a:r>
-              <a:rPr lang="en-US" sz="1300" b="1" dirty="0">
+              <a:rPr lang="en-US" sz="1220" b="1" dirty="0">
                 <a:solidFill>
                   <a:srgbClr val="0068B7"/>
                 </a:solidFill>
@@ -8156,7 +8158,7 @@
               </a:rPr>
               <a:t>Safeguard to plan</a:t>
             </a:r>
-            <a:endParaRPr lang="en-US" sz="1300" dirty="0"/>
+            <a:endParaRPr lang="en-US" sz="1220" dirty="0"/>
           </a:p>
         </p:txBody>
       </p:sp>
@@ -8168,8 +8170,8 @@
         </p:nvSpPr>
         <p:spPr>
           <a:xfrm>
-            <a:off x="7799832" y="4818888"/>
-            <a:ext cx="3145536" cy="688543"/>
+            <a:off x="7708392" y="4828032"/>
+            <a:ext cx="3282696" cy="749808"/>
           </a:xfrm>
           <a:prstGeom prst="rect">
             <a:avLst/>
@@ -8187,7 +8189,7 @@
               <a:buNone/>
             </a:pPr>
             <a:r>
-              <a:rPr lang="en-US" sz="1320" dirty="0">
+              <a:rPr lang="en-US" sz="1220" dirty="0">
                 <a:solidFill>
                   <a:srgbClr val="17364A"/>
                 </a:solidFill>
@@ -8195,9 +8197,9 @@
                 <a:ea typeface="Aptos" pitchFamily="34" charset="-122"/>
                 <a:cs typeface="Aptos" pitchFamily="34" charset="-120"/>
               </a:rPr>
-              <a:t>Identify what could go wrong, who could be affected, what safeguards are needed, and what evidence should be reviewed before use.</a:t>
-            </a:r>
-            <a:endParaRPr lang="en-US" sz="1320" dirty="0"/>
+              <a:t>Identify what could go wrong, who could be affected, what safeguards are needed,.</a:t>
+            </a:r>
+            <a:endParaRPr lang="en-US" sz="1220" dirty="0"/>
           </a:p>
         </p:txBody>
       </p:sp>
@@ -8488,8 +8490,8 @@
         </p:nvSpPr>
         <p:spPr>
           <a:xfrm>
-            <a:off x="868680" y="1508760"/>
-            <a:ext cx="6309360" cy="4160520"/>
+            <a:off x="822960" y="1463040"/>
+            <a:ext cx="6565392" cy="4343400"/>
           </a:xfrm>
           <a:prstGeom prst="rect">
             <a:avLst/>
@@ -8507,7 +8509,7 @@
               <a:buNone/>
             </a:pPr>
             <a:r>
-              <a:rPr lang="en-US" sz="2100" dirty="0">
+              <a:rPr lang="en-US" sz="1920" dirty="0">
                 <a:solidFill>
                   <a:srgbClr val="003A63"/>
                 </a:solidFill>
@@ -8517,14 +8519,14 @@
               </a:rPr>
               <a:t>• Create a predictive model review plan for one public health use case.</a:t>
             </a:r>
-            <a:endParaRPr lang="en-US" sz="2100" dirty="0"/>
-          </a:p>
-          <a:p>
-            <a:pPr indent="0" marL="0">
-              <a:buNone/>
-            </a:pPr>
-            <a:r>
-              <a:rPr lang="en-US" sz="2100" dirty="0">
+            <a:endParaRPr lang="en-US" sz="1920" dirty="0"/>
+          </a:p>
+          <a:p>
+            <a:pPr indent="0" marL="0">
+              <a:buNone/>
+            </a:pPr>
+            <a:r>
+              <a:rPr lang="en-US" sz="1920" dirty="0">
                 <a:solidFill>
                   <a:srgbClr val="003A63"/>
                 </a:solidFill>
@@ -8532,16 +8534,16 @@
                 <a:ea typeface="Aptos" pitchFamily="34" charset="-122"/>
                 <a:cs typeface="Aptos" pitchFamily="34" charset="-120"/>
               </a:rPr>
-              <a:t>• Include the outcome, population, time horizon, data sources, candidate features, risk.</a:t>
-            </a:r>
-            <a:endParaRPr lang="en-US" sz="2100" dirty="0"/>
-          </a:p>
-          <a:p>
-            <a:pPr indent="0" marL="0">
-              <a:buNone/>
-            </a:pPr>
-            <a:r>
-              <a:rPr lang="en-US" sz="2100" dirty="0">
+              <a:t>• Include the outcome, population, time horizon, data sources, candidate.</a:t>
+            </a:r>
+            <a:endParaRPr lang="en-US" sz="1920" dirty="0"/>
+          </a:p>
+          <a:p>
+            <a:pPr indent="0" marL="0">
+              <a:buNone/>
+            </a:pPr>
+            <a:r>
+              <a:rPr lang="en-US" sz="1920" dirty="0">
                 <a:solidFill>
                   <a:srgbClr val="003A63"/>
                 </a:solidFill>
@@ -8549,9 +8551,9 @@
                 <a:ea typeface="Aptos" pitchFamily="34" charset="-122"/>
                 <a:cs typeface="Aptos" pitchFamily="34" charset="-120"/>
               </a:rPr>
-              <a:t>• The plan should also identify whether the use is supportive, restrictive, or consequential.</a:t>
-            </a:r>
-            <a:endParaRPr lang="en-US" sz="2100" dirty="0"/>
+              <a:t>• The plan should also identify whether the use is supportive, restrictive, or.</a:t>
+            </a:r>
+            <a:endParaRPr lang="en-US" sz="1920" dirty="0"/>
           </a:p>
         </p:txBody>
       </p:sp>
@@ -8563,12 +8565,12 @@
         </p:nvSpPr>
         <p:spPr>
           <a:xfrm>
-            <a:off x="7635240" y="1325880"/>
-            <a:ext cx="3474720" cy="1207008"/>
+            <a:off x="7543800" y="1325880"/>
+            <a:ext cx="3611880" cy="1261872"/>
           </a:xfrm>
           <a:prstGeom prst="roundRect">
             <a:avLst>
-              <a:gd name="adj" fmla="val 9091"/>
+              <a:gd name="adj" fmla="val 8696"/>
             </a:avLst>
           </a:prstGeom>
           <a:solidFill>
@@ -8590,8 +8592,8 @@
         </p:nvSpPr>
         <p:spPr>
           <a:xfrm>
-            <a:off x="7799832" y="1472184"/>
-            <a:ext cx="3145536" cy="256032"/>
+            <a:off x="7708392" y="1453896"/>
+            <a:ext cx="3282696" cy="228600"/>
           </a:xfrm>
           <a:prstGeom prst="rect">
             <a:avLst/>
@@ -8607,7 +8609,7 @@
               <a:buNone/>
             </a:pPr>
             <a:r>
-              <a:rPr lang="en-US" sz="1300" b="1" dirty="0">
+              <a:rPr lang="en-US" sz="1220" b="1" dirty="0">
                 <a:solidFill>
                   <a:srgbClr val="0068B7"/>
                 </a:solidFill>
@@ -8617,7 +8619,7 @@
               </a:rPr>
               <a:t>Risk check</a:t>
             </a:r>
-            <a:endParaRPr lang="en-US" sz="1300" dirty="0"/>
+            <a:endParaRPr lang="en-US" sz="1220" dirty="0"/>
           </a:p>
         </p:txBody>
       </p:sp>
@@ -8629,8 +8631,8 @@
         </p:nvSpPr>
         <p:spPr>
           <a:xfrm>
-            <a:off x="7799832" y="1801368"/>
-            <a:ext cx="3145536" cy="640080"/>
+            <a:off x="7708392" y="1764792"/>
+            <a:ext cx="3282696" cy="749808"/>
           </a:xfrm>
           <a:prstGeom prst="rect">
             <a:avLst/>
@@ -8648,7 +8650,7 @@
               <a:buNone/>
             </a:pPr>
             <a:r>
-              <a:rPr lang="en-US" sz="1320" dirty="0">
+              <a:rPr lang="en-US" sz="1220" dirty="0">
                 <a:solidFill>
                   <a:srgbClr val="17364A"/>
                 </a:solidFill>
@@ -8658,7 +8660,7 @@
               </a:rPr>
               <a:t>Create a predictive model review plan for one public health use case.</a:t>
             </a:r>
-            <a:endParaRPr lang="en-US" sz="1320" dirty="0"/>
+            <a:endParaRPr lang="en-US" sz="1220" dirty="0"/>
           </a:p>
         </p:txBody>
       </p:sp>
@@ -8670,12 +8672,12 @@
         </p:nvSpPr>
         <p:spPr>
           <a:xfrm>
-            <a:off x="7635240" y="2670048"/>
-            <a:ext cx="3474720" cy="1377086"/>
+            <a:off x="7543800" y="2724912"/>
+            <a:ext cx="3611880" cy="1527048"/>
           </a:xfrm>
           <a:prstGeom prst="roundRect">
             <a:avLst>
-              <a:gd name="adj" fmla="val 7968"/>
+              <a:gd name="adj" fmla="val 7186"/>
             </a:avLst>
           </a:prstGeom>
           <a:solidFill>
@@ -8697,8 +8699,8 @@
         </p:nvSpPr>
         <p:spPr>
           <a:xfrm>
-            <a:off x="7799832" y="2816352"/>
-            <a:ext cx="3145536" cy="256032"/>
+            <a:off x="7708392" y="2852928"/>
+            <a:ext cx="3282696" cy="228600"/>
           </a:xfrm>
           <a:prstGeom prst="rect">
             <a:avLst/>
@@ -8714,7 +8716,7 @@
               <a:buNone/>
             </a:pPr>
             <a:r>
-              <a:rPr lang="en-US" sz="1300" b="1" dirty="0">
+              <a:rPr lang="en-US" sz="1220" b="1" dirty="0">
                 <a:solidFill>
                   <a:srgbClr val="0068B7"/>
                 </a:solidFill>
@@ -8724,7 +8726,7 @@
               </a:rPr>
               <a:t>Concept checkpoints</a:t>
             </a:r>
-            <a:endParaRPr lang="en-US" sz="1300" dirty="0"/>
+            <a:endParaRPr lang="en-US" sz="1220" dirty="0"/>
           </a:p>
         </p:txBody>
       </p:sp>
@@ -8736,8 +8738,8 @@
         </p:nvSpPr>
         <p:spPr>
           <a:xfrm>
-            <a:off x="7818120" y="3182112"/>
-            <a:ext cx="3090672" cy="718718"/>
+            <a:off x="7726680" y="3182112"/>
+            <a:ext cx="3227832" cy="960120"/>
           </a:xfrm>
           <a:prstGeom prst="rect">
             <a:avLst/>
@@ -8755,7 +8757,7 @@
               <a:buNone/>
             </a:pPr>
             <a:r>
-              <a:rPr lang="en-US" sz="1220" dirty="0">
+              <a:rPr lang="en-US" sz="1140" dirty="0">
                 <a:solidFill>
                   <a:srgbClr val="17364A"/>
                 </a:solidFill>
@@ -8763,16 +8765,16 @@
                 <a:ea typeface="Aptos" pitchFamily="34" charset="-122"/>
                 <a:cs typeface="Aptos" pitchFamily="34" charset="-120"/>
               </a:rPr>
-              <a:t>Include the outcome, population, time horizon, data sources,.</a:t>
-            </a:r>
-            <a:endParaRPr lang="en-US" sz="1220" dirty="0"/>
-          </a:p>
-          <a:p>
-            <a:pPr indent="0" marL="0">
-              <a:buNone/>
-            </a:pPr>
-            <a:r>
-              <a:rPr lang="en-US" sz="1220" dirty="0">
+              <a:t>Include the outcome, population, time horizon,.</a:t>
+            </a:r>
+            <a:endParaRPr lang="en-US" sz="1140" dirty="0"/>
+          </a:p>
+          <a:p>
+            <a:pPr indent="0" marL="0">
+              <a:buNone/>
+            </a:pPr>
+            <a:r>
+              <a:rPr lang="en-US" sz="1140" dirty="0">
                 <a:solidFill>
                   <a:srgbClr val="17364A"/>
                 </a:solidFill>
@@ -8780,9 +8782,9 @@
                 <a:ea typeface="Aptos" pitchFamily="34" charset="-122"/>
                 <a:cs typeface="Aptos" pitchFamily="34" charset="-120"/>
               </a:rPr>
-              <a:t>Predictive tools used to allocate supportive resources have.</a:t>
-            </a:r>
-            <a:endParaRPr lang="en-US" sz="1220" dirty="0"/>
+              <a:t>Predictive tools used to allocate supportive.</a:t>
+            </a:r>
+            <a:endParaRPr lang="en-US" sz="1140" dirty="0"/>
           </a:p>
         </p:txBody>
       </p:sp>
@@ -8794,12 +8796,12 @@
         </p:nvSpPr>
         <p:spPr>
           <a:xfrm>
-            <a:off x="7635240" y="4184294"/>
-            <a:ext cx="3474720" cy="1466698"/>
+            <a:off x="7543800" y="4389120"/>
+            <a:ext cx="3611880" cy="1261872"/>
           </a:xfrm>
           <a:prstGeom prst="roundRect">
             <a:avLst>
-              <a:gd name="adj" fmla="val 7481"/>
+              <a:gd name="adj" fmla="val 8696"/>
             </a:avLst>
           </a:prstGeom>
           <a:solidFill>
@@ -8821,8 +8823,8 @@
         </p:nvSpPr>
         <p:spPr>
           <a:xfrm>
-            <a:off x="7799832" y="4330598"/>
-            <a:ext cx="3145536" cy="256032"/>
+            <a:off x="7708392" y="4517136"/>
+            <a:ext cx="3282696" cy="228600"/>
           </a:xfrm>
           <a:prstGeom prst="rect">
             <a:avLst/>
@@ -8838,7 +8840,7 @@
               <a:buNone/>
             </a:pPr>
             <a:r>
-              <a:rPr lang="en-US" sz="1300" b="1" dirty="0">
+              <a:rPr lang="en-US" sz="1220" b="1" dirty="0">
                 <a:solidFill>
                   <a:srgbClr val="0068B7"/>
                 </a:solidFill>
@@ -8848,7 +8850,7 @@
               </a:rPr>
               <a:t>Safeguard to plan</a:t>
             </a:r>
-            <a:endParaRPr lang="en-US" sz="1300" dirty="0"/>
+            <a:endParaRPr lang="en-US" sz="1220" dirty="0"/>
           </a:p>
         </p:txBody>
       </p:sp>
@@ -8860,8 +8862,8 @@
         </p:nvSpPr>
         <p:spPr>
           <a:xfrm>
-            <a:off x="7799832" y="4659782"/>
-            <a:ext cx="3145536" cy="899770"/>
+            <a:off x="7708392" y="4828032"/>
+            <a:ext cx="3282696" cy="749808"/>
           </a:xfrm>
           <a:prstGeom prst="rect">
             <a:avLst/>
@@ -8879,7 +8881,7 @@
               <a:buNone/>
             </a:pPr>
             <a:r>
-              <a:rPr lang="en-US" sz="1320" dirty="0">
+              <a:rPr lang="en-US" sz="1220" dirty="0">
                 <a:solidFill>
                   <a:srgbClr val="17364A"/>
                 </a:solidFill>
@@ -8887,9 +8889,9 @@
                 <a:ea typeface="Aptos" pitchFamily="34" charset="-122"/>
                 <a:cs typeface="Aptos" pitchFamily="34" charset="-120"/>
               </a:rPr>
-              <a:t>Use the assignment to test whether you can explain the concept, apply it to a realistic public health situation, and identify what would need review before the work moves forward.</a:t>
-            </a:r>
-            <a:endParaRPr lang="en-US" sz="1320" dirty="0"/>
+              <a:t>Use the assignment to test whether you can explain the concept, apply it to a.</a:t>
+            </a:r>
+            <a:endParaRPr lang="en-US" sz="1220" dirty="0"/>
           </a:p>
         </p:txBody>
       </p:sp>
@@ -9180,8 +9182,8 @@
         </p:nvSpPr>
         <p:spPr>
           <a:xfrm>
-            <a:off x="868680" y="1508760"/>
-            <a:ext cx="6309360" cy="4160520"/>
+            <a:off x="822960" y="1463040"/>
+            <a:ext cx="6565392" cy="4343400"/>
           </a:xfrm>
           <a:prstGeom prst="rect">
             <a:avLst/>
@@ -9199,7 +9201,7 @@
               <a:buNone/>
             </a:pPr>
             <a:r>
-              <a:rPr lang="en-US" sz="2100" dirty="0">
+              <a:rPr lang="en-US" sz="1920" dirty="0">
                 <a:solidFill>
                   <a:srgbClr val="003A63"/>
                 </a:solidFill>
@@ -9209,14 +9211,14 @@
               </a:rPr>
               <a:t>• Predictive model review plan</a:t>
             </a:r>
-            <a:endParaRPr lang="en-US" sz="2100" dirty="0"/>
-          </a:p>
-          <a:p>
-            <a:pPr indent="0" marL="0">
-              <a:buNone/>
-            </a:pPr>
-            <a:r>
-              <a:rPr lang="en-US" sz="2100" dirty="0">
+            <a:endParaRPr lang="en-US" sz="1920" dirty="0"/>
+          </a:p>
+          <a:p>
+            <a:pPr indent="0" marL="0">
+              <a:buNone/>
+            </a:pPr>
+            <a:r>
+              <a:rPr lang="en-US" sz="1920" dirty="0">
                 <a:solidFill>
                   <a:srgbClr val="003A63"/>
                 </a:solidFill>
@@ -9226,14 +9228,14 @@
               </a:rPr>
               <a:t>• Risk score interpretation guide</a:t>
             </a:r>
-            <a:endParaRPr lang="en-US" sz="2100" dirty="0"/>
-          </a:p>
-          <a:p>
-            <a:pPr indent="0" marL="0">
-              <a:buNone/>
-            </a:pPr>
-            <a:r>
-              <a:rPr lang="en-US" sz="2100" dirty="0">
+            <a:endParaRPr lang="en-US" sz="1920" dirty="0"/>
+          </a:p>
+          <a:p>
+            <a:pPr indent="0" marL="0">
+              <a:buNone/>
+            </a:pPr>
+            <a:r>
+              <a:rPr lang="en-US" sz="1920" dirty="0">
                 <a:solidFill>
                   <a:srgbClr val="003A63"/>
                 </a:solidFill>
@@ -9243,7 +9245,7 @@
               </a:rPr>
               <a:t>• Threshold and error tradeoff memo</a:t>
             </a:r>
-            <a:endParaRPr lang="en-US" sz="2100" dirty="0"/>
+            <a:endParaRPr lang="en-US" sz="1920" dirty="0"/>
           </a:p>
         </p:txBody>
       </p:sp>
@@ -9255,12 +9257,12 @@
         </p:nvSpPr>
         <p:spPr>
           <a:xfrm>
-            <a:off x="7635240" y="1325880"/>
-            <a:ext cx="3474720" cy="1207008"/>
+            <a:off x="7543800" y="1325880"/>
+            <a:ext cx="3611880" cy="1261872"/>
           </a:xfrm>
           <a:prstGeom prst="roundRect">
             <a:avLst>
-              <a:gd name="adj" fmla="val 9091"/>
+              <a:gd name="adj" fmla="val 8696"/>
             </a:avLst>
           </a:prstGeom>
           <a:solidFill>
@@ -9282,8 +9284,8 @@
         </p:nvSpPr>
         <p:spPr>
           <a:xfrm>
-            <a:off x="7799832" y="1472184"/>
-            <a:ext cx="3145536" cy="256032"/>
+            <a:off x="7708392" y="1453896"/>
+            <a:ext cx="3282696" cy="228600"/>
           </a:xfrm>
           <a:prstGeom prst="rect">
             <a:avLst/>
@@ -9299,7 +9301,7 @@
               <a:buNone/>
             </a:pPr>
             <a:r>
-              <a:rPr lang="en-US" sz="1300" b="1" dirty="0">
+              <a:rPr lang="en-US" sz="1220" b="1" dirty="0">
                 <a:solidFill>
                   <a:srgbClr val="0068B7"/>
                 </a:solidFill>
@@ -9309,7 +9311,7 @@
               </a:rPr>
               <a:t>Risk check</a:t>
             </a:r>
-            <a:endParaRPr lang="en-US" sz="1300" dirty="0"/>
+            <a:endParaRPr lang="en-US" sz="1220" dirty="0"/>
           </a:p>
         </p:txBody>
       </p:sp>
@@ -9321,8 +9323,8 @@
         </p:nvSpPr>
         <p:spPr>
           <a:xfrm>
-            <a:off x="7799832" y="1801368"/>
-            <a:ext cx="3145536" cy="640080"/>
+            <a:off x="7708392" y="1764792"/>
+            <a:ext cx="3282696" cy="749808"/>
           </a:xfrm>
           <a:prstGeom prst="rect">
             <a:avLst/>
@@ -9340,7 +9342,7 @@
               <a:buNone/>
             </a:pPr>
             <a:r>
-              <a:rPr lang="en-US" sz="1320" dirty="0">
+              <a:rPr lang="en-US" sz="1220" dirty="0">
                 <a:solidFill>
                   <a:srgbClr val="17364A"/>
                 </a:solidFill>
@@ -9350,7 +9352,7 @@
               </a:rPr>
               <a:t>Predictive model review plan</a:t>
             </a:r>
-            <a:endParaRPr lang="en-US" sz="1320" dirty="0"/>
+            <a:endParaRPr lang="en-US" sz="1220" dirty="0"/>
           </a:p>
         </p:txBody>
       </p:sp>
@@ -9362,12 +9364,12 @@
         </p:nvSpPr>
         <p:spPr>
           <a:xfrm>
-            <a:off x="7635240" y="2670048"/>
-            <a:ext cx="3474720" cy="1536192"/>
+            <a:off x="7543800" y="2724912"/>
+            <a:ext cx="3611880" cy="1527048"/>
           </a:xfrm>
           <a:prstGeom prst="roundRect">
             <a:avLst>
-              <a:gd name="adj" fmla="val 7143"/>
+              <a:gd name="adj" fmla="val 7186"/>
             </a:avLst>
           </a:prstGeom>
           <a:solidFill>
@@ -9389,8 +9391,8 @@
         </p:nvSpPr>
         <p:spPr>
           <a:xfrm>
-            <a:off x="7799832" y="2816352"/>
-            <a:ext cx="3145536" cy="256032"/>
+            <a:off x="7708392" y="2852928"/>
+            <a:ext cx="3282696" cy="228600"/>
           </a:xfrm>
           <a:prstGeom prst="rect">
             <a:avLst/>
@@ -9406,7 +9408,7 @@
               <a:buNone/>
             </a:pPr>
             <a:r>
-              <a:rPr lang="en-US" sz="1300" b="1" dirty="0">
+              <a:rPr lang="en-US" sz="1220" b="1" dirty="0">
                 <a:solidFill>
                   <a:srgbClr val="0068B7"/>
                 </a:solidFill>
@@ -9416,7 +9418,7 @@
               </a:rPr>
               <a:t>Concept checkpoints</a:t>
             </a:r>
-            <a:endParaRPr lang="en-US" sz="1300" dirty="0"/>
+            <a:endParaRPr lang="en-US" sz="1220" dirty="0"/>
           </a:p>
         </p:txBody>
       </p:sp>
@@ -9428,8 +9430,8 @@
         </p:nvSpPr>
         <p:spPr>
           <a:xfrm>
-            <a:off x="7818120" y="3182112"/>
-            <a:ext cx="3090672" cy="877824"/>
+            <a:off x="7726680" y="3182112"/>
+            <a:ext cx="3227832" cy="960120"/>
           </a:xfrm>
           <a:prstGeom prst="rect">
             <a:avLst/>
@@ -9447,7 +9449,7 @@
               <a:buNone/>
             </a:pPr>
             <a:r>
-              <a:rPr lang="en-US" sz="1220" dirty="0">
+              <a:rPr lang="en-US" sz="1140" dirty="0">
                 <a:solidFill>
                   <a:srgbClr val="17364A"/>
                 </a:solidFill>
@@ -9457,14 +9459,14 @@
               </a:rPr>
               <a:t>Predictive model review plan</a:t>
             </a:r>
-            <a:endParaRPr lang="en-US" sz="1220" dirty="0"/>
-          </a:p>
-          <a:p>
-            <a:pPr indent="0" marL="0">
-              <a:buNone/>
-            </a:pPr>
-            <a:r>
-              <a:rPr lang="en-US" sz="1220" dirty="0">
+            <a:endParaRPr lang="en-US" sz="1140" dirty="0"/>
+          </a:p>
+          <a:p>
+            <a:pPr indent="0" marL="0">
+              <a:buNone/>
+            </a:pPr>
+            <a:r>
+              <a:rPr lang="en-US" sz="1140" dirty="0">
                 <a:solidFill>
                   <a:srgbClr val="17364A"/>
                 </a:solidFill>
@@ -9474,14 +9476,14 @@
               </a:rPr>
               <a:t>Risk score interpretation guide</a:t>
             </a:r>
-            <a:endParaRPr lang="en-US" sz="1220" dirty="0"/>
-          </a:p>
-          <a:p>
-            <a:pPr indent="0" marL="0">
-              <a:buNone/>
-            </a:pPr>
-            <a:r>
-              <a:rPr lang="en-US" sz="1220" dirty="0">
+            <a:endParaRPr lang="en-US" sz="1140" dirty="0"/>
+          </a:p>
+          <a:p>
+            <a:pPr indent="0" marL="0">
+              <a:buNone/>
+            </a:pPr>
+            <a:r>
+              <a:rPr lang="en-US" sz="1140" dirty="0">
                 <a:solidFill>
                   <a:srgbClr val="17364A"/>
                 </a:solidFill>
@@ -9491,7 +9493,7 @@
               </a:rPr>
               <a:t>Threshold and error tradeoff memo</a:t>
             </a:r>
-            <a:endParaRPr lang="en-US" sz="1220" dirty="0"/>
+            <a:endParaRPr lang="en-US" sz="1140" dirty="0"/>
           </a:p>
         </p:txBody>
       </p:sp>
@@ -9503,12 +9505,12 @@
         </p:nvSpPr>
         <p:spPr>
           <a:xfrm>
-            <a:off x="7635240" y="4343400"/>
-            <a:ext cx="3474720" cy="1255471"/>
+            <a:off x="7543800" y="4389120"/>
+            <a:ext cx="3611880" cy="1261872"/>
           </a:xfrm>
           <a:prstGeom prst="roundRect">
             <a:avLst>
-              <a:gd name="adj" fmla="val 8740"/>
+              <a:gd name="adj" fmla="val 8696"/>
             </a:avLst>
           </a:prstGeom>
           <a:solidFill>
@@ -9530,8 +9532,8 @@
         </p:nvSpPr>
         <p:spPr>
           <a:xfrm>
-            <a:off x="7799832" y="4489704"/>
-            <a:ext cx="3145536" cy="256032"/>
+            <a:off x="7708392" y="4517136"/>
+            <a:ext cx="3282696" cy="228600"/>
           </a:xfrm>
           <a:prstGeom prst="rect">
             <a:avLst/>
@@ -9547,7 +9549,7 @@
               <a:buNone/>
             </a:pPr>
             <a:r>
-              <a:rPr lang="en-US" sz="1300" b="1" dirty="0">
+              <a:rPr lang="en-US" sz="1220" b="1" dirty="0">
                 <a:solidFill>
                   <a:srgbClr val="0068B7"/>
                 </a:solidFill>
@@ -9557,7 +9559,7 @@
               </a:rPr>
               <a:t>Safeguard to plan</a:t>
             </a:r>
-            <a:endParaRPr lang="en-US" sz="1300" dirty="0"/>
+            <a:endParaRPr lang="en-US" sz="1220" dirty="0"/>
           </a:p>
         </p:txBody>
       </p:sp>
@@ -9569,8 +9571,8 @@
         </p:nvSpPr>
         <p:spPr>
           <a:xfrm>
-            <a:off x="7799832" y="4818888"/>
-            <a:ext cx="3145536" cy="688543"/>
+            <a:off x="7708392" y="4828032"/>
+            <a:ext cx="3282696" cy="749808"/>
           </a:xfrm>
           <a:prstGeom prst="rect">
             <a:avLst/>
@@ -9588,7 +9590,7 @@
               <a:buNone/>
             </a:pPr>
             <a:r>
-              <a:rPr lang="en-US" sz="1320" dirty="0">
+              <a:rPr lang="en-US" sz="1220" dirty="0">
                 <a:solidFill>
                   <a:srgbClr val="17364A"/>
                 </a:solidFill>
@@ -9596,9 +9598,9 @@
                 <a:ea typeface="Aptos" pitchFamily="34" charset="-122"/>
                 <a:cs typeface="Aptos" pitchFamily="34" charset="-120"/>
               </a:rPr>
-              <a:t>Identify what could go wrong, who could be affected, what safeguards are needed, and what evidence should be reviewed before use.</a:t>
-            </a:r>
-            <a:endParaRPr lang="en-US" sz="1320" dirty="0"/>
+              <a:t>Identify what could go wrong, who could be affected, what safeguards are needed,.</a:t>
+            </a:r>
+            <a:endParaRPr lang="en-US" sz="1220" dirty="0"/>
           </a:p>
         </p:txBody>
       </p:sp>
@@ -9889,8 +9891,8 @@
         </p:nvSpPr>
         <p:spPr>
           <a:xfrm>
-            <a:off x="868680" y="1508760"/>
-            <a:ext cx="6309360" cy="4160520"/>
+            <a:off x="822960" y="1463040"/>
+            <a:ext cx="6565392" cy="4343400"/>
           </a:xfrm>
           <a:prstGeom prst="rect">
             <a:avLst/>
@@ -9908,7 +9910,7 @@
               <a:buNone/>
             </a:pPr>
             <a:r>
-              <a:rPr lang="en-US" sz="2100" dirty="0">
+              <a:rPr lang="en-US" sz="1920" dirty="0">
                 <a:solidFill>
                   <a:srgbClr val="003A63"/>
                 </a:solidFill>
@@ -9918,7 +9920,7 @@
               </a:rPr>
               <a:t>• Subgroup monitoring plan</a:t>
             </a:r>
-            <a:endParaRPr lang="en-US" sz="2100" dirty="0"/>
+            <a:endParaRPr lang="en-US" sz="1920" dirty="0"/>
           </a:p>
         </p:txBody>
       </p:sp>
@@ -9930,12 +9932,12 @@
         </p:nvSpPr>
         <p:spPr>
           <a:xfrm>
-            <a:off x="7635240" y="1325880"/>
-            <a:ext cx="3474720" cy="1207008"/>
+            <a:off x="7543800" y="1325880"/>
+            <a:ext cx="3611880" cy="1261872"/>
           </a:xfrm>
           <a:prstGeom prst="roundRect">
             <a:avLst>
-              <a:gd name="adj" fmla="val 9091"/>
+              <a:gd name="adj" fmla="val 8696"/>
             </a:avLst>
           </a:prstGeom>
           <a:solidFill>
@@ -9957,8 +9959,8 @@
         </p:nvSpPr>
         <p:spPr>
           <a:xfrm>
-            <a:off x="7799832" y="1472184"/>
-            <a:ext cx="3145536" cy="256032"/>
+            <a:off x="7708392" y="1453896"/>
+            <a:ext cx="3282696" cy="228600"/>
           </a:xfrm>
           <a:prstGeom prst="rect">
             <a:avLst/>
@@ -9974,7 +9976,7 @@
               <a:buNone/>
             </a:pPr>
             <a:r>
-              <a:rPr lang="en-US" sz="1300" b="1" dirty="0">
+              <a:rPr lang="en-US" sz="1220" b="1" dirty="0">
                 <a:solidFill>
                   <a:srgbClr val="0068B7"/>
                 </a:solidFill>
@@ -9984,7 +9986,7 @@
               </a:rPr>
               <a:t>Risk check</a:t>
             </a:r>
-            <a:endParaRPr lang="en-US" sz="1300" dirty="0"/>
+            <a:endParaRPr lang="en-US" sz="1220" dirty="0"/>
           </a:p>
         </p:txBody>
       </p:sp>
@@ -9996,8 +9998,8 @@
         </p:nvSpPr>
         <p:spPr>
           <a:xfrm>
-            <a:off x="7799832" y="1801368"/>
-            <a:ext cx="3145536" cy="640080"/>
+            <a:off x="7708392" y="1764792"/>
+            <a:ext cx="3282696" cy="749808"/>
           </a:xfrm>
           <a:prstGeom prst="rect">
             <a:avLst/>
@@ -10015,7 +10017,7 @@
               <a:buNone/>
             </a:pPr>
             <a:r>
-              <a:rPr lang="en-US" sz="1320" dirty="0">
+              <a:rPr lang="en-US" sz="1220" dirty="0">
                 <a:solidFill>
                   <a:srgbClr val="17364A"/>
                 </a:solidFill>
@@ -10025,7 +10027,7 @@
               </a:rPr>
               <a:t>Subgroup monitoring plan</a:t>
             </a:r>
-            <a:endParaRPr lang="en-US" sz="1320" dirty="0"/>
+            <a:endParaRPr lang="en-US" sz="1220" dirty="0"/>
           </a:p>
         </p:txBody>
       </p:sp>
@@ -10037,12 +10039,12 @@
         </p:nvSpPr>
         <p:spPr>
           <a:xfrm>
-            <a:off x="7635240" y="2670048"/>
-            <a:ext cx="3474720" cy="1536192"/>
+            <a:off x="7543800" y="2724912"/>
+            <a:ext cx="3611880" cy="1527048"/>
           </a:xfrm>
           <a:prstGeom prst="roundRect">
             <a:avLst>
-              <a:gd name="adj" fmla="val 7143"/>
+              <a:gd name="adj" fmla="val 7186"/>
             </a:avLst>
           </a:prstGeom>
           <a:solidFill>
@@ -10064,8 +10066,8 @@
         </p:nvSpPr>
         <p:spPr>
           <a:xfrm>
-            <a:off x="7799832" y="2816352"/>
-            <a:ext cx="3145536" cy="256032"/>
+            <a:off x="7708392" y="2852928"/>
+            <a:ext cx="3282696" cy="228600"/>
           </a:xfrm>
           <a:prstGeom prst="rect">
             <a:avLst/>
@@ -10081,7 +10083,7 @@
               <a:buNone/>
             </a:pPr>
             <a:r>
-              <a:rPr lang="en-US" sz="1300" b="1" dirty="0">
+              <a:rPr lang="en-US" sz="1220" b="1" dirty="0">
                 <a:solidFill>
                   <a:srgbClr val="0068B7"/>
                 </a:solidFill>
@@ -10091,7 +10093,7 @@
               </a:rPr>
               <a:t>Concept checkpoints</a:t>
             </a:r>
-            <a:endParaRPr lang="en-US" sz="1300" dirty="0"/>
+            <a:endParaRPr lang="en-US" sz="1220" dirty="0"/>
           </a:p>
         </p:txBody>
       </p:sp>
@@ -10103,8 +10105,8 @@
         </p:nvSpPr>
         <p:spPr>
           <a:xfrm>
-            <a:off x="7818120" y="3182112"/>
-            <a:ext cx="3090672" cy="877824"/>
+            <a:off x="7726680" y="3182112"/>
+            <a:ext cx="3227832" cy="960120"/>
           </a:xfrm>
           <a:prstGeom prst="rect">
             <a:avLst/>
@@ -10122,7 +10124,7 @@
               <a:buNone/>
             </a:pPr>
             <a:r>
-              <a:rPr lang="en-US" sz="1220" dirty="0">
+              <a:rPr lang="en-US" sz="1140" dirty="0">
                 <a:solidFill>
                   <a:srgbClr val="17364A"/>
                 </a:solidFill>
@@ -10132,7 +10134,7 @@
               </a:rPr>
               <a:t>Subgroup monitoring plan</a:t>
             </a:r>
-            <a:endParaRPr lang="en-US" sz="1220" dirty="0"/>
+            <a:endParaRPr lang="en-US" sz="1140" dirty="0"/>
           </a:p>
         </p:txBody>
       </p:sp>
@@ -10144,12 +10146,12 @@
         </p:nvSpPr>
         <p:spPr>
           <a:xfrm>
-            <a:off x="7635240" y="4343400"/>
-            <a:ext cx="3474720" cy="1255471"/>
+            <a:off x="7543800" y="4389120"/>
+            <a:ext cx="3611880" cy="1261872"/>
           </a:xfrm>
           <a:prstGeom prst="roundRect">
             <a:avLst>
-              <a:gd name="adj" fmla="val 8740"/>
+              <a:gd name="adj" fmla="val 8696"/>
             </a:avLst>
           </a:prstGeom>
           <a:solidFill>
@@ -10171,8 +10173,8 @@
         </p:nvSpPr>
         <p:spPr>
           <a:xfrm>
-            <a:off x="7799832" y="4489704"/>
-            <a:ext cx="3145536" cy="256032"/>
+            <a:off x="7708392" y="4517136"/>
+            <a:ext cx="3282696" cy="228600"/>
           </a:xfrm>
           <a:prstGeom prst="rect">
             <a:avLst/>
@@ -10188,7 +10190,7 @@
               <a:buNone/>
             </a:pPr>
             <a:r>
-              <a:rPr lang="en-US" sz="1300" b="1" dirty="0">
+              <a:rPr lang="en-US" sz="1220" b="1" dirty="0">
                 <a:solidFill>
                   <a:srgbClr val="0068B7"/>
                 </a:solidFill>
@@ -10198,7 +10200,7 @@
               </a:rPr>
               <a:t>Safeguard to plan</a:t>
             </a:r>
-            <a:endParaRPr lang="en-US" sz="1300" dirty="0"/>
+            <a:endParaRPr lang="en-US" sz="1220" dirty="0"/>
           </a:p>
         </p:txBody>
       </p:sp>
@@ -10210,8 +10212,8 @@
         </p:nvSpPr>
         <p:spPr>
           <a:xfrm>
-            <a:off x="7799832" y="4818888"/>
-            <a:ext cx="3145536" cy="688543"/>
+            <a:off x="7708392" y="4828032"/>
+            <a:ext cx="3282696" cy="749808"/>
           </a:xfrm>
           <a:prstGeom prst="rect">
             <a:avLst/>
@@ -10229,7 +10231,7 @@
               <a:buNone/>
             </a:pPr>
             <a:r>
-              <a:rPr lang="en-US" sz="1320" dirty="0">
+              <a:rPr lang="en-US" sz="1220" dirty="0">
                 <a:solidFill>
                   <a:srgbClr val="17364A"/>
                 </a:solidFill>
@@ -10237,9 +10239,9 @@
                 <a:ea typeface="Aptos" pitchFamily="34" charset="-122"/>
                 <a:cs typeface="Aptos" pitchFamily="34" charset="-120"/>
               </a:rPr>
-              <a:t>Identify what could go wrong, who could be affected, what safeguards are needed, and what evidence should be reviewed before use.</a:t>
-            </a:r>
-            <a:endParaRPr lang="en-US" sz="1320" dirty="0"/>
+              <a:t>Identify what could go wrong, who could be affected, what safeguards are needed,.</a:t>
+            </a:r>
+            <a:endParaRPr lang="en-US" sz="1220" dirty="0"/>
           </a:p>
         </p:txBody>
       </p:sp>
@@ -10557,7 +10559,7 @@
                 <a:ea typeface="Aptos" pitchFamily="34" charset="-122"/>
                 <a:cs typeface="Aptos" pitchFamily="34" charset="-120"/>
               </a:rPr>
-              <a:t>• Predictive analytics uses data to estimate the likelihood of future events or outcomes.</a:t>
+              <a:t>• Predictive analytics uses data to estimate the likelihood of future events.</a:t>
             </a:r>
             <a:endParaRPr lang="en-US" sz="2100" dirty="0"/>
           </a:p>
@@ -10574,7 +10576,7 @@
                 <a:ea typeface="Aptos" pitchFamily="34" charset="-122"/>
                 <a:cs typeface="Aptos" pitchFamily="34" charset="-120"/>
               </a:rPr>
-              <a:t>• In public health, predictive models may be used to anticipate disease burden, identify.</a:t>
+              <a:t>• In public health, predictive models may be used to anticipate disease.</a:t>
             </a:r>
             <a:endParaRPr lang="en-US" sz="2100" dirty="0"/>
           </a:p>
@@ -10591,7 +10593,7 @@
                 <a:ea typeface="Aptos" pitchFamily="34" charset="-122"/>
                 <a:cs typeface="Aptos" pitchFamily="34" charset="-120"/>
               </a:rPr>
-              <a:t>• Risk stratification is the practice of grouping individuals, facilities, areas, events, or.</a:t>
+              <a:t>• Risk stratification is the practice of grouping individuals, facilities,.</a:t>
             </a:r>
             <a:endParaRPr lang="en-US" sz="2100" dirty="0"/>
           </a:p>
@@ -10632,8 +10634,8 @@
         </p:nvSpPr>
         <p:spPr>
           <a:xfrm>
-            <a:off x="8074152" y="1563624"/>
-            <a:ext cx="2825496" cy="256032"/>
+            <a:off x="8074152" y="1545336"/>
+            <a:ext cx="2825496" cy="228600"/>
           </a:xfrm>
           <a:prstGeom prst="rect">
             <a:avLst/>
@@ -10649,7 +10651,7 @@
               <a:buNone/>
             </a:pPr>
             <a:r>
-              <a:rPr lang="en-US" sz="1300" b="1" dirty="0">
+              <a:rPr lang="en-US" sz="1220" b="1" dirty="0">
                 <a:solidFill>
                   <a:srgbClr val="0068B7"/>
                 </a:solidFill>
@@ -10659,7 +10661,7 @@
               </a:rPr>
               <a:t>Module details</a:t>
             </a:r>
-            <a:endParaRPr lang="en-US" sz="1300" dirty="0"/>
+            <a:endParaRPr lang="en-US" sz="1220" dirty="0"/>
           </a:p>
         </p:txBody>
       </p:sp>
@@ -10671,8 +10673,8 @@
         </p:nvSpPr>
         <p:spPr>
           <a:xfrm>
-            <a:off x="8074152" y="1892808"/>
-            <a:ext cx="2825496" cy="1353312"/>
+            <a:off x="8074152" y="1856232"/>
+            <a:ext cx="2825496" cy="1408176"/>
           </a:xfrm>
           <a:prstGeom prst="rect">
             <a:avLst/>
@@ -10690,7 +10692,7 @@
               <a:buNone/>
             </a:pPr>
             <a:r>
-              <a:rPr lang="en-US" sz="1320" dirty="0">
+              <a:rPr lang="en-US" sz="1220" dirty="0">
                 <a:solidFill>
                   <a:srgbClr val="17364A"/>
                 </a:solidFill>
@@ -10698,9 +10700,9 @@
                 <a:ea typeface="Aptos" pitchFamily="34" charset="-122"/>
                 <a:cs typeface="Aptos" pitchFamily="34" charset="-120"/>
               </a:rPr>
-              <a:t>Level: applied/foundational Primary track: Analytics and Modeling Track Appears in tracks: analytics-modeling</a:t>
-            </a:r>
-            <a:endParaRPr lang="en-US" sz="1320" dirty="0"/>
+              <a:t>Level: applied/foundational Primary track: Analytics and Modeling Track Appears.</a:t>
+            </a:r>
+            <a:endParaRPr lang="en-US" sz="1220" dirty="0"/>
           </a:p>
         </p:txBody>
       </p:sp>
@@ -10739,8 +10741,8 @@
         </p:nvSpPr>
         <p:spPr>
           <a:xfrm>
-            <a:off x="8074152" y="3822192"/>
-            <a:ext cx="2825496" cy="256032"/>
+            <a:off x="8074152" y="3803904"/>
+            <a:ext cx="2825496" cy="228600"/>
           </a:xfrm>
           <a:prstGeom prst="rect">
             <a:avLst/>
@@ -10756,7 +10758,7 @@
               <a:buNone/>
             </a:pPr>
             <a:r>
-              <a:rPr lang="en-US" sz="1300" b="1" dirty="0">
+              <a:rPr lang="en-US" sz="1220" b="1" dirty="0">
                 <a:solidFill>
                   <a:srgbClr val="0068B7"/>
                 </a:solidFill>
@@ -10766,7 +10768,7 @@
               </a:rPr>
               <a:t>Learning sequence</a:t>
             </a:r>
-            <a:endParaRPr lang="en-US" sz="1300" dirty="0"/>
+            <a:endParaRPr lang="en-US" sz="1220" dirty="0"/>
           </a:p>
         </p:txBody>
       </p:sp>
@@ -10778,8 +10780,8 @@
         </p:nvSpPr>
         <p:spPr>
           <a:xfrm>
-            <a:off x="8092440" y="4187952"/>
-            <a:ext cx="2770632" cy="1033272"/>
+            <a:off x="8092440" y="4133088"/>
+            <a:ext cx="2770632" cy="1124712"/>
           </a:xfrm>
           <a:prstGeom prst="rect">
             <a:avLst/>
@@ -10797,7 +10799,7 @@
               <a:buNone/>
             </a:pPr>
             <a:r>
-              <a:rPr lang="en-US" sz="1220" dirty="0">
+              <a:rPr lang="en-US" sz="1140" dirty="0">
                 <a:solidFill>
                   <a:srgbClr val="17364A"/>
                 </a:solidFill>
@@ -10807,14 +10809,14 @@
               </a:rPr>
               <a:t>Read the module for shared vocabulary and context.</a:t>
             </a:r>
-            <a:endParaRPr lang="en-US" sz="1220" dirty="0"/>
-          </a:p>
-          <a:p>
-            <a:pPr indent="0" marL="0">
-              <a:buNone/>
-            </a:pPr>
-            <a:r>
-              <a:rPr lang="en-US" sz="1220" dirty="0">
+            <a:endParaRPr lang="en-US" sz="1140" dirty="0"/>
+          </a:p>
+          <a:p>
+            <a:pPr indent="0" marL="0">
+              <a:buNone/>
+            </a:pPr>
+            <a:r>
+              <a:rPr lang="en-US" sz="1140" dirty="0">
                 <a:solidFill>
                   <a:srgbClr val="17364A"/>
                 </a:solidFill>
@@ -10822,16 +10824,16 @@
                 <a:ea typeface="Aptos" pitchFamily="34" charset="-122"/>
                 <a:cs typeface="Aptos" pitchFamily="34" charset="-120"/>
               </a:rPr>
-              <a:t>Complete the practical exercise to apply the concept.</a:t>
-            </a:r>
-            <a:endParaRPr lang="en-US" sz="1220" dirty="0"/>
-          </a:p>
-          <a:p>
-            <a:pPr indent="0" marL="0">
-              <a:buNone/>
-            </a:pPr>
-            <a:r>
-              <a:rPr lang="en-US" sz="1220" dirty="0">
+              <a:t>Complete the practical exercise to apply the.</a:t>
+            </a:r>
+            <a:endParaRPr lang="en-US" sz="1140" dirty="0"/>
+          </a:p>
+          <a:p>
+            <a:pPr indent="0" marL="0">
+              <a:buNone/>
+            </a:pPr>
+            <a:r>
+              <a:rPr lang="en-US" sz="1140" dirty="0">
                 <a:solidFill>
                   <a:srgbClr val="17364A"/>
                 </a:solidFill>
@@ -10841,7 +10843,7 @@
               </a:rPr>
               <a:t>Use the notes and references for deeper review.</a:t>
             </a:r>
-            <a:endParaRPr lang="en-US" sz="1220" dirty="0"/>
+            <a:endParaRPr lang="en-US" sz="1140" dirty="0"/>
           </a:p>
         </p:txBody>
       </p:sp>
@@ -11132,8 +11134,8 @@
         </p:nvSpPr>
         <p:spPr>
           <a:xfrm>
-            <a:off x="868680" y="1508760"/>
-            <a:ext cx="6309360" cy="4160520"/>
+            <a:off x="822960" y="1463040"/>
+            <a:ext cx="6565392" cy="4343400"/>
           </a:xfrm>
           <a:prstGeom prst="rect">
             <a:avLst/>
@@ -11151,7 +11153,7 @@
               <a:buNone/>
             </a:pPr>
             <a:r>
-              <a:rPr lang="en-US" sz="2100" dirty="0">
+              <a:rPr lang="en-US" sz="1920" dirty="0">
                 <a:solidFill>
                   <a:srgbClr val="003A63"/>
                 </a:solidFill>
@@ -11161,14 +11163,14 @@
               </a:rPr>
               <a:t>• Predictive model review plan</a:t>
             </a:r>
-            <a:endParaRPr lang="en-US" sz="2100" dirty="0"/>
-          </a:p>
-          <a:p>
-            <a:pPr indent="0" marL="0">
-              <a:buNone/>
-            </a:pPr>
-            <a:r>
-              <a:rPr lang="en-US" sz="2100" dirty="0">
+            <a:endParaRPr lang="en-US" sz="1920" dirty="0"/>
+          </a:p>
+          <a:p>
+            <a:pPr indent="0" marL="0">
+              <a:buNone/>
+            </a:pPr>
+            <a:r>
+              <a:rPr lang="en-US" sz="1920" dirty="0">
                 <a:solidFill>
                   <a:srgbClr val="003A63"/>
                 </a:solidFill>
@@ -11178,14 +11180,14 @@
               </a:rPr>
               <a:t>• Risk score interpretation guide</a:t>
             </a:r>
-            <a:endParaRPr lang="en-US" sz="2100" dirty="0"/>
-          </a:p>
-          <a:p>
-            <a:pPr indent="0" marL="0">
-              <a:buNone/>
-            </a:pPr>
-            <a:r>
-              <a:rPr lang="en-US" sz="2100" dirty="0">
+            <a:endParaRPr lang="en-US" sz="1920" dirty="0"/>
+          </a:p>
+          <a:p>
+            <a:pPr indent="0" marL="0">
+              <a:buNone/>
+            </a:pPr>
+            <a:r>
+              <a:rPr lang="en-US" sz="1920" dirty="0">
                 <a:solidFill>
                   <a:srgbClr val="003A63"/>
                 </a:solidFill>
@@ -11195,7 +11197,7 @@
               </a:rPr>
               <a:t>• Threshold and error tradeoff memo</a:t>
             </a:r>
-            <a:endParaRPr lang="en-US" sz="2100" dirty="0"/>
+            <a:endParaRPr lang="en-US" sz="1920" dirty="0"/>
           </a:p>
         </p:txBody>
       </p:sp>
@@ -11207,12 +11209,12 @@
         </p:nvSpPr>
         <p:spPr>
           <a:xfrm>
-            <a:off x="7635240" y="1325880"/>
-            <a:ext cx="3474720" cy="1207008"/>
+            <a:off x="7543800" y="1325880"/>
+            <a:ext cx="3611880" cy="1261872"/>
           </a:xfrm>
           <a:prstGeom prst="roundRect">
             <a:avLst>
-              <a:gd name="adj" fmla="val 9091"/>
+              <a:gd name="adj" fmla="val 8696"/>
             </a:avLst>
           </a:prstGeom>
           <a:solidFill>
@@ -11234,8 +11236,8 @@
         </p:nvSpPr>
         <p:spPr>
           <a:xfrm>
-            <a:off x="7799832" y="1472184"/>
-            <a:ext cx="3145536" cy="256032"/>
+            <a:off x="7708392" y="1453896"/>
+            <a:ext cx="3282696" cy="228600"/>
           </a:xfrm>
           <a:prstGeom prst="rect">
             <a:avLst/>
@@ -11251,7 +11253,7 @@
               <a:buNone/>
             </a:pPr>
             <a:r>
-              <a:rPr lang="en-US" sz="1300" b="1" dirty="0">
+              <a:rPr lang="en-US" sz="1220" b="1" dirty="0">
                 <a:solidFill>
                   <a:srgbClr val="0068B7"/>
                 </a:solidFill>
@@ -11261,7 +11263,7 @@
               </a:rPr>
               <a:t>Risk check</a:t>
             </a:r>
-            <a:endParaRPr lang="en-US" sz="1300" dirty="0"/>
+            <a:endParaRPr lang="en-US" sz="1220" dirty="0"/>
           </a:p>
         </p:txBody>
       </p:sp>
@@ -11273,8 +11275,8 @@
         </p:nvSpPr>
         <p:spPr>
           <a:xfrm>
-            <a:off x="7799832" y="1801368"/>
-            <a:ext cx="3145536" cy="640080"/>
+            <a:off x="7708392" y="1764792"/>
+            <a:ext cx="3282696" cy="749808"/>
           </a:xfrm>
           <a:prstGeom prst="rect">
             <a:avLst/>
@@ -11292,7 +11294,7 @@
               <a:buNone/>
             </a:pPr>
             <a:r>
-              <a:rPr lang="en-US" sz="1320" dirty="0">
+              <a:rPr lang="en-US" sz="1220" dirty="0">
                 <a:solidFill>
                   <a:srgbClr val="17364A"/>
                 </a:solidFill>
@@ -11302,7 +11304,7 @@
               </a:rPr>
               <a:t>Predictive model review plan</a:t>
             </a:r>
-            <a:endParaRPr lang="en-US" sz="1320" dirty="0"/>
+            <a:endParaRPr lang="en-US" sz="1220" dirty="0"/>
           </a:p>
         </p:txBody>
       </p:sp>
@@ -11314,12 +11316,12 @@
         </p:nvSpPr>
         <p:spPr>
           <a:xfrm>
-            <a:off x="7635240" y="2670048"/>
-            <a:ext cx="3474720" cy="1377086"/>
+            <a:off x="7543800" y="2724912"/>
+            <a:ext cx="3611880" cy="1527048"/>
           </a:xfrm>
           <a:prstGeom prst="roundRect">
             <a:avLst>
-              <a:gd name="adj" fmla="val 7968"/>
+              <a:gd name="adj" fmla="val 7186"/>
             </a:avLst>
           </a:prstGeom>
           <a:solidFill>
@@ -11341,8 +11343,8 @@
         </p:nvSpPr>
         <p:spPr>
           <a:xfrm>
-            <a:off x="7799832" y="2816352"/>
-            <a:ext cx="3145536" cy="256032"/>
+            <a:off x="7708392" y="2852928"/>
+            <a:ext cx="3282696" cy="228600"/>
           </a:xfrm>
           <a:prstGeom prst="rect">
             <a:avLst/>
@@ -11358,7 +11360,7 @@
               <a:buNone/>
             </a:pPr>
             <a:r>
-              <a:rPr lang="en-US" sz="1300" b="1" dirty="0">
+              <a:rPr lang="en-US" sz="1220" b="1" dirty="0">
                 <a:solidFill>
                   <a:srgbClr val="0068B7"/>
                 </a:solidFill>
@@ -11368,7 +11370,7 @@
               </a:rPr>
               <a:t>Concept checkpoints</a:t>
             </a:r>
-            <a:endParaRPr lang="en-US" sz="1300" dirty="0"/>
+            <a:endParaRPr lang="en-US" sz="1220" dirty="0"/>
           </a:p>
         </p:txBody>
       </p:sp>
@@ -11380,8 +11382,8 @@
         </p:nvSpPr>
         <p:spPr>
           <a:xfrm>
-            <a:off x="7818120" y="3182112"/>
-            <a:ext cx="3090672" cy="718718"/>
+            <a:off x="7726680" y="3182112"/>
+            <a:ext cx="3227832" cy="960120"/>
           </a:xfrm>
           <a:prstGeom prst="rect">
             <a:avLst/>
@@ -11399,7 +11401,7 @@
               <a:buNone/>
             </a:pPr>
             <a:r>
-              <a:rPr lang="en-US" sz="1220" dirty="0">
+              <a:rPr lang="en-US" sz="1140" dirty="0">
                 <a:solidFill>
                   <a:srgbClr val="17364A"/>
                 </a:solidFill>
@@ -11409,14 +11411,14 @@
               </a:rPr>
               <a:t>Predictive model review plan</a:t>
             </a:r>
-            <a:endParaRPr lang="en-US" sz="1220" dirty="0"/>
-          </a:p>
-          <a:p>
-            <a:pPr indent="0" marL="0">
-              <a:buNone/>
-            </a:pPr>
-            <a:r>
-              <a:rPr lang="en-US" sz="1220" dirty="0">
+            <a:endParaRPr lang="en-US" sz="1140" dirty="0"/>
+          </a:p>
+          <a:p>
+            <a:pPr indent="0" marL="0">
+              <a:buNone/>
+            </a:pPr>
+            <a:r>
+              <a:rPr lang="en-US" sz="1140" dirty="0">
                 <a:solidFill>
                   <a:srgbClr val="17364A"/>
                 </a:solidFill>
@@ -11426,14 +11428,14 @@
               </a:rPr>
               <a:t>Risk score interpretation guide</a:t>
             </a:r>
-            <a:endParaRPr lang="en-US" sz="1220" dirty="0"/>
-          </a:p>
-          <a:p>
-            <a:pPr indent="0" marL="0">
-              <a:buNone/>
-            </a:pPr>
-            <a:r>
-              <a:rPr lang="en-US" sz="1220" dirty="0">
+            <a:endParaRPr lang="en-US" sz="1140" dirty="0"/>
+          </a:p>
+          <a:p>
+            <a:pPr indent="0" marL="0">
+              <a:buNone/>
+            </a:pPr>
+            <a:r>
+              <a:rPr lang="en-US" sz="1140" dirty="0">
                 <a:solidFill>
                   <a:srgbClr val="17364A"/>
                 </a:solidFill>
@@ -11443,7 +11445,7 @@
               </a:rPr>
               <a:t>Threshold and error tradeoff memo</a:t>
             </a:r>
-            <a:endParaRPr lang="en-US" sz="1220" dirty="0"/>
+            <a:endParaRPr lang="en-US" sz="1140" dirty="0"/>
           </a:p>
         </p:txBody>
       </p:sp>
@@ -11455,12 +11457,12 @@
         </p:nvSpPr>
         <p:spPr>
           <a:xfrm>
-            <a:off x="7635240" y="4184294"/>
-            <a:ext cx="3474720" cy="1466698"/>
+            <a:off x="7543800" y="4389120"/>
+            <a:ext cx="3611880" cy="1261872"/>
           </a:xfrm>
           <a:prstGeom prst="roundRect">
             <a:avLst>
-              <a:gd name="adj" fmla="val 7481"/>
+              <a:gd name="adj" fmla="val 8696"/>
             </a:avLst>
           </a:prstGeom>
           <a:solidFill>
@@ -11482,8 +11484,8 @@
         </p:nvSpPr>
         <p:spPr>
           <a:xfrm>
-            <a:off x="7799832" y="4330598"/>
-            <a:ext cx="3145536" cy="256032"/>
+            <a:off x="7708392" y="4517136"/>
+            <a:ext cx="3282696" cy="228600"/>
           </a:xfrm>
           <a:prstGeom prst="rect">
             <a:avLst/>
@@ -11499,7 +11501,7 @@
               <a:buNone/>
             </a:pPr>
             <a:r>
-              <a:rPr lang="en-US" sz="1300" b="1" dirty="0">
+              <a:rPr lang="en-US" sz="1220" b="1" dirty="0">
                 <a:solidFill>
                   <a:srgbClr val="0068B7"/>
                 </a:solidFill>
@@ -11509,7 +11511,7 @@
               </a:rPr>
               <a:t>Safeguard to plan</a:t>
             </a:r>
-            <a:endParaRPr lang="en-US" sz="1300" dirty="0"/>
+            <a:endParaRPr lang="en-US" sz="1220" dirty="0"/>
           </a:p>
         </p:txBody>
       </p:sp>
@@ -11521,8 +11523,8 @@
         </p:nvSpPr>
         <p:spPr>
           <a:xfrm>
-            <a:off x="7799832" y="4659782"/>
-            <a:ext cx="3145536" cy="899770"/>
+            <a:off x="7708392" y="4828032"/>
+            <a:ext cx="3282696" cy="749808"/>
           </a:xfrm>
           <a:prstGeom prst="rect">
             <a:avLst/>
@@ -11540,7 +11542,7 @@
               <a:buNone/>
             </a:pPr>
             <a:r>
-              <a:rPr lang="en-US" sz="1320" dirty="0">
+              <a:rPr lang="en-US" sz="1220" dirty="0">
                 <a:solidFill>
                   <a:srgbClr val="17364A"/>
                 </a:solidFill>
@@ -11548,9 +11550,9 @@
                 <a:ea typeface="Aptos" pitchFamily="34" charset="-122"/>
                 <a:cs typeface="Aptos" pitchFamily="34" charset="-120"/>
               </a:rPr>
-              <a:t>Use the assignment to test whether you can explain the concept, apply it to a realistic public health situation, and identify what would need review before the work moves forward.</a:t>
-            </a:r>
-            <a:endParaRPr lang="en-US" sz="1320" dirty="0"/>
+              <a:t>Use the assignment to test whether you can explain the concept, apply it to a.</a:t>
+            </a:r>
+            <a:endParaRPr lang="en-US" sz="1220" dirty="0"/>
           </a:p>
         </p:txBody>
       </p:sp>
@@ -11841,8 +11843,8 @@
         </p:nvSpPr>
         <p:spPr>
           <a:xfrm>
-            <a:off x="868680" y="1508760"/>
-            <a:ext cx="6309360" cy="4160520"/>
+            <a:off x="822960" y="1463040"/>
+            <a:ext cx="6565392" cy="4343400"/>
           </a:xfrm>
           <a:prstGeom prst="rect">
             <a:avLst/>
@@ -11860,7 +11862,7 @@
               <a:buNone/>
             </a:pPr>
             <a:r>
-              <a:rPr lang="en-US" sz="2100" dirty="0">
+              <a:rPr lang="en-US" sz="1920" dirty="0">
                 <a:solidFill>
                   <a:srgbClr val="003A63"/>
                 </a:solidFill>
@@ -11870,14 +11872,14 @@
               </a:rPr>
               <a:t>• 1. What is calibration?</a:t>
             </a:r>
-            <a:endParaRPr lang="en-US" sz="2100" dirty="0"/>
-          </a:p>
-          <a:p>
-            <a:pPr indent="0" marL="0">
-              <a:buNone/>
-            </a:pPr>
-            <a:r>
-              <a:rPr lang="en-US" sz="2100" dirty="0">
+            <a:endParaRPr lang="en-US" sz="1920" dirty="0"/>
+          </a:p>
+          <a:p>
+            <a:pPr indent="0" marL="0">
+              <a:buNone/>
+            </a:pPr>
+            <a:r>
+              <a:rPr lang="en-US" sz="1920" dirty="0">
                 <a:solidFill>
                   <a:srgbClr val="003A63"/>
                 </a:solidFill>
@@ -11887,14 +11889,14 @@
               </a:rPr>
               <a:t>• 2. Why should thresholds be reviewed by public health staff?</a:t>
             </a:r>
-            <a:endParaRPr lang="en-US" sz="2100" dirty="0"/>
-          </a:p>
-          <a:p>
-            <a:pPr indent="0" marL="0">
-              <a:buNone/>
-            </a:pPr>
-            <a:r>
-              <a:rPr lang="en-US" sz="2100" dirty="0">
+            <a:endParaRPr lang="en-US" sz="1920" dirty="0"/>
+          </a:p>
+          <a:p>
+            <a:pPr indent="0" marL="0">
+              <a:buNone/>
+            </a:pPr>
+            <a:r>
+              <a:rPr lang="en-US" sz="1920" dirty="0">
                 <a:solidFill>
                   <a:srgbClr val="003A63"/>
                 </a:solidFill>
@@ -11904,7 +11906,7 @@
               </a:rPr>
               <a:t>• 3. Which use of a risk score is most concerning without additional safeguards?</a:t>
             </a:r>
-            <a:endParaRPr lang="en-US" sz="2100" dirty="0"/>
+            <a:endParaRPr lang="en-US" sz="1920" dirty="0"/>
           </a:p>
         </p:txBody>
       </p:sp>
@@ -11916,12 +11918,12 @@
         </p:nvSpPr>
         <p:spPr>
           <a:xfrm>
-            <a:off x="7635240" y="1325880"/>
-            <a:ext cx="3474720" cy="1207008"/>
+            <a:off x="7543800" y="1325880"/>
+            <a:ext cx="3611880" cy="1261872"/>
           </a:xfrm>
           <a:prstGeom prst="roundRect">
             <a:avLst>
-              <a:gd name="adj" fmla="val 9091"/>
+              <a:gd name="adj" fmla="val 8696"/>
             </a:avLst>
           </a:prstGeom>
           <a:solidFill>
@@ -11943,8 +11945,8 @@
         </p:nvSpPr>
         <p:spPr>
           <a:xfrm>
-            <a:off x="7799832" y="1472184"/>
-            <a:ext cx="3145536" cy="256032"/>
+            <a:off x="7708392" y="1453896"/>
+            <a:ext cx="3282696" cy="228600"/>
           </a:xfrm>
           <a:prstGeom prst="rect">
             <a:avLst/>
@@ -11960,7 +11962,7 @@
               <a:buNone/>
             </a:pPr>
             <a:r>
-              <a:rPr lang="en-US" sz="1300" b="1" dirty="0">
+              <a:rPr lang="en-US" sz="1220" b="1" dirty="0">
                 <a:solidFill>
                   <a:srgbClr val="0068B7"/>
                 </a:solidFill>
@@ -11970,7 +11972,7 @@
               </a:rPr>
               <a:t>Risk check</a:t>
             </a:r>
-            <a:endParaRPr lang="en-US" sz="1300" dirty="0"/>
+            <a:endParaRPr lang="en-US" sz="1220" dirty="0"/>
           </a:p>
         </p:txBody>
       </p:sp>
@@ -11982,8 +11984,8 @@
         </p:nvSpPr>
         <p:spPr>
           <a:xfrm>
-            <a:off x="7799832" y="1801368"/>
-            <a:ext cx="3145536" cy="640080"/>
+            <a:off x="7708392" y="1764792"/>
+            <a:ext cx="3282696" cy="749808"/>
           </a:xfrm>
           <a:prstGeom prst="rect">
             <a:avLst/>
@@ -12001,7 +12003,7 @@
               <a:buNone/>
             </a:pPr>
             <a:r>
-              <a:rPr lang="en-US" sz="1320" dirty="0">
+              <a:rPr lang="en-US" sz="1220" dirty="0">
                 <a:solidFill>
                   <a:srgbClr val="17364A"/>
                 </a:solidFill>
@@ -12011,7 +12013,7 @@
               </a:rPr>
               <a:t>1. What is calibration?</a:t>
             </a:r>
-            <a:endParaRPr lang="en-US" sz="1320" dirty="0"/>
+            <a:endParaRPr lang="en-US" sz="1220" dirty="0"/>
           </a:p>
         </p:txBody>
       </p:sp>
@@ -12023,12 +12025,12 @@
         </p:nvSpPr>
         <p:spPr>
           <a:xfrm>
-            <a:off x="7635240" y="2670048"/>
-            <a:ext cx="3474720" cy="1377086"/>
+            <a:off x="7543800" y="2724912"/>
+            <a:ext cx="3611880" cy="1527048"/>
           </a:xfrm>
           <a:prstGeom prst="roundRect">
             <a:avLst>
-              <a:gd name="adj" fmla="val 7968"/>
+              <a:gd name="adj" fmla="val 7186"/>
             </a:avLst>
           </a:prstGeom>
           <a:solidFill>
@@ -12050,8 +12052,8 @@
         </p:nvSpPr>
         <p:spPr>
           <a:xfrm>
-            <a:off x="7799832" y="2816352"/>
-            <a:ext cx="3145536" cy="256032"/>
+            <a:off x="7708392" y="2852928"/>
+            <a:ext cx="3282696" cy="228600"/>
           </a:xfrm>
           <a:prstGeom prst="rect">
             <a:avLst/>
@@ -12067,7 +12069,7 @@
               <a:buNone/>
             </a:pPr>
             <a:r>
-              <a:rPr lang="en-US" sz="1300" b="1" dirty="0">
+              <a:rPr lang="en-US" sz="1220" b="1" dirty="0">
                 <a:solidFill>
                   <a:srgbClr val="0068B7"/>
                 </a:solidFill>
@@ -12077,7 +12079,7 @@
               </a:rPr>
               <a:t>Concept checkpoints</a:t>
             </a:r>
-            <a:endParaRPr lang="en-US" sz="1300" dirty="0"/>
+            <a:endParaRPr lang="en-US" sz="1220" dirty="0"/>
           </a:p>
         </p:txBody>
       </p:sp>
@@ -12089,8 +12091,8 @@
         </p:nvSpPr>
         <p:spPr>
           <a:xfrm>
-            <a:off x="7818120" y="3182112"/>
-            <a:ext cx="3090672" cy="718718"/>
+            <a:off x="7726680" y="3182112"/>
+            <a:ext cx="3227832" cy="960120"/>
           </a:xfrm>
           <a:prstGeom prst="rect">
             <a:avLst/>
@@ -12108,7 +12110,7 @@
               <a:buNone/>
             </a:pPr>
             <a:r>
-              <a:rPr lang="en-US" sz="1220" dirty="0">
+              <a:rPr lang="en-US" sz="1140" dirty="0">
                 <a:solidFill>
                   <a:srgbClr val="17364A"/>
                 </a:solidFill>
@@ -12118,14 +12120,14 @@
               </a:rPr>
               <a:t>1.</a:t>
             </a:r>
-            <a:endParaRPr lang="en-US" sz="1220" dirty="0"/>
-          </a:p>
-          <a:p>
-            <a:pPr indent="0" marL="0">
-              <a:buNone/>
-            </a:pPr>
-            <a:r>
-              <a:rPr lang="en-US" sz="1220" dirty="0">
+            <a:endParaRPr lang="en-US" sz="1140" dirty="0"/>
+          </a:p>
+          <a:p>
+            <a:pPr indent="0" marL="0">
+              <a:buNone/>
+            </a:pPr>
+            <a:r>
+              <a:rPr lang="en-US" sz="1140" dirty="0">
                 <a:solidFill>
                   <a:srgbClr val="17364A"/>
                 </a:solidFill>
@@ -12135,14 +12137,14 @@
               </a:rPr>
               <a:t>What is calibration?</a:t>
             </a:r>
-            <a:endParaRPr lang="en-US" sz="1220" dirty="0"/>
-          </a:p>
-          <a:p>
-            <a:pPr indent="0" marL="0">
-              <a:buNone/>
-            </a:pPr>
-            <a:r>
-              <a:rPr lang="en-US" sz="1220" dirty="0">
+            <a:endParaRPr lang="en-US" sz="1140" dirty="0"/>
+          </a:p>
+          <a:p>
+            <a:pPr indent="0" marL="0">
+              <a:buNone/>
+            </a:pPr>
+            <a:r>
+              <a:rPr lang="en-US" sz="1140" dirty="0">
                 <a:solidFill>
                   <a:srgbClr val="17364A"/>
                 </a:solidFill>
@@ -12152,7 +12154,7 @@
               </a:rPr>
               <a:t>2.</a:t>
             </a:r>
-            <a:endParaRPr lang="en-US" sz="1220" dirty="0"/>
+            <a:endParaRPr lang="en-US" sz="1140" dirty="0"/>
           </a:p>
         </p:txBody>
       </p:sp>
@@ -12164,12 +12166,12 @@
         </p:nvSpPr>
         <p:spPr>
           <a:xfrm>
-            <a:off x="7635240" y="4184294"/>
-            <a:ext cx="3474720" cy="1466698"/>
+            <a:off x="7543800" y="4389120"/>
+            <a:ext cx="3611880" cy="1261872"/>
           </a:xfrm>
           <a:prstGeom prst="roundRect">
             <a:avLst>
-              <a:gd name="adj" fmla="val 7481"/>
+              <a:gd name="adj" fmla="val 8696"/>
             </a:avLst>
           </a:prstGeom>
           <a:solidFill>
@@ -12191,8 +12193,8 @@
         </p:nvSpPr>
         <p:spPr>
           <a:xfrm>
-            <a:off x="7799832" y="4330598"/>
-            <a:ext cx="3145536" cy="256032"/>
+            <a:off x="7708392" y="4517136"/>
+            <a:ext cx="3282696" cy="228600"/>
           </a:xfrm>
           <a:prstGeom prst="rect">
             <a:avLst/>
@@ -12208,7 +12210,7 @@
               <a:buNone/>
             </a:pPr>
             <a:r>
-              <a:rPr lang="en-US" sz="1300" b="1" dirty="0">
+              <a:rPr lang="en-US" sz="1220" b="1" dirty="0">
                 <a:solidFill>
                   <a:srgbClr val="0068B7"/>
                 </a:solidFill>
@@ -12218,7 +12220,7 @@
               </a:rPr>
               <a:t>Safeguard to plan</a:t>
             </a:r>
-            <a:endParaRPr lang="en-US" sz="1300" dirty="0"/>
+            <a:endParaRPr lang="en-US" sz="1220" dirty="0"/>
           </a:p>
         </p:txBody>
       </p:sp>
@@ -12230,8 +12232,8 @@
         </p:nvSpPr>
         <p:spPr>
           <a:xfrm>
-            <a:off x="7799832" y="4659782"/>
-            <a:ext cx="3145536" cy="899770"/>
+            <a:off x="7708392" y="4828032"/>
+            <a:ext cx="3282696" cy="749808"/>
           </a:xfrm>
           <a:prstGeom prst="rect">
             <a:avLst/>
@@ -12249,7 +12251,7 @@
               <a:buNone/>
             </a:pPr>
             <a:r>
-              <a:rPr lang="en-US" sz="1320" dirty="0">
+              <a:rPr lang="en-US" sz="1220" dirty="0">
                 <a:solidFill>
                   <a:srgbClr val="17364A"/>
                 </a:solidFill>
@@ -12257,9 +12259,9 @@
                 <a:ea typeface="Aptos" pitchFamily="34" charset="-122"/>
                 <a:cs typeface="Aptos" pitchFamily="34" charset="-120"/>
               </a:rPr>
-              <a:t>Use the assignment to test whether you can explain the concept, apply it to a realistic public health situation, and identify what would need review before the work moves forward.</a:t>
-            </a:r>
-            <a:endParaRPr lang="en-US" sz="1320" dirty="0"/>
+              <a:t>Use the assignment to test whether you can explain the concept, apply it to a.</a:t>
+            </a:r>
+            <a:endParaRPr lang="en-US" sz="1220" dirty="0"/>
           </a:p>
         </p:txBody>
       </p:sp>
@@ -12550,8 +12552,8 @@
         </p:nvSpPr>
         <p:spPr>
           <a:xfrm>
-            <a:off x="868680" y="1508760"/>
-            <a:ext cx="6309360" cy="4160520"/>
+            <a:off x="822960" y="1463040"/>
+            <a:ext cx="6565392" cy="4343400"/>
           </a:xfrm>
           <a:prstGeom prst="rect">
             <a:avLst/>
@@ -12569,7 +12571,7 @@
               <a:buNone/>
             </a:pPr>
             <a:r>
-              <a:rPr lang="en-US" sz="2100" dirty="0">
+              <a:rPr lang="en-US" sz="1920" dirty="0">
                 <a:solidFill>
                   <a:srgbClr val="003A63"/>
                 </a:solidFill>
@@ -12579,14 +12581,14 @@
               </a:rPr>
               <a:t>• NIST Artificial Intelligence Risk Management Framework:.</a:t>
             </a:r>
-            <a:endParaRPr lang="en-US" sz="2100" dirty="0"/>
-          </a:p>
-          <a:p>
-            <a:pPr indent="0" marL="0">
-              <a:buNone/>
-            </a:pPr>
-            <a:r>
-              <a:rPr lang="en-US" sz="2100" dirty="0">
+            <a:endParaRPr lang="en-US" sz="1920" dirty="0"/>
+          </a:p>
+          <a:p>
+            <a:pPr indent="0" marL="0">
+              <a:buNone/>
+            </a:pPr>
+            <a:r>
+              <a:rPr lang="en-US" sz="1920" dirty="0">
                 <a:solidFill>
                   <a:srgbClr val="003A63"/>
                 </a:solidFill>
@@ -12596,14 +12598,14 @@
               </a:rPr>
               <a:t>• NIST AI RMF Generative AI Profile:.</a:t>
             </a:r>
-            <a:endParaRPr lang="en-US" sz="2100" dirty="0"/>
-          </a:p>
-          <a:p>
-            <a:pPr indent="0" marL="0">
-              <a:buNone/>
-            </a:pPr>
-            <a:r>
-              <a:rPr lang="en-US" sz="2100" dirty="0">
+            <a:endParaRPr lang="en-US" sz="1920" dirty="0"/>
+          </a:p>
+          <a:p>
+            <a:pPr indent="0" marL="0">
+              <a:buNone/>
+            </a:pPr>
+            <a:r>
+              <a:rPr lang="en-US" sz="1920" dirty="0">
                 <a:solidFill>
                   <a:srgbClr val="003A63"/>
                 </a:solidFill>
@@ -12613,7 +12615,7 @@
               </a:rPr>
               <a:t>• CDC Evaluation Framework: https://www.cdc.gov/evaluation/</a:t>
             </a:r>
-            <a:endParaRPr lang="en-US" sz="2100" dirty="0"/>
+            <a:endParaRPr lang="en-US" sz="1920" dirty="0"/>
           </a:p>
         </p:txBody>
       </p:sp>
@@ -12625,12 +12627,12 @@
         </p:nvSpPr>
         <p:spPr>
           <a:xfrm>
-            <a:off x="7635240" y="1325880"/>
-            <a:ext cx="3474720" cy="1207008"/>
+            <a:off x="7543800" y="1325880"/>
+            <a:ext cx="3611880" cy="1261872"/>
           </a:xfrm>
           <a:prstGeom prst="roundRect">
             <a:avLst>
-              <a:gd name="adj" fmla="val 9091"/>
+              <a:gd name="adj" fmla="val 8696"/>
             </a:avLst>
           </a:prstGeom>
           <a:solidFill>
@@ -12652,8 +12654,8 @@
         </p:nvSpPr>
         <p:spPr>
           <a:xfrm>
-            <a:off x="7799832" y="1472184"/>
-            <a:ext cx="3145536" cy="256032"/>
+            <a:off x="7708392" y="1453896"/>
+            <a:ext cx="3282696" cy="228600"/>
           </a:xfrm>
           <a:prstGeom prst="rect">
             <a:avLst/>
@@ -12669,7 +12671,7 @@
               <a:buNone/>
             </a:pPr>
             <a:r>
-              <a:rPr lang="en-US" sz="1300" b="1" dirty="0">
+              <a:rPr lang="en-US" sz="1220" b="1" dirty="0">
                 <a:solidFill>
                   <a:srgbClr val="0068B7"/>
                 </a:solidFill>
@@ -12679,7 +12681,7 @@
               </a:rPr>
               <a:t>Risk check</a:t>
             </a:r>
-            <a:endParaRPr lang="en-US" sz="1300" dirty="0"/>
+            <a:endParaRPr lang="en-US" sz="1220" dirty="0"/>
           </a:p>
         </p:txBody>
       </p:sp>
@@ -12691,8 +12693,8 @@
         </p:nvSpPr>
         <p:spPr>
           <a:xfrm>
-            <a:off x="7799832" y="1801368"/>
-            <a:ext cx="3145536" cy="640080"/>
+            <a:off x="7708392" y="1764792"/>
+            <a:ext cx="3282696" cy="749808"/>
           </a:xfrm>
           <a:prstGeom prst="rect">
             <a:avLst/>
@@ -12710,7 +12712,7 @@
               <a:buNone/>
             </a:pPr>
             <a:r>
-              <a:rPr lang="en-US" sz="1320" dirty="0">
+              <a:rPr lang="en-US" sz="1220" dirty="0">
                 <a:solidFill>
                   <a:srgbClr val="17364A"/>
                 </a:solidFill>
@@ -12720,7 +12722,7 @@
               </a:rPr>
               <a:t>NIST Artificial Intelligence Risk Management Framework:.</a:t>
             </a:r>
-            <a:endParaRPr lang="en-US" sz="1320" dirty="0"/>
+            <a:endParaRPr lang="en-US" sz="1220" dirty="0"/>
           </a:p>
         </p:txBody>
       </p:sp>
@@ -12732,12 +12734,12 @@
         </p:nvSpPr>
         <p:spPr>
           <a:xfrm>
-            <a:off x="7635240" y="2670048"/>
-            <a:ext cx="3474720" cy="1536192"/>
+            <a:off x="7543800" y="2724912"/>
+            <a:ext cx="3611880" cy="1527048"/>
           </a:xfrm>
           <a:prstGeom prst="roundRect">
             <a:avLst>
-              <a:gd name="adj" fmla="val 7143"/>
+              <a:gd name="adj" fmla="val 7186"/>
             </a:avLst>
           </a:prstGeom>
           <a:solidFill>
@@ -12759,8 +12761,8 @@
         </p:nvSpPr>
         <p:spPr>
           <a:xfrm>
-            <a:off x="7799832" y="2816352"/>
-            <a:ext cx="3145536" cy="256032"/>
+            <a:off x="7708392" y="2852928"/>
+            <a:ext cx="3282696" cy="228600"/>
           </a:xfrm>
           <a:prstGeom prst="rect">
             <a:avLst/>
@@ -12776,7 +12778,7 @@
               <a:buNone/>
             </a:pPr>
             <a:r>
-              <a:rPr lang="en-US" sz="1300" b="1" dirty="0">
+              <a:rPr lang="en-US" sz="1220" b="1" dirty="0">
                 <a:solidFill>
                   <a:srgbClr val="0068B7"/>
                 </a:solidFill>
@@ -12786,7 +12788,7 @@
               </a:rPr>
               <a:t>Concept checkpoints</a:t>
             </a:r>
-            <a:endParaRPr lang="en-US" sz="1300" dirty="0"/>
+            <a:endParaRPr lang="en-US" sz="1220" dirty="0"/>
           </a:p>
         </p:txBody>
       </p:sp>
@@ -12798,8 +12800,8 @@
         </p:nvSpPr>
         <p:spPr>
           <a:xfrm>
-            <a:off x="7818120" y="3182112"/>
-            <a:ext cx="3090672" cy="877824"/>
+            <a:off x="7726680" y="3182112"/>
+            <a:ext cx="3227832" cy="960120"/>
           </a:xfrm>
           <a:prstGeom prst="rect">
             <a:avLst/>
@@ -12817,7 +12819,7 @@
               <a:buNone/>
             </a:pPr>
             <a:r>
-              <a:rPr lang="en-US" sz="1220" dirty="0">
+              <a:rPr lang="en-US" sz="1140" dirty="0">
                 <a:solidFill>
                   <a:srgbClr val="17364A"/>
                 </a:solidFill>
@@ -12825,16 +12827,16 @@
                 <a:ea typeface="Aptos" pitchFamily="34" charset="-122"/>
                 <a:cs typeface="Aptos" pitchFamily="34" charset="-120"/>
               </a:rPr>
-              <a:t>NIST Artificial Intelligence Risk Management Framework:.</a:t>
-            </a:r>
-            <a:endParaRPr lang="en-US" sz="1220" dirty="0"/>
-          </a:p>
-          <a:p>
-            <a:pPr indent="0" marL="0">
-              <a:buNone/>
-            </a:pPr>
-            <a:r>
-              <a:rPr lang="en-US" sz="1220" dirty="0">
+              <a:t>NIST Artificial Intelligence Risk Management.</a:t>
+            </a:r>
+            <a:endParaRPr lang="en-US" sz="1140" dirty="0"/>
+          </a:p>
+          <a:p>
+            <a:pPr indent="0" marL="0">
+              <a:buNone/>
+            </a:pPr>
+            <a:r>
+              <a:rPr lang="en-US" sz="1140" dirty="0">
                 <a:solidFill>
                   <a:srgbClr val="17364A"/>
                 </a:solidFill>
@@ -12844,7 +12846,7 @@
               </a:rPr>
               <a:t>CDC Public Health Data Strategy:.</a:t>
             </a:r>
-            <a:endParaRPr lang="en-US" sz="1220" dirty="0"/>
+            <a:endParaRPr lang="en-US" sz="1140" dirty="0"/>
           </a:p>
         </p:txBody>
       </p:sp>
@@ -12856,12 +12858,12 @@
         </p:nvSpPr>
         <p:spPr>
           <a:xfrm>
-            <a:off x="7635240" y="4343400"/>
-            <a:ext cx="3474720" cy="1255471"/>
+            <a:off x="7543800" y="4389120"/>
+            <a:ext cx="3611880" cy="1261872"/>
           </a:xfrm>
           <a:prstGeom prst="roundRect">
             <a:avLst>
-              <a:gd name="adj" fmla="val 8740"/>
+              <a:gd name="adj" fmla="val 8696"/>
             </a:avLst>
           </a:prstGeom>
           <a:solidFill>
@@ -12883,8 +12885,8 @@
         </p:nvSpPr>
         <p:spPr>
           <a:xfrm>
-            <a:off x="7799832" y="4489704"/>
-            <a:ext cx="3145536" cy="256032"/>
+            <a:off x="7708392" y="4517136"/>
+            <a:ext cx="3282696" cy="228600"/>
           </a:xfrm>
           <a:prstGeom prst="rect">
             <a:avLst/>
@@ -12900,7 +12902,7 @@
               <a:buNone/>
             </a:pPr>
             <a:r>
-              <a:rPr lang="en-US" sz="1300" b="1" dirty="0">
+              <a:rPr lang="en-US" sz="1220" b="1" dirty="0">
                 <a:solidFill>
                   <a:srgbClr val="0068B7"/>
                 </a:solidFill>
@@ -12910,7 +12912,7 @@
               </a:rPr>
               <a:t>Safeguard to plan</a:t>
             </a:r>
-            <a:endParaRPr lang="en-US" sz="1300" dirty="0"/>
+            <a:endParaRPr lang="en-US" sz="1220" dirty="0"/>
           </a:p>
         </p:txBody>
       </p:sp>
@@ -12922,8 +12924,8 @@
         </p:nvSpPr>
         <p:spPr>
           <a:xfrm>
-            <a:off x="7799832" y="4818888"/>
-            <a:ext cx="3145536" cy="688543"/>
+            <a:off x="7708392" y="4828032"/>
+            <a:ext cx="3282696" cy="749808"/>
           </a:xfrm>
           <a:prstGeom prst="rect">
             <a:avLst/>
@@ -12941,7 +12943,7 @@
               <a:buNone/>
             </a:pPr>
             <a:r>
-              <a:rPr lang="en-US" sz="1320" dirty="0">
+              <a:rPr lang="en-US" sz="1220" dirty="0">
                 <a:solidFill>
                   <a:srgbClr val="17364A"/>
                 </a:solidFill>
@@ -12949,9 +12951,9 @@
                 <a:ea typeface="Aptos" pitchFamily="34" charset="-122"/>
                 <a:cs typeface="Aptos" pitchFamily="34" charset="-120"/>
               </a:rPr>
-              <a:t>Identify what could go wrong, who could be affected, what safeguards are needed, and what evidence should be reviewed before use.</a:t>
-            </a:r>
-            <a:endParaRPr lang="en-US" sz="1320" dirty="0"/>
+              <a:t>Identify what could go wrong, who could be affected, what safeguards are needed,.</a:t>
+            </a:r>
+            <a:endParaRPr lang="en-US" sz="1220" dirty="0"/>
           </a:p>
         </p:txBody>
       </p:sp>
@@ -13269,7 +13271,7 @@
                 <a:ea typeface="Aptos" pitchFamily="34" charset="-122"/>
                 <a:cs typeface="Aptos" pitchFamily="34" charset="-120"/>
               </a:rPr>
-              <a:t>• Play 13: Monitor and Evaluate AI Systems - This lesson informs Play 13 by helping learners.</a:t>
+              <a:t>• Play 13: Monitor and Evaluate AI Systems - This lesson informs Play 13 by.</a:t>
             </a:r>
             <a:endParaRPr lang="en-US" sz="1900" dirty="0"/>
           </a:p>
@@ -13286,7 +13288,7 @@
                 <a:ea typeface="Aptos" pitchFamily="34" charset="-122"/>
                 <a:cs typeface="Aptos" pitchFamily="34" charset="-120"/>
               </a:rPr>
-              <a:t>• Play 1: Vision &amp; Guardrails - This lesson informs Play 1 by helping learners connect the.</a:t>
+              <a:t>• Play 1: Vision &amp; Guardrails - This lesson informs Play 1 by helping learners.</a:t>
             </a:r>
             <a:endParaRPr lang="en-US" sz="1900" dirty="0"/>
           </a:p>
@@ -13303,7 +13305,7 @@
                 <a:ea typeface="Aptos" pitchFamily="34" charset="-122"/>
                 <a:cs typeface="Aptos" pitchFamily="34" charset="-120"/>
               </a:rPr>
-              <a:t>• Play 11: Build and Deploy AI Solutions - This lesson informs Play 11 by helping learners.</a:t>
+              <a:t>• Play 11: Build and Deploy AI Solutions - This lesson informs Play 11 by.</a:t>
             </a:r>
             <a:endParaRPr lang="en-US" sz="1900" dirty="0"/>
           </a:p>
@@ -13320,7 +13322,7 @@
                 <a:ea typeface="Aptos" pitchFamily="34" charset="-122"/>
                 <a:cs typeface="Aptos" pitchFamily="34" charset="-120"/>
               </a:rPr>
-              <a:t>• Play 3: Establish AI Governance - This lesson informs Play 3 by helping learners connect the.</a:t>
+              <a:t>• Play 3: Establish AI Governance - This lesson informs Play 3 by helping.</a:t>
             </a:r>
             <a:endParaRPr lang="en-US" sz="1900" dirty="0"/>
           </a:p>
@@ -13361,8 +13363,8 @@
         </p:nvSpPr>
         <p:spPr>
           <a:xfrm>
-            <a:off x="8211312" y="1563624"/>
-            <a:ext cx="2734056" cy="256032"/>
+            <a:off x="8211312" y="1545336"/>
+            <a:ext cx="2734056" cy="228600"/>
           </a:xfrm>
           <a:prstGeom prst="rect">
             <a:avLst/>
@@ -13378,7 +13380,7 @@
               <a:buNone/>
             </a:pPr>
             <a:r>
-              <a:rPr lang="en-US" sz="1300" b="1" dirty="0">
+              <a:rPr lang="en-US" sz="1220" b="1" dirty="0">
                 <a:solidFill>
                   <a:srgbClr val="0068B7"/>
                 </a:solidFill>
@@ -13388,7 +13390,7 @@
               </a:rPr>
               <a:t>Apply the lesson</a:t>
             </a:r>
-            <a:endParaRPr lang="en-US" sz="1300" dirty="0"/>
+            <a:endParaRPr lang="en-US" sz="1220" dirty="0"/>
           </a:p>
         </p:txBody>
       </p:sp>
@@ -13400,8 +13402,8 @@
         </p:nvSpPr>
         <p:spPr>
           <a:xfrm>
-            <a:off x="8211312" y="1892808"/>
-            <a:ext cx="2734056" cy="1536192"/>
+            <a:off x="8211312" y="1856232"/>
+            <a:ext cx="2734056" cy="1591056"/>
           </a:xfrm>
           <a:prstGeom prst="rect">
             <a:avLst/>
@@ -13419,7 +13421,7 @@
               <a:buNone/>
             </a:pPr>
             <a:r>
-              <a:rPr lang="en-US" sz="1320" dirty="0">
+              <a:rPr lang="en-US" sz="1220" dirty="0">
                 <a:solidFill>
                   <a:srgbClr val="17364A"/>
                 </a:solidFill>
@@ -13427,9 +13429,9 @@
                 <a:ea typeface="Aptos" pitchFamily="34" charset="-122"/>
                 <a:cs typeface="Aptos" pitchFamily="34" charset="-120"/>
               </a:rPr>
-              <a:t>Use the related plays to identify decisions, participants, timing, approvals, and documentation needed for responsible implementation.</a:t>
-            </a:r>
-            <a:endParaRPr lang="en-US" sz="1320" dirty="0"/>
+              <a:t>Use the related plays to identify decisions, participants, timing, approvals,.</a:t>
+            </a:r>
+            <a:endParaRPr lang="en-US" sz="1220" dirty="0"/>
           </a:p>
         </p:txBody>
       </p:sp>
@@ -13468,8 +13470,8 @@
         </p:nvSpPr>
         <p:spPr>
           <a:xfrm>
-            <a:off x="8211312" y="3941064"/>
-            <a:ext cx="2734056" cy="256032"/>
+            <a:off x="8211312" y="3922776"/>
+            <a:ext cx="2734056" cy="228600"/>
           </a:xfrm>
           <a:prstGeom prst="rect">
             <a:avLst/>
@@ -13485,7 +13487,7 @@
               <a:buNone/>
             </a:pPr>
             <a:r>
-              <a:rPr lang="en-US" sz="1300" b="1" dirty="0">
+              <a:rPr lang="en-US" sz="1220" b="1" dirty="0">
                 <a:solidFill>
                   <a:srgbClr val="0068B7"/>
                 </a:solidFill>
@@ -13495,7 +13497,7 @@
               </a:rPr>
               <a:t>Use the play links to</a:t>
             </a:r>
-            <a:endParaRPr lang="en-US" sz="1300" dirty="0"/>
+            <a:endParaRPr lang="en-US" sz="1220" dirty="0"/>
           </a:p>
         </p:txBody>
       </p:sp>
@@ -13507,8 +13509,8 @@
         </p:nvSpPr>
         <p:spPr>
           <a:xfrm>
-            <a:off x="8229600" y="4306824"/>
-            <a:ext cx="2679192" cy="941832"/>
+            <a:off x="8229600" y="4251960"/>
+            <a:ext cx="2679192" cy="1033272"/>
           </a:xfrm>
           <a:prstGeom prst="rect">
             <a:avLst/>
@@ -13526,7 +13528,7 @@
               <a:buNone/>
             </a:pPr>
             <a:r>
-              <a:rPr lang="en-US" sz="1220" dirty="0">
+              <a:rPr lang="en-US" sz="1140" dirty="0">
                 <a:solidFill>
                   <a:srgbClr val="17364A"/>
                 </a:solidFill>
@@ -13536,14 +13538,14 @@
               </a:rPr>
               <a:t>Locate the decision point in the playbook sequence.</a:t>
             </a:r>
-            <a:endParaRPr lang="en-US" sz="1220" dirty="0"/>
-          </a:p>
-          <a:p>
-            <a:pPr indent="0" marL="0">
-              <a:buNone/>
-            </a:pPr>
-            <a:r>
-              <a:rPr lang="en-US" sz="1220" dirty="0">
+            <a:endParaRPr lang="en-US" sz="1140" dirty="0"/>
+          </a:p>
+          <a:p>
+            <a:pPr indent="0" marL="0">
+              <a:buNone/>
+            </a:pPr>
+            <a:r>
+              <a:rPr lang="en-US" sz="1140" dirty="0">
                 <a:solidFill>
                   <a:srgbClr val="17364A"/>
                 </a:solidFill>
@@ -13553,14 +13555,14 @@
               </a:rPr>
               <a:t>Identify who should participate in the work.</a:t>
             </a:r>
-            <a:endParaRPr lang="en-US" sz="1220" dirty="0"/>
-          </a:p>
-          <a:p>
-            <a:pPr indent="0" marL="0">
-              <a:buNone/>
-            </a:pPr>
-            <a:r>
-              <a:rPr lang="en-US" sz="1220" dirty="0">
+            <a:endParaRPr lang="en-US" sz="1140" dirty="0"/>
+          </a:p>
+          <a:p>
+            <a:pPr indent="0" marL="0">
+              <a:buNone/>
+            </a:pPr>
+            <a:r>
+              <a:rPr lang="en-US" sz="1140" dirty="0">
                 <a:solidFill>
                   <a:srgbClr val="17364A"/>
                 </a:solidFill>
@@ -13568,9 +13570,9 @@
                 <a:ea typeface="Aptos" pitchFamily="34" charset="-122"/>
                 <a:cs typeface="Aptos" pitchFamily="34" charset="-120"/>
               </a:rPr>
-              <a:t>Document the review, approval, or implementation step.</a:t>
-            </a:r>
-            <a:endParaRPr lang="en-US" sz="1220" dirty="0"/>
+              <a:t>Document the review, approval, or implementation.</a:t>
+            </a:r>
+            <a:endParaRPr lang="en-US" sz="1140" dirty="0"/>
           </a:p>
         </p:txBody>
       </p:sp>
@@ -13888,7 +13890,7 @@
                 <a:ea typeface="Aptos" pitchFamily="34" charset="-122"/>
                 <a:cs typeface="Aptos" pitchFamily="34" charset="-120"/>
               </a:rPr>
-              <a:t>• Tool 44: Performance Monitoring Dashboard (Dashboard) - Use this tool to complete or.</a:t>
+              <a:t>• Tool 44: Performance Monitoring Dashboard (Dashboard) - Use this tool to.</a:t>
             </a:r>
             <a:endParaRPr lang="en-US" sz="1850" dirty="0"/>
           </a:p>
@@ -13905,7 +13907,7 @@
                 <a:ea typeface="Aptos" pitchFamily="34" charset="-122"/>
                 <a:cs typeface="Aptos" pitchFamily="34" charset="-120"/>
               </a:rPr>
-              <a:t>• Tool 45: Continuous Improvement Log (Log) - Use Continuous Improvement Log to translate this.</a:t>
+              <a:t>• Tool 45: Continuous Improvement Log (Log) - Use Continuous Improvement Log.</a:t>
             </a:r>
             <a:endParaRPr lang="en-US" sz="1850" dirty="0"/>
           </a:p>
@@ -13922,7 +13924,7 @@
                 <a:ea typeface="Aptos" pitchFamily="34" charset="-122"/>
                 <a:cs typeface="Aptos" pitchFamily="34" charset="-120"/>
               </a:rPr>
-              <a:t>• Tool 48: AI Evaluation &amp; Outcomes Reporting (Template) - Use this tool to complete or.</a:t>
+              <a:t>• Tool 48: AI Evaluation &amp; Outcomes Reporting (Template) - Use this tool to.</a:t>
             </a:r>
             <a:endParaRPr lang="en-US" sz="1850" dirty="0"/>
           </a:p>
@@ -13939,7 +13941,7 @@
                 <a:ea typeface="Aptos" pitchFamily="34" charset="-122"/>
                 <a:cs typeface="Aptos" pitchFamily="34" charset="-120"/>
               </a:rPr>
-              <a:t>• Tool 1: AI Vision &amp; Principles Workshop (Workshop) - Use AI Vision &amp; Principles Workshop to.</a:t>
+              <a:t>• Tool 1: AI Vision &amp; Principles Workshop (Workshop) - Use AI Vision &amp;.</a:t>
             </a:r>
             <a:endParaRPr lang="en-US" sz="1850" dirty="0"/>
           </a:p>
@@ -13980,8 +13982,8 @@
         </p:nvSpPr>
         <p:spPr>
           <a:xfrm>
-            <a:off x="8211312" y="1563624"/>
-            <a:ext cx="2734056" cy="256032"/>
+            <a:off x="8211312" y="1545336"/>
+            <a:ext cx="2734056" cy="228600"/>
           </a:xfrm>
           <a:prstGeom prst="rect">
             <a:avLst/>
@@ -13997,7 +13999,7 @@
               <a:buNone/>
             </a:pPr>
             <a:r>
-              <a:rPr lang="en-US" sz="1300" b="1" dirty="0">
+              <a:rPr lang="en-US" sz="1220" b="1" dirty="0">
                 <a:solidFill>
                   <a:srgbClr val="0068B7"/>
                 </a:solidFill>
@@ -14007,7 +14009,7 @@
               </a:rPr>
               <a:t>Use the tools</a:t>
             </a:r>
-            <a:endParaRPr lang="en-US" sz="1300" dirty="0"/>
+            <a:endParaRPr lang="en-US" sz="1220" dirty="0"/>
           </a:p>
         </p:txBody>
       </p:sp>
@@ -14019,8 +14021,8 @@
         </p:nvSpPr>
         <p:spPr>
           <a:xfrm>
-            <a:off x="8211312" y="1892808"/>
-            <a:ext cx="2734056" cy="1536192"/>
+            <a:off x="8211312" y="1856232"/>
+            <a:ext cx="2734056" cy="1591056"/>
           </a:xfrm>
           <a:prstGeom prst="rect">
             <a:avLst/>
@@ -14038,7 +14040,7 @@
               <a:buNone/>
             </a:pPr>
             <a:r>
-              <a:rPr lang="en-US" sz="1320" dirty="0">
+              <a:rPr lang="en-US" sz="1220" dirty="0">
                 <a:solidFill>
                   <a:srgbClr val="17364A"/>
                 </a:solidFill>
@@ -14046,9 +14048,9 @@
                 <a:ea typeface="Aptos" pitchFamily="34" charset="-122"/>
                 <a:cs typeface="Aptos" pitchFamily="34" charset="-120"/>
               </a:rPr>
-              <a:t>Use linked tools when your department needs a structured worksheet, template, checklist, review process, or documentation artifact.</a:t>
-            </a:r>
-            <a:endParaRPr lang="en-US" sz="1320" dirty="0"/>
+              <a:t>Use linked tools when your department needs a structured worksheet, template,.</a:t>
+            </a:r>
+            <a:endParaRPr lang="en-US" sz="1220" dirty="0"/>
           </a:p>
         </p:txBody>
       </p:sp>
@@ -14087,8 +14089,8 @@
         </p:nvSpPr>
         <p:spPr>
           <a:xfrm>
-            <a:off x="8211312" y="3941064"/>
-            <a:ext cx="2734056" cy="256032"/>
+            <a:off x="8211312" y="3922776"/>
+            <a:ext cx="2734056" cy="228600"/>
           </a:xfrm>
           <a:prstGeom prst="rect">
             <a:avLst/>
@@ -14104,7 +14106,7 @@
               <a:buNone/>
             </a:pPr>
             <a:r>
-              <a:rPr lang="en-US" sz="1300" b="1" dirty="0">
+              <a:rPr lang="en-US" sz="1220" b="1" dirty="0">
                 <a:solidFill>
                   <a:srgbClr val="0068B7"/>
                 </a:solidFill>
@@ -14114,7 +14116,7 @@
               </a:rPr>
               <a:t>Tool selection cues</a:t>
             </a:r>
-            <a:endParaRPr lang="en-US" sz="1300" dirty="0"/>
+            <a:endParaRPr lang="en-US" sz="1220" dirty="0"/>
           </a:p>
         </p:txBody>
       </p:sp>
@@ -14126,8 +14128,8 @@
         </p:nvSpPr>
         <p:spPr>
           <a:xfrm>
-            <a:off x="8229600" y="4306824"/>
-            <a:ext cx="2679192" cy="941832"/>
+            <a:off x="8229600" y="4251960"/>
+            <a:ext cx="2679192" cy="1033272"/>
           </a:xfrm>
           <a:prstGeom prst="rect">
             <a:avLst/>
@@ -14145,7 +14147,7 @@
               <a:buNone/>
             </a:pPr>
             <a:r>
-              <a:rPr lang="en-US" sz="1220" dirty="0">
+              <a:rPr lang="en-US" sz="1140" dirty="0">
                 <a:solidFill>
                   <a:srgbClr val="17364A"/>
                 </a:solidFill>
@@ -14155,14 +14157,14 @@
               </a:rPr>
               <a:t>Use a tool when no comparable local process exists.</a:t>
             </a:r>
-            <a:endParaRPr lang="en-US" sz="1220" dirty="0"/>
-          </a:p>
-          <a:p>
-            <a:pPr indent="0" marL="0">
-              <a:buNone/>
-            </a:pPr>
-            <a:r>
-              <a:rPr lang="en-US" sz="1220" dirty="0">
+            <a:endParaRPr lang="en-US" sz="1140" dirty="0"/>
+          </a:p>
+          <a:p>
+            <a:pPr indent="0" marL="0">
+              <a:buNone/>
+            </a:pPr>
+            <a:r>
+              <a:rPr lang="en-US" sz="1140" dirty="0">
                 <a:solidFill>
                   <a:srgbClr val="17364A"/>
                 </a:solidFill>
@@ -14170,16 +14172,16 @@
                 <a:ea typeface="Aptos" pitchFamily="34" charset="-122"/>
                 <a:cs typeface="Aptos" pitchFamily="34" charset="-120"/>
               </a:rPr>
-              <a:t>Adapt existing department templates when they already fit the.</a:t>
-            </a:r>
-            <a:endParaRPr lang="en-US" sz="1220" dirty="0"/>
-          </a:p>
-          <a:p>
-            <a:pPr indent="0" marL="0">
-              <a:buNone/>
-            </a:pPr>
-            <a:r>
-              <a:rPr lang="en-US" sz="1220" dirty="0">
+              <a:t>Adapt existing department templates when they.</a:t>
+            </a:r>
+            <a:endParaRPr lang="en-US" sz="1140" dirty="0"/>
+          </a:p>
+          <a:p>
+            <a:pPr indent="0" marL="0">
+              <a:buNone/>
+            </a:pPr>
+            <a:r>
+              <a:rPr lang="en-US" sz="1140" dirty="0">
                 <a:solidFill>
                   <a:srgbClr val="17364A"/>
                 </a:solidFill>
@@ -14187,9 +14189,9 @@
                 <a:ea typeface="Aptos" pitchFamily="34" charset="-122"/>
                 <a:cs typeface="Aptos" pitchFamily="34" charset="-120"/>
               </a:rPr>
-              <a:t>Save the completed artifact as evidence of the decision.</a:t>
-            </a:r>
-            <a:endParaRPr lang="en-US" sz="1220" dirty="0"/>
+              <a:t>Save the completed artifact as evidence of the.</a:t>
+            </a:r>
+            <a:endParaRPr lang="en-US" sz="1140" dirty="0"/>
           </a:p>
         </p:txBody>
       </p:sp>
@@ -14480,8 +14482,8 @@
         </p:nvSpPr>
         <p:spPr>
           <a:xfrm>
-            <a:off x="868680" y="1508760"/>
-            <a:ext cx="6309360" cy="4160520"/>
+            <a:off x="822960" y="1463040"/>
+            <a:ext cx="6565392" cy="4343400"/>
           </a:xfrm>
           <a:prstGeom prst="rect">
             <a:avLst/>
@@ -14499,7 +14501,7 @@
               <a:buNone/>
             </a:pPr>
             <a:r>
-              <a:rPr lang="en-US" sz="2100" dirty="0">
+              <a:rPr lang="en-US" sz="1920" dirty="0">
                 <a:solidFill>
                   <a:srgbClr val="003A63"/>
                 </a:solidFill>
@@ -14509,14 +14511,14 @@
               </a:rPr>
               <a:t>• Define predictive analytics and risk stratification in public health terms.</a:t>
             </a:r>
-            <a:endParaRPr lang="en-US" sz="2100" dirty="0"/>
-          </a:p>
-          <a:p>
-            <a:pPr indent="0" marL="0">
-              <a:buNone/>
-            </a:pPr>
-            <a:r>
-              <a:rPr lang="en-US" sz="2100" dirty="0">
+            <a:endParaRPr lang="en-US" sz="1920" dirty="0"/>
+          </a:p>
+          <a:p>
+            <a:pPr indent="0" marL="0">
+              <a:buNone/>
+            </a:pPr>
+            <a:r>
+              <a:rPr lang="en-US" sz="1920" dirty="0">
                 <a:solidFill>
                   <a:srgbClr val="003A63"/>
                 </a:solidFill>
@@ -14524,16 +14526,16 @@
                 <a:ea typeface="Aptos" pitchFamily="34" charset="-122"/>
                 <a:cs typeface="Aptos" pitchFamily="34" charset="-120"/>
               </a:rPr>
-              <a:t>• Distinguish prediction from causation, diagnosis, and eligibility determination.</a:t>
-            </a:r>
-            <a:endParaRPr lang="en-US" sz="2100" dirty="0"/>
-          </a:p>
-          <a:p>
-            <a:pPr indent="0" marL="0">
-              <a:buNone/>
-            </a:pPr>
-            <a:r>
-              <a:rPr lang="en-US" sz="2100" dirty="0">
+              <a:t>• Distinguish prediction from causation, diagnosis, and eligibility.</a:t>
+            </a:r>
+            <a:endParaRPr lang="en-US" sz="1920" dirty="0"/>
+          </a:p>
+          <a:p>
+            <a:pPr indent="0" marL="0">
+              <a:buNone/>
+            </a:pPr>
+            <a:r>
+              <a:rPr lang="en-US" sz="1920" dirty="0">
                 <a:solidFill>
                   <a:srgbClr val="003A63"/>
                 </a:solidFill>
@@ -14543,7 +14545,7 @@
               </a:rPr>
               <a:t>• Interpret basic risk categories, thresholds, calibration, and error tradeoffs.</a:t>
             </a:r>
-            <a:endParaRPr lang="en-US" sz="2100" dirty="0"/>
+            <a:endParaRPr lang="en-US" sz="1920" dirty="0"/>
           </a:p>
         </p:txBody>
       </p:sp>
@@ -14555,12 +14557,12 @@
         </p:nvSpPr>
         <p:spPr>
           <a:xfrm>
-            <a:off x="7635240" y="1325880"/>
-            <a:ext cx="3474720" cy="1207008"/>
+            <a:off x="7543800" y="1325880"/>
+            <a:ext cx="3611880" cy="1261872"/>
           </a:xfrm>
           <a:prstGeom prst="roundRect">
             <a:avLst>
-              <a:gd name="adj" fmla="val 9091"/>
+              <a:gd name="adj" fmla="val 8696"/>
             </a:avLst>
           </a:prstGeom>
           <a:solidFill>
@@ -14582,8 +14584,8 @@
         </p:nvSpPr>
         <p:spPr>
           <a:xfrm>
-            <a:off x="7799832" y="1472184"/>
-            <a:ext cx="3145536" cy="256032"/>
+            <a:off x="7708392" y="1453896"/>
+            <a:ext cx="3282696" cy="228600"/>
           </a:xfrm>
           <a:prstGeom prst="rect">
             <a:avLst/>
@@ -14599,7 +14601,7 @@
               <a:buNone/>
             </a:pPr>
             <a:r>
-              <a:rPr lang="en-US" sz="1300" b="1" dirty="0">
+              <a:rPr lang="en-US" sz="1220" b="1" dirty="0">
                 <a:solidFill>
                   <a:srgbClr val="0068B7"/>
                 </a:solidFill>
@@ -14609,7 +14611,7 @@
               </a:rPr>
               <a:t>Risk check</a:t>
             </a:r>
-            <a:endParaRPr lang="en-US" sz="1300" dirty="0"/>
+            <a:endParaRPr lang="en-US" sz="1220" dirty="0"/>
           </a:p>
         </p:txBody>
       </p:sp>
@@ -14621,8 +14623,8 @@
         </p:nvSpPr>
         <p:spPr>
           <a:xfrm>
-            <a:off x="7799832" y="1801368"/>
-            <a:ext cx="3145536" cy="640080"/>
+            <a:off x="7708392" y="1764792"/>
+            <a:ext cx="3282696" cy="749808"/>
           </a:xfrm>
           <a:prstGeom prst="rect">
             <a:avLst/>
@@ -14640,7 +14642,7 @@
               <a:buNone/>
             </a:pPr>
             <a:r>
-              <a:rPr lang="en-US" sz="1320" dirty="0">
+              <a:rPr lang="en-US" sz="1220" dirty="0">
                 <a:solidFill>
                   <a:srgbClr val="17364A"/>
                 </a:solidFill>
@@ -14650,7 +14652,7 @@
               </a:rPr>
               <a:t>Define predictive analytics and risk stratification in public health terms.</a:t>
             </a:r>
-            <a:endParaRPr lang="en-US" sz="1320" dirty="0"/>
+            <a:endParaRPr lang="en-US" sz="1220" dirty="0"/>
           </a:p>
         </p:txBody>
       </p:sp>
@@ -14662,12 +14664,12 @@
         </p:nvSpPr>
         <p:spPr>
           <a:xfrm>
-            <a:off x="7635240" y="2670048"/>
-            <a:ext cx="3474720" cy="1377086"/>
+            <a:off x="7543800" y="2724912"/>
+            <a:ext cx="3611880" cy="1527048"/>
           </a:xfrm>
           <a:prstGeom prst="roundRect">
             <a:avLst>
-              <a:gd name="adj" fmla="val 7968"/>
+              <a:gd name="adj" fmla="val 7186"/>
             </a:avLst>
           </a:prstGeom>
           <a:solidFill>
@@ -14689,8 +14691,8 @@
         </p:nvSpPr>
         <p:spPr>
           <a:xfrm>
-            <a:off x="7799832" y="2816352"/>
-            <a:ext cx="3145536" cy="256032"/>
+            <a:off x="7708392" y="2852928"/>
+            <a:ext cx="3282696" cy="228600"/>
           </a:xfrm>
           <a:prstGeom prst="rect">
             <a:avLst/>
@@ -14706,7 +14708,7 @@
               <a:buNone/>
             </a:pPr>
             <a:r>
-              <a:rPr lang="en-US" sz="1300" b="1" dirty="0">
+              <a:rPr lang="en-US" sz="1220" b="1" dirty="0">
                 <a:solidFill>
                   <a:srgbClr val="0068B7"/>
                 </a:solidFill>
@@ -14716,7 +14718,7 @@
               </a:rPr>
               <a:t>Concept checkpoints</a:t>
             </a:r>
-            <a:endParaRPr lang="en-US" sz="1300" dirty="0"/>
+            <a:endParaRPr lang="en-US" sz="1220" dirty="0"/>
           </a:p>
         </p:txBody>
       </p:sp>
@@ -14728,8 +14730,8 @@
         </p:nvSpPr>
         <p:spPr>
           <a:xfrm>
-            <a:off x="7818120" y="3182112"/>
-            <a:ext cx="3090672" cy="718718"/>
+            <a:off x="7726680" y="3182112"/>
+            <a:ext cx="3227832" cy="960120"/>
           </a:xfrm>
           <a:prstGeom prst="rect">
             <a:avLst/>
@@ -14747,7 +14749,7 @@
               <a:buNone/>
             </a:pPr>
             <a:r>
-              <a:rPr lang="en-US" sz="1220" dirty="0">
+              <a:rPr lang="en-US" sz="1140" dirty="0">
                 <a:solidFill>
                   <a:srgbClr val="17364A"/>
                 </a:solidFill>
@@ -14755,16 +14757,16 @@
                 <a:ea typeface="Aptos" pitchFamily="34" charset="-122"/>
                 <a:cs typeface="Aptos" pitchFamily="34" charset="-120"/>
               </a:rPr>
-              <a:t>Identify equity and operational risks associated with risk scores.</a:t>
-            </a:r>
-            <a:endParaRPr lang="en-US" sz="1220" dirty="0"/>
-          </a:p>
-          <a:p>
-            <a:pPr indent="0" marL="0">
-              <a:buNone/>
-            </a:pPr>
-            <a:r>
-              <a:rPr lang="en-US" sz="1220" dirty="0">
+              <a:t>Identify equity and operational risks associated.</a:t>
+            </a:r>
+            <a:endParaRPr lang="en-US" sz="1140" dirty="0"/>
+          </a:p>
+          <a:p>
+            <a:pPr indent="0" marL="0">
+              <a:buNone/>
+            </a:pPr>
+            <a:r>
+              <a:rPr lang="en-US" sz="1140" dirty="0">
                 <a:solidFill>
                   <a:srgbClr val="17364A"/>
                 </a:solidFill>
@@ -14772,9 +14774,9 @@
                 <a:ea typeface="Aptos" pitchFamily="34" charset="-122"/>
                 <a:cs typeface="Aptos" pitchFamily="34" charset="-120"/>
               </a:rPr>
-              <a:t>Design safeguards for use of predictive outputs in resource.</a:t>
-            </a:r>
-            <a:endParaRPr lang="en-US" sz="1220" dirty="0"/>
+              <a:t>Design safeguards for use of predictive outputs in.</a:t>
+            </a:r>
+            <a:endParaRPr lang="en-US" sz="1140" dirty="0"/>
           </a:p>
         </p:txBody>
       </p:sp>
@@ -14786,12 +14788,12 @@
         </p:nvSpPr>
         <p:spPr>
           <a:xfrm>
-            <a:off x="7635240" y="4184294"/>
-            <a:ext cx="3474720" cy="1466698"/>
+            <a:off x="7543800" y="4389120"/>
+            <a:ext cx="3611880" cy="1261872"/>
           </a:xfrm>
           <a:prstGeom prst="roundRect">
             <a:avLst>
-              <a:gd name="adj" fmla="val 7481"/>
+              <a:gd name="adj" fmla="val 8696"/>
             </a:avLst>
           </a:prstGeom>
           <a:solidFill>
@@ -14813,8 +14815,8 @@
         </p:nvSpPr>
         <p:spPr>
           <a:xfrm>
-            <a:off x="7799832" y="4330598"/>
-            <a:ext cx="3145536" cy="256032"/>
+            <a:off x="7708392" y="4517136"/>
+            <a:ext cx="3282696" cy="228600"/>
           </a:xfrm>
           <a:prstGeom prst="rect">
             <a:avLst/>
@@ -14830,7 +14832,7 @@
               <a:buNone/>
             </a:pPr>
             <a:r>
-              <a:rPr lang="en-US" sz="1300" b="1" dirty="0">
+              <a:rPr lang="en-US" sz="1220" b="1" dirty="0">
                 <a:solidFill>
                   <a:srgbClr val="0068B7"/>
                 </a:solidFill>
@@ -14840,7 +14842,7 @@
               </a:rPr>
               <a:t>Safeguard to plan</a:t>
             </a:r>
-            <a:endParaRPr lang="en-US" sz="1300" dirty="0"/>
+            <a:endParaRPr lang="en-US" sz="1220" dirty="0"/>
           </a:p>
         </p:txBody>
       </p:sp>
@@ -14852,8 +14854,8 @@
         </p:nvSpPr>
         <p:spPr>
           <a:xfrm>
-            <a:off x="7799832" y="4659782"/>
-            <a:ext cx="3145536" cy="899770"/>
+            <a:off x="7708392" y="4828032"/>
+            <a:ext cx="3282696" cy="749808"/>
           </a:xfrm>
           <a:prstGeom prst="rect">
             <a:avLst/>
@@ -14871,7 +14873,7 @@
               <a:buNone/>
             </a:pPr>
             <a:r>
-              <a:rPr lang="en-US" sz="1320" dirty="0">
+              <a:rPr lang="en-US" sz="1220" dirty="0">
                 <a:solidFill>
                   <a:srgbClr val="17364A"/>
                 </a:solidFill>
@@ -14879,9 +14881,9 @@
                 <a:ea typeface="Aptos" pitchFamily="34" charset="-122"/>
                 <a:cs typeface="Aptos" pitchFamily="34" charset="-120"/>
               </a:rPr>
-              <a:t>Use the assignment to test whether you can explain the concept, apply it to a realistic public health situation, and identify what would need review before the work moves forward.</a:t>
-            </a:r>
-            <a:endParaRPr lang="en-US" sz="1320" dirty="0"/>
+              <a:t>Use the assignment to test whether you can explain the concept, apply it to a.</a:t>
+            </a:r>
+            <a:endParaRPr lang="en-US" sz="1220" dirty="0"/>
           </a:p>
         </p:txBody>
       </p:sp>
@@ -15172,8 +15174,8 @@
         </p:nvSpPr>
         <p:spPr>
           <a:xfrm>
-            <a:off x="868680" y="1508760"/>
-            <a:ext cx="6309360" cy="4160520"/>
+            <a:off x="822960" y="1463040"/>
+            <a:ext cx="6565392" cy="4343400"/>
           </a:xfrm>
           <a:prstGeom prst="rect">
             <a:avLst/>
@@ -15191,7 +15193,7 @@
               <a:buNone/>
             </a:pPr>
             <a:r>
-              <a:rPr lang="en-US" sz="2100" dirty="0">
+              <a:rPr lang="en-US" sz="1920" dirty="0">
                 <a:solidFill>
                   <a:srgbClr val="003A63"/>
                 </a:solidFill>
@@ -15201,7 +15203,7 @@
               </a:rPr>
               <a:t>• Produce a predictive model review plan for a public health workflow.</a:t>
             </a:r>
-            <a:endParaRPr lang="en-US" sz="2100" dirty="0"/>
+            <a:endParaRPr lang="en-US" sz="1920" dirty="0"/>
           </a:p>
         </p:txBody>
       </p:sp>
@@ -15213,12 +15215,12 @@
         </p:nvSpPr>
         <p:spPr>
           <a:xfrm>
-            <a:off x="7635240" y="1325880"/>
-            <a:ext cx="3474720" cy="1207008"/>
+            <a:off x="7543800" y="1325880"/>
+            <a:ext cx="3611880" cy="1261872"/>
           </a:xfrm>
           <a:prstGeom prst="roundRect">
             <a:avLst>
-              <a:gd name="adj" fmla="val 9091"/>
+              <a:gd name="adj" fmla="val 8696"/>
             </a:avLst>
           </a:prstGeom>
           <a:solidFill>
@@ -15240,8 +15242,8 @@
         </p:nvSpPr>
         <p:spPr>
           <a:xfrm>
-            <a:off x="7799832" y="1472184"/>
-            <a:ext cx="3145536" cy="256032"/>
+            <a:off x="7708392" y="1453896"/>
+            <a:ext cx="3282696" cy="228600"/>
           </a:xfrm>
           <a:prstGeom prst="rect">
             <a:avLst/>
@@ -15257,7 +15259,7 @@
               <a:buNone/>
             </a:pPr>
             <a:r>
-              <a:rPr lang="en-US" sz="1300" b="1" dirty="0">
+              <a:rPr lang="en-US" sz="1220" b="1" dirty="0">
                 <a:solidFill>
                   <a:srgbClr val="0068B7"/>
                 </a:solidFill>
@@ -15267,7 +15269,7 @@
               </a:rPr>
               <a:t>Risk check</a:t>
             </a:r>
-            <a:endParaRPr lang="en-US" sz="1300" dirty="0"/>
+            <a:endParaRPr lang="en-US" sz="1220" dirty="0"/>
           </a:p>
         </p:txBody>
       </p:sp>
@@ -15279,8 +15281,8 @@
         </p:nvSpPr>
         <p:spPr>
           <a:xfrm>
-            <a:off x="7799832" y="1801368"/>
-            <a:ext cx="3145536" cy="640080"/>
+            <a:off x="7708392" y="1764792"/>
+            <a:ext cx="3282696" cy="749808"/>
           </a:xfrm>
           <a:prstGeom prst="rect">
             <a:avLst/>
@@ -15298,7 +15300,7 @@
               <a:buNone/>
             </a:pPr>
             <a:r>
-              <a:rPr lang="en-US" sz="1320" dirty="0">
+              <a:rPr lang="en-US" sz="1220" dirty="0">
                 <a:solidFill>
                   <a:srgbClr val="17364A"/>
                 </a:solidFill>
@@ -15308,7 +15310,7 @@
               </a:rPr>
               <a:t>Produce a predictive model review plan for a public health workflow.</a:t>
             </a:r>
-            <a:endParaRPr lang="en-US" sz="1320" dirty="0"/>
+            <a:endParaRPr lang="en-US" sz="1220" dirty="0"/>
           </a:p>
         </p:txBody>
       </p:sp>
@@ -15320,12 +15322,12 @@
         </p:nvSpPr>
         <p:spPr>
           <a:xfrm>
-            <a:off x="7635240" y="2670048"/>
-            <a:ext cx="3474720" cy="1377086"/>
+            <a:off x="7543800" y="2724912"/>
+            <a:ext cx="3611880" cy="1527048"/>
           </a:xfrm>
           <a:prstGeom prst="roundRect">
             <a:avLst>
-              <a:gd name="adj" fmla="val 7968"/>
+              <a:gd name="adj" fmla="val 7186"/>
             </a:avLst>
           </a:prstGeom>
           <a:solidFill>
@@ -15347,8 +15349,8 @@
         </p:nvSpPr>
         <p:spPr>
           <a:xfrm>
-            <a:off x="7799832" y="2816352"/>
-            <a:ext cx="3145536" cy="256032"/>
+            <a:off x="7708392" y="2852928"/>
+            <a:ext cx="3282696" cy="228600"/>
           </a:xfrm>
           <a:prstGeom prst="rect">
             <a:avLst/>
@@ -15364,7 +15366,7 @@
               <a:buNone/>
             </a:pPr>
             <a:r>
-              <a:rPr lang="en-US" sz="1300" b="1" dirty="0">
+              <a:rPr lang="en-US" sz="1220" b="1" dirty="0">
                 <a:solidFill>
                   <a:srgbClr val="0068B7"/>
                 </a:solidFill>
@@ -15374,7 +15376,7 @@
               </a:rPr>
               <a:t>Concept checkpoints</a:t>
             </a:r>
-            <a:endParaRPr lang="en-US" sz="1300" dirty="0"/>
+            <a:endParaRPr lang="en-US" sz="1220" dirty="0"/>
           </a:p>
         </p:txBody>
       </p:sp>
@@ -15386,8 +15388,8 @@
         </p:nvSpPr>
         <p:spPr>
           <a:xfrm>
-            <a:off x="7818120" y="3182112"/>
-            <a:ext cx="3090672" cy="718718"/>
+            <a:off x="7726680" y="3182112"/>
+            <a:ext cx="3227832" cy="960120"/>
           </a:xfrm>
           <a:prstGeom prst="rect">
             <a:avLst/>
@@ -15405,7 +15407,7 @@
               <a:buNone/>
             </a:pPr>
             <a:r>
-              <a:rPr lang="en-US" sz="1220" dirty="0">
+              <a:rPr lang="en-US" sz="1140" dirty="0">
                 <a:solidFill>
                   <a:srgbClr val="17364A"/>
                 </a:solidFill>
@@ -15413,9 +15415,9 @@
                 <a:ea typeface="Aptos" pitchFamily="34" charset="-122"/>
                 <a:cs typeface="Aptos" pitchFamily="34" charset="-120"/>
               </a:rPr>
-              <a:t>Produce a predictive model review plan for a public health workflow.</a:t>
-            </a:r>
-            <a:endParaRPr lang="en-US" sz="1220" dirty="0"/>
+              <a:t>Produce a predictive model review plan for a.</a:t>
+            </a:r>
+            <a:endParaRPr lang="en-US" sz="1140" dirty="0"/>
           </a:p>
         </p:txBody>
       </p:sp>
@@ -15427,12 +15429,12 @@
         </p:nvSpPr>
         <p:spPr>
           <a:xfrm>
-            <a:off x="7635240" y="4184294"/>
-            <a:ext cx="3474720" cy="1466698"/>
+            <a:off x="7543800" y="4389120"/>
+            <a:ext cx="3611880" cy="1261872"/>
           </a:xfrm>
           <a:prstGeom prst="roundRect">
             <a:avLst>
-              <a:gd name="adj" fmla="val 7481"/>
+              <a:gd name="adj" fmla="val 8696"/>
             </a:avLst>
           </a:prstGeom>
           <a:solidFill>
@@ -15454,8 +15456,8 @@
         </p:nvSpPr>
         <p:spPr>
           <a:xfrm>
-            <a:off x="7799832" y="4330598"/>
-            <a:ext cx="3145536" cy="256032"/>
+            <a:off x="7708392" y="4517136"/>
+            <a:ext cx="3282696" cy="228600"/>
           </a:xfrm>
           <a:prstGeom prst="rect">
             <a:avLst/>
@@ -15471,7 +15473,7 @@
               <a:buNone/>
             </a:pPr>
             <a:r>
-              <a:rPr lang="en-US" sz="1300" b="1" dirty="0">
+              <a:rPr lang="en-US" sz="1220" b="1" dirty="0">
                 <a:solidFill>
                   <a:srgbClr val="0068B7"/>
                 </a:solidFill>
@@ -15481,7 +15483,7 @@
               </a:rPr>
               <a:t>Safeguard to plan</a:t>
             </a:r>
-            <a:endParaRPr lang="en-US" sz="1300" dirty="0"/>
+            <a:endParaRPr lang="en-US" sz="1220" dirty="0"/>
           </a:p>
         </p:txBody>
       </p:sp>
@@ -15493,8 +15495,8 @@
         </p:nvSpPr>
         <p:spPr>
           <a:xfrm>
-            <a:off x="7799832" y="4659782"/>
-            <a:ext cx="3145536" cy="899770"/>
+            <a:off x="7708392" y="4828032"/>
+            <a:ext cx="3282696" cy="749808"/>
           </a:xfrm>
           <a:prstGeom prst="rect">
             <a:avLst/>
@@ -15512,7 +15514,7 @@
               <a:buNone/>
             </a:pPr>
             <a:r>
-              <a:rPr lang="en-US" sz="1320" dirty="0">
+              <a:rPr lang="en-US" sz="1220" dirty="0">
                 <a:solidFill>
                   <a:srgbClr val="17364A"/>
                 </a:solidFill>
@@ -15520,9 +15522,9 @@
                 <a:ea typeface="Aptos" pitchFamily="34" charset="-122"/>
                 <a:cs typeface="Aptos" pitchFamily="34" charset="-120"/>
               </a:rPr>
-              <a:t>Use the assignment to test whether you can explain the concept, apply it to a realistic public health situation, and identify what would need review before the work moves forward.</a:t>
-            </a:r>
-            <a:endParaRPr lang="en-US" sz="1320" dirty="0"/>
+              <a:t>Use the assignment to test whether you can explain the concept, apply it to a.</a:t>
+            </a:r>
+            <a:endParaRPr lang="en-US" sz="1220" dirty="0"/>
           </a:p>
         </p:txBody>
       </p:sp>
@@ -15813,8 +15815,8 @@
         </p:nvSpPr>
         <p:spPr>
           <a:xfrm>
-            <a:off x="868680" y="1508760"/>
-            <a:ext cx="6309360" cy="4160520"/>
+            <a:off x="822960" y="1463040"/>
+            <a:ext cx="6565392" cy="4343400"/>
           </a:xfrm>
           <a:prstGeom prst="rect">
             <a:avLst/>
@@ -15832,7 +15834,7 @@
               <a:buNone/>
             </a:pPr>
             <a:r>
-              <a:rPr lang="en-US" sz="2100" dirty="0">
+              <a:rPr lang="en-US" sz="1920" dirty="0">
                 <a:solidFill>
                   <a:srgbClr val="003A63"/>
                 </a:solidFill>
@@ -15840,16 +15842,16 @@
                 <a:ea typeface="Aptos" pitchFamily="34" charset="-122"/>
                 <a:cs typeface="Aptos" pitchFamily="34" charset="-120"/>
               </a:rPr>
-              <a:t>• Predictive analytics uses data to estimate the likelihood of future events or outcomes.</a:t>
-            </a:r>
-            <a:endParaRPr lang="en-US" sz="2100" dirty="0"/>
-          </a:p>
-          <a:p>
-            <a:pPr indent="0" marL="0">
-              <a:buNone/>
-            </a:pPr>
-            <a:r>
-              <a:rPr lang="en-US" sz="2100" dirty="0">
+              <a:t>• Predictive analytics uses data to estimate the likelihood of future events.</a:t>
+            </a:r>
+            <a:endParaRPr lang="en-US" sz="1920" dirty="0"/>
+          </a:p>
+          <a:p>
+            <a:pPr indent="0" marL="0">
+              <a:buNone/>
+            </a:pPr>
+            <a:r>
+              <a:rPr lang="en-US" sz="1920" dirty="0">
                 <a:solidFill>
                   <a:srgbClr val="003A63"/>
                 </a:solidFill>
@@ -15857,16 +15859,16 @@
                 <a:ea typeface="Aptos" pitchFamily="34" charset="-122"/>
                 <a:cs typeface="Aptos" pitchFamily="34" charset="-120"/>
               </a:rPr>
-              <a:t>• In public health, predictive models may be used to anticipate disease burden, identify.</a:t>
-            </a:r>
-            <a:endParaRPr lang="en-US" sz="2100" dirty="0"/>
-          </a:p>
-          <a:p>
-            <a:pPr indent="0" marL="0">
-              <a:buNone/>
-            </a:pPr>
-            <a:r>
-              <a:rPr lang="en-US" sz="2100" dirty="0">
+              <a:t>• In public health, predictive models may be used to anticipate disease.</a:t>
+            </a:r>
+            <a:endParaRPr lang="en-US" sz="1920" dirty="0"/>
+          </a:p>
+          <a:p>
+            <a:pPr indent="0" marL="0">
+              <a:buNone/>
+            </a:pPr>
+            <a:r>
+              <a:rPr lang="en-US" sz="1920" dirty="0">
                 <a:solidFill>
                   <a:srgbClr val="003A63"/>
                 </a:solidFill>
@@ -15874,9 +15876,9 @@
                 <a:ea typeface="Aptos" pitchFamily="34" charset="-122"/>
                 <a:cs typeface="Aptos" pitchFamily="34" charset="-120"/>
               </a:rPr>
-              <a:t>• Risk stratification is the practice of grouping individuals, facilities, areas, events, or.</a:t>
-            </a:r>
-            <a:endParaRPr lang="en-US" sz="2100" dirty="0"/>
+              <a:t>• Risk stratification is the practice of grouping individuals, facilities,.</a:t>
+            </a:r>
+            <a:endParaRPr lang="en-US" sz="1920" dirty="0"/>
           </a:p>
         </p:txBody>
       </p:sp>
@@ -15888,12 +15890,12 @@
         </p:nvSpPr>
         <p:spPr>
           <a:xfrm>
-            <a:off x="7635240" y="1325880"/>
-            <a:ext cx="3474720" cy="1207008"/>
+            <a:off x="7543800" y="1325880"/>
+            <a:ext cx="3611880" cy="1261872"/>
           </a:xfrm>
           <a:prstGeom prst="roundRect">
             <a:avLst>
-              <a:gd name="adj" fmla="val 9091"/>
+              <a:gd name="adj" fmla="val 8696"/>
             </a:avLst>
           </a:prstGeom>
           <a:solidFill>
@@ -15915,8 +15917,8 @@
         </p:nvSpPr>
         <p:spPr>
           <a:xfrm>
-            <a:off x="7799832" y="1472184"/>
-            <a:ext cx="3145536" cy="256032"/>
+            <a:off x="7708392" y="1453896"/>
+            <a:ext cx="3282696" cy="228600"/>
           </a:xfrm>
           <a:prstGeom prst="rect">
             <a:avLst/>
@@ -15932,7 +15934,7 @@
               <a:buNone/>
             </a:pPr>
             <a:r>
-              <a:rPr lang="en-US" sz="1300" b="1" dirty="0">
+              <a:rPr lang="en-US" sz="1220" b="1" dirty="0">
                 <a:solidFill>
                   <a:srgbClr val="0068B7"/>
                 </a:solidFill>
@@ -15942,7 +15944,7 @@
               </a:rPr>
               <a:t>Risk check</a:t>
             </a:r>
-            <a:endParaRPr lang="en-US" sz="1300" dirty="0"/>
+            <a:endParaRPr lang="en-US" sz="1220" dirty="0"/>
           </a:p>
         </p:txBody>
       </p:sp>
@@ -15954,8 +15956,8 @@
         </p:nvSpPr>
         <p:spPr>
           <a:xfrm>
-            <a:off x="7799832" y="1801368"/>
-            <a:ext cx="3145536" cy="640080"/>
+            <a:off x="7708392" y="1764792"/>
+            <a:ext cx="3282696" cy="749808"/>
           </a:xfrm>
           <a:prstGeom prst="rect">
             <a:avLst/>
@@ -15973,7 +15975,7 @@
               <a:buNone/>
             </a:pPr>
             <a:r>
-              <a:rPr lang="en-US" sz="1320" dirty="0">
+              <a:rPr lang="en-US" sz="1220" dirty="0">
                 <a:solidFill>
                   <a:srgbClr val="17364A"/>
                 </a:solidFill>
@@ -15981,9 +15983,9 @@
                 <a:ea typeface="Aptos" pitchFamily="34" charset="-122"/>
                 <a:cs typeface="Aptos" pitchFamily="34" charset="-120"/>
               </a:rPr>
-              <a:t>Predictive analytics uses data to estimate the likelihood of future events or outcomes.</a:t>
-            </a:r>
-            <a:endParaRPr lang="en-US" sz="1320" dirty="0"/>
+              <a:t>Predictive analytics uses data to estimate the likelihood of future events or.</a:t>
+            </a:r>
+            <a:endParaRPr lang="en-US" sz="1220" dirty="0"/>
           </a:p>
         </p:txBody>
       </p:sp>
@@ -15995,12 +15997,12 @@
         </p:nvSpPr>
         <p:spPr>
           <a:xfrm>
-            <a:off x="7635240" y="2670048"/>
-            <a:ext cx="3474720" cy="1536192"/>
+            <a:off x="7543800" y="2724912"/>
+            <a:ext cx="3611880" cy="1527048"/>
           </a:xfrm>
           <a:prstGeom prst="roundRect">
             <a:avLst>
-              <a:gd name="adj" fmla="val 7143"/>
+              <a:gd name="adj" fmla="val 7186"/>
             </a:avLst>
           </a:prstGeom>
           <a:solidFill>
@@ -16022,24 +16024,26 @@
         </p:nvSpPr>
         <p:spPr>
           <a:xfrm>
-            <a:off x="7799832" y="2798064"/>
-            <a:ext cx="3145536" cy="237744"/>
-          </a:xfrm>
-          <a:prstGeom prst="rect">
-            <a:avLst/>
-          </a:prstGeom>
-          <a:noFill/>
-          <a:ln/>
-        </p:spPr>
-        <p:txBody>
-          <a:bodyPr wrap="square" lIns="0" tIns="0" rIns="0" bIns="0" rtlCol="0" anchor="ctr"/>
-          <a:lstStyle/>
-          <a:p>
-            <a:pPr indent="0" marL="0">
-              <a:buNone/>
-            </a:pPr>
-            <a:r>
-              <a:rPr lang="en-US" sz="1250" b="1" dirty="0">
+            <a:off x="7708392" y="2852928"/>
+            <a:ext cx="3282696" cy="219456"/>
+          </a:xfrm>
+          <a:prstGeom prst="rect">
+            <a:avLst/>
+          </a:prstGeom>
+          <a:noFill/>
+          <a:ln/>
+        </p:spPr>
+        <p:txBody>
+          <a:bodyPr wrap="square" lIns="0" tIns="0" rIns="0" bIns="0" rtlCol="0" anchor="ctr">
+            <a:normAutofit/>
+          </a:bodyPr>
+          <a:lstStyle/>
+          <a:p>
+            <a:pPr indent="0" marL="0">
+              <a:buNone/>
+            </a:pPr>
+            <a:r>
+              <a:rPr lang="en-US" sz="1160" b="1" dirty="0">
                 <a:solidFill>
                   <a:srgbClr val="0068B7"/>
                 </a:solidFill>
@@ -16049,7 +16053,7 @@
               </a:rPr>
               <a:t>Risk control loop</a:t>
             </a:r>
-            <a:endParaRPr lang="en-US" sz="1250" dirty="0"/>
+            <a:endParaRPr lang="en-US" sz="1160" dirty="0"/>
           </a:p>
         </p:txBody>
       </p:sp>
@@ -16061,7 +16065,7 @@
         </p:nvSpPr>
         <p:spPr>
           <a:xfrm>
-            <a:off x="8763000" y="3351276"/>
+            <a:off x="8717280" y="3406140"/>
             <a:ext cx="164592" cy="0"/>
           </a:xfrm>
           <a:prstGeom prst="line">
@@ -16084,8 +16088,8 @@
         </p:nvSpPr>
         <p:spPr>
           <a:xfrm>
-            <a:off x="7872984" y="3200400"/>
-            <a:ext cx="890016" cy="301752"/>
+            <a:off x="7781544" y="3255264"/>
+            <a:ext cx="935736" cy="301752"/>
           </a:xfrm>
           <a:prstGeom prst="roundRect">
             <a:avLst>
@@ -16111,8 +16115,8 @@
         </p:nvSpPr>
         <p:spPr>
           <a:xfrm>
-            <a:off x="7909560" y="3273552"/>
-            <a:ext cx="816864" cy="146304"/>
+            <a:off x="7818120" y="3328416"/>
+            <a:ext cx="862584" cy="146304"/>
           </a:xfrm>
           <a:prstGeom prst="rect">
             <a:avLst/>
@@ -16152,7 +16156,7 @@
         </p:nvSpPr>
         <p:spPr>
           <a:xfrm>
-            <a:off x="9817608" y="3351276"/>
+            <a:off x="9817608" y="3406140"/>
             <a:ext cx="164592" cy="0"/>
           </a:xfrm>
           <a:prstGeom prst="line">
@@ -16175,8 +16179,8 @@
         </p:nvSpPr>
         <p:spPr>
           <a:xfrm>
-            <a:off x="8927592" y="3200400"/>
-            <a:ext cx="890016" cy="301752"/>
+            <a:off x="8881872" y="3255264"/>
+            <a:ext cx="935736" cy="301752"/>
           </a:xfrm>
           <a:prstGeom prst="roundRect">
             <a:avLst>
@@ -16202,8 +16206,8 @@
         </p:nvSpPr>
         <p:spPr>
           <a:xfrm>
-            <a:off x="8964168" y="3273552"/>
-            <a:ext cx="816864" cy="146304"/>
+            <a:off x="8918448" y="3328416"/>
+            <a:ext cx="862584" cy="146304"/>
           </a:xfrm>
           <a:prstGeom prst="rect">
             <a:avLst/>
@@ -16243,8 +16247,8 @@
         </p:nvSpPr>
         <p:spPr>
           <a:xfrm>
-            <a:off x="9982200" y="3200400"/>
-            <a:ext cx="890016" cy="301752"/>
+            <a:off x="9982200" y="3255264"/>
+            <a:ext cx="935736" cy="301752"/>
           </a:xfrm>
           <a:prstGeom prst="roundRect">
             <a:avLst>
@@ -16270,8 +16274,8 @@
         </p:nvSpPr>
         <p:spPr>
           <a:xfrm>
-            <a:off x="10018776" y="3273552"/>
-            <a:ext cx="816864" cy="146304"/>
+            <a:off x="10018776" y="3328416"/>
+            <a:ext cx="862584" cy="146304"/>
           </a:xfrm>
           <a:prstGeom prst="rect">
             <a:avLst/>
@@ -16311,8 +16315,8 @@
         </p:nvSpPr>
         <p:spPr>
           <a:xfrm>
-            <a:off x="7854696" y="3694176"/>
-            <a:ext cx="3035808" cy="365760"/>
+            <a:off x="7763256" y="3749040"/>
+            <a:ext cx="3172968" cy="356616"/>
           </a:xfrm>
           <a:prstGeom prst="rect">
             <a:avLst/>
@@ -16330,7 +16334,7 @@
               <a:buNone/>
             </a:pPr>
             <a:r>
-              <a:rPr lang="en-US" sz="1120" dirty="0">
+              <a:rPr lang="en-US" sz="1040" dirty="0">
                 <a:solidFill>
                   <a:srgbClr val="17364A"/>
                 </a:solidFill>
@@ -16338,9 +16342,9 @@
                 <a:ea typeface="Aptos" pitchFamily="34" charset="-122"/>
                 <a:cs typeface="Aptos" pitchFamily="34" charset="-120"/>
               </a:rPr>
-              <a:t>Responsible use depends on finding risks early, applying safeguards, and watching for drift or harm over time.</a:t>
-            </a:r>
-            <a:endParaRPr lang="en-US" sz="1120" dirty="0"/>
+              <a:t>Responsible use depends on finding risks early, applying safeguards,.</a:t>
+            </a:r>
+            <a:endParaRPr lang="en-US" sz="1040" dirty="0"/>
           </a:p>
         </p:txBody>
       </p:sp>
@@ -16352,12 +16356,12 @@
         </p:nvSpPr>
         <p:spPr>
           <a:xfrm>
-            <a:off x="7635240" y="4343400"/>
-            <a:ext cx="3474720" cy="1255471"/>
+            <a:off x="7543800" y="4389120"/>
+            <a:ext cx="3611880" cy="1261872"/>
           </a:xfrm>
           <a:prstGeom prst="roundRect">
             <a:avLst>
-              <a:gd name="adj" fmla="val 8740"/>
+              <a:gd name="adj" fmla="val 8696"/>
             </a:avLst>
           </a:prstGeom>
           <a:solidFill>
@@ -16379,8 +16383,8 @@
         </p:nvSpPr>
         <p:spPr>
           <a:xfrm>
-            <a:off x="7799832" y="4489704"/>
-            <a:ext cx="3145536" cy="256032"/>
+            <a:off x="7708392" y="4517136"/>
+            <a:ext cx="3282696" cy="228600"/>
           </a:xfrm>
           <a:prstGeom prst="rect">
             <a:avLst/>
@@ -16396,7 +16400,7 @@
               <a:buNone/>
             </a:pPr>
             <a:r>
-              <a:rPr lang="en-US" sz="1300" b="1" dirty="0">
+              <a:rPr lang="en-US" sz="1220" b="1" dirty="0">
                 <a:solidFill>
                   <a:srgbClr val="0068B7"/>
                 </a:solidFill>
@@ -16406,7 +16410,7 @@
               </a:rPr>
               <a:t>Safeguard to plan</a:t>
             </a:r>
-            <a:endParaRPr lang="en-US" sz="1300" dirty="0"/>
+            <a:endParaRPr lang="en-US" sz="1220" dirty="0"/>
           </a:p>
         </p:txBody>
       </p:sp>
@@ -16418,8 +16422,8 @@
         </p:nvSpPr>
         <p:spPr>
           <a:xfrm>
-            <a:off x="7799832" y="4818888"/>
-            <a:ext cx="3145536" cy="688543"/>
+            <a:off x="7708392" y="4828032"/>
+            <a:ext cx="3282696" cy="749808"/>
           </a:xfrm>
           <a:prstGeom prst="rect">
             <a:avLst/>
@@ -16437,7 +16441,7 @@
               <a:buNone/>
             </a:pPr>
             <a:r>
-              <a:rPr lang="en-US" sz="1320" dirty="0">
+              <a:rPr lang="en-US" sz="1220" dirty="0">
                 <a:solidFill>
                   <a:srgbClr val="17364A"/>
                 </a:solidFill>
@@ -16445,9 +16449,9 @@
                 <a:ea typeface="Aptos" pitchFamily="34" charset="-122"/>
                 <a:cs typeface="Aptos" pitchFamily="34" charset="-120"/>
               </a:rPr>
-              <a:t>Identify what could go wrong, who could be affected, what safeguards are needed, and what evidence should be reviewed before use.</a:t>
-            </a:r>
-            <a:endParaRPr lang="en-US" sz="1320" dirty="0"/>
+              <a:t>Identify what could go wrong, who could be affected, what safeguards are needed,.</a:t>
+            </a:r>
+            <a:endParaRPr lang="en-US" sz="1220" dirty="0"/>
           </a:p>
         </p:txBody>
       </p:sp>
@@ -16738,8 +16742,8 @@
         </p:nvSpPr>
         <p:spPr>
           <a:xfrm>
-            <a:off x="868680" y="1508760"/>
-            <a:ext cx="6309360" cy="4160520"/>
+            <a:off x="822960" y="1463040"/>
+            <a:ext cx="6565392" cy="4343400"/>
           </a:xfrm>
           <a:prstGeom prst="rect">
             <a:avLst/>
@@ -16757,7 +16761,7 @@
               <a:buNone/>
             </a:pPr>
             <a:r>
-              <a:rPr lang="en-US" sz="2100" dirty="0">
+              <a:rPr lang="en-US" sz="1920" dirty="0">
                 <a:solidFill>
                   <a:srgbClr val="003A63"/>
                 </a:solidFill>
@@ -16765,16 +16769,16 @@
                 <a:ea typeface="Aptos" pitchFamily="34" charset="-122"/>
                 <a:cs typeface="Aptos" pitchFamily="34" charset="-120"/>
               </a:rPr>
-              <a:t>• Predictive analytics matters because public health agencies often must act before all.</a:t>
-            </a:r>
-            <a:endParaRPr lang="en-US" sz="2100" dirty="0"/>
-          </a:p>
-          <a:p>
-            <a:pPr indent="0" marL="0">
-              <a:buNone/>
-            </a:pPr>
-            <a:r>
-              <a:rPr lang="en-US" sz="2100" dirty="0">
+              <a:t>• Predictive analytics matters because public health agencies often must act.</a:t>
+            </a:r>
+            <a:endParaRPr lang="en-US" sz="1920" dirty="0"/>
+          </a:p>
+          <a:p>
+            <a:pPr indent="0" marL="0">
+              <a:buNone/>
+            </a:pPr>
+            <a:r>
+              <a:rPr lang="en-US" sz="1920" dirty="0">
                 <a:solidFill>
                   <a:srgbClr val="003A63"/>
                 </a:solidFill>
@@ -16782,16 +16786,16 @@
                 <a:ea typeface="Aptos" pitchFamily="34" charset="-122"/>
                 <a:cs typeface="Aptos" pitchFamily="34" charset="-120"/>
               </a:rPr>
-              <a:t>• During outbreaks, emergencies, or resource-constrained programs, agencies may need to decide.</a:t>
-            </a:r>
-            <a:endParaRPr lang="en-US" sz="2100" dirty="0"/>
-          </a:p>
-          <a:p>
-            <a:pPr indent="0" marL="0">
-              <a:buNone/>
-            </a:pPr>
-            <a:r>
-              <a:rPr lang="en-US" sz="2100" dirty="0">
+              <a:t>• During outbreaks, emergencies, or resource-constrained programs, agencies.</a:t>
+            </a:r>
+            <a:endParaRPr lang="en-US" sz="1920" dirty="0"/>
+          </a:p>
+          <a:p>
+            <a:pPr indent="0" marL="0">
+              <a:buNone/>
+            </a:pPr>
+            <a:r>
+              <a:rPr lang="en-US" sz="1920" dirty="0">
                 <a:solidFill>
                   <a:srgbClr val="003A63"/>
                 </a:solidFill>
@@ -16801,7 +16805,7 @@
               </a:rPr>
               <a:t>• Prediction can help organize uncertainty, but it cannot remove uncertainty.</a:t>
             </a:r>
-            <a:endParaRPr lang="en-US" sz="2100" dirty="0"/>
+            <a:endParaRPr lang="en-US" sz="1920" dirty="0"/>
           </a:p>
         </p:txBody>
       </p:sp>
@@ -16813,12 +16817,12 @@
         </p:nvSpPr>
         <p:spPr>
           <a:xfrm>
-            <a:off x="7635240" y="1325880"/>
-            <a:ext cx="3474720" cy="1255471"/>
+            <a:off x="7543800" y="1325880"/>
+            <a:ext cx="3611880" cy="1261872"/>
           </a:xfrm>
           <a:prstGeom prst="roundRect">
             <a:avLst>
-              <a:gd name="adj" fmla="val 8740"/>
+              <a:gd name="adj" fmla="val 8696"/>
             </a:avLst>
           </a:prstGeom>
           <a:solidFill>
@@ -16840,8 +16844,8 @@
         </p:nvSpPr>
         <p:spPr>
           <a:xfrm>
-            <a:off x="7799832" y="1472184"/>
-            <a:ext cx="3145536" cy="256032"/>
+            <a:off x="7708392" y="1453896"/>
+            <a:ext cx="3282696" cy="228600"/>
           </a:xfrm>
           <a:prstGeom prst="rect">
             <a:avLst/>
@@ -16857,7 +16861,7 @@
               <a:buNone/>
             </a:pPr>
             <a:r>
-              <a:rPr lang="en-US" sz="1300" b="1" dirty="0">
+              <a:rPr lang="en-US" sz="1220" b="1" dirty="0">
                 <a:solidFill>
                   <a:srgbClr val="0068B7"/>
                 </a:solidFill>
@@ -16867,7 +16871,7 @@
               </a:rPr>
               <a:t>Risk check</a:t>
             </a:r>
-            <a:endParaRPr lang="en-US" sz="1300" dirty="0"/>
+            <a:endParaRPr lang="en-US" sz="1220" dirty="0"/>
           </a:p>
         </p:txBody>
       </p:sp>
@@ -16879,8 +16883,8 @@
         </p:nvSpPr>
         <p:spPr>
           <a:xfrm>
-            <a:off x="7799832" y="1801368"/>
-            <a:ext cx="3145536" cy="688543"/>
+            <a:off x="7708392" y="1764792"/>
+            <a:ext cx="3282696" cy="749808"/>
           </a:xfrm>
           <a:prstGeom prst="rect">
             <a:avLst/>
@@ -16898,7 +16902,7 @@
               <a:buNone/>
             </a:pPr>
             <a:r>
-              <a:rPr lang="en-US" sz="1320" dirty="0">
+              <a:rPr lang="en-US" sz="1220" dirty="0">
                 <a:solidFill>
                   <a:srgbClr val="17364A"/>
                 </a:solidFill>
@@ -16906,9 +16910,9 @@
                 <a:ea typeface="Aptos" pitchFamily="34" charset="-122"/>
                 <a:cs typeface="Aptos" pitchFamily="34" charset="-120"/>
               </a:rPr>
-              <a:t>Predictive analytics matters because public health agencies often must act before all information is.</a:t>
-            </a:r>
-            <a:endParaRPr lang="en-US" sz="1320" dirty="0"/>
+              <a:t>Predictive analytics matters because public health agencies often must act.</a:t>
+            </a:r>
+            <a:endParaRPr lang="en-US" sz="1220" dirty="0"/>
           </a:p>
         </p:txBody>
       </p:sp>
@@ -16920,12 +16924,12 @@
         </p:nvSpPr>
         <p:spPr>
           <a:xfrm>
-            <a:off x="7635240" y="2718511"/>
-            <a:ext cx="3474720" cy="1536192"/>
+            <a:off x="7543800" y="2724912"/>
+            <a:ext cx="3611880" cy="1527048"/>
           </a:xfrm>
           <a:prstGeom prst="roundRect">
             <a:avLst>
-              <a:gd name="adj" fmla="val 7143"/>
+              <a:gd name="adj" fmla="val 7186"/>
             </a:avLst>
           </a:prstGeom>
           <a:solidFill>
@@ -16947,24 +16951,26 @@
         </p:nvSpPr>
         <p:spPr>
           <a:xfrm>
-            <a:off x="7799832" y="2846527"/>
-            <a:ext cx="3145536" cy="237744"/>
-          </a:xfrm>
-          <a:prstGeom prst="rect">
-            <a:avLst/>
-          </a:prstGeom>
-          <a:noFill/>
-          <a:ln/>
-        </p:spPr>
-        <p:txBody>
-          <a:bodyPr wrap="square" lIns="0" tIns="0" rIns="0" bIns="0" rtlCol="0" anchor="ctr"/>
-          <a:lstStyle/>
-          <a:p>
-            <a:pPr indent="0" marL="0">
-              <a:buNone/>
-            </a:pPr>
-            <a:r>
-              <a:rPr lang="en-US" sz="1250" b="1" dirty="0">
+            <a:off x="7708392" y="2852928"/>
+            <a:ext cx="3282696" cy="219456"/>
+          </a:xfrm>
+          <a:prstGeom prst="rect">
+            <a:avLst/>
+          </a:prstGeom>
+          <a:noFill/>
+          <a:ln/>
+        </p:spPr>
+        <p:txBody>
+          <a:bodyPr wrap="square" lIns="0" tIns="0" rIns="0" bIns="0" rtlCol="0" anchor="ctr">
+            <a:normAutofit/>
+          </a:bodyPr>
+          <a:lstStyle/>
+          <a:p>
+            <a:pPr indent="0" marL="0">
+              <a:buNone/>
+            </a:pPr>
+            <a:r>
+              <a:rPr lang="en-US" sz="1160" b="1" dirty="0">
                 <a:solidFill>
                   <a:srgbClr val="0068B7"/>
                 </a:solidFill>
@@ -16974,7 +16980,7 @@
               </a:rPr>
               <a:t>Risk control loop</a:t>
             </a:r>
-            <a:endParaRPr lang="en-US" sz="1250" dirty="0"/>
+            <a:endParaRPr lang="en-US" sz="1160" dirty="0"/>
           </a:p>
         </p:txBody>
       </p:sp>
@@ -16986,7 +16992,7 @@
         </p:nvSpPr>
         <p:spPr>
           <a:xfrm>
-            <a:off x="8763000" y="3399739"/>
+            <a:off x="8717280" y="3406140"/>
             <a:ext cx="164592" cy="0"/>
           </a:xfrm>
           <a:prstGeom prst="line">
@@ -17009,8 +17015,8 @@
         </p:nvSpPr>
         <p:spPr>
           <a:xfrm>
-            <a:off x="7872984" y="3248863"/>
-            <a:ext cx="890016" cy="301752"/>
+            <a:off x="7781544" y="3255264"/>
+            <a:ext cx="935736" cy="301752"/>
           </a:xfrm>
           <a:prstGeom prst="roundRect">
             <a:avLst>
@@ -17036,8 +17042,8 @@
         </p:nvSpPr>
         <p:spPr>
           <a:xfrm>
-            <a:off x="7909560" y="3322015"/>
-            <a:ext cx="816864" cy="146304"/>
+            <a:off x="7818120" y="3328416"/>
+            <a:ext cx="862584" cy="146304"/>
           </a:xfrm>
           <a:prstGeom prst="rect">
             <a:avLst/>
@@ -17077,7 +17083,7 @@
         </p:nvSpPr>
         <p:spPr>
           <a:xfrm>
-            <a:off x="9817608" y="3399739"/>
+            <a:off x="9817608" y="3406140"/>
             <a:ext cx="164592" cy="0"/>
           </a:xfrm>
           <a:prstGeom prst="line">
@@ -17100,8 +17106,8 @@
         </p:nvSpPr>
         <p:spPr>
           <a:xfrm>
-            <a:off x="8927592" y="3248863"/>
-            <a:ext cx="890016" cy="301752"/>
+            <a:off x="8881872" y="3255264"/>
+            <a:ext cx="935736" cy="301752"/>
           </a:xfrm>
           <a:prstGeom prst="roundRect">
             <a:avLst>
@@ -17127,8 +17133,8 @@
         </p:nvSpPr>
         <p:spPr>
           <a:xfrm>
-            <a:off x="8964168" y="3322015"/>
-            <a:ext cx="816864" cy="146304"/>
+            <a:off x="8918448" y="3328416"/>
+            <a:ext cx="862584" cy="146304"/>
           </a:xfrm>
           <a:prstGeom prst="rect">
             <a:avLst/>
@@ -17168,8 +17174,8 @@
         </p:nvSpPr>
         <p:spPr>
           <a:xfrm>
-            <a:off x="9982200" y="3248863"/>
-            <a:ext cx="890016" cy="301752"/>
+            <a:off x="9982200" y="3255264"/>
+            <a:ext cx="935736" cy="301752"/>
           </a:xfrm>
           <a:prstGeom prst="roundRect">
             <a:avLst>
@@ -17195,8 +17201,8 @@
         </p:nvSpPr>
         <p:spPr>
           <a:xfrm>
-            <a:off x="10018776" y="3322015"/>
-            <a:ext cx="816864" cy="146304"/>
+            <a:off x="10018776" y="3328416"/>
+            <a:ext cx="862584" cy="146304"/>
           </a:xfrm>
           <a:prstGeom prst="rect">
             <a:avLst/>
@@ -17236,8 +17242,8 @@
         </p:nvSpPr>
         <p:spPr>
           <a:xfrm>
-            <a:off x="7854696" y="3742639"/>
-            <a:ext cx="3035808" cy="365760"/>
+            <a:off x="7763256" y="3749040"/>
+            <a:ext cx="3172968" cy="356616"/>
           </a:xfrm>
           <a:prstGeom prst="rect">
             <a:avLst/>
@@ -17255,7 +17261,7 @@
               <a:buNone/>
             </a:pPr>
             <a:r>
-              <a:rPr lang="en-US" sz="1120" dirty="0">
+              <a:rPr lang="en-US" sz="1040" dirty="0">
                 <a:solidFill>
                   <a:srgbClr val="17364A"/>
                 </a:solidFill>
@@ -17263,9 +17269,9 @@
                 <a:ea typeface="Aptos" pitchFamily="34" charset="-122"/>
                 <a:cs typeface="Aptos" pitchFamily="34" charset="-120"/>
               </a:rPr>
-              <a:t>Responsible use depends on finding risks early, applying safeguards, and watching for drift or harm over time.</a:t>
-            </a:r>
-            <a:endParaRPr lang="en-US" sz="1120" dirty="0"/>
+              <a:t>Responsible use depends on finding risks early, applying safeguards,.</a:t>
+            </a:r>
+            <a:endParaRPr lang="en-US" sz="1040" dirty="0"/>
           </a:p>
         </p:txBody>
       </p:sp>
@@ -17277,12 +17283,12 @@
         </p:nvSpPr>
         <p:spPr>
           <a:xfrm>
-            <a:off x="7635240" y="4391863"/>
-            <a:ext cx="3474720" cy="1255471"/>
+            <a:off x="7543800" y="4389120"/>
+            <a:ext cx="3611880" cy="1261872"/>
           </a:xfrm>
           <a:prstGeom prst="roundRect">
             <a:avLst>
-              <a:gd name="adj" fmla="val 8740"/>
+              <a:gd name="adj" fmla="val 8696"/>
             </a:avLst>
           </a:prstGeom>
           <a:solidFill>
@@ -17304,8 +17310,8 @@
         </p:nvSpPr>
         <p:spPr>
           <a:xfrm>
-            <a:off x="7799832" y="4538167"/>
-            <a:ext cx="3145536" cy="256032"/>
+            <a:off x="7708392" y="4517136"/>
+            <a:ext cx="3282696" cy="228600"/>
           </a:xfrm>
           <a:prstGeom prst="rect">
             <a:avLst/>
@@ -17321,7 +17327,7 @@
               <a:buNone/>
             </a:pPr>
             <a:r>
-              <a:rPr lang="en-US" sz="1300" b="1" dirty="0">
+              <a:rPr lang="en-US" sz="1220" b="1" dirty="0">
                 <a:solidFill>
                   <a:srgbClr val="0068B7"/>
                 </a:solidFill>
@@ -17331,7 +17337,7 @@
               </a:rPr>
               <a:t>Safeguard to plan</a:t>
             </a:r>
-            <a:endParaRPr lang="en-US" sz="1300" dirty="0"/>
+            <a:endParaRPr lang="en-US" sz="1220" dirty="0"/>
           </a:p>
         </p:txBody>
       </p:sp>
@@ -17343,8 +17349,8 @@
         </p:nvSpPr>
         <p:spPr>
           <a:xfrm>
-            <a:off x="7799832" y="4867351"/>
-            <a:ext cx="3145536" cy="688543"/>
+            <a:off x="7708392" y="4828032"/>
+            <a:ext cx="3282696" cy="749808"/>
           </a:xfrm>
           <a:prstGeom prst="rect">
             <a:avLst/>
@@ -17362,7 +17368,7 @@
               <a:buNone/>
             </a:pPr>
             <a:r>
-              <a:rPr lang="en-US" sz="1320" dirty="0">
+              <a:rPr lang="en-US" sz="1220" dirty="0">
                 <a:solidFill>
                   <a:srgbClr val="17364A"/>
                 </a:solidFill>
@@ -17370,9 +17376,9 @@
                 <a:ea typeface="Aptos" pitchFamily="34" charset="-122"/>
                 <a:cs typeface="Aptos" pitchFamily="34" charset="-120"/>
               </a:rPr>
-              <a:t>Identify what could go wrong, who could be affected, what safeguards are needed, and what evidence should be reviewed before use.</a:t>
-            </a:r>
-            <a:endParaRPr lang="en-US" sz="1320" dirty="0"/>
+              <a:t>Identify what could go wrong, who could be affected, what safeguards are needed,.</a:t>
+            </a:r>
+            <a:endParaRPr lang="en-US" sz="1220" dirty="0"/>
           </a:p>
         </p:txBody>
       </p:sp>
@@ -17663,8 +17669,8 @@
         </p:nvSpPr>
         <p:spPr>
           <a:xfrm>
-            <a:off x="868680" y="1508760"/>
-            <a:ext cx="6309360" cy="4160520"/>
+            <a:off x="822960" y="1463040"/>
+            <a:ext cx="6565392" cy="4343400"/>
           </a:xfrm>
           <a:prstGeom prst="rect">
             <a:avLst/>
@@ -17682,7 +17688,7 @@
               <a:buNone/>
             </a:pPr>
             <a:r>
-              <a:rPr lang="en-US" sz="2100" dirty="0">
+              <a:rPr lang="en-US" sz="1920" dirty="0">
                 <a:solidFill>
                   <a:srgbClr val="003A63"/>
                 </a:solidFill>
@@ -17690,16 +17696,16 @@
                 <a:ea typeface="Aptos" pitchFamily="34" charset="-122"/>
                 <a:cs typeface="Aptos" pitchFamily="34" charset="-120"/>
               </a:rPr>
-              <a:t>• A local health department may want to predict which neighborhoods are at increased risk of low.</a:t>
-            </a:r>
-            <a:endParaRPr lang="en-US" sz="2100" dirty="0"/>
-          </a:p>
-          <a:p>
-            <a:pPr indent="0" marL="0">
-              <a:buNone/>
-            </a:pPr>
-            <a:r>
-              <a:rPr lang="en-US" sz="2100" dirty="0">
+              <a:t>• A local health department may want to predict which neighborhoods are at.</a:t>
+            </a:r>
+            <a:endParaRPr lang="en-US" sz="1920" dirty="0"/>
+          </a:p>
+          <a:p>
+            <a:pPr indent="0" marL="0">
+              <a:buNone/>
+            </a:pPr>
+            <a:r>
+              <a:rPr lang="en-US" sz="1920" dirty="0">
                 <a:solidFill>
                   <a:srgbClr val="003A63"/>
                 </a:solidFill>
@@ -17707,16 +17713,16 @@
                 <a:ea typeface="Aptos" pitchFamily="34" charset="-122"/>
                 <a:cs typeface="Aptos" pitchFamily="34" charset="-120"/>
               </a:rPr>
-              <a:t>• The model could use prior immunization data, school enrollment patterns, appointment.</a:t>
-            </a:r>
-            <a:endParaRPr lang="en-US" sz="2100" dirty="0"/>
-          </a:p>
-          <a:p>
-            <a:pPr indent="0" marL="0">
-              <a:buNone/>
-            </a:pPr>
-            <a:r>
-              <a:rPr lang="en-US" sz="2100" dirty="0">
+              <a:t>• The model could use prior immunization data, school enrollment patterns,.</a:t>
+            </a:r>
+            <a:endParaRPr lang="en-US" sz="1920" dirty="0"/>
+          </a:p>
+          <a:p>
+            <a:pPr indent="0" marL="0">
+              <a:buNone/>
+            </a:pPr>
+            <a:r>
+              <a:rPr lang="en-US" sz="1920" dirty="0">
                 <a:solidFill>
                   <a:srgbClr val="003A63"/>
                 </a:solidFill>
@@ -17726,7 +17732,7 @@
               </a:rPr>
               <a:t>• The output might help prioritize community outreach and mobile clinics.</a:t>
             </a:r>
-            <a:endParaRPr lang="en-US" sz="2100" dirty="0"/>
+            <a:endParaRPr lang="en-US" sz="1920" dirty="0"/>
           </a:p>
         </p:txBody>
       </p:sp>
@@ -17738,12 +17744,12 @@
         </p:nvSpPr>
         <p:spPr>
           <a:xfrm>
-            <a:off x="7635240" y="1325880"/>
-            <a:ext cx="3474720" cy="1255471"/>
+            <a:off x="7543800" y="1325880"/>
+            <a:ext cx="3611880" cy="1261872"/>
           </a:xfrm>
           <a:prstGeom prst="roundRect">
             <a:avLst>
-              <a:gd name="adj" fmla="val 8740"/>
+              <a:gd name="adj" fmla="val 8696"/>
             </a:avLst>
           </a:prstGeom>
           <a:solidFill>
@@ -17765,8 +17771,8 @@
         </p:nvSpPr>
         <p:spPr>
           <a:xfrm>
-            <a:off x="7799832" y="1472184"/>
-            <a:ext cx="3145536" cy="256032"/>
+            <a:off x="7708392" y="1453896"/>
+            <a:ext cx="3282696" cy="228600"/>
           </a:xfrm>
           <a:prstGeom prst="rect">
             <a:avLst/>
@@ -17782,7 +17788,7 @@
               <a:buNone/>
             </a:pPr>
             <a:r>
-              <a:rPr lang="en-US" sz="1300" b="1" dirty="0">
+              <a:rPr lang="en-US" sz="1220" b="1" dirty="0">
                 <a:solidFill>
                   <a:srgbClr val="0068B7"/>
                 </a:solidFill>
@@ -17792,7 +17798,7 @@
               </a:rPr>
               <a:t>Risk check</a:t>
             </a:r>
-            <a:endParaRPr lang="en-US" sz="1300" dirty="0"/>
+            <a:endParaRPr lang="en-US" sz="1220" dirty="0"/>
           </a:p>
         </p:txBody>
       </p:sp>
@@ -17804,8 +17810,8 @@
         </p:nvSpPr>
         <p:spPr>
           <a:xfrm>
-            <a:off x="7799832" y="1801368"/>
-            <a:ext cx="3145536" cy="688543"/>
+            <a:off x="7708392" y="1764792"/>
+            <a:ext cx="3282696" cy="749808"/>
           </a:xfrm>
           <a:prstGeom prst="rect">
             <a:avLst/>
@@ -17823,7 +17829,7 @@
               <a:buNone/>
             </a:pPr>
             <a:r>
-              <a:rPr lang="en-US" sz="1320" dirty="0">
+              <a:rPr lang="en-US" sz="1220" dirty="0">
                 <a:solidFill>
                   <a:srgbClr val="17364A"/>
                 </a:solidFill>
@@ -17831,9 +17837,9 @@
                 <a:ea typeface="Aptos" pitchFamily="34" charset="-122"/>
                 <a:cs typeface="Aptos" pitchFamily="34" charset="-120"/>
               </a:rPr>
-              <a:t>A local health department may want to predict which neighborhoods are at increased risk of low.</a:t>
-            </a:r>
-            <a:endParaRPr lang="en-US" sz="1320" dirty="0"/>
+              <a:t>A local health department may want to predict which neighborhoods are at.</a:t>
+            </a:r>
+            <a:endParaRPr lang="en-US" sz="1220" dirty="0"/>
           </a:p>
         </p:txBody>
       </p:sp>
@@ -17845,12 +17851,12 @@
         </p:nvSpPr>
         <p:spPr>
           <a:xfrm>
-            <a:off x="7635240" y="2718511"/>
-            <a:ext cx="3474720" cy="1536192"/>
+            <a:off x="7543800" y="2724912"/>
+            <a:ext cx="3611880" cy="1527048"/>
           </a:xfrm>
           <a:prstGeom prst="roundRect">
             <a:avLst>
-              <a:gd name="adj" fmla="val 7143"/>
+              <a:gd name="adj" fmla="val 7186"/>
             </a:avLst>
           </a:prstGeom>
           <a:solidFill>
@@ -17872,8 +17878,8 @@
         </p:nvSpPr>
         <p:spPr>
           <a:xfrm>
-            <a:off x="7799832" y="2864815"/>
-            <a:ext cx="3145536" cy="256032"/>
+            <a:off x="7708392" y="2852928"/>
+            <a:ext cx="3282696" cy="228600"/>
           </a:xfrm>
           <a:prstGeom prst="rect">
             <a:avLst/>
@@ -17889,7 +17895,7 @@
               <a:buNone/>
             </a:pPr>
             <a:r>
-              <a:rPr lang="en-US" sz="1300" b="1" dirty="0">
+              <a:rPr lang="en-US" sz="1220" b="1" dirty="0">
                 <a:solidFill>
                   <a:srgbClr val="0068B7"/>
                 </a:solidFill>
@@ -17899,7 +17905,7 @@
               </a:rPr>
               <a:t>Concept checkpoints</a:t>
             </a:r>
-            <a:endParaRPr lang="en-US" sz="1300" dirty="0"/>
+            <a:endParaRPr lang="en-US" sz="1220" dirty="0"/>
           </a:p>
         </p:txBody>
       </p:sp>
@@ -17911,8 +17917,8 @@
         </p:nvSpPr>
         <p:spPr>
           <a:xfrm>
-            <a:off x="7818120" y="3230575"/>
-            <a:ext cx="3090672" cy="877824"/>
+            <a:off x="7726680" y="3182112"/>
+            <a:ext cx="3227832" cy="960120"/>
           </a:xfrm>
           <a:prstGeom prst="rect">
             <a:avLst/>
@@ -17930,7 +17936,7 @@
               <a:buNone/>
             </a:pPr>
             <a:r>
-              <a:rPr lang="en-US" sz="1220" dirty="0">
+              <a:rPr lang="en-US" sz="1140" dirty="0">
                 <a:solidFill>
                   <a:srgbClr val="17364A"/>
                 </a:solidFill>
@@ -17938,16 +17944,16 @@
                 <a:ea typeface="Aptos" pitchFamily="34" charset="-122"/>
                 <a:cs typeface="Aptos" pitchFamily="34" charset="-120"/>
               </a:rPr>
-              <a:t>A local health department may want to predict which neighborhoods.</a:t>
-            </a:r>
-            <a:endParaRPr lang="en-US" sz="1220" dirty="0"/>
-          </a:p>
-          <a:p>
-            <a:pPr indent="0" marL="0">
-              <a:buNone/>
-            </a:pPr>
-            <a:r>
-              <a:rPr lang="en-US" sz="1220" dirty="0">
+              <a:t>A local health department may want to predict.</a:t>
+            </a:r>
+            <a:endParaRPr lang="en-US" sz="1140" dirty="0"/>
+          </a:p>
+          <a:p>
+            <a:pPr indent="0" marL="0">
+              <a:buNone/>
+            </a:pPr>
+            <a:r>
+              <a:rPr lang="en-US" sz="1140" dirty="0">
                 <a:solidFill>
                   <a:srgbClr val="17364A"/>
                 </a:solidFill>
@@ -17955,16 +17961,16 @@
                 <a:ea typeface="Aptos" pitchFamily="34" charset="-122"/>
                 <a:cs typeface="Aptos" pitchFamily="34" charset="-120"/>
               </a:rPr>
-              <a:t>The model could use prior immunization data, school enrollment.</a:t>
-            </a:r>
-            <a:endParaRPr lang="en-US" sz="1220" dirty="0"/>
-          </a:p>
-          <a:p>
-            <a:pPr indent="0" marL="0">
-              <a:buNone/>
-            </a:pPr>
-            <a:r>
-              <a:rPr lang="en-US" sz="1220" dirty="0">
+              <a:t>The model could use prior immunization data,.</a:t>
+            </a:r>
+            <a:endParaRPr lang="en-US" sz="1140" dirty="0"/>
+          </a:p>
+          <a:p>
+            <a:pPr indent="0" marL="0">
+              <a:buNone/>
+            </a:pPr>
+            <a:r>
+              <a:rPr lang="en-US" sz="1140" dirty="0">
                 <a:solidFill>
                   <a:srgbClr val="17364A"/>
                 </a:solidFill>
@@ -17972,9 +17978,9 @@
                 <a:ea typeface="Aptos" pitchFamily="34" charset="-122"/>
                 <a:cs typeface="Aptos" pitchFamily="34" charset="-120"/>
               </a:rPr>
-              <a:t>This use can support equity if it directs resources toward.</a:t>
-            </a:r>
-            <a:endParaRPr lang="en-US" sz="1220" dirty="0"/>
+              <a:t>This use can support equity if it directs.</a:t>
+            </a:r>
+            <a:endParaRPr lang="en-US" sz="1140" dirty="0"/>
           </a:p>
         </p:txBody>
       </p:sp>
@@ -17986,12 +17992,12 @@
         </p:nvSpPr>
         <p:spPr>
           <a:xfrm>
-            <a:off x="7635240" y="4391863"/>
-            <a:ext cx="3474720" cy="1255471"/>
+            <a:off x="7543800" y="4389120"/>
+            <a:ext cx="3611880" cy="1261872"/>
           </a:xfrm>
           <a:prstGeom prst="roundRect">
             <a:avLst>
-              <a:gd name="adj" fmla="val 8740"/>
+              <a:gd name="adj" fmla="val 8696"/>
             </a:avLst>
           </a:prstGeom>
           <a:solidFill>
@@ -18013,8 +18019,8 @@
         </p:nvSpPr>
         <p:spPr>
           <a:xfrm>
-            <a:off x="7799832" y="4538167"/>
-            <a:ext cx="3145536" cy="256032"/>
+            <a:off x="7708392" y="4517136"/>
+            <a:ext cx="3282696" cy="228600"/>
           </a:xfrm>
           <a:prstGeom prst="rect">
             <a:avLst/>
@@ -18030,7 +18036,7 @@
               <a:buNone/>
             </a:pPr>
             <a:r>
-              <a:rPr lang="en-US" sz="1300" b="1" dirty="0">
+              <a:rPr lang="en-US" sz="1220" b="1" dirty="0">
                 <a:solidFill>
                   <a:srgbClr val="0068B7"/>
                 </a:solidFill>
@@ -18040,7 +18046,7 @@
               </a:rPr>
               <a:t>Safeguard to plan</a:t>
             </a:r>
-            <a:endParaRPr lang="en-US" sz="1300" dirty="0"/>
+            <a:endParaRPr lang="en-US" sz="1220" dirty="0"/>
           </a:p>
         </p:txBody>
       </p:sp>
@@ -18052,8 +18058,8 @@
         </p:nvSpPr>
         <p:spPr>
           <a:xfrm>
-            <a:off x="7799832" y="4867351"/>
-            <a:ext cx="3145536" cy="688543"/>
+            <a:off x="7708392" y="4828032"/>
+            <a:ext cx="3282696" cy="749808"/>
           </a:xfrm>
           <a:prstGeom prst="rect">
             <a:avLst/>
@@ -18071,7 +18077,7 @@
               <a:buNone/>
             </a:pPr>
             <a:r>
-              <a:rPr lang="en-US" sz="1320" dirty="0">
+              <a:rPr lang="en-US" sz="1220" dirty="0">
                 <a:solidFill>
                   <a:srgbClr val="17364A"/>
                 </a:solidFill>
@@ -18079,9 +18085,9 @@
                 <a:ea typeface="Aptos" pitchFamily="34" charset="-122"/>
                 <a:cs typeface="Aptos" pitchFamily="34" charset="-120"/>
               </a:rPr>
-              <a:t>Identify what could go wrong, who could be affected, what safeguards are needed, and what evidence should be reviewed before use.</a:t>
-            </a:r>
-            <a:endParaRPr lang="en-US" sz="1320" dirty="0"/>
+              <a:t>Identify what could go wrong, who could be affected, what safeguards are needed,.</a:t>
+            </a:r>
+            <a:endParaRPr lang="en-US" sz="1220" dirty="0"/>
           </a:p>
         </p:txBody>
       </p:sp>

--- a/downloads/presentations/modules/anl-220.pptx
+++ b/downloads/presentations/modules/anl-220.pptx
@@ -11870,7 +11870,7 @@
                 <a:ea typeface="Aptos" pitchFamily="34" charset="-122"/>
                 <a:cs typeface="Aptos" pitchFamily="34" charset="-120"/>
               </a:rPr>
-              <a:t>• 1. What is calibration?</a:t>
+              <a:t>1. What is calibration?</a:t>
             </a:r>
             <a:endParaRPr lang="en-US" sz="1920" dirty="0"/>
           </a:p>
@@ -11887,7 +11887,7 @@
                 <a:ea typeface="Aptos" pitchFamily="34" charset="-122"/>
                 <a:cs typeface="Aptos" pitchFamily="34" charset="-120"/>
               </a:rPr>
-              <a:t>• 2. Why should thresholds be reviewed by public health staff?</a:t>
+              <a:t>2. Why should thresholds be reviewed by public health staff?</a:t>
             </a:r>
             <a:endParaRPr lang="en-US" sz="1920" dirty="0"/>
           </a:p>
@@ -11904,7 +11904,7 @@
                 <a:ea typeface="Aptos" pitchFamily="34" charset="-122"/>
                 <a:cs typeface="Aptos" pitchFamily="34" charset="-120"/>
               </a:rPr>
-              <a:t>• 3. Which use of a risk score is most concerning without additional safeguards?</a:t>
+              <a:t>3. Which use of a risk score is most concerning without additional safeguards?</a:t>
             </a:r>
             <a:endParaRPr lang="en-US" sz="1920" dirty="0"/>
           </a:p>
@@ -12011,7 +12011,7 @@
                 <a:ea typeface="Aptos" pitchFamily="34" charset="-122"/>
                 <a:cs typeface="Aptos" pitchFamily="34" charset="-120"/>
               </a:rPr>
-              <a:t>1. What is calibration?</a:t>
+              <a:t>What is calibration?</a:t>
             </a:r>
             <a:endParaRPr lang="en-US" sz="1220" dirty="0"/>
           </a:p>
@@ -12118,41 +12118,7 @@
                 <a:ea typeface="Aptos" pitchFamily="34" charset="-122"/>
                 <a:cs typeface="Aptos" pitchFamily="34" charset="-120"/>
               </a:rPr>
-              <a:t>1.</a:t>
-            </a:r>
-            <a:endParaRPr lang="en-US" sz="1140" dirty="0"/>
-          </a:p>
-          <a:p>
-            <a:pPr indent="0" marL="0">
-              <a:buNone/>
-            </a:pPr>
-            <a:r>
-              <a:rPr lang="en-US" sz="1140" dirty="0">
-                <a:solidFill>
-                  <a:srgbClr val="17364A"/>
-                </a:solidFill>
-                <a:latin typeface="Aptos" pitchFamily="34" charset="0"/>
-                <a:ea typeface="Aptos" pitchFamily="34" charset="-122"/>
-                <a:cs typeface="Aptos" pitchFamily="34" charset="-120"/>
-              </a:rPr>
               <a:t>What is calibration?</a:t>
-            </a:r>
-            <a:endParaRPr lang="en-US" sz="1140" dirty="0"/>
-          </a:p>
-          <a:p>
-            <a:pPr indent="0" marL="0">
-              <a:buNone/>
-            </a:pPr>
-            <a:r>
-              <a:rPr lang="en-US" sz="1140" dirty="0">
-                <a:solidFill>
-                  <a:srgbClr val="17364A"/>
-                </a:solidFill>
-                <a:latin typeface="Aptos" pitchFamily="34" charset="0"/>
-                <a:ea typeface="Aptos" pitchFamily="34" charset="-122"/>
-                <a:cs typeface="Aptos" pitchFamily="34" charset="-120"/>
-              </a:rPr>
-              <a:t>2.</a:t>
             </a:r>
             <a:endParaRPr lang="en-US" sz="1140" dirty="0"/>
           </a:p>
